--- a/hec-pt/pptx/portrait.pptx
+++ b/hec-pt/pptx/portrait.pptx
@@ -1177,9 +1177,124 @@
           </a:prstGeom>
         </p:spPr>
       </p:pic>
+      <p:sp>
+        <p:nvSpPr>
+          <p:cNvPr id="8" name="p1p-proj"/>
+          <p:cNvSpPr/>
+          <p:nvPr/>
+        </p:nvSpPr>
+        <p:spPr>
+          <a:xfrm>
+            <a:off x="518160" y="2102739"/>
+            <a:ext cx="6522720" cy="1747076"/>
+          </a:xfrm>
+          <a:prstGeom prst="roundRect">
+            <a:avLst>
+              <a:gd name="adj" fmla="val 7327"/>
+            </a:avLst>
+          </a:prstGeom>
+          <a:solidFill>
+            <a:srgbClr val="FFFFFF"/>
+          </a:solidFill>
+          <a:ln w="12192">
+            <a:solidFill>
+              <a:srgbClr val="D8E0EB"/>
+            </a:solidFill>
+            <a:prstDash val="solid"/>
+          </a:ln>
+        </p:spPr>
+      </p:sp>
+      <p:sp>
+        <p:nvSpPr>
+          <p:cNvPr id="9" name="p1p-tag tech"/>
+          <p:cNvSpPr/>
+          <p:nvPr/>
+        </p:nvSpPr>
+        <p:spPr>
+          <a:xfrm>
+            <a:off x="1499807" y="2230755"/>
+            <a:ext cx="1023176" cy="207264"/>
+          </a:xfrm>
+          <a:prstGeom prst="roundRect">
+            <a:avLst>
+              <a:gd name="adj" fmla="val 50000"/>
+            </a:avLst>
+          </a:prstGeom>
+          <a:solidFill>
+            <a:srgbClr val="EEF4FC"/>
+          </a:solidFill>
+          <a:ln/>
+        </p:spPr>
+      </p:sp>
+      <p:sp>
+        <p:nvSpPr>
+          <p:cNvPr id="10" name="p1p-tag people"/>
+          <p:cNvSpPr/>
+          <p:nvPr/>
+        </p:nvSpPr>
+        <p:spPr>
+          <a:xfrm>
+            <a:off x="2583942" y="2230755"/>
+            <a:ext cx="468916" cy="207264"/>
+          </a:xfrm>
+          <a:prstGeom prst="roundRect">
+            <a:avLst>
+              <a:gd name="adj" fmla="val 50000"/>
+            </a:avLst>
+          </a:prstGeom>
+          <a:solidFill>
+            <a:srgbClr val="E5F6EC"/>
+          </a:solidFill>
+          <a:ln/>
+        </p:spPr>
+      </p:sp>
+      <p:sp>
+        <p:nvSpPr>
+          <p:cNvPr id="11" name="p1p-tag people"/>
+          <p:cNvSpPr/>
+          <p:nvPr/>
+        </p:nvSpPr>
+        <p:spPr>
+          <a:xfrm>
+            <a:off x="3113818" y="2230755"/>
+            <a:ext cx="373856" cy="207264"/>
+          </a:xfrm>
+          <a:prstGeom prst="roundRect">
+            <a:avLst>
+              <a:gd name="adj" fmla="val 50000"/>
+            </a:avLst>
+          </a:prstGeom>
+          <a:solidFill>
+            <a:srgbClr val="E5F6EC"/>
+          </a:solidFill>
+          <a:ln/>
+        </p:spPr>
+      </p:sp>
+      <p:sp>
+        <p:nvSpPr>
+          <p:cNvPr id="12" name="p1p-out"/>
+          <p:cNvSpPr/>
+          <p:nvPr/>
+        </p:nvSpPr>
+        <p:spPr>
+          <a:xfrm>
+            <a:off x="5120640" y="2218563"/>
+            <a:ext cx="1804416" cy="975360"/>
+          </a:xfrm>
+          <a:prstGeom prst="roundRect">
+            <a:avLst>
+              <a:gd name="adj" fmla="val 10000"/>
+            </a:avLst>
+          </a:prstGeom>
+          <a:solidFill>
+            <a:srgbClr val="FFF4DB"/>
+          </a:solidFill>
+          <a:ln/>
+        </p:spPr>
+      </p:sp>
       <p:pic>
         <p:nvPicPr>
-          <p:cNvPr id="8" name="p1p-path" descr="p1p-path">    </p:cNvPr>
+          <p:cNvPr id="13" name="svg" descr="svg">    </p:cNvPr>
           <p:cNvPicPr>
             <a:picLocks noChangeAspect="1"/>
           </p:cNvPicPr>
@@ -1193,8 +1308,8 @@
         </p:blipFill>
         <p:spPr>
           <a:xfrm>
-            <a:off x="1136904" y="2242947"/>
-            <a:ext cx="22352" cy="6961632"/>
+            <a:off x="5242560" y="2333816"/>
+            <a:ext cx="158496" cy="158496"/>
           </a:xfrm>
           <a:prstGeom prst="rect">
             <a:avLst/>
@@ -1203,34 +1318,27 @@
       </p:pic>
       <p:sp>
         <p:nvSpPr>
-          <p:cNvPr id="9" name="span"/>
+          <p:cNvPr id="14" name="p1p-proj-bot"/>
           <p:cNvSpPr/>
           <p:nvPr/>
         </p:nvSpPr>
         <p:spPr>
           <a:xfrm>
-            <a:off x="707041" y="2108835"/>
-            <a:ext cx="878015" cy="268224"/>
-          </a:xfrm>
-          <a:prstGeom prst="roundRect">
-            <a:avLst>
-              <a:gd name="adj" fmla="val 50000"/>
-            </a:avLst>
-          </a:prstGeom>
-          <a:solidFill>
-            <a:srgbClr val="FFFFFF"/>
-          </a:solidFill>
-          <a:ln w="12192">
-            <a:solidFill>
-              <a:srgbClr val="C3CEDD"/>
-            </a:solidFill>
-            <a:prstDash val="solid"/>
-          </a:ln>
+            <a:off x="524256" y="3303651"/>
+            <a:ext cx="6510528" cy="540068"/>
+          </a:xfrm>
+          <a:prstGeom prst="rect">
+            <a:avLst/>
+          </a:prstGeom>
+          <a:solidFill>
+            <a:srgbClr val="EEF4FC"/>
+          </a:solidFill>
+          <a:ln/>
         </p:spPr>
       </p:sp>
       <p:pic>
         <p:nvPicPr>
-          <p:cNvPr id="10" name="svg" descr="svg">    </p:cNvPr>
+          <p:cNvPr id="15" name="ring p1p-fr" descr="ring p1p-fr">    </p:cNvPr>
           <p:cNvPicPr>
             <a:picLocks noChangeAspect="1"/>
           </p:cNvPicPr>
@@ -1244,85 +1352,17 @@
         </p:blipFill>
         <p:spPr>
           <a:xfrm>
-            <a:off x="824897" y="2196211"/>
-            <a:ext cx="93472" cy="93472"/>
+            <a:off x="731520" y="3407061"/>
+            <a:ext cx="316992" cy="316992"/>
           </a:xfrm>
           <a:prstGeom prst="rect">
             <a:avLst/>
           </a:prstGeom>
         </p:spPr>
       </p:pic>
-      <p:sp>
-        <p:nvSpPr>
-          <p:cNvPr id="11" name="chip tech"/>
-          <p:cNvSpPr/>
-          <p:nvPr/>
-        </p:nvSpPr>
-        <p:spPr>
-          <a:xfrm>
-            <a:off x="3158585" y="2102739"/>
-            <a:ext cx="1238250" cy="280416"/>
-          </a:xfrm>
-          <a:prstGeom prst="roundRect">
-            <a:avLst>
-              <a:gd name="adj" fmla="val 50000"/>
-            </a:avLst>
-          </a:prstGeom>
-          <a:solidFill>
-            <a:srgbClr val="EEF4FC"/>
-          </a:solidFill>
-          <a:ln/>
-        </p:spPr>
-      </p:sp>
-      <p:sp>
-        <p:nvSpPr>
-          <p:cNvPr id="12" name="chip people"/>
-          <p:cNvSpPr/>
-          <p:nvPr/>
-        </p:nvSpPr>
-        <p:spPr>
-          <a:xfrm>
-            <a:off x="4469987" y="2102739"/>
-            <a:ext cx="836200" cy="280416"/>
-          </a:xfrm>
-          <a:prstGeom prst="roundRect">
-            <a:avLst>
-              <a:gd name="adj" fmla="val 50000"/>
-            </a:avLst>
-          </a:prstGeom>
-          <a:solidFill>
-            <a:srgbClr val="E5F6EC"/>
-          </a:solidFill>
-          <a:ln/>
-        </p:spPr>
-      </p:sp>
-      <p:sp>
-        <p:nvSpPr>
-          <p:cNvPr id="13" name="chip ghost"/>
-          <p:cNvSpPr/>
-          <p:nvPr/>
-        </p:nvSpPr>
-        <p:spPr>
-          <a:xfrm>
-            <a:off x="5385435" y="2108835"/>
-            <a:ext cx="847535" cy="268224"/>
-          </a:xfrm>
-          <a:prstGeom prst="roundRect">
-            <a:avLst>
-              <a:gd name="adj" fmla="val 50000"/>
-            </a:avLst>
-          </a:prstGeom>
-          <a:ln w="12192">
-            <a:solidFill>
-              <a:srgbClr val="D8E0EB"/>
-            </a:solidFill>
-            <a:prstDash val="solid"/>
-          </a:ln>
-        </p:spPr>
-      </p:sp>
       <p:pic>
         <p:nvPicPr>
-          <p:cNvPr id="14" name="svg" descr="svg">    </p:cNvPr>
+          <p:cNvPr id="16" name="svg" descr="svg">    </p:cNvPr>
           <p:cNvPicPr>
             <a:picLocks noChangeAspect="1"/>
           </p:cNvPicPr>
@@ -1336,37 +1376,17 @@
         </p:blipFill>
         <p:spPr>
           <a:xfrm>
-            <a:off x="512064" y="2591213"/>
-            <a:ext cx="1267968" cy="1267968"/>
+            <a:off x="827024" y="3502565"/>
+            <a:ext cx="125984" cy="138176"/>
           </a:xfrm>
           <a:prstGeom prst="rect">
             <a:avLst/>
           </a:prstGeom>
         </p:spPr>
       </p:pic>
-      <p:sp>
-        <p:nvSpPr>
-          <p:cNvPr id="15" name="s"/>
-          <p:cNvSpPr/>
-          <p:nvPr/>
-        </p:nvSpPr>
-        <p:spPr>
-          <a:xfrm>
-            <a:off x="2252186" y="2817495"/>
-            <a:ext cx="134112" cy="12192"/>
-          </a:xfrm>
-          <a:prstGeom prst="rect">
-            <a:avLst/>
-          </a:prstGeom>
-          <a:solidFill>
-            <a:srgbClr val="C3CEDD"/>
-          </a:solidFill>
-          <a:ln/>
-        </p:spPr>
-      </p:sp>
       <p:pic>
         <p:nvPicPr>
-          <p:cNvPr id="16" name="li" descr="li">    </p:cNvPr>
+          <p:cNvPr id="17" name="p1p-fc" descr="p1p-fc">    </p:cNvPr>
           <p:cNvPicPr>
             <a:picLocks noChangeAspect="1"/>
           </p:cNvPicPr>
@@ -1380,8 +1400,8 @@
         </p:blipFill>
         <p:spPr>
           <a:xfrm>
-            <a:off x="2023872" y="3273520"/>
-            <a:ext cx="2474976" cy="426720"/>
+            <a:off x="1662525" y="3523901"/>
+            <a:ext cx="1349248" cy="85344"/>
           </a:xfrm>
           <a:prstGeom prst="rect">
             <a:avLst/>
@@ -1390,7 +1410,7 @@
       </p:pic>
       <p:pic>
         <p:nvPicPr>
-          <p:cNvPr id="17" name="li" descr="li">    </p:cNvPr>
+          <p:cNvPr id="18" name="ring p1p-fr" descr="ring p1p-fr">    </p:cNvPr>
           <p:cNvPicPr>
             <a:picLocks noChangeAspect="1"/>
           </p:cNvPicPr>
@@ -1404,8 +1424,8 @@
         </p:blipFill>
         <p:spPr>
           <a:xfrm>
-            <a:off x="4572000" y="3273520"/>
-            <a:ext cx="2474976" cy="426720"/>
+            <a:off x="3083846" y="3407061"/>
+            <a:ext cx="316992" cy="316992"/>
           </a:xfrm>
           <a:prstGeom prst="rect">
             <a:avLst/>
@@ -1414,7 +1434,7 @@
       </p:pic>
       <p:pic>
         <p:nvPicPr>
-          <p:cNvPr id="18" name="i" descr="i">    </p:cNvPr>
+          <p:cNvPr id="19" name="svg" descr="svg">    </p:cNvPr>
           <p:cNvPicPr>
             <a:picLocks noChangeAspect="1"/>
           </p:cNvPicPr>
@@ -1428,8 +1448,8 @@
         </p:blipFill>
         <p:spPr>
           <a:xfrm>
-            <a:off x="1091184" y="4004247"/>
-            <a:ext cx="109728" cy="109728"/>
+            <a:off x="3175286" y="3498501"/>
+            <a:ext cx="134112" cy="134112"/>
           </a:xfrm>
           <a:prstGeom prst="rect">
             <a:avLst/>
@@ -1438,7 +1458,7 @@
       </p:pic>
       <p:pic>
         <p:nvPicPr>
-          <p:cNvPr id="19" name="svg" descr="svg">    </p:cNvPr>
+          <p:cNvPr id="20" name="p1p-fc" descr="p1p-fc">    </p:cNvPr>
           <p:cNvPicPr>
             <a:picLocks noChangeAspect="1"/>
           </p:cNvPicPr>
@@ -1452,37 +1472,17 @@
         </p:blipFill>
         <p:spPr>
           <a:xfrm>
-            <a:off x="512064" y="4254976"/>
-            <a:ext cx="1267968" cy="1267968"/>
+            <a:off x="4125754" y="3523901"/>
+            <a:ext cx="1343152" cy="85344"/>
           </a:xfrm>
           <a:prstGeom prst="rect">
             <a:avLst/>
           </a:prstGeom>
         </p:spPr>
       </p:pic>
-      <p:sp>
-        <p:nvSpPr>
-          <p:cNvPr id="20" name="s"/>
-          <p:cNvSpPr/>
-          <p:nvPr/>
-        </p:nvSpPr>
-        <p:spPr>
-          <a:xfrm>
-            <a:off x="2252186" y="4485323"/>
-            <a:ext cx="134112" cy="12192"/>
-          </a:xfrm>
-          <a:prstGeom prst="rect">
-            <a:avLst/>
-          </a:prstGeom>
-          <a:solidFill>
-            <a:srgbClr val="C3CEDD"/>
-          </a:solidFill>
-          <a:ln/>
-        </p:spPr>
-      </p:sp>
       <p:pic>
         <p:nvPicPr>
-          <p:cNvPr id="21" name="li" descr="li">    </p:cNvPr>
+          <p:cNvPr id="21" name="ring solid p1p-fr" descr="ring solid p1p-fr">    </p:cNvPr>
           <p:cNvPicPr>
             <a:picLocks noChangeAspect="1"/>
           </p:cNvPicPr>
@@ -1496,8 +1496,8 @@
         </p:blipFill>
         <p:spPr>
           <a:xfrm>
-            <a:off x="2023872" y="4943380"/>
-            <a:ext cx="2474976" cy="426720"/>
+            <a:off x="5540978" y="3407061"/>
+            <a:ext cx="316992" cy="316992"/>
           </a:xfrm>
           <a:prstGeom prst="rect">
             <a:avLst/>
@@ -1506,7 +1506,7 @@
       </p:pic>
       <p:pic>
         <p:nvPicPr>
-          <p:cNvPr id="22" name="li" descr="li">    </p:cNvPr>
+          <p:cNvPr id="22" name="svg" descr="svg">    </p:cNvPr>
           <p:cNvPicPr>
             <a:picLocks noChangeAspect="1"/>
           </p:cNvPicPr>
@@ -1520,8 +1520,8 @@
         </p:blipFill>
         <p:spPr>
           <a:xfrm>
-            <a:off x="4572000" y="4943380"/>
-            <a:ext cx="2474976" cy="426720"/>
+            <a:off x="5642578" y="3508661"/>
+            <a:ext cx="113792" cy="113792"/>
           </a:xfrm>
           <a:prstGeom prst="rect">
             <a:avLst/>
@@ -1530,7 +1530,7 @@
       </p:pic>
       <p:pic>
         <p:nvPicPr>
-          <p:cNvPr id="23" name="i" descr="i">    </p:cNvPr>
+          <p:cNvPr id="23" name="p1p-path" descr="p1p-path">    </p:cNvPr>
           <p:cNvPicPr>
             <a:picLocks noChangeAspect="1"/>
           </p:cNvPicPr>
@@ -1544,17 +1544,42 @@
         </p:blipFill>
         <p:spPr>
           <a:xfrm>
-            <a:off x="1091184" y="5670042"/>
-            <a:ext cx="109728" cy="109728"/>
+            <a:off x="893064" y="3857943"/>
+            <a:ext cx="22352" cy="5163312"/>
           </a:xfrm>
           <a:prstGeom prst="rect">
             <a:avLst/>
           </a:prstGeom>
         </p:spPr>
       </p:pic>
+      <p:sp>
+        <p:nvSpPr>
+          <p:cNvPr id="24" name="p1p-top"/>
+          <p:cNvSpPr/>
+          <p:nvPr/>
+        </p:nvSpPr>
+        <p:spPr>
+          <a:xfrm>
+            <a:off x="862584" y="3810191"/>
+            <a:ext cx="79248" cy="79248"/>
+          </a:xfrm>
+          <a:prstGeom prst="ellipse">
+            <a:avLst/>
+          </a:prstGeom>
+          <a:solidFill>
+            <a:srgbClr val="45B9EC"/>
+          </a:solidFill>
+          <a:ln w="18288">
+            <a:solidFill>
+              <a:srgbClr val="FFFFFF"/>
+            </a:solidFill>
+            <a:prstDash val="solid"/>
+          </a:ln>
+        </p:spPr>
+      </p:sp>
       <p:pic>
         <p:nvPicPr>
-          <p:cNvPr id="24" name="svg" descr="svg">    </p:cNvPr>
+          <p:cNvPr id="25" name="svg" descr="svg">    </p:cNvPr>
           <p:cNvPicPr>
             <a:picLocks noChangeAspect="1"/>
           </p:cNvPicPr>
@@ -1568,8 +1593,8 @@
         </p:blipFill>
         <p:spPr>
           <a:xfrm>
-            <a:off x="512064" y="5924836"/>
-            <a:ext cx="1267968" cy="1267968"/>
+            <a:off x="510032" y="4016439"/>
+            <a:ext cx="782320" cy="780288"/>
           </a:xfrm>
           <a:prstGeom prst="rect">
             <a:avLst/>
@@ -1578,13 +1603,13 @@
       </p:pic>
       <p:sp>
         <p:nvSpPr>
-          <p:cNvPr id="25" name="s"/>
+          <p:cNvPr id="26" name="s"/>
           <p:cNvSpPr/>
           <p:nvPr/>
         </p:nvSpPr>
         <p:spPr>
           <a:xfrm>
-            <a:off x="2252186" y="6153150"/>
+            <a:off x="1727930" y="4108609"/>
             <a:ext cx="134112" cy="12192"/>
           </a:xfrm>
           <a:prstGeom prst="rect">
@@ -1598,7 +1623,7 @@
       </p:sp>
       <p:pic>
         <p:nvPicPr>
-          <p:cNvPr id="26" name="li" descr="li">    </p:cNvPr>
+          <p:cNvPr id="27" name="p1p-fact" descr="p1p-fact">    </p:cNvPr>
           <p:cNvPicPr>
             <a:picLocks noChangeAspect="1"/>
           </p:cNvPicPr>
@@ -1612,17 +1637,41 @@
         </p:blipFill>
         <p:spPr>
           <a:xfrm>
-            <a:off x="2023872" y="6613239"/>
-            <a:ext cx="2474976" cy="426720"/>
+            <a:off x="1499616" y="4493514"/>
+            <a:ext cx="1444752" cy="280416"/>
           </a:xfrm>
           <a:prstGeom prst="rect">
             <a:avLst/>
           </a:prstGeom>
         </p:spPr>
       </p:pic>
+      <p:sp>
+        <p:nvSpPr>
+          <p:cNvPr id="28" name="p1p-fact ic"/>
+          <p:cNvSpPr/>
+          <p:nvPr/>
+        </p:nvSpPr>
+        <p:spPr>
+          <a:xfrm>
+            <a:off x="3013996" y="4499610"/>
+            <a:ext cx="1822990" cy="268224"/>
+          </a:xfrm>
+          <a:prstGeom prst="roundRect">
+            <a:avLst>
+              <a:gd name="adj" fmla="val 50000"/>
+            </a:avLst>
+          </a:prstGeom>
+          <a:ln w="12192">
+            <a:solidFill>
+              <a:srgbClr val="D8E0EB"/>
+            </a:solidFill>
+            <a:prstDash val="solid"/>
+          </a:ln>
+        </p:spPr>
+      </p:sp>
       <p:pic>
         <p:nvPicPr>
-          <p:cNvPr id="27" name="li" descr="li">    </p:cNvPr>
+          <p:cNvPr id="29" name="svg" descr="svg">    </p:cNvPr>
           <p:cNvPicPr>
             <a:picLocks noChangeAspect="1"/>
           </p:cNvPicPr>
@@ -1636,17 +1685,42 @@
         </p:blipFill>
         <p:spPr>
           <a:xfrm>
-            <a:off x="4572000" y="6613239"/>
-            <a:ext cx="2474976" cy="426720"/>
+            <a:off x="3142012" y="4580890"/>
+            <a:ext cx="105664" cy="105664"/>
           </a:xfrm>
           <a:prstGeom prst="rect">
             <a:avLst/>
           </a:prstGeom>
         </p:spPr>
       </p:pic>
+      <p:sp>
+        <p:nvSpPr>
+          <p:cNvPr id="30" name="i"/>
+          <p:cNvSpPr/>
+          <p:nvPr/>
+        </p:nvSpPr>
+        <p:spPr>
+          <a:xfrm>
+            <a:off x="862584" y="4850606"/>
+            <a:ext cx="79248" cy="79248"/>
+          </a:xfrm>
+          <a:prstGeom prst="ellipse">
+            <a:avLst/>
+          </a:prstGeom>
+          <a:solidFill>
+            <a:srgbClr val="3DA6E7"/>
+          </a:solidFill>
+          <a:ln w="18288">
+            <a:solidFill>
+              <a:srgbClr val="FFFFFF"/>
+            </a:solidFill>
+            <a:prstDash val="solid"/>
+          </a:ln>
+        </p:spPr>
+      </p:sp>
       <p:pic>
         <p:nvPicPr>
-          <p:cNvPr id="28" name="i" descr="i">    </p:cNvPr>
+          <p:cNvPr id="31" name="svg" descr="svg">    </p:cNvPr>
           <p:cNvPicPr>
             <a:picLocks noChangeAspect="1"/>
           </p:cNvPicPr>
@@ -1660,17 +1734,37 @@
         </p:blipFill>
         <p:spPr>
           <a:xfrm>
-            <a:off x="1091184" y="7339902"/>
-            <a:ext cx="109728" cy="109728"/>
+            <a:off x="512064" y="4985766"/>
+            <a:ext cx="780288" cy="780288"/>
           </a:xfrm>
           <a:prstGeom prst="rect">
             <a:avLst/>
           </a:prstGeom>
         </p:spPr>
       </p:pic>
+      <p:sp>
+        <p:nvSpPr>
+          <p:cNvPr id="32" name="s"/>
+          <p:cNvSpPr/>
+          <p:nvPr/>
+        </p:nvSpPr>
+        <p:spPr>
+          <a:xfrm>
+            <a:off x="1727930" y="5079968"/>
+            <a:ext cx="134112" cy="12192"/>
+          </a:xfrm>
+          <a:prstGeom prst="rect">
+            <a:avLst/>
+          </a:prstGeom>
+          <a:solidFill>
+            <a:srgbClr val="C3CEDD"/>
+          </a:solidFill>
+          <a:ln/>
+        </p:spPr>
+      </p:sp>
       <p:pic>
         <p:nvPicPr>
-          <p:cNvPr id="29" name="svg" descr="svg">    </p:cNvPr>
+          <p:cNvPr id="33" name="p1p-fact" descr="p1p-fact">    </p:cNvPr>
           <p:cNvPicPr>
             <a:picLocks noChangeAspect="1"/>
           </p:cNvPicPr>
@@ -1684,37 +1778,17 @@
         </p:blipFill>
         <p:spPr>
           <a:xfrm>
-            <a:off x="512064" y="7594695"/>
-            <a:ext cx="1267968" cy="1267968"/>
+            <a:off x="1499616" y="5462842"/>
+            <a:ext cx="1932432" cy="280416"/>
           </a:xfrm>
           <a:prstGeom prst="rect">
             <a:avLst/>
           </a:prstGeom>
         </p:spPr>
       </p:pic>
-      <p:sp>
-        <p:nvSpPr>
-          <p:cNvPr id="30" name="s"/>
-          <p:cNvSpPr/>
-          <p:nvPr/>
-        </p:nvSpPr>
-        <p:spPr>
-          <a:xfrm>
-            <a:off x="2252186" y="7820978"/>
-            <a:ext cx="134112" cy="12192"/>
-          </a:xfrm>
-          <a:prstGeom prst="rect">
-            <a:avLst/>
-          </a:prstGeom>
-          <a:solidFill>
-            <a:srgbClr val="C3CEDD"/>
-          </a:solidFill>
-          <a:ln/>
-        </p:spPr>
-      </p:sp>
       <p:pic>
         <p:nvPicPr>
-          <p:cNvPr id="31" name="li" descr="li">    </p:cNvPr>
+          <p:cNvPr id="34" name="p1p-to" descr="p1p-to">    </p:cNvPr>
           <p:cNvPicPr>
             <a:picLocks noChangeAspect="1"/>
           </p:cNvPicPr>
@@ -1728,8 +1802,8 @@
         </p:blipFill>
         <p:spPr>
           <a:xfrm>
-            <a:off x="2023872" y="8279035"/>
-            <a:ext cx="2474976" cy="426720"/>
+            <a:off x="3491357" y="5570538"/>
+            <a:ext cx="83312" cy="65024"/>
           </a:xfrm>
           <a:prstGeom prst="rect">
             <a:avLst/>
@@ -1738,7 +1812,7 @@
       </p:pic>
       <p:pic>
         <p:nvPicPr>
-          <p:cNvPr id="32" name="li" descr="li">    </p:cNvPr>
+          <p:cNvPr id="35" name="p1p-fact" descr="p1p-fact">    </p:cNvPr>
           <p:cNvPicPr>
             <a:picLocks noChangeAspect="1"/>
           </p:cNvPicPr>
@@ -1752,44 +1826,17 @@
         </p:blipFill>
         <p:spPr>
           <a:xfrm>
-            <a:off x="4572000" y="8279035"/>
-            <a:ext cx="2474976" cy="426720"/>
+            <a:off x="3639693" y="5462842"/>
+            <a:ext cx="1097280" cy="280416"/>
           </a:xfrm>
           <a:prstGeom prst="rect">
             <a:avLst/>
           </a:prstGeom>
         </p:spPr>
       </p:pic>
-      <p:sp>
-        <p:nvSpPr>
-          <p:cNvPr id="33" name="span"/>
-          <p:cNvSpPr/>
-          <p:nvPr/>
-        </p:nvSpPr>
-        <p:spPr>
-          <a:xfrm>
-            <a:off x="707041" y="9072753"/>
-            <a:ext cx="878015" cy="268224"/>
-          </a:xfrm>
-          <a:prstGeom prst="roundRect">
-            <a:avLst>
-              <a:gd name="adj" fmla="val 50000"/>
-            </a:avLst>
-          </a:prstGeom>
-          <a:solidFill>
-            <a:srgbClr val="FFF4DB"/>
-          </a:solidFill>
-          <a:ln w="12192">
-            <a:solidFill>
-              <a:srgbClr val="FFF4DB"/>
-            </a:solidFill>
-            <a:prstDash val="solid"/>
-          </a:ln>
-        </p:spPr>
-      </p:sp>
       <p:pic>
         <p:nvPicPr>
-          <p:cNvPr id="34" name="svg" descr="svg">    </p:cNvPr>
+          <p:cNvPr id="36" name="p1p-to" descr="p1p-to">    </p:cNvPr>
           <p:cNvPicPr>
             <a:picLocks noChangeAspect="1"/>
           </p:cNvPicPr>
@@ -1803,17 +1850,697 @@
         </p:blipFill>
         <p:spPr>
           <a:xfrm>
-            <a:off x="828961" y="9162161"/>
-            <a:ext cx="85344" cy="85344"/>
+            <a:off x="4796504" y="5570538"/>
+            <a:ext cx="83312" cy="65024"/>
           </a:xfrm>
           <a:prstGeom prst="rect">
             <a:avLst/>
           </a:prstGeom>
         </p:spPr>
       </p:pic>
-      <p:sp>
-        <p:nvSpPr>
-          <p:cNvPr id="35" name="key"/>
+      <p:pic>
+        <p:nvPicPr>
+          <p:cNvPr id="37" name="p1p-fact key2" descr="p1p-fact key2">    </p:cNvPr>
+          <p:cNvPicPr>
+            <a:picLocks noChangeAspect="1"/>
+          </p:cNvPicPr>
+          <p:nvPr/>
+        </p:nvPicPr>
+        <p:blipFill>
+          <a:blip r:embed="rId20"/>
+          <a:stretch>
+            <a:fillRect/>
+          </a:stretch>
+        </p:blipFill>
+        <p:spPr>
+          <a:xfrm>
+            <a:off x="4944840" y="5462842"/>
+            <a:ext cx="847344" cy="280416"/>
+          </a:xfrm>
+          <a:prstGeom prst="rect">
+            <a:avLst/>
+          </a:prstGeom>
+        </p:spPr>
+      </p:pic>
+      <p:sp>
+        <p:nvSpPr>
+          <p:cNvPr id="38" name="i"/>
+          <p:cNvSpPr/>
+          <p:nvPr/>
+        </p:nvSpPr>
+        <p:spPr>
+          <a:xfrm>
+            <a:off x="862584" y="5821966"/>
+            <a:ext cx="79248" cy="79248"/>
+          </a:xfrm>
+          <a:prstGeom prst="ellipse">
+            <a:avLst/>
+          </a:prstGeom>
+          <a:solidFill>
+            <a:srgbClr val="3695E4"/>
+          </a:solidFill>
+          <a:ln w="18288">
+            <a:solidFill>
+              <a:srgbClr val="FFFFFF"/>
+            </a:solidFill>
+            <a:prstDash val="solid"/>
+          </a:ln>
+        </p:spPr>
+      </p:sp>
+      <p:sp>
+        <p:nvSpPr>
+          <p:cNvPr id="39" name="s"/>
+          <p:cNvSpPr/>
+          <p:nvPr/>
+        </p:nvSpPr>
+        <p:spPr>
+          <a:xfrm>
+            <a:off x="1727930" y="6030563"/>
+            <a:ext cx="134112" cy="12192"/>
+          </a:xfrm>
+          <a:prstGeom prst="rect">
+            <a:avLst/>
+          </a:prstGeom>
+          <a:solidFill>
+            <a:srgbClr val="C3CEDD"/>
+          </a:solidFill>
+          <a:ln/>
+        </p:spPr>
+      </p:sp>
+      <p:pic>
+        <p:nvPicPr>
+          <p:cNvPr id="40" name="svg" descr="svg">    </p:cNvPr>
+          <p:cNvPicPr>
+            <a:picLocks noChangeAspect="1"/>
+          </p:cNvPicPr>
+          <p:nvPr/>
+        </p:nvPicPr>
+        <p:blipFill>
+          <a:blip r:embed="rId21"/>
+          <a:stretch>
+            <a:fillRect/>
+          </a:stretch>
+        </p:blipFill>
+        <p:spPr>
+          <a:xfrm>
+            <a:off x="512064" y="7046913"/>
+            <a:ext cx="780288" cy="780288"/>
+          </a:xfrm>
+          <a:prstGeom prst="rect">
+            <a:avLst/>
+          </a:prstGeom>
+        </p:spPr>
+      </p:pic>
+      <p:sp>
+        <p:nvSpPr>
+          <p:cNvPr id="41" name="p1p-role me"/>
+          <p:cNvSpPr/>
+          <p:nvPr/>
+        </p:nvSpPr>
+        <p:spPr>
+          <a:xfrm>
+            <a:off x="1505712" y="6433757"/>
+            <a:ext cx="2712720" cy="836676"/>
+          </a:xfrm>
+          <a:prstGeom prst="roundRect">
+            <a:avLst>
+              <a:gd name="adj" fmla="val 12386"/>
+            </a:avLst>
+          </a:prstGeom>
+          <a:solidFill>
+            <a:srgbClr val="FFFFFF"/>
+          </a:solidFill>
+          <a:ln w="12192">
+            <a:solidFill>
+              <a:srgbClr val="004B8D"/>
+            </a:solidFill>
+            <a:prstDash val="solid"/>
+          </a:ln>
+        </p:spPr>
+      </p:sp>
+      <p:pic>
+        <p:nvPicPr>
+          <p:cNvPr id="42" name="svg" descr="svg">    </p:cNvPr>
+          <p:cNvPicPr>
+            <a:picLocks noChangeAspect="1"/>
+          </p:cNvPicPr>
+          <p:nvPr/>
+        </p:nvPicPr>
+        <p:blipFill>
+          <a:blip r:embed="rId22"/>
+          <a:stretch>
+            <a:fillRect/>
+          </a:stretch>
+        </p:blipFill>
+        <p:spPr>
+          <a:xfrm>
+            <a:off x="1633728" y="6546279"/>
+            <a:ext cx="182880" cy="182880"/>
+          </a:xfrm>
+          <a:prstGeom prst="rect">
+            <a:avLst/>
+          </a:prstGeom>
+        </p:spPr>
+      </p:pic>
+      <p:sp>
+        <p:nvSpPr>
+          <p:cNvPr id="43" name="p1p-me"/>
+          <p:cNvSpPr/>
+          <p:nvPr/>
+        </p:nvSpPr>
+        <p:spPr>
+          <a:xfrm>
+            <a:off x="2197608" y="6550343"/>
+            <a:ext cx="229648" cy="170688"/>
+          </a:xfrm>
+          <a:prstGeom prst="roundRect">
+            <a:avLst>
+              <a:gd name="adj" fmla="val 50000"/>
+            </a:avLst>
+          </a:prstGeom>
+          <a:solidFill>
+            <a:srgbClr val="004B8D"/>
+          </a:solidFill>
+          <a:ln/>
+        </p:spPr>
+      </p:sp>
+      <p:sp>
+        <p:nvSpPr>
+          <p:cNvPr id="44" name="p1p-tech"/>
+          <p:cNvSpPr/>
+          <p:nvPr/>
+        </p:nvSpPr>
+        <p:spPr>
+          <a:xfrm>
+            <a:off x="1633728" y="6996113"/>
+            <a:ext cx="635222" cy="182880"/>
+          </a:xfrm>
+          <a:prstGeom prst="roundRect">
+            <a:avLst>
+              <a:gd name="adj" fmla="val 50000"/>
+            </a:avLst>
+          </a:prstGeom>
+          <a:solidFill>
+            <a:srgbClr val="EEF4FC"/>
+          </a:solidFill>
+          <a:ln/>
+        </p:spPr>
+      </p:sp>
+      <p:sp>
+        <p:nvSpPr>
+          <p:cNvPr id="45" name="p1p-role"/>
+          <p:cNvSpPr/>
+          <p:nvPr/>
+        </p:nvSpPr>
+        <p:spPr>
+          <a:xfrm>
+            <a:off x="4328160" y="6433757"/>
+            <a:ext cx="2712720" cy="836676"/>
+          </a:xfrm>
+          <a:prstGeom prst="roundRect">
+            <a:avLst>
+              <a:gd name="adj" fmla="val 12386"/>
+            </a:avLst>
+          </a:prstGeom>
+          <a:solidFill>
+            <a:srgbClr val="FFFFFF"/>
+          </a:solidFill>
+          <a:ln w="12192">
+            <a:solidFill>
+              <a:srgbClr val="D8E0EB"/>
+            </a:solidFill>
+            <a:prstDash val="solid"/>
+          </a:ln>
+        </p:spPr>
+      </p:sp>
+      <p:pic>
+        <p:nvPicPr>
+          <p:cNvPr id="46" name="svg" descr="svg">    </p:cNvPr>
+          <p:cNvPicPr>
+            <a:picLocks noChangeAspect="1"/>
+          </p:cNvPicPr>
+          <p:nvPr/>
+        </p:nvPicPr>
+        <p:blipFill>
+          <a:blip r:embed="rId23"/>
+          <a:stretch>
+            <a:fillRect/>
+          </a:stretch>
+        </p:blipFill>
+        <p:spPr>
+          <a:xfrm>
+            <a:off x="4456176" y="6546279"/>
+            <a:ext cx="182880" cy="182880"/>
+          </a:xfrm>
+          <a:prstGeom prst="rect">
+            <a:avLst/>
+          </a:prstGeom>
+        </p:spPr>
+      </p:pic>
+      <p:pic>
+        <p:nvPicPr>
+          <p:cNvPr id="47" name="p1p-hub-ln" descr="p1p-hub-ln">    </p:cNvPr>
+          <p:cNvPicPr>
+            <a:picLocks noChangeAspect="1"/>
+          </p:cNvPicPr>
+          <p:nvPr/>
+        </p:nvPicPr>
+        <p:blipFill>
+          <a:blip r:embed="rId24"/>
+          <a:stretch>
+            <a:fillRect/>
+          </a:stretch>
+        </p:blipFill>
+        <p:spPr>
+          <a:xfrm>
+            <a:off x="1290320" y="7425881"/>
+            <a:ext cx="4399280" cy="18288"/>
+          </a:xfrm>
+          <a:prstGeom prst="rect">
+            <a:avLst/>
+          </a:prstGeom>
+        </p:spPr>
+      </p:pic>
+      <p:sp>
+        <p:nvSpPr>
+          <p:cNvPr id="48" name="p1p-share"/>
+          <p:cNvSpPr/>
+          <p:nvPr/>
+        </p:nvSpPr>
+        <p:spPr>
+          <a:xfrm>
+            <a:off x="3279839" y="7307009"/>
+            <a:ext cx="1986915" cy="256032"/>
+          </a:xfrm>
+          <a:prstGeom prst="roundRect">
+            <a:avLst>
+              <a:gd name="adj" fmla="val 50000"/>
+            </a:avLst>
+          </a:prstGeom>
+          <a:solidFill>
+            <a:srgbClr val="E5F6EC"/>
+          </a:solidFill>
+          <a:ln w="12192">
+            <a:solidFill>
+              <a:srgbClr val="FFFFFF"/>
+            </a:solidFill>
+            <a:prstDash val="solid"/>
+          </a:ln>
+        </p:spPr>
+      </p:sp>
+      <p:pic>
+        <p:nvPicPr>
+          <p:cNvPr id="49" name="svg" descr="svg">    </p:cNvPr>
+          <p:cNvPicPr>
+            <a:picLocks noChangeAspect="1"/>
+          </p:cNvPicPr>
+          <p:nvPr/>
+        </p:nvPicPr>
+        <p:blipFill>
+          <a:blip r:embed="rId25"/>
+          <a:stretch>
+            <a:fillRect/>
+          </a:stretch>
+        </p:blipFill>
+        <p:spPr>
+          <a:xfrm>
+            <a:off x="3385503" y="7382193"/>
+            <a:ext cx="105664" cy="109728"/>
+          </a:xfrm>
+          <a:prstGeom prst="rect">
+            <a:avLst/>
+          </a:prstGeom>
+        </p:spPr>
+      </p:pic>
+      <p:sp>
+        <p:nvSpPr>
+          <p:cNvPr id="50" name="p1p-role"/>
+          <p:cNvSpPr/>
+          <p:nvPr/>
+        </p:nvSpPr>
+        <p:spPr>
+          <a:xfrm>
+            <a:off x="1505712" y="7599617"/>
+            <a:ext cx="2712720" cy="836676"/>
+          </a:xfrm>
+          <a:prstGeom prst="roundRect">
+            <a:avLst>
+              <a:gd name="adj" fmla="val 12386"/>
+            </a:avLst>
+          </a:prstGeom>
+          <a:solidFill>
+            <a:srgbClr val="FFFFFF"/>
+          </a:solidFill>
+          <a:ln w="12192">
+            <a:solidFill>
+              <a:srgbClr val="D8E0EB"/>
+            </a:solidFill>
+            <a:prstDash val="solid"/>
+          </a:ln>
+        </p:spPr>
+      </p:sp>
+      <p:pic>
+        <p:nvPicPr>
+          <p:cNvPr id="51" name="p1p-hub-st l" descr="p1p-hub-st l">    </p:cNvPr>
+          <p:cNvPicPr>
+            <a:picLocks noChangeAspect="1"/>
+          </p:cNvPicPr>
+          <p:nvPr/>
+        </p:nvPicPr>
+        <p:blipFill>
+          <a:blip r:embed="rId26"/>
+          <a:stretch>
+            <a:fillRect/>
+          </a:stretch>
+        </p:blipFill>
+        <p:spPr>
+          <a:xfrm>
+            <a:off x="2852928" y="7278561"/>
+            <a:ext cx="18288" cy="316992"/>
+          </a:xfrm>
+          <a:prstGeom prst="rect">
+            <a:avLst/>
+          </a:prstGeom>
+        </p:spPr>
+      </p:pic>
+      <p:sp>
+        <p:nvSpPr>
+          <p:cNvPr id="52" name="p1p-hub-dt l"/>
+          <p:cNvSpPr/>
+          <p:nvPr/>
+        </p:nvSpPr>
+        <p:spPr>
+          <a:xfrm>
+            <a:off x="2822448" y="7395401"/>
+            <a:ext cx="79248" cy="79248"/>
+          </a:xfrm>
+          <a:prstGeom prst="ellipse">
+            <a:avLst/>
+          </a:prstGeom>
+          <a:solidFill>
+            <a:srgbClr val="00A94F"/>
+          </a:solidFill>
+          <a:ln w="18288">
+            <a:solidFill>
+              <a:srgbClr val="FFFFFF"/>
+            </a:solidFill>
+            <a:prstDash val="solid"/>
+          </a:ln>
+        </p:spPr>
+      </p:sp>
+      <p:pic>
+        <p:nvPicPr>
+          <p:cNvPr id="53" name="svg" descr="svg">    </p:cNvPr>
+          <p:cNvPicPr>
+            <a:picLocks noChangeAspect="1"/>
+          </p:cNvPicPr>
+          <p:nvPr/>
+        </p:nvPicPr>
+        <p:blipFill>
+          <a:blip r:embed="rId27"/>
+          <a:stretch>
+            <a:fillRect/>
+          </a:stretch>
+        </p:blipFill>
+        <p:spPr>
+          <a:xfrm>
+            <a:off x="1633728" y="7712139"/>
+            <a:ext cx="182880" cy="182880"/>
+          </a:xfrm>
+          <a:prstGeom prst="rect">
+            <a:avLst/>
+          </a:prstGeom>
+        </p:spPr>
+      </p:pic>
+      <p:sp>
+        <p:nvSpPr>
+          <p:cNvPr id="54" name="p1p-tech"/>
+          <p:cNvSpPr/>
+          <p:nvPr/>
+        </p:nvSpPr>
+        <p:spPr>
+          <a:xfrm>
+            <a:off x="1633728" y="7969949"/>
+            <a:ext cx="438245" cy="182880"/>
+          </a:xfrm>
+          <a:prstGeom prst="roundRect">
+            <a:avLst>
+              <a:gd name="adj" fmla="val 50000"/>
+            </a:avLst>
+          </a:prstGeom>
+          <a:solidFill>
+            <a:srgbClr val="EEF4FC"/>
+          </a:solidFill>
+          <a:ln/>
+        </p:spPr>
+      </p:sp>
+      <p:sp>
+        <p:nvSpPr>
+          <p:cNvPr id="55" name="p1p-role"/>
+          <p:cNvSpPr/>
+          <p:nvPr/>
+        </p:nvSpPr>
+        <p:spPr>
+          <a:xfrm>
+            <a:off x="4328160" y="7599617"/>
+            <a:ext cx="2712720" cy="836676"/>
+          </a:xfrm>
+          <a:prstGeom prst="roundRect">
+            <a:avLst>
+              <a:gd name="adj" fmla="val 12386"/>
+            </a:avLst>
+          </a:prstGeom>
+          <a:solidFill>
+            <a:srgbClr val="FFFFFF"/>
+          </a:solidFill>
+          <a:ln w="12192">
+            <a:solidFill>
+              <a:srgbClr val="D8E0EB"/>
+            </a:solidFill>
+            <a:prstDash val="solid"/>
+          </a:ln>
+        </p:spPr>
+      </p:sp>
+      <p:pic>
+        <p:nvPicPr>
+          <p:cNvPr id="56" name="p1p-hub-st r" descr="p1p-hub-st r">    </p:cNvPr>
+          <p:cNvPicPr>
+            <a:picLocks noChangeAspect="1"/>
+          </p:cNvPicPr>
+          <p:nvPr/>
+        </p:nvPicPr>
+        <p:blipFill>
+          <a:blip r:embed="rId28"/>
+          <a:stretch>
+            <a:fillRect/>
+          </a:stretch>
+        </p:blipFill>
+        <p:spPr>
+          <a:xfrm>
+            <a:off x="5675376" y="7278561"/>
+            <a:ext cx="18288" cy="316992"/>
+          </a:xfrm>
+          <a:prstGeom prst="rect">
+            <a:avLst/>
+          </a:prstGeom>
+        </p:spPr>
+      </p:pic>
+      <p:sp>
+        <p:nvSpPr>
+          <p:cNvPr id="57" name="p1p-hub-dt r"/>
+          <p:cNvSpPr/>
+          <p:nvPr/>
+        </p:nvSpPr>
+        <p:spPr>
+          <a:xfrm>
+            <a:off x="5644896" y="7395401"/>
+            <a:ext cx="79248" cy="79248"/>
+          </a:xfrm>
+          <a:prstGeom prst="ellipse">
+            <a:avLst/>
+          </a:prstGeom>
+          <a:solidFill>
+            <a:srgbClr val="00A94F"/>
+          </a:solidFill>
+          <a:ln w="18288">
+            <a:solidFill>
+              <a:srgbClr val="FFFFFF"/>
+            </a:solidFill>
+            <a:prstDash val="solid"/>
+          </a:ln>
+        </p:spPr>
+      </p:sp>
+      <p:pic>
+        <p:nvPicPr>
+          <p:cNvPr id="58" name="svg" descr="svg">    </p:cNvPr>
+          <p:cNvPicPr>
+            <a:picLocks noChangeAspect="1"/>
+          </p:cNvPicPr>
+          <p:nvPr/>
+        </p:nvPicPr>
+        <p:blipFill>
+          <a:blip r:embed="rId29"/>
+          <a:stretch>
+            <a:fillRect/>
+          </a:stretch>
+        </p:blipFill>
+        <p:spPr>
+          <a:xfrm>
+            <a:off x="4456176" y="7712139"/>
+            <a:ext cx="182880" cy="182880"/>
+          </a:xfrm>
+          <a:prstGeom prst="rect">
+            <a:avLst/>
+          </a:prstGeom>
+        </p:spPr>
+      </p:pic>
+      <p:sp>
+        <p:nvSpPr>
+          <p:cNvPr id="59" name="i"/>
+          <p:cNvSpPr/>
+          <p:nvPr/>
+        </p:nvSpPr>
+        <p:spPr>
+          <a:xfrm>
+            <a:off x="862584" y="8498300"/>
+            <a:ext cx="79248" cy="79248"/>
+          </a:xfrm>
+          <a:prstGeom prst="ellipse">
+            <a:avLst/>
+          </a:prstGeom>
+          <a:solidFill>
+            <a:srgbClr val="2F85E0"/>
+          </a:solidFill>
+          <a:ln w="18288">
+            <a:solidFill>
+              <a:srgbClr val="FFFFFF"/>
+            </a:solidFill>
+            <a:prstDash val="solid"/>
+          </a:ln>
+        </p:spPr>
+      </p:sp>
+      <p:pic>
+        <p:nvPicPr>
+          <p:cNvPr id="60" name="svg" descr="svg">    </p:cNvPr>
+          <p:cNvPicPr>
+            <a:picLocks noChangeAspect="1"/>
+          </p:cNvPicPr>
+          <p:nvPr/>
+        </p:nvPicPr>
+        <p:blipFill>
+          <a:blip r:embed="rId30"/>
+          <a:stretch>
+            <a:fillRect/>
+          </a:stretch>
+        </p:blipFill>
+        <p:spPr>
+          <a:xfrm>
+            <a:off x="512064" y="8631428"/>
+            <a:ext cx="780288" cy="780288"/>
+          </a:xfrm>
+          <a:prstGeom prst="rect">
+            <a:avLst/>
+          </a:prstGeom>
+        </p:spPr>
+      </p:pic>
+      <p:sp>
+        <p:nvSpPr>
+          <p:cNvPr id="61" name="s"/>
+          <p:cNvSpPr/>
+          <p:nvPr/>
+        </p:nvSpPr>
+        <p:spPr>
+          <a:xfrm>
+            <a:off x="1727930" y="8727662"/>
+            <a:ext cx="134112" cy="12192"/>
+          </a:xfrm>
+          <a:prstGeom prst="rect">
+            <a:avLst/>
+          </a:prstGeom>
+          <a:solidFill>
+            <a:srgbClr val="C3CEDD"/>
+          </a:solidFill>
+          <a:ln/>
+        </p:spPr>
+      </p:sp>
+      <p:sp>
+        <p:nvSpPr>
+          <p:cNvPr id="62" name="p1p-fact gold ic"/>
+          <p:cNvSpPr/>
+          <p:nvPr/>
+        </p:nvSpPr>
+        <p:spPr>
+          <a:xfrm>
+            <a:off x="1505712" y="9118664"/>
+            <a:ext cx="1738503" cy="268224"/>
+          </a:xfrm>
+          <a:prstGeom prst="roundRect">
+            <a:avLst>
+              <a:gd name="adj" fmla="val 50000"/>
+            </a:avLst>
+          </a:prstGeom>
+          <a:solidFill>
+            <a:srgbClr val="FFF4DB"/>
+          </a:solidFill>
+          <a:ln w="12192">
+            <a:solidFill>
+              <a:srgbClr val="FFF4DB"/>
+            </a:solidFill>
+            <a:prstDash val="solid"/>
+          </a:ln>
+        </p:spPr>
+      </p:sp>
+      <p:pic>
+        <p:nvPicPr>
+          <p:cNvPr id="63" name="svg" descr="svg">    </p:cNvPr>
+          <p:cNvPicPr>
+            <a:picLocks noChangeAspect="1"/>
+          </p:cNvPicPr>
+          <p:nvPr/>
+        </p:nvPicPr>
+        <p:blipFill>
+          <a:blip r:embed="rId31"/>
+          <a:stretch>
+            <a:fillRect/>
+          </a:stretch>
+        </p:blipFill>
+        <p:spPr>
+          <a:xfrm>
+            <a:off x="1635760" y="9199944"/>
+            <a:ext cx="105664" cy="105664"/>
+          </a:xfrm>
+          <a:prstGeom prst="rect">
+            <a:avLst/>
+          </a:prstGeom>
+        </p:spPr>
+      </p:pic>
+      <p:pic>
+        <p:nvPicPr>
+          <p:cNvPr id="64" name="p1p-fact gold" descr="p1p-fact gold">    </p:cNvPr>
+          <p:cNvPicPr>
+            <a:picLocks noChangeAspect="1"/>
+          </p:cNvPicPr>
+          <p:nvPr/>
+        </p:nvPicPr>
+        <p:blipFill>
+          <a:blip r:embed="rId32"/>
+          <a:stretch>
+            <a:fillRect/>
+          </a:stretch>
+        </p:blipFill>
+        <p:spPr>
+          <a:xfrm>
+            <a:off x="3309239" y="9112568"/>
+            <a:ext cx="1706880" cy="280416"/>
+          </a:xfrm>
+          <a:prstGeom prst="rect">
+            <a:avLst/>
+          </a:prstGeom>
+        </p:spPr>
+      </p:pic>
+      <p:sp>
+        <p:nvSpPr>
+          <p:cNvPr id="65" name="key"/>
           <p:cNvSpPr/>
           <p:nvPr/>
         </p:nvSpPr>
@@ -1835,7 +2562,7 @@
       </p:sp>
       <p:sp>
         <p:nvSpPr>
-          <p:cNvPr id="36" name="i"/>
+          <p:cNvPr id="66" name="i"/>
           <p:cNvSpPr/>
           <p:nvPr/>
         </p:nvSpPr>
@@ -1855,7 +2582,7 @@
       </p:sp>
       <p:sp>
         <p:nvSpPr>
-          <p:cNvPr id="37" name="b"/>
+          <p:cNvPr id="67" name="b"/>
           <p:cNvSpPr/>
           <p:nvPr/>
         </p:nvSpPr>
@@ -1875,7 +2602,7 @@
       </p:sp>
       <p:sp>
         <p:nvSpPr>
-          <p:cNvPr id="38" name="i"/>
+          <p:cNvPr id="68" name="i"/>
           <p:cNvSpPr/>
           <p:nvPr/>
         </p:nvSpPr>
@@ -1895,7 +2622,7 @@
       </p:sp>
       <p:sp>
         <p:nvSpPr>
-          <p:cNvPr id="39" name="b"/>
+          <p:cNvPr id="69" name="b"/>
           <p:cNvSpPr/>
           <p:nvPr/>
         </p:nvSpPr>
@@ -1915,7 +2642,7 @@
       </p:sp>
       <p:sp>
         <p:nvSpPr>
-          <p:cNvPr id="40" name="i"/>
+          <p:cNvPr id="70" name="i"/>
           <p:cNvSpPr/>
           <p:nvPr/>
         </p:nvSpPr>
@@ -1935,7 +2662,7 @@
       </p:sp>
       <p:sp>
         <p:nvSpPr>
-          <p:cNvPr id="41" name="01"/>
+          <p:cNvPr id="71" name="01"/>
           <p:cNvSpPr txBox="1"/>
           <p:nvPr/>
         </p:nvSpPr>
@@ -1974,7 +2701,7 @@
       </p:sp>
       <p:sp>
         <p:nvSpPr>
-          <p:cNvPr id="42" name="PT 주제 1 · 가장 중요하게 생각하는 가치와 실천 경험"/>
+          <p:cNvPr id="72" name="PT 주제 1 · 가장 중요하게 생각하는 가치와 실천 경험"/>
           <p:cNvSpPr txBox="1"/>
           <p:nvPr/>
         </p:nvSpPr>
@@ -2013,7 +2740,7 @@
       </p:sp>
       <p:sp>
         <p:nvSpPr>
-          <p:cNvPr id="43" name="제가 가장 중요하게 생각하는 가치는"/>
+          <p:cNvPr id="73" name="제가 가장 중요하게 생각하는 가치는"/>
           <p:cNvSpPr txBox="1"/>
           <p:nvPr/>
         </p:nvSpPr>
@@ -2052,7 +2779,7 @@
       </p:sp>
       <p:sp>
         <p:nvSpPr>
-          <p:cNvPr id="44" name="공동의 목표를 공유하며"/>
+          <p:cNvPr id="74" name="공동의 목표를 공유하며"/>
           <p:cNvSpPr txBox="1"/>
           <p:nvPr/>
         </p:nvSpPr>
@@ -2105,7 +2832,7 @@
       </p:sp>
       <p:sp>
         <p:nvSpPr>
-          <p:cNvPr id="45" name="함께 성과를 만드는 협업입니다"/>
+          <p:cNvPr id="75" name="함께 성과를 만드는 협업입니다"/>
           <p:cNvSpPr txBox="1"/>
           <p:nvPr/>
         </p:nvSpPr>
@@ -2172,38 +2899,38 @@
       </p:sp>
       <p:sp>
         <p:nvSpPr>
-          <p:cNvPr id="46" name="마감 3주 전"/>
-          <p:cNvSpPr txBox="1"/>
-          <p:nvPr/>
-        </p:nvSpPr>
-        <p:spPr>
-          <a:xfrm>
-            <a:off x="969169" y="2175605"/>
-            <a:ext cx="548831" cy="134112"/>
-          </a:xfrm>
-          <a:prstGeom prst="rect">
-            <a:avLst/>
-          </a:prstGeom>
-          <a:noFill/>
-          <a:ln/>
-        </p:spPr>
-        <p:txBody>
-          <a:bodyPr wrap="none" lIns="0" tIns="0" rIns="0" bIns="0" rtlCol="0" anchor="ctr"/>
-          <a:lstStyle/>
-          <a:p>
-            <a:pPr algn="l" indent="0" marL="0">
-              <a:buNone/>
-            </a:pPr>
-            <a:r>
-              <a:rPr lang="ko-KR" altLang="en-US" sz="864" spc="-9" kern="0" dirty="0">
-                <a:solidFill>
-                  <a:srgbClr val="4B5568"/>
+          <p:cNvPr id="76" name="PROJECT"/>
+          <p:cNvSpPr txBox="1"/>
+          <p:nvPr/>
+        </p:nvSpPr>
+        <p:spPr>
+          <a:xfrm>
+            <a:off x="731520" y="2267045"/>
+            <a:ext cx="707327" cy="134112"/>
+          </a:xfrm>
+          <a:prstGeom prst="rect">
+            <a:avLst/>
+          </a:prstGeom>
+          <a:noFill/>
+          <a:ln/>
+        </p:spPr>
+        <p:txBody>
+          <a:bodyPr wrap="none" lIns="0" tIns="0" rIns="0" bIns="0" rtlCol="0" anchor="ctr"/>
+          <a:lstStyle/>
+          <a:p>
+            <a:pPr algn="l" indent="0" marL="0">
+              <a:buNone/>
+            </a:pPr>
+            <a:r>
+              <a:rPr lang="ko-KR" altLang="en-US" sz="864" spc="138" kern="0" dirty="0">
+                <a:solidFill>
+                  <a:srgbClr val="2A78DD"/>
                 </a:solidFill>
                 <a:latin typeface="Paperlogy 7 Bold" pitchFamily="34" charset="0"/>
                 <a:ea typeface="Paperlogy 7 Bold" pitchFamily="34" charset="-127"/>
                 <a:cs typeface="Paperlogy 7 Bold" pitchFamily="34" charset="-120"/>
               </a:rPr>
-              <a:t>마감 3주 전</a:t>
+              <a:t>PROJECT</a:t>
             </a:r>
             <a:endParaRPr lang="en-US" sz="864" dirty="0"/>
           </a:p>
@@ -2211,38 +2938,38 @@
       </p:sp>
       <p:sp>
         <p:nvSpPr>
-          <p:cNvPr id="47" name="BACKGROUND"/>
-          <p:cNvSpPr txBox="1"/>
-          <p:nvPr/>
-        </p:nvSpPr>
-        <p:spPr>
-          <a:xfrm>
-            <a:off x="2023872" y="2175605"/>
-            <a:ext cx="1086484" cy="134112"/>
-          </a:xfrm>
-          <a:prstGeom prst="rect">
-            <a:avLst/>
-          </a:prstGeom>
-          <a:noFill/>
-          <a:ln/>
-        </p:spPr>
-        <p:txBody>
-          <a:bodyPr wrap="none" lIns="0" tIns="0" rIns="0" bIns="0" rtlCol="0" anchor="ctr"/>
-          <a:lstStyle/>
-          <a:p>
-            <a:pPr algn="l" indent="0" marL="0">
-              <a:buNone/>
-            </a:pPr>
-            <a:r>
-              <a:rPr lang="ko-KR" altLang="en-US" sz="864" spc="138" kern="0" dirty="0">
-                <a:solidFill>
-                  <a:srgbClr val="8691A5"/>
+          <p:cNvPr id="77" name="학생 BIM 경진대회"/>
+          <p:cNvSpPr txBox="1"/>
+          <p:nvPr/>
+        </p:nvSpPr>
+        <p:spPr>
+          <a:xfrm>
+            <a:off x="1591247" y="2267045"/>
+            <a:ext cx="890713" cy="134112"/>
+          </a:xfrm>
+          <a:prstGeom prst="rect">
+            <a:avLst/>
+          </a:prstGeom>
+          <a:noFill/>
+          <a:ln/>
+        </p:spPr>
+        <p:txBody>
+          <a:bodyPr wrap="none" lIns="0" tIns="0" rIns="0" bIns="0" rtlCol="0" anchor="ctr"/>
+          <a:lstStyle/>
+          <a:p>
+            <a:pPr algn="l" indent="0" marL="0">
+              <a:buNone/>
+            </a:pPr>
+            <a:r>
+              <a:rPr lang="ko-KR" altLang="en-US" sz="864" spc="-9" kern="0" dirty="0">
+                <a:solidFill>
+                  <a:srgbClr val="004B8D"/>
                 </a:solidFill>
                 <a:latin typeface="Paperlogy 7 Bold" pitchFamily="34" charset="0"/>
                 <a:ea typeface="Paperlogy 7 Bold" pitchFamily="34" charset="-127"/>
                 <a:cs typeface="Paperlogy 7 Bold" pitchFamily="34" charset="-120"/>
               </a:rPr>
-              <a:t>BACKGROUND</a:t>
+              <a:t>학생 BIM 경진대회</a:t>
             </a:r>
             <a:endParaRPr lang="en-US" sz="864" dirty="0"/>
           </a:p>
@@ -2250,69 +2977,69 @@
       </p:sp>
       <p:sp>
         <p:nvSpPr>
-          <p:cNvPr id="48" name="학생 BIM 경진대회"/>
-          <p:cNvSpPr txBox="1"/>
-          <p:nvPr/>
-        </p:nvSpPr>
-        <p:spPr>
-          <a:xfrm>
-            <a:off x="3280505" y="2162366"/>
-            <a:ext cx="1054075" cy="152400"/>
-          </a:xfrm>
-          <a:prstGeom prst="rect">
-            <a:avLst/>
-          </a:prstGeom>
-          <a:noFill/>
-          <a:ln/>
-        </p:spPr>
-        <p:txBody>
-          <a:bodyPr wrap="none" lIns="0" tIns="0" rIns="0" bIns="0" rtlCol="0" anchor="ctr"/>
-          <a:lstStyle/>
-          <a:p>
-            <a:pPr algn="l" indent="0" marL="0">
-              <a:buNone/>
-            </a:pPr>
-            <a:r>
-              <a:rPr lang="ko-KR" altLang="en-US" sz="1008" dirty="0">
-                <a:solidFill>
-                  <a:srgbClr val="004B8D"/>
+          <p:cNvPr id="78" name="4인 팀"/>
+          <p:cNvSpPr txBox="1"/>
+          <p:nvPr/>
+        </p:nvSpPr>
+        <p:spPr>
+          <a:xfrm>
+            <a:off x="2675382" y="2267045"/>
+            <a:ext cx="334804" cy="134112"/>
+          </a:xfrm>
+          <a:prstGeom prst="rect">
+            <a:avLst/>
+          </a:prstGeom>
+          <a:noFill/>
+          <a:ln/>
+        </p:spPr>
+        <p:txBody>
+          <a:bodyPr wrap="none" lIns="0" tIns="0" rIns="0" bIns="0" rtlCol="0" anchor="ctr"/>
+          <a:lstStyle/>
+          <a:p>
+            <a:pPr algn="l" indent="0" marL="0">
+              <a:buNone/>
+            </a:pPr>
+            <a:r>
+              <a:rPr lang="ko-KR" altLang="en-US" sz="864" spc="-9" kern="0" dirty="0">
+                <a:solidFill>
+                  <a:srgbClr val="0B6B33"/>
                 </a:solidFill>
                 <a:latin typeface="Paperlogy 7 Bold" pitchFamily="34" charset="0"/>
                 <a:ea typeface="Paperlogy 7 Bold" pitchFamily="34" charset="-127"/>
                 <a:cs typeface="Paperlogy 7 Bold" pitchFamily="34" charset="-120"/>
               </a:rPr>
-              <a:t>학생 BIM 경진대회</a:t>
-            </a:r>
-            <a:endParaRPr lang="en-US" sz="1008" dirty="0"/>
-          </a:p>
-        </p:txBody>
-      </p:sp>
-      <p:sp>
-        <p:nvSpPr>
-          <p:cNvPr id="49" name="4인 팀 팀장"/>
-          <p:cNvSpPr txBox="1"/>
-          <p:nvPr/>
-        </p:nvSpPr>
-        <p:spPr>
-          <a:xfrm>
-            <a:off x="4591907" y="2162366"/>
-            <a:ext cx="641128" cy="152400"/>
-          </a:xfrm>
-          <a:prstGeom prst="rect">
-            <a:avLst/>
-          </a:prstGeom>
-          <a:noFill/>
-          <a:ln/>
-        </p:spPr>
-        <p:txBody>
-          <a:bodyPr wrap="none" lIns="0" tIns="0" rIns="0" bIns="0" rtlCol="0" anchor="ctr"/>
-          <a:lstStyle/>
-          <a:p>
-            <a:pPr algn="l" indent="0" marL="0">
-              <a:buNone/>
-            </a:pPr>
-            <a:r>
-              <a:rPr lang="ko-KR" altLang="en-US" sz="1008" dirty="0">
+              <a:t>4인 팀</a:t>
+            </a:r>
+            <a:endParaRPr lang="en-US" sz="864" dirty="0"/>
+          </a:p>
+        </p:txBody>
+      </p:sp>
+      <p:sp>
+        <p:nvSpPr>
+          <p:cNvPr id="79" name="팀장"/>
+          <p:cNvSpPr txBox="1"/>
+          <p:nvPr/>
+        </p:nvSpPr>
+        <p:spPr>
+          <a:xfrm>
+            <a:off x="3205258" y="2267045"/>
+            <a:ext cx="239744" cy="134112"/>
+          </a:xfrm>
+          <a:prstGeom prst="rect">
+            <a:avLst/>
+          </a:prstGeom>
+          <a:noFill/>
+          <a:ln/>
+        </p:spPr>
+        <p:txBody>
+          <a:bodyPr wrap="none" lIns="0" tIns="0" rIns="0" bIns="0" rtlCol="0" anchor="ctr"/>
+          <a:lstStyle/>
+          <a:p>
+            <a:pPr algn="l" indent="0" marL="0">
+              <a:buNone/>
+            </a:pPr>
+            <a:r>
+              <a:rPr lang="ko-KR" altLang="en-US" sz="864" spc="-9" kern="0" dirty="0">
                 <a:solidFill>
                   <a:srgbClr val="0B6B33"/>
                 </a:solidFill>
@@ -2320,7 +3047,85 @@
                 <a:ea typeface="Paperlogy 7 Bold" pitchFamily="34" charset="-127"/>
                 <a:cs typeface="Paperlogy 7 Bold" pitchFamily="34" charset="-120"/>
               </a:rPr>
-              <a:t>4인 팀 팀장</a:t>
+              <a:t>팀장</a:t>
+            </a:r>
+            <a:endParaRPr lang="en-US" sz="864" dirty="0"/>
+          </a:p>
+        </p:txBody>
+      </p:sp>
+      <p:sp>
+        <p:nvSpPr>
+          <p:cNvPr id="80" name="‘유닛 모듈러 기반 사용자 맞춤형 리모델링 방법’"/>
+          <p:cNvSpPr txBox="1"/>
+          <p:nvPr/>
+        </p:nvSpPr>
+        <p:spPr>
+          <a:xfrm>
+            <a:off x="731520" y="2505075"/>
+            <a:ext cx="4080803" cy="256032"/>
+          </a:xfrm>
+          <a:prstGeom prst="rect">
+            <a:avLst/>
+          </a:prstGeom>
+          <a:noFill/>
+          <a:ln/>
+        </p:spPr>
+        <p:txBody>
+          <a:bodyPr wrap="none" lIns="0" tIns="0" rIns="0" bIns="0" rtlCol="0" anchor="ctr"/>
+          <a:lstStyle/>
+          <a:p>
+            <a:pPr algn="l" indent="0" marL="0">
+              <a:buNone/>
+            </a:pPr>
+            <a:r>
+              <a:rPr lang="ko-KR" altLang="en-US" sz="1728" spc="-69" kern="0" dirty="0">
+                <a:solidFill>
+                  <a:srgbClr val="0B2147"/>
+                </a:solidFill>
+                <a:latin typeface="Paperlogy 8 ExtraBold" pitchFamily="34" charset="0"/>
+                <a:ea typeface="Paperlogy 8 ExtraBold" pitchFamily="34" charset="-127"/>
+                <a:cs typeface="Paperlogy 8 ExtraBold" pitchFamily="34" charset="-120"/>
+              </a:rPr>
+              <a:t>‘유닛 모듈러 기반 사용자 맞춤형 리모델링 방법’</a:t>
+            </a:r>
+            <a:endParaRPr lang="en-US" sz="1728" dirty="0"/>
+          </a:p>
+        </p:txBody>
+      </p:sp>
+      <p:sp>
+        <p:nvSpPr>
+          <p:cNvPr id="81" name="사용자가 원하는 리모델링 규모에 따라 유닛 모듈러를 배치하고,"/>
+          <p:cNvSpPr txBox="1"/>
+          <p:nvPr/>
+        </p:nvSpPr>
+        <p:spPr>
+          <a:xfrm>
+            <a:off x="731520" y="2828163"/>
+            <a:ext cx="3255616" cy="152400"/>
+          </a:xfrm>
+          <a:prstGeom prst="rect">
+            <a:avLst/>
+          </a:prstGeom>
+          <a:noFill/>
+          <a:ln/>
+        </p:spPr>
+        <p:txBody>
+          <a:bodyPr wrap="none" lIns="0" tIns="0" rIns="0" bIns="0" rtlCol="0" anchor="ctr"/>
+          <a:lstStyle/>
+          <a:p>
+            <a:pPr algn="l" indent="0" marL="0">
+              <a:buNone/>
+            </a:pPr>
+            <a:r>
+              <a:rPr lang="ko-KR" altLang="en-US" sz="1008" spc="-20" kern="0" dirty="0">
+                <a:solidFill>
+                  <a:srgbClr val="4B5568"/>
+                </a:solidFill>
+                <a:latin typeface="Paperlogy 5 Medium" pitchFamily="34" charset="0"/>
+                <a:ea typeface="Paperlogy 5 Medium" pitchFamily="34" charset="-127"/>
+                <a:cs typeface="Paperlogy 5 Medium" pitchFamily="34" charset="-120"/>
+              </a:rPr>
+              <a:t>사용자가 원하는 리모델링 규모에 따라 유닛 모듈러를 배치하고,</a:t>
             </a:r>
             <a:endParaRPr lang="en-US" sz="1008" dirty="0"/>
           </a:p>
@@ -2328,38 +3133,233 @@
       </p:sp>
       <p:sp>
         <p:nvSpPr>
-          <p:cNvPr id="50" name="주제 미확정"/>
-          <p:cNvSpPr txBox="1"/>
-          <p:nvPr/>
-        </p:nvSpPr>
-        <p:spPr>
-          <a:xfrm>
-            <a:off x="5513451" y="2162366"/>
-            <a:ext cx="640271" cy="152400"/>
-          </a:xfrm>
-          <a:prstGeom prst="rect">
-            <a:avLst/>
-          </a:prstGeom>
-          <a:noFill/>
-          <a:ln/>
-        </p:spPr>
-        <p:txBody>
-          <a:bodyPr wrap="none" lIns="0" tIns="0" rIns="0" bIns="0" rtlCol="0" anchor="ctr"/>
-          <a:lstStyle/>
-          <a:p>
-            <a:pPr algn="l" indent="0" marL="0">
-              <a:buNone/>
-            </a:pPr>
-            <a:r>
-              <a:rPr lang="ko-KR" altLang="en-US" sz="1008" dirty="0">
+          <p:cNvPr id="82" name="필요한 모듈 수와 자재 물량을 자동으로 산출하는 BIM 기반 리모델링 방"/>
+          <p:cNvSpPr txBox="1"/>
+          <p:nvPr/>
+        </p:nvSpPr>
+        <p:spPr>
+          <a:xfrm>
+            <a:off x="731520" y="3020187"/>
+            <a:ext cx="4065659" cy="152400"/>
+          </a:xfrm>
+          <a:prstGeom prst="rect">
+            <a:avLst/>
+          </a:prstGeom>
+          <a:noFill/>
+          <a:ln/>
+        </p:spPr>
+        <p:txBody>
+          <a:bodyPr wrap="none" lIns="0" tIns="0" rIns="0" bIns="0" rtlCol="0" anchor="ctr"/>
+          <a:lstStyle/>
+          <a:p>
+            <a:pPr algn="l" indent="0" marL="0">
+              <a:buNone/>
+            </a:pPr>
+            <a:r>
+              <a:rPr lang="ko-KR" altLang="en-US" sz="1008" spc="-20" kern="0" dirty="0">
                 <a:solidFill>
                   <a:srgbClr val="4B5568"/>
+                </a:solidFill>
+                <a:latin typeface="Paperlogy 5 Medium" pitchFamily="34" charset="0"/>
+                <a:ea typeface="Paperlogy 5 Medium" pitchFamily="34" charset="-127"/>
+                <a:cs typeface="Paperlogy 5 Medium" pitchFamily="34" charset="-120"/>
+              </a:rPr>
+              <a:t>필요한 모듈 수와 자재 물량을 자동으로 산출하는 BIM 기반 리모델링 방법 제안</a:t>
+            </a:r>
+            <a:endParaRPr lang="en-US" sz="1008" dirty="0"/>
+          </a:p>
+        </p:txBody>
+      </p:sp>
+      <p:sp>
+        <p:nvSpPr>
+          <p:cNvPr id="83" name="결과물"/>
+          <p:cNvSpPr txBox="1"/>
+          <p:nvPr/>
+        </p:nvSpPr>
+        <p:spPr>
+          <a:xfrm>
+            <a:off x="5462016" y="2332482"/>
+            <a:ext cx="382905" cy="152400"/>
+          </a:xfrm>
+          <a:prstGeom prst="rect">
+            <a:avLst/>
+          </a:prstGeom>
+          <a:noFill/>
+          <a:ln/>
+        </p:spPr>
+        <p:txBody>
+          <a:bodyPr wrap="none" lIns="0" tIns="0" rIns="0" bIns="0" rtlCol="0" anchor="ctr"/>
+          <a:lstStyle/>
+          <a:p>
+            <a:pPr algn="l" indent="0" marL="0">
+              <a:buNone/>
+            </a:pPr>
+            <a:r>
+              <a:rPr lang="ko-KR" altLang="en-US" sz="1008" spc="-10" kern="0" dirty="0">
+                <a:solidFill>
+                  <a:srgbClr val="8A5A00"/>
+                </a:solidFill>
+                <a:latin typeface="Paperlogy 8 ExtraBold" pitchFamily="34" charset="0"/>
+                <a:ea typeface="Paperlogy 8 ExtraBold" pitchFamily="34" charset="-127"/>
+                <a:cs typeface="Paperlogy 8 ExtraBold" pitchFamily="34" charset="-120"/>
+              </a:rPr>
+              <a:t>결과물</a:t>
+            </a:r>
+            <a:endParaRPr lang="en-US" sz="1008" dirty="0"/>
+          </a:p>
+        </p:txBody>
+      </p:sp>
+      <p:sp>
+        <p:nvSpPr>
+          <p:cNvPr id="84" name="유닛 모듈러 기반 사용자"/>
+          <p:cNvSpPr txBox="1"/>
+          <p:nvPr/>
+        </p:nvSpPr>
+        <p:spPr>
+          <a:xfrm>
+            <a:off x="5242560" y="2566797"/>
+            <a:ext cx="1239648" cy="152400"/>
+          </a:xfrm>
+          <a:prstGeom prst="rect">
+            <a:avLst/>
+          </a:prstGeom>
+          <a:noFill/>
+          <a:ln/>
+        </p:spPr>
+        <p:txBody>
+          <a:bodyPr wrap="none" lIns="0" tIns="0" rIns="0" bIns="0" rtlCol="0" anchor="ctr"/>
+          <a:lstStyle/>
+          <a:p>
+            <a:pPr algn="l" indent="0" marL="0">
+              <a:buNone/>
+            </a:pPr>
+            <a:r>
+              <a:rPr lang="ko-KR" altLang="en-US" sz="1008" spc="-25" kern="0" dirty="0">
+                <a:solidFill>
+                  <a:srgbClr val="8A5A00"/>
+                </a:solidFill>
+                <a:latin typeface="Paperlogy 6 SemiBold" pitchFamily="34" charset="0"/>
+                <a:ea typeface="Paperlogy 6 SemiBold" pitchFamily="34" charset="-127"/>
+                <a:cs typeface="Paperlogy 6 SemiBold" pitchFamily="34" charset="-120"/>
+              </a:rPr>
+              <a:t>유닛 모듈러 기반 사용자</a:t>
+            </a:r>
+            <a:endParaRPr lang="en-US" sz="1008" dirty="0"/>
+          </a:p>
+        </p:txBody>
+      </p:sp>
+      <p:sp>
+        <p:nvSpPr>
+          <p:cNvPr id="85" name="맞춤형 리모델링 앱 개발"/>
+          <p:cNvSpPr txBox="1"/>
+          <p:nvPr/>
+        </p:nvSpPr>
+        <p:spPr>
+          <a:xfrm>
+            <a:off x="5242560" y="2745962"/>
+            <a:ext cx="1239648" cy="152400"/>
+          </a:xfrm>
+          <a:prstGeom prst="rect">
+            <a:avLst/>
+          </a:prstGeom>
+          <a:noFill/>
+          <a:ln/>
+        </p:spPr>
+        <p:txBody>
+          <a:bodyPr wrap="none" lIns="0" tIns="0" rIns="0" bIns="0" rtlCol="0" anchor="ctr"/>
+          <a:lstStyle/>
+          <a:p>
+            <a:pPr algn="l" indent="0" marL="0">
+              <a:buNone/>
+            </a:pPr>
+            <a:r>
+              <a:rPr lang="ko-KR" altLang="en-US" sz="1008" spc="-25" kern="0" dirty="0">
+                <a:solidFill>
+                  <a:srgbClr val="8A5A00"/>
+                </a:solidFill>
+                <a:latin typeface="Paperlogy 6 SemiBold" pitchFamily="34" charset="0"/>
+                <a:ea typeface="Paperlogy 6 SemiBold" pitchFamily="34" charset="-127"/>
+                <a:cs typeface="Paperlogy 6 SemiBold" pitchFamily="34" charset="-120"/>
+              </a:rPr>
+              <a:t>맞춤형 리모델링 앱 개발</a:t>
+            </a:r>
+            <a:endParaRPr lang="en-US" sz="1008" dirty="0"/>
+          </a:p>
+        </p:txBody>
+      </p:sp>
+      <p:sp>
+        <p:nvSpPr>
+          <p:cNvPr id="86" name="아이디어 시연 영상"/>
+          <p:cNvSpPr txBox="1"/>
+          <p:nvPr/>
+        </p:nvSpPr>
+        <p:spPr>
+          <a:xfrm>
+            <a:off x="5242560" y="2925128"/>
+            <a:ext cx="981178" cy="152400"/>
+          </a:xfrm>
+          <a:prstGeom prst="rect">
+            <a:avLst/>
+          </a:prstGeom>
+          <a:noFill/>
+          <a:ln/>
+        </p:spPr>
+        <p:txBody>
+          <a:bodyPr wrap="none" lIns="0" tIns="0" rIns="0" bIns="0" rtlCol="0" anchor="ctr"/>
+          <a:lstStyle/>
+          <a:p>
+            <a:pPr algn="l" indent="0" marL="0">
+              <a:buNone/>
+            </a:pPr>
+            <a:r>
+              <a:rPr lang="ko-KR" altLang="en-US" sz="1008" spc="-25" kern="0" dirty="0">
+                <a:solidFill>
+                  <a:srgbClr val="8A5A00"/>
+                </a:solidFill>
+                <a:latin typeface="Paperlogy 6 SemiBold" pitchFamily="34" charset="0"/>
+                <a:ea typeface="Paperlogy 6 SemiBold" pitchFamily="34" charset="-127"/>
+                <a:cs typeface="Paperlogy 6 SemiBold" pitchFamily="34" charset="-120"/>
+              </a:rPr>
+              <a:t>아이디어 시연 영상</a:t>
+            </a:r>
+            <a:endParaRPr lang="en-US" sz="1008" dirty="0"/>
+          </a:p>
+        </p:txBody>
+      </p:sp>
+      <p:sp>
+        <p:nvSpPr>
+          <p:cNvPr id="87" name="리모델링"/>
+          <p:cNvSpPr txBox="1"/>
+          <p:nvPr/>
+        </p:nvSpPr>
+        <p:spPr>
+          <a:xfrm>
+            <a:off x="1121664" y="3407283"/>
+            <a:ext cx="484061" cy="152400"/>
+          </a:xfrm>
+          <a:prstGeom prst="rect">
+            <a:avLst/>
+          </a:prstGeom>
+          <a:noFill/>
+          <a:ln/>
+        </p:spPr>
+        <p:txBody>
+          <a:bodyPr wrap="none" lIns="0" tIns="0" rIns="0" bIns="0" rtlCol="0" anchor="ctr"/>
+          <a:lstStyle/>
+          <a:p>
+            <a:pPr algn="l" indent="0" marL="0">
+              <a:buNone/>
+            </a:pPr>
+            <a:r>
+              <a:rPr lang="ko-KR" altLang="en-US" sz="1008" spc="-30" kern="0" dirty="0">
+                <a:solidFill>
+                  <a:srgbClr val="0B2147"/>
                 </a:solidFill>
                 <a:latin typeface="Paperlogy 7 Bold" pitchFamily="34" charset="0"/>
                 <a:ea typeface="Paperlogy 7 Bold" pitchFamily="34" charset="-127"/>
                 <a:cs typeface="Paperlogy 7 Bold" pitchFamily="34" charset="-120"/>
               </a:rPr>
-              <a:t>주제 미확정</a:t>
+              <a:t>리모델링</a:t>
             </a:r>
             <a:endParaRPr lang="en-US" sz="1008" dirty="0"/>
           </a:p>
@@ -2367,91 +3367,208 @@
       </p:sp>
       <p:sp>
         <p:nvSpPr>
-          <p:cNvPr id="51" name="참신성"/>
-          <p:cNvSpPr txBox="1"/>
-          <p:nvPr/>
-        </p:nvSpPr>
-        <p:spPr>
-          <a:xfrm>
-            <a:off x="699659" y="3349085"/>
-            <a:ext cx="331946" cy="134112"/>
-          </a:xfrm>
-          <a:prstGeom prst="rect">
-            <a:avLst/>
-          </a:prstGeom>
-          <a:noFill/>
-          <a:ln/>
-        </p:spPr>
-        <p:txBody>
-          <a:bodyPr wrap="none" lIns="0" tIns="0" rIns="0" bIns="0" rtlCol="0" anchor="ctr"/>
-          <a:lstStyle/>
-          <a:p>
-            <a:pPr algn="ctr" indent="0" marL="0">
-              <a:buNone/>
-            </a:pPr>
-            <a:r>
-              <a:rPr lang="ko-KR" altLang="en-US" sz="864" spc="-17" kern="0" dirty="0">
-                <a:solidFill>
-                  <a:srgbClr val="4B5568"/>
+          <p:cNvPr id="88" name="규모 입력"/>
+          <p:cNvSpPr txBox="1"/>
+          <p:nvPr/>
+        </p:nvSpPr>
+        <p:spPr>
+          <a:xfrm>
+            <a:off x="1121664" y="3573685"/>
+            <a:ext cx="508349" cy="152400"/>
+          </a:xfrm>
+          <a:prstGeom prst="rect">
+            <a:avLst/>
+          </a:prstGeom>
+          <a:noFill/>
+          <a:ln/>
+        </p:spPr>
+        <p:txBody>
+          <a:bodyPr wrap="none" lIns="0" tIns="0" rIns="0" bIns="0" rtlCol="0" anchor="ctr"/>
+          <a:lstStyle/>
+          <a:p>
+            <a:pPr algn="l" indent="0" marL="0">
+              <a:buNone/>
+            </a:pPr>
+            <a:r>
+              <a:rPr lang="ko-KR" altLang="en-US" sz="1008" spc="-30" kern="0" dirty="0">
+                <a:solidFill>
+                  <a:srgbClr val="0B2147"/>
                 </a:solidFill>
                 <a:latin typeface="Paperlogy 7 Bold" pitchFamily="34" charset="0"/>
                 <a:ea typeface="Paperlogy 7 Bold" pitchFamily="34" charset="-127"/>
                 <a:cs typeface="Paperlogy 7 Bold" pitchFamily="34" charset="-120"/>
               </a:rPr>
-              <a:t>참신성</a:t>
-            </a:r>
-            <a:endParaRPr lang="en-US" sz="864" dirty="0"/>
-          </a:p>
-        </p:txBody>
-      </p:sp>
-      <p:sp>
-        <p:nvSpPr>
-          <p:cNvPr id="52" name="구현 가능성"/>
-          <p:cNvSpPr txBox="1"/>
-          <p:nvPr/>
-        </p:nvSpPr>
-        <p:spPr>
-          <a:xfrm>
-            <a:off x="1155192" y="3349085"/>
-            <a:ext cx="542544" cy="134112"/>
-          </a:xfrm>
-          <a:prstGeom prst="rect">
-            <a:avLst/>
-          </a:prstGeom>
-          <a:noFill/>
-          <a:ln/>
-        </p:spPr>
-        <p:txBody>
-          <a:bodyPr wrap="none" lIns="0" tIns="0" rIns="0" bIns="0" rtlCol="0" anchor="ctr"/>
-          <a:lstStyle/>
-          <a:p>
-            <a:pPr algn="ctr" indent="0" marL="0">
-              <a:buNone/>
-            </a:pPr>
-            <a:r>
-              <a:rPr lang="ko-KR" altLang="en-US" sz="864" spc="-17" kern="0" dirty="0">
-                <a:solidFill>
-                  <a:srgbClr val="4B5568"/>
+              <a:t>규모 입력</a:t>
+            </a:r>
+            <a:endParaRPr lang="en-US" sz="1008" dirty="0"/>
+          </a:p>
+        </p:txBody>
+      </p:sp>
+      <p:sp>
+        <p:nvSpPr>
+          <p:cNvPr id="89" name="유닛 모듈러"/>
+          <p:cNvSpPr txBox="1"/>
+          <p:nvPr/>
+        </p:nvSpPr>
+        <p:spPr>
+          <a:xfrm>
+            <a:off x="3471958" y="3407283"/>
+            <a:ext cx="617220" cy="152400"/>
+          </a:xfrm>
+          <a:prstGeom prst="rect">
+            <a:avLst/>
+          </a:prstGeom>
+          <a:noFill/>
+          <a:ln/>
+        </p:spPr>
+        <p:txBody>
+          <a:bodyPr wrap="none" lIns="0" tIns="0" rIns="0" bIns="0" rtlCol="0" anchor="ctr"/>
+          <a:lstStyle/>
+          <a:p>
+            <a:pPr algn="l" indent="0" marL="0">
+              <a:buNone/>
+            </a:pPr>
+            <a:r>
+              <a:rPr lang="ko-KR" altLang="en-US" sz="1008" spc="-30" kern="0" dirty="0">
+                <a:solidFill>
+                  <a:srgbClr val="0B2147"/>
                 </a:solidFill>
                 <a:latin typeface="Paperlogy 7 Bold" pitchFamily="34" charset="0"/>
                 <a:ea typeface="Paperlogy 7 Bold" pitchFamily="34" charset="-127"/>
                 <a:cs typeface="Paperlogy 7 Bold" pitchFamily="34" charset="-120"/>
               </a:rPr>
-              <a:t>구현 가능성</a:t>
-            </a:r>
-            <a:endParaRPr lang="en-US" sz="864" dirty="0"/>
-          </a:p>
-        </p:txBody>
-      </p:sp>
-      <p:sp>
-        <p:nvSpPr>
-          <p:cNvPr id="53" name="01"/>
-          <p:cNvSpPr txBox="1"/>
-          <p:nvPr/>
-        </p:nvSpPr>
-        <p:spPr>
-          <a:xfrm>
-            <a:off x="2023872" y="2756249"/>
+              <a:t>유닛 모듈러</a:t>
+            </a:r>
+            <a:endParaRPr lang="en-US" sz="1008" dirty="0"/>
+          </a:p>
+        </p:txBody>
+      </p:sp>
+      <p:sp>
+        <p:nvSpPr>
+          <p:cNvPr id="90" name="배치"/>
+          <p:cNvSpPr txBox="1"/>
+          <p:nvPr/>
+        </p:nvSpPr>
+        <p:spPr>
+          <a:xfrm>
+            <a:off x="3471958" y="3573685"/>
+            <a:ext cx="266414" cy="152400"/>
+          </a:xfrm>
+          <a:prstGeom prst="rect">
+            <a:avLst/>
+          </a:prstGeom>
+          <a:noFill/>
+          <a:ln/>
+        </p:spPr>
+        <p:txBody>
+          <a:bodyPr wrap="none" lIns="0" tIns="0" rIns="0" bIns="0" rtlCol="0" anchor="ctr"/>
+          <a:lstStyle/>
+          <a:p>
+            <a:pPr algn="l" indent="0" marL="0">
+              <a:buNone/>
+            </a:pPr>
+            <a:r>
+              <a:rPr lang="ko-KR" altLang="en-US" sz="1008" spc="-30" kern="0" dirty="0">
+                <a:solidFill>
+                  <a:srgbClr val="0B2147"/>
+                </a:solidFill>
+                <a:latin typeface="Paperlogy 7 Bold" pitchFamily="34" charset="0"/>
+                <a:ea typeface="Paperlogy 7 Bold" pitchFamily="34" charset="-127"/>
+                <a:cs typeface="Paperlogy 7 Bold" pitchFamily="34" charset="-120"/>
+              </a:rPr>
+              <a:t>배치</a:t>
+            </a:r>
+            <a:endParaRPr lang="en-US" sz="1008" dirty="0"/>
+          </a:p>
+        </p:txBody>
+      </p:sp>
+      <p:sp>
+        <p:nvSpPr>
+          <p:cNvPr id="91" name="모듈 수 · 자재 물량"/>
+          <p:cNvSpPr txBox="1"/>
+          <p:nvPr/>
+        </p:nvSpPr>
+        <p:spPr>
+          <a:xfrm>
+            <a:off x="5931122" y="3407283"/>
+            <a:ext cx="950182" cy="152400"/>
+          </a:xfrm>
+          <a:prstGeom prst="rect">
+            <a:avLst/>
+          </a:prstGeom>
+          <a:noFill/>
+          <a:ln/>
+        </p:spPr>
+        <p:txBody>
+          <a:bodyPr wrap="none" lIns="0" tIns="0" rIns="0" bIns="0" rtlCol="0" anchor="ctr"/>
+          <a:lstStyle/>
+          <a:p>
+            <a:pPr algn="l" indent="0" marL="0">
+              <a:buNone/>
+            </a:pPr>
+            <a:r>
+              <a:rPr lang="ko-KR" altLang="en-US" sz="1008" spc="-30" kern="0" dirty="0">
+                <a:solidFill>
+                  <a:srgbClr val="0B2147"/>
+                </a:solidFill>
+                <a:latin typeface="Paperlogy 7 Bold" pitchFamily="34" charset="0"/>
+                <a:ea typeface="Paperlogy 7 Bold" pitchFamily="34" charset="-127"/>
+                <a:cs typeface="Paperlogy 7 Bold" pitchFamily="34" charset="-120"/>
+              </a:rPr>
+              <a:t>모듈 수 · 자재 물량</a:t>
+            </a:r>
+            <a:endParaRPr lang="en-US" sz="1008" dirty="0"/>
+          </a:p>
+        </p:txBody>
+      </p:sp>
+      <p:sp>
+        <p:nvSpPr>
+          <p:cNvPr id="92" name="자동 산출"/>
+          <p:cNvSpPr txBox="1"/>
+          <p:nvPr/>
+        </p:nvSpPr>
+        <p:spPr>
+          <a:xfrm>
+            <a:off x="5931122" y="3573685"/>
+            <a:ext cx="508349" cy="152400"/>
+          </a:xfrm>
+          <a:prstGeom prst="rect">
+            <a:avLst/>
+          </a:prstGeom>
+          <a:noFill/>
+          <a:ln/>
+        </p:spPr>
+        <p:txBody>
+          <a:bodyPr wrap="none" lIns="0" tIns="0" rIns="0" bIns="0" rtlCol="0" anchor="ctr"/>
+          <a:lstStyle/>
+          <a:p>
+            <a:pPr algn="l" indent="0" marL="0">
+              <a:buNone/>
+            </a:pPr>
+            <a:r>
+              <a:rPr lang="ko-KR" altLang="en-US" sz="1008" spc="-30" kern="0" dirty="0">
+                <a:solidFill>
+                  <a:srgbClr val="0B2147"/>
+                </a:solidFill>
+                <a:latin typeface="Paperlogy 7 Bold" pitchFamily="34" charset="0"/>
+                <a:ea typeface="Paperlogy 7 Bold" pitchFamily="34" charset="-127"/>
+                <a:cs typeface="Paperlogy 7 Bold" pitchFamily="34" charset="-120"/>
+              </a:rPr>
+              <a:t>자동 산출</a:t>
+            </a:r>
+            <a:endParaRPr lang="en-US" sz="1008" dirty="0"/>
+          </a:p>
+        </p:txBody>
+      </p:sp>
+      <p:sp>
+        <p:nvSpPr>
+          <p:cNvPr id="93" name="01"/>
+          <p:cNvSpPr txBox="1"/>
+          <p:nvPr/>
+        </p:nvSpPr>
+        <p:spPr>
+          <a:xfrm>
+            <a:off x="1499616" y="4047363"/>
             <a:ext cx="203930" cy="134112"/>
           </a:xfrm>
           <a:prstGeom prst="rect">
@@ -2484,13 +3601,13 @@
       </p:sp>
       <p:sp>
         <p:nvSpPr>
-          <p:cNvPr id="54" name="CONFLICT"/>
-          <p:cNvSpPr txBox="1"/>
-          <p:nvPr/>
-        </p:nvSpPr>
-        <p:spPr>
-          <a:xfrm>
-            <a:off x="2459450" y="2756249"/>
+          <p:cNvPr id="94" name="CONFLICT"/>
+          <p:cNvSpPr txBox="1"/>
+          <p:nvPr/>
+        </p:nvSpPr>
+        <p:spPr>
+          <a:xfrm>
+            <a:off x="1935194" y="4047363"/>
             <a:ext cx="771906" cy="134112"/>
           </a:xfrm>
           <a:prstGeom prst="rect">
@@ -2523,14 +3640,14 @@
       </p:sp>
       <p:sp>
         <p:nvSpPr>
-          <p:cNvPr id="55" name="서로 다른 의견"/>
-          <p:cNvSpPr txBox="1"/>
-          <p:nvPr/>
-        </p:nvSpPr>
-        <p:spPr>
-          <a:xfrm>
-            <a:off x="2023872" y="2964085"/>
-            <a:ext cx="956139" cy="188976"/>
+          <p:cNvPr id="95" name="주제 선정 의견 충돌"/>
+          <p:cNvSpPr txBox="1"/>
+          <p:nvPr/>
+        </p:nvSpPr>
+        <p:spPr>
+          <a:xfrm>
+            <a:off x="1499616" y="4230815"/>
+            <a:ext cx="1285890" cy="188976"/>
           </a:xfrm>
           <a:prstGeom prst="rect">
             <a:avLst/>
@@ -2554,7 +3671,7 @@
                 <a:ea typeface="Paperlogy 7 Bold" pitchFamily="34" charset="-127"/>
                 <a:cs typeface="Paperlogy 7 Bold" pitchFamily="34" charset="-120"/>
               </a:rPr>
-              <a:t>서로 다른 의견</a:t>
+              <a:t>주제 선정 의견 충돌</a:t>
             </a:r>
             <a:endParaRPr lang="en-US" sz="1296" dirty="0"/>
           </a:p>
@@ -2562,30 +3679,30 @@
       </p:sp>
       <p:sp>
         <p:nvSpPr>
-          <p:cNvPr id="56" name="참신성 ↔ 구현 가능성"/>
-          <p:cNvSpPr txBox="1"/>
-          <p:nvPr/>
-        </p:nvSpPr>
-        <p:spPr>
-          <a:xfrm>
-            <a:off x="2304288" y="3395948"/>
-            <a:ext cx="1341724" cy="176784"/>
-          </a:xfrm>
-          <a:prstGeom prst="rect">
-            <a:avLst/>
-          </a:prstGeom>
-          <a:noFill/>
-          <a:ln/>
-        </p:spPr>
-        <p:txBody>
-          <a:bodyPr wrap="none" lIns="0" tIns="0" rIns="0" bIns="0" rtlCol="0" anchor="ctr"/>
-          <a:lstStyle/>
-          <a:p>
-            <a:pPr algn="l" indent="0" marL="0">
-              <a:buNone/>
-            </a:pPr>
-            <a:r>
-              <a:rPr lang="ko-KR" altLang="en-US" sz="1200" spc="-24" kern="0" dirty="0">
+          <p:cNvPr id="96" name="참신성 ↔ 구현 가능성"/>
+          <p:cNvSpPr txBox="1"/>
+          <p:nvPr/>
+        </p:nvSpPr>
+        <p:spPr>
+          <a:xfrm>
+            <a:off x="1749552" y="4553141"/>
+            <a:ext cx="1127072" cy="152400"/>
+          </a:xfrm>
+          <a:prstGeom prst="rect">
+            <a:avLst/>
+          </a:prstGeom>
+          <a:noFill/>
+          <a:ln/>
+        </p:spPr>
+        <p:txBody>
+          <a:bodyPr wrap="none" lIns="0" tIns="0" rIns="0" bIns="0" rtlCol="0" anchor="ctr"/>
+          <a:lstStyle/>
+          <a:p>
+            <a:pPr algn="l" indent="0" marL="0">
+              <a:buNone/>
+            </a:pPr>
+            <a:r>
+              <a:rPr lang="ko-KR" altLang="en-US" sz="1008" spc="-20" kern="0" dirty="0">
                 <a:solidFill>
                   <a:srgbClr val="4B5568"/>
                 </a:solidFill>
@@ -2595,36 +3712,36 @@
               </a:rPr>
               <a:t>참신성 ↔ 구현 가능성</a:t>
             </a:r>
-            <a:endParaRPr lang="en-US" sz="1200" dirty="0"/>
-          </a:p>
-        </p:txBody>
-      </p:sp>
-      <p:sp>
-        <p:nvSpPr>
-          <p:cNvPr id="57" name="마감 3주 전 주제 미확정"/>
-          <p:cNvSpPr txBox="1"/>
-          <p:nvPr/>
-        </p:nvSpPr>
-        <p:spPr>
-          <a:xfrm>
-            <a:off x="4852416" y="3395948"/>
-            <a:ext cx="1484085" cy="176784"/>
-          </a:xfrm>
-          <a:prstGeom prst="rect">
-            <a:avLst/>
-          </a:prstGeom>
-          <a:noFill/>
-          <a:ln/>
-        </p:spPr>
-        <p:txBody>
-          <a:bodyPr wrap="none" lIns="0" tIns="0" rIns="0" bIns="0" rtlCol="0" anchor="ctr"/>
-          <a:lstStyle/>
-          <a:p>
-            <a:pPr algn="l" indent="0" marL="0">
-              <a:buNone/>
-            </a:pPr>
-            <a:r>
-              <a:rPr lang="ko-KR" altLang="en-US" sz="1200" spc="-24" kern="0" dirty="0">
+            <a:endParaRPr lang="en-US" sz="1008" dirty="0"/>
+          </a:p>
+        </p:txBody>
+      </p:sp>
+      <p:sp>
+        <p:nvSpPr>
+          <p:cNvPr id="97" name="마감 3주 전까지 주제 미확정"/>
+          <p:cNvSpPr txBox="1"/>
+          <p:nvPr/>
+        </p:nvSpPr>
+        <p:spPr>
+          <a:xfrm>
+            <a:off x="3312700" y="4553141"/>
+            <a:ext cx="1480046" cy="152400"/>
+          </a:xfrm>
+          <a:prstGeom prst="rect">
+            <a:avLst/>
+          </a:prstGeom>
+          <a:noFill/>
+          <a:ln/>
+        </p:spPr>
+        <p:txBody>
+          <a:bodyPr wrap="none" lIns="0" tIns="0" rIns="0" bIns="0" rtlCol="0" anchor="ctr"/>
+          <a:lstStyle/>
+          <a:p>
+            <a:pPr algn="l" indent="0" marL="0">
+              <a:buNone/>
+            </a:pPr>
+            <a:r>
+              <a:rPr lang="ko-KR" altLang="en-US" sz="1008" spc="-20" kern="0" dirty="0">
                 <a:solidFill>
                   <a:srgbClr val="4B5568"/>
                 </a:solidFill>
@@ -2632,22 +3749,22 @@
                 <a:ea typeface="Paperlogy 6 SemiBold" pitchFamily="34" charset="-127"/>
                 <a:cs typeface="Paperlogy 6 SemiBold" pitchFamily="34" charset="-120"/>
               </a:rPr>
-              <a:t>마감 3주 전 주제 미확정</a:t>
-            </a:r>
-            <a:endParaRPr lang="en-US" sz="1200" dirty="0"/>
-          </a:p>
-        </p:txBody>
-      </p:sp>
-      <p:sp>
-        <p:nvSpPr>
-          <p:cNvPr id="58" name="공통"/>
-          <p:cNvSpPr txBox="1"/>
-          <p:nvPr/>
-        </p:nvSpPr>
-        <p:spPr>
-          <a:xfrm>
-            <a:off x="1027271" y="4758785"/>
-            <a:ext cx="237554" cy="134112"/>
+              <a:t>마감 3주 전까지 주제 미확정</a:t>
+            </a:r>
+            <a:endParaRPr lang="en-US" sz="1008" dirty="0"/>
+          </a:p>
+        </p:txBody>
+      </p:sp>
+      <p:sp>
+        <p:nvSpPr>
+          <p:cNvPr id="98" name="기준"/>
+          <p:cNvSpPr txBox="1"/>
+          <p:nvPr/>
+        </p:nvSpPr>
+        <p:spPr>
+          <a:xfrm>
+            <a:off x="784527" y="5303377"/>
+            <a:ext cx="235363" cy="134112"/>
           </a:xfrm>
           <a:prstGeom prst="rect">
             <a:avLst/>
@@ -2663,7 +3780,7 @@
               <a:buNone/>
             </a:pPr>
             <a:r>
-              <a:rPr lang="ko-KR" altLang="en-US" sz="864" spc="-17" kern="0" dirty="0">
+              <a:rPr lang="ko-KR" altLang="en-US" sz="864" spc="-26" kern="0" dirty="0">
                 <a:solidFill>
                   <a:srgbClr val="FFFFFF"/>
                 </a:solidFill>
@@ -2671,7 +3788,7 @@
                 <a:ea typeface="Paperlogy 7 Bold" pitchFamily="34" charset="-127"/>
                 <a:cs typeface="Paperlogy 7 Bold" pitchFamily="34" charset="-120"/>
               </a:rPr>
-              <a:t>공통</a:t>
+              <a:t>기준</a:t>
             </a:r>
             <a:endParaRPr lang="en-US" sz="864" dirty="0"/>
           </a:p>
@@ -2679,38 +3796,77 @@
       </p:sp>
       <p:sp>
         <p:nvSpPr>
-          <p:cNvPr id="59" name="기준"/>
-          <p:cNvSpPr txBox="1"/>
-          <p:nvPr/>
-        </p:nvSpPr>
-        <p:spPr>
-          <a:xfrm>
-            <a:off x="1027271" y="4884896"/>
-            <a:ext cx="237554" cy="134112"/>
-          </a:xfrm>
-          <a:prstGeom prst="rect">
-            <a:avLst/>
-          </a:prstGeom>
-          <a:noFill/>
-          <a:ln/>
-        </p:spPr>
-        <p:txBody>
-          <a:bodyPr wrap="none" lIns="0" tIns="0" rIns="0" bIns="0" rtlCol="0" anchor="ctr"/>
-          <a:lstStyle/>
-          <a:p>
-            <a:pPr algn="ctr" indent="0" marL="0">
-              <a:buNone/>
-            </a:pPr>
-            <a:r>
-              <a:rPr lang="ko-KR" altLang="en-US" sz="864" spc="-17" kern="0" dirty="0">
-                <a:solidFill>
-                  <a:srgbClr val="FFFFFF"/>
+          <p:cNvPr id="99" name="02"/>
+          <p:cNvSpPr txBox="1"/>
+          <p:nvPr/>
+        </p:nvSpPr>
+        <p:spPr>
+          <a:xfrm>
+            <a:off x="1499616" y="5018723"/>
+            <a:ext cx="203930" cy="134112"/>
+          </a:xfrm>
+          <a:prstGeom prst="rect">
+            <a:avLst/>
+          </a:prstGeom>
+          <a:noFill/>
+          <a:ln/>
+        </p:spPr>
+        <p:txBody>
+          <a:bodyPr wrap="none" lIns="0" tIns="0" rIns="0" bIns="0" rtlCol="0" anchor="ctr"/>
+          <a:lstStyle/>
+          <a:p>
+            <a:pPr algn="l" indent="0" marL="0">
+              <a:buNone/>
+            </a:pPr>
+            <a:r>
+              <a:rPr lang="ko-KR" altLang="en-US" sz="864" spc="35" kern="0" dirty="0">
+                <a:solidFill>
+                  <a:srgbClr val="004B8D"/>
+                </a:solidFill>
+                <a:latin typeface="Paperlogy 8 ExtraBold" pitchFamily="34" charset="0"/>
+                <a:ea typeface="Paperlogy 8 ExtraBold" pitchFamily="34" charset="-127"/>
+                <a:cs typeface="Paperlogy 8 ExtraBold" pitchFamily="34" charset="-120"/>
+              </a:rPr>
+              <a:t>02</a:t>
+            </a:r>
+            <a:endParaRPr lang="en-US" sz="864" dirty="0"/>
+          </a:p>
+        </p:txBody>
+      </p:sp>
+      <p:sp>
+        <p:nvSpPr>
+          <p:cNvPr id="100" name="ALIGN"/>
+          <p:cNvSpPr txBox="1"/>
+          <p:nvPr/>
+        </p:nvSpPr>
+        <p:spPr>
+          <a:xfrm>
+            <a:off x="1935194" y="5018723"/>
+            <a:ext cx="495776" cy="134112"/>
+          </a:xfrm>
+          <a:prstGeom prst="rect">
+            <a:avLst/>
+          </a:prstGeom>
+          <a:noFill/>
+          <a:ln/>
+        </p:spPr>
+        <p:txBody>
+          <a:bodyPr wrap="none" lIns="0" tIns="0" rIns="0" bIns="0" rtlCol="0" anchor="ctr"/>
+          <a:lstStyle/>
+          <a:p>
+            <a:pPr algn="l" indent="0" marL="0">
+              <a:buNone/>
+            </a:pPr>
+            <a:r>
+              <a:rPr lang="ko-KR" altLang="en-US" sz="864" spc="138" kern="0" dirty="0">
+                <a:solidFill>
+                  <a:srgbClr val="2A78DD"/>
                 </a:solidFill>
                 <a:latin typeface="Paperlogy 7 Bold" pitchFamily="34" charset="0"/>
                 <a:ea typeface="Paperlogy 7 Bold" pitchFamily="34" charset="-127"/>
                 <a:cs typeface="Paperlogy 7 Bold" pitchFamily="34" charset="-120"/>
               </a:rPr>
-              <a:t>기준</a:t>
+              <a:t>ALIGN</a:t>
             </a:r>
             <a:endParaRPr lang="en-US" sz="864" dirty="0"/>
           </a:p>
@@ -2718,13 +3874,169 @@
       </p:sp>
       <p:sp>
         <p:nvSpPr>
-          <p:cNvPr id="60" name="02"/>
-          <p:cNvSpPr txBox="1"/>
-          <p:nvPr/>
-        </p:nvSpPr>
-        <p:spPr>
-          <a:xfrm>
-            <a:off x="2023872" y="4424077"/>
+          <p:cNvPr id="101" name="의견 조율 · 주제 확정"/>
+          <p:cNvSpPr txBox="1"/>
+          <p:nvPr/>
+        </p:nvSpPr>
+        <p:spPr>
+          <a:xfrm>
+            <a:off x="1499616" y="5202174"/>
+            <a:ext cx="1369994" cy="188976"/>
+          </a:xfrm>
+          <a:prstGeom prst="rect">
+            <a:avLst/>
+          </a:prstGeom>
+          <a:noFill/>
+          <a:ln/>
+        </p:spPr>
+        <p:txBody>
+          <a:bodyPr wrap="none" lIns="0" tIns="0" rIns="0" bIns="0" rtlCol="0" anchor="ctr"/>
+          <a:lstStyle/>
+          <a:p>
+            <a:pPr algn="l" indent="0" marL="0">
+              <a:buNone/>
+            </a:pPr>
+            <a:r>
+              <a:rPr lang="ko-KR" altLang="en-US" sz="1296" spc="-39" kern="0" dirty="0">
+                <a:solidFill>
+                  <a:srgbClr val="0B2147"/>
+                </a:solidFill>
+                <a:latin typeface="Paperlogy 7 Bold" pitchFamily="34" charset="0"/>
+                <a:ea typeface="Paperlogy 7 Bold" pitchFamily="34" charset="-127"/>
+                <a:cs typeface="Paperlogy 7 Bold" pitchFamily="34" charset="-120"/>
+              </a:rPr>
+              <a:t>의견 조율 · 주제 확정</a:t>
+            </a:r>
+            <a:endParaRPr lang="en-US" sz="1296" dirty="0"/>
+          </a:p>
+        </p:txBody>
+      </p:sp>
+      <p:sp>
+        <p:nvSpPr>
+          <p:cNvPr id="102" name="경청 · 수상작 분석 · 교수님 조언"/>
+          <p:cNvSpPr txBox="1"/>
+          <p:nvPr/>
+        </p:nvSpPr>
+        <p:spPr>
+          <a:xfrm>
+            <a:off x="1749552" y="5524500"/>
+            <a:ext cx="1641691" cy="152400"/>
+          </a:xfrm>
+          <a:prstGeom prst="rect">
+            <a:avLst/>
+          </a:prstGeom>
+          <a:noFill/>
+          <a:ln/>
+        </p:spPr>
+        <p:txBody>
+          <a:bodyPr wrap="none" lIns="0" tIns="0" rIns="0" bIns="0" rtlCol="0" anchor="ctr"/>
+          <a:lstStyle/>
+          <a:p>
+            <a:pPr algn="l" indent="0" marL="0">
+              <a:buNone/>
+            </a:pPr>
+            <a:r>
+              <a:rPr lang="ko-KR" altLang="en-US" sz="1008" spc="-20" kern="0" dirty="0">
+                <a:solidFill>
+                  <a:srgbClr val="4B5568"/>
+                </a:solidFill>
+                <a:latin typeface="Paperlogy 6 SemiBold" pitchFamily="34" charset="0"/>
+                <a:ea typeface="Paperlogy 6 SemiBold" pitchFamily="34" charset="-127"/>
+                <a:cs typeface="Paperlogy 6 SemiBold" pitchFamily="34" charset="-120"/>
+              </a:rPr>
+              <a:t>경청 · 수상작 분석 · 교수님 조언</a:t>
+            </a:r>
+            <a:endParaRPr lang="en-US" sz="1008" dirty="0"/>
+          </a:p>
+        </p:txBody>
+      </p:sp>
+      <p:sp>
+        <p:nvSpPr>
+          <p:cNvPr id="103" name="판단 기준 마련"/>
+          <p:cNvSpPr txBox="1"/>
+          <p:nvPr/>
+        </p:nvSpPr>
+        <p:spPr>
+          <a:xfrm>
+            <a:off x="3889629" y="5524500"/>
+            <a:ext cx="760571" cy="152400"/>
+          </a:xfrm>
+          <a:prstGeom prst="rect">
+            <a:avLst/>
+          </a:prstGeom>
+          <a:noFill/>
+          <a:ln/>
+        </p:spPr>
+        <p:txBody>
+          <a:bodyPr wrap="none" lIns="0" tIns="0" rIns="0" bIns="0" rtlCol="0" anchor="ctr"/>
+          <a:lstStyle/>
+          <a:p>
+            <a:pPr algn="l" indent="0" marL="0">
+              <a:buNone/>
+            </a:pPr>
+            <a:r>
+              <a:rPr lang="ko-KR" altLang="en-US" sz="1008" spc="-20" kern="0" dirty="0">
+                <a:solidFill>
+                  <a:srgbClr val="4B5568"/>
+                </a:solidFill>
+                <a:latin typeface="Paperlogy 6 SemiBold" pitchFamily="34" charset="0"/>
+                <a:ea typeface="Paperlogy 6 SemiBold" pitchFamily="34" charset="-127"/>
+                <a:cs typeface="Paperlogy 6 SemiBold" pitchFamily="34" charset="-120"/>
+              </a:rPr>
+              <a:t>판단 기준 마련</a:t>
+            </a:r>
+            <a:endParaRPr lang="en-US" sz="1008" dirty="0"/>
+          </a:p>
+        </p:txBody>
+      </p:sp>
+      <p:sp>
+        <p:nvSpPr>
+          <p:cNvPr id="104" name="주제 합의"/>
+          <p:cNvSpPr txBox="1"/>
+          <p:nvPr/>
+        </p:nvSpPr>
+        <p:spPr>
+          <a:xfrm>
+            <a:off x="5192744" y="5524500"/>
+            <a:ext cx="514826" cy="152400"/>
+          </a:xfrm>
+          <a:prstGeom prst="rect">
+            <a:avLst/>
+          </a:prstGeom>
+          <a:noFill/>
+          <a:ln/>
+        </p:spPr>
+        <p:txBody>
+          <a:bodyPr wrap="none" lIns="0" tIns="0" rIns="0" bIns="0" rtlCol="0" anchor="ctr"/>
+          <a:lstStyle/>
+          <a:p>
+            <a:pPr algn="l" indent="0" marL="0">
+              <a:buNone/>
+            </a:pPr>
+            <a:r>
+              <a:rPr lang="ko-KR" altLang="en-US" sz="1008" spc="-20" kern="0" dirty="0">
+                <a:solidFill>
+                  <a:srgbClr val="004B8D"/>
+                </a:solidFill>
+                <a:latin typeface="Paperlogy 7 Bold" pitchFamily="34" charset="0"/>
+                <a:ea typeface="Paperlogy 7 Bold" pitchFamily="34" charset="-127"/>
+                <a:cs typeface="Paperlogy 7 Bold" pitchFamily="34" charset="-120"/>
+              </a:rPr>
+              <a:t>주제 합의</a:t>
+            </a:r>
+            <a:endParaRPr lang="en-US" sz="1008" dirty="0"/>
+          </a:p>
+        </p:txBody>
+      </p:sp>
+      <p:sp>
+        <p:nvSpPr>
+          <p:cNvPr id="105" name="03"/>
+          <p:cNvSpPr txBox="1"/>
+          <p:nvPr/>
+        </p:nvSpPr>
+        <p:spPr>
+          <a:xfrm>
+            <a:off x="1499616" y="5969318"/>
             <a:ext cx="203930" cy="134112"/>
           </a:xfrm>
           <a:prstGeom prst="rect">
@@ -2749,7 +4061,7 @@
                 <a:ea typeface="Paperlogy 8 ExtraBold" pitchFamily="34" charset="-127"/>
                 <a:cs typeface="Paperlogy 8 ExtraBold" pitchFamily="34" charset="-120"/>
               </a:rPr>
-              <a:t>02</a:t>
+              <a:t>03</a:t>
             </a:r>
             <a:endParaRPr lang="en-US" sz="864" dirty="0"/>
           </a:p>
@@ -2757,14 +4069,14 @@
       </p:sp>
       <p:sp>
         <p:nvSpPr>
-          <p:cNvPr id="61" name="ALIGN"/>
-          <p:cNvSpPr txBox="1"/>
-          <p:nvPr/>
-        </p:nvSpPr>
-        <p:spPr>
-          <a:xfrm>
-            <a:off x="2459450" y="4424077"/>
-            <a:ext cx="495776" cy="134112"/>
+          <p:cNvPr id="106" name="ONE TEAM"/>
+          <p:cNvSpPr txBox="1"/>
+          <p:nvPr/>
+        </p:nvSpPr>
+        <p:spPr>
+          <a:xfrm>
+            <a:off x="1935194" y="5969318"/>
+            <a:ext cx="801624" cy="134112"/>
           </a:xfrm>
           <a:prstGeom prst="rect">
             <a:avLst/>
@@ -2788,7 +4100,7 @@
                 <a:ea typeface="Paperlogy 7 Bold" pitchFamily="34" charset="-127"/>
                 <a:cs typeface="Paperlogy 7 Bold" pitchFamily="34" charset="-120"/>
               </a:rPr>
-              <a:t>ALIGN</a:t>
+              <a:t>ONE TEAM</a:t>
             </a:r>
             <a:endParaRPr lang="en-US" sz="864" dirty="0"/>
           </a:p>
@@ -2796,14 +4108,14 @@
       </p:sp>
       <p:sp>
         <p:nvSpPr>
-          <p:cNvPr id="62" name="의견 조율 · 공통 기준 마련"/>
-          <p:cNvSpPr txBox="1"/>
-          <p:nvPr/>
-        </p:nvSpPr>
-        <p:spPr>
-          <a:xfrm>
-            <a:off x="2023872" y="4631912"/>
-            <a:ext cx="1699746" cy="188976"/>
+          <p:cNvPr id="107" name="강점 기반 역할 분담 · 지속적인 공유"/>
+          <p:cNvSpPr txBox="1"/>
+          <p:nvPr/>
+        </p:nvSpPr>
+        <p:spPr>
+          <a:xfrm>
+            <a:off x="1499616" y="6152769"/>
+            <a:ext cx="2326133" cy="188976"/>
           </a:xfrm>
           <a:prstGeom prst="rect">
             <a:avLst/>
@@ -2827,7 +4139,7 @@
                 <a:ea typeface="Paperlogy 7 Bold" pitchFamily="34" charset="-127"/>
                 <a:cs typeface="Paperlogy 7 Bold" pitchFamily="34" charset="-120"/>
               </a:rPr>
-              <a:t>의견 조율 · 공통 기준 마련</a:t>
+              <a:t>강점 기반 역할 분담 · 지속적인 공유</a:t>
             </a:r>
             <a:endParaRPr lang="en-US" sz="1296" dirty="0"/>
           </a:p>
@@ -2835,225 +4147,459 @@
       </p:sp>
       <p:sp>
         <p:nvSpPr>
-          <p:cNvPr id="63" name="경청 · 수상작 분석 · 교수님 조언"/>
-          <p:cNvSpPr txBox="1"/>
-          <p:nvPr/>
-        </p:nvSpPr>
-        <p:spPr>
-          <a:xfrm>
-            <a:off x="2304288" y="5063776"/>
-            <a:ext cx="1954380" cy="176784"/>
-          </a:xfrm>
-          <a:prstGeom prst="rect">
-            <a:avLst/>
-          </a:prstGeom>
-          <a:noFill/>
-          <a:ln/>
-        </p:spPr>
-        <p:txBody>
-          <a:bodyPr wrap="none" lIns="0" tIns="0" rIns="0" bIns="0" rtlCol="0" anchor="ctr"/>
-          <a:lstStyle/>
-          <a:p>
-            <a:pPr algn="l" indent="0" marL="0">
-              <a:buNone/>
-            </a:pPr>
-            <a:r>
-              <a:rPr lang="ko-KR" altLang="en-US" sz="1200" spc="-24" kern="0" dirty="0">
-                <a:solidFill>
-                  <a:srgbClr val="4B5568"/>
+          <p:cNvPr id="108" name="팀장"/>
+          <p:cNvSpPr txBox="1"/>
+          <p:nvPr/>
+        </p:nvSpPr>
+        <p:spPr>
+          <a:xfrm>
+            <a:off x="1877568" y="6543485"/>
+            <a:ext cx="307848" cy="176784"/>
+          </a:xfrm>
+          <a:prstGeom prst="rect">
+            <a:avLst/>
+          </a:prstGeom>
+          <a:noFill/>
+          <a:ln/>
+        </p:spPr>
+        <p:txBody>
+          <a:bodyPr wrap="none" lIns="0" tIns="0" rIns="0" bIns="0" rtlCol="0" anchor="ctr"/>
+          <a:lstStyle/>
+          <a:p>
+            <a:pPr algn="l" indent="0" marL="0">
+              <a:buNone/>
+            </a:pPr>
+            <a:r>
+              <a:rPr lang="ko-KR" altLang="en-US" sz="1200" spc="-36" kern="0" dirty="0">
+                <a:solidFill>
+                  <a:srgbClr val="0B2147"/>
+                </a:solidFill>
+                <a:latin typeface="Paperlogy 8 ExtraBold" pitchFamily="34" charset="0"/>
+                <a:ea typeface="Paperlogy 8 ExtraBold" pitchFamily="34" charset="-127"/>
+                <a:cs typeface="Paperlogy 8 ExtraBold" pitchFamily="34" charset="-120"/>
+              </a:rPr>
+              <a:t>팀장</a:t>
+            </a:r>
+            <a:endParaRPr lang="en-US" sz="1200" dirty="0"/>
+          </a:p>
+        </p:txBody>
+      </p:sp>
+      <p:sp>
+        <p:nvSpPr>
+          <p:cNvPr id="109" name="나"/>
+          <p:cNvSpPr txBox="1"/>
+          <p:nvPr/>
+        </p:nvSpPr>
+        <p:spPr>
+          <a:xfrm>
+            <a:off x="2264664" y="6568345"/>
+            <a:ext cx="144304" cy="134112"/>
+          </a:xfrm>
+          <a:prstGeom prst="rect">
+            <a:avLst/>
+          </a:prstGeom>
+          <a:noFill/>
+          <a:ln/>
+        </p:spPr>
+        <p:txBody>
+          <a:bodyPr wrap="none" lIns="0" tIns="0" rIns="0" bIns="0" rtlCol="0" anchor="ctr"/>
+          <a:lstStyle/>
+          <a:p>
+            <a:pPr algn="l" indent="0" marL="0">
+              <a:buNone/>
+            </a:pPr>
+            <a:r>
+              <a:rPr lang="ko-KR" altLang="en-US" sz="864" spc="-9" kern="0" dirty="0">
+                <a:solidFill>
+                  <a:srgbClr val="FFFFFF"/>
+                </a:solidFill>
+                <a:latin typeface="Paperlogy 7 Bold" pitchFamily="34" charset="0"/>
+                <a:ea typeface="Paperlogy 7 Bold" pitchFamily="34" charset="-127"/>
+                <a:cs typeface="Paperlogy 7 Bold" pitchFamily="34" charset="-120"/>
+              </a:rPr>
+              <a:t>나</a:t>
+            </a:r>
+            <a:endParaRPr lang="en-US" sz="864" dirty="0"/>
+          </a:p>
+        </p:txBody>
+      </p:sp>
+      <p:sp>
+        <p:nvSpPr>
+          <p:cNvPr id="110" name="프로젝트 총괄"/>
+          <p:cNvSpPr txBox="1"/>
+          <p:nvPr/>
+        </p:nvSpPr>
+        <p:spPr>
+          <a:xfrm>
+            <a:off x="1633728" y="6813233"/>
+            <a:ext cx="730472" cy="152400"/>
+          </a:xfrm>
+          <a:prstGeom prst="rect">
+            <a:avLst/>
+          </a:prstGeom>
+          <a:noFill/>
+          <a:ln/>
+        </p:spPr>
+        <p:txBody>
+          <a:bodyPr wrap="none" lIns="0" tIns="0" rIns="0" bIns="0" rtlCol="0" anchor="ctr"/>
+          <a:lstStyle/>
+          <a:p>
+            <a:pPr algn="l" indent="0" marL="0">
+              <a:buNone/>
+            </a:pPr>
+            <a:r>
+              <a:rPr lang="ko-KR" altLang="en-US" sz="1008" spc="-25" kern="0" dirty="0">
+                <a:solidFill>
+                  <a:srgbClr val="1C2536"/>
                 </a:solidFill>
                 <a:latin typeface="Paperlogy 6 SemiBold" pitchFamily="34" charset="0"/>
                 <a:ea typeface="Paperlogy 6 SemiBold" pitchFamily="34" charset="-127"/>
                 <a:cs typeface="Paperlogy 6 SemiBold" pitchFamily="34" charset="-120"/>
               </a:rPr>
-              <a:t>경청 · 수상작 분석 · 교수님 조언</a:t>
-            </a:r>
-            <a:endParaRPr lang="en-US" sz="1200" dirty="0"/>
-          </a:p>
-        </p:txBody>
-      </p:sp>
-      <p:sp>
-        <p:nvSpPr>
-          <p:cNvPr id="64" name="판단 기준 마련 → 방향 합의"/>
-          <p:cNvSpPr txBox="1"/>
-          <p:nvPr/>
-        </p:nvSpPr>
-        <p:spPr>
-          <a:xfrm>
-            <a:off x="4852416" y="5063776"/>
-            <a:ext cx="1655321" cy="176784"/>
-          </a:xfrm>
-          <a:prstGeom prst="rect">
-            <a:avLst/>
-          </a:prstGeom>
-          <a:noFill/>
-          <a:ln/>
-        </p:spPr>
-        <p:txBody>
-          <a:bodyPr wrap="none" lIns="0" tIns="0" rIns="0" bIns="0" rtlCol="0" anchor="ctr"/>
-          <a:lstStyle/>
-          <a:p>
-            <a:pPr algn="l" indent="0" marL="0">
-              <a:buNone/>
-            </a:pPr>
-            <a:r>
-              <a:rPr lang="ko-KR" altLang="en-US" sz="1200" spc="-24" kern="0" dirty="0">
-                <a:solidFill>
-                  <a:srgbClr val="4B5568"/>
+              <a:t>프로젝트 총괄</a:t>
+            </a:r>
+            <a:endParaRPr lang="en-US" sz="1008" dirty="0"/>
+          </a:p>
+        </p:txBody>
+      </p:sp>
+      <p:sp>
+        <p:nvSpPr>
+          <p:cNvPr id="111" name="기반 자동화 알고리즘 개발"/>
+          <p:cNvSpPr txBox="1"/>
+          <p:nvPr/>
+        </p:nvSpPr>
+        <p:spPr>
+          <a:xfrm>
+            <a:off x="2318290" y="7005257"/>
+            <a:ext cx="1355657" cy="152400"/>
+          </a:xfrm>
+          <a:prstGeom prst="rect">
+            <a:avLst/>
+          </a:prstGeom>
+          <a:noFill/>
+          <a:ln/>
+        </p:spPr>
+        <p:txBody>
+          <a:bodyPr wrap="none" lIns="0" tIns="0" rIns="0" bIns="0" rtlCol="0" anchor="ctr"/>
+          <a:lstStyle/>
+          <a:p>
+            <a:pPr algn="l" indent="0" marL="0">
+              <a:buNone/>
+            </a:pPr>
+            <a:r>
+              <a:rPr lang="ko-KR" altLang="en-US" sz="1008" spc="-25" kern="0" dirty="0">
+                <a:solidFill>
+                  <a:srgbClr val="1C2536"/>
                 </a:solidFill>
                 <a:latin typeface="Paperlogy 6 SemiBold" pitchFamily="34" charset="0"/>
                 <a:ea typeface="Paperlogy 6 SemiBold" pitchFamily="34" charset="-127"/>
                 <a:cs typeface="Paperlogy 6 SemiBold" pitchFamily="34" charset="-120"/>
               </a:rPr>
-              <a:t>판단 기준 마련 → 방향 합의</a:t>
-            </a:r>
-            <a:endParaRPr lang="en-US" sz="1200" dirty="0"/>
-          </a:p>
-        </p:txBody>
-      </p:sp>
-      <p:sp>
-        <p:nvSpPr>
-          <p:cNvPr id="65" name="03"/>
-          <p:cNvSpPr txBox="1"/>
-          <p:nvPr/>
-        </p:nvSpPr>
-        <p:spPr>
-          <a:xfrm>
-            <a:off x="2023872" y="6091904"/>
-            <a:ext cx="203930" cy="134112"/>
-          </a:xfrm>
-          <a:prstGeom prst="rect">
-            <a:avLst/>
-          </a:prstGeom>
-          <a:noFill/>
-          <a:ln/>
-        </p:spPr>
-        <p:txBody>
-          <a:bodyPr wrap="none" lIns="0" tIns="0" rIns="0" bIns="0" rtlCol="0" anchor="ctr"/>
-          <a:lstStyle/>
-          <a:p>
-            <a:pPr algn="l" indent="0" marL="0">
-              <a:buNone/>
-            </a:pPr>
-            <a:r>
-              <a:rPr lang="ko-KR" altLang="en-US" sz="864" spc="35" kern="0" dirty="0">
+              <a:t>기반 자동화 알고리즘 개발</a:t>
+            </a:r>
+            <a:endParaRPr lang="en-US" sz="1008" dirty="0"/>
+          </a:p>
+        </p:txBody>
+      </p:sp>
+      <p:sp>
+        <p:nvSpPr>
+          <p:cNvPr id="112" name="Dynamo"/>
+          <p:cNvSpPr txBox="1"/>
+          <p:nvPr/>
+        </p:nvSpPr>
+        <p:spPr>
+          <a:xfrm>
+            <a:off x="1706880" y="7017449"/>
+            <a:ext cx="537686" cy="134112"/>
+          </a:xfrm>
+          <a:prstGeom prst="rect">
+            <a:avLst/>
+          </a:prstGeom>
+          <a:noFill/>
+          <a:ln/>
+        </p:spPr>
+        <p:txBody>
+          <a:bodyPr wrap="none" lIns="0" tIns="0" rIns="0" bIns="0" rtlCol="0" anchor="ctr"/>
+          <a:lstStyle/>
+          <a:p>
+            <a:pPr algn="l" indent="0" marL="0">
+              <a:buNone/>
+            </a:pPr>
+            <a:r>
+              <a:rPr lang="ko-KR" altLang="en-US" sz="864" dirty="0">
                 <a:solidFill>
                   <a:srgbClr val="004B8D"/>
+                </a:solidFill>
+                <a:latin typeface="Paperlogy 7 Bold" pitchFamily="34" charset="0"/>
+                <a:ea typeface="Paperlogy 7 Bold" pitchFamily="34" charset="-127"/>
+                <a:cs typeface="Paperlogy 7 Bold" pitchFamily="34" charset="-120"/>
+              </a:rPr>
+              <a:t>Dynamo</a:t>
+            </a:r>
+            <a:endParaRPr lang="en-US" sz="864" dirty="0"/>
+          </a:p>
+        </p:txBody>
+      </p:sp>
+      <p:sp>
+        <p:nvSpPr>
+          <p:cNvPr id="113" name="팀원 A"/>
+          <p:cNvSpPr txBox="1"/>
+          <p:nvPr/>
+        </p:nvSpPr>
+        <p:spPr>
+          <a:xfrm>
+            <a:off x="4700016" y="6543485"/>
+            <a:ext cx="450437" cy="176784"/>
+          </a:xfrm>
+          <a:prstGeom prst="rect">
+            <a:avLst/>
+          </a:prstGeom>
+          <a:noFill/>
+          <a:ln/>
+        </p:spPr>
+        <p:txBody>
+          <a:bodyPr wrap="none" lIns="0" tIns="0" rIns="0" bIns="0" rtlCol="0" anchor="ctr"/>
+          <a:lstStyle/>
+          <a:p>
+            <a:pPr algn="l" indent="0" marL="0">
+              <a:buNone/>
+            </a:pPr>
+            <a:r>
+              <a:rPr lang="ko-KR" altLang="en-US" sz="1200" spc="-36" kern="0" dirty="0">
+                <a:solidFill>
+                  <a:srgbClr val="0B2147"/>
                 </a:solidFill>
                 <a:latin typeface="Paperlogy 8 ExtraBold" pitchFamily="34" charset="0"/>
                 <a:ea typeface="Paperlogy 8 ExtraBold" pitchFamily="34" charset="-127"/>
                 <a:cs typeface="Paperlogy 8 ExtraBold" pitchFamily="34" charset="-120"/>
               </a:rPr>
-              <a:t>03</a:t>
-            </a:r>
-            <a:endParaRPr lang="en-US" sz="864" dirty="0"/>
-          </a:p>
-        </p:txBody>
-      </p:sp>
-      <p:sp>
-        <p:nvSpPr>
-          <p:cNvPr id="66" name="ONE TEAM"/>
-          <p:cNvSpPr txBox="1"/>
-          <p:nvPr/>
-        </p:nvSpPr>
-        <p:spPr>
-          <a:xfrm>
-            <a:off x="2459450" y="6091904"/>
-            <a:ext cx="801624" cy="134112"/>
-          </a:xfrm>
-          <a:prstGeom prst="rect">
-            <a:avLst/>
-          </a:prstGeom>
-          <a:noFill/>
-          <a:ln/>
-        </p:spPr>
-        <p:txBody>
-          <a:bodyPr wrap="none" lIns="0" tIns="0" rIns="0" bIns="0" rtlCol="0" anchor="ctr"/>
-          <a:lstStyle/>
-          <a:p>
-            <a:pPr algn="l" indent="0" marL="0">
-              <a:buNone/>
-            </a:pPr>
-            <a:r>
-              <a:rPr lang="ko-KR" altLang="en-US" sz="864" spc="138" kern="0" dirty="0">
-                <a:solidFill>
-                  <a:srgbClr val="2A78DD"/>
+              <a:t>팀원 A</a:t>
+            </a:r>
+            <a:endParaRPr lang="en-US" sz="1200" dirty="0"/>
+          </a:p>
+        </p:txBody>
+      </p:sp>
+      <p:sp>
+        <p:nvSpPr>
+          <p:cNvPr id="114" name="유닛 모듈러 설계"/>
+          <p:cNvSpPr txBox="1"/>
+          <p:nvPr/>
+        </p:nvSpPr>
+        <p:spPr>
+          <a:xfrm>
+            <a:off x="4456176" y="6813233"/>
+            <a:ext cx="865068" cy="152400"/>
+          </a:xfrm>
+          <a:prstGeom prst="rect">
+            <a:avLst/>
+          </a:prstGeom>
+          <a:noFill/>
+          <a:ln/>
+        </p:spPr>
+        <p:txBody>
+          <a:bodyPr wrap="none" lIns="0" tIns="0" rIns="0" bIns="0" rtlCol="0" anchor="ctr"/>
+          <a:lstStyle/>
+          <a:p>
+            <a:pPr algn="l" indent="0" marL="0">
+              <a:buNone/>
+            </a:pPr>
+            <a:r>
+              <a:rPr lang="ko-KR" altLang="en-US" sz="1008" spc="-25" kern="0" dirty="0">
+                <a:solidFill>
+                  <a:srgbClr val="4B5568"/>
+                </a:solidFill>
+                <a:latin typeface="Paperlogy 6 SemiBold" pitchFamily="34" charset="0"/>
+                <a:ea typeface="Paperlogy 6 SemiBold" pitchFamily="34" charset="-127"/>
+                <a:cs typeface="Paperlogy 6 SemiBold" pitchFamily="34" charset="-120"/>
+              </a:rPr>
+              <a:t>유닛 모듈러 설계</a:t>
+            </a:r>
+            <a:endParaRPr lang="en-US" sz="1008" dirty="0"/>
+          </a:p>
+        </p:txBody>
+      </p:sp>
+      <p:sp>
+        <p:nvSpPr>
+          <p:cNvPr id="115" name="배치계획"/>
+          <p:cNvSpPr txBox="1"/>
+          <p:nvPr/>
+        </p:nvSpPr>
+        <p:spPr>
+          <a:xfrm>
+            <a:off x="4456176" y="7005257"/>
+            <a:ext cx="486632" cy="152400"/>
+          </a:xfrm>
+          <a:prstGeom prst="rect">
+            <a:avLst/>
+          </a:prstGeom>
+          <a:noFill/>
+          <a:ln/>
+        </p:spPr>
+        <p:txBody>
+          <a:bodyPr wrap="none" lIns="0" tIns="0" rIns="0" bIns="0" rtlCol="0" anchor="ctr"/>
+          <a:lstStyle/>
+          <a:p>
+            <a:pPr algn="l" indent="0" marL="0">
+              <a:buNone/>
+            </a:pPr>
+            <a:r>
+              <a:rPr lang="ko-KR" altLang="en-US" sz="1008" spc="-25" kern="0" dirty="0">
+                <a:solidFill>
+                  <a:srgbClr val="4B5568"/>
+                </a:solidFill>
+                <a:latin typeface="Paperlogy 6 SemiBold" pitchFamily="34" charset="0"/>
+                <a:ea typeface="Paperlogy 6 SemiBold" pitchFamily="34" charset="-127"/>
+                <a:cs typeface="Paperlogy 6 SemiBold" pitchFamily="34" charset="-120"/>
+              </a:rPr>
+              <a:t>배치계획</a:t>
+            </a:r>
+            <a:endParaRPr lang="en-US" sz="1008" dirty="0"/>
+          </a:p>
+        </p:txBody>
+      </p:sp>
+      <p:sp>
+        <p:nvSpPr>
+          <p:cNvPr id="116" name="이틀마다 진행상황 공유 · 피드백"/>
+          <p:cNvSpPr txBox="1"/>
+          <p:nvPr/>
+        </p:nvSpPr>
+        <p:spPr>
+          <a:xfrm>
+            <a:off x="3566351" y="7354443"/>
+            <a:ext cx="1666730" cy="152400"/>
+          </a:xfrm>
+          <a:prstGeom prst="rect">
+            <a:avLst/>
+          </a:prstGeom>
+          <a:noFill/>
+          <a:ln/>
+        </p:spPr>
+        <p:txBody>
+          <a:bodyPr wrap="none" lIns="0" tIns="0" rIns="0" bIns="0" rtlCol="0" anchor="ctr"/>
+          <a:lstStyle/>
+          <a:p>
+            <a:pPr algn="l" indent="0" marL="0">
+              <a:buNone/>
+            </a:pPr>
+            <a:r>
+              <a:rPr lang="ko-KR" altLang="en-US" sz="1008" spc="-20" kern="0" dirty="0">
+                <a:solidFill>
+                  <a:srgbClr val="0B6B33"/>
                 </a:solidFill>
                 <a:latin typeface="Paperlogy 7 Bold" pitchFamily="34" charset="0"/>
                 <a:ea typeface="Paperlogy 7 Bold" pitchFamily="34" charset="-127"/>
                 <a:cs typeface="Paperlogy 7 Bold" pitchFamily="34" charset="-120"/>
               </a:rPr>
-              <a:t>ONE TEAM</a:t>
-            </a:r>
-            <a:endParaRPr lang="en-US" sz="864" dirty="0"/>
-          </a:p>
-        </p:txBody>
-      </p:sp>
-      <p:sp>
-        <p:nvSpPr>
-          <p:cNvPr id="67" name="역할 분담 · 지속적인 공유"/>
-          <p:cNvSpPr txBox="1"/>
-          <p:nvPr/>
-        </p:nvSpPr>
-        <p:spPr>
-          <a:xfrm>
-            <a:off x="2023872" y="6299740"/>
-            <a:ext cx="1666629" cy="188976"/>
-          </a:xfrm>
-          <a:prstGeom prst="rect">
-            <a:avLst/>
-          </a:prstGeom>
-          <a:noFill/>
-          <a:ln/>
-        </p:spPr>
-        <p:txBody>
-          <a:bodyPr wrap="none" lIns="0" tIns="0" rIns="0" bIns="0" rtlCol="0" anchor="ctr"/>
-          <a:lstStyle/>
-          <a:p>
-            <a:pPr algn="l" indent="0" marL="0">
-              <a:buNone/>
-            </a:pPr>
-            <a:r>
-              <a:rPr lang="ko-KR" altLang="en-US" sz="1296" spc="-39" kern="0" dirty="0">
+              <a:t>이틀마다 진행상황 공유 · 피드백</a:t>
+            </a:r>
+            <a:endParaRPr lang="en-US" sz="1008" dirty="0"/>
+          </a:p>
+        </p:txBody>
+      </p:sp>
+      <p:sp>
+        <p:nvSpPr>
+          <p:cNvPr id="117" name="팀원 B"/>
+          <p:cNvSpPr txBox="1"/>
+          <p:nvPr/>
+        </p:nvSpPr>
+        <p:spPr>
+          <a:xfrm>
+            <a:off x="1877568" y="7709345"/>
+            <a:ext cx="450342" cy="176784"/>
+          </a:xfrm>
+          <a:prstGeom prst="rect">
+            <a:avLst/>
+          </a:prstGeom>
+          <a:noFill/>
+          <a:ln/>
+        </p:spPr>
+        <p:txBody>
+          <a:bodyPr wrap="none" lIns="0" tIns="0" rIns="0" bIns="0" rtlCol="0" anchor="ctr"/>
+          <a:lstStyle/>
+          <a:p>
+            <a:pPr algn="l" indent="0" marL="0">
+              <a:buNone/>
+            </a:pPr>
+            <a:r>
+              <a:rPr lang="ko-KR" altLang="en-US" sz="1200" spc="-36" kern="0" dirty="0">
                 <a:solidFill>
                   <a:srgbClr val="0B2147"/>
+                </a:solidFill>
+                <a:latin typeface="Paperlogy 8 ExtraBold" pitchFamily="34" charset="0"/>
+                <a:ea typeface="Paperlogy 8 ExtraBold" pitchFamily="34" charset="-127"/>
+                <a:cs typeface="Paperlogy 8 ExtraBold" pitchFamily="34" charset="-120"/>
+              </a:rPr>
+              <a:t>팀원 B</a:t>
+            </a:r>
+            <a:endParaRPr lang="en-US" sz="1200" dirty="0"/>
+          </a:p>
+        </p:txBody>
+      </p:sp>
+      <p:sp>
+        <p:nvSpPr>
+          <p:cNvPr id="118" name="Revit"/>
+          <p:cNvSpPr txBox="1"/>
+          <p:nvPr/>
+        </p:nvSpPr>
+        <p:spPr>
+          <a:xfrm>
+            <a:off x="1706880" y="7991285"/>
+            <a:ext cx="340709" cy="134112"/>
+          </a:xfrm>
+          <a:prstGeom prst="rect">
+            <a:avLst/>
+          </a:prstGeom>
+          <a:noFill/>
+          <a:ln/>
+        </p:spPr>
+        <p:txBody>
+          <a:bodyPr wrap="none" lIns="0" tIns="0" rIns="0" bIns="0" rtlCol="0" anchor="ctr"/>
+          <a:lstStyle/>
+          <a:p>
+            <a:pPr algn="l" indent="0" marL="0">
+              <a:buNone/>
+            </a:pPr>
+            <a:r>
+              <a:rPr lang="ko-KR" altLang="en-US" sz="864" dirty="0">
+                <a:solidFill>
+                  <a:srgbClr val="004B8D"/>
                 </a:solidFill>
                 <a:latin typeface="Paperlogy 7 Bold" pitchFamily="34" charset="0"/>
                 <a:ea typeface="Paperlogy 7 Bold" pitchFamily="34" charset="-127"/>
                 <a:cs typeface="Paperlogy 7 Bold" pitchFamily="34" charset="-120"/>
               </a:rPr>
-              <a:t>역할 분담 · 지속적인 공유</a:t>
-            </a:r>
-            <a:endParaRPr lang="en-US" sz="1296" dirty="0"/>
-          </a:p>
-        </p:txBody>
-      </p:sp>
-      <p:sp>
-        <p:nvSpPr>
-          <p:cNvPr id="68" name="강점 기반 역할 분담"/>
-          <p:cNvSpPr txBox="1"/>
-          <p:nvPr/>
-        </p:nvSpPr>
-        <p:spPr>
-          <a:xfrm>
-            <a:off x="2304288" y="6731603"/>
-            <a:ext cx="1208349" cy="176784"/>
-          </a:xfrm>
-          <a:prstGeom prst="rect">
-            <a:avLst/>
-          </a:prstGeom>
-          <a:noFill/>
-          <a:ln/>
-        </p:spPr>
-        <p:txBody>
-          <a:bodyPr wrap="none" lIns="0" tIns="0" rIns="0" bIns="0" rtlCol="0" anchor="ctr"/>
-          <a:lstStyle/>
-          <a:p>
-            <a:pPr algn="l" indent="0" marL="0">
-              <a:buNone/>
-            </a:pPr>
-            <a:r>
-              <a:rPr lang="ko-KR" altLang="en-US" sz="1200" spc="-24" kern="0" dirty="0">
+              <a:t>Revit</a:t>
+            </a:r>
+            <a:endParaRPr lang="en-US" sz="864" dirty="0"/>
+          </a:p>
+        </p:txBody>
+      </p:sp>
+      <p:sp>
+        <p:nvSpPr>
+          <p:cNvPr id="119" name="기반 BIM 모델링"/>
+          <p:cNvSpPr txBox="1"/>
+          <p:nvPr/>
+        </p:nvSpPr>
+        <p:spPr>
+          <a:xfrm>
+            <a:off x="2121313" y="7979093"/>
+            <a:ext cx="898790" cy="152400"/>
+          </a:xfrm>
+          <a:prstGeom prst="rect">
+            <a:avLst/>
+          </a:prstGeom>
+          <a:noFill/>
+          <a:ln/>
+        </p:spPr>
+        <p:txBody>
+          <a:bodyPr wrap="none" lIns="0" tIns="0" rIns="0" bIns="0" rtlCol="0" anchor="ctr"/>
+          <a:lstStyle/>
+          <a:p>
+            <a:pPr algn="l" indent="0" marL="0">
+              <a:buNone/>
+            </a:pPr>
+            <a:r>
+              <a:rPr lang="ko-KR" altLang="en-US" sz="1008" spc="-25" kern="0" dirty="0">
                 <a:solidFill>
                   <a:srgbClr val="4B5568"/>
                 </a:solidFill>
@@ -3061,38 +4607,38 @@
                 <a:ea typeface="Paperlogy 6 SemiBold" pitchFamily="34" charset="-127"/>
                 <a:cs typeface="Paperlogy 6 SemiBold" pitchFamily="34" charset="-120"/>
               </a:rPr>
-              <a:t>강점 기반 역할 분담</a:t>
-            </a:r>
-            <a:endParaRPr lang="en-US" sz="1200" dirty="0"/>
-          </a:p>
-        </p:txBody>
-      </p:sp>
-      <p:sp>
-        <p:nvSpPr>
-          <p:cNvPr id="69" name="이틀마다 진행상황 공유 · 피드백"/>
-          <p:cNvSpPr txBox="1"/>
-          <p:nvPr/>
-        </p:nvSpPr>
-        <p:spPr>
-          <a:xfrm>
-            <a:off x="4852416" y="6731603"/>
-            <a:ext cx="1982044" cy="176784"/>
-          </a:xfrm>
-          <a:prstGeom prst="rect">
-            <a:avLst/>
-          </a:prstGeom>
-          <a:noFill/>
-          <a:ln/>
-        </p:spPr>
-        <p:txBody>
-          <a:bodyPr wrap="none" lIns="0" tIns="0" rIns="0" bIns="0" rtlCol="0" anchor="ctr"/>
-          <a:lstStyle/>
-          <a:p>
-            <a:pPr algn="l" indent="0" marL="0">
-              <a:buNone/>
-            </a:pPr>
-            <a:r>
-              <a:rPr lang="ko-KR" altLang="en-US" sz="1200" spc="-24" kern="0" dirty="0">
+              <a:t>기반 BIM 모델링</a:t>
+            </a:r>
+            <a:endParaRPr lang="en-US" sz="1008" dirty="0"/>
+          </a:p>
+        </p:txBody>
+      </p:sp>
+      <p:sp>
+        <p:nvSpPr>
+          <p:cNvPr id="120" name="데이터 구축"/>
+          <p:cNvSpPr txBox="1"/>
+          <p:nvPr/>
+        </p:nvSpPr>
+        <p:spPr>
+          <a:xfrm>
+            <a:off x="1633728" y="8171117"/>
+            <a:ext cx="621030" cy="152400"/>
+          </a:xfrm>
+          <a:prstGeom prst="rect">
+            <a:avLst/>
+          </a:prstGeom>
+          <a:noFill/>
+          <a:ln/>
+        </p:spPr>
+        <p:txBody>
+          <a:bodyPr wrap="none" lIns="0" tIns="0" rIns="0" bIns="0" rtlCol="0" anchor="ctr"/>
+          <a:lstStyle/>
+          <a:p>
+            <a:pPr algn="l" indent="0" marL="0">
+              <a:buNone/>
+            </a:pPr>
+            <a:r>
+              <a:rPr lang="ko-KR" altLang="en-US" sz="1008" spc="-25" kern="0" dirty="0">
                 <a:solidFill>
                   <a:srgbClr val="4B5568"/>
                 </a:solidFill>
@@ -3100,38 +4646,38 @@
                 <a:ea typeface="Paperlogy 6 SemiBold" pitchFamily="34" charset="-127"/>
                 <a:cs typeface="Paperlogy 6 SemiBold" pitchFamily="34" charset="-120"/>
               </a:rPr>
-              <a:t>이틀마다 진행상황 공유 · 피드백</a:t>
-            </a:r>
-            <a:endParaRPr lang="en-US" sz="1200" dirty="0"/>
-          </a:p>
-        </p:txBody>
-      </p:sp>
-      <p:sp>
-        <p:nvSpPr>
-          <p:cNvPr id="70" name="장려상"/>
-          <p:cNvSpPr txBox="1"/>
-          <p:nvPr/>
-        </p:nvSpPr>
-        <p:spPr>
-          <a:xfrm>
-            <a:off x="1266587" y="8145304"/>
-            <a:ext cx="331946" cy="134112"/>
-          </a:xfrm>
-          <a:prstGeom prst="rect">
-            <a:avLst/>
-          </a:prstGeom>
-          <a:noFill/>
-          <a:ln/>
-        </p:spPr>
-        <p:txBody>
-          <a:bodyPr wrap="none" lIns="0" tIns="0" rIns="0" bIns="0" rtlCol="0" anchor="ctr"/>
-          <a:lstStyle/>
-          <a:p>
-            <a:pPr algn="ctr" indent="0" marL="0">
-              <a:buNone/>
-            </a:pPr>
-            <a:r>
-              <a:rPr lang="ko-KR" altLang="en-US" sz="864" spc="-17" kern="0" dirty="0">
+              <a:t>데이터 구축</a:t>
+            </a:r>
+            <a:endParaRPr lang="en-US" sz="1008" dirty="0"/>
+          </a:p>
+        </p:txBody>
+      </p:sp>
+      <p:sp>
+        <p:nvSpPr>
+          <p:cNvPr id="121" name="팀원 C"/>
+          <p:cNvSpPr txBox="1"/>
+          <p:nvPr/>
+        </p:nvSpPr>
+        <p:spPr>
+          <a:xfrm>
+            <a:off x="4700016" y="7709345"/>
+            <a:ext cx="445008" cy="176784"/>
+          </a:xfrm>
+          <a:prstGeom prst="rect">
+            <a:avLst/>
+          </a:prstGeom>
+          <a:noFill/>
+          <a:ln/>
+        </p:spPr>
+        <p:txBody>
+          <a:bodyPr wrap="none" lIns="0" tIns="0" rIns="0" bIns="0" rtlCol="0" anchor="ctr"/>
+          <a:lstStyle/>
+          <a:p>
+            <a:pPr algn="l" indent="0" marL="0">
+              <a:buNone/>
+            </a:pPr>
+            <a:r>
+              <a:rPr lang="ko-KR" altLang="en-US" sz="1200" spc="-36" kern="0" dirty="0">
                 <a:solidFill>
                   <a:srgbClr val="0B2147"/>
                 </a:solidFill>
@@ -3139,45 +4685,162 @@
                 <a:ea typeface="Paperlogy 8 ExtraBold" pitchFamily="34" charset="-127"/>
                 <a:cs typeface="Paperlogy 8 ExtraBold" pitchFamily="34" charset="-120"/>
               </a:rPr>
-              <a:t>장려상</a:t>
-            </a:r>
-            <a:endParaRPr lang="en-US" sz="864" dirty="0"/>
-          </a:p>
-        </p:txBody>
-      </p:sp>
-      <p:sp>
-        <p:nvSpPr>
-          <p:cNvPr id="71" name="04"/>
-          <p:cNvSpPr txBox="1"/>
-          <p:nvPr/>
-        </p:nvSpPr>
-        <p:spPr>
-          <a:xfrm>
-            <a:off x="2023872" y="7759732"/>
-            <a:ext cx="203930" cy="134112"/>
-          </a:xfrm>
-          <a:prstGeom prst="rect">
-            <a:avLst/>
-          </a:prstGeom>
-          <a:noFill/>
-          <a:ln/>
-        </p:spPr>
-        <p:txBody>
-          <a:bodyPr wrap="none" lIns="0" tIns="0" rIns="0" bIns="0" rtlCol="0" anchor="ctr"/>
-          <a:lstStyle/>
-          <a:p>
-            <a:pPr algn="l" indent="0" marL="0">
-              <a:buNone/>
-            </a:pPr>
-            <a:r>
-              <a:rPr lang="ko-KR" altLang="en-US" sz="864" spc="35" kern="0" dirty="0">
-                <a:solidFill>
-                  <a:srgbClr val="004B8D"/>
+              <a:t>팀원 C</a:t>
+            </a:r>
+            <a:endParaRPr lang="en-US" sz="1200" dirty="0"/>
+          </a:p>
+        </p:txBody>
+      </p:sp>
+      <p:sp>
+        <p:nvSpPr>
+          <p:cNvPr id="122" name="리모델링 적용 시나리오 구성"/>
+          <p:cNvSpPr txBox="1"/>
+          <p:nvPr/>
+        </p:nvSpPr>
+        <p:spPr>
+          <a:xfrm>
+            <a:off x="4456176" y="7979093"/>
+            <a:ext cx="1471666" cy="152400"/>
+          </a:xfrm>
+          <a:prstGeom prst="rect">
+            <a:avLst/>
+          </a:prstGeom>
+          <a:noFill/>
+          <a:ln/>
+        </p:spPr>
+        <p:txBody>
+          <a:bodyPr wrap="none" lIns="0" tIns="0" rIns="0" bIns="0" rtlCol="0" anchor="ctr"/>
+          <a:lstStyle/>
+          <a:p>
+            <a:pPr algn="l" indent="0" marL="0">
+              <a:buNone/>
+            </a:pPr>
+            <a:r>
+              <a:rPr lang="ko-KR" altLang="en-US" sz="1008" spc="-25" kern="0" dirty="0">
+                <a:solidFill>
+                  <a:srgbClr val="4B5568"/>
+                </a:solidFill>
+                <a:latin typeface="Paperlogy 6 SemiBold" pitchFamily="34" charset="0"/>
+                <a:ea typeface="Paperlogy 6 SemiBold" pitchFamily="34" charset="-127"/>
+                <a:cs typeface="Paperlogy 6 SemiBold" pitchFamily="34" charset="-120"/>
+              </a:rPr>
+              <a:t>리모델링 적용 시나리오 구성</a:t>
+            </a:r>
+            <a:endParaRPr lang="en-US" sz="1008" dirty="0"/>
+          </a:p>
+        </p:txBody>
+      </p:sp>
+      <p:sp>
+        <p:nvSpPr>
+          <p:cNvPr id="123" name="시연 영상 제작"/>
+          <p:cNvSpPr txBox="1"/>
+          <p:nvPr/>
+        </p:nvSpPr>
+        <p:spPr>
+          <a:xfrm>
+            <a:off x="4456176" y="8171117"/>
+            <a:ext cx="755428" cy="152400"/>
+          </a:xfrm>
+          <a:prstGeom prst="rect">
+            <a:avLst/>
+          </a:prstGeom>
+          <a:noFill/>
+          <a:ln/>
+        </p:spPr>
+        <p:txBody>
+          <a:bodyPr wrap="none" lIns="0" tIns="0" rIns="0" bIns="0" rtlCol="0" anchor="ctr"/>
+          <a:lstStyle/>
+          <a:p>
+            <a:pPr algn="l" indent="0" marL="0">
+              <a:buNone/>
+            </a:pPr>
+            <a:r>
+              <a:rPr lang="ko-KR" altLang="en-US" sz="1008" spc="-25" kern="0" dirty="0">
+                <a:solidFill>
+                  <a:srgbClr val="4B5568"/>
+                </a:solidFill>
+                <a:latin typeface="Paperlogy 6 SemiBold" pitchFamily="34" charset="0"/>
+                <a:ea typeface="Paperlogy 6 SemiBold" pitchFamily="34" charset="-127"/>
+                <a:cs typeface="Paperlogy 6 SemiBold" pitchFamily="34" charset="-120"/>
+              </a:rPr>
+              <a:t>시연 영상 제작</a:t>
+            </a:r>
+            <a:endParaRPr lang="en-US" sz="1008" dirty="0"/>
+          </a:p>
+        </p:txBody>
+      </p:sp>
+      <p:sp>
+        <p:nvSpPr>
+          <p:cNvPr id="124" name="장려상"/>
+          <p:cNvSpPr txBox="1"/>
+          <p:nvPr/>
+        </p:nvSpPr>
+        <p:spPr>
+          <a:xfrm>
+            <a:off x="865061" y="8922115"/>
+            <a:ext cx="328613" cy="134112"/>
+          </a:xfrm>
+          <a:prstGeom prst="rect">
+            <a:avLst/>
+          </a:prstGeom>
+          <a:noFill/>
+          <a:ln/>
+        </p:spPr>
+        <p:txBody>
+          <a:bodyPr wrap="none" lIns="0" tIns="0" rIns="0" bIns="0" rtlCol="0" anchor="ctr"/>
+          <a:lstStyle/>
+          <a:p>
+            <a:pPr algn="ctr" indent="0" marL="0">
+              <a:buNone/>
+            </a:pPr>
+            <a:r>
+              <a:rPr lang="ko-KR" altLang="en-US" sz="864" spc="-26" kern="0" dirty="0">
+                <a:solidFill>
+                  <a:srgbClr val="0B2147"/>
                 </a:solidFill>
                 <a:latin typeface="Paperlogy 8 ExtraBold" pitchFamily="34" charset="0"/>
                 <a:ea typeface="Paperlogy 8 ExtraBold" pitchFamily="34" charset="-127"/>
                 <a:cs typeface="Paperlogy 8 ExtraBold" pitchFamily="34" charset="-120"/>
               </a:rPr>
+              <a:t>장려상</a:t>
+            </a:r>
+            <a:endParaRPr lang="en-US" sz="864" dirty="0"/>
+          </a:p>
+        </p:txBody>
+      </p:sp>
+      <p:sp>
+        <p:nvSpPr>
+          <p:cNvPr id="125" name="04"/>
+          <p:cNvSpPr txBox="1"/>
+          <p:nvPr/>
+        </p:nvSpPr>
+        <p:spPr>
+          <a:xfrm>
+            <a:off x="1499616" y="8666417"/>
+            <a:ext cx="203930" cy="134112"/>
+          </a:xfrm>
+          <a:prstGeom prst="rect">
+            <a:avLst/>
+          </a:prstGeom>
+          <a:noFill/>
+          <a:ln/>
+        </p:spPr>
+        <p:txBody>
+          <a:bodyPr wrap="none" lIns="0" tIns="0" rIns="0" bIns="0" rtlCol="0" anchor="ctr"/>
+          <a:lstStyle/>
+          <a:p>
+            <a:pPr algn="l" indent="0" marL="0">
+              <a:buNone/>
+            </a:pPr>
+            <a:r>
+              <a:rPr lang="ko-KR" altLang="en-US" sz="864" spc="35" kern="0" dirty="0">
+                <a:solidFill>
+                  <a:srgbClr val="004B8D"/>
+                </a:solidFill>
+                <a:latin typeface="Paperlogy 8 ExtraBold" pitchFamily="34" charset="0"/>
+                <a:ea typeface="Paperlogy 8 ExtraBold" pitchFamily="34" charset="-127"/>
+                <a:cs typeface="Paperlogy 8 ExtraBold" pitchFamily="34" charset="-120"/>
+              </a:rPr>
               <a:t>04</a:t>
             </a:r>
             <a:endParaRPr lang="en-US" sz="864" dirty="0"/>
@@ -3186,13 +4849,13 @@
       </p:sp>
       <p:sp>
         <p:nvSpPr>
-          <p:cNvPr id="72" name="RESULT"/>
-          <p:cNvSpPr txBox="1"/>
-          <p:nvPr/>
-        </p:nvSpPr>
-        <p:spPr>
-          <a:xfrm>
-            <a:off x="2459450" y="7759732"/>
+          <p:cNvPr id="126" name="RESULT"/>
+          <p:cNvSpPr txBox="1"/>
+          <p:nvPr/>
+        </p:nvSpPr>
+        <p:spPr>
+          <a:xfrm>
+            <a:off x="1935194" y="8666417"/>
             <a:ext cx="590360" cy="134112"/>
           </a:xfrm>
           <a:prstGeom prst="rect">
@@ -3225,13 +4888,13 @@
       </p:sp>
       <p:sp>
         <p:nvSpPr>
-          <p:cNvPr id="73" name="프로젝트 완성 · 장려상 수상"/>
-          <p:cNvSpPr txBox="1"/>
-          <p:nvPr/>
-        </p:nvSpPr>
-        <p:spPr>
-          <a:xfrm>
-            <a:off x="2023872" y="7967567"/>
+          <p:cNvPr id="127" name="프로젝트 완성 · 장려상 수상"/>
+          <p:cNvSpPr txBox="1"/>
+          <p:nvPr/>
+        </p:nvSpPr>
+        <p:spPr>
+          <a:xfrm>
+            <a:off x="1499616" y="8849868"/>
             <a:ext cx="1814947" cy="188976"/>
           </a:xfrm>
           <a:prstGeom prst="rect">
@@ -3264,30 +4927,30 @@
       </p:sp>
       <p:sp>
         <p:nvSpPr>
-          <p:cNvPr id="74" name="남은 3주 내 프로젝트 완수"/>
-          <p:cNvSpPr txBox="1"/>
-          <p:nvPr/>
-        </p:nvSpPr>
-        <p:spPr>
-          <a:xfrm>
-            <a:off x="2304288" y="8399431"/>
-            <a:ext cx="1623012" cy="176784"/>
-          </a:xfrm>
-          <a:prstGeom prst="rect">
-            <a:avLst/>
-          </a:prstGeom>
-          <a:noFill/>
-          <a:ln/>
-        </p:spPr>
-        <p:txBody>
-          <a:bodyPr wrap="none" lIns="0" tIns="0" rIns="0" bIns="0" rtlCol="0" anchor="ctr"/>
-          <a:lstStyle/>
-          <a:p>
-            <a:pPr algn="l" indent="0" marL="0">
-              <a:buNone/>
-            </a:pPr>
-            <a:r>
-              <a:rPr lang="ko-KR" altLang="en-US" sz="1200" spc="-24" kern="0" dirty="0">
+          <p:cNvPr id="128" name="남은 3주 내 시연 영상 완성"/>
+          <p:cNvSpPr txBox="1"/>
+          <p:nvPr/>
+        </p:nvSpPr>
+        <p:spPr>
+          <a:xfrm>
+            <a:off x="1804416" y="9172194"/>
+            <a:ext cx="1390490" cy="152400"/>
+          </a:xfrm>
+          <a:prstGeom prst="rect">
+            <a:avLst/>
+          </a:prstGeom>
+          <a:noFill/>
+          <a:ln/>
+        </p:spPr>
+        <p:txBody>
+          <a:bodyPr wrap="none" lIns="0" tIns="0" rIns="0" bIns="0" rtlCol="0" anchor="ctr"/>
+          <a:lstStyle/>
+          <a:p>
+            <a:pPr algn="l" indent="0" marL="0">
+              <a:buNone/>
+            </a:pPr>
+            <a:r>
+              <a:rPr lang="ko-KR" altLang="en-US" sz="1008" spc="-20" kern="0" dirty="0">
                 <a:solidFill>
                   <a:srgbClr val="8A5A00"/>
                 </a:solidFill>
@@ -3295,38 +4958,38 @@
                 <a:ea typeface="Paperlogy 7 Bold" pitchFamily="34" charset="-127"/>
                 <a:cs typeface="Paperlogy 7 Bold" pitchFamily="34" charset="-120"/>
               </a:rPr>
-              <a:t>남은 3주 내 프로젝트 완수</a:t>
-            </a:r>
-            <a:endParaRPr lang="en-US" sz="1200" dirty="0"/>
-          </a:p>
-        </p:txBody>
-      </p:sp>
-      <p:sp>
-        <p:nvSpPr>
-          <p:cNvPr id="75" name="학생 BIM 경진대회 장려상"/>
-          <p:cNvSpPr txBox="1"/>
-          <p:nvPr/>
-        </p:nvSpPr>
-        <p:spPr>
-          <a:xfrm>
-            <a:off x="4852416" y="8399431"/>
-            <a:ext cx="1668447" cy="176784"/>
-          </a:xfrm>
-          <a:prstGeom prst="rect">
-            <a:avLst/>
-          </a:prstGeom>
-          <a:noFill/>
-          <a:ln/>
-        </p:spPr>
-        <p:txBody>
-          <a:bodyPr wrap="none" lIns="0" tIns="0" rIns="0" bIns="0" rtlCol="0" anchor="ctr"/>
-          <a:lstStyle/>
-          <a:p>
-            <a:pPr algn="l" indent="0" marL="0">
-              <a:buNone/>
-            </a:pPr>
-            <a:r>
-              <a:rPr lang="ko-KR" altLang="en-US" sz="1200" spc="-24" kern="0" dirty="0">
+              <a:t>남은 3주 내 시연 영상 완성</a:t>
+            </a:r>
+            <a:endParaRPr lang="en-US" sz="1008" dirty="0"/>
+          </a:p>
+        </p:txBody>
+      </p:sp>
+      <p:sp>
+        <p:nvSpPr>
+          <p:cNvPr id="129" name="학생 BIM 경진대회 장려상"/>
+          <p:cNvSpPr txBox="1"/>
+          <p:nvPr/>
+        </p:nvSpPr>
+        <p:spPr>
+          <a:xfrm>
+            <a:off x="3561207" y="9172194"/>
+            <a:ext cx="1401495" cy="152400"/>
+          </a:xfrm>
+          <a:prstGeom prst="rect">
+            <a:avLst/>
+          </a:prstGeom>
+          <a:noFill/>
+          <a:ln/>
+        </p:spPr>
+        <p:txBody>
+          <a:bodyPr wrap="none" lIns="0" tIns="0" rIns="0" bIns="0" rtlCol="0" anchor="ctr"/>
+          <a:lstStyle/>
+          <a:p>
+            <a:pPr algn="l" indent="0" marL="0">
+              <a:buNone/>
+            </a:pPr>
+            <a:r>
+              <a:rPr lang="ko-KR" altLang="en-US" sz="1008" spc="-20" kern="0" dirty="0">
                 <a:solidFill>
                   <a:srgbClr val="8A5A00"/>
                 </a:solidFill>
@@ -3336,44 +4999,44 @@
               </a:rPr>
               <a:t>학생 BIM 경진대회 장려상</a:t>
             </a:r>
-            <a:endParaRPr lang="en-US" sz="1200" dirty="0"/>
-          </a:p>
-        </p:txBody>
-      </p:sp>
-      <p:sp>
-        <p:nvSpPr>
-          <p:cNvPr id="76" name="3주 내 완수"/>
-          <p:cNvSpPr txBox="1"/>
-          <p:nvPr/>
-        </p:nvSpPr>
-        <p:spPr>
-          <a:xfrm>
-            <a:off x="969169" y="9139523"/>
-            <a:ext cx="548831" cy="134112"/>
-          </a:xfrm>
-          <a:prstGeom prst="rect">
-            <a:avLst/>
-          </a:prstGeom>
-          <a:noFill/>
-          <a:ln/>
-        </p:spPr>
-        <p:txBody>
-          <a:bodyPr wrap="none" lIns="0" tIns="0" rIns="0" bIns="0" rtlCol="0" anchor="ctr"/>
-          <a:lstStyle/>
-          <a:p>
-            <a:pPr algn="l" indent="0" marL="0">
-              <a:buNone/>
-            </a:pPr>
-            <a:r>
-              <a:rPr lang="ko-KR" altLang="en-US" sz="864" spc="-9" kern="0" dirty="0">
-                <a:solidFill>
-                  <a:srgbClr val="8A5A00"/>
+            <a:endParaRPr lang="en-US" sz="1008" dirty="0"/>
+          </a:p>
+        </p:txBody>
+      </p:sp>
+      <p:sp>
+        <p:nvSpPr>
+          <p:cNvPr id="130" name="KEY MESSAGE"/>
+          <p:cNvSpPr txBox="1"/>
+          <p:nvPr/>
+        </p:nvSpPr>
+        <p:spPr>
+          <a:xfrm>
+            <a:off x="1182624" y="9790557"/>
+            <a:ext cx="1065686" cy="134112"/>
+          </a:xfrm>
+          <a:prstGeom prst="rect">
+            <a:avLst/>
+          </a:prstGeom>
+          <a:noFill/>
+          <a:ln/>
+        </p:spPr>
+        <p:txBody>
+          <a:bodyPr wrap="none" lIns="0" tIns="0" rIns="0" bIns="0" rtlCol="0" anchor="ctr"/>
+          <a:lstStyle/>
+          <a:p>
+            <a:pPr algn="l" indent="0" marL="0">
+              <a:buNone/>
+            </a:pPr>
+            <a:r>
+              <a:rPr lang="ko-KR" altLang="en-US" sz="864" spc="138" kern="0" dirty="0">
+                <a:solidFill>
+                  <a:srgbClr val="8FD3F5"/>
                 </a:solidFill>
                 <a:latin typeface="Paperlogy 7 Bold" pitchFamily="34" charset="0"/>
                 <a:ea typeface="Paperlogy 7 Bold" pitchFamily="34" charset="-127"/>
                 <a:cs typeface="Paperlogy 7 Bold" pitchFamily="34" charset="-120"/>
               </a:rPr>
-              <a:t>3주 내 완수</a:t>
+              <a:t>KEY MESSAGE</a:t>
             </a:r>
             <a:endParaRPr lang="en-US" sz="864" dirty="0"/>
           </a:p>
@@ -3381,77 +5044,52 @@
       </p:sp>
       <p:sp>
         <p:nvSpPr>
-          <p:cNvPr id="77" name="KEY MESSAGE"/>
-          <p:cNvSpPr txBox="1"/>
-          <p:nvPr/>
-        </p:nvSpPr>
-        <p:spPr>
-          <a:xfrm>
-            <a:off x="1182624" y="9790557"/>
-            <a:ext cx="1065686" cy="134112"/>
-          </a:xfrm>
-          <a:prstGeom prst="rect">
-            <a:avLst/>
-          </a:prstGeom>
-          <a:noFill/>
-          <a:ln/>
-        </p:spPr>
-        <p:txBody>
-          <a:bodyPr wrap="none" lIns="0" tIns="0" rIns="0" bIns="0" rtlCol="0" anchor="ctr"/>
-          <a:lstStyle/>
-          <a:p>
-            <a:pPr algn="l" indent="0" marL="0">
-              <a:buNone/>
-            </a:pPr>
-            <a:r>
-              <a:rPr lang="ko-KR" altLang="en-US" sz="864" spc="138" kern="0" dirty="0">
-                <a:solidFill>
-                  <a:srgbClr val="8FD3F5"/>
+          <p:cNvPr id="131" name="서로 다른 사람을 하나의 공동 목표로 연결합니다"/>
+          <p:cNvSpPr txBox="1"/>
+          <p:nvPr/>
+        </p:nvSpPr>
+        <p:spPr>
+          <a:xfrm>
+            <a:off x="2358676" y="9743313"/>
+            <a:ext cx="3750951" cy="225552"/>
+          </a:xfrm>
+          <a:prstGeom prst="rect">
+            <a:avLst/>
+          </a:prstGeom>
+          <a:noFill/>
+          <a:ln/>
+        </p:spPr>
+        <p:txBody>
+          <a:bodyPr wrap="none" lIns="0" tIns="0" rIns="0" bIns="0" rtlCol="0" anchor="ctr"/>
+          <a:lstStyle/>
+          <a:p>
+            <a:pPr algn="l" indent="0" marL="0">
+              <a:buNone/>
+            </a:pPr>
+            <a:r>
+              <a:rPr lang="ko-KR" altLang="en-US" sz="1536" spc="-46" kern="0" dirty="0">
+                <a:solidFill>
+                  <a:srgbClr val="FFFFFF"/>
                 </a:solidFill>
                 <a:latin typeface="Paperlogy 7 Bold" pitchFamily="34" charset="0"/>
                 <a:ea typeface="Paperlogy 7 Bold" pitchFamily="34" charset="-127"/>
                 <a:cs typeface="Paperlogy 7 Bold" pitchFamily="34" charset="-120"/>
               </a:rPr>
-              <a:t>KEY MESSAGE</a:t>
-            </a:r>
-            <a:endParaRPr lang="en-US" sz="864" dirty="0"/>
-          </a:p>
-        </p:txBody>
-      </p:sp>
-      <p:sp>
-        <p:nvSpPr>
-          <p:cNvPr id="78" name="서로 다른 사람을 하나의 공동 목표로 연결합니다"/>
-          <p:cNvSpPr txBox="1"/>
-          <p:nvPr/>
-        </p:nvSpPr>
-        <p:spPr>
-          <a:xfrm>
-            <a:off x="2358676" y="9743313"/>
-            <a:ext cx="3750951" cy="225552"/>
-          </a:xfrm>
-          <a:prstGeom prst="rect">
-            <a:avLst/>
-          </a:prstGeom>
-          <a:noFill/>
-          <a:ln/>
-        </p:spPr>
-        <p:txBody>
-          <a:bodyPr wrap="none" lIns="0" tIns="0" rIns="0" bIns="0" rtlCol="0" anchor="ctr"/>
-          <a:lstStyle/>
-          <a:p>
+              <a:t>서로 다른 사람을 </a:t>
+            </a:r>
             <a:pPr algn="l" indent="0" marL="0">
               <a:buNone/>
             </a:pPr>
             <a:r>
               <a:rPr lang="ko-KR" altLang="en-US" sz="1536" spc="-46" kern="0" dirty="0">
                 <a:solidFill>
-                  <a:srgbClr val="FFFFFF"/>
+                  <a:srgbClr val="FDBB30"/>
                 </a:solidFill>
                 <a:latin typeface="Paperlogy 7 Bold" pitchFamily="34" charset="0"/>
                 <a:ea typeface="Paperlogy 7 Bold" pitchFamily="34" charset="-127"/>
                 <a:cs typeface="Paperlogy 7 Bold" pitchFamily="34" charset="-120"/>
               </a:rPr>
-              <a:t>서로 다른 사람을 </a:t>
+              <a:t>하나의 공동 목표</a:t>
             </a:r>
             <a:pPr algn="l" indent="0" marL="0">
               <a:buNone/>
@@ -3459,26 +5097,12 @@
             <a:r>
               <a:rPr lang="ko-KR" altLang="en-US" sz="1536" spc="-46" kern="0" dirty="0">
                 <a:solidFill>
-                  <a:srgbClr val="FDBB30"/>
+                  <a:srgbClr val="FFFFFF"/>
                 </a:solidFill>
                 <a:latin typeface="Paperlogy 7 Bold" pitchFamily="34" charset="0"/>
                 <a:ea typeface="Paperlogy 7 Bold" pitchFamily="34" charset="-127"/>
                 <a:cs typeface="Paperlogy 7 Bold" pitchFamily="34" charset="-120"/>
               </a:rPr>
-              <a:t>하나의 공동 목표</a:t>
-            </a:r>
-            <a:pPr algn="l" indent="0" marL="0">
-              <a:buNone/>
-            </a:pPr>
-            <a:r>
-              <a:rPr lang="ko-KR" altLang="en-US" sz="1536" spc="-46" kern="0" dirty="0">
-                <a:solidFill>
-                  <a:srgbClr val="FFFFFF"/>
-                </a:solidFill>
-                <a:latin typeface="Paperlogy 7 Bold" pitchFamily="34" charset="0"/>
-                <a:ea typeface="Paperlogy 7 Bold" pitchFamily="34" charset="-127"/>
-                <a:cs typeface="Paperlogy 7 Bold" pitchFamily="34" charset="-120"/>
-              </a:rPr>
               <a:t>로 연결합니다</a:t>
             </a:r>
             <a:endParaRPr lang="en-US" sz="1536" dirty="0"/>
@@ -3487,7 +5111,7 @@
       </p:sp>
       <p:sp>
         <p:nvSpPr>
-          <p:cNvPr id="79" name="2026년 하반기 신입사원 공개채용"/>
+          <p:cNvPr id="132" name="2026년 하반기 신입사원 공개채용"/>
           <p:cNvSpPr txBox="1"/>
           <p:nvPr/>
         </p:nvSpPr>
@@ -3526,7 +5150,7 @@
       </p:sp>
       <p:sp>
         <p:nvSpPr>
-          <p:cNvPr id="80" name="01 / 03"/>
+          <p:cNvPr id="133" name="01 / 03"/>
           <p:cNvSpPr txBox="1"/>
           <p:nvPr/>
         </p:nvSpPr>

--- a/hec-pt/pptx/portrait.pptx
+++ b/hec-pt/pptx/portrait.pptx
@@ -1186,11 +1186,11 @@
         <p:spPr>
           <a:xfrm>
             <a:off x="518160" y="2102739"/>
-            <a:ext cx="6522720" cy="1747076"/>
+            <a:ext cx="6522720" cy="2731008"/>
           </a:xfrm>
           <a:prstGeom prst="roundRect">
             <a:avLst>
-              <a:gd name="adj" fmla="val 7327"/>
+              <a:gd name="adj" fmla="val 4688"/>
             </a:avLst>
           </a:prstGeom>
           <a:solidFill>
@@ -1212,7 +1212,7 @@
         </p:nvSpPr>
         <p:spPr>
           <a:xfrm>
-            <a:off x="1499807" y="2230755"/>
+            <a:off x="1499807" y="2218563"/>
             <a:ext cx="1023176" cy="207264"/>
           </a:xfrm>
           <a:prstGeom prst="roundRect">
@@ -1234,7 +1234,7 @@
         </p:nvSpPr>
         <p:spPr>
           <a:xfrm>
-            <a:off x="2583942" y="2230755"/>
+            <a:off x="2583942" y="2218563"/>
             <a:ext cx="468916" cy="207264"/>
           </a:xfrm>
           <a:prstGeom prst="roundRect">
@@ -1256,7 +1256,7 @@
         </p:nvSpPr>
         <p:spPr>
           <a:xfrm>
-            <a:off x="3113818" y="2230755"/>
+            <a:off x="3113818" y="2218563"/>
             <a:ext cx="373856" cy="207264"/>
           </a:xfrm>
           <a:prstGeom prst="roundRect">
@@ -1270,31 +1270,9 @@
           <a:ln/>
         </p:spPr>
       </p:sp>
-      <p:sp>
-        <p:nvSpPr>
-          <p:cNvPr id="12" name="p1p-out"/>
-          <p:cNvSpPr/>
-          <p:nvPr/>
-        </p:nvSpPr>
-        <p:spPr>
-          <a:xfrm>
-            <a:off x="5120640" y="2218563"/>
-            <a:ext cx="1804416" cy="975360"/>
-          </a:xfrm>
-          <a:prstGeom prst="roundRect">
-            <a:avLst>
-              <a:gd name="adj" fmla="val 10000"/>
-            </a:avLst>
-          </a:prstGeom>
-          <a:solidFill>
-            <a:srgbClr val="FFF4DB"/>
-          </a:solidFill>
-          <a:ln/>
-        </p:spPr>
-      </p:sp>
       <p:pic>
         <p:nvPicPr>
-          <p:cNvPr id="13" name="svg" descr="svg">    </p:cNvPr>
+          <p:cNvPr id="12" name="p1p-desc-box" descr="p1p-desc-box">    </p:cNvPr>
           <p:cNvPicPr>
             <a:picLocks noChangeAspect="1"/>
           </p:cNvPicPr>
@@ -1308,8 +1286,8 @@
         </p:blipFill>
         <p:spPr>
           <a:xfrm>
-            <a:off x="5242560" y="2333816"/>
-            <a:ext cx="158496" cy="158496"/>
+            <a:off x="3707130" y="2444242"/>
+            <a:ext cx="12192" cy="591312"/>
           </a:xfrm>
           <a:prstGeom prst="rect">
             <a:avLst/>
@@ -1318,27 +1296,76 @@
       </p:pic>
       <p:sp>
         <p:nvSpPr>
-          <p:cNvPr id="14" name="p1p-proj-bot"/>
+          <p:cNvPr id="13" name="p1p-hero"/>
           <p:cNvSpPr/>
           <p:nvPr/>
         </p:nvSpPr>
         <p:spPr>
           <a:xfrm>
-            <a:off x="524256" y="3303651"/>
-            <a:ext cx="6510528" cy="540068"/>
+            <a:off x="524256" y="3145155"/>
+            <a:ext cx="6510528" cy="1682496"/>
           </a:xfrm>
           <a:prstGeom prst="rect">
             <a:avLst/>
           </a:prstGeom>
           <a:solidFill>
             <a:srgbClr val="EEF4FC"/>
+          </a:solidFill>
+          <a:ln/>
+        </p:spPr>
+      </p:sp>
+      <p:sp>
+        <p:nvSpPr>
+          <p:cNvPr id="14" name="p1p-vid"/>
+          <p:cNvSpPr/>
+          <p:nvPr/>
+        </p:nvSpPr>
+        <p:spPr>
+          <a:xfrm>
+            <a:off x="737616" y="3273171"/>
+            <a:ext cx="2548128" cy="1426464"/>
+          </a:xfrm>
+          <a:prstGeom prst="roundRect">
+            <a:avLst>
+              <a:gd name="adj" fmla="val 6410"/>
+            </a:avLst>
+          </a:prstGeom>
+          <a:solidFill>
+            <a:srgbClr val="FFFFFF"/>
+          </a:solidFill>
+          <a:ln w="12192">
+            <a:solidFill>
+              <a:srgbClr val="C3CEDD"/>
+            </a:solidFill>
+            <a:prstDash val="solid"/>
+          </a:ln>
+        </p:spPr>
+      </p:sp>
+      <p:sp>
+        <p:nvSpPr>
+          <p:cNvPr id="15" name="p1p-pan"/>
+          <p:cNvSpPr/>
+          <p:nvPr/>
+        </p:nvSpPr>
+        <p:spPr>
+          <a:xfrm>
+            <a:off x="816864" y="3352419"/>
+            <a:ext cx="755904" cy="1133856"/>
+          </a:xfrm>
+          <a:prstGeom prst="roundRect">
+            <a:avLst>
+              <a:gd name="adj" fmla="val 8065"/>
+            </a:avLst>
+          </a:prstGeom>
+          <a:solidFill>
+            <a:srgbClr val="E9F6FD"/>
           </a:solidFill>
           <a:ln/>
         </p:spPr>
       </p:sp>
       <p:pic>
         <p:nvPicPr>
-          <p:cNvPr id="15" name="ring p1p-fr" descr="ring p1p-fr">    </p:cNvPr>
+          <p:cNvPr id="16" name="svg" descr="svg">    </p:cNvPr>
           <p:cNvPicPr>
             <a:picLocks noChangeAspect="1"/>
           </p:cNvPicPr>
@@ -1352,17 +1379,39 @@
         </p:blipFill>
         <p:spPr>
           <a:xfrm>
-            <a:off x="731520" y="3407061"/>
-            <a:ext cx="316992" cy="316992"/>
+            <a:off x="1046480" y="3437763"/>
+            <a:ext cx="296672" cy="258064"/>
           </a:xfrm>
           <a:prstGeom prst="rect">
             <a:avLst/>
           </a:prstGeom>
         </p:spPr>
       </p:pic>
+      <p:sp>
+        <p:nvSpPr>
+          <p:cNvPr id="17" name="p1p-pan"/>
+          <p:cNvSpPr/>
+          <p:nvPr/>
+        </p:nvSpPr>
+        <p:spPr>
+          <a:xfrm>
+            <a:off x="1633728" y="3352419"/>
+            <a:ext cx="755904" cy="1133856"/>
+          </a:xfrm>
+          <a:prstGeom prst="roundRect">
+            <a:avLst>
+              <a:gd name="adj" fmla="val 8065"/>
+            </a:avLst>
+          </a:prstGeom>
+          <a:solidFill>
+            <a:srgbClr val="E9F6FD"/>
+          </a:solidFill>
+          <a:ln/>
+        </p:spPr>
+      </p:sp>
       <p:pic>
         <p:nvPicPr>
-          <p:cNvPr id="16" name="svg" descr="svg">    </p:cNvPr>
+          <p:cNvPr id="18" name="svg" descr="svg">    </p:cNvPr>
           <p:cNvPicPr>
             <a:picLocks noChangeAspect="1"/>
           </p:cNvPicPr>
@@ -1376,17 +1425,39 @@
         </p:blipFill>
         <p:spPr>
           <a:xfrm>
-            <a:off x="827024" y="3502565"/>
-            <a:ext cx="125984" cy="138176"/>
+            <a:off x="1857248" y="3451987"/>
+            <a:ext cx="316992" cy="217424"/>
           </a:xfrm>
           <a:prstGeom prst="rect">
             <a:avLst/>
           </a:prstGeom>
         </p:spPr>
       </p:pic>
+      <p:sp>
+        <p:nvSpPr>
+          <p:cNvPr id="19" name="p1p-pan"/>
+          <p:cNvSpPr/>
+          <p:nvPr/>
+        </p:nvSpPr>
+        <p:spPr>
+          <a:xfrm>
+            <a:off x="2450592" y="3352419"/>
+            <a:ext cx="755904" cy="1133856"/>
+          </a:xfrm>
+          <a:prstGeom prst="roundRect">
+            <a:avLst>
+              <a:gd name="adj" fmla="val 8065"/>
+            </a:avLst>
+          </a:prstGeom>
+          <a:solidFill>
+            <a:srgbClr val="E9F6FD"/>
+          </a:solidFill>
+          <a:ln/>
+        </p:spPr>
+      </p:sp>
       <p:pic>
         <p:nvPicPr>
-          <p:cNvPr id="17" name="p1p-fc" descr="p1p-fc">    </p:cNvPr>
+          <p:cNvPr id="20" name="svg" descr="svg">    </p:cNvPr>
           <p:cNvPicPr>
             <a:picLocks noChangeAspect="1"/>
           </p:cNvPicPr>
@@ -1400,8 +1471,8 @@
         </p:blipFill>
         <p:spPr>
           <a:xfrm>
-            <a:off x="1662525" y="3523901"/>
-            <a:ext cx="1349248" cy="85344"/>
+            <a:off x="2651760" y="3445891"/>
+            <a:ext cx="359664" cy="239776"/>
           </a:xfrm>
           <a:prstGeom prst="rect">
             <a:avLst/>
@@ -1410,7 +1481,7 @@
       </p:pic>
       <p:pic>
         <p:nvPicPr>
-          <p:cNvPr id="18" name="ring p1p-fr" descr="ring p1p-fr">    </p:cNvPr>
+          <p:cNvPr id="21" name="p1p-play" descr="p1p-play">    </p:cNvPr>
           <p:cNvPicPr>
             <a:picLocks noChangeAspect="1"/>
           </p:cNvPicPr>
@@ -1424,8 +1495,8 @@
         </p:blipFill>
         <p:spPr>
           <a:xfrm>
-            <a:off x="3083846" y="3407061"/>
-            <a:ext cx="316992" cy="316992"/>
+            <a:off x="1816608" y="3724275"/>
+            <a:ext cx="390144" cy="390144"/>
           </a:xfrm>
           <a:prstGeom prst="rect">
             <a:avLst/>
@@ -1434,7 +1505,7 @@
       </p:pic>
       <p:pic>
         <p:nvPicPr>
-          <p:cNvPr id="19" name="svg" descr="svg">    </p:cNvPr>
+          <p:cNvPr id="22" name="svg" descr="svg">    </p:cNvPr>
           <p:cNvPicPr>
             <a:picLocks noChangeAspect="1"/>
           </p:cNvPicPr>
@@ -1448,17 +1519,39 @@
         </p:blipFill>
         <p:spPr>
           <a:xfrm>
-            <a:off x="3175286" y="3498501"/>
-            <a:ext cx="134112" cy="134112"/>
+            <a:off x="1987296" y="3866515"/>
+            <a:ext cx="89408" cy="105664"/>
           </a:xfrm>
           <a:prstGeom prst="rect">
             <a:avLst/>
           </a:prstGeom>
         </p:spPr>
       </p:pic>
+      <p:sp>
+        <p:nvSpPr>
+          <p:cNvPr id="23" name="p1p-bar"/>
+          <p:cNvSpPr/>
+          <p:nvPr/>
+        </p:nvSpPr>
+        <p:spPr>
+          <a:xfrm>
+            <a:off x="853440" y="4577715"/>
+            <a:ext cx="2316480" cy="30480"/>
+          </a:xfrm>
+          <a:prstGeom prst="roundRect">
+            <a:avLst>
+              <a:gd name="adj" fmla="val 50000"/>
+            </a:avLst>
+          </a:prstGeom>
+          <a:solidFill>
+            <a:srgbClr val="D8E0EB"/>
+          </a:solidFill>
+          <a:ln/>
+        </p:spPr>
+      </p:sp>
       <p:pic>
         <p:nvPicPr>
-          <p:cNvPr id="20" name="p1p-fc" descr="p1p-fc">    </p:cNvPr>
+          <p:cNvPr id="24" name="i" descr="i">    </p:cNvPr>
           <p:cNvPicPr>
             <a:picLocks noChangeAspect="1"/>
           </p:cNvPicPr>
@@ -1472,17 +1565,42 @@
         </p:blipFill>
         <p:spPr>
           <a:xfrm>
-            <a:off x="4125754" y="3523901"/>
-            <a:ext cx="1343152" cy="85344"/>
+            <a:off x="851408" y="4577715"/>
+            <a:ext cx="1485392" cy="30480"/>
           </a:xfrm>
           <a:prstGeom prst="rect">
             <a:avLst/>
           </a:prstGeom>
         </p:spPr>
       </p:pic>
+      <p:sp>
+        <p:nvSpPr>
+          <p:cNvPr id="25" name="b"/>
+          <p:cNvSpPr/>
+          <p:nvPr/>
+        </p:nvSpPr>
+        <p:spPr>
+          <a:xfrm>
+            <a:off x="2302383" y="4559427"/>
+            <a:ext cx="67056" cy="67056"/>
+          </a:xfrm>
+          <a:prstGeom prst="ellipse">
+            <a:avLst/>
+          </a:prstGeom>
+          <a:solidFill>
+            <a:srgbClr val="2A78DD"/>
+          </a:solidFill>
+          <a:ln w="12192">
+            <a:solidFill>
+              <a:srgbClr val="FFFFFF"/>
+            </a:solidFill>
+            <a:prstDash val="solid"/>
+          </a:ln>
+        </p:spPr>
+      </p:sp>
       <p:pic>
         <p:nvPicPr>
-          <p:cNvPr id="21" name="ring solid p1p-fr" descr="ring solid p1p-fr">    </p:cNvPr>
+          <p:cNvPr id="26" name="i" descr="i">    </p:cNvPr>
           <p:cNvPicPr>
             <a:picLocks noChangeAspect="1"/>
           </p:cNvPicPr>
@@ -1496,8 +1614,8 @@
         </p:blipFill>
         <p:spPr>
           <a:xfrm>
-            <a:off x="5540978" y="3407061"/>
-            <a:ext cx="316992" cy="316992"/>
+            <a:off x="4584192" y="3968115"/>
+            <a:ext cx="701040" cy="36576"/>
           </a:xfrm>
           <a:prstGeom prst="rect">
             <a:avLst/>
@@ -1506,7 +1624,7 @@
       </p:pic>
       <p:pic>
         <p:nvPicPr>
-          <p:cNvPr id="22" name="svg" descr="svg">    </p:cNvPr>
+          <p:cNvPr id="27" name="svg" descr="svg">    </p:cNvPr>
           <p:cNvPicPr>
             <a:picLocks noChangeAspect="1"/>
           </p:cNvPicPr>
@@ -1520,8 +1638,8 @@
         </p:blipFill>
         <p:spPr>
           <a:xfrm>
-            <a:off x="5642578" y="3508661"/>
-            <a:ext cx="113792" cy="113792"/>
+            <a:off x="5279136" y="3913251"/>
+            <a:ext cx="121920" cy="146304"/>
           </a:xfrm>
           <a:prstGeom prst="rect">
             <a:avLst/>
@@ -1530,7 +1648,7 @@
       </p:pic>
       <p:pic>
         <p:nvPicPr>
-          <p:cNvPr id="23" name="p1p-path" descr="p1p-path">    </p:cNvPr>
+          <p:cNvPr id="28" name="svg" descr="svg">    </p:cNvPr>
           <p:cNvPicPr>
             <a:picLocks noChangeAspect="1"/>
           </p:cNvPicPr>
@@ -1544,8 +1662,8 @@
         </p:blipFill>
         <p:spPr>
           <a:xfrm>
-            <a:off x="893064" y="3857943"/>
-            <a:ext cx="22352" cy="5163312"/>
+            <a:off x="5632704" y="3254883"/>
+            <a:ext cx="1048512" cy="1237488"/>
           </a:xfrm>
           <a:prstGeom prst="rect">
             <a:avLst/>
@@ -1554,32 +1672,29 @@
       </p:pic>
       <p:sp>
         <p:nvSpPr>
-          <p:cNvPr id="24" name="p1p-top"/>
+          <p:cNvPr id="29" name="p1p-comp"/>
           <p:cNvSpPr/>
           <p:nvPr/>
         </p:nvSpPr>
         <p:spPr>
           <a:xfrm>
-            <a:off x="862584" y="3810191"/>
-            <a:ext cx="79248" cy="79248"/>
-          </a:xfrm>
-          <a:prstGeom prst="ellipse">
-            <a:avLst/>
-          </a:prstGeom>
-          <a:solidFill>
-            <a:srgbClr val="45B9EC"/>
-          </a:solidFill>
-          <a:ln w="18288">
-            <a:solidFill>
-              <a:srgbClr val="FFFFFF"/>
-            </a:solidFill>
-            <a:prstDash val="solid"/>
-          </a:ln>
+            <a:off x="5563172" y="4510659"/>
+            <a:ext cx="1187577" cy="219456"/>
+          </a:xfrm>
+          <a:prstGeom prst="roundRect">
+            <a:avLst>
+              <a:gd name="adj" fmla="val 50000"/>
+            </a:avLst>
+          </a:prstGeom>
+          <a:solidFill>
+            <a:srgbClr val="FFF4DB"/>
+          </a:solidFill>
+          <a:ln/>
         </p:spPr>
       </p:sp>
       <p:pic>
         <p:nvPicPr>
-          <p:cNvPr id="25" name="svg" descr="svg">    </p:cNvPr>
+          <p:cNvPr id="30" name="p1p-path" descr="p1p-path">    </p:cNvPr>
           <p:cNvPicPr>
             <a:picLocks noChangeAspect="1"/>
           </p:cNvPicPr>
@@ -1593,8 +1708,8 @@
         </p:blipFill>
         <p:spPr>
           <a:xfrm>
-            <a:off x="510032" y="4016439"/>
-            <a:ext cx="782320" cy="780288"/>
+            <a:off x="807720" y="4839843"/>
+            <a:ext cx="22352" cy="4315968"/>
           </a:xfrm>
           <a:prstGeom prst="rect">
             <a:avLst/>
@@ -1603,27 +1718,32 @@
       </p:pic>
       <p:sp>
         <p:nvSpPr>
-          <p:cNvPr id="26" name="s"/>
+          <p:cNvPr id="31" name="p1p-top"/>
           <p:cNvSpPr/>
           <p:nvPr/>
         </p:nvSpPr>
         <p:spPr>
           <a:xfrm>
-            <a:off x="1727930" y="4108609"/>
-            <a:ext cx="134112" cy="12192"/>
-          </a:xfrm>
-          <a:prstGeom prst="rect">
-            <a:avLst/>
-          </a:prstGeom>
-          <a:solidFill>
-            <a:srgbClr val="C3CEDD"/>
-          </a:solidFill>
-          <a:ln/>
+            <a:off x="777240" y="4794123"/>
+            <a:ext cx="79248" cy="79248"/>
+          </a:xfrm>
+          <a:prstGeom prst="ellipse">
+            <a:avLst/>
+          </a:prstGeom>
+          <a:solidFill>
+            <a:srgbClr val="45B9EC"/>
+          </a:solidFill>
+          <a:ln w="18288">
+            <a:solidFill>
+              <a:srgbClr val="FFFFFF"/>
+            </a:solidFill>
+            <a:prstDash val="solid"/>
+          </a:ln>
         </p:spPr>
       </p:sp>
       <p:pic>
         <p:nvPicPr>
-          <p:cNvPr id="27" name="p1p-fact" descr="p1p-fact">    </p:cNvPr>
+          <p:cNvPr id="32" name="p1p-rl v" descr="p1p-rl v">    </p:cNvPr>
           <p:cNvPicPr>
             <a:picLocks noChangeAspect="1"/>
           </p:cNvPicPr>
@@ -1637,41 +1757,17 @@
         </p:blipFill>
         <p:spPr>
           <a:xfrm>
-            <a:off x="1499616" y="4493514"/>
-            <a:ext cx="1444752" cy="280416"/>
+            <a:off x="6905752" y="4907915"/>
+            <a:ext cx="18288" cy="4261104"/>
           </a:xfrm>
           <a:prstGeom prst="rect">
             <a:avLst/>
           </a:prstGeom>
         </p:spPr>
       </p:pic>
-      <p:sp>
-        <p:nvSpPr>
-          <p:cNvPr id="28" name="p1p-fact ic"/>
-          <p:cNvSpPr/>
-          <p:nvPr/>
-        </p:nvSpPr>
-        <p:spPr>
-          <a:xfrm>
-            <a:off x="3013996" y="4499610"/>
-            <a:ext cx="1822990" cy="268224"/>
-          </a:xfrm>
-          <a:prstGeom prst="roundRect">
-            <a:avLst>
-              <a:gd name="adj" fmla="val 50000"/>
-            </a:avLst>
-          </a:prstGeom>
-          <a:ln w="12192">
-            <a:solidFill>
-              <a:srgbClr val="D8E0EB"/>
-            </a:solidFill>
-            <a:prstDash val="solid"/>
-          </a:ln>
-        </p:spPr>
-      </p:sp>
       <p:pic>
         <p:nvPicPr>
-          <p:cNvPr id="29" name="svg" descr="svg">    </p:cNvPr>
+          <p:cNvPr id="33" name="p1p-rl h" descr="p1p-rl h">    </p:cNvPr>
           <p:cNvPicPr>
             <a:picLocks noChangeAspect="1"/>
           </p:cNvPicPr>
@@ -1685,42 +1781,17 @@
         </p:blipFill>
         <p:spPr>
           <a:xfrm>
-            <a:off x="3142012" y="4580890"/>
-            <a:ext cx="105664" cy="105664"/>
+            <a:off x="6149848" y="4907915"/>
+            <a:ext cx="774192" cy="18288"/>
           </a:xfrm>
           <a:prstGeom prst="rect">
             <a:avLst/>
           </a:prstGeom>
         </p:spPr>
       </p:pic>
-      <p:sp>
-        <p:nvSpPr>
-          <p:cNvPr id="30" name="i"/>
-          <p:cNvSpPr/>
-          <p:nvPr/>
-        </p:nvSpPr>
-        <p:spPr>
-          <a:xfrm>
-            <a:off x="862584" y="4850606"/>
-            <a:ext cx="79248" cy="79248"/>
-          </a:xfrm>
-          <a:prstGeom prst="ellipse">
-            <a:avLst/>
-          </a:prstGeom>
-          <a:solidFill>
-            <a:srgbClr val="3DA6E7"/>
-          </a:solidFill>
-          <a:ln w="18288">
-            <a:solidFill>
-              <a:srgbClr val="FFFFFF"/>
-            </a:solidFill>
-            <a:prstDash val="solid"/>
-          </a:ln>
-        </p:spPr>
-      </p:sp>
       <p:pic>
         <p:nvPicPr>
-          <p:cNvPr id="31" name="svg" descr="svg">    </p:cNvPr>
+          <p:cNvPr id="34" name="p1p-rl s" descr="p1p-rl s">    </p:cNvPr>
           <p:cNvPicPr>
             <a:picLocks noChangeAspect="1"/>
           </p:cNvPicPr>
@@ -1734,8 +1805,8 @@
         </p:blipFill>
         <p:spPr>
           <a:xfrm>
-            <a:off x="512064" y="4985766"/>
-            <a:ext cx="780288" cy="780288"/>
+            <a:off x="6149848" y="4833747"/>
+            <a:ext cx="18288" cy="85344"/>
           </a:xfrm>
           <a:prstGeom prst="rect">
             <a:avLst/>
@@ -1744,27 +1815,32 @@
       </p:pic>
       <p:sp>
         <p:nvSpPr>
-          <p:cNvPr id="32" name="s"/>
+          <p:cNvPr id="35" name="p1p-rl d"/>
           <p:cNvSpPr/>
           <p:nvPr/>
         </p:nvSpPr>
         <p:spPr>
           <a:xfrm>
-            <a:off x="1727930" y="5079968"/>
-            <a:ext cx="134112" cy="12192"/>
-          </a:xfrm>
-          <a:prstGeom prst="rect">
-            <a:avLst/>
-          </a:prstGeom>
-          <a:solidFill>
-            <a:srgbClr val="C3CEDD"/>
-          </a:solidFill>
-          <a:ln/>
+            <a:off x="6117336" y="4794123"/>
+            <a:ext cx="79248" cy="79248"/>
+          </a:xfrm>
+          <a:prstGeom prst="ellipse">
+            <a:avLst/>
+          </a:prstGeom>
+          <a:solidFill>
+            <a:srgbClr val="FDBB30"/>
+          </a:solidFill>
+          <a:ln w="18288">
+            <a:solidFill>
+              <a:srgbClr val="FFFFFF"/>
+            </a:solidFill>
+            <a:prstDash val="solid"/>
+          </a:ln>
         </p:spPr>
       </p:sp>
       <p:pic>
         <p:nvPicPr>
-          <p:cNvPr id="33" name="p1p-fact" descr="p1p-fact">    </p:cNvPr>
+          <p:cNvPr id="36" name="svg" descr="svg">    </p:cNvPr>
           <p:cNvPicPr>
             <a:picLocks noChangeAspect="1"/>
           </p:cNvPicPr>
@@ -1778,17 +1854,37 @@
         </p:blipFill>
         <p:spPr>
           <a:xfrm>
-            <a:off x="1499616" y="5462842"/>
-            <a:ext cx="1932432" cy="280416"/>
+            <a:off x="512064" y="4998339"/>
+            <a:ext cx="609600" cy="609600"/>
           </a:xfrm>
           <a:prstGeom prst="rect">
             <a:avLst/>
           </a:prstGeom>
         </p:spPr>
       </p:pic>
+      <p:sp>
+        <p:nvSpPr>
+          <p:cNvPr id="37" name="s"/>
+          <p:cNvSpPr/>
+          <p:nvPr/>
+        </p:nvSpPr>
+        <p:spPr>
+          <a:xfrm>
+            <a:off x="1532858" y="5138547"/>
+            <a:ext cx="121920" cy="12192"/>
+          </a:xfrm>
+          <a:prstGeom prst="rect">
+            <a:avLst/>
+          </a:prstGeom>
+          <a:solidFill>
+            <a:srgbClr val="C3CEDD"/>
+          </a:solidFill>
+          <a:ln/>
+        </p:spPr>
+      </p:sp>
       <p:pic>
         <p:nvPicPr>
-          <p:cNvPr id="34" name="p1p-to" descr="p1p-to">    </p:cNvPr>
+          <p:cNvPr id="38" name="p1p-fact" descr="p1p-fact">    </p:cNvPr>
           <p:cNvPicPr>
             <a:picLocks noChangeAspect="1"/>
           </p:cNvPicPr>
@@ -1802,17 +1898,41 @@
         </p:blipFill>
         <p:spPr>
           <a:xfrm>
-            <a:off x="3491357" y="5570538"/>
-            <a:ext cx="83312" cy="65024"/>
+            <a:off x="1304544" y="5298345"/>
+            <a:ext cx="1444752" cy="268224"/>
           </a:xfrm>
           <a:prstGeom prst="rect">
             <a:avLst/>
           </a:prstGeom>
         </p:spPr>
       </p:pic>
+      <p:sp>
+        <p:nvSpPr>
+          <p:cNvPr id="39" name="p1p-fact ic"/>
+          <p:cNvSpPr/>
+          <p:nvPr/>
+        </p:nvSpPr>
+        <p:spPr>
+          <a:xfrm>
+            <a:off x="2818924" y="5306473"/>
+            <a:ext cx="1822990" cy="256032"/>
+          </a:xfrm>
+          <a:prstGeom prst="roundRect">
+            <a:avLst>
+              <a:gd name="adj" fmla="val 50000"/>
+            </a:avLst>
+          </a:prstGeom>
+          <a:ln w="12192">
+            <a:solidFill>
+              <a:srgbClr val="D8E0EB"/>
+            </a:solidFill>
+            <a:prstDash val="solid"/>
+          </a:ln>
+        </p:spPr>
+      </p:sp>
       <p:pic>
         <p:nvPicPr>
-          <p:cNvPr id="35" name="p1p-fact" descr="p1p-fact">    </p:cNvPr>
+          <p:cNvPr id="40" name="svg" descr="svg">    </p:cNvPr>
           <p:cNvPicPr>
             <a:picLocks noChangeAspect="1"/>
           </p:cNvPicPr>
@@ -1826,17 +1946,42 @@
         </p:blipFill>
         <p:spPr>
           <a:xfrm>
-            <a:off x="3639693" y="5462842"/>
-            <a:ext cx="1097280" cy="280416"/>
+            <a:off x="2946940" y="5379625"/>
+            <a:ext cx="105664" cy="105664"/>
           </a:xfrm>
           <a:prstGeom prst="rect">
             <a:avLst/>
           </a:prstGeom>
         </p:spPr>
       </p:pic>
+      <p:sp>
+        <p:nvSpPr>
+          <p:cNvPr id="41" name="i"/>
+          <p:cNvSpPr/>
+          <p:nvPr/>
+        </p:nvSpPr>
+        <p:spPr>
+          <a:xfrm>
+            <a:off x="777240" y="5649563"/>
+            <a:ext cx="79248" cy="79248"/>
+          </a:xfrm>
+          <a:prstGeom prst="ellipse">
+            <a:avLst/>
+          </a:prstGeom>
+          <a:solidFill>
+            <a:srgbClr val="3DA6E7"/>
+          </a:solidFill>
+          <a:ln w="18288">
+            <a:solidFill>
+              <a:srgbClr val="FFFFFF"/>
+            </a:solidFill>
+            <a:prstDash val="solid"/>
+          </a:ln>
+        </p:spPr>
+      </p:sp>
       <p:pic>
         <p:nvPicPr>
-          <p:cNvPr id="36" name="p1p-to" descr="p1p-to">    </p:cNvPr>
+          <p:cNvPr id="42" name="svg" descr="svg">    </p:cNvPr>
           <p:cNvPicPr>
             <a:picLocks noChangeAspect="1"/>
           </p:cNvPicPr>
@@ -1850,17 +1995,37 @@
         </p:blipFill>
         <p:spPr>
           <a:xfrm>
-            <a:off x="4796504" y="5570538"/>
-            <a:ext cx="83312" cy="65024"/>
+            <a:off x="512064" y="5772468"/>
+            <a:ext cx="609600" cy="609600"/>
           </a:xfrm>
           <a:prstGeom prst="rect">
             <a:avLst/>
           </a:prstGeom>
         </p:spPr>
       </p:pic>
+      <p:sp>
+        <p:nvSpPr>
+          <p:cNvPr id="43" name="s"/>
+          <p:cNvSpPr/>
+          <p:nvPr/>
+        </p:nvSpPr>
+        <p:spPr>
+          <a:xfrm>
+            <a:off x="1532858" y="5910644"/>
+            <a:ext cx="121920" cy="12192"/>
+          </a:xfrm>
+          <a:prstGeom prst="rect">
+            <a:avLst/>
+          </a:prstGeom>
+          <a:solidFill>
+            <a:srgbClr val="C3CEDD"/>
+          </a:solidFill>
+          <a:ln/>
+        </p:spPr>
+      </p:sp>
       <p:pic>
         <p:nvPicPr>
-          <p:cNvPr id="37" name="p1p-fact key2" descr="p1p-fact key2">    </p:cNvPr>
+          <p:cNvPr id="44" name="p1p-fact" descr="p1p-fact">    </p:cNvPr>
           <p:cNvPicPr>
             <a:picLocks noChangeAspect="1"/>
           </p:cNvPicPr>
@@ -1874,62 +2039,17 @@
         </p:blipFill>
         <p:spPr>
           <a:xfrm>
-            <a:off x="4944840" y="5462842"/>
-            <a:ext cx="847344" cy="280416"/>
+            <a:off x="1304544" y="6072473"/>
+            <a:ext cx="1932432" cy="268224"/>
           </a:xfrm>
           <a:prstGeom prst="rect">
             <a:avLst/>
           </a:prstGeom>
         </p:spPr>
       </p:pic>
-      <p:sp>
-        <p:nvSpPr>
-          <p:cNvPr id="38" name="i"/>
-          <p:cNvSpPr/>
-          <p:nvPr/>
-        </p:nvSpPr>
-        <p:spPr>
-          <a:xfrm>
-            <a:off x="862584" y="5821966"/>
-            <a:ext cx="79248" cy="79248"/>
-          </a:xfrm>
-          <a:prstGeom prst="ellipse">
-            <a:avLst/>
-          </a:prstGeom>
-          <a:solidFill>
-            <a:srgbClr val="3695E4"/>
-          </a:solidFill>
-          <a:ln w="18288">
-            <a:solidFill>
-              <a:srgbClr val="FFFFFF"/>
-            </a:solidFill>
-            <a:prstDash val="solid"/>
-          </a:ln>
-        </p:spPr>
-      </p:sp>
-      <p:sp>
-        <p:nvSpPr>
-          <p:cNvPr id="39" name="s"/>
-          <p:cNvSpPr/>
-          <p:nvPr/>
-        </p:nvSpPr>
-        <p:spPr>
-          <a:xfrm>
-            <a:off x="1727930" y="6030563"/>
-            <a:ext cx="134112" cy="12192"/>
-          </a:xfrm>
-          <a:prstGeom prst="rect">
-            <a:avLst/>
-          </a:prstGeom>
-          <a:solidFill>
-            <a:srgbClr val="C3CEDD"/>
-          </a:solidFill>
-          <a:ln/>
-        </p:spPr>
-      </p:sp>
       <p:pic>
         <p:nvPicPr>
-          <p:cNvPr id="40" name="svg" descr="svg">    </p:cNvPr>
+          <p:cNvPr id="45" name="p1p-to" descr="p1p-to">    </p:cNvPr>
           <p:cNvPicPr>
             <a:picLocks noChangeAspect="1"/>
           </p:cNvPicPr>
@@ -1943,44 +2063,17 @@
         </p:blipFill>
         <p:spPr>
           <a:xfrm>
-            <a:off x="512064" y="7046913"/>
-            <a:ext cx="780288" cy="780288"/>
+            <a:off x="3296285" y="6174073"/>
+            <a:ext cx="83312" cy="65024"/>
           </a:xfrm>
           <a:prstGeom prst="rect">
             <a:avLst/>
           </a:prstGeom>
         </p:spPr>
       </p:pic>
-      <p:sp>
-        <p:nvSpPr>
-          <p:cNvPr id="41" name="p1p-role me"/>
-          <p:cNvSpPr/>
-          <p:nvPr/>
-        </p:nvSpPr>
-        <p:spPr>
-          <a:xfrm>
-            <a:off x="1505712" y="6433757"/>
-            <a:ext cx="2712720" cy="836676"/>
-          </a:xfrm>
-          <a:prstGeom prst="roundRect">
-            <a:avLst>
-              <a:gd name="adj" fmla="val 12386"/>
-            </a:avLst>
-          </a:prstGeom>
-          <a:solidFill>
-            <a:srgbClr val="FFFFFF"/>
-          </a:solidFill>
-          <a:ln w="12192">
-            <a:solidFill>
-              <a:srgbClr val="004B8D"/>
-            </a:solidFill>
-            <a:prstDash val="solid"/>
-          </a:ln>
-        </p:spPr>
-      </p:sp>
       <p:pic>
         <p:nvPicPr>
-          <p:cNvPr id="42" name="svg" descr="svg">    </p:cNvPr>
+          <p:cNvPr id="46" name="p1p-fact" descr="p1p-fact">    </p:cNvPr>
           <p:cNvPicPr>
             <a:picLocks noChangeAspect="1"/>
           </p:cNvPicPr>
@@ -1994,88 +2087,17 @@
         </p:blipFill>
         <p:spPr>
           <a:xfrm>
-            <a:off x="1633728" y="6546279"/>
-            <a:ext cx="182880" cy="182880"/>
+            <a:off x="3444621" y="6072473"/>
+            <a:ext cx="1097280" cy="268224"/>
           </a:xfrm>
           <a:prstGeom prst="rect">
             <a:avLst/>
           </a:prstGeom>
         </p:spPr>
       </p:pic>
-      <p:sp>
-        <p:nvSpPr>
-          <p:cNvPr id="43" name="p1p-me"/>
-          <p:cNvSpPr/>
-          <p:nvPr/>
-        </p:nvSpPr>
-        <p:spPr>
-          <a:xfrm>
-            <a:off x="2197608" y="6550343"/>
-            <a:ext cx="229648" cy="170688"/>
-          </a:xfrm>
-          <a:prstGeom prst="roundRect">
-            <a:avLst>
-              <a:gd name="adj" fmla="val 50000"/>
-            </a:avLst>
-          </a:prstGeom>
-          <a:solidFill>
-            <a:srgbClr val="004B8D"/>
-          </a:solidFill>
-          <a:ln/>
-        </p:spPr>
-      </p:sp>
-      <p:sp>
-        <p:nvSpPr>
-          <p:cNvPr id="44" name="p1p-tech"/>
-          <p:cNvSpPr/>
-          <p:nvPr/>
-        </p:nvSpPr>
-        <p:spPr>
-          <a:xfrm>
-            <a:off x="1633728" y="6996113"/>
-            <a:ext cx="635222" cy="182880"/>
-          </a:xfrm>
-          <a:prstGeom prst="roundRect">
-            <a:avLst>
-              <a:gd name="adj" fmla="val 50000"/>
-            </a:avLst>
-          </a:prstGeom>
-          <a:solidFill>
-            <a:srgbClr val="EEF4FC"/>
-          </a:solidFill>
-          <a:ln/>
-        </p:spPr>
-      </p:sp>
-      <p:sp>
-        <p:nvSpPr>
-          <p:cNvPr id="45" name="p1p-role"/>
-          <p:cNvSpPr/>
-          <p:nvPr/>
-        </p:nvSpPr>
-        <p:spPr>
-          <a:xfrm>
-            <a:off x="4328160" y="6433757"/>
-            <a:ext cx="2712720" cy="836676"/>
-          </a:xfrm>
-          <a:prstGeom prst="roundRect">
-            <a:avLst>
-              <a:gd name="adj" fmla="val 12386"/>
-            </a:avLst>
-          </a:prstGeom>
-          <a:solidFill>
-            <a:srgbClr val="FFFFFF"/>
-          </a:solidFill>
-          <a:ln w="12192">
-            <a:solidFill>
-              <a:srgbClr val="D8E0EB"/>
-            </a:solidFill>
-            <a:prstDash val="solid"/>
-          </a:ln>
-        </p:spPr>
-      </p:sp>
       <p:pic>
         <p:nvPicPr>
-          <p:cNvPr id="46" name="svg" descr="svg">    </p:cNvPr>
+          <p:cNvPr id="47" name="p1p-to" descr="p1p-to">    </p:cNvPr>
           <p:cNvPicPr>
             <a:picLocks noChangeAspect="1"/>
           </p:cNvPicPr>
@@ -2089,8 +2111,8 @@
         </p:blipFill>
         <p:spPr>
           <a:xfrm>
-            <a:off x="4456176" y="6546279"/>
-            <a:ext cx="182880" cy="182880"/>
+            <a:off x="4601432" y="6174073"/>
+            <a:ext cx="83312" cy="65024"/>
           </a:xfrm>
           <a:prstGeom prst="rect">
             <a:avLst/>
@@ -2099,7 +2121,7 @@
       </p:pic>
       <p:pic>
         <p:nvPicPr>
-          <p:cNvPr id="47" name="p1p-hub-ln" descr="p1p-hub-ln">    </p:cNvPr>
+          <p:cNvPr id="48" name="p1p-fact key2" descr="p1p-fact key2">    </p:cNvPr>
           <p:cNvPicPr>
             <a:picLocks noChangeAspect="1"/>
           </p:cNvPicPr>
@@ -2113,8 +2135,8 @@
         </p:blipFill>
         <p:spPr>
           <a:xfrm>
-            <a:off x="1290320" y="7425881"/>
-            <a:ext cx="4399280" cy="18288"/>
+            <a:off x="4749768" y="6072473"/>
+            <a:ext cx="847344" cy="268224"/>
           </a:xfrm>
           <a:prstGeom prst="rect">
             <a:avLst/>
@@ -2123,24 +2145,22 @@
       </p:pic>
       <p:sp>
         <p:nvSpPr>
-          <p:cNvPr id="48" name="p1p-share"/>
+          <p:cNvPr id="49" name="i"/>
           <p:cNvSpPr/>
           <p:nvPr/>
         </p:nvSpPr>
         <p:spPr>
           <a:xfrm>
-            <a:off x="3279839" y="7307009"/>
-            <a:ext cx="1986915" cy="256032"/>
-          </a:xfrm>
-          <a:prstGeom prst="roundRect">
-            <a:avLst>
-              <a:gd name="adj" fmla="val 50000"/>
-            </a:avLst>
-          </a:prstGeom>
-          <a:solidFill>
-            <a:srgbClr val="E5F6EC"/>
-          </a:solidFill>
-          <a:ln w="12192">
+            <a:off x="777240" y="6421660"/>
+            <a:ext cx="79248" cy="79248"/>
+          </a:xfrm>
+          <a:prstGeom prst="ellipse">
+            <a:avLst/>
+          </a:prstGeom>
+          <a:solidFill>
+            <a:srgbClr val="3695E4"/>
+          </a:solidFill>
+          <a:ln w="18288">
             <a:solidFill>
               <a:srgbClr val="FFFFFF"/>
             </a:solidFill>
@@ -2148,9 +2168,29 @@
           </a:ln>
         </p:spPr>
       </p:sp>
+      <p:sp>
+        <p:nvSpPr>
+          <p:cNvPr id="50" name="s"/>
+          <p:cNvSpPr/>
+          <p:nvPr/>
+        </p:nvSpPr>
+        <p:spPr>
+          <a:xfrm>
+            <a:off x="1532858" y="6643402"/>
+            <a:ext cx="121920" cy="12192"/>
+          </a:xfrm>
+          <a:prstGeom prst="rect">
+            <a:avLst/>
+          </a:prstGeom>
+          <a:solidFill>
+            <a:srgbClr val="C3CEDD"/>
+          </a:solidFill>
+          <a:ln/>
+        </p:spPr>
+      </p:sp>
       <p:pic>
         <p:nvPicPr>
-          <p:cNvPr id="49" name="svg" descr="svg">    </p:cNvPr>
+          <p:cNvPr id="51" name="svg" descr="svg">    </p:cNvPr>
           <p:cNvPicPr>
             <a:picLocks noChangeAspect="1"/>
           </p:cNvPicPr>
@@ -2164,8 +2204,8 @@
         </p:blipFill>
         <p:spPr>
           <a:xfrm>
-            <a:off x="3385503" y="7382193"/>
-            <a:ext cx="105664" cy="109728"/>
+            <a:off x="512064" y="7449217"/>
+            <a:ext cx="609600" cy="609600"/>
           </a:xfrm>
           <a:prstGeom prst="rect">
             <a:avLst/>
@@ -2174,18 +2214,18 @@
       </p:pic>
       <p:sp>
         <p:nvSpPr>
-          <p:cNvPr id="50" name="p1p-role"/>
+          <p:cNvPr id="52" name="p1p-role me"/>
           <p:cNvSpPr/>
           <p:nvPr/>
         </p:nvSpPr>
         <p:spPr>
           <a:xfrm>
-            <a:off x="1505712" y="7599617"/>
-            <a:ext cx="2712720" cy="836676"/>
+            <a:off x="1310640" y="6823520"/>
+            <a:ext cx="2676144" cy="790289"/>
           </a:xfrm>
           <a:prstGeom prst="roundRect">
             <a:avLst>
-              <a:gd name="adj" fmla="val 12386"/>
+              <a:gd name="adj" fmla="val 13113"/>
             </a:avLst>
           </a:prstGeom>
           <a:solidFill>
@@ -2193,7 +2233,7 @@
           </a:solidFill>
           <a:ln w="12192">
             <a:solidFill>
-              <a:srgbClr val="D8E0EB"/>
+              <a:srgbClr val="004B8D"/>
             </a:solidFill>
             <a:prstDash val="solid"/>
           </a:ln>
@@ -2201,7 +2241,7 @@
       </p:sp>
       <p:pic>
         <p:nvPicPr>
-          <p:cNvPr id="51" name="p1p-hub-st l" descr="p1p-hub-st l">    </p:cNvPr>
+          <p:cNvPr id="53" name="svg" descr="svg">    </p:cNvPr>
           <p:cNvPicPr>
             <a:picLocks noChangeAspect="1"/>
           </p:cNvPicPr>
@@ -2215,8 +2255,8 @@
         </p:blipFill>
         <p:spPr>
           <a:xfrm>
-            <a:off x="2852928" y="7278561"/>
-            <a:ext cx="18288" cy="316992"/>
+            <a:off x="1438656" y="6919786"/>
+            <a:ext cx="170688" cy="170688"/>
           </a:xfrm>
           <a:prstGeom prst="rect">
             <a:avLst/>
@@ -2225,24 +2265,70 @@
       </p:pic>
       <p:sp>
         <p:nvSpPr>
-          <p:cNvPr id="52" name="p1p-hub-dt l"/>
+          <p:cNvPr id="54" name="p1p-me"/>
           <p:cNvSpPr/>
           <p:nvPr/>
         </p:nvSpPr>
         <p:spPr>
           <a:xfrm>
-            <a:off x="2822448" y="7395401"/>
-            <a:ext cx="79248" cy="79248"/>
-          </a:xfrm>
-          <a:prstGeom prst="ellipse">
-            <a:avLst/>
-          </a:prstGeom>
-          <a:solidFill>
-            <a:srgbClr val="00A94F"/>
-          </a:solidFill>
-          <a:ln w="18288">
+            <a:off x="1990344" y="6921818"/>
+            <a:ext cx="229648" cy="170688"/>
+          </a:xfrm>
+          <a:prstGeom prst="roundRect">
+            <a:avLst>
+              <a:gd name="adj" fmla="val 50000"/>
+            </a:avLst>
+          </a:prstGeom>
+          <a:solidFill>
+            <a:srgbClr val="004B8D"/>
+          </a:solidFill>
+          <a:ln/>
+        </p:spPr>
+      </p:sp>
+      <p:sp>
+        <p:nvSpPr>
+          <p:cNvPr id="55" name="p1p-tech"/>
+          <p:cNvSpPr/>
+          <p:nvPr/>
+        </p:nvSpPr>
+        <p:spPr>
+          <a:xfrm>
+            <a:off x="1438656" y="7351681"/>
+            <a:ext cx="635222" cy="182880"/>
+          </a:xfrm>
+          <a:prstGeom prst="roundRect">
+            <a:avLst>
+              <a:gd name="adj" fmla="val 50000"/>
+            </a:avLst>
+          </a:prstGeom>
+          <a:solidFill>
+            <a:srgbClr val="EEF4FC"/>
+          </a:solidFill>
+          <a:ln/>
+        </p:spPr>
+      </p:sp>
+      <p:sp>
+        <p:nvSpPr>
+          <p:cNvPr id="56" name="p1p-role"/>
+          <p:cNvSpPr/>
+          <p:nvPr/>
+        </p:nvSpPr>
+        <p:spPr>
+          <a:xfrm>
+            <a:off x="4096512" y="6823520"/>
+            <a:ext cx="2676144" cy="790289"/>
+          </a:xfrm>
+          <a:prstGeom prst="roundRect">
+            <a:avLst>
+              <a:gd name="adj" fmla="val 13113"/>
+            </a:avLst>
+          </a:prstGeom>
+          <a:solidFill>
+            <a:srgbClr val="FFFFFF"/>
+          </a:solidFill>
+          <a:ln w="12192">
             <a:solidFill>
-              <a:srgbClr val="FFFFFF"/>
+              <a:srgbClr val="D8E0EB"/>
             </a:solidFill>
             <a:prstDash val="solid"/>
           </a:ln>
@@ -2250,7 +2336,7 @@
       </p:sp>
       <p:pic>
         <p:nvPicPr>
-          <p:cNvPr id="53" name="svg" descr="svg">    </p:cNvPr>
+          <p:cNvPr id="57" name="svg" descr="svg">    </p:cNvPr>
           <p:cNvPicPr>
             <a:picLocks noChangeAspect="1"/>
           </p:cNvPicPr>
@@ -2264,66 +2350,17 @@
         </p:blipFill>
         <p:spPr>
           <a:xfrm>
-            <a:off x="1633728" y="7712139"/>
-            <a:ext cx="182880" cy="182880"/>
+            <a:off x="4224528" y="6919786"/>
+            <a:ext cx="170688" cy="170688"/>
           </a:xfrm>
           <a:prstGeom prst="rect">
             <a:avLst/>
           </a:prstGeom>
         </p:spPr>
       </p:pic>
-      <p:sp>
-        <p:nvSpPr>
-          <p:cNvPr id="54" name="p1p-tech"/>
-          <p:cNvSpPr/>
-          <p:nvPr/>
-        </p:nvSpPr>
-        <p:spPr>
-          <a:xfrm>
-            <a:off x="1633728" y="7969949"/>
-            <a:ext cx="438245" cy="182880"/>
-          </a:xfrm>
-          <a:prstGeom prst="roundRect">
-            <a:avLst>
-              <a:gd name="adj" fmla="val 50000"/>
-            </a:avLst>
-          </a:prstGeom>
-          <a:solidFill>
-            <a:srgbClr val="EEF4FC"/>
-          </a:solidFill>
-          <a:ln/>
-        </p:spPr>
-      </p:sp>
-      <p:sp>
-        <p:nvSpPr>
-          <p:cNvPr id="55" name="p1p-role"/>
-          <p:cNvSpPr/>
-          <p:nvPr/>
-        </p:nvSpPr>
-        <p:spPr>
-          <a:xfrm>
-            <a:off x="4328160" y="7599617"/>
-            <a:ext cx="2712720" cy="836676"/>
-          </a:xfrm>
-          <a:prstGeom prst="roundRect">
-            <a:avLst>
-              <a:gd name="adj" fmla="val 12386"/>
-            </a:avLst>
-          </a:prstGeom>
-          <a:solidFill>
-            <a:srgbClr val="FFFFFF"/>
-          </a:solidFill>
-          <a:ln w="12192">
-            <a:solidFill>
-              <a:srgbClr val="D8E0EB"/>
-            </a:solidFill>
-            <a:prstDash val="solid"/>
-          </a:ln>
-        </p:spPr>
-      </p:sp>
       <p:pic>
         <p:nvPicPr>
-          <p:cNvPr id="56" name="p1p-hub-st r" descr="p1p-hub-st r">    </p:cNvPr>
+          <p:cNvPr id="58" name="p1p-hub-ln" descr="p1p-hub-ln">    </p:cNvPr>
           <p:cNvPicPr>
             <a:picLocks noChangeAspect="1"/>
           </p:cNvPicPr>
@@ -2337,42 +2374,17 @@
         </p:blipFill>
         <p:spPr>
           <a:xfrm>
-            <a:off x="5675376" y="7278561"/>
-            <a:ext cx="18288" cy="316992"/>
+            <a:off x="1119632" y="7742841"/>
+            <a:ext cx="4320032" cy="18288"/>
           </a:xfrm>
           <a:prstGeom prst="rect">
             <a:avLst/>
           </a:prstGeom>
         </p:spPr>
       </p:pic>
-      <p:sp>
-        <p:nvSpPr>
-          <p:cNvPr id="57" name="p1p-hub-dt r"/>
-          <p:cNvSpPr/>
-          <p:nvPr/>
-        </p:nvSpPr>
-        <p:spPr>
-          <a:xfrm>
-            <a:off x="5644896" y="7395401"/>
-            <a:ext cx="79248" cy="79248"/>
-          </a:xfrm>
-          <a:prstGeom prst="ellipse">
-            <a:avLst/>
-          </a:prstGeom>
-          <a:solidFill>
-            <a:srgbClr val="00A94F"/>
-          </a:solidFill>
-          <a:ln w="18288">
-            <a:solidFill>
-              <a:srgbClr val="FFFFFF"/>
-            </a:solidFill>
-            <a:prstDash val="solid"/>
-          </a:ln>
-        </p:spPr>
-      </p:sp>
       <p:pic>
         <p:nvPicPr>
-          <p:cNvPr id="58" name="svg" descr="svg">    </p:cNvPr>
+          <p:cNvPr id="59" name="p1p-hub-st r" descr="p1p-hub-st r">    </p:cNvPr>
           <p:cNvPicPr>
             <a:picLocks noChangeAspect="1"/>
           </p:cNvPicPr>
@@ -2386,8 +2398,8 @@
         </p:blipFill>
         <p:spPr>
           <a:xfrm>
-            <a:off x="4456176" y="7712139"/>
-            <a:ext cx="182880" cy="182880"/>
+            <a:off x="5425440" y="7619905"/>
+            <a:ext cx="18288" cy="268224"/>
           </a:xfrm>
           <a:prstGeom prst="rect">
             <a:avLst/>
@@ -2396,20 +2408,20 @@
       </p:pic>
       <p:sp>
         <p:nvSpPr>
-          <p:cNvPr id="59" name="i"/>
+          <p:cNvPr id="60" name="p1p-hub-dt r"/>
           <p:cNvSpPr/>
           <p:nvPr/>
         </p:nvSpPr>
         <p:spPr>
           <a:xfrm>
-            <a:off x="862584" y="8498300"/>
+            <a:off x="5394960" y="7714393"/>
             <a:ext cx="79248" cy="79248"/>
           </a:xfrm>
           <a:prstGeom prst="ellipse">
             <a:avLst/>
           </a:prstGeom>
           <a:solidFill>
-            <a:srgbClr val="2F85E0"/>
+            <a:srgbClr val="00A94F"/>
           </a:solidFill>
           <a:ln w="18288">
             <a:solidFill>
@@ -2419,9 +2431,36 @@
           </a:ln>
         </p:spPr>
       </p:sp>
+      <p:sp>
+        <p:nvSpPr>
+          <p:cNvPr id="61" name="p1p-share"/>
+          <p:cNvSpPr/>
+          <p:nvPr/>
+        </p:nvSpPr>
+        <p:spPr>
+          <a:xfrm>
+            <a:off x="3048191" y="7638193"/>
+            <a:ext cx="1986915" cy="231648"/>
+          </a:xfrm>
+          <a:prstGeom prst="roundRect">
+            <a:avLst>
+              <a:gd name="adj" fmla="val 50000"/>
+            </a:avLst>
+          </a:prstGeom>
+          <a:solidFill>
+            <a:srgbClr val="E5F6EC"/>
+          </a:solidFill>
+          <a:ln w="12192">
+            <a:solidFill>
+              <a:srgbClr val="FFFFFF"/>
+            </a:solidFill>
+            <a:prstDash val="solid"/>
+          </a:ln>
+        </p:spPr>
+      </p:sp>
       <p:pic>
         <p:nvPicPr>
-          <p:cNvPr id="60" name="svg" descr="svg">    </p:cNvPr>
+          <p:cNvPr id="62" name="svg" descr="svg">    </p:cNvPr>
           <p:cNvPicPr>
             <a:picLocks noChangeAspect="1"/>
           </p:cNvPicPr>
@@ -2435,8 +2474,8 @@
         </p:blipFill>
         <p:spPr>
           <a:xfrm>
-            <a:off x="512064" y="8631428"/>
-            <a:ext cx="780288" cy="780288"/>
+            <a:off x="3153855" y="7699153"/>
+            <a:ext cx="105664" cy="109728"/>
           </a:xfrm>
           <a:prstGeom prst="rect">
             <a:avLst/>
@@ -2445,46 +2484,26 @@
       </p:pic>
       <p:sp>
         <p:nvSpPr>
-          <p:cNvPr id="61" name="s"/>
+          <p:cNvPr id="63" name="p1p-role"/>
           <p:cNvSpPr/>
           <p:nvPr/>
         </p:nvSpPr>
         <p:spPr>
           <a:xfrm>
-            <a:off x="1727930" y="8727662"/>
-            <a:ext cx="134112" cy="12192"/>
-          </a:xfrm>
-          <a:prstGeom prst="rect">
-            <a:avLst/>
-          </a:prstGeom>
-          <a:solidFill>
-            <a:srgbClr val="C3CEDD"/>
-          </a:solidFill>
-          <a:ln/>
-        </p:spPr>
-      </p:sp>
-      <p:sp>
-        <p:nvSpPr>
-          <p:cNvPr id="62" name="p1p-fact gold ic"/>
-          <p:cNvSpPr/>
-          <p:nvPr/>
-        </p:nvSpPr>
-        <p:spPr>
-          <a:xfrm>
-            <a:off x="1505712" y="9118664"/>
-            <a:ext cx="1738503" cy="268224"/>
+            <a:off x="1310640" y="7894225"/>
+            <a:ext cx="2676144" cy="790289"/>
           </a:xfrm>
           <a:prstGeom prst="roundRect">
             <a:avLst>
-              <a:gd name="adj" fmla="val 50000"/>
+              <a:gd name="adj" fmla="val 13113"/>
             </a:avLst>
           </a:prstGeom>
           <a:solidFill>
-            <a:srgbClr val="FFF4DB"/>
+            <a:srgbClr val="FFFFFF"/>
           </a:solidFill>
           <a:ln w="12192">
             <a:solidFill>
-              <a:srgbClr val="FFF4DB"/>
+              <a:srgbClr val="D8E0EB"/>
             </a:solidFill>
             <a:prstDash val="solid"/>
           </a:ln>
@@ -2492,7 +2511,7 @@
       </p:sp>
       <p:pic>
         <p:nvPicPr>
-          <p:cNvPr id="63" name="svg" descr="svg">    </p:cNvPr>
+          <p:cNvPr id="64" name="p1p-hub-st l" descr="p1p-hub-st l">    </p:cNvPr>
           <p:cNvPicPr>
             <a:picLocks noChangeAspect="1"/>
           </p:cNvPicPr>
@@ -2506,17 +2525,42 @@
         </p:blipFill>
         <p:spPr>
           <a:xfrm>
-            <a:off x="1635760" y="9199944"/>
-            <a:ext cx="105664" cy="105664"/>
+            <a:off x="2639568" y="7619905"/>
+            <a:ext cx="18288" cy="268224"/>
           </a:xfrm>
           <a:prstGeom prst="rect">
             <a:avLst/>
           </a:prstGeom>
         </p:spPr>
       </p:pic>
+      <p:sp>
+        <p:nvSpPr>
+          <p:cNvPr id="65" name="p1p-hub-dt l"/>
+          <p:cNvSpPr/>
+          <p:nvPr/>
+        </p:nvSpPr>
+        <p:spPr>
+          <a:xfrm>
+            <a:off x="2609088" y="7714393"/>
+            <a:ext cx="79248" cy="79248"/>
+          </a:xfrm>
+          <a:prstGeom prst="ellipse">
+            <a:avLst/>
+          </a:prstGeom>
+          <a:solidFill>
+            <a:srgbClr val="00A94F"/>
+          </a:solidFill>
+          <a:ln w="18288">
+            <a:solidFill>
+              <a:srgbClr val="FFFFFF"/>
+            </a:solidFill>
+            <a:prstDash val="solid"/>
+          </a:ln>
+        </p:spPr>
+      </p:sp>
       <p:pic>
         <p:nvPicPr>
-          <p:cNvPr id="64" name="p1p-fact gold" descr="p1p-fact gold">    </p:cNvPr>
+          <p:cNvPr id="66" name="svg" descr="svg">    </p:cNvPr>
           <p:cNvPicPr>
             <a:picLocks noChangeAspect="1"/>
           </p:cNvPicPr>
@@ -2530,8 +2574,8 @@
         </p:blipFill>
         <p:spPr>
           <a:xfrm>
-            <a:off x="3309239" y="9112568"/>
-            <a:ext cx="1706880" cy="280416"/>
+            <a:off x="1438656" y="7992523"/>
+            <a:ext cx="170688" cy="170688"/>
           </a:xfrm>
           <a:prstGeom prst="rect">
             <a:avLst/>
@@ -2540,13 +2584,199 @@
       </p:pic>
       <p:sp>
         <p:nvSpPr>
-          <p:cNvPr id="65" name="key"/>
+          <p:cNvPr id="67" name="p1p-tech"/>
           <p:cNvSpPr/>
           <p:nvPr/>
         </p:nvSpPr>
         <p:spPr>
           <a:xfrm>
-            <a:off x="512064" y="9572625"/>
+            <a:off x="1438656" y="8232934"/>
+            <a:ext cx="438245" cy="182880"/>
+          </a:xfrm>
+          <a:prstGeom prst="roundRect">
+            <a:avLst>
+              <a:gd name="adj" fmla="val 50000"/>
+            </a:avLst>
+          </a:prstGeom>
+          <a:solidFill>
+            <a:srgbClr val="EEF4FC"/>
+          </a:solidFill>
+          <a:ln/>
+        </p:spPr>
+      </p:sp>
+      <p:sp>
+        <p:nvSpPr>
+          <p:cNvPr id="68" name="p1p-role"/>
+          <p:cNvSpPr/>
+          <p:nvPr/>
+        </p:nvSpPr>
+        <p:spPr>
+          <a:xfrm>
+            <a:off x="4096512" y="7894225"/>
+            <a:ext cx="2676144" cy="790289"/>
+          </a:xfrm>
+          <a:prstGeom prst="roundRect">
+            <a:avLst>
+              <a:gd name="adj" fmla="val 13113"/>
+            </a:avLst>
+          </a:prstGeom>
+          <a:solidFill>
+            <a:srgbClr val="FFFFFF"/>
+          </a:solidFill>
+          <a:ln w="12192">
+            <a:solidFill>
+              <a:srgbClr val="D8E0EB"/>
+            </a:solidFill>
+            <a:prstDash val="solid"/>
+          </a:ln>
+        </p:spPr>
+      </p:sp>
+      <p:pic>
+        <p:nvPicPr>
+          <p:cNvPr id="69" name="svg" descr="svg">    </p:cNvPr>
+          <p:cNvPicPr>
+            <a:picLocks noChangeAspect="1"/>
+          </p:cNvPicPr>
+          <p:nvPr/>
+        </p:nvPicPr>
+        <p:blipFill>
+          <a:blip r:embed="rId33"/>
+          <a:stretch>
+            <a:fillRect/>
+          </a:stretch>
+        </p:blipFill>
+        <p:spPr>
+          <a:xfrm>
+            <a:off x="4224528" y="7992523"/>
+            <a:ext cx="170688" cy="170688"/>
+          </a:xfrm>
+          <a:prstGeom prst="rect">
+            <a:avLst/>
+          </a:prstGeom>
+        </p:spPr>
+      </p:pic>
+      <p:sp>
+        <p:nvSpPr>
+          <p:cNvPr id="70" name="i"/>
+          <p:cNvSpPr/>
+          <p:nvPr/>
+        </p:nvSpPr>
+        <p:spPr>
+          <a:xfrm>
+            <a:off x="777240" y="8732234"/>
+            <a:ext cx="79248" cy="79248"/>
+          </a:xfrm>
+          <a:prstGeom prst="ellipse">
+            <a:avLst/>
+          </a:prstGeom>
+          <a:solidFill>
+            <a:srgbClr val="2F85E0"/>
+          </a:solidFill>
+          <a:ln w="18288">
+            <a:solidFill>
+              <a:srgbClr val="FFFFFF"/>
+            </a:solidFill>
+            <a:prstDash val="solid"/>
+          </a:ln>
+        </p:spPr>
+      </p:sp>
+      <p:pic>
+        <p:nvPicPr>
+          <p:cNvPr id="71" name="svg" descr="svg">    </p:cNvPr>
+          <p:cNvPicPr>
+            <a:picLocks noChangeAspect="1"/>
+          </p:cNvPicPr>
+          <p:nvPr/>
+        </p:nvPicPr>
+        <p:blipFill>
+          <a:blip r:embed="rId34"/>
+          <a:stretch>
+            <a:fillRect/>
+          </a:stretch>
+        </p:blipFill>
+        <p:spPr>
+          <a:xfrm>
+            <a:off x="512064" y="8851075"/>
+            <a:ext cx="609600" cy="609600"/>
+          </a:xfrm>
+          <a:prstGeom prst="rect">
+            <a:avLst/>
+          </a:prstGeom>
+        </p:spPr>
+      </p:pic>
+      <p:sp>
+        <p:nvSpPr>
+          <p:cNvPr id="72" name="s"/>
+          <p:cNvSpPr/>
+          <p:nvPr/>
+        </p:nvSpPr>
+        <p:spPr>
+          <a:xfrm>
+            <a:off x="1532858" y="9151811"/>
+            <a:ext cx="121920" cy="12192"/>
+          </a:xfrm>
+          <a:prstGeom prst="rect">
+            <a:avLst/>
+          </a:prstGeom>
+          <a:solidFill>
+            <a:srgbClr val="C3CEDD"/>
+          </a:solidFill>
+          <a:ln/>
+        </p:spPr>
+      </p:sp>
+      <p:sp>
+        <p:nvSpPr>
+          <p:cNvPr id="73" name="i"/>
+          <p:cNvSpPr/>
+          <p:nvPr/>
+        </p:nvSpPr>
+        <p:spPr>
+          <a:xfrm>
+            <a:off x="4149185" y="9115235"/>
+            <a:ext cx="85344" cy="85344"/>
+          </a:xfrm>
+          <a:prstGeom prst="ellipse">
+            <a:avLst/>
+          </a:prstGeom>
+          <a:solidFill>
+            <a:srgbClr val="FDBB30"/>
+          </a:solidFill>
+          <a:ln/>
+        </p:spPr>
+      </p:sp>
+      <p:pic>
+        <p:nvPicPr>
+          <p:cNvPr id="74" name="s" descr="s">    </p:cNvPr>
+          <p:cNvPicPr>
+            <a:picLocks noChangeAspect="1"/>
+          </p:cNvPicPr>
+          <p:nvPr/>
+        </p:nvPicPr>
+        <p:blipFill>
+          <a:blip r:embed="rId35"/>
+          <a:stretch>
+            <a:fillRect/>
+          </a:stretch>
+        </p:blipFill>
+        <p:spPr>
+          <a:xfrm>
+            <a:off x="4236561" y="9150795"/>
+            <a:ext cx="2688336" cy="18288"/>
+          </a:xfrm>
+          <a:prstGeom prst="rect">
+            <a:avLst/>
+          </a:prstGeom>
+        </p:spPr>
+      </p:pic>
+      <p:sp>
+        <p:nvSpPr>
+          <p:cNvPr id="75" name="key"/>
+          <p:cNvSpPr/>
+          <p:nvPr/>
+        </p:nvSpPr>
+        <p:spPr>
+          <a:xfrm>
+            <a:off x="512064" y="9621393"/>
             <a:ext cx="6534912" cy="570548"/>
           </a:xfrm>
           <a:prstGeom prst="roundRect">
@@ -2562,13 +2792,13 @@
       </p:sp>
       <p:sp>
         <p:nvSpPr>
-          <p:cNvPr id="66" name="i"/>
+          <p:cNvPr id="76" name="i"/>
           <p:cNvSpPr/>
           <p:nvPr/>
         </p:nvSpPr>
         <p:spPr>
           <a:xfrm>
-            <a:off x="755904" y="9827419"/>
+            <a:off x="755904" y="9876187"/>
             <a:ext cx="60960" cy="60960"/>
           </a:xfrm>
           <a:prstGeom prst="ellipse">
@@ -2582,13 +2812,13 @@
       </p:sp>
       <p:sp>
         <p:nvSpPr>
-          <p:cNvPr id="67" name="b"/>
+          <p:cNvPr id="77" name="b"/>
           <p:cNvSpPr/>
           <p:nvPr/>
         </p:nvSpPr>
         <p:spPr>
           <a:xfrm>
-            <a:off x="816864" y="9851803"/>
+            <a:off x="816864" y="9900571"/>
             <a:ext cx="85344" cy="12192"/>
           </a:xfrm>
           <a:prstGeom prst="rect">
@@ -2602,13 +2832,13 @@
       </p:sp>
       <p:sp>
         <p:nvSpPr>
-          <p:cNvPr id="68" name="i"/>
+          <p:cNvPr id="78" name="i"/>
           <p:cNvSpPr/>
           <p:nvPr/>
         </p:nvSpPr>
         <p:spPr>
           <a:xfrm>
-            <a:off x="902208" y="9827419"/>
+            <a:off x="902208" y="9876187"/>
             <a:ext cx="60960" cy="60960"/>
           </a:xfrm>
           <a:prstGeom prst="ellipse">
@@ -2622,13 +2852,13 @@
       </p:sp>
       <p:sp>
         <p:nvSpPr>
-          <p:cNvPr id="69" name="b"/>
+          <p:cNvPr id="79" name="b"/>
           <p:cNvSpPr/>
           <p:nvPr/>
         </p:nvSpPr>
         <p:spPr>
           <a:xfrm>
-            <a:off x="963168" y="9851803"/>
+            <a:off x="963168" y="9900571"/>
             <a:ext cx="85344" cy="12192"/>
           </a:xfrm>
           <a:prstGeom prst="rect">
@@ -2642,13 +2872,13 @@
       </p:sp>
       <p:sp>
         <p:nvSpPr>
-          <p:cNvPr id="70" name="i"/>
+          <p:cNvPr id="80" name="i"/>
           <p:cNvSpPr/>
           <p:nvPr/>
         </p:nvSpPr>
         <p:spPr>
           <a:xfrm>
-            <a:off x="1048512" y="9827419"/>
+            <a:off x="1048512" y="9876187"/>
             <a:ext cx="60960" cy="60960"/>
           </a:xfrm>
           <a:prstGeom prst="ellipse">
@@ -2662,7 +2892,7 @@
       </p:sp>
       <p:sp>
         <p:nvSpPr>
-          <p:cNvPr id="71" name="01"/>
+          <p:cNvPr id="81" name="01"/>
           <p:cNvSpPr txBox="1"/>
           <p:nvPr/>
         </p:nvSpPr>
@@ -2701,7 +2931,7 @@
       </p:sp>
       <p:sp>
         <p:nvSpPr>
-          <p:cNvPr id="72" name="PT 주제 1 · 가장 중요하게 생각하는 가치와 실천 경험"/>
+          <p:cNvPr id="82" name="PT 주제 1 · 가장 중요하게 생각하는 가치와 실천 경험"/>
           <p:cNvSpPr txBox="1"/>
           <p:nvPr/>
         </p:nvSpPr>
@@ -2740,7 +2970,7 @@
       </p:sp>
       <p:sp>
         <p:nvSpPr>
-          <p:cNvPr id="73" name="제가 가장 중요하게 생각하는 가치는"/>
+          <p:cNvPr id="83" name="제가 가장 중요하게 생각하는 가치는"/>
           <p:cNvSpPr txBox="1"/>
           <p:nvPr/>
         </p:nvSpPr>
@@ -2779,7 +3009,7 @@
       </p:sp>
       <p:sp>
         <p:nvSpPr>
-          <p:cNvPr id="74" name="공동의 목표를 공유하며"/>
+          <p:cNvPr id="84" name="공동의 목표를 공유하며"/>
           <p:cNvSpPr txBox="1"/>
           <p:nvPr/>
         </p:nvSpPr>
@@ -2832,7 +3062,7 @@
       </p:sp>
       <p:sp>
         <p:nvSpPr>
-          <p:cNvPr id="75" name="함께 성과를 만드는 협업입니다"/>
+          <p:cNvPr id="85" name="함께 성과를 만드는 협업입니다"/>
           <p:cNvSpPr txBox="1"/>
           <p:nvPr/>
         </p:nvSpPr>
@@ -2899,13 +3129,13 @@
       </p:sp>
       <p:sp>
         <p:nvSpPr>
-          <p:cNvPr id="76" name="PROJECT"/>
-          <p:cNvSpPr txBox="1"/>
-          <p:nvPr/>
-        </p:nvSpPr>
-        <p:spPr>
-          <a:xfrm>
-            <a:off x="731520" y="2267045"/>
+          <p:cNvPr id="86" name="PROJECT"/>
+          <p:cNvSpPr txBox="1"/>
+          <p:nvPr/>
+        </p:nvSpPr>
+        <p:spPr>
+          <a:xfrm>
+            <a:off x="731520" y="2254853"/>
             <a:ext cx="707327" cy="134112"/>
           </a:xfrm>
           <a:prstGeom prst="rect">
@@ -2938,13 +3168,13 @@
       </p:sp>
       <p:sp>
         <p:nvSpPr>
-          <p:cNvPr id="77" name="학생 BIM 경진대회"/>
-          <p:cNvSpPr txBox="1"/>
-          <p:nvPr/>
-        </p:nvSpPr>
-        <p:spPr>
-          <a:xfrm>
-            <a:off x="1591247" y="2267045"/>
+          <p:cNvPr id="87" name="학생 BIM 경진대회"/>
+          <p:cNvSpPr txBox="1"/>
+          <p:nvPr/>
+        </p:nvSpPr>
+        <p:spPr>
+          <a:xfrm>
+            <a:off x="1591247" y="2254853"/>
             <a:ext cx="890713" cy="134112"/>
           </a:xfrm>
           <a:prstGeom prst="rect">
@@ -2977,13 +3207,13 @@
       </p:sp>
       <p:sp>
         <p:nvSpPr>
-          <p:cNvPr id="78" name="4인 팀"/>
-          <p:cNvSpPr txBox="1"/>
-          <p:nvPr/>
-        </p:nvSpPr>
-        <p:spPr>
-          <a:xfrm>
-            <a:off x="2675382" y="2267045"/>
+          <p:cNvPr id="88" name="4인 팀"/>
+          <p:cNvSpPr txBox="1"/>
+          <p:nvPr/>
+        </p:nvSpPr>
+        <p:spPr>
+          <a:xfrm>
+            <a:off x="2675382" y="2254853"/>
             <a:ext cx="334804" cy="134112"/>
           </a:xfrm>
           <a:prstGeom prst="rect">
@@ -3016,13 +3246,13 @@
       </p:sp>
       <p:sp>
         <p:nvSpPr>
-          <p:cNvPr id="79" name="팀장"/>
-          <p:cNvSpPr txBox="1"/>
-          <p:nvPr/>
-        </p:nvSpPr>
-        <p:spPr>
-          <a:xfrm>
-            <a:off x="3205258" y="2267045"/>
+          <p:cNvPr id="89" name="팀장"/>
+          <p:cNvSpPr txBox="1"/>
+          <p:nvPr/>
+        </p:nvSpPr>
+        <p:spPr>
+          <a:xfrm>
+            <a:off x="3205258" y="2254853"/>
             <a:ext cx="239744" cy="134112"/>
           </a:xfrm>
           <a:prstGeom prst="rect">
@@ -3055,14 +3285,14 @@
       </p:sp>
       <p:sp>
         <p:nvSpPr>
-          <p:cNvPr id="80" name="‘유닛 모듈러 기반 사용자 맞춤형 리모델링 방법’"/>
-          <p:cNvSpPr txBox="1"/>
-          <p:nvPr/>
-        </p:nvSpPr>
-        <p:spPr>
-          <a:xfrm>
-            <a:off x="731520" y="2505075"/>
-            <a:ext cx="4080803" cy="256032"/>
+          <p:cNvPr id="90" name="‘유닛 모듈러 기반 사용자"/>
+          <p:cNvSpPr txBox="1"/>
+          <p:nvPr/>
+        </p:nvSpPr>
+        <p:spPr>
+          <a:xfrm>
+            <a:off x="731520" y="2492883"/>
+            <a:ext cx="2138136" cy="256032"/>
           </a:xfrm>
           <a:prstGeom prst="rect">
             <a:avLst/>
@@ -3086,7 +3316,7 @@
                 <a:ea typeface="Paperlogy 8 ExtraBold" pitchFamily="34" charset="-127"/>
                 <a:cs typeface="Paperlogy 8 ExtraBold" pitchFamily="34" charset="-120"/>
               </a:rPr>
-              <a:t>‘유닛 모듈러 기반 사용자 맞춤형 리모델링 방법’</a:t>
+              <a:t>‘유닛 모듈러 기반 사용자</a:t>
             </a:r>
             <a:endParaRPr lang="en-US" sz="1728" dirty="0"/>
           </a:p>
@@ -3094,14 +3324,53 @@
       </p:sp>
       <p:sp>
         <p:nvSpPr>
-          <p:cNvPr id="81" name="사용자가 원하는 리모델링 규모에 따라 유닛 모듈러를 배치하고,"/>
-          <p:cNvSpPr txBox="1"/>
-          <p:nvPr/>
-        </p:nvSpPr>
-        <p:spPr>
-          <a:xfrm>
-            <a:off x="731520" y="2828163"/>
-            <a:ext cx="3255616" cy="152400"/>
+          <p:cNvPr id="91" name="맞춤형 리모델링 방법’"/>
+          <p:cNvSpPr txBox="1"/>
+          <p:nvPr/>
+        </p:nvSpPr>
+        <p:spPr>
+          <a:xfrm>
+            <a:off x="731520" y="2767203"/>
+            <a:ext cx="1900868" cy="256032"/>
+          </a:xfrm>
+          <a:prstGeom prst="rect">
+            <a:avLst/>
+          </a:prstGeom>
+          <a:noFill/>
+          <a:ln/>
+        </p:spPr>
+        <p:txBody>
+          <a:bodyPr wrap="none" lIns="0" tIns="0" rIns="0" bIns="0" rtlCol="0" anchor="ctr"/>
+          <a:lstStyle/>
+          <a:p>
+            <a:pPr algn="l" indent="0" marL="0">
+              <a:buNone/>
+            </a:pPr>
+            <a:r>
+              <a:rPr lang="ko-KR" altLang="en-US" sz="1728" spc="-69" kern="0" dirty="0">
+                <a:solidFill>
+                  <a:srgbClr val="0B2147"/>
+                </a:solidFill>
+                <a:latin typeface="Paperlogy 8 ExtraBold" pitchFamily="34" charset="0"/>
+                <a:ea typeface="Paperlogy 8 ExtraBold" pitchFamily="34" charset="-127"/>
+                <a:cs typeface="Paperlogy 8 ExtraBold" pitchFamily="34" charset="-120"/>
+              </a:rPr>
+              <a:t>맞춤형 리모델링 방법’</a:t>
+            </a:r>
+            <a:endParaRPr lang="en-US" sz="1728" dirty="0"/>
+          </a:p>
+        </p:txBody>
+      </p:sp>
+      <p:sp>
+        <p:nvSpPr>
+          <p:cNvPr id="92" name="사용자가 원하는 리모델링 규모에 따라 유닛 모듈러를"/>
+          <p:cNvSpPr txBox="1"/>
+          <p:nvPr/>
+        </p:nvSpPr>
+        <p:spPr>
+          <a:xfrm>
+            <a:off x="3902202" y="2466594"/>
+            <a:ext cx="2730296" cy="152400"/>
           </a:xfrm>
           <a:prstGeom prst="rect">
             <a:avLst/>
@@ -3125,7 +3394,7 @@
                 <a:ea typeface="Paperlogy 5 Medium" pitchFamily="34" charset="-127"/>
                 <a:cs typeface="Paperlogy 5 Medium" pitchFamily="34" charset="-120"/>
               </a:rPr>
-              <a:t>사용자가 원하는 리모델링 규모에 따라 유닛 모듈러를 배치하고,</a:t>
+              <a:t>사용자가 원하는 리모델링 규모에 따라 유닛 모듈러를</a:t>
             </a:r>
             <a:endParaRPr lang="en-US" sz="1008" dirty="0"/>
           </a:p>
@@ -3133,14 +3402,14 @@
       </p:sp>
       <p:sp>
         <p:nvSpPr>
-          <p:cNvPr id="82" name="필요한 모듈 수와 자재 물량을 자동으로 산출하는 BIM 기반 리모델링 방"/>
-          <p:cNvSpPr txBox="1"/>
-          <p:nvPr/>
-        </p:nvSpPr>
-        <p:spPr>
-          <a:xfrm>
-            <a:off x="731520" y="3020187"/>
-            <a:ext cx="4065659" cy="152400"/>
+          <p:cNvPr id="93" name="배치하고, 필요한 모듈 수와 자재 물량을 자동으로 산출하는"/>
+          <p:cNvSpPr txBox="1"/>
+          <p:nvPr/>
+        </p:nvSpPr>
+        <p:spPr>
+          <a:xfrm>
+            <a:off x="3902202" y="2652141"/>
+            <a:ext cx="3022185" cy="152400"/>
           </a:xfrm>
           <a:prstGeom prst="rect">
             <a:avLst/>
@@ -3164,7 +3433,7 @@
                 <a:ea typeface="Paperlogy 5 Medium" pitchFamily="34" charset="-127"/>
                 <a:cs typeface="Paperlogy 5 Medium" pitchFamily="34" charset="-120"/>
               </a:rPr>
-              <a:t>필요한 모듈 수와 자재 물량을 자동으로 산출하는 BIM 기반 리모델링 방법 제안</a:t>
+              <a:t>배치하고, 필요한 모듈 수와 자재 물량을 자동으로 산출하는</a:t>
             </a:r>
             <a:endParaRPr lang="en-US" sz="1008" dirty="0"/>
           </a:p>
@@ -3172,13 +3441,325 @@
       </p:sp>
       <p:sp>
         <p:nvSpPr>
-          <p:cNvPr id="83" name="결과물"/>
-          <p:cNvSpPr txBox="1"/>
-          <p:nvPr/>
-        </p:nvSpPr>
-        <p:spPr>
-          <a:xfrm>
-            <a:off x="5462016" y="2332482"/>
+          <p:cNvPr id="94" name="BIM 기반 리모델링 방법 제안"/>
+          <p:cNvSpPr txBox="1"/>
+          <p:nvPr/>
+        </p:nvSpPr>
+        <p:spPr>
+          <a:xfrm>
+            <a:off x="3902202" y="2837688"/>
+            <a:ext cx="1541736" cy="152400"/>
+          </a:xfrm>
+          <a:prstGeom prst="rect">
+            <a:avLst/>
+          </a:prstGeom>
+          <a:noFill/>
+          <a:ln/>
+        </p:spPr>
+        <p:txBody>
+          <a:bodyPr wrap="none" lIns="0" tIns="0" rIns="0" bIns="0" rtlCol="0" anchor="ctr"/>
+          <a:lstStyle/>
+          <a:p>
+            <a:pPr algn="l" indent="0" marL="0">
+              <a:buNone/>
+            </a:pPr>
+            <a:r>
+              <a:rPr lang="ko-KR" altLang="en-US" sz="1008" spc="-20" kern="0" dirty="0">
+                <a:solidFill>
+                  <a:srgbClr val="4B5568"/>
+                </a:solidFill>
+                <a:latin typeface="Paperlogy 5 Medium" pitchFamily="34" charset="0"/>
+                <a:ea typeface="Paperlogy 5 Medium" pitchFamily="34" charset="-127"/>
+                <a:cs typeface="Paperlogy 5 Medium" pitchFamily="34" charset="-120"/>
+              </a:rPr>
+              <a:t>BIM 기반 리모델링 방법 제안</a:t>
+            </a:r>
+            <a:endParaRPr lang="en-US" sz="1008" dirty="0"/>
+          </a:p>
+        </p:txBody>
+      </p:sp>
+      <p:sp>
+        <p:nvSpPr>
+          <p:cNvPr id="95" name="리모델링"/>
+          <p:cNvSpPr txBox="1"/>
+          <p:nvPr/>
+        </p:nvSpPr>
+        <p:spPr>
+          <a:xfrm>
+            <a:off x="983837" y="4151567"/>
+            <a:ext cx="421862" cy="134112"/>
+          </a:xfrm>
+          <a:prstGeom prst="rect">
+            <a:avLst/>
+          </a:prstGeom>
+          <a:noFill/>
+          <a:ln/>
+        </p:spPr>
+        <p:txBody>
+          <a:bodyPr wrap="none" lIns="0" tIns="0" rIns="0" bIns="0" rtlCol="0" anchor="ctr"/>
+          <a:lstStyle/>
+          <a:p>
+            <a:pPr algn="ctr" indent="0" marL="0">
+              <a:buNone/>
+            </a:pPr>
+            <a:r>
+              <a:rPr lang="ko-KR" altLang="en-US" sz="864" spc="-26" kern="0" dirty="0">
+                <a:solidFill>
+                  <a:srgbClr val="0B2147"/>
+                </a:solidFill>
+                <a:latin typeface="Paperlogy 7 Bold" pitchFamily="34" charset="0"/>
+                <a:ea typeface="Paperlogy 7 Bold" pitchFamily="34" charset="-127"/>
+                <a:cs typeface="Paperlogy 7 Bold" pitchFamily="34" charset="-120"/>
+              </a:rPr>
+              <a:t>리모델링</a:t>
+            </a:r>
+            <a:endParaRPr lang="en-US" sz="864" dirty="0"/>
+          </a:p>
+        </p:txBody>
+      </p:sp>
+      <p:sp>
+        <p:nvSpPr>
+          <p:cNvPr id="96" name="규모 입력"/>
+          <p:cNvSpPr txBox="1"/>
+          <p:nvPr/>
+        </p:nvSpPr>
+        <p:spPr>
+          <a:xfrm>
+            <a:off x="973455" y="4285393"/>
+            <a:ext cx="442722" cy="134112"/>
+          </a:xfrm>
+          <a:prstGeom prst="rect">
+            <a:avLst/>
+          </a:prstGeom>
+          <a:noFill/>
+          <a:ln/>
+        </p:spPr>
+        <p:txBody>
+          <a:bodyPr wrap="none" lIns="0" tIns="0" rIns="0" bIns="0" rtlCol="0" anchor="ctr"/>
+          <a:lstStyle/>
+          <a:p>
+            <a:pPr algn="ctr" indent="0" marL="0">
+              <a:buNone/>
+            </a:pPr>
+            <a:r>
+              <a:rPr lang="ko-KR" altLang="en-US" sz="864" spc="-26" kern="0" dirty="0">
+                <a:solidFill>
+                  <a:srgbClr val="0B2147"/>
+                </a:solidFill>
+                <a:latin typeface="Paperlogy 7 Bold" pitchFamily="34" charset="0"/>
+                <a:ea typeface="Paperlogy 7 Bold" pitchFamily="34" charset="-127"/>
+                <a:cs typeface="Paperlogy 7 Bold" pitchFamily="34" charset="-120"/>
+              </a:rPr>
+              <a:t>규모 입력</a:t>
+            </a:r>
+            <a:endParaRPr lang="en-US" sz="864" dirty="0"/>
+          </a:p>
+        </p:txBody>
+      </p:sp>
+      <p:sp>
+        <p:nvSpPr>
+          <p:cNvPr id="97" name="유닛 모듈러"/>
+          <p:cNvSpPr txBox="1"/>
+          <p:nvPr/>
+        </p:nvSpPr>
+        <p:spPr>
+          <a:xfrm>
+            <a:off x="1743647" y="4151567"/>
+            <a:ext cx="535972" cy="134112"/>
+          </a:xfrm>
+          <a:prstGeom prst="rect">
+            <a:avLst/>
+          </a:prstGeom>
+          <a:noFill/>
+          <a:ln/>
+        </p:spPr>
+        <p:txBody>
+          <a:bodyPr wrap="none" lIns="0" tIns="0" rIns="0" bIns="0" rtlCol="0" anchor="ctr"/>
+          <a:lstStyle/>
+          <a:p>
+            <a:pPr algn="ctr" indent="0" marL="0">
+              <a:buNone/>
+            </a:pPr>
+            <a:r>
+              <a:rPr lang="ko-KR" altLang="en-US" sz="864" spc="-26" kern="0" dirty="0">
+                <a:solidFill>
+                  <a:srgbClr val="0B2147"/>
+                </a:solidFill>
+                <a:latin typeface="Paperlogy 7 Bold" pitchFamily="34" charset="0"/>
+                <a:ea typeface="Paperlogy 7 Bold" pitchFamily="34" charset="-127"/>
+                <a:cs typeface="Paperlogy 7 Bold" pitchFamily="34" charset="-120"/>
+              </a:rPr>
+              <a:t>유닛 모듈러</a:t>
+            </a:r>
+            <a:endParaRPr lang="en-US" sz="864" dirty="0"/>
+          </a:p>
+        </p:txBody>
+      </p:sp>
+      <p:sp>
+        <p:nvSpPr>
+          <p:cNvPr id="98" name="배치"/>
+          <p:cNvSpPr txBox="1"/>
+          <p:nvPr/>
+        </p:nvSpPr>
+        <p:spPr>
+          <a:xfrm>
+            <a:off x="1893951" y="4285393"/>
+            <a:ext cx="235363" cy="134112"/>
+          </a:xfrm>
+          <a:prstGeom prst="rect">
+            <a:avLst/>
+          </a:prstGeom>
+          <a:noFill/>
+          <a:ln/>
+        </p:spPr>
+        <p:txBody>
+          <a:bodyPr wrap="none" lIns="0" tIns="0" rIns="0" bIns="0" rtlCol="0" anchor="ctr"/>
+          <a:lstStyle/>
+          <a:p>
+            <a:pPr algn="ctr" indent="0" marL="0">
+              <a:buNone/>
+            </a:pPr>
+            <a:r>
+              <a:rPr lang="ko-KR" altLang="en-US" sz="864" spc="-26" kern="0" dirty="0">
+                <a:solidFill>
+                  <a:srgbClr val="0B2147"/>
+                </a:solidFill>
+                <a:latin typeface="Paperlogy 7 Bold" pitchFamily="34" charset="0"/>
+                <a:ea typeface="Paperlogy 7 Bold" pitchFamily="34" charset="-127"/>
+                <a:cs typeface="Paperlogy 7 Bold" pitchFamily="34" charset="-120"/>
+              </a:rPr>
+              <a:t>배치</a:t>
+            </a:r>
+            <a:endParaRPr lang="en-US" sz="864" dirty="0"/>
+          </a:p>
+        </p:txBody>
+      </p:sp>
+      <p:sp>
+        <p:nvSpPr>
+          <p:cNvPr id="99" name="모듈 수 ·"/>
+          <p:cNvSpPr txBox="1"/>
+          <p:nvPr/>
+        </p:nvSpPr>
+        <p:spPr>
+          <a:xfrm>
+            <a:off x="2627376" y="4017740"/>
+            <a:ext cx="402336" cy="134112"/>
+          </a:xfrm>
+          <a:prstGeom prst="rect">
+            <a:avLst/>
+          </a:prstGeom>
+          <a:noFill/>
+          <a:ln/>
+        </p:spPr>
+        <p:txBody>
+          <a:bodyPr wrap="none" lIns="0" tIns="0" rIns="0" bIns="0" rtlCol="0" anchor="ctr"/>
+          <a:lstStyle/>
+          <a:p>
+            <a:pPr algn="ctr" indent="0" marL="0">
+              <a:buNone/>
+            </a:pPr>
+            <a:r>
+              <a:rPr lang="ko-KR" altLang="en-US" sz="864" spc="-26" kern="0" dirty="0">
+                <a:solidFill>
+                  <a:srgbClr val="0B2147"/>
+                </a:solidFill>
+                <a:latin typeface="Paperlogy 7 Bold" pitchFamily="34" charset="0"/>
+                <a:ea typeface="Paperlogy 7 Bold" pitchFamily="34" charset="-127"/>
+                <a:cs typeface="Paperlogy 7 Bold" pitchFamily="34" charset="-120"/>
+              </a:rPr>
+              <a:t>모듈 수 ·</a:t>
+            </a:r>
+            <a:endParaRPr lang="en-US" sz="864" dirty="0"/>
+          </a:p>
+        </p:txBody>
+      </p:sp>
+      <p:sp>
+        <p:nvSpPr>
+          <p:cNvPr id="100" name="자재 물량"/>
+          <p:cNvSpPr txBox="1"/>
+          <p:nvPr/>
+        </p:nvSpPr>
+        <p:spPr>
+          <a:xfrm>
+            <a:off x="2607183" y="4151567"/>
+            <a:ext cx="442722" cy="134112"/>
+          </a:xfrm>
+          <a:prstGeom prst="rect">
+            <a:avLst/>
+          </a:prstGeom>
+          <a:noFill/>
+          <a:ln/>
+        </p:spPr>
+        <p:txBody>
+          <a:bodyPr wrap="none" lIns="0" tIns="0" rIns="0" bIns="0" rtlCol="0" anchor="ctr"/>
+          <a:lstStyle/>
+          <a:p>
+            <a:pPr algn="ctr" indent="0" marL="0">
+              <a:buNone/>
+            </a:pPr>
+            <a:r>
+              <a:rPr lang="ko-KR" altLang="en-US" sz="864" spc="-26" kern="0" dirty="0">
+                <a:solidFill>
+                  <a:srgbClr val="0B2147"/>
+                </a:solidFill>
+                <a:latin typeface="Paperlogy 7 Bold" pitchFamily="34" charset="0"/>
+                <a:ea typeface="Paperlogy 7 Bold" pitchFamily="34" charset="-127"/>
+                <a:cs typeface="Paperlogy 7 Bold" pitchFamily="34" charset="-120"/>
+              </a:rPr>
+              <a:t>자재 물량</a:t>
+            </a:r>
+            <a:endParaRPr lang="en-US" sz="864" dirty="0"/>
+          </a:p>
+        </p:txBody>
+      </p:sp>
+      <p:sp>
+        <p:nvSpPr>
+          <p:cNvPr id="101" name="자동 산출"/>
+          <p:cNvSpPr txBox="1"/>
+          <p:nvPr/>
+        </p:nvSpPr>
+        <p:spPr>
+          <a:xfrm>
+            <a:off x="2607183" y="4285393"/>
+            <a:ext cx="442722" cy="134112"/>
+          </a:xfrm>
+          <a:prstGeom prst="rect">
+            <a:avLst/>
+          </a:prstGeom>
+          <a:noFill/>
+          <a:ln/>
+        </p:spPr>
+        <p:txBody>
+          <a:bodyPr wrap="none" lIns="0" tIns="0" rIns="0" bIns="0" rtlCol="0" anchor="ctr"/>
+          <a:lstStyle/>
+          <a:p>
+            <a:pPr algn="ctr" indent="0" marL="0">
+              <a:buNone/>
+            </a:pPr>
+            <a:r>
+              <a:rPr lang="ko-KR" altLang="en-US" sz="864" spc="-26" kern="0" dirty="0">
+                <a:solidFill>
+                  <a:srgbClr val="0B2147"/>
+                </a:solidFill>
+                <a:latin typeface="Paperlogy 7 Bold" pitchFamily="34" charset="0"/>
+                <a:ea typeface="Paperlogy 7 Bold" pitchFamily="34" charset="-127"/>
+                <a:cs typeface="Paperlogy 7 Bold" pitchFamily="34" charset="-120"/>
+              </a:rPr>
+              <a:t>자동 산출</a:t>
+            </a:r>
+            <a:endParaRPr lang="en-US" sz="864" dirty="0"/>
+          </a:p>
+        </p:txBody>
+      </p:sp>
+      <p:sp>
+        <p:nvSpPr>
+          <p:cNvPr id="102" name="결과물"/>
+          <p:cNvSpPr txBox="1"/>
+          <p:nvPr/>
+        </p:nvSpPr>
+        <p:spPr>
+          <a:xfrm>
+            <a:off x="3401568" y="3529203"/>
             <a:ext cx="382905" cy="152400"/>
           </a:xfrm>
           <a:prstGeom prst="rect">
@@ -3197,7 +3778,7 @@
             <a:r>
               <a:rPr lang="ko-KR" altLang="en-US" sz="1008" spc="-10" kern="0" dirty="0">
                 <a:solidFill>
-                  <a:srgbClr val="8A5A00"/>
+                  <a:srgbClr val="004B8D"/>
                 </a:solidFill>
                 <a:latin typeface="Paperlogy 8 ExtraBold" pitchFamily="34" charset="0"/>
                 <a:ea typeface="Paperlogy 8 ExtraBold" pitchFamily="34" charset="-127"/>
@@ -3211,38 +3792,38 @@
       </p:sp>
       <p:sp>
         <p:nvSpPr>
-          <p:cNvPr id="84" name="유닛 모듈러 기반 사용자"/>
-          <p:cNvSpPr txBox="1"/>
-          <p:nvPr/>
-        </p:nvSpPr>
-        <p:spPr>
-          <a:xfrm>
-            <a:off x="5242560" y="2566797"/>
-            <a:ext cx="1239648" cy="152400"/>
-          </a:xfrm>
-          <a:prstGeom prst="rect">
-            <a:avLst/>
-          </a:prstGeom>
-          <a:noFill/>
-          <a:ln/>
-        </p:spPr>
-        <p:txBody>
-          <a:bodyPr wrap="none" lIns="0" tIns="0" rIns="0" bIns="0" rtlCol="0" anchor="ctr"/>
-          <a:lstStyle/>
-          <a:p>
-            <a:pPr algn="l" indent="0" marL="0">
-              <a:buNone/>
-            </a:pPr>
-            <a:r>
-              <a:rPr lang="ko-KR" altLang="en-US" sz="1008" spc="-25" kern="0" dirty="0">
-                <a:solidFill>
-                  <a:srgbClr val="8A5A00"/>
+          <p:cNvPr id="103" name="유닛 모듈러 기반"/>
+          <p:cNvSpPr txBox="1"/>
+          <p:nvPr/>
+        </p:nvSpPr>
+        <p:spPr>
+          <a:xfrm>
+            <a:off x="3401568" y="3751326"/>
+            <a:ext cx="859155" cy="152400"/>
+          </a:xfrm>
+          <a:prstGeom prst="rect">
+            <a:avLst/>
+          </a:prstGeom>
+          <a:noFill/>
+          <a:ln/>
+        </p:spPr>
+        <p:txBody>
+          <a:bodyPr wrap="none" lIns="0" tIns="0" rIns="0" bIns="0" rtlCol="0" anchor="ctr"/>
+          <a:lstStyle/>
+          <a:p>
+            <a:pPr algn="l" indent="0" marL="0">
+              <a:buNone/>
+            </a:pPr>
+            <a:r>
+              <a:rPr lang="ko-KR" altLang="en-US" sz="1008" spc="-30" kern="0" dirty="0">
+                <a:solidFill>
+                  <a:srgbClr val="1C2536"/>
                 </a:solidFill>
                 <a:latin typeface="Paperlogy 6 SemiBold" pitchFamily="34" charset="0"/>
                 <a:ea typeface="Paperlogy 6 SemiBold" pitchFamily="34" charset="-127"/>
                 <a:cs typeface="Paperlogy 6 SemiBold" pitchFamily="34" charset="-120"/>
               </a:rPr>
-              <a:t>유닛 모듈러 기반 사용자</a:t>
+              <a:t>유닛 모듈러 기반</a:t>
             </a:r>
             <a:endParaRPr lang="en-US" sz="1008" dirty="0"/>
           </a:p>
@@ -3250,38 +3831,38 @@
       </p:sp>
       <p:sp>
         <p:nvSpPr>
-          <p:cNvPr id="85" name="맞춤형 리모델링 앱 개발"/>
-          <p:cNvSpPr txBox="1"/>
-          <p:nvPr/>
-        </p:nvSpPr>
-        <p:spPr>
-          <a:xfrm>
-            <a:off x="5242560" y="2745962"/>
-            <a:ext cx="1239648" cy="152400"/>
-          </a:xfrm>
-          <a:prstGeom prst="rect">
-            <a:avLst/>
-          </a:prstGeom>
-          <a:noFill/>
-          <a:ln/>
-        </p:spPr>
-        <p:txBody>
-          <a:bodyPr wrap="none" lIns="0" tIns="0" rIns="0" bIns="0" rtlCol="0" anchor="ctr"/>
-          <a:lstStyle/>
-          <a:p>
-            <a:pPr algn="l" indent="0" marL="0">
-              <a:buNone/>
-            </a:pPr>
-            <a:r>
-              <a:rPr lang="ko-KR" altLang="en-US" sz="1008" spc="-25" kern="0" dirty="0">
-                <a:solidFill>
-                  <a:srgbClr val="8A5A00"/>
+          <p:cNvPr id="104" name="사용자 맞춤형"/>
+          <p:cNvSpPr txBox="1"/>
+          <p:nvPr/>
+        </p:nvSpPr>
+        <p:spPr>
+          <a:xfrm>
+            <a:off x="3401568" y="3930491"/>
+            <a:ext cx="725996" cy="152400"/>
+          </a:xfrm>
+          <a:prstGeom prst="rect">
+            <a:avLst/>
+          </a:prstGeom>
+          <a:noFill/>
+          <a:ln/>
+        </p:spPr>
+        <p:txBody>
+          <a:bodyPr wrap="none" lIns="0" tIns="0" rIns="0" bIns="0" rtlCol="0" anchor="ctr"/>
+          <a:lstStyle/>
+          <a:p>
+            <a:pPr algn="l" indent="0" marL="0">
+              <a:buNone/>
+            </a:pPr>
+            <a:r>
+              <a:rPr lang="ko-KR" altLang="en-US" sz="1008" spc="-30" kern="0" dirty="0">
+                <a:solidFill>
+                  <a:srgbClr val="1C2536"/>
                 </a:solidFill>
                 <a:latin typeface="Paperlogy 6 SemiBold" pitchFamily="34" charset="0"/>
                 <a:ea typeface="Paperlogy 6 SemiBold" pitchFamily="34" charset="-127"/>
                 <a:cs typeface="Paperlogy 6 SemiBold" pitchFamily="34" charset="-120"/>
               </a:rPr>
-              <a:t>맞춤형 리모델링 앱 개발</a:t>
+              <a:t>사용자 맞춤형</a:t>
             </a:r>
             <a:endParaRPr lang="en-US" sz="1008" dirty="0"/>
           </a:p>
@@ -3289,37 +3870,76 @@
       </p:sp>
       <p:sp>
         <p:nvSpPr>
-          <p:cNvPr id="86" name="아이디어 시연 영상"/>
-          <p:cNvSpPr txBox="1"/>
-          <p:nvPr/>
-        </p:nvSpPr>
-        <p:spPr>
-          <a:xfrm>
-            <a:off x="5242560" y="2925128"/>
-            <a:ext cx="981178" cy="152400"/>
-          </a:xfrm>
-          <a:prstGeom prst="rect">
-            <a:avLst/>
-          </a:prstGeom>
-          <a:noFill/>
-          <a:ln/>
-        </p:spPr>
-        <p:txBody>
-          <a:bodyPr wrap="none" lIns="0" tIns="0" rIns="0" bIns="0" rtlCol="0" anchor="ctr"/>
-          <a:lstStyle/>
-          <a:p>
-            <a:pPr algn="l" indent="0" marL="0">
-              <a:buNone/>
-            </a:pPr>
-            <a:r>
-              <a:rPr lang="ko-KR" altLang="en-US" sz="1008" spc="-25" kern="0" dirty="0">
-                <a:solidFill>
-                  <a:srgbClr val="8A5A00"/>
+          <p:cNvPr id="105" name="리모델링 앱 개발"/>
+          <p:cNvSpPr txBox="1"/>
+          <p:nvPr/>
+        </p:nvSpPr>
+        <p:spPr>
+          <a:xfrm>
+            <a:off x="3401568" y="4109657"/>
+            <a:ext cx="859155" cy="152400"/>
+          </a:xfrm>
+          <a:prstGeom prst="rect">
+            <a:avLst/>
+          </a:prstGeom>
+          <a:noFill/>
+          <a:ln/>
+        </p:spPr>
+        <p:txBody>
+          <a:bodyPr wrap="none" lIns="0" tIns="0" rIns="0" bIns="0" rtlCol="0" anchor="ctr"/>
+          <a:lstStyle/>
+          <a:p>
+            <a:pPr algn="l" indent="0" marL="0">
+              <a:buNone/>
+            </a:pPr>
+            <a:r>
+              <a:rPr lang="ko-KR" altLang="en-US" sz="1008" spc="-30" kern="0" dirty="0">
+                <a:solidFill>
+                  <a:srgbClr val="1C2536"/>
                 </a:solidFill>
                 <a:latin typeface="Paperlogy 6 SemiBold" pitchFamily="34" charset="0"/>
                 <a:ea typeface="Paperlogy 6 SemiBold" pitchFamily="34" charset="-127"/>
                 <a:cs typeface="Paperlogy 6 SemiBold" pitchFamily="34" charset="-120"/>
               </a:rPr>
+              <a:t>리모델링 앱 개발</a:t>
+            </a:r>
+            <a:endParaRPr lang="en-US" sz="1008" dirty="0"/>
+          </a:p>
+        </p:txBody>
+      </p:sp>
+      <p:sp>
+        <p:nvSpPr>
+          <p:cNvPr id="106" name="아이디어 시연 영상"/>
+          <p:cNvSpPr txBox="1"/>
+          <p:nvPr/>
+        </p:nvSpPr>
+        <p:spPr>
+          <a:xfrm>
+            <a:off x="3401568" y="4288822"/>
+            <a:ext cx="974312" cy="152400"/>
+          </a:xfrm>
+          <a:prstGeom prst="rect">
+            <a:avLst/>
+          </a:prstGeom>
+          <a:noFill/>
+          <a:ln/>
+        </p:spPr>
+        <p:txBody>
+          <a:bodyPr wrap="none" lIns="0" tIns="0" rIns="0" bIns="0" rtlCol="0" anchor="ctr"/>
+          <a:lstStyle/>
+          <a:p>
+            <a:pPr algn="l" indent="0" marL="0">
+              <a:buNone/>
+            </a:pPr>
+            <a:r>
+              <a:rPr lang="ko-KR" altLang="en-US" sz="1008" spc="-30" kern="0" dirty="0">
+                <a:solidFill>
+                  <a:srgbClr val="1C2536"/>
+                </a:solidFill>
+                <a:latin typeface="Paperlogy 6 SemiBold" pitchFamily="34" charset="0"/>
+                <a:ea typeface="Paperlogy 6 SemiBold" pitchFamily="34" charset="-127"/>
+                <a:cs typeface="Paperlogy 6 SemiBold" pitchFamily="34" charset="-120"/>
+              </a:rPr>
               <a:t>아이디어 시연 영상</a:t>
             </a:r>
             <a:endParaRPr lang="en-US" sz="1008" dirty="0"/>
@@ -3328,69 +3948,186 @@
       </p:sp>
       <p:sp>
         <p:nvSpPr>
-          <p:cNvPr id="87" name="리모델링"/>
-          <p:cNvSpPr txBox="1"/>
-          <p:nvPr/>
-        </p:nvSpPr>
-        <p:spPr>
-          <a:xfrm>
-            <a:off x="1121664" y="3407283"/>
-            <a:ext cx="484061" cy="152400"/>
-          </a:xfrm>
-          <a:prstGeom prst="rect">
-            <a:avLst/>
-          </a:prstGeom>
-          <a:noFill/>
-          <a:ln/>
-        </p:spPr>
-        <p:txBody>
-          <a:bodyPr wrap="none" lIns="0" tIns="0" rIns="0" bIns="0" rtlCol="0" anchor="ctr"/>
-          <a:lstStyle/>
-          <a:p>
-            <a:pPr algn="l" indent="0" marL="0">
-              <a:buNone/>
-            </a:pPr>
-            <a:r>
-              <a:rPr lang="ko-KR" altLang="en-US" sz="1008" spc="-30" kern="0" dirty="0">
+          <p:cNvPr id="107" name="장려상"/>
+          <p:cNvSpPr txBox="1"/>
+          <p:nvPr/>
+        </p:nvSpPr>
+        <p:spPr>
+          <a:xfrm>
+            <a:off x="5818965" y="3620357"/>
+            <a:ext cx="724757" cy="316992"/>
+          </a:xfrm>
+          <a:prstGeom prst="rect">
+            <a:avLst/>
+          </a:prstGeom>
+          <a:noFill/>
+          <a:ln/>
+        </p:spPr>
+        <p:txBody>
+          <a:bodyPr wrap="none" lIns="0" tIns="0" rIns="0" bIns="0" rtlCol="0" anchor="ctr"/>
+          <a:lstStyle/>
+          <a:p>
+            <a:pPr algn="l" indent="0" marL="0">
+              <a:buNone/>
+            </a:pPr>
+            <a:r>
+              <a:rPr lang="ko-KR" altLang="en-US" sz="2112" spc="-84" kern="0" dirty="0">
                 <a:solidFill>
                   <a:srgbClr val="0B2147"/>
+                </a:solidFill>
+                <a:latin typeface="Paperlogy 8 ExtraBold" pitchFamily="34" charset="0"/>
+                <a:ea typeface="Paperlogy 8 ExtraBold" pitchFamily="34" charset="-127"/>
+                <a:cs typeface="Paperlogy 8 ExtraBold" pitchFamily="34" charset="-120"/>
+              </a:rPr>
+              <a:t>장려상</a:t>
+            </a:r>
+            <a:endParaRPr lang="en-US" sz="2112" dirty="0"/>
+          </a:p>
+        </p:txBody>
+      </p:sp>
+      <p:sp>
+        <p:nvSpPr>
+          <p:cNvPr id="108" name="학생 BIM 경진대회"/>
+          <p:cNvSpPr txBox="1"/>
+          <p:nvPr/>
+        </p:nvSpPr>
+        <p:spPr>
+          <a:xfrm>
+            <a:off x="5672900" y="4539806"/>
+            <a:ext cx="1026208" cy="152400"/>
+          </a:xfrm>
+          <a:prstGeom prst="rect">
+            <a:avLst/>
+          </a:prstGeom>
+          <a:noFill/>
+          <a:ln/>
+        </p:spPr>
+        <p:txBody>
+          <a:bodyPr wrap="none" lIns="0" tIns="0" rIns="0" bIns="0" rtlCol="0" anchor="ctr"/>
+          <a:lstStyle/>
+          <a:p>
+            <a:pPr algn="l" indent="0" marL="0">
+              <a:buNone/>
+            </a:pPr>
+            <a:r>
+              <a:rPr lang="ko-KR" altLang="en-US" sz="1008" spc="-20" kern="0" dirty="0">
+                <a:solidFill>
+                  <a:srgbClr val="8A5A00"/>
+                </a:solidFill>
+                <a:latin typeface="Paperlogy 8 ExtraBold" pitchFamily="34" charset="0"/>
+                <a:ea typeface="Paperlogy 8 ExtraBold" pitchFamily="34" charset="-127"/>
+                <a:cs typeface="Paperlogy 8 ExtraBold" pitchFamily="34" charset="-120"/>
+              </a:rPr>
+              <a:t>학생 BIM 경진대회</a:t>
+            </a:r>
+            <a:endParaRPr lang="en-US" sz="1008" dirty="0"/>
+          </a:p>
+        </p:txBody>
+      </p:sp>
+      <p:sp>
+        <p:nvSpPr>
+          <p:cNvPr id="109" name="01"/>
+          <p:cNvSpPr txBox="1"/>
+          <p:nvPr/>
+        </p:nvSpPr>
+        <p:spPr>
+          <a:xfrm>
+            <a:off x="1304544" y="5077301"/>
+            <a:ext cx="203930" cy="134112"/>
+          </a:xfrm>
+          <a:prstGeom prst="rect">
+            <a:avLst/>
+          </a:prstGeom>
+          <a:noFill/>
+          <a:ln/>
+        </p:spPr>
+        <p:txBody>
+          <a:bodyPr wrap="none" lIns="0" tIns="0" rIns="0" bIns="0" rtlCol="0" anchor="ctr"/>
+          <a:lstStyle/>
+          <a:p>
+            <a:pPr algn="l" indent="0" marL="0">
+              <a:buNone/>
+            </a:pPr>
+            <a:r>
+              <a:rPr lang="ko-KR" altLang="en-US" sz="864" spc="35" kern="0" dirty="0">
+                <a:solidFill>
+                  <a:srgbClr val="004B8D"/>
+                </a:solidFill>
+                <a:latin typeface="Paperlogy 8 ExtraBold" pitchFamily="34" charset="0"/>
+                <a:ea typeface="Paperlogy 8 ExtraBold" pitchFamily="34" charset="-127"/>
+                <a:cs typeface="Paperlogy 8 ExtraBold" pitchFamily="34" charset="-120"/>
+              </a:rPr>
+              <a:t>01</a:t>
+            </a:r>
+            <a:endParaRPr lang="en-US" sz="864" dirty="0"/>
+          </a:p>
+        </p:txBody>
+      </p:sp>
+      <p:sp>
+        <p:nvSpPr>
+          <p:cNvPr id="110" name="CONFLICT"/>
+          <p:cNvSpPr txBox="1"/>
+          <p:nvPr/>
+        </p:nvSpPr>
+        <p:spPr>
+          <a:xfrm>
+            <a:off x="1727930" y="5077301"/>
+            <a:ext cx="771906" cy="134112"/>
+          </a:xfrm>
+          <a:prstGeom prst="rect">
+            <a:avLst/>
+          </a:prstGeom>
+          <a:noFill/>
+          <a:ln/>
+        </p:spPr>
+        <p:txBody>
+          <a:bodyPr wrap="none" lIns="0" tIns="0" rIns="0" bIns="0" rtlCol="0" anchor="ctr"/>
+          <a:lstStyle/>
+          <a:p>
+            <a:pPr algn="l" indent="0" marL="0">
+              <a:buNone/>
+            </a:pPr>
+            <a:r>
+              <a:rPr lang="ko-KR" altLang="en-US" sz="864" spc="138" kern="0" dirty="0">
+                <a:solidFill>
+                  <a:srgbClr val="2A78DD"/>
                 </a:solidFill>
                 <a:latin typeface="Paperlogy 7 Bold" pitchFamily="34" charset="0"/>
                 <a:ea typeface="Paperlogy 7 Bold" pitchFamily="34" charset="-127"/>
                 <a:cs typeface="Paperlogy 7 Bold" pitchFamily="34" charset="-120"/>
               </a:rPr>
-              <a:t>리모델링</a:t>
-            </a:r>
-            <a:endParaRPr lang="en-US" sz="1008" dirty="0"/>
-          </a:p>
-        </p:txBody>
-      </p:sp>
-      <p:sp>
-        <p:nvSpPr>
-          <p:cNvPr id="88" name="규모 입력"/>
-          <p:cNvSpPr txBox="1"/>
-          <p:nvPr/>
-        </p:nvSpPr>
-        <p:spPr>
-          <a:xfrm>
-            <a:off x="1121664" y="3573685"/>
-            <a:ext cx="508349" cy="152400"/>
-          </a:xfrm>
-          <a:prstGeom prst="rect">
-            <a:avLst/>
-          </a:prstGeom>
-          <a:noFill/>
-          <a:ln/>
-        </p:spPr>
-        <p:txBody>
-          <a:bodyPr wrap="none" lIns="0" tIns="0" rIns="0" bIns="0" rtlCol="0" anchor="ctr"/>
-          <a:lstStyle/>
-          <a:p>
-            <a:pPr algn="l" indent="0" marL="0">
-              <a:buNone/>
-            </a:pPr>
-            <a:r>
-              <a:rPr lang="ko-KR" altLang="en-US" sz="1008" spc="-30" kern="0" dirty="0">
+              <a:t>CONFLICT</a:t>
+            </a:r>
+            <a:endParaRPr lang="en-US" sz="864" dirty="0"/>
+          </a:p>
+        </p:txBody>
+      </p:sp>
+      <p:sp>
+        <p:nvSpPr>
+          <p:cNvPr id="111" name="주제 선정 의견 충돌"/>
+          <p:cNvSpPr txBox="1"/>
+          <p:nvPr/>
+        </p:nvSpPr>
+        <p:spPr>
+          <a:xfrm>
+            <a:off x="2560796" y="5049869"/>
+            <a:ext cx="1285890" cy="188976"/>
+          </a:xfrm>
+          <a:prstGeom prst="rect">
+            <a:avLst/>
+          </a:prstGeom>
+          <a:noFill/>
+          <a:ln/>
+        </p:spPr>
+        <p:txBody>
+          <a:bodyPr wrap="none" lIns="0" tIns="0" rIns="0" bIns="0" rtlCol="0" anchor="ctr"/>
+          <a:lstStyle/>
+          <a:p>
+            <a:pPr algn="l" indent="0" marL="0">
+              <a:buNone/>
+            </a:pPr>
+            <a:r>
+              <a:rPr lang="ko-KR" altLang="en-US" sz="1296" spc="-39" kern="0" dirty="0">
                 <a:solidFill>
                   <a:srgbClr val="0B2147"/>
                 </a:solidFill>
@@ -3398,7 +4135,46 @@
                 <a:ea typeface="Paperlogy 7 Bold" pitchFamily="34" charset="-127"/>
                 <a:cs typeface="Paperlogy 7 Bold" pitchFamily="34" charset="-120"/>
               </a:rPr>
-              <a:t>규모 입력</a:t>
+              <a:t>주제 선정 의견 충돌</a:t>
+            </a:r>
+            <a:endParaRPr lang="en-US" sz="1296" dirty="0"/>
+          </a:p>
+        </p:txBody>
+      </p:sp>
+      <p:sp>
+        <p:nvSpPr>
+          <p:cNvPr id="112" name="참신성 ↔ 구현 가능성"/>
+          <p:cNvSpPr txBox="1"/>
+          <p:nvPr/>
+        </p:nvSpPr>
+        <p:spPr>
+          <a:xfrm>
+            <a:off x="1554480" y="5353907"/>
+            <a:ext cx="1127072" cy="152400"/>
+          </a:xfrm>
+          <a:prstGeom prst="rect">
+            <a:avLst/>
+          </a:prstGeom>
+          <a:noFill/>
+          <a:ln/>
+        </p:spPr>
+        <p:txBody>
+          <a:bodyPr wrap="none" lIns="0" tIns="0" rIns="0" bIns="0" rtlCol="0" anchor="ctr"/>
+          <a:lstStyle/>
+          <a:p>
+            <a:pPr algn="l" indent="0" marL="0">
+              <a:buNone/>
+            </a:pPr>
+            <a:r>
+              <a:rPr lang="ko-KR" altLang="en-US" sz="1008" spc="-20" kern="0" dirty="0">
+                <a:solidFill>
+                  <a:srgbClr val="4B5568"/>
+                </a:solidFill>
+                <a:latin typeface="Paperlogy 6 SemiBold" pitchFamily="34" charset="0"/>
+                <a:ea typeface="Paperlogy 6 SemiBold" pitchFamily="34" charset="-127"/>
+                <a:cs typeface="Paperlogy 6 SemiBold" pitchFamily="34" charset="-120"/>
+              </a:rPr>
+              <a:t>참신성 ↔ 구현 가능성</a:t>
             </a:r>
             <a:endParaRPr lang="en-US" sz="1008" dirty="0"/>
           </a:p>
@@ -3406,108 +4182,186 @@
       </p:sp>
       <p:sp>
         <p:nvSpPr>
-          <p:cNvPr id="89" name="유닛 모듈러"/>
-          <p:cNvSpPr txBox="1"/>
-          <p:nvPr/>
-        </p:nvSpPr>
-        <p:spPr>
-          <a:xfrm>
-            <a:off x="3471958" y="3407283"/>
-            <a:ext cx="617220" cy="152400"/>
-          </a:xfrm>
-          <a:prstGeom prst="rect">
-            <a:avLst/>
-          </a:prstGeom>
-          <a:noFill/>
-          <a:ln/>
-        </p:spPr>
-        <p:txBody>
-          <a:bodyPr wrap="none" lIns="0" tIns="0" rIns="0" bIns="0" rtlCol="0" anchor="ctr"/>
-          <a:lstStyle/>
-          <a:p>
-            <a:pPr algn="l" indent="0" marL="0">
-              <a:buNone/>
-            </a:pPr>
-            <a:r>
-              <a:rPr lang="ko-KR" altLang="en-US" sz="1008" spc="-30" kern="0" dirty="0">
-                <a:solidFill>
-                  <a:srgbClr val="0B2147"/>
+          <p:cNvPr id="113" name="마감 3주 전까지 주제 미확정"/>
+          <p:cNvSpPr txBox="1"/>
+          <p:nvPr/>
+        </p:nvSpPr>
+        <p:spPr>
+          <a:xfrm>
+            <a:off x="3117628" y="5353907"/>
+            <a:ext cx="1480046" cy="152400"/>
+          </a:xfrm>
+          <a:prstGeom prst="rect">
+            <a:avLst/>
+          </a:prstGeom>
+          <a:noFill/>
+          <a:ln/>
+        </p:spPr>
+        <p:txBody>
+          <a:bodyPr wrap="none" lIns="0" tIns="0" rIns="0" bIns="0" rtlCol="0" anchor="ctr"/>
+          <a:lstStyle/>
+          <a:p>
+            <a:pPr algn="l" indent="0" marL="0">
+              <a:buNone/>
+            </a:pPr>
+            <a:r>
+              <a:rPr lang="ko-KR" altLang="en-US" sz="1008" spc="-20" kern="0" dirty="0">
+                <a:solidFill>
+                  <a:srgbClr val="4B5568"/>
+                </a:solidFill>
+                <a:latin typeface="Paperlogy 6 SemiBold" pitchFamily="34" charset="0"/>
+                <a:ea typeface="Paperlogy 6 SemiBold" pitchFamily="34" charset="-127"/>
+                <a:cs typeface="Paperlogy 6 SemiBold" pitchFamily="34" charset="-120"/>
+              </a:rPr>
+              <a:t>마감 3주 전까지 주제 미확정</a:t>
+            </a:r>
+            <a:endParaRPr lang="en-US" sz="1008" dirty="0"/>
+          </a:p>
+        </p:txBody>
+      </p:sp>
+      <p:sp>
+        <p:nvSpPr>
+          <p:cNvPr id="114" name="기준"/>
+          <p:cNvSpPr txBox="1"/>
+          <p:nvPr/>
+        </p:nvSpPr>
+        <p:spPr>
+          <a:xfrm>
+            <a:off x="699183" y="6002703"/>
+            <a:ext cx="235363" cy="134112"/>
+          </a:xfrm>
+          <a:prstGeom prst="rect">
+            <a:avLst/>
+          </a:prstGeom>
+          <a:noFill/>
+          <a:ln/>
+        </p:spPr>
+        <p:txBody>
+          <a:bodyPr wrap="none" lIns="0" tIns="0" rIns="0" bIns="0" rtlCol="0" anchor="ctr"/>
+          <a:lstStyle/>
+          <a:p>
+            <a:pPr algn="ctr" indent="0" marL="0">
+              <a:buNone/>
+            </a:pPr>
+            <a:r>
+              <a:rPr lang="ko-KR" altLang="en-US" sz="864" spc="-26" kern="0" dirty="0">
+                <a:solidFill>
+                  <a:srgbClr val="FFFFFF"/>
                 </a:solidFill>
                 <a:latin typeface="Paperlogy 7 Bold" pitchFamily="34" charset="0"/>
                 <a:ea typeface="Paperlogy 7 Bold" pitchFamily="34" charset="-127"/>
                 <a:cs typeface="Paperlogy 7 Bold" pitchFamily="34" charset="-120"/>
               </a:rPr>
-              <a:t>유닛 모듈러</a:t>
-            </a:r>
-            <a:endParaRPr lang="en-US" sz="1008" dirty="0"/>
-          </a:p>
-        </p:txBody>
-      </p:sp>
-      <p:sp>
-        <p:nvSpPr>
-          <p:cNvPr id="90" name="배치"/>
-          <p:cNvSpPr txBox="1"/>
-          <p:nvPr/>
-        </p:nvSpPr>
-        <p:spPr>
-          <a:xfrm>
-            <a:off x="3471958" y="3573685"/>
-            <a:ext cx="266414" cy="152400"/>
-          </a:xfrm>
-          <a:prstGeom prst="rect">
-            <a:avLst/>
-          </a:prstGeom>
-          <a:noFill/>
-          <a:ln/>
-        </p:spPr>
-        <p:txBody>
-          <a:bodyPr wrap="none" lIns="0" tIns="0" rIns="0" bIns="0" rtlCol="0" anchor="ctr"/>
-          <a:lstStyle/>
-          <a:p>
-            <a:pPr algn="l" indent="0" marL="0">
-              <a:buNone/>
-            </a:pPr>
-            <a:r>
-              <a:rPr lang="ko-KR" altLang="en-US" sz="1008" spc="-30" kern="0" dirty="0">
-                <a:solidFill>
-                  <a:srgbClr val="0B2147"/>
+              <a:t>기준</a:t>
+            </a:r>
+            <a:endParaRPr lang="en-US" sz="864" dirty="0"/>
+          </a:p>
+        </p:txBody>
+      </p:sp>
+      <p:sp>
+        <p:nvSpPr>
+          <p:cNvPr id="115" name="02"/>
+          <p:cNvSpPr txBox="1"/>
+          <p:nvPr/>
+        </p:nvSpPr>
+        <p:spPr>
+          <a:xfrm>
+            <a:off x="1304544" y="5849398"/>
+            <a:ext cx="203930" cy="134112"/>
+          </a:xfrm>
+          <a:prstGeom prst="rect">
+            <a:avLst/>
+          </a:prstGeom>
+          <a:noFill/>
+          <a:ln/>
+        </p:spPr>
+        <p:txBody>
+          <a:bodyPr wrap="none" lIns="0" tIns="0" rIns="0" bIns="0" rtlCol="0" anchor="ctr"/>
+          <a:lstStyle/>
+          <a:p>
+            <a:pPr algn="l" indent="0" marL="0">
+              <a:buNone/>
+            </a:pPr>
+            <a:r>
+              <a:rPr lang="ko-KR" altLang="en-US" sz="864" spc="35" kern="0" dirty="0">
+                <a:solidFill>
+                  <a:srgbClr val="004B8D"/>
+                </a:solidFill>
+                <a:latin typeface="Paperlogy 8 ExtraBold" pitchFamily="34" charset="0"/>
+                <a:ea typeface="Paperlogy 8 ExtraBold" pitchFamily="34" charset="-127"/>
+                <a:cs typeface="Paperlogy 8 ExtraBold" pitchFamily="34" charset="-120"/>
+              </a:rPr>
+              <a:t>02</a:t>
+            </a:r>
+            <a:endParaRPr lang="en-US" sz="864" dirty="0"/>
+          </a:p>
+        </p:txBody>
+      </p:sp>
+      <p:sp>
+        <p:nvSpPr>
+          <p:cNvPr id="116" name="ALIGN"/>
+          <p:cNvSpPr txBox="1"/>
+          <p:nvPr/>
+        </p:nvSpPr>
+        <p:spPr>
+          <a:xfrm>
+            <a:off x="1727930" y="5849398"/>
+            <a:ext cx="495776" cy="134112"/>
+          </a:xfrm>
+          <a:prstGeom prst="rect">
+            <a:avLst/>
+          </a:prstGeom>
+          <a:noFill/>
+          <a:ln/>
+        </p:spPr>
+        <p:txBody>
+          <a:bodyPr wrap="none" lIns="0" tIns="0" rIns="0" bIns="0" rtlCol="0" anchor="ctr"/>
+          <a:lstStyle/>
+          <a:p>
+            <a:pPr algn="l" indent="0" marL="0">
+              <a:buNone/>
+            </a:pPr>
+            <a:r>
+              <a:rPr lang="ko-KR" altLang="en-US" sz="864" spc="138" kern="0" dirty="0">
+                <a:solidFill>
+                  <a:srgbClr val="2A78DD"/>
                 </a:solidFill>
                 <a:latin typeface="Paperlogy 7 Bold" pitchFamily="34" charset="0"/>
                 <a:ea typeface="Paperlogy 7 Bold" pitchFamily="34" charset="-127"/>
                 <a:cs typeface="Paperlogy 7 Bold" pitchFamily="34" charset="-120"/>
               </a:rPr>
-              <a:t>배치</a:t>
-            </a:r>
-            <a:endParaRPr lang="en-US" sz="1008" dirty="0"/>
-          </a:p>
-        </p:txBody>
-      </p:sp>
-      <p:sp>
-        <p:nvSpPr>
-          <p:cNvPr id="91" name="모듈 수 · 자재 물량"/>
-          <p:cNvSpPr txBox="1"/>
-          <p:nvPr/>
-        </p:nvSpPr>
-        <p:spPr>
-          <a:xfrm>
-            <a:off x="5931122" y="3407283"/>
-            <a:ext cx="950182" cy="152400"/>
-          </a:xfrm>
-          <a:prstGeom prst="rect">
-            <a:avLst/>
-          </a:prstGeom>
-          <a:noFill/>
-          <a:ln/>
-        </p:spPr>
-        <p:txBody>
-          <a:bodyPr wrap="none" lIns="0" tIns="0" rIns="0" bIns="0" rtlCol="0" anchor="ctr"/>
-          <a:lstStyle/>
-          <a:p>
-            <a:pPr algn="l" indent="0" marL="0">
-              <a:buNone/>
-            </a:pPr>
-            <a:r>
-              <a:rPr lang="ko-KR" altLang="en-US" sz="1008" spc="-30" kern="0" dirty="0">
+              <a:t>ALIGN</a:t>
+            </a:r>
+            <a:endParaRPr lang="en-US" sz="864" dirty="0"/>
+          </a:p>
+        </p:txBody>
+      </p:sp>
+      <p:sp>
+        <p:nvSpPr>
+          <p:cNvPr id="117" name="의견 조율 · 주제 확정"/>
+          <p:cNvSpPr txBox="1"/>
+          <p:nvPr/>
+        </p:nvSpPr>
+        <p:spPr>
+          <a:xfrm>
+            <a:off x="2284667" y="5821966"/>
+            <a:ext cx="1369994" cy="188976"/>
+          </a:xfrm>
+          <a:prstGeom prst="rect">
+            <a:avLst/>
+          </a:prstGeom>
+          <a:noFill/>
+          <a:ln/>
+        </p:spPr>
+        <p:txBody>
+          <a:bodyPr wrap="none" lIns="0" tIns="0" rIns="0" bIns="0" rtlCol="0" anchor="ctr"/>
+          <a:lstStyle/>
+          <a:p>
+            <a:pPr algn="l" indent="0" marL="0">
+              <a:buNone/>
+            </a:pPr>
+            <a:r>
+              <a:rPr lang="ko-KR" altLang="en-US" sz="1296" spc="-39" kern="0" dirty="0">
                 <a:solidFill>
                   <a:srgbClr val="0B2147"/>
                 </a:solidFill>
@@ -3515,7 +4369,46 @@
                 <a:ea typeface="Paperlogy 7 Bold" pitchFamily="34" charset="-127"/>
                 <a:cs typeface="Paperlogy 7 Bold" pitchFamily="34" charset="-120"/>
               </a:rPr>
-              <a:t>모듈 수 · 자재 물량</a:t>
+              <a:t>의견 조율 · 주제 확정</a:t>
+            </a:r>
+            <a:endParaRPr lang="en-US" sz="1296" dirty="0"/>
+          </a:p>
+        </p:txBody>
+      </p:sp>
+      <p:sp>
+        <p:nvSpPr>
+          <p:cNvPr id="118" name="경청 · 수상작 분석 · 교수님 조언"/>
+          <p:cNvSpPr txBox="1"/>
+          <p:nvPr/>
+        </p:nvSpPr>
+        <p:spPr>
+          <a:xfrm>
+            <a:off x="1554480" y="6126004"/>
+            <a:ext cx="1641691" cy="152400"/>
+          </a:xfrm>
+          <a:prstGeom prst="rect">
+            <a:avLst/>
+          </a:prstGeom>
+          <a:noFill/>
+          <a:ln/>
+        </p:spPr>
+        <p:txBody>
+          <a:bodyPr wrap="none" lIns="0" tIns="0" rIns="0" bIns="0" rtlCol="0" anchor="ctr"/>
+          <a:lstStyle/>
+          <a:p>
+            <a:pPr algn="l" indent="0" marL="0">
+              <a:buNone/>
+            </a:pPr>
+            <a:r>
+              <a:rPr lang="ko-KR" altLang="en-US" sz="1008" spc="-20" kern="0" dirty="0">
+                <a:solidFill>
+                  <a:srgbClr val="4B5568"/>
+                </a:solidFill>
+                <a:latin typeface="Paperlogy 6 SemiBold" pitchFamily="34" charset="0"/>
+                <a:ea typeface="Paperlogy 6 SemiBold" pitchFamily="34" charset="-127"/>
+                <a:cs typeface="Paperlogy 6 SemiBold" pitchFamily="34" charset="-120"/>
+              </a:rPr>
+              <a:t>경청 · 수상작 분석 · 교수님 조언</a:t>
             </a:r>
             <a:endParaRPr lang="en-US" sz="1008" dirty="0"/>
           </a:p>
@@ -3523,38 +4416,77 @@
       </p:sp>
       <p:sp>
         <p:nvSpPr>
-          <p:cNvPr id="92" name="자동 산출"/>
-          <p:cNvSpPr txBox="1"/>
-          <p:nvPr/>
-        </p:nvSpPr>
-        <p:spPr>
-          <a:xfrm>
-            <a:off x="5931122" y="3573685"/>
-            <a:ext cx="508349" cy="152400"/>
-          </a:xfrm>
-          <a:prstGeom prst="rect">
-            <a:avLst/>
-          </a:prstGeom>
-          <a:noFill/>
-          <a:ln/>
-        </p:spPr>
-        <p:txBody>
-          <a:bodyPr wrap="none" lIns="0" tIns="0" rIns="0" bIns="0" rtlCol="0" anchor="ctr"/>
-          <a:lstStyle/>
-          <a:p>
-            <a:pPr algn="l" indent="0" marL="0">
-              <a:buNone/>
-            </a:pPr>
-            <a:r>
-              <a:rPr lang="ko-KR" altLang="en-US" sz="1008" spc="-30" kern="0" dirty="0">
-                <a:solidFill>
-                  <a:srgbClr val="0B2147"/>
+          <p:cNvPr id="119" name="판단 기준 마련"/>
+          <p:cNvSpPr txBox="1"/>
+          <p:nvPr/>
+        </p:nvSpPr>
+        <p:spPr>
+          <a:xfrm>
+            <a:off x="3694557" y="6126004"/>
+            <a:ext cx="760571" cy="152400"/>
+          </a:xfrm>
+          <a:prstGeom prst="rect">
+            <a:avLst/>
+          </a:prstGeom>
+          <a:noFill/>
+          <a:ln/>
+        </p:spPr>
+        <p:txBody>
+          <a:bodyPr wrap="none" lIns="0" tIns="0" rIns="0" bIns="0" rtlCol="0" anchor="ctr"/>
+          <a:lstStyle/>
+          <a:p>
+            <a:pPr algn="l" indent="0" marL="0">
+              <a:buNone/>
+            </a:pPr>
+            <a:r>
+              <a:rPr lang="ko-KR" altLang="en-US" sz="1008" spc="-20" kern="0" dirty="0">
+                <a:solidFill>
+                  <a:srgbClr val="4B5568"/>
+                </a:solidFill>
+                <a:latin typeface="Paperlogy 6 SemiBold" pitchFamily="34" charset="0"/>
+                <a:ea typeface="Paperlogy 6 SemiBold" pitchFamily="34" charset="-127"/>
+                <a:cs typeface="Paperlogy 6 SemiBold" pitchFamily="34" charset="-120"/>
+              </a:rPr>
+              <a:t>판단 기준 마련</a:t>
+            </a:r>
+            <a:endParaRPr lang="en-US" sz="1008" dirty="0"/>
+          </a:p>
+        </p:txBody>
+      </p:sp>
+      <p:sp>
+        <p:nvSpPr>
+          <p:cNvPr id="120" name="주제 합의"/>
+          <p:cNvSpPr txBox="1"/>
+          <p:nvPr/>
+        </p:nvSpPr>
+        <p:spPr>
+          <a:xfrm>
+            <a:off x="4997672" y="6126004"/>
+            <a:ext cx="514826" cy="152400"/>
+          </a:xfrm>
+          <a:prstGeom prst="rect">
+            <a:avLst/>
+          </a:prstGeom>
+          <a:noFill/>
+          <a:ln/>
+        </p:spPr>
+        <p:txBody>
+          <a:bodyPr wrap="none" lIns="0" tIns="0" rIns="0" bIns="0" rtlCol="0" anchor="ctr"/>
+          <a:lstStyle/>
+          <a:p>
+            <a:pPr algn="l" indent="0" marL="0">
+              <a:buNone/>
+            </a:pPr>
+            <a:r>
+              <a:rPr lang="ko-KR" altLang="en-US" sz="1008" spc="-20" kern="0" dirty="0">
+                <a:solidFill>
+                  <a:srgbClr val="004B8D"/>
                 </a:solidFill>
                 <a:latin typeface="Paperlogy 7 Bold" pitchFamily="34" charset="0"/>
                 <a:ea typeface="Paperlogy 7 Bold" pitchFamily="34" charset="-127"/>
                 <a:cs typeface="Paperlogy 7 Bold" pitchFamily="34" charset="-120"/>
               </a:rPr>
-              <a:t>자동 산출</a:t>
+              <a:t>주제 합의</a:t>
             </a:r>
             <a:endParaRPr lang="en-US" sz="1008" dirty="0"/>
           </a:p>
@@ -3562,13 +4494,13 @@
       </p:sp>
       <p:sp>
         <p:nvSpPr>
-          <p:cNvPr id="93" name="01"/>
-          <p:cNvSpPr txBox="1"/>
-          <p:nvPr/>
-        </p:nvSpPr>
-        <p:spPr>
-          <a:xfrm>
-            <a:off x="1499616" y="4047363"/>
+          <p:cNvPr id="121" name="03"/>
+          <p:cNvSpPr txBox="1"/>
+          <p:nvPr/>
+        </p:nvSpPr>
+        <p:spPr>
+          <a:xfrm>
+            <a:off x="1304544" y="6582156"/>
             <a:ext cx="203930" cy="134112"/>
           </a:xfrm>
           <a:prstGeom prst="rect">
@@ -3593,7 +4525,7 @@
                 <a:ea typeface="Paperlogy 8 ExtraBold" pitchFamily="34" charset="-127"/>
                 <a:cs typeface="Paperlogy 8 ExtraBold" pitchFamily="34" charset="-120"/>
               </a:rPr>
-              <a:t>01</a:t>
+              <a:t>03</a:t>
             </a:r>
             <a:endParaRPr lang="en-US" sz="864" dirty="0"/>
           </a:p>
@@ -3601,14 +4533,14 @@
       </p:sp>
       <p:sp>
         <p:nvSpPr>
-          <p:cNvPr id="94" name="CONFLICT"/>
-          <p:cNvSpPr txBox="1"/>
-          <p:nvPr/>
-        </p:nvSpPr>
-        <p:spPr>
-          <a:xfrm>
-            <a:off x="1935194" y="4047363"/>
-            <a:ext cx="771906" cy="134112"/>
+          <p:cNvPr id="122" name="ONE TEAM"/>
+          <p:cNvSpPr txBox="1"/>
+          <p:nvPr/>
+        </p:nvSpPr>
+        <p:spPr>
+          <a:xfrm>
+            <a:off x="1727930" y="6582156"/>
+            <a:ext cx="801624" cy="134112"/>
           </a:xfrm>
           <a:prstGeom prst="rect">
             <a:avLst/>
@@ -3632,7 +4564,7 @@
                 <a:ea typeface="Paperlogy 7 Bold" pitchFamily="34" charset="-127"/>
                 <a:cs typeface="Paperlogy 7 Bold" pitchFamily="34" charset="-120"/>
               </a:rPr>
-              <a:t>CONFLICT</a:t>
+              <a:t>ONE TEAM</a:t>
             </a:r>
             <a:endParaRPr lang="en-US" sz="864" dirty="0"/>
           </a:p>
@@ -3640,14 +4572,14 @@
       </p:sp>
       <p:sp>
         <p:nvSpPr>
-          <p:cNvPr id="95" name="주제 선정 의견 충돌"/>
-          <p:cNvSpPr txBox="1"/>
-          <p:nvPr/>
-        </p:nvSpPr>
-        <p:spPr>
-          <a:xfrm>
-            <a:off x="1499616" y="4230815"/>
-            <a:ext cx="1285890" cy="188976"/>
+          <p:cNvPr id="123" name="강점 기반 역할 분담 · 지속적인 공유"/>
+          <p:cNvSpPr txBox="1"/>
+          <p:nvPr/>
+        </p:nvSpPr>
+        <p:spPr>
+          <a:xfrm>
+            <a:off x="2590514" y="6554724"/>
+            <a:ext cx="2326133" cy="188976"/>
           </a:xfrm>
           <a:prstGeom prst="rect">
             <a:avLst/>
@@ -3671,7 +4603,7 @@
                 <a:ea typeface="Paperlogy 7 Bold" pitchFamily="34" charset="-127"/>
                 <a:cs typeface="Paperlogy 7 Bold" pitchFamily="34" charset="-120"/>
               </a:rPr>
-              <a:t>주제 선정 의견 충돌</a:t>
+              <a:t>강점 기반 역할 분담 · 지속적인 공유</a:t>
             </a:r>
             <a:endParaRPr lang="en-US" sz="1296" dirty="0"/>
           </a:p>
@@ -3679,38 +4611,116 @@
       </p:sp>
       <p:sp>
         <p:nvSpPr>
-          <p:cNvPr id="96" name="참신성 ↔ 구현 가능성"/>
-          <p:cNvSpPr txBox="1"/>
-          <p:nvPr/>
-        </p:nvSpPr>
-        <p:spPr>
-          <a:xfrm>
-            <a:off x="1749552" y="4553141"/>
-            <a:ext cx="1127072" cy="152400"/>
-          </a:xfrm>
-          <a:prstGeom prst="rect">
-            <a:avLst/>
-          </a:prstGeom>
-          <a:noFill/>
-          <a:ln/>
-        </p:spPr>
-        <p:txBody>
-          <a:bodyPr wrap="none" lIns="0" tIns="0" rIns="0" bIns="0" rtlCol="0" anchor="ctr"/>
-          <a:lstStyle/>
-          <a:p>
-            <a:pPr algn="l" indent="0" marL="0">
-              <a:buNone/>
-            </a:pPr>
-            <a:r>
-              <a:rPr lang="ko-KR" altLang="en-US" sz="1008" spc="-20" kern="0" dirty="0">
-                <a:solidFill>
-                  <a:srgbClr val="4B5568"/>
+          <p:cNvPr id="124" name="팀장"/>
+          <p:cNvSpPr txBox="1"/>
+          <p:nvPr/>
+        </p:nvSpPr>
+        <p:spPr>
+          <a:xfrm>
+            <a:off x="1670304" y="6914960"/>
+            <a:ext cx="307848" cy="176784"/>
+          </a:xfrm>
+          <a:prstGeom prst="rect">
+            <a:avLst/>
+          </a:prstGeom>
+          <a:noFill/>
+          <a:ln/>
+        </p:spPr>
+        <p:txBody>
+          <a:bodyPr wrap="none" lIns="0" tIns="0" rIns="0" bIns="0" rtlCol="0" anchor="ctr"/>
+          <a:lstStyle/>
+          <a:p>
+            <a:pPr algn="l" indent="0" marL="0">
+              <a:buNone/>
+            </a:pPr>
+            <a:r>
+              <a:rPr lang="ko-KR" altLang="en-US" sz="1200" spc="-36" kern="0" dirty="0">
+                <a:solidFill>
+                  <a:srgbClr val="0B2147"/>
+                </a:solidFill>
+                <a:latin typeface="Paperlogy 8 ExtraBold" pitchFamily="34" charset="0"/>
+                <a:ea typeface="Paperlogy 8 ExtraBold" pitchFamily="34" charset="-127"/>
+                <a:cs typeface="Paperlogy 8 ExtraBold" pitchFamily="34" charset="-120"/>
+              </a:rPr>
+              <a:t>팀장</a:t>
+            </a:r>
+            <a:endParaRPr lang="en-US" sz="1200" dirty="0"/>
+          </a:p>
+        </p:txBody>
+      </p:sp>
+      <p:sp>
+        <p:nvSpPr>
+          <p:cNvPr id="125" name="나"/>
+          <p:cNvSpPr txBox="1"/>
+          <p:nvPr/>
+        </p:nvSpPr>
+        <p:spPr>
+          <a:xfrm>
+            <a:off x="2057400" y="6939820"/>
+            <a:ext cx="144304" cy="134112"/>
+          </a:xfrm>
+          <a:prstGeom prst="rect">
+            <a:avLst/>
+          </a:prstGeom>
+          <a:noFill/>
+          <a:ln/>
+        </p:spPr>
+        <p:txBody>
+          <a:bodyPr wrap="none" lIns="0" tIns="0" rIns="0" bIns="0" rtlCol="0" anchor="ctr"/>
+          <a:lstStyle/>
+          <a:p>
+            <a:pPr algn="l" indent="0" marL="0">
+              <a:buNone/>
+            </a:pPr>
+            <a:r>
+              <a:rPr lang="ko-KR" altLang="en-US" sz="864" spc="-9" kern="0" dirty="0">
+                <a:solidFill>
+                  <a:srgbClr val="FFFFFF"/>
+                </a:solidFill>
+                <a:latin typeface="Paperlogy 7 Bold" pitchFamily="34" charset="0"/>
+                <a:ea typeface="Paperlogy 7 Bold" pitchFamily="34" charset="-127"/>
+                <a:cs typeface="Paperlogy 7 Bold" pitchFamily="34" charset="-120"/>
+              </a:rPr>
+              <a:t>나</a:t>
+            </a:r>
+            <a:endParaRPr lang="en-US" sz="864" dirty="0"/>
+          </a:p>
+        </p:txBody>
+      </p:sp>
+      <p:sp>
+        <p:nvSpPr>
+          <p:cNvPr id="126" name="프로젝트 총괄"/>
+          <p:cNvSpPr txBox="1"/>
+          <p:nvPr/>
+        </p:nvSpPr>
+        <p:spPr>
+          <a:xfrm>
+            <a:off x="1438656" y="7172516"/>
+            <a:ext cx="730472" cy="152400"/>
+          </a:xfrm>
+          <a:prstGeom prst="rect">
+            <a:avLst/>
+          </a:prstGeom>
+          <a:noFill/>
+          <a:ln/>
+        </p:spPr>
+        <p:txBody>
+          <a:bodyPr wrap="none" lIns="0" tIns="0" rIns="0" bIns="0" rtlCol="0" anchor="ctr"/>
+          <a:lstStyle/>
+          <a:p>
+            <a:pPr algn="l" indent="0" marL="0">
+              <a:buNone/>
+            </a:pPr>
+            <a:r>
+              <a:rPr lang="ko-KR" altLang="en-US" sz="1008" spc="-25" kern="0" dirty="0">
+                <a:solidFill>
+                  <a:srgbClr val="1C2536"/>
                 </a:solidFill>
                 <a:latin typeface="Paperlogy 6 SemiBold" pitchFamily="34" charset="0"/>
                 <a:ea typeface="Paperlogy 6 SemiBold" pitchFamily="34" charset="-127"/>
                 <a:cs typeface="Paperlogy 6 SemiBold" pitchFamily="34" charset="-120"/>
               </a:rPr>
-              <a:t>참신성 ↔ 구현 가능성</a:t>
+              <a:t>프로젝트 총괄</a:t>
             </a:r>
             <a:endParaRPr lang="en-US" sz="1008" dirty="0"/>
           </a:p>
@@ -3718,38 +4728,38 @@
       </p:sp>
       <p:sp>
         <p:nvSpPr>
-          <p:cNvPr id="97" name="마감 3주 전까지 주제 미확정"/>
-          <p:cNvSpPr txBox="1"/>
-          <p:nvPr/>
-        </p:nvSpPr>
-        <p:spPr>
-          <a:xfrm>
-            <a:off x="3312700" y="4553141"/>
-            <a:ext cx="1480046" cy="152400"/>
-          </a:xfrm>
-          <a:prstGeom prst="rect">
-            <a:avLst/>
-          </a:prstGeom>
-          <a:noFill/>
-          <a:ln/>
-        </p:spPr>
-        <p:txBody>
-          <a:bodyPr wrap="none" lIns="0" tIns="0" rIns="0" bIns="0" rtlCol="0" anchor="ctr"/>
-          <a:lstStyle/>
-          <a:p>
-            <a:pPr algn="l" indent="0" marL="0">
-              <a:buNone/>
-            </a:pPr>
-            <a:r>
-              <a:rPr lang="ko-KR" altLang="en-US" sz="1008" spc="-20" kern="0" dirty="0">
-                <a:solidFill>
-                  <a:srgbClr val="4B5568"/>
+          <p:cNvPr id="127" name="기반 자동화 알고리즘 개발"/>
+          <p:cNvSpPr txBox="1"/>
+          <p:nvPr/>
+        </p:nvSpPr>
+        <p:spPr>
+          <a:xfrm>
+            <a:off x="2123218" y="7361968"/>
+            <a:ext cx="1355657" cy="152400"/>
+          </a:xfrm>
+          <a:prstGeom prst="rect">
+            <a:avLst/>
+          </a:prstGeom>
+          <a:noFill/>
+          <a:ln/>
+        </p:spPr>
+        <p:txBody>
+          <a:bodyPr wrap="none" lIns="0" tIns="0" rIns="0" bIns="0" rtlCol="0" anchor="ctr"/>
+          <a:lstStyle/>
+          <a:p>
+            <a:pPr algn="l" indent="0" marL="0">
+              <a:buNone/>
+            </a:pPr>
+            <a:r>
+              <a:rPr lang="ko-KR" altLang="en-US" sz="1008" spc="-25" kern="0" dirty="0">
+                <a:solidFill>
+                  <a:srgbClr val="1C2536"/>
                 </a:solidFill>
                 <a:latin typeface="Paperlogy 6 SemiBold" pitchFamily="34" charset="0"/>
                 <a:ea typeface="Paperlogy 6 SemiBold" pitchFamily="34" charset="-127"/>
                 <a:cs typeface="Paperlogy 6 SemiBold" pitchFamily="34" charset="-120"/>
               </a:rPr>
-              <a:t>마감 3주 전까지 주제 미확정</a:t>
+              <a:t>기반 자동화 알고리즘 개발</a:t>
             </a:r>
             <a:endParaRPr lang="en-US" sz="1008" dirty="0"/>
           </a:p>
@@ -3757,38 +4767,38 @@
       </p:sp>
       <p:sp>
         <p:nvSpPr>
-          <p:cNvPr id="98" name="기준"/>
-          <p:cNvSpPr txBox="1"/>
-          <p:nvPr/>
-        </p:nvSpPr>
-        <p:spPr>
-          <a:xfrm>
-            <a:off x="784527" y="5303377"/>
-            <a:ext cx="235363" cy="134112"/>
-          </a:xfrm>
-          <a:prstGeom prst="rect">
-            <a:avLst/>
-          </a:prstGeom>
-          <a:noFill/>
-          <a:ln/>
-        </p:spPr>
-        <p:txBody>
-          <a:bodyPr wrap="none" lIns="0" tIns="0" rIns="0" bIns="0" rtlCol="0" anchor="ctr"/>
-          <a:lstStyle/>
-          <a:p>
-            <a:pPr algn="ctr" indent="0" marL="0">
-              <a:buNone/>
-            </a:pPr>
-            <a:r>
-              <a:rPr lang="ko-KR" altLang="en-US" sz="864" spc="-26" kern="0" dirty="0">
-                <a:solidFill>
-                  <a:srgbClr val="FFFFFF"/>
+          <p:cNvPr id="128" name="Dynamo"/>
+          <p:cNvSpPr txBox="1"/>
+          <p:nvPr/>
+        </p:nvSpPr>
+        <p:spPr>
+          <a:xfrm>
+            <a:off x="1511808" y="7374160"/>
+            <a:ext cx="537686" cy="134112"/>
+          </a:xfrm>
+          <a:prstGeom prst="rect">
+            <a:avLst/>
+          </a:prstGeom>
+          <a:noFill/>
+          <a:ln/>
+        </p:spPr>
+        <p:txBody>
+          <a:bodyPr wrap="none" lIns="0" tIns="0" rIns="0" bIns="0" rtlCol="0" anchor="ctr"/>
+          <a:lstStyle/>
+          <a:p>
+            <a:pPr algn="l" indent="0" marL="0">
+              <a:buNone/>
+            </a:pPr>
+            <a:r>
+              <a:rPr lang="ko-KR" altLang="en-US" sz="864" dirty="0">
+                <a:solidFill>
+                  <a:srgbClr val="004B8D"/>
                 </a:solidFill>
                 <a:latin typeface="Paperlogy 7 Bold" pitchFamily="34" charset="0"/>
                 <a:ea typeface="Paperlogy 7 Bold" pitchFamily="34" charset="-127"/>
                 <a:cs typeface="Paperlogy 7 Bold" pitchFamily="34" charset="-120"/>
               </a:rPr>
-              <a:t>기준</a:t>
+              <a:t>Dynamo</a:t>
             </a:r>
             <a:endParaRPr lang="en-US" sz="864" dirty="0"/>
           </a:p>
@@ -3796,147 +4806,264 @@
       </p:sp>
       <p:sp>
         <p:nvSpPr>
-          <p:cNvPr id="99" name="02"/>
-          <p:cNvSpPr txBox="1"/>
-          <p:nvPr/>
-        </p:nvSpPr>
-        <p:spPr>
-          <a:xfrm>
-            <a:off x="1499616" y="5018723"/>
-            <a:ext cx="203930" cy="134112"/>
-          </a:xfrm>
-          <a:prstGeom prst="rect">
-            <a:avLst/>
-          </a:prstGeom>
-          <a:noFill/>
-          <a:ln/>
-        </p:spPr>
-        <p:txBody>
-          <a:bodyPr wrap="none" lIns="0" tIns="0" rIns="0" bIns="0" rtlCol="0" anchor="ctr"/>
-          <a:lstStyle/>
-          <a:p>
-            <a:pPr algn="l" indent="0" marL="0">
-              <a:buNone/>
-            </a:pPr>
-            <a:r>
-              <a:rPr lang="ko-KR" altLang="en-US" sz="864" spc="35" kern="0" dirty="0">
-                <a:solidFill>
-                  <a:srgbClr val="004B8D"/>
+          <p:cNvPr id="129" name="팀원 A"/>
+          <p:cNvSpPr txBox="1"/>
+          <p:nvPr/>
+        </p:nvSpPr>
+        <p:spPr>
+          <a:xfrm>
+            <a:off x="4456176" y="6914960"/>
+            <a:ext cx="450437" cy="176784"/>
+          </a:xfrm>
+          <a:prstGeom prst="rect">
+            <a:avLst/>
+          </a:prstGeom>
+          <a:noFill/>
+          <a:ln/>
+        </p:spPr>
+        <p:txBody>
+          <a:bodyPr wrap="none" lIns="0" tIns="0" rIns="0" bIns="0" rtlCol="0" anchor="ctr"/>
+          <a:lstStyle/>
+          <a:p>
+            <a:pPr algn="l" indent="0" marL="0">
+              <a:buNone/>
+            </a:pPr>
+            <a:r>
+              <a:rPr lang="ko-KR" altLang="en-US" sz="1200" spc="-36" kern="0" dirty="0">
+                <a:solidFill>
+                  <a:srgbClr val="0B2147"/>
                 </a:solidFill>
                 <a:latin typeface="Paperlogy 8 ExtraBold" pitchFamily="34" charset="0"/>
                 <a:ea typeface="Paperlogy 8 ExtraBold" pitchFamily="34" charset="-127"/>
                 <a:cs typeface="Paperlogy 8 ExtraBold" pitchFamily="34" charset="-120"/>
               </a:rPr>
-              <a:t>02</a:t>
-            </a:r>
-            <a:endParaRPr lang="en-US" sz="864" dirty="0"/>
-          </a:p>
-        </p:txBody>
-      </p:sp>
-      <p:sp>
-        <p:nvSpPr>
-          <p:cNvPr id="100" name="ALIGN"/>
-          <p:cNvSpPr txBox="1"/>
-          <p:nvPr/>
-        </p:nvSpPr>
-        <p:spPr>
-          <a:xfrm>
-            <a:off x="1935194" y="5018723"/>
-            <a:ext cx="495776" cy="134112"/>
-          </a:xfrm>
-          <a:prstGeom prst="rect">
-            <a:avLst/>
-          </a:prstGeom>
-          <a:noFill/>
-          <a:ln/>
-        </p:spPr>
-        <p:txBody>
-          <a:bodyPr wrap="none" lIns="0" tIns="0" rIns="0" bIns="0" rtlCol="0" anchor="ctr"/>
-          <a:lstStyle/>
-          <a:p>
-            <a:pPr algn="l" indent="0" marL="0">
-              <a:buNone/>
-            </a:pPr>
-            <a:r>
-              <a:rPr lang="ko-KR" altLang="en-US" sz="864" spc="138" kern="0" dirty="0">
-                <a:solidFill>
-                  <a:srgbClr val="2A78DD"/>
+              <a:t>팀원 A</a:t>
+            </a:r>
+            <a:endParaRPr lang="en-US" sz="1200" dirty="0"/>
+          </a:p>
+        </p:txBody>
+      </p:sp>
+      <p:sp>
+        <p:nvSpPr>
+          <p:cNvPr id="130" name="유닛 모듈러 설계"/>
+          <p:cNvSpPr txBox="1"/>
+          <p:nvPr/>
+        </p:nvSpPr>
+        <p:spPr>
+          <a:xfrm>
+            <a:off x="4224528" y="7172516"/>
+            <a:ext cx="865068" cy="152400"/>
+          </a:xfrm>
+          <a:prstGeom prst="rect">
+            <a:avLst/>
+          </a:prstGeom>
+          <a:noFill/>
+          <a:ln/>
+        </p:spPr>
+        <p:txBody>
+          <a:bodyPr wrap="none" lIns="0" tIns="0" rIns="0" bIns="0" rtlCol="0" anchor="ctr"/>
+          <a:lstStyle/>
+          <a:p>
+            <a:pPr algn="l" indent="0" marL="0">
+              <a:buNone/>
+            </a:pPr>
+            <a:r>
+              <a:rPr lang="ko-KR" altLang="en-US" sz="1008" spc="-25" kern="0" dirty="0">
+                <a:solidFill>
+                  <a:srgbClr val="4B5568"/>
+                </a:solidFill>
+                <a:latin typeface="Paperlogy 6 SemiBold" pitchFamily="34" charset="0"/>
+                <a:ea typeface="Paperlogy 6 SemiBold" pitchFamily="34" charset="-127"/>
+                <a:cs typeface="Paperlogy 6 SemiBold" pitchFamily="34" charset="-120"/>
+              </a:rPr>
+              <a:t>유닛 모듈러 설계</a:t>
+            </a:r>
+            <a:endParaRPr lang="en-US" sz="1008" dirty="0"/>
+          </a:p>
+        </p:txBody>
+      </p:sp>
+      <p:sp>
+        <p:nvSpPr>
+          <p:cNvPr id="131" name="배치계획"/>
+          <p:cNvSpPr txBox="1"/>
+          <p:nvPr/>
+        </p:nvSpPr>
+        <p:spPr>
+          <a:xfrm>
+            <a:off x="4224528" y="7361968"/>
+            <a:ext cx="486632" cy="152400"/>
+          </a:xfrm>
+          <a:prstGeom prst="rect">
+            <a:avLst/>
+          </a:prstGeom>
+          <a:noFill/>
+          <a:ln/>
+        </p:spPr>
+        <p:txBody>
+          <a:bodyPr wrap="none" lIns="0" tIns="0" rIns="0" bIns="0" rtlCol="0" anchor="ctr"/>
+          <a:lstStyle/>
+          <a:p>
+            <a:pPr algn="l" indent="0" marL="0">
+              <a:buNone/>
+            </a:pPr>
+            <a:r>
+              <a:rPr lang="ko-KR" altLang="en-US" sz="1008" spc="-25" kern="0" dirty="0">
+                <a:solidFill>
+                  <a:srgbClr val="4B5568"/>
+                </a:solidFill>
+                <a:latin typeface="Paperlogy 6 SemiBold" pitchFamily="34" charset="0"/>
+                <a:ea typeface="Paperlogy 6 SemiBold" pitchFamily="34" charset="-127"/>
+                <a:cs typeface="Paperlogy 6 SemiBold" pitchFamily="34" charset="-120"/>
+              </a:rPr>
+              <a:t>배치계획</a:t>
+            </a:r>
+            <a:endParaRPr lang="en-US" sz="1008" dirty="0"/>
+          </a:p>
+        </p:txBody>
+      </p:sp>
+      <p:sp>
+        <p:nvSpPr>
+          <p:cNvPr id="132" name="이틀마다 진행상황 공유 · 피드백"/>
+          <p:cNvSpPr txBox="1"/>
+          <p:nvPr/>
+        </p:nvSpPr>
+        <p:spPr>
+          <a:xfrm>
+            <a:off x="3334703" y="7673435"/>
+            <a:ext cx="1666730" cy="152400"/>
+          </a:xfrm>
+          <a:prstGeom prst="rect">
+            <a:avLst/>
+          </a:prstGeom>
+          <a:noFill/>
+          <a:ln/>
+        </p:spPr>
+        <p:txBody>
+          <a:bodyPr wrap="none" lIns="0" tIns="0" rIns="0" bIns="0" rtlCol="0" anchor="ctr"/>
+          <a:lstStyle/>
+          <a:p>
+            <a:pPr algn="l" indent="0" marL="0">
+              <a:buNone/>
+            </a:pPr>
+            <a:r>
+              <a:rPr lang="ko-KR" altLang="en-US" sz="1008" spc="-20" kern="0" dirty="0">
+                <a:solidFill>
+                  <a:srgbClr val="0B6B33"/>
                 </a:solidFill>
                 <a:latin typeface="Paperlogy 7 Bold" pitchFamily="34" charset="0"/>
                 <a:ea typeface="Paperlogy 7 Bold" pitchFamily="34" charset="-127"/>
                 <a:cs typeface="Paperlogy 7 Bold" pitchFamily="34" charset="-120"/>
               </a:rPr>
-              <a:t>ALIGN</a:t>
-            </a:r>
-            <a:endParaRPr lang="en-US" sz="864" dirty="0"/>
-          </a:p>
-        </p:txBody>
-      </p:sp>
-      <p:sp>
-        <p:nvSpPr>
-          <p:cNvPr id="101" name="의견 조율 · 주제 확정"/>
-          <p:cNvSpPr txBox="1"/>
-          <p:nvPr/>
-        </p:nvSpPr>
-        <p:spPr>
-          <a:xfrm>
-            <a:off x="1499616" y="5202174"/>
-            <a:ext cx="1369994" cy="188976"/>
-          </a:xfrm>
-          <a:prstGeom prst="rect">
-            <a:avLst/>
-          </a:prstGeom>
-          <a:noFill/>
-          <a:ln/>
-        </p:spPr>
-        <p:txBody>
-          <a:bodyPr wrap="none" lIns="0" tIns="0" rIns="0" bIns="0" rtlCol="0" anchor="ctr"/>
-          <a:lstStyle/>
-          <a:p>
-            <a:pPr algn="l" indent="0" marL="0">
-              <a:buNone/>
-            </a:pPr>
-            <a:r>
-              <a:rPr lang="ko-KR" altLang="en-US" sz="1296" spc="-39" kern="0" dirty="0">
+              <a:t>이틀마다 진행상황 공유 · 피드백</a:t>
+            </a:r>
+            <a:endParaRPr lang="en-US" sz="1008" dirty="0"/>
+          </a:p>
+        </p:txBody>
+      </p:sp>
+      <p:sp>
+        <p:nvSpPr>
+          <p:cNvPr id="133" name="팀원 B"/>
+          <p:cNvSpPr txBox="1"/>
+          <p:nvPr/>
+        </p:nvSpPr>
+        <p:spPr>
+          <a:xfrm>
+            <a:off x="1670304" y="7985665"/>
+            <a:ext cx="450342" cy="176784"/>
+          </a:xfrm>
+          <a:prstGeom prst="rect">
+            <a:avLst/>
+          </a:prstGeom>
+          <a:noFill/>
+          <a:ln/>
+        </p:spPr>
+        <p:txBody>
+          <a:bodyPr wrap="none" lIns="0" tIns="0" rIns="0" bIns="0" rtlCol="0" anchor="ctr"/>
+          <a:lstStyle/>
+          <a:p>
+            <a:pPr algn="l" indent="0" marL="0">
+              <a:buNone/>
+            </a:pPr>
+            <a:r>
+              <a:rPr lang="ko-KR" altLang="en-US" sz="1200" spc="-36" kern="0" dirty="0">
                 <a:solidFill>
                   <a:srgbClr val="0B2147"/>
+                </a:solidFill>
+                <a:latin typeface="Paperlogy 8 ExtraBold" pitchFamily="34" charset="0"/>
+                <a:ea typeface="Paperlogy 8 ExtraBold" pitchFamily="34" charset="-127"/>
+                <a:cs typeface="Paperlogy 8 ExtraBold" pitchFamily="34" charset="-120"/>
+              </a:rPr>
+              <a:t>팀원 B</a:t>
+            </a:r>
+            <a:endParaRPr lang="en-US" sz="1200" dirty="0"/>
+          </a:p>
+        </p:txBody>
+      </p:sp>
+      <p:sp>
+        <p:nvSpPr>
+          <p:cNvPr id="134" name="Revit"/>
+          <p:cNvSpPr txBox="1"/>
+          <p:nvPr/>
+        </p:nvSpPr>
+        <p:spPr>
+          <a:xfrm>
+            <a:off x="1511808" y="8255413"/>
+            <a:ext cx="340709" cy="134112"/>
+          </a:xfrm>
+          <a:prstGeom prst="rect">
+            <a:avLst/>
+          </a:prstGeom>
+          <a:noFill/>
+          <a:ln/>
+        </p:spPr>
+        <p:txBody>
+          <a:bodyPr wrap="none" lIns="0" tIns="0" rIns="0" bIns="0" rtlCol="0" anchor="ctr"/>
+          <a:lstStyle/>
+          <a:p>
+            <a:pPr algn="l" indent="0" marL="0">
+              <a:buNone/>
+            </a:pPr>
+            <a:r>
+              <a:rPr lang="ko-KR" altLang="en-US" sz="864" dirty="0">
+                <a:solidFill>
+                  <a:srgbClr val="004B8D"/>
                 </a:solidFill>
                 <a:latin typeface="Paperlogy 7 Bold" pitchFamily="34" charset="0"/>
                 <a:ea typeface="Paperlogy 7 Bold" pitchFamily="34" charset="-127"/>
                 <a:cs typeface="Paperlogy 7 Bold" pitchFamily="34" charset="-120"/>
               </a:rPr>
-              <a:t>의견 조율 · 주제 확정</a:t>
-            </a:r>
-            <a:endParaRPr lang="en-US" sz="1296" dirty="0"/>
-          </a:p>
-        </p:txBody>
-      </p:sp>
-      <p:sp>
-        <p:nvSpPr>
-          <p:cNvPr id="102" name="경청 · 수상작 분석 · 교수님 조언"/>
-          <p:cNvSpPr txBox="1"/>
-          <p:nvPr/>
-        </p:nvSpPr>
-        <p:spPr>
-          <a:xfrm>
-            <a:off x="1749552" y="5524500"/>
-            <a:ext cx="1641691" cy="152400"/>
-          </a:xfrm>
-          <a:prstGeom prst="rect">
-            <a:avLst/>
-          </a:prstGeom>
-          <a:noFill/>
-          <a:ln/>
-        </p:spPr>
-        <p:txBody>
-          <a:bodyPr wrap="none" lIns="0" tIns="0" rIns="0" bIns="0" rtlCol="0" anchor="ctr"/>
-          <a:lstStyle/>
-          <a:p>
-            <a:pPr algn="l" indent="0" marL="0">
-              <a:buNone/>
-            </a:pPr>
-            <a:r>
-              <a:rPr lang="ko-KR" altLang="en-US" sz="1008" spc="-20" kern="0" dirty="0">
+              <a:t>Revit</a:t>
+            </a:r>
+            <a:endParaRPr lang="en-US" sz="864" dirty="0"/>
+          </a:p>
+        </p:txBody>
+      </p:sp>
+      <p:sp>
+        <p:nvSpPr>
+          <p:cNvPr id="135" name="기반 BIM 모델링"/>
+          <p:cNvSpPr txBox="1"/>
+          <p:nvPr/>
+        </p:nvSpPr>
+        <p:spPr>
+          <a:xfrm>
+            <a:off x="1926241" y="8243221"/>
+            <a:ext cx="898790" cy="152400"/>
+          </a:xfrm>
+          <a:prstGeom prst="rect">
+            <a:avLst/>
+          </a:prstGeom>
+          <a:noFill/>
+          <a:ln/>
+        </p:spPr>
+        <p:txBody>
+          <a:bodyPr wrap="none" lIns="0" tIns="0" rIns="0" bIns="0" rtlCol="0" anchor="ctr"/>
+          <a:lstStyle/>
+          <a:p>
+            <a:pPr algn="l" indent="0" marL="0">
+              <a:buNone/>
+            </a:pPr>
+            <a:r>
+              <a:rPr lang="ko-KR" altLang="en-US" sz="1008" spc="-25" kern="0" dirty="0">
                 <a:solidFill>
                   <a:srgbClr val="4B5568"/>
                 </a:solidFill>
@@ -3944,7 +5071,7 @@
                 <a:ea typeface="Paperlogy 6 SemiBold" pitchFamily="34" charset="-127"/>
                 <a:cs typeface="Paperlogy 6 SemiBold" pitchFamily="34" charset="-120"/>
               </a:rPr>
-              <a:t>경청 · 수상작 분석 · 교수님 조언</a:t>
+              <a:t>기반 BIM 모델링</a:t>
             </a:r>
             <a:endParaRPr lang="en-US" sz="1008" dirty="0"/>
           </a:p>
@@ -3952,30 +5079,30 @@
       </p:sp>
       <p:sp>
         <p:nvSpPr>
-          <p:cNvPr id="103" name="판단 기준 마련"/>
-          <p:cNvSpPr txBox="1"/>
-          <p:nvPr/>
-        </p:nvSpPr>
-        <p:spPr>
-          <a:xfrm>
-            <a:off x="3889629" y="5524500"/>
-            <a:ext cx="760571" cy="152400"/>
-          </a:xfrm>
-          <a:prstGeom prst="rect">
-            <a:avLst/>
-          </a:prstGeom>
-          <a:noFill/>
-          <a:ln/>
-        </p:spPr>
-        <p:txBody>
-          <a:bodyPr wrap="none" lIns="0" tIns="0" rIns="0" bIns="0" rtlCol="0" anchor="ctr"/>
-          <a:lstStyle/>
-          <a:p>
-            <a:pPr algn="l" indent="0" marL="0">
-              <a:buNone/>
-            </a:pPr>
-            <a:r>
-              <a:rPr lang="ko-KR" altLang="en-US" sz="1008" spc="-20" kern="0" dirty="0">
+          <p:cNvPr id="136" name="데이터 구축"/>
+          <p:cNvSpPr txBox="1"/>
+          <p:nvPr/>
+        </p:nvSpPr>
+        <p:spPr>
+          <a:xfrm>
+            <a:off x="1438656" y="8434102"/>
+            <a:ext cx="621030" cy="152400"/>
+          </a:xfrm>
+          <a:prstGeom prst="rect">
+            <a:avLst/>
+          </a:prstGeom>
+          <a:noFill/>
+          <a:ln/>
+        </p:spPr>
+        <p:txBody>
+          <a:bodyPr wrap="none" lIns="0" tIns="0" rIns="0" bIns="0" rtlCol="0" anchor="ctr"/>
+          <a:lstStyle/>
+          <a:p>
+            <a:pPr algn="l" indent="0" marL="0">
+              <a:buNone/>
+            </a:pPr>
+            <a:r>
+              <a:rPr lang="ko-KR" altLang="en-US" sz="1008" spc="-25" kern="0" dirty="0">
                 <a:solidFill>
                   <a:srgbClr val="4B5568"/>
                 </a:solidFill>
@@ -3983,7 +5110,7 @@
                 <a:ea typeface="Paperlogy 6 SemiBold" pitchFamily="34" charset="-127"/>
                 <a:cs typeface="Paperlogy 6 SemiBold" pitchFamily="34" charset="-120"/>
               </a:rPr>
-              <a:t>판단 기준 마련</a:t>
+              <a:t>데이터 구축</a:t>
             </a:r>
             <a:endParaRPr lang="en-US" sz="1008" dirty="0"/>
           </a:p>
@@ -3991,77 +5118,194 @@
       </p:sp>
       <p:sp>
         <p:nvSpPr>
-          <p:cNvPr id="104" name="주제 합의"/>
-          <p:cNvSpPr txBox="1"/>
-          <p:nvPr/>
-        </p:nvSpPr>
-        <p:spPr>
-          <a:xfrm>
-            <a:off x="5192744" y="5524500"/>
-            <a:ext cx="514826" cy="152400"/>
-          </a:xfrm>
-          <a:prstGeom prst="rect">
-            <a:avLst/>
-          </a:prstGeom>
-          <a:noFill/>
-          <a:ln/>
-        </p:spPr>
-        <p:txBody>
-          <a:bodyPr wrap="none" lIns="0" tIns="0" rIns="0" bIns="0" rtlCol="0" anchor="ctr"/>
-          <a:lstStyle/>
-          <a:p>
-            <a:pPr algn="l" indent="0" marL="0">
-              <a:buNone/>
-            </a:pPr>
-            <a:r>
-              <a:rPr lang="ko-KR" altLang="en-US" sz="1008" spc="-20" kern="0" dirty="0">
+          <p:cNvPr id="137" name="팀원 C"/>
+          <p:cNvSpPr txBox="1"/>
+          <p:nvPr/>
+        </p:nvSpPr>
+        <p:spPr>
+          <a:xfrm>
+            <a:off x="4456176" y="7985665"/>
+            <a:ext cx="445008" cy="176784"/>
+          </a:xfrm>
+          <a:prstGeom prst="rect">
+            <a:avLst/>
+          </a:prstGeom>
+          <a:noFill/>
+          <a:ln/>
+        </p:spPr>
+        <p:txBody>
+          <a:bodyPr wrap="none" lIns="0" tIns="0" rIns="0" bIns="0" rtlCol="0" anchor="ctr"/>
+          <a:lstStyle/>
+          <a:p>
+            <a:pPr algn="l" indent="0" marL="0">
+              <a:buNone/>
+            </a:pPr>
+            <a:r>
+              <a:rPr lang="ko-KR" altLang="en-US" sz="1200" spc="-36" kern="0" dirty="0">
+                <a:solidFill>
+                  <a:srgbClr val="0B2147"/>
+                </a:solidFill>
+                <a:latin typeface="Paperlogy 8 ExtraBold" pitchFamily="34" charset="0"/>
+                <a:ea typeface="Paperlogy 8 ExtraBold" pitchFamily="34" charset="-127"/>
+                <a:cs typeface="Paperlogy 8 ExtraBold" pitchFamily="34" charset="-120"/>
+              </a:rPr>
+              <a:t>팀원 C</a:t>
+            </a:r>
+            <a:endParaRPr lang="en-US" sz="1200" dirty="0"/>
+          </a:p>
+        </p:txBody>
+      </p:sp>
+      <p:sp>
+        <p:nvSpPr>
+          <p:cNvPr id="138" name="리모델링 적용 시나리오 구성"/>
+          <p:cNvSpPr txBox="1"/>
+          <p:nvPr/>
+        </p:nvSpPr>
+        <p:spPr>
+          <a:xfrm>
+            <a:off x="4224528" y="8243221"/>
+            <a:ext cx="1471666" cy="152400"/>
+          </a:xfrm>
+          <a:prstGeom prst="rect">
+            <a:avLst/>
+          </a:prstGeom>
+          <a:noFill/>
+          <a:ln/>
+        </p:spPr>
+        <p:txBody>
+          <a:bodyPr wrap="none" lIns="0" tIns="0" rIns="0" bIns="0" rtlCol="0" anchor="ctr"/>
+          <a:lstStyle/>
+          <a:p>
+            <a:pPr algn="l" indent="0" marL="0">
+              <a:buNone/>
+            </a:pPr>
+            <a:r>
+              <a:rPr lang="ko-KR" altLang="en-US" sz="1008" spc="-25" kern="0" dirty="0">
+                <a:solidFill>
+                  <a:srgbClr val="4B5568"/>
+                </a:solidFill>
+                <a:latin typeface="Paperlogy 6 SemiBold" pitchFamily="34" charset="0"/>
+                <a:ea typeface="Paperlogy 6 SemiBold" pitchFamily="34" charset="-127"/>
+                <a:cs typeface="Paperlogy 6 SemiBold" pitchFamily="34" charset="-120"/>
+              </a:rPr>
+              <a:t>리모델링 적용 시나리오 구성</a:t>
+            </a:r>
+            <a:endParaRPr lang="en-US" sz="1008" dirty="0"/>
+          </a:p>
+        </p:txBody>
+      </p:sp>
+      <p:sp>
+        <p:nvSpPr>
+          <p:cNvPr id="139" name="시연 영상 제작"/>
+          <p:cNvSpPr txBox="1"/>
+          <p:nvPr/>
+        </p:nvSpPr>
+        <p:spPr>
+          <a:xfrm>
+            <a:off x="4224528" y="8432673"/>
+            <a:ext cx="755428" cy="152400"/>
+          </a:xfrm>
+          <a:prstGeom prst="rect">
+            <a:avLst/>
+          </a:prstGeom>
+          <a:noFill/>
+          <a:ln/>
+        </p:spPr>
+        <p:txBody>
+          <a:bodyPr wrap="none" lIns="0" tIns="0" rIns="0" bIns="0" rtlCol="0" anchor="ctr"/>
+          <a:lstStyle/>
+          <a:p>
+            <a:pPr algn="l" indent="0" marL="0">
+              <a:buNone/>
+            </a:pPr>
+            <a:r>
+              <a:rPr lang="ko-KR" altLang="en-US" sz="1008" spc="-25" kern="0" dirty="0">
+                <a:solidFill>
+                  <a:srgbClr val="4B5568"/>
+                </a:solidFill>
+                <a:latin typeface="Paperlogy 6 SemiBold" pitchFamily="34" charset="0"/>
+                <a:ea typeface="Paperlogy 6 SemiBold" pitchFamily="34" charset="-127"/>
+                <a:cs typeface="Paperlogy 6 SemiBold" pitchFamily="34" charset="-120"/>
+              </a:rPr>
+              <a:t>시연 영상 제작</a:t>
+            </a:r>
+            <a:endParaRPr lang="en-US" sz="1008" dirty="0"/>
+          </a:p>
+        </p:txBody>
+      </p:sp>
+      <p:sp>
+        <p:nvSpPr>
+          <p:cNvPr id="140" name="04"/>
+          <p:cNvSpPr txBox="1"/>
+          <p:nvPr/>
+        </p:nvSpPr>
+        <p:spPr>
+          <a:xfrm>
+            <a:off x="1304544" y="9090565"/>
+            <a:ext cx="203930" cy="134112"/>
+          </a:xfrm>
+          <a:prstGeom prst="rect">
+            <a:avLst/>
+          </a:prstGeom>
+          <a:noFill/>
+          <a:ln/>
+        </p:spPr>
+        <p:txBody>
+          <a:bodyPr wrap="none" lIns="0" tIns="0" rIns="0" bIns="0" rtlCol="0" anchor="ctr"/>
+          <a:lstStyle/>
+          <a:p>
+            <a:pPr algn="l" indent="0" marL="0">
+              <a:buNone/>
+            </a:pPr>
+            <a:r>
+              <a:rPr lang="ko-KR" altLang="en-US" sz="864" spc="35" kern="0" dirty="0">
                 <a:solidFill>
                   <a:srgbClr val="004B8D"/>
+                </a:solidFill>
+                <a:latin typeface="Paperlogy 8 ExtraBold" pitchFamily="34" charset="0"/>
+                <a:ea typeface="Paperlogy 8 ExtraBold" pitchFamily="34" charset="-127"/>
+                <a:cs typeface="Paperlogy 8 ExtraBold" pitchFamily="34" charset="-120"/>
+              </a:rPr>
+              <a:t>04</a:t>
+            </a:r>
+            <a:endParaRPr lang="en-US" sz="864" dirty="0"/>
+          </a:p>
+        </p:txBody>
+      </p:sp>
+      <p:sp>
+        <p:nvSpPr>
+          <p:cNvPr id="141" name="RESULT"/>
+          <p:cNvSpPr txBox="1"/>
+          <p:nvPr/>
+        </p:nvSpPr>
+        <p:spPr>
+          <a:xfrm>
+            <a:off x="1727930" y="9090565"/>
+            <a:ext cx="590360" cy="134112"/>
+          </a:xfrm>
+          <a:prstGeom prst="rect">
+            <a:avLst/>
+          </a:prstGeom>
+          <a:noFill/>
+          <a:ln/>
+        </p:spPr>
+        <p:txBody>
+          <a:bodyPr wrap="none" lIns="0" tIns="0" rIns="0" bIns="0" rtlCol="0" anchor="ctr"/>
+          <a:lstStyle/>
+          <a:p>
+            <a:pPr algn="l" indent="0" marL="0">
+              <a:buNone/>
+            </a:pPr>
+            <a:r>
+              <a:rPr lang="ko-KR" altLang="en-US" sz="864" spc="138" kern="0" dirty="0">
+                <a:solidFill>
+                  <a:srgbClr val="2A78DD"/>
                 </a:solidFill>
                 <a:latin typeface="Paperlogy 7 Bold" pitchFamily="34" charset="0"/>
                 <a:ea typeface="Paperlogy 7 Bold" pitchFamily="34" charset="-127"/>
                 <a:cs typeface="Paperlogy 7 Bold" pitchFamily="34" charset="-120"/>
               </a:rPr>
-              <a:t>주제 합의</a:t>
-            </a:r>
-            <a:endParaRPr lang="en-US" sz="1008" dirty="0"/>
-          </a:p>
-        </p:txBody>
-      </p:sp>
-      <p:sp>
-        <p:nvSpPr>
-          <p:cNvPr id="105" name="03"/>
-          <p:cNvSpPr txBox="1"/>
-          <p:nvPr/>
-        </p:nvSpPr>
-        <p:spPr>
-          <a:xfrm>
-            <a:off x="1499616" y="5969318"/>
-            <a:ext cx="203930" cy="134112"/>
-          </a:xfrm>
-          <a:prstGeom prst="rect">
-            <a:avLst/>
-          </a:prstGeom>
-          <a:noFill/>
-          <a:ln/>
-        </p:spPr>
-        <p:txBody>
-          <a:bodyPr wrap="none" lIns="0" tIns="0" rIns="0" bIns="0" rtlCol="0" anchor="ctr"/>
-          <a:lstStyle/>
-          <a:p>
-            <a:pPr algn="l" indent="0" marL="0">
-              <a:buNone/>
-            </a:pPr>
-            <a:r>
-              <a:rPr lang="ko-KR" altLang="en-US" sz="864" spc="35" kern="0" dirty="0">
-                <a:solidFill>
-                  <a:srgbClr val="004B8D"/>
-                </a:solidFill>
-                <a:latin typeface="Paperlogy 8 ExtraBold" pitchFamily="34" charset="0"/>
-                <a:ea typeface="Paperlogy 8 ExtraBold" pitchFamily="34" charset="-127"/>
-                <a:cs typeface="Paperlogy 8 ExtraBold" pitchFamily="34" charset="-120"/>
-              </a:rPr>
-              <a:t>03</a:t>
+              <a:t>RESULT</a:t>
             </a:r>
             <a:endParaRPr lang="en-US" sz="864" dirty="0"/>
           </a:p>
@@ -4069,147 +5313,108 @@
       </p:sp>
       <p:sp>
         <p:nvSpPr>
-          <p:cNvPr id="106" name="ONE TEAM"/>
-          <p:cNvSpPr txBox="1"/>
-          <p:nvPr/>
-        </p:nvSpPr>
-        <p:spPr>
-          <a:xfrm>
-            <a:off x="1935194" y="5969318"/>
-            <a:ext cx="801624" cy="134112"/>
-          </a:xfrm>
-          <a:prstGeom prst="rect">
-            <a:avLst/>
-          </a:prstGeom>
-          <a:noFill/>
-          <a:ln/>
-        </p:spPr>
-        <p:txBody>
-          <a:bodyPr wrap="none" lIns="0" tIns="0" rIns="0" bIns="0" rtlCol="0" anchor="ctr"/>
-          <a:lstStyle/>
-          <a:p>
-            <a:pPr algn="l" indent="0" marL="0">
-              <a:buNone/>
-            </a:pPr>
-            <a:r>
-              <a:rPr lang="ko-KR" altLang="en-US" sz="864" spc="138" kern="0" dirty="0">
-                <a:solidFill>
-                  <a:srgbClr val="2A78DD"/>
+          <p:cNvPr id="142" name="남은 3주 내 시연 영상 완성"/>
+          <p:cNvSpPr txBox="1"/>
+          <p:nvPr/>
+        </p:nvSpPr>
+        <p:spPr>
+          <a:xfrm>
+            <a:off x="2379250" y="9063133"/>
+            <a:ext cx="1759820" cy="188976"/>
+          </a:xfrm>
+          <a:prstGeom prst="rect">
+            <a:avLst/>
+          </a:prstGeom>
+          <a:noFill/>
+          <a:ln/>
+        </p:spPr>
+        <p:txBody>
+          <a:bodyPr wrap="none" lIns="0" tIns="0" rIns="0" bIns="0" rtlCol="0" anchor="ctr"/>
+          <a:lstStyle/>
+          <a:p>
+            <a:pPr algn="l" indent="0" marL="0">
+              <a:buNone/>
+            </a:pPr>
+            <a:r>
+              <a:rPr lang="ko-KR" altLang="en-US" sz="1296" spc="-39" kern="0" dirty="0">
+                <a:solidFill>
+                  <a:srgbClr val="0B2147"/>
                 </a:solidFill>
                 <a:latin typeface="Paperlogy 7 Bold" pitchFamily="34" charset="0"/>
                 <a:ea typeface="Paperlogy 7 Bold" pitchFamily="34" charset="-127"/>
                 <a:cs typeface="Paperlogy 7 Bold" pitchFamily="34" charset="-120"/>
               </a:rPr>
-              <a:t>ONE TEAM</a:t>
-            </a:r>
-            <a:endParaRPr lang="en-US" sz="864" dirty="0"/>
-          </a:p>
-        </p:txBody>
-      </p:sp>
-      <p:sp>
-        <p:nvSpPr>
-          <p:cNvPr id="107" name="강점 기반 역할 분담 · 지속적인 공유"/>
-          <p:cNvSpPr txBox="1"/>
-          <p:nvPr/>
-        </p:nvSpPr>
-        <p:spPr>
-          <a:xfrm>
-            <a:off x="1499616" y="6152769"/>
-            <a:ext cx="2326133" cy="188976"/>
-          </a:xfrm>
-          <a:prstGeom prst="rect">
-            <a:avLst/>
-          </a:prstGeom>
-          <a:noFill/>
-          <a:ln/>
-        </p:spPr>
-        <p:txBody>
-          <a:bodyPr wrap="none" lIns="0" tIns="0" rIns="0" bIns="0" rtlCol="0" anchor="ctr"/>
-          <a:lstStyle/>
-          <a:p>
-            <a:pPr algn="l" indent="0" marL="0">
-              <a:buNone/>
-            </a:pPr>
-            <a:r>
-              <a:rPr lang="ko-KR" altLang="en-US" sz="1296" spc="-39" kern="0" dirty="0">
-                <a:solidFill>
-                  <a:srgbClr val="0B2147"/>
+              <a:t>남은 3주 내 시연 영상 완성</a:t>
+            </a:r>
+            <a:endParaRPr lang="en-US" sz="1296" dirty="0"/>
+          </a:p>
+        </p:txBody>
+      </p:sp>
+      <p:sp>
+        <p:nvSpPr>
+          <p:cNvPr id="143" name="KEY MESSAGE"/>
+          <p:cNvSpPr txBox="1"/>
+          <p:nvPr/>
+        </p:nvSpPr>
+        <p:spPr>
+          <a:xfrm>
+            <a:off x="1182624" y="9839325"/>
+            <a:ext cx="1065686" cy="134112"/>
+          </a:xfrm>
+          <a:prstGeom prst="rect">
+            <a:avLst/>
+          </a:prstGeom>
+          <a:noFill/>
+          <a:ln/>
+        </p:spPr>
+        <p:txBody>
+          <a:bodyPr wrap="none" lIns="0" tIns="0" rIns="0" bIns="0" rtlCol="0" anchor="ctr"/>
+          <a:lstStyle/>
+          <a:p>
+            <a:pPr algn="l" indent="0" marL="0">
+              <a:buNone/>
+            </a:pPr>
+            <a:r>
+              <a:rPr lang="ko-KR" altLang="en-US" sz="864" spc="138" kern="0" dirty="0">
+                <a:solidFill>
+                  <a:srgbClr val="8FD3F5"/>
                 </a:solidFill>
                 <a:latin typeface="Paperlogy 7 Bold" pitchFamily="34" charset="0"/>
                 <a:ea typeface="Paperlogy 7 Bold" pitchFamily="34" charset="-127"/>
                 <a:cs typeface="Paperlogy 7 Bold" pitchFamily="34" charset="-120"/>
               </a:rPr>
-              <a:t>강점 기반 역할 분담 · 지속적인 공유</a:t>
-            </a:r>
-            <a:endParaRPr lang="en-US" sz="1296" dirty="0"/>
-          </a:p>
-        </p:txBody>
-      </p:sp>
-      <p:sp>
-        <p:nvSpPr>
-          <p:cNvPr id="108" name="팀장"/>
-          <p:cNvSpPr txBox="1"/>
-          <p:nvPr/>
-        </p:nvSpPr>
-        <p:spPr>
-          <a:xfrm>
-            <a:off x="1877568" y="6543485"/>
-            <a:ext cx="307848" cy="176784"/>
-          </a:xfrm>
-          <a:prstGeom prst="rect">
-            <a:avLst/>
-          </a:prstGeom>
-          <a:noFill/>
-          <a:ln/>
-        </p:spPr>
-        <p:txBody>
-          <a:bodyPr wrap="none" lIns="0" tIns="0" rIns="0" bIns="0" rtlCol="0" anchor="ctr"/>
-          <a:lstStyle/>
-          <a:p>
-            <a:pPr algn="l" indent="0" marL="0">
-              <a:buNone/>
-            </a:pPr>
-            <a:r>
-              <a:rPr lang="ko-KR" altLang="en-US" sz="1200" spc="-36" kern="0" dirty="0">
-                <a:solidFill>
-                  <a:srgbClr val="0B2147"/>
-                </a:solidFill>
-                <a:latin typeface="Paperlogy 8 ExtraBold" pitchFamily="34" charset="0"/>
-                <a:ea typeface="Paperlogy 8 ExtraBold" pitchFamily="34" charset="-127"/>
-                <a:cs typeface="Paperlogy 8 ExtraBold" pitchFamily="34" charset="-120"/>
-              </a:rPr>
-              <a:t>팀장</a:t>
-            </a:r>
-            <a:endParaRPr lang="en-US" sz="1200" dirty="0"/>
-          </a:p>
-        </p:txBody>
-      </p:sp>
-      <p:sp>
-        <p:nvSpPr>
-          <p:cNvPr id="109" name="나"/>
-          <p:cNvSpPr txBox="1"/>
-          <p:nvPr/>
-        </p:nvSpPr>
-        <p:spPr>
-          <a:xfrm>
-            <a:off x="2264664" y="6568345"/>
-            <a:ext cx="144304" cy="134112"/>
-          </a:xfrm>
-          <a:prstGeom prst="rect">
-            <a:avLst/>
-          </a:prstGeom>
-          <a:noFill/>
-          <a:ln/>
-        </p:spPr>
-        <p:txBody>
-          <a:bodyPr wrap="none" lIns="0" tIns="0" rIns="0" bIns="0" rtlCol="0" anchor="ctr"/>
-          <a:lstStyle/>
-          <a:p>
-            <a:pPr algn="l" indent="0" marL="0">
-              <a:buNone/>
-            </a:pPr>
-            <a:r>
-              <a:rPr lang="ko-KR" altLang="en-US" sz="864" spc="-9" kern="0" dirty="0">
+              <a:t>KEY MESSAGE</a:t>
+            </a:r>
+            <a:endParaRPr lang="en-US" sz="864" dirty="0"/>
+          </a:p>
+        </p:txBody>
+      </p:sp>
+      <p:sp>
+        <p:nvSpPr>
+          <p:cNvPr id="144" name="서로 다른 사람을 하나의 공동 목표로 연결합니다"/>
+          <p:cNvSpPr txBox="1"/>
+          <p:nvPr/>
+        </p:nvSpPr>
+        <p:spPr>
+          <a:xfrm>
+            <a:off x="2358676" y="9792081"/>
+            <a:ext cx="3750951" cy="225552"/>
+          </a:xfrm>
+          <a:prstGeom prst="rect">
+            <a:avLst/>
+          </a:prstGeom>
+          <a:noFill/>
+          <a:ln/>
+        </p:spPr>
+        <p:txBody>
+          <a:bodyPr wrap="none" lIns="0" tIns="0" rIns="0" bIns="0" rtlCol="0" anchor="ctr"/>
+          <a:lstStyle/>
+          <a:p>
+            <a:pPr algn="l" indent="0" marL="0">
+              <a:buNone/>
+            </a:pPr>
+            <a:r>
+              <a:rPr lang="ko-KR" altLang="en-US" sz="1536" spc="-46" kern="0" dirty="0">
                 <a:solidFill>
                   <a:srgbClr val="FFFFFF"/>
                 </a:solidFill>
@@ -4217,892 +5422,34 @@
                 <a:ea typeface="Paperlogy 7 Bold" pitchFamily="34" charset="-127"/>
                 <a:cs typeface="Paperlogy 7 Bold" pitchFamily="34" charset="-120"/>
               </a:rPr>
-              <a:t>나</a:t>
-            </a:r>
-            <a:endParaRPr lang="en-US" sz="864" dirty="0"/>
-          </a:p>
-        </p:txBody>
-      </p:sp>
-      <p:sp>
-        <p:nvSpPr>
-          <p:cNvPr id="110" name="프로젝트 총괄"/>
-          <p:cNvSpPr txBox="1"/>
-          <p:nvPr/>
-        </p:nvSpPr>
-        <p:spPr>
-          <a:xfrm>
-            <a:off x="1633728" y="6813233"/>
-            <a:ext cx="730472" cy="152400"/>
-          </a:xfrm>
-          <a:prstGeom prst="rect">
-            <a:avLst/>
-          </a:prstGeom>
-          <a:noFill/>
-          <a:ln/>
-        </p:spPr>
-        <p:txBody>
-          <a:bodyPr wrap="none" lIns="0" tIns="0" rIns="0" bIns="0" rtlCol="0" anchor="ctr"/>
-          <a:lstStyle/>
-          <a:p>
-            <a:pPr algn="l" indent="0" marL="0">
-              <a:buNone/>
-            </a:pPr>
-            <a:r>
-              <a:rPr lang="ko-KR" altLang="en-US" sz="1008" spc="-25" kern="0" dirty="0">
-                <a:solidFill>
-                  <a:srgbClr val="1C2536"/>
-                </a:solidFill>
-                <a:latin typeface="Paperlogy 6 SemiBold" pitchFamily="34" charset="0"/>
-                <a:ea typeface="Paperlogy 6 SemiBold" pitchFamily="34" charset="-127"/>
-                <a:cs typeface="Paperlogy 6 SemiBold" pitchFamily="34" charset="-120"/>
-              </a:rPr>
-              <a:t>프로젝트 총괄</a:t>
-            </a:r>
-            <a:endParaRPr lang="en-US" sz="1008" dirty="0"/>
-          </a:p>
-        </p:txBody>
-      </p:sp>
-      <p:sp>
-        <p:nvSpPr>
-          <p:cNvPr id="111" name="기반 자동화 알고리즘 개발"/>
-          <p:cNvSpPr txBox="1"/>
-          <p:nvPr/>
-        </p:nvSpPr>
-        <p:spPr>
-          <a:xfrm>
-            <a:off x="2318290" y="7005257"/>
-            <a:ext cx="1355657" cy="152400"/>
-          </a:xfrm>
-          <a:prstGeom prst="rect">
-            <a:avLst/>
-          </a:prstGeom>
-          <a:noFill/>
-          <a:ln/>
-        </p:spPr>
-        <p:txBody>
-          <a:bodyPr wrap="none" lIns="0" tIns="0" rIns="0" bIns="0" rtlCol="0" anchor="ctr"/>
-          <a:lstStyle/>
-          <a:p>
-            <a:pPr algn="l" indent="0" marL="0">
-              <a:buNone/>
-            </a:pPr>
-            <a:r>
-              <a:rPr lang="ko-KR" altLang="en-US" sz="1008" spc="-25" kern="0" dirty="0">
-                <a:solidFill>
-                  <a:srgbClr val="1C2536"/>
-                </a:solidFill>
-                <a:latin typeface="Paperlogy 6 SemiBold" pitchFamily="34" charset="0"/>
-                <a:ea typeface="Paperlogy 6 SemiBold" pitchFamily="34" charset="-127"/>
-                <a:cs typeface="Paperlogy 6 SemiBold" pitchFamily="34" charset="-120"/>
-              </a:rPr>
-              <a:t>기반 자동화 알고리즘 개발</a:t>
-            </a:r>
-            <a:endParaRPr lang="en-US" sz="1008" dirty="0"/>
-          </a:p>
-        </p:txBody>
-      </p:sp>
-      <p:sp>
-        <p:nvSpPr>
-          <p:cNvPr id="112" name="Dynamo"/>
-          <p:cNvSpPr txBox="1"/>
-          <p:nvPr/>
-        </p:nvSpPr>
-        <p:spPr>
-          <a:xfrm>
-            <a:off x="1706880" y="7017449"/>
-            <a:ext cx="537686" cy="134112"/>
-          </a:xfrm>
-          <a:prstGeom prst="rect">
-            <a:avLst/>
-          </a:prstGeom>
-          <a:noFill/>
-          <a:ln/>
-        </p:spPr>
-        <p:txBody>
-          <a:bodyPr wrap="none" lIns="0" tIns="0" rIns="0" bIns="0" rtlCol="0" anchor="ctr"/>
-          <a:lstStyle/>
-          <a:p>
-            <a:pPr algn="l" indent="0" marL="0">
-              <a:buNone/>
-            </a:pPr>
-            <a:r>
-              <a:rPr lang="ko-KR" altLang="en-US" sz="864" dirty="0">
-                <a:solidFill>
-                  <a:srgbClr val="004B8D"/>
+              <a:t>서로 다른 사람을 </a:t>
+            </a:r>
+            <a:pPr algn="l" indent="0" marL="0">
+              <a:buNone/>
+            </a:pPr>
+            <a:r>
+              <a:rPr lang="ko-KR" altLang="en-US" sz="1536" spc="-46" kern="0" dirty="0">
+                <a:solidFill>
+                  <a:srgbClr val="FDBB30"/>
                 </a:solidFill>
                 <a:latin typeface="Paperlogy 7 Bold" pitchFamily="34" charset="0"/>
                 <a:ea typeface="Paperlogy 7 Bold" pitchFamily="34" charset="-127"/>
                 <a:cs typeface="Paperlogy 7 Bold" pitchFamily="34" charset="-120"/>
               </a:rPr>
-              <a:t>Dynamo</a:t>
-            </a:r>
-            <a:endParaRPr lang="en-US" sz="864" dirty="0"/>
-          </a:p>
-        </p:txBody>
-      </p:sp>
-      <p:sp>
-        <p:nvSpPr>
-          <p:cNvPr id="113" name="팀원 A"/>
-          <p:cNvSpPr txBox="1"/>
-          <p:nvPr/>
-        </p:nvSpPr>
-        <p:spPr>
-          <a:xfrm>
-            <a:off x="4700016" y="6543485"/>
-            <a:ext cx="450437" cy="176784"/>
-          </a:xfrm>
-          <a:prstGeom prst="rect">
-            <a:avLst/>
-          </a:prstGeom>
-          <a:noFill/>
-          <a:ln/>
-        </p:spPr>
-        <p:txBody>
-          <a:bodyPr wrap="none" lIns="0" tIns="0" rIns="0" bIns="0" rtlCol="0" anchor="ctr"/>
-          <a:lstStyle/>
-          <a:p>
-            <a:pPr algn="l" indent="0" marL="0">
-              <a:buNone/>
-            </a:pPr>
-            <a:r>
-              <a:rPr lang="ko-KR" altLang="en-US" sz="1200" spc="-36" kern="0" dirty="0">
-                <a:solidFill>
-                  <a:srgbClr val="0B2147"/>
-                </a:solidFill>
-                <a:latin typeface="Paperlogy 8 ExtraBold" pitchFamily="34" charset="0"/>
-                <a:ea typeface="Paperlogy 8 ExtraBold" pitchFamily="34" charset="-127"/>
-                <a:cs typeface="Paperlogy 8 ExtraBold" pitchFamily="34" charset="-120"/>
-              </a:rPr>
-              <a:t>팀원 A</a:t>
-            </a:r>
-            <a:endParaRPr lang="en-US" sz="1200" dirty="0"/>
-          </a:p>
-        </p:txBody>
-      </p:sp>
-      <p:sp>
-        <p:nvSpPr>
-          <p:cNvPr id="114" name="유닛 모듈러 설계"/>
-          <p:cNvSpPr txBox="1"/>
-          <p:nvPr/>
-        </p:nvSpPr>
-        <p:spPr>
-          <a:xfrm>
-            <a:off x="4456176" y="6813233"/>
-            <a:ext cx="865068" cy="152400"/>
-          </a:xfrm>
-          <a:prstGeom prst="rect">
-            <a:avLst/>
-          </a:prstGeom>
-          <a:noFill/>
-          <a:ln/>
-        </p:spPr>
-        <p:txBody>
-          <a:bodyPr wrap="none" lIns="0" tIns="0" rIns="0" bIns="0" rtlCol="0" anchor="ctr"/>
-          <a:lstStyle/>
-          <a:p>
-            <a:pPr algn="l" indent="0" marL="0">
-              <a:buNone/>
-            </a:pPr>
-            <a:r>
-              <a:rPr lang="ko-KR" altLang="en-US" sz="1008" spc="-25" kern="0" dirty="0">
-                <a:solidFill>
-                  <a:srgbClr val="4B5568"/>
-                </a:solidFill>
-                <a:latin typeface="Paperlogy 6 SemiBold" pitchFamily="34" charset="0"/>
-                <a:ea typeface="Paperlogy 6 SemiBold" pitchFamily="34" charset="-127"/>
-                <a:cs typeface="Paperlogy 6 SemiBold" pitchFamily="34" charset="-120"/>
-              </a:rPr>
-              <a:t>유닛 모듈러 설계</a:t>
-            </a:r>
-            <a:endParaRPr lang="en-US" sz="1008" dirty="0"/>
-          </a:p>
-        </p:txBody>
-      </p:sp>
-      <p:sp>
-        <p:nvSpPr>
-          <p:cNvPr id="115" name="배치계획"/>
-          <p:cNvSpPr txBox="1"/>
-          <p:nvPr/>
-        </p:nvSpPr>
-        <p:spPr>
-          <a:xfrm>
-            <a:off x="4456176" y="7005257"/>
-            <a:ext cx="486632" cy="152400"/>
-          </a:xfrm>
-          <a:prstGeom prst="rect">
-            <a:avLst/>
-          </a:prstGeom>
-          <a:noFill/>
-          <a:ln/>
-        </p:spPr>
-        <p:txBody>
-          <a:bodyPr wrap="none" lIns="0" tIns="0" rIns="0" bIns="0" rtlCol="0" anchor="ctr"/>
-          <a:lstStyle/>
-          <a:p>
-            <a:pPr algn="l" indent="0" marL="0">
-              <a:buNone/>
-            </a:pPr>
-            <a:r>
-              <a:rPr lang="ko-KR" altLang="en-US" sz="1008" spc="-25" kern="0" dirty="0">
-                <a:solidFill>
-                  <a:srgbClr val="4B5568"/>
-                </a:solidFill>
-                <a:latin typeface="Paperlogy 6 SemiBold" pitchFamily="34" charset="0"/>
-                <a:ea typeface="Paperlogy 6 SemiBold" pitchFamily="34" charset="-127"/>
-                <a:cs typeface="Paperlogy 6 SemiBold" pitchFamily="34" charset="-120"/>
-              </a:rPr>
-              <a:t>배치계획</a:t>
-            </a:r>
-            <a:endParaRPr lang="en-US" sz="1008" dirty="0"/>
-          </a:p>
-        </p:txBody>
-      </p:sp>
-      <p:sp>
-        <p:nvSpPr>
-          <p:cNvPr id="116" name="이틀마다 진행상황 공유 · 피드백"/>
-          <p:cNvSpPr txBox="1"/>
-          <p:nvPr/>
-        </p:nvSpPr>
-        <p:spPr>
-          <a:xfrm>
-            <a:off x="3566351" y="7354443"/>
-            <a:ext cx="1666730" cy="152400"/>
-          </a:xfrm>
-          <a:prstGeom prst="rect">
-            <a:avLst/>
-          </a:prstGeom>
-          <a:noFill/>
-          <a:ln/>
-        </p:spPr>
-        <p:txBody>
-          <a:bodyPr wrap="none" lIns="0" tIns="0" rIns="0" bIns="0" rtlCol="0" anchor="ctr"/>
-          <a:lstStyle/>
-          <a:p>
-            <a:pPr algn="l" indent="0" marL="0">
-              <a:buNone/>
-            </a:pPr>
-            <a:r>
-              <a:rPr lang="ko-KR" altLang="en-US" sz="1008" spc="-20" kern="0" dirty="0">
-                <a:solidFill>
-                  <a:srgbClr val="0B6B33"/>
+              <a:t>하나의 공동 목표</a:t>
+            </a:r>
+            <a:pPr algn="l" indent="0" marL="0">
+              <a:buNone/>
+            </a:pPr>
+            <a:r>
+              <a:rPr lang="ko-KR" altLang="en-US" sz="1536" spc="-46" kern="0" dirty="0">
+                <a:solidFill>
+                  <a:srgbClr val="FFFFFF"/>
                 </a:solidFill>
                 <a:latin typeface="Paperlogy 7 Bold" pitchFamily="34" charset="0"/>
                 <a:ea typeface="Paperlogy 7 Bold" pitchFamily="34" charset="-127"/>
                 <a:cs typeface="Paperlogy 7 Bold" pitchFamily="34" charset="-120"/>
               </a:rPr>
-              <a:t>이틀마다 진행상황 공유 · 피드백</a:t>
-            </a:r>
-            <a:endParaRPr lang="en-US" sz="1008" dirty="0"/>
-          </a:p>
-        </p:txBody>
-      </p:sp>
-      <p:sp>
-        <p:nvSpPr>
-          <p:cNvPr id="117" name="팀원 B"/>
-          <p:cNvSpPr txBox="1"/>
-          <p:nvPr/>
-        </p:nvSpPr>
-        <p:spPr>
-          <a:xfrm>
-            <a:off x="1877568" y="7709345"/>
-            <a:ext cx="450342" cy="176784"/>
-          </a:xfrm>
-          <a:prstGeom prst="rect">
-            <a:avLst/>
-          </a:prstGeom>
-          <a:noFill/>
-          <a:ln/>
-        </p:spPr>
-        <p:txBody>
-          <a:bodyPr wrap="none" lIns="0" tIns="0" rIns="0" bIns="0" rtlCol="0" anchor="ctr"/>
-          <a:lstStyle/>
-          <a:p>
-            <a:pPr algn="l" indent="0" marL="0">
-              <a:buNone/>
-            </a:pPr>
-            <a:r>
-              <a:rPr lang="ko-KR" altLang="en-US" sz="1200" spc="-36" kern="0" dirty="0">
-                <a:solidFill>
-                  <a:srgbClr val="0B2147"/>
-                </a:solidFill>
-                <a:latin typeface="Paperlogy 8 ExtraBold" pitchFamily="34" charset="0"/>
-                <a:ea typeface="Paperlogy 8 ExtraBold" pitchFamily="34" charset="-127"/>
-                <a:cs typeface="Paperlogy 8 ExtraBold" pitchFamily="34" charset="-120"/>
-              </a:rPr>
-              <a:t>팀원 B</a:t>
-            </a:r>
-            <a:endParaRPr lang="en-US" sz="1200" dirty="0"/>
-          </a:p>
-        </p:txBody>
-      </p:sp>
-      <p:sp>
-        <p:nvSpPr>
-          <p:cNvPr id="118" name="Revit"/>
-          <p:cNvSpPr txBox="1"/>
-          <p:nvPr/>
-        </p:nvSpPr>
-        <p:spPr>
-          <a:xfrm>
-            <a:off x="1706880" y="7991285"/>
-            <a:ext cx="340709" cy="134112"/>
-          </a:xfrm>
-          <a:prstGeom prst="rect">
-            <a:avLst/>
-          </a:prstGeom>
-          <a:noFill/>
-          <a:ln/>
-        </p:spPr>
-        <p:txBody>
-          <a:bodyPr wrap="none" lIns="0" tIns="0" rIns="0" bIns="0" rtlCol="0" anchor="ctr"/>
-          <a:lstStyle/>
-          <a:p>
-            <a:pPr algn="l" indent="0" marL="0">
-              <a:buNone/>
-            </a:pPr>
-            <a:r>
-              <a:rPr lang="ko-KR" altLang="en-US" sz="864" dirty="0">
-                <a:solidFill>
-                  <a:srgbClr val="004B8D"/>
-                </a:solidFill>
-                <a:latin typeface="Paperlogy 7 Bold" pitchFamily="34" charset="0"/>
-                <a:ea typeface="Paperlogy 7 Bold" pitchFamily="34" charset="-127"/>
-                <a:cs typeface="Paperlogy 7 Bold" pitchFamily="34" charset="-120"/>
-              </a:rPr>
-              <a:t>Revit</a:t>
-            </a:r>
-            <a:endParaRPr lang="en-US" sz="864" dirty="0"/>
-          </a:p>
-        </p:txBody>
-      </p:sp>
-      <p:sp>
-        <p:nvSpPr>
-          <p:cNvPr id="119" name="기반 BIM 모델링"/>
-          <p:cNvSpPr txBox="1"/>
-          <p:nvPr/>
-        </p:nvSpPr>
-        <p:spPr>
-          <a:xfrm>
-            <a:off x="2121313" y="7979093"/>
-            <a:ext cx="898790" cy="152400"/>
-          </a:xfrm>
-          <a:prstGeom prst="rect">
-            <a:avLst/>
-          </a:prstGeom>
-          <a:noFill/>
-          <a:ln/>
-        </p:spPr>
-        <p:txBody>
-          <a:bodyPr wrap="none" lIns="0" tIns="0" rIns="0" bIns="0" rtlCol="0" anchor="ctr"/>
-          <a:lstStyle/>
-          <a:p>
-            <a:pPr algn="l" indent="0" marL="0">
-              <a:buNone/>
-            </a:pPr>
-            <a:r>
-              <a:rPr lang="ko-KR" altLang="en-US" sz="1008" spc="-25" kern="0" dirty="0">
-                <a:solidFill>
-                  <a:srgbClr val="4B5568"/>
-                </a:solidFill>
-                <a:latin typeface="Paperlogy 6 SemiBold" pitchFamily="34" charset="0"/>
-                <a:ea typeface="Paperlogy 6 SemiBold" pitchFamily="34" charset="-127"/>
-                <a:cs typeface="Paperlogy 6 SemiBold" pitchFamily="34" charset="-120"/>
-              </a:rPr>
-              <a:t>기반 BIM 모델링</a:t>
-            </a:r>
-            <a:endParaRPr lang="en-US" sz="1008" dirty="0"/>
-          </a:p>
-        </p:txBody>
-      </p:sp>
-      <p:sp>
-        <p:nvSpPr>
-          <p:cNvPr id="120" name="데이터 구축"/>
-          <p:cNvSpPr txBox="1"/>
-          <p:nvPr/>
-        </p:nvSpPr>
-        <p:spPr>
-          <a:xfrm>
-            <a:off x="1633728" y="8171117"/>
-            <a:ext cx="621030" cy="152400"/>
-          </a:xfrm>
-          <a:prstGeom prst="rect">
-            <a:avLst/>
-          </a:prstGeom>
-          <a:noFill/>
-          <a:ln/>
-        </p:spPr>
-        <p:txBody>
-          <a:bodyPr wrap="none" lIns="0" tIns="0" rIns="0" bIns="0" rtlCol="0" anchor="ctr"/>
-          <a:lstStyle/>
-          <a:p>
-            <a:pPr algn="l" indent="0" marL="0">
-              <a:buNone/>
-            </a:pPr>
-            <a:r>
-              <a:rPr lang="ko-KR" altLang="en-US" sz="1008" spc="-25" kern="0" dirty="0">
-                <a:solidFill>
-                  <a:srgbClr val="4B5568"/>
-                </a:solidFill>
-                <a:latin typeface="Paperlogy 6 SemiBold" pitchFamily="34" charset="0"/>
-                <a:ea typeface="Paperlogy 6 SemiBold" pitchFamily="34" charset="-127"/>
-                <a:cs typeface="Paperlogy 6 SemiBold" pitchFamily="34" charset="-120"/>
-              </a:rPr>
-              <a:t>데이터 구축</a:t>
-            </a:r>
-            <a:endParaRPr lang="en-US" sz="1008" dirty="0"/>
-          </a:p>
-        </p:txBody>
-      </p:sp>
-      <p:sp>
-        <p:nvSpPr>
-          <p:cNvPr id="121" name="팀원 C"/>
-          <p:cNvSpPr txBox="1"/>
-          <p:nvPr/>
-        </p:nvSpPr>
-        <p:spPr>
-          <a:xfrm>
-            <a:off x="4700016" y="7709345"/>
-            <a:ext cx="445008" cy="176784"/>
-          </a:xfrm>
-          <a:prstGeom prst="rect">
-            <a:avLst/>
-          </a:prstGeom>
-          <a:noFill/>
-          <a:ln/>
-        </p:spPr>
-        <p:txBody>
-          <a:bodyPr wrap="none" lIns="0" tIns="0" rIns="0" bIns="0" rtlCol="0" anchor="ctr"/>
-          <a:lstStyle/>
-          <a:p>
-            <a:pPr algn="l" indent="0" marL="0">
-              <a:buNone/>
-            </a:pPr>
-            <a:r>
-              <a:rPr lang="ko-KR" altLang="en-US" sz="1200" spc="-36" kern="0" dirty="0">
-                <a:solidFill>
-                  <a:srgbClr val="0B2147"/>
-                </a:solidFill>
-                <a:latin typeface="Paperlogy 8 ExtraBold" pitchFamily="34" charset="0"/>
-                <a:ea typeface="Paperlogy 8 ExtraBold" pitchFamily="34" charset="-127"/>
-                <a:cs typeface="Paperlogy 8 ExtraBold" pitchFamily="34" charset="-120"/>
-              </a:rPr>
-              <a:t>팀원 C</a:t>
-            </a:r>
-            <a:endParaRPr lang="en-US" sz="1200" dirty="0"/>
-          </a:p>
-        </p:txBody>
-      </p:sp>
-      <p:sp>
-        <p:nvSpPr>
-          <p:cNvPr id="122" name="리모델링 적용 시나리오 구성"/>
-          <p:cNvSpPr txBox="1"/>
-          <p:nvPr/>
-        </p:nvSpPr>
-        <p:spPr>
-          <a:xfrm>
-            <a:off x="4456176" y="7979093"/>
-            <a:ext cx="1471666" cy="152400"/>
-          </a:xfrm>
-          <a:prstGeom prst="rect">
-            <a:avLst/>
-          </a:prstGeom>
-          <a:noFill/>
-          <a:ln/>
-        </p:spPr>
-        <p:txBody>
-          <a:bodyPr wrap="none" lIns="0" tIns="0" rIns="0" bIns="0" rtlCol="0" anchor="ctr"/>
-          <a:lstStyle/>
-          <a:p>
-            <a:pPr algn="l" indent="0" marL="0">
-              <a:buNone/>
-            </a:pPr>
-            <a:r>
-              <a:rPr lang="ko-KR" altLang="en-US" sz="1008" spc="-25" kern="0" dirty="0">
-                <a:solidFill>
-                  <a:srgbClr val="4B5568"/>
-                </a:solidFill>
-                <a:latin typeface="Paperlogy 6 SemiBold" pitchFamily="34" charset="0"/>
-                <a:ea typeface="Paperlogy 6 SemiBold" pitchFamily="34" charset="-127"/>
-                <a:cs typeface="Paperlogy 6 SemiBold" pitchFamily="34" charset="-120"/>
-              </a:rPr>
-              <a:t>리모델링 적용 시나리오 구성</a:t>
-            </a:r>
-            <a:endParaRPr lang="en-US" sz="1008" dirty="0"/>
-          </a:p>
-        </p:txBody>
-      </p:sp>
-      <p:sp>
-        <p:nvSpPr>
-          <p:cNvPr id="123" name="시연 영상 제작"/>
-          <p:cNvSpPr txBox="1"/>
-          <p:nvPr/>
-        </p:nvSpPr>
-        <p:spPr>
-          <a:xfrm>
-            <a:off x="4456176" y="8171117"/>
-            <a:ext cx="755428" cy="152400"/>
-          </a:xfrm>
-          <a:prstGeom prst="rect">
-            <a:avLst/>
-          </a:prstGeom>
-          <a:noFill/>
-          <a:ln/>
-        </p:spPr>
-        <p:txBody>
-          <a:bodyPr wrap="none" lIns="0" tIns="0" rIns="0" bIns="0" rtlCol="0" anchor="ctr"/>
-          <a:lstStyle/>
-          <a:p>
-            <a:pPr algn="l" indent="0" marL="0">
-              <a:buNone/>
-            </a:pPr>
-            <a:r>
-              <a:rPr lang="ko-KR" altLang="en-US" sz="1008" spc="-25" kern="0" dirty="0">
-                <a:solidFill>
-                  <a:srgbClr val="4B5568"/>
-                </a:solidFill>
-                <a:latin typeface="Paperlogy 6 SemiBold" pitchFamily="34" charset="0"/>
-                <a:ea typeface="Paperlogy 6 SemiBold" pitchFamily="34" charset="-127"/>
-                <a:cs typeface="Paperlogy 6 SemiBold" pitchFamily="34" charset="-120"/>
-              </a:rPr>
-              <a:t>시연 영상 제작</a:t>
-            </a:r>
-            <a:endParaRPr lang="en-US" sz="1008" dirty="0"/>
-          </a:p>
-        </p:txBody>
-      </p:sp>
-      <p:sp>
-        <p:nvSpPr>
-          <p:cNvPr id="124" name="장려상"/>
-          <p:cNvSpPr txBox="1"/>
-          <p:nvPr/>
-        </p:nvSpPr>
-        <p:spPr>
-          <a:xfrm>
-            <a:off x="865061" y="8922115"/>
-            <a:ext cx="328613" cy="134112"/>
-          </a:xfrm>
-          <a:prstGeom prst="rect">
-            <a:avLst/>
-          </a:prstGeom>
-          <a:noFill/>
-          <a:ln/>
-        </p:spPr>
-        <p:txBody>
-          <a:bodyPr wrap="none" lIns="0" tIns="0" rIns="0" bIns="0" rtlCol="0" anchor="ctr"/>
-          <a:lstStyle/>
-          <a:p>
-            <a:pPr algn="ctr" indent="0" marL="0">
-              <a:buNone/>
-            </a:pPr>
-            <a:r>
-              <a:rPr lang="ko-KR" altLang="en-US" sz="864" spc="-26" kern="0" dirty="0">
-                <a:solidFill>
-                  <a:srgbClr val="0B2147"/>
-                </a:solidFill>
-                <a:latin typeface="Paperlogy 8 ExtraBold" pitchFamily="34" charset="0"/>
-                <a:ea typeface="Paperlogy 8 ExtraBold" pitchFamily="34" charset="-127"/>
-                <a:cs typeface="Paperlogy 8 ExtraBold" pitchFamily="34" charset="-120"/>
-              </a:rPr>
-              <a:t>장려상</a:t>
-            </a:r>
-            <a:endParaRPr lang="en-US" sz="864" dirty="0"/>
-          </a:p>
-        </p:txBody>
-      </p:sp>
-      <p:sp>
-        <p:nvSpPr>
-          <p:cNvPr id="125" name="04"/>
-          <p:cNvSpPr txBox="1"/>
-          <p:nvPr/>
-        </p:nvSpPr>
-        <p:spPr>
-          <a:xfrm>
-            <a:off x="1499616" y="8666417"/>
-            <a:ext cx="203930" cy="134112"/>
-          </a:xfrm>
-          <a:prstGeom prst="rect">
-            <a:avLst/>
-          </a:prstGeom>
-          <a:noFill/>
-          <a:ln/>
-        </p:spPr>
-        <p:txBody>
-          <a:bodyPr wrap="none" lIns="0" tIns="0" rIns="0" bIns="0" rtlCol="0" anchor="ctr"/>
-          <a:lstStyle/>
-          <a:p>
-            <a:pPr algn="l" indent="0" marL="0">
-              <a:buNone/>
-            </a:pPr>
-            <a:r>
-              <a:rPr lang="ko-KR" altLang="en-US" sz="864" spc="35" kern="0" dirty="0">
-                <a:solidFill>
-                  <a:srgbClr val="004B8D"/>
-                </a:solidFill>
-                <a:latin typeface="Paperlogy 8 ExtraBold" pitchFamily="34" charset="0"/>
-                <a:ea typeface="Paperlogy 8 ExtraBold" pitchFamily="34" charset="-127"/>
-                <a:cs typeface="Paperlogy 8 ExtraBold" pitchFamily="34" charset="-120"/>
-              </a:rPr>
-              <a:t>04</a:t>
-            </a:r>
-            <a:endParaRPr lang="en-US" sz="864" dirty="0"/>
-          </a:p>
-        </p:txBody>
-      </p:sp>
-      <p:sp>
-        <p:nvSpPr>
-          <p:cNvPr id="126" name="RESULT"/>
-          <p:cNvSpPr txBox="1"/>
-          <p:nvPr/>
-        </p:nvSpPr>
-        <p:spPr>
-          <a:xfrm>
-            <a:off x="1935194" y="8666417"/>
-            <a:ext cx="590360" cy="134112"/>
-          </a:xfrm>
-          <a:prstGeom prst="rect">
-            <a:avLst/>
-          </a:prstGeom>
-          <a:noFill/>
-          <a:ln/>
-        </p:spPr>
-        <p:txBody>
-          <a:bodyPr wrap="none" lIns="0" tIns="0" rIns="0" bIns="0" rtlCol="0" anchor="ctr"/>
-          <a:lstStyle/>
-          <a:p>
-            <a:pPr algn="l" indent="0" marL="0">
-              <a:buNone/>
-            </a:pPr>
-            <a:r>
-              <a:rPr lang="ko-KR" altLang="en-US" sz="864" spc="138" kern="0" dirty="0">
-                <a:solidFill>
-                  <a:srgbClr val="2A78DD"/>
-                </a:solidFill>
-                <a:latin typeface="Paperlogy 7 Bold" pitchFamily="34" charset="0"/>
-                <a:ea typeface="Paperlogy 7 Bold" pitchFamily="34" charset="-127"/>
-                <a:cs typeface="Paperlogy 7 Bold" pitchFamily="34" charset="-120"/>
-              </a:rPr>
-              <a:t>RESULT</a:t>
-            </a:r>
-            <a:endParaRPr lang="en-US" sz="864" dirty="0"/>
-          </a:p>
-        </p:txBody>
-      </p:sp>
-      <p:sp>
-        <p:nvSpPr>
-          <p:cNvPr id="127" name="프로젝트 완성 · 장려상 수상"/>
-          <p:cNvSpPr txBox="1"/>
-          <p:nvPr/>
-        </p:nvSpPr>
-        <p:spPr>
-          <a:xfrm>
-            <a:off x="1499616" y="8849868"/>
-            <a:ext cx="1814947" cy="188976"/>
-          </a:xfrm>
-          <a:prstGeom prst="rect">
-            <a:avLst/>
-          </a:prstGeom>
-          <a:noFill/>
-          <a:ln/>
-        </p:spPr>
-        <p:txBody>
-          <a:bodyPr wrap="none" lIns="0" tIns="0" rIns="0" bIns="0" rtlCol="0" anchor="ctr"/>
-          <a:lstStyle/>
-          <a:p>
-            <a:pPr algn="l" indent="0" marL="0">
-              <a:buNone/>
-            </a:pPr>
-            <a:r>
-              <a:rPr lang="ko-KR" altLang="en-US" sz="1296" spc="-39" kern="0" dirty="0">
-                <a:solidFill>
-                  <a:srgbClr val="0B2147"/>
-                </a:solidFill>
-                <a:latin typeface="Paperlogy 7 Bold" pitchFamily="34" charset="0"/>
-                <a:ea typeface="Paperlogy 7 Bold" pitchFamily="34" charset="-127"/>
-                <a:cs typeface="Paperlogy 7 Bold" pitchFamily="34" charset="-120"/>
-              </a:rPr>
-              <a:t>프로젝트 완성 · 장려상 수상</a:t>
-            </a:r>
-            <a:endParaRPr lang="en-US" sz="1296" dirty="0"/>
-          </a:p>
-        </p:txBody>
-      </p:sp>
-      <p:sp>
-        <p:nvSpPr>
-          <p:cNvPr id="128" name="남은 3주 내 시연 영상 완성"/>
-          <p:cNvSpPr txBox="1"/>
-          <p:nvPr/>
-        </p:nvSpPr>
-        <p:spPr>
-          <a:xfrm>
-            <a:off x="1804416" y="9172194"/>
-            <a:ext cx="1390490" cy="152400"/>
-          </a:xfrm>
-          <a:prstGeom prst="rect">
-            <a:avLst/>
-          </a:prstGeom>
-          <a:noFill/>
-          <a:ln/>
-        </p:spPr>
-        <p:txBody>
-          <a:bodyPr wrap="none" lIns="0" tIns="0" rIns="0" bIns="0" rtlCol="0" anchor="ctr"/>
-          <a:lstStyle/>
-          <a:p>
-            <a:pPr algn="l" indent="0" marL="0">
-              <a:buNone/>
-            </a:pPr>
-            <a:r>
-              <a:rPr lang="ko-KR" altLang="en-US" sz="1008" spc="-20" kern="0" dirty="0">
-                <a:solidFill>
-                  <a:srgbClr val="8A5A00"/>
-                </a:solidFill>
-                <a:latin typeface="Paperlogy 7 Bold" pitchFamily="34" charset="0"/>
-                <a:ea typeface="Paperlogy 7 Bold" pitchFamily="34" charset="-127"/>
-                <a:cs typeface="Paperlogy 7 Bold" pitchFamily="34" charset="-120"/>
-              </a:rPr>
-              <a:t>남은 3주 내 시연 영상 완성</a:t>
-            </a:r>
-            <a:endParaRPr lang="en-US" sz="1008" dirty="0"/>
-          </a:p>
-        </p:txBody>
-      </p:sp>
-      <p:sp>
-        <p:nvSpPr>
-          <p:cNvPr id="129" name="학생 BIM 경진대회 장려상"/>
-          <p:cNvSpPr txBox="1"/>
-          <p:nvPr/>
-        </p:nvSpPr>
-        <p:spPr>
-          <a:xfrm>
-            <a:off x="3561207" y="9172194"/>
-            <a:ext cx="1401495" cy="152400"/>
-          </a:xfrm>
-          <a:prstGeom prst="rect">
-            <a:avLst/>
-          </a:prstGeom>
-          <a:noFill/>
-          <a:ln/>
-        </p:spPr>
-        <p:txBody>
-          <a:bodyPr wrap="none" lIns="0" tIns="0" rIns="0" bIns="0" rtlCol="0" anchor="ctr"/>
-          <a:lstStyle/>
-          <a:p>
-            <a:pPr algn="l" indent="0" marL="0">
-              <a:buNone/>
-            </a:pPr>
-            <a:r>
-              <a:rPr lang="ko-KR" altLang="en-US" sz="1008" spc="-20" kern="0" dirty="0">
-                <a:solidFill>
-                  <a:srgbClr val="8A5A00"/>
-                </a:solidFill>
-                <a:latin typeface="Paperlogy 7 Bold" pitchFamily="34" charset="0"/>
-                <a:ea typeface="Paperlogy 7 Bold" pitchFamily="34" charset="-127"/>
-                <a:cs typeface="Paperlogy 7 Bold" pitchFamily="34" charset="-120"/>
-              </a:rPr>
-              <a:t>학생 BIM 경진대회 장려상</a:t>
-            </a:r>
-            <a:endParaRPr lang="en-US" sz="1008" dirty="0"/>
-          </a:p>
-        </p:txBody>
-      </p:sp>
-      <p:sp>
-        <p:nvSpPr>
-          <p:cNvPr id="130" name="KEY MESSAGE"/>
-          <p:cNvSpPr txBox="1"/>
-          <p:nvPr/>
-        </p:nvSpPr>
-        <p:spPr>
-          <a:xfrm>
-            <a:off x="1182624" y="9790557"/>
-            <a:ext cx="1065686" cy="134112"/>
-          </a:xfrm>
-          <a:prstGeom prst="rect">
-            <a:avLst/>
-          </a:prstGeom>
-          <a:noFill/>
-          <a:ln/>
-        </p:spPr>
-        <p:txBody>
-          <a:bodyPr wrap="none" lIns="0" tIns="0" rIns="0" bIns="0" rtlCol="0" anchor="ctr"/>
-          <a:lstStyle/>
-          <a:p>
-            <a:pPr algn="l" indent="0" marL="0">
-              <a:buNone/>
-            </a:pPr>
-            <a:r>
-              <a:rPr lang="ko-KR" altLang="en-US" sz="864" spc="138" kern="0" dirty="0">
-                <a:solidFill>
-                  <a:srgbClr val="8FD3F5"/>
-                </a:solidFill>
-                <a:latin typeface="Paperlogy 7 Bold" pitchFamily="34" charset="0"/>
-                <a:ea typeface="Paperlogy 7 Bold" pitchFamily="34" charset="-127"/>
-                <a:cs typeface="Paperlogy 7 Bold" pitchFamily="34" charset="-120"/>
-              </a:rPr>
-              <a:t>KEY MESSAGE</a:t>
-            </a:r>
-            <a:endParaRPr lang="en-US" sz="864" dirty="0"/>
-          </a:p>
-        </p:txBody>
-      </p:sp>
-      <p:sp>
-        <p:nvSpPr>
-          <p:cNvPr id="131" name="서로 다른 사람을 하나의 공동 목표로 연결합니다"/>
-          <p:cNvSpPr txBox="1"/>
-          <p:nvPr/>
-        </p:nvSpPr>
-        <p:spPr>
-          <a:xfrm>
-            <a:off x="2358676" y="9743313"/>
-            <a:ext cx="3750951" cy="225552"/>
-          </a:xfrm>
-          <a:prstGeom prst="rect">
-            <a:avLst/>
-          </a:prstGeom>
-          <a:noFill/>
-          <a:ln/>
-        </p:spPr>
-        <p:txBody>
-          <a:bodyPr wrap="none" lIns="0" tIns="0" rIns="0" bIns="0" rtlCol="0" anchor="ctr"/>
-          <a:lstStyle/>
-          <a:p>
-            <a:pPr algn="l" indent="0" marL="0">
-              <a:buNone/>
-            </a:pPr>
-            <a:r>
-              <a:rPr lang="ko-KR" altLang="en-US" sz="1536" spc="-46" kern="0" dirty="0">
-                <a:solidFill>
-                  <a:srgbClr val="FFFFFF"/>
-                </a:solidFill>
-                <a:latin typeface="Paperlogy 7 Bold" pitchFamily="34" charset="0"/>
-                <a:ea typeface="Paperlogy 7 Bold" pitchFamily="34" charset="-127"/>
-                <a:cs typeface="Paperlogy 7 Bold" pitchFamily="34" charset="-120"/>
-              </a:rPr>
-              <a:t>서로 다른 사람을 </a:t>
-            </a:r>
-            <a:pPr algn="l" indent="0" marL="0">
-              <a:buNone/>
-            </a:pPr>
-            <a:r>
-              <a:rPr lang="ko-KR" altLang="en-US" sz="1536" spc="-46" kern="0" dirty="0">
-                <a:solidFill>
-                  <a:srgbClr val="FDBB30"/>
-                </a:solidFill>
-                <a:latin typeface="Paperlogy 7 Bold" pitchFamily="34" charset="0"/>
-                <a:ea typeface="Paperlogy 7 Bold" pitchFamily="34" charset="-127"/>
-                <a:cs typeface="Paperlogy 7 Bold" pitchFamily="34" charset="-120"/>
-              </a:rPr>
-              <a:t>하나의 공동 목표</a:t>
-            </a:r>
-            <a:pPr algn="l" indent="0" marL="0">
-              <a:buNone/>
-            </a:pPr>
-            <a:r>
-              <a:rPr lang="ko-KR" altLang="en-US" sz="1536" spc="-46" kern="0" dirty="0">
-                <a:solidFill>
-                  <a:srgbClr val="FFFFFF"/>
-                </a:solidFill>
-                <a:latin typeface="Paperlogy 7 Bold" pitchFamily="34" charset="0"/>
-                <a:ea typeface="Paperlogy 7 Bold" pitchFamily="34" charset="-127"/>
-                <a:cs typeface="Paperlogy 7 Bold" pitchFamily="34" charset="-120"/>
-              </a:rPr>
               <a:t>로 연결합니다</a:t>
             </a:r>
             <a:endParaRPr lang="en-US" sz="1536" dirty="0"/>
@@ -5111,7 +5458,7 @@
       </p:sp>
       <p:sp>
         <p:nvSpPr>
-          <p:cNvPr id="132" name="2026년 하반기 신입사원 공개채용"/>
+          <p:cNvPr id="145" name="2026년 하반기 신입사원 공개채용"/>
           <p:cNvSpPr txBox="1"/>
           <p:nvPr/>
         </p:nvSpPr>
@@ -5150,7 +5497,7 @@
       </p:sp>
       <p:sp>
         <p:nvSpPr>
-          <p:cNvPr id="133" name="01 / 03"/>
+          <p:cNvPr id="146" name="01 / 03"/>
           <p:cNvSpPr txBox="1"/>
           <p:nvPr/>
         </p:nvSpPr>

--- a/hec-pt/pptx/portrait.pptx
+++ b/hec-pt/pptx/portrait.pptx
@@ -1177,102 +1177,9 @@
           </a:prstGeom>
         </p:spPr>
       </p:pic>
-      <p:sp>
-        <p:nvSpPr>
-          <p:cNvPr id="8" name="p1p-proj"/>
-          <p:cNvSpPr/>
-          <p:nvPr/>
-        </p:nvSpPr>
-        <p:spPr>
-          <a:xfrm>
-            <a:off x="518160" y="2102739"/>
-            <a:ext cx="6522720" cy="2731008"/>
-          </a:xfrm>
-          <a:prstGeom prst="roundRect">
-            <a:avLst>
-              <a:gd name="adj" fmla="val 4688"/>
-            </a:avLst>
-          </a:prstGeom>
-          <a:solidFill>
-            <a:srgbClr val="FFFFFF"/>
-          </a:solidFill>
-          <a:ln w="12192">
-            <a:solidFill>
-              <a:srgbClr val="D8E0EB"/>
-            </a:solidFill>
-            <a:prstDash val="solid"/>
-          </a:ln>
-        </p:spPr>
-      </p:sp>
-      <p:sp>
-        <p:nvSpPr>
-          <p:cNvPr id="9" name="p1p-tag tech"/>
-          <p:cNvSpPr/>
-          <p:nvPr/>
-        </p:nvSpPr>
-        <p:spPr>
-          <a:xfrm>
-            <a:off x="1499807" y="2218563"/>
-            <a:ext cx="1023176" cy="207264"/>
-          </a:xfrm>
-          <a:prstGeom prst="roundRect">
-            <a:avLst>
-              <a:gd name="adj" fmla="val 50000"/>
-            </a:avLst>
-          </a:prstGeom>
-          <a:solidFill>
-            <a:srgbClr val="EEF4FC"/>
-          </a:solidFill>
-          <a:ln/>
-        </p:spPr>
-      </p:sp>
-      <p:sp>
-        <p:nvSpPr>
-          <p:cNvPr id="10" name="p1p-tag people"/>
-          <p:cNvSpPr/>
-          <p:nvPr/>
-        </p:nvSpPr>
-        <p:spPr>
-          <a:xfrm>
-            <a:off x="2583942" y="2218563"/>
-            <a:ext cx="468916" cy="207264"/>
-          </a:xfrm>
-          <a:prstGeom prst="roundRect">
-            <a:avLst>
-              <a:gd name="adj" fmla="val 50000"/>
-            </a:avLst>
-          </a:prstGeom>
-          <a:solidFill>
-            <a:srgbClr val="E5F6EC"/>
-          </a:solidFill>
-          <a:ln/>
-        </p:spPr>
-      </p:sp>
-      <p:sp>
-        <p:nvSpPr>
-          <p:cNvPr id="11" name="p1p-tag people"/>
-          <p:cNvSpPr/>
-          <p:nvPr/>
-        </p:nvSpPr>
-        <p:spPr>
-          <a:xfrm>
-            <a:off x="3113818" y="2218563"/>
-            <a:ext cx="373856" cy="207264"/>
-          </a:xfrm>
-          <a:prstGeom prst="roundRect">
-            <a:avLst>
-              <a:gd name="adj" fmla="val 50000"/>
-            </a:avLst>
-          </a:prstGeom>
-          <a:solidFill>
-            <a:srgbClr val="E5F6EC"/>
-          </a:solidFill>
-          <a:ln/>
-        </p:spPr>
-      </p:sp>
       <p:pic>
         <p:nvPicPr>
-          <p:cNvPr id="12" name="p1p-desc-box" descr="p1p-desc-box">    </p:cNvPr>
+          <p:cNvPr id="8" name="p1p-line" descr="p1p-line">    </p:cNvPr>
           <p:cNvPicPr>
             <a:picLocks noChangeAspect="1"/>
           </p:cNvPicPr>
@@ -1286,86 +1193,17 @@
         </p:blipFill>
         <p:spPr>
           <a:xfrm>
-            <a:off x="3707130" y="2444242"/>
-            <a:ext cx="12192" cy="591312"/>
+            <a:off x="637032" y="2230755"/>
+            <a:ext cx="22352" cy="5498592"/>
           </a:xfrm>
           <a:prstGeom prst="rect">
             <a:avLst/>
           </a:prstGeom>
         </p:spPr>
       </p:pic>
-      <p:sp>
-        <p:nvSpPr>
-          <p:cNvPr id="13" name="p1p-hero"/>
-          <p:cNvSpPr/>
-          <p:nvPr/>
-        </p:nvSpPr>
-        <p:spPr>
-          <a:xfrm>
-            <a:off x="524256" y="3145155"/>
-            <a:ext cx="6510528" cy="1682496"/>
-          </a:xfrm>
-          <a:prstGeom prst="rect">
-            <a:avLst/>
-          </a:prstGeom>
-          <a:solidFill>
-            <a:srgbClr val="EEF4FC"/>
-          </a:solidFill>
-          <a:ln/>
-        </p:spPr>
-      </p:sp>
-      <p:sp>
-        <p:nvSpPr>
-          <p:cNvPr id="14" name="p1p-vid"/>
-          <p:cNvSpPr/>
-          <p:nvPr/>
-        </p:nvSpPr>
-        <p:spPr>
-          <a:xfrm>
-            <a:off x="737616" y="3273171"/>
-            <a:ext cx="2548128" cy="1426464"/>
-          </a:xfrm>
-          <a:prstGeom prst="roundRect">
-            <a:avLst>
-              <a:gd name="adj" fmla="val 6410"/>
-            </a:avLst>
-          </a:prstGeom>
-          <a:solidFill>
-            <a:srgbClr val="FFFFFF"/>
-          </a:solidFill>
-          <a:ln w="12192">
-            <a:solidFill>
-              <a:srgbClr val="C3CEDD"/>
-            </a:solidFill>
-            <a:prstDash val="solid"/>
-          </a:ln>
-        </p:spPr>
-      </p:sp>
-      <p:sp>
-        <p:nvSpPr>
-          <p:cNvPr id="15" name="p1p-pan"/>
-          <p:cNvSpPr/>
-          <p:nvPr/>
-        </p:nvSpPr>
-        <p:spPr>
-          <a:xfrm>
-            <a:off x="816864" y="3352419"/>
-            <a:ext cx="755904" cy="1133856"/>
-          </a:xfrm>
-          <a:prstGeom prst="roundRect">
-            <a:avLst>
-              <a:gd name="adj" fmla="val 8065"/>
-            </a:avLst>
-          </a:prstGeom>
-          <a:solidFill>
-            <a:srgbClr val="E9F6FD"/>
-          </a:solidFill>
-          <a:ln/>
-        </p:spPr>
-      </p:sp>
       <p:pic>
         <p:nvPicPr>
-          <p:cNvPr id="16" name="svg" descr="svg">    </p:cNvPr>
+          <p:cNvPr id="9" name="ring solid p1p-no" descr="ring solid p1p-no">    </p:cNvPr>
           <p:cNvPicPr>
             <a:picLocks noChangeAspect="1"/>
           </p:cNvPicPr>
@@ -1379,8 +1217,8 @@
         </p:blipFill>
         <p:spPr>
           <a:xfrm>
-            <a:off x="1046480" y="3437763"/>
-            <a:ext cx="296672" cy="258064"/>
+            <a:off x="481584" y="2066163"/>
+            <a:ext cx="329184" cy="329184"/>
           </a:xfrm>
           <a:prstGeom prst="rect">
             <a:avLst/>
@@ -1389,29 +1227,27 @@
       </p:pic>
       <p:sp>
         <p:nvSpPr>
-          <p:cNvPr id="17" name="p1p-pan"/>
+          <p:cNvPr id="10" name="i"/>
           <p:cNvSpPr/>
           <p:nvPr/>
         </p:nvSpPr>
         <p:spPr>
           <a:xfrm>
-            <a:off x="1633728" y="3352419"/>
-            <a:ext cx="755904" cy="1133856"/>
-          </a:xfrm>
-          <a:prstGeom prst="roundRect">
-            <a:avLst>
-              <a:gd name="adj" fmla="val 8065"/>
-            </a:avLst>
-          </a:prstGeom>
-          <a:solidFill>
-            <a:srgbClr val="E9F6FD"/>
+            <a:off x="5337715" y="2200275"/>
+            <a:ext cx="60960" cy="60960"/>
+          </a:xfrm>
+          <a:prstGeom prst="ellipse">
+            <a:avLst/>
+          </a:prstGeom>
+          <a:solidFill>
+            <a:srgbClr val="00A94F"/>
           </a:solidFill>
           <a:ln/>
         </p:spPr>
       </p:sp>
       <p:pic>
         <p:nvPicPr>
-          <p:cNvPr id="18" name="svg" descr="svg">    </p:cNvPr>
+          <p:cNvPr id="11" name="p1p-op l" descr="p1p-op l">    </p:cNvPr>
           <p:cNvPicPr>
             <a:picLocks noChangeAspect="1"/>
           </p:cNvPicPr>
@@ -1425,39 +1261,17 @@
         </p:blipFill>
         <p:spPr>
           <a:xfrm>
-            <a:off x="1857248" y="3451987"/>
-            <a:ext cx="316992" cy="217424"/>
+            <a:off x="1267968" y="2462403"/>
+            <a:ext cx="1463040" cy="316992"/>
           </a:xfrm>
           <a:prstGeom prst="rect">
             <a:avLst/>
           </a:prstGeom>
         </p:spPr>
       </p:pic>
-      <p:sp>
-        <p:nvSpPr>
-          <p:cNvPr id="19" name="p1p-pan"/>
-          <p:cNvSpPr/>
-          <p:nvPr/>
-        </p:nvSpPr>
-        <p:spPr>
-          <a:xfrm>
-            <a:off x="2450592" y="3352419"/>
-            <a:ext cx="755904" cy="1133856"/>
-          </a:xfrm>
-          <a:prstGeom prst="roundRect">
-            <a:avLst>
-              <a:gd name="adj" fmla="val 8065"/>
-            </a:avLst>
-          </a:prstGeom>
-          <a:solidFill>
-            <a:srgbClr val="E9F6FD"/>
-          </a:solidFill>
-          <a:ln/>
-        </p:spPr>
-      </p:sp>
       <p:pic>
         <p:nvPicPr>
-          <p:cNvPr id="20" name="svg" descr="svg">    </p:cNvPr>
+          <p:cNvPr id="12" name="svg" descr="svg">    </p:cNvPr>
           <p:cNvPicPr>
             <a:picLocks noChangeAspect="1"/>
           </p:cNvPicPr>
@@ -1471,8 +1285,8 @@
         </p:blipFill>
         <p:spPr>
           <a:xfrm>
-            <a:off x="2651760" y="3445891"/>
-            <a:ext cx="359664" cy="239776"/>
+            <a:off x="2771648" y="2674334"/>
+            <a:ext cx="2405888" cy="89408"/>
           </a:xfrm>
           <a:prstGeom prst="rect">
             <a:avLst/>
@@ -1481,7 +1295,7 @@
       </p:pic>
       <p:pic>
         <p:nvPicPr>
-          <p:cNvPr id="21" name="p1p-play" descr="p1p-play">    </p:cNvPr>
+          <p:cNvPr id="13" name="p1p-op r" descr="p1p-op r">    </p:cNvPr>
           <p:cNvPicPr>
             <a:picLocks noChangeAspect="1"/>
           </p:cNvPicPr>
@@ -1495,8 +1309,8 @@
         </p:blipFill>
         <p:spPr>
           <a:xfrm>
-            <a:off x="1816608" y="3724275"/>
-            <a:ext cx="390144" cy="390144"/>
+            <a:off x="5218176" y="2462403"/>
+            <a:ext cx="1463040" cy="316992"/>
           </a:xfrm>
           <a:prstGeom prst="rect">
             <a:avLst/>
@@ -1505,7 +1319,7 @@
       </p:pic>
       <p:pic>
         <p:nvPicPr>
-          <p:cNvPr id="22" name="svg" descr="svg">    </p:cNvPr>
+          <p:cNvPr id="14" name="svg" descr="svg">    </p:cNvPr>
           <p:cNvPicPr>
             <a:picLocks noChangeAspect="1"/>
           </p:cNvPicPr>
@@ -1519,39 +1333,17 @@
         </p:blipFill>
         <p:spPr>
           <a:xfrm>
-            <a:off x="1987296" y="3866515"/>
-            <a:ext cx="89408" cy="105664"/>
+            <a:off x="1989328" y="2769235"/>
+            <a:ext cx="3970528" cy="516128"/>
           </a:xfrm>
           <a:prstGeom prst="rect">
             <a:avLst/>
           </a:prstGeom>
         </p:spPr>
       </p:pic>
-      <p:sp>
-        <p:nvSpPr>
-          <p:cNvPr id="23" name="p1p-bar"/>
-          <p:cNvSpPr/>
-          <p:nvPr/>
-        </p:nvSpPr>
-        <p:spPr>
-          <a:xfrm>
-            <a:off x="853440" y="4577715"/>
-            <a:ext cx="2316480" cy="30480"/>
-          </a:xfrm>
-          <a:prstGeom prst="roundRect">
-            <a:avLst>
-              <a:gd name="adj" fmla="val 50000"/>
-            </a:avLst>
-          </a:prstGeom>
-          <a:solidFill>
-            <a:srgbClr val="D8E0EB"/>
-          </a:solidFill>
-          <a:ln/>
-        </p:spPr>
-      </p:sp>
       <p:pic>
         <p:nvPicPr>
-          <p:cNvPr id="24" name="i" descr="i">    </p:cNvPr>
+          <p:cNvPr id="15" name="p1p-down" descr="p1p-down">    </p:cNvPr>
           <p:cNvPicPr>
             <a:picLocks noChangeAspect="1"/>
           </p:cNvPicPr>
@@ -1565,8 +1357,8 @@
         </p:blipFill>
         <p:spPr>
           <a:xfrm>
-            <a:off x="851408" y="4577715"/>
-            <a:ext cx="1485392" cy="30480"/>
+            <a:off x="3927856" y="3573907"/>
+            <a:ext cx="93472" cy="150368"/>
           </a:xfrm>
           <a:prstGeom prst="rect">
             <a:avLst/>
@@ -1575,32 +1367,56 @@
       </p:pic>
       <p:sp>
         <p:nvSpPr>
-          <p:cNvPr id="25" name="b"/>
+          <p:cNvPr id="16" name="span"/>
           <p:cNvSpPr/>
           <p:nvPr/>
         </p:nvSpPr>
         <p:spPr>
           <a:xfrm>
-            <a:off x="2302383" y="4559427"/>
-            <a:ext cx="67056" cy="67056"/>
-          </a:xfrm>
-          <a:prstGeom prst="ellipse">
-            <a:avLst/>
-          </a:prstGeom>
-          <a:solidFill>
-            <a:srgbClr val="2A78DD"/>
+            <a:off x="3418142" y="3297555"/>
+            <a:ext cx="1112901" cy="268224"/>
+          </a:xfrm>
+          <a:prstGeom prst="roundRect">
+            <a:avLst>
+              <a:gd name="adj" fmla="val 50000"/>
+            </a:avLst>
+          </a:prstGeom>
+          <a:solidFill>
+            <a:srgbClr val="EEF4FC"/>
           </a:solidFill>
           <a:ln w="12192">
             <a:solidFill>
-              <a:srgbClr val="FFFFFF"/>
+              <a:srgbClr val="004B8D"/>
             </a:solidFill>
             <a:prstDash val="solid"/>
           </a:ln>
         </p:spPr>
       </p:sp>
+      <p:sp>
+        <p:nvSpPr>
+          <p:cNvPr id="17" name="p1p-topic"/>
+          <p:cNvSpPr/>
+          <p:nvPr/>
+        </p:nvSpPr>
+        <p:spPr>
+          <a:xfrm>
+            <a:off x="902208" y="3730371"/>
+            <a:ext cx="6144768" cy="721709"/>
+          </a:xfrm>
+          <a:prstGeom prst="roundRect">
+            <a:avLst>
+              <a:gd name="adj" fmla="val 18583"/>
+            </a:avLst>
+          </a:prstGeom>
+          <a:solidFill>
+            <a:srgbClr val="0B2147"/>
+          </a:solidFill>
+          <a:ln/>
+        </p:spPr>
+      </p:sp>
       <p:pic>
         <p:nvPicPr>
-          <p:cNvPr id="26" name="i" descr="i">    </p:cNvPr>
+          <p:cNvPr id="18" name="ring solid p1p-no" descr="ring solid p1p-no">    </p:cNvPr>
           <p:cNvPicPr>
             <a:picLocks noChangeAspect="1"/>
           </p:cNvPicPr>
@@ -1614,17 +1430,59 @@
         </p:blipFill>
         <p:spPr>
           <a:xfrm>
-            <a:off x="4584192" y="3968115"/>
-            <a:ext cx="701040" cy="36576"/>
+            <a:off x="481584" y="4845812"/>
+            <a:ext cx="329184" cy="329184"/>
           </a:xfrm>
           <a:prstGeom prst="rect">
             <a:avLst/>
           </a:prstGeom>
         </p:spPr>
       </p:pic>
+      <p:sp>
+        <p:nvSpPr>
+          <p:cNvPr id="19" name="p1p-lead"/>
+          <p:cNvSpPr/>
+          <p:nvPr/>
+        </p:nvSpPr>
+        <p:spPr>
+          <a:xfrm>
+            <a:off x="2023872" y="5244084"/>
+            <a:ext cx="3901440" cy="583883"/>
+          </a:xfrm>
+          <a:prstGeom prst="roundRect">
+            <a:avLst>
+              <a:gd name="adj" fmla="val 22969"/>
+            </a:avLst>
+          </a:prstGeom>
+          <a:solidFill>
+            <a:srgbClr val="0B2147"/>
+          </a:solidFill>
+          <a:ln/>
+        </p:spPr>
+      </p:sp>
+      <p:sp>
+        <p:nvSpPr>
+          <p:cNvPr id="20" name="i"/>
+          <p:cNvSpPr/>
+          <p:nvPr/>
+        </p:nvSpPr>
+        <p:spPr>
+          <a:xfrm>
+            <a:off x="3686461" y="5383911"/>
+            <a:ext cx="73152" cy="73152"/>
+          </a:xfrm>
+          <a:prstGeom prst="ellipse">
+            <a:avLst/>
+          </a:prstGeom>
+          <a:solidFill>
+            <a:srgbClr val="00A94F"/>
+          </a:solidFill>
+          <a:ln/>
+        </p:spPr>
+      </p:sp>
       <p:pic>
         <p:nvPicPr>
-          <p:cNvPr id="27" name="svg" descr="svg">    </p:cNvPr>
+          <p:cNvPr id="21" name="p1p-tree" descr="p1p-tree">    </p:cNvPr>
           <p:cNvPicPr>
             <a:picLocks noChangeAspect="1"/>
           </p:cNvPicPr>
@@ -1638,17 +1496,180 @@
         </p:blipFill>
         <p:spPr>
           <a:xfrm>
-            <a:off x="5279136" y="3913251"/>
-            <a:ext cx="121920" cy="146304"/>
+            <a:off x="1891792" y="5827967"/>
+            <a:ext cx="4165600" cy="231648"/>
           </a:xfrm>
           <a:prstGeom prst="rect">
             <a:avLst/>
           </a:prstGeom>
         </p:spPr>
       </p:pic>
+      <p:sp>
+        <p:nvSpPr>
+          <p:cNvPr id="22" name="p1p-mem"/>
+          <p:cNvSpPr/>
+          <p:nvPr/>
+        </p:nvSpPr>
+        <p:spPr>
+          <a:xfrm>
+            <a:off x="908304" y="6065711"/>
+            <a:ext cx="1962912" cy="758095"/>
+          </a:xfrm>
+          <a:prstGeom prst="roundRect">
+            <a:avLst>
+              <a:gd name="adj" fmla="val 16887"/>
+            </a:avLst>
+          </a:prstGeom>
+          <a:solidFill>
+            <a:srgbClr val="FFFFFF"/>
+          </a:solidFill>
+          <a:ln w="12192">
+            <a:solidFill>
+              <a:srgbClr val="D8E0EB"/>
+            </a:solidFill>
+            <a:prstDash val="solid"/>
+          </a:ln>
+        </p:spPr>
+      </p:sp>
+      <p:sp>
+        <p:nvSpPr>
+          <p:cNvPr id="23" name="i"/>
+          <p:cNvSpPr/>
+          <p:nvPr/>
+        </p:nvSpPr>
+        <p:spPr>
+          <a:xfrm>
+            <a:off x="1643253" y="6199442"/>
+            <a:ext cx="73152" cy="73152"/>
+          </a:xfrm>
+          <a:prstGeom prst="ellipse">
+            <a:avLst/>
+          </a:prstGeom>
+          <a:solidFill>
+            <a:srgbClr val="00A94F"/>
+          </a:solidFill>
+          <a:ln/>
+        </p:spPr>
+      </p:sp>
+      <p:sp>
+        <p:nvSpPr>
+          <p:cNvPr id="24" name="p1p-mem"/>
+          <p:cNvSpPr/>
+          <p:nvPr/>
+        </p:nvSpPr>
+        <p:spPr>
+          <a:xfrm>
+            <a:off x="2993136" y="6065711"/>
+            <a:ext cx="1962912" cy="758095"/>
+          </a:xfrm>
+          <a:prstGeom prst="roundRect">
+            <a:avLst>
+              <a:gd name="adj" fmla="val 16887"/>
+            </a:avLst>
+          </a:prstGeom>
+          <a:solidFill>
+            <a:srgbClr val="FFFFFF"/>
+          </a:solidFill>
+          <a:ln w="12192">
+            <a:solidFill>
+              <a:srgbClr val="D8E0EB"/>
+            </a:solidFill>
+            <a:prstDash val="solid"/>
+          </a:ln>
+        </p:spPr>
+      </p:sp>
+      <p:sp>
+        <p:nvSpPr>
+          <p:cNvPr id="25" name="i"/>
+          <p:cNvSpPr/>
+          <p:nvPr/>
+        </p:nvSpPr>
+        <p:spPr>
+          <a:xfrm>
+            <a:off x="3728180" y="6199442"/>
+            <a:ext cx="73152" cy="73152"/>
+          </a:xfrm>
+          <a:prstGeom prst="ellipse">
+            <a:avLst/>
+          </a:prstGeom>
+          <a:solidFill>
+            <a:srgbClr val="00A94F"/>
+          </a:solidFill>
+          <a:ln/>
+        </p:spPr>
+      </p:sp>
+      <p:sp>
+        <p:nvSpPr>
+          <p:cNvPr id="26" name="p1p-mem"/>
+          <p:cNvSpPr/>
+          <p:nvPr/>
+        </p:nvSpPr>
+        <p:spPr>
+          <a:xfrm>
+            <a:off x="5077968" y="6065711"/>
+            <a:ext cx="1962912" cy="758095"/>
+          </a:xfrm>
+          <a:prstGeom prst="roundRect">
+            <a:avLst>
+              <a:gd name="adj" fmla="val 16887"/>
+            </a:avLst>
+          </a:prstGeom>
+          <a:solidFill>
+            <a:srgbClr val="FFFFFF"/>
+          </a:solidFill>
+          <a:ln w="12192">
+            <a:solidFill>
+              <a:srgbClr val="D8E0EB"/>
+            </a:solidFill>
+            <a:prstDash val="solid"/>
+          </a:ln>
+        </p:spPr>
+      </p:sp>
+      <p:sp>
+        <p:nvSpPr>
+          <p:cNvPr id="27" name="i"/>
+          <p:cNvSpPr/>
+          <p:nvPr/>
+        </p:nvSpPr>
+        <p:spPr>
+          <a:xfrm>
+            <a:off x="5815298" y="6199442"/>
+            <a:ext cx="73152" cy="73152"/>
+          </a:xfrm>
+          <a:prstGeom prst="ellipse">
+            <a:avLst/>
+          </a:prstGeom>
+          <a:solidFill>
+            <a:srgbClr val="00A94F"/>
+          </a:solidFill>
+          <a:ln/>
+        </p:spPr>
+      </p:sp>
+      <p:sp>
+        <p:nvSpPr>
+          <p:cNvPr id="28" name="span"/>
+          <p:cNvSpPr/>
+          <p:nvPr/>
+        </p:nvSpPr>
+        <p:spPr>
+          <a:xfrm>
+            <a:off x="2913221" y="6915245"/>
+            <a:ext cx="2122742" cy="256032"/>
+          </a:xfrm>
+          <a:prstGeom prst="roundRect">
+            <a:avLst>
+              <a:gd name="adj" fmla="val 50000"/>
+            </a:avLst>
+          </a:prstGeom>
+          <a:solidFill>
+            <a:srgbClr val="E5F6EC"/>
+          </a:solidFill>
+          <a:ln/>
+        </p:spPr>
+      </p:sp>
       <p:pic>
         <p:nvPicPr>
-          <p:cNvPr id="28" name="svg" descr="svg">    </p:cNvPr>
+          <p:cNvPr id="29" name="svg" descr="svg">    </p:cNvPr>
           <p:cNvPicPr>
             <a:picLocks noChangeAspect="1"/>
           </p:cNvPicPr>
@@ -1662,39 +1683,17 @@
         </p:blipFill>
         <p:spPr>
           <a:xfrm>
-            <a:off x="5632704" y="3254883"/>
-            <a:ext cx="1048512" cy="1237488"/>
+            <a:off x="3039205" y="6982301"/>
+            <a:ext cx="113792" cy="117856"/>
           </a:xfrm>
           <a:prstGeom prst="rect">
             <a:avLst/>
           </a:prstGeom>
         </p:spPr>
       </p:pic>
-      <p:sp>
-        <p:nvSpPr>
-          <p:cNvPr id="29" name="p1p-comp"/>
-          <p:cNvSpPr/>
-          <p:nvPr/>
-        </p:nvSpPr>
-        <p:spPr>
-          <a:xfrm>
-            <a:off x="5563172" y="4510659"/>
-            <a:ext cx="1187577" cy="219456"/>
-          </a:xfrm>
-          <a:prstGeom prst="roundRect">
-            <a:avLst>
-              <a:gd name="adj" fmla="val 50000"/>
-            </a:avLst>
-          </a:prstGeom>
-          <a:solidFill>
-            <a:srgbClr val="FFF4DB"/>
-          </a:solidFill>
-          <a:ln/>
-        </p:spPr>
-      </p:sp>
       <p:pic>
         <p:nvPicPr>
-          <p:cNvPr id="30" name="p1p-path" descr="p1p-path">    </p:cNvPr>
+          <p:cNvPr id="30" name="ring solid p1p-no" descr="ring solid p1p-no">    </p:cNvPr>
           <p:cNvPicPr>
             <a:picLocks noChangeAspect="1"/>
           </p:cNvPicPr>
@@ -1708,8 +1707,8 @@
         </p:blipFill>
         <p:spPr>
           <a:xfrm>
-            <a:off x="807720" y="4839843"/>
-            <a:ext cx="22352" cy="4315968"/>
+            <a:off x="481584" y="7565009"/>
+            <a:ext cx="329184" cy="329184"/>
           </a:xfrm>
           <a:prstGeom prst="rect">
             <a:avLst/>
@@ -1718,32 +1717,49 @@
       </p:pic>
       <p:sp>
         <p:nvSpPr>
-          <p:cNvPr id="31" name="p1p-top"/>
+          <p:cNvPr id="31" name="p1p-vid"/>
           <p:cNvSpPr/>
           <p:nvPr/>
         </p:nvSpPr>
         <p:spPr>
           <a:xfrm>
-            <a:off x="777240" y="4794123"/>
-            <a:ext cx="79248" cy="79248"/>
+            <a:off x="902208" y="7963281"/>
+            <a:ext cx="2072640" cy="1164336"/>
+          </a:xfrm>
+          <a:prstGeom prst="roundRect">
+            <a:avLst>
+              <a:gd name="adj" fmla="val 9424"/>
+            </a:avLst>
+          </a:prstGeom>
+          <a:solidFill>
+            <a:srgbClr val="0B2147"/>
+          </a:solidFill>
+          <a:ln/>
+        </p:spPr>
+      </p:sp>
+      <p:sp>
+        <p:nvSpPr>
+          <p:cNvPr id="32" name="span"/>
+          <p:cNvSpPr/>
+          <p:nvPr/>
+        </p:nvSpPr>
+        <p:spPr>
+          <a:xfrm>
+            <a:off x="1712976" y="8319897"/>
+            <a:ext cx="451104" cy="451104"/>
           </a:xfrm>
           <a:prstGeom prst="ellipse">
             <a:avLst/>
           </a:prstGeom>
           <a:solidFill>
-            <a:srgbClr val="45B9EC"/>
-          </a:solidFill>
-          <a:ln w="18288">
-            <a:solidFill>
-              <a:srgbClr val="FFFFFF"/>
-            </a:solidFill>
-            <a:prstDash val="solid"/>
-          </a:ln>
+            <a:srgbClr val="FFFFFF"/>
+          </a:solidFill>
+          <a:ln/>
         </p:spPr>
       </p:sp>
       <p:pic>
         <p:nvPicPr>
-          <p:cNvPr id="32" name="p1p-rl v" descr="p1p-rl v">    </p:cNvPr>
+          <p:cNvPr id="33" name="svg" descr="svg">    </p:cNvPr>
           <p:cNvPicPr>
             <a:picLocks noChangeAspect="1"/>
           </p:cNvPicPr>
@@ -1757,8 +1773,8 @@
         </p:blipFill>
         <p:spPr>
           <a:xfrm>
-            <a:off x="6905752" y="4907915"/>
-            <a:ext cx="18288" cy="4261104"/>
+            <a:off x="1900936" y="8476361"/>
+            <a:ext cx="121920" cy="142240"/>
           </a:xfrm>
           <a:prstGeom prst="rect">
             <a:avLst/>
@@ -1767,7 +1783,7 @@
       </p:pic>
       <p:pic>
         <p:nvPicPr>
-          <p:cNvPr id="33" name="p1p-rl h" descr="p1p-rl h">    </p:cNvPr>
+          <p:cNvPr id="34" name="i" descr="i">    </p:cNvPr>
           <p:cNvPicPr>
             <a:picLocks noChangeAspect="1"/>
           </p:cNvPicPr>
@@ -1781,8 +1797,8 @@
         </p:blipFill>
         <p:spPr>
           <a:xfrm>
-            <a:off x="6149848" y="4907915"/>
-            <a:ext cx="774192" cy="18288"/>
+            <a:off x="3084576" y="8523097"/>
+            <a:ext cx="932688" cy="48768"/>
           </a:xfrm>
           <a:prstGeom prst="rect">
             <a:avLst/>
@@ -1791,7 +1807,7 @@
       </p:pic>
       <p:pic>
         <p:nvPicPr>
-          <p:cNvPr id="34" name="p1p-rl s" descr="p1p-rl s">    </p:cNvPr>
+          <p:cNvPr id="35" name="svg" descr="svg">    </p:cNvPr>
           <p:cNvPicPr>
             <a:picLocks noChangeAspect="1"/>
           </p:cNvPicPr>
@@ -1805,39 +1821,14 @@
         </p:blipFill>
         <p:spPr>
           <a:xfrm>
-            <a:off x="6149848" y="4833747"/>
-            <a:ext cx="18288" cy="85344"/>
+            <a:off x="4011771" y="8456041"/>
+            <a:ext cx="146304" cy="182880"/>
           </a:xfrm>
           <a:prstGeom prst="rect">
             <a:avLst/>
           </a:prstGeom>
         </p:spPr>
       </p:pic>
-      <p:sp>
-        <p:nvSpPr>
-          <p:cNvPr id="35" name="p1p-rl d"/>
-          <p:cNvSpPr/>
-          <p:nvPr/>
-        </p:nvSpPr>
-        <p:spPr>
-          <a:xfrm>
-            <a:off x="6117336" y="4794123"/>
-            <a:ext cx="79248" cy="79248"/>
-          </a:xfrm>
-          <a:prstGeom prst="ellipse">
-            <a:avLst/>
-          </a:prstGeom>
-          <a:solidFill>
-            <a:srgbClr val="FDBB30"/>
-          </a:solidFill>
-          <a:ln w="18288">
-            <a:solidFill>
-              <a:srgbClr val="FFFFFF"/>
-            </a:solidFill>
-            <a:prstDash val="solid"/>
-          </a:ln>
-        </p:spPr>
-      </p:sp>
       <p:pic>
         <p:nvPicPr>
           <p:cNvPr id="36" name="svg" descr="svg">    </p:cNvPr>
@@ -1854,8 +1845,8 @@
         </p:blipFill>
         <p:spPr>
           <a:xfrm>
-            <a:off x="512064" y="4998339"/>
-            <a:ext cx="609600" cy="609600"/>
+            <a:off x="4310475" y="7942961"/>
+            <a:ext cx="1194816" cy="1475232"/>
           </a:xfrm>
           <a:prstGeom prst="rect">
             <a:avLst/>
@@ -1864,913 +1855,7 @@
       </p:pic>
       <p:sp>
         <p:nvSpPr>
-          <p:cNvPr id="37" name="s"/>
-          <p:cNvSpPr/>
-          <p:nvPr/>
-        </p:nvSpPr>
-        <p:spPr>
-          <a:xfrm>
-            <a:off x="1532858" y="5138547"/>
-            <a:ext cx="121920" cy="12192"/>
-          </a:xfrm>
-          <a:prstGeom prst="rect">
-            <a:avLst/>
-          </a:prstGeom>
-          <a:solidFill>
-            <a:srgbClr val="C3CEDD"/>
-          </a:solidFill>
-          <a:ln/>
-        </p:spPr>
-      </p:sp>
-      <p:pic>
-        <p:nvPicPr>
-          <p:cNvPr id="38" name="p1p-fact" descr="p1p-fact">    </p:cNvPr>
-          <p:cNvPicPr>
-            <a:picLocks noChangeAspect="1"/>
-          </p:cNvPicPr>
-          <p:nvPr/>
-        </p:nvPicPr>
-        <p:blipFill>
-          <a:blip r:embed="rId17"/>
-          <a:stretch>
-            <a:fillRect/>
-          </a:stretch>
-        </p:blipFill>
-        <p:spPr>
-          <a:xfrm>
-            <a:off x="1304544" y="5298345"/>
-            <a:ext cx="1444752" cy="268224"/>
-          </a:xfrm>
-          <a:prstGeom prst="rect">
-            <a:avLst/>
-          </a:prstGeom>
-        </p:spPr>
-      </p:pic>
-      <p:sp>
-        <p:nvSpPr>
-          <p:cNvPr id="39" name="p1p-fact ic"/>
-          <p:cNvSpPr/>
-          <p:nvPr/>
-        </p:nvSpPr>
-        <p:spPr>
-          <a:xfrm>
-            <a:off x="2818924" y="5306473"/>
-            <a:ext cx="1822990" cy="256032"/>
-          </a:xfrm>
-          <a:prstGeom prst="roundRect">
-            <a:avLst>
-              <a:gd name="adj" fmla="val 50000"/>
-            </a:avLst>
-          </a:prstGeom>
-          <a:ln w="12192">
-            <a:solidFill>
-              <a:srgbClr val="D8E0EB"/>
-            </a:solidFill>
-            <a:prstDash val="solid"/>
-          </a:ln>
-        </p:spPr>
-      </p:sp>
-      <p:pic>
-        <p:nvPicPr>
-          <p:cNvPr id="40" name="svg" descr="svg">    </p:cNvPr>
-          <p:cNvPicPr>
-            <a:picLocks noChangeAspect="1"/>
-          </p:cNvPicPr>
-          <p:nvPr/>
-        </p:nvPicPr>
-        <p:blipFill>
-          <a:blip r:embed="rId18"/>
-          <a:stretch>
-            <a:fillRect/>
-          </a:stretch>
-        </p:blipFill>
-        <p:spPr>
-          <a:xfrm>
-            <a:off x="2946940" y="5379625"/>
-            <a:ext cx="105664" cy="105664"/>
-          </a:xfrm>
-          <a:prstGeom prst="rect">
-            <a:avLst/>
-          </a:prstGeom>
-        </p:spPr>
-      </p:pic>
-      <p:sp>
-        <p:nvSpPr>
-          <p:cNvPr id="41" name="i"/>
-          <p:cNvSpPr/>
-          <p:nvPr/>
-        </p:nvSpPr>
-        <p:spPr>
-          <a:xfrm>
-            <a:off x="777240" y="5649563"/>
-            <a:ext cx="79248" cy="79248"/>
-          </a:xfrm>
-          <a:prstGeom prst="ellipse">
-            <a:avLst/>
-          </a:prstGeom>
-          <a:solidFill>
-            <a:srgbClr val="3DA6E7"/>
-          </a:solidFill>
-          <a:ln w="18288">
-            <a:solidFill>
-              <a:srgbClr val="FFFFFF"/>
-            </a:solidFill>
-            <a:prstDash val="solid"/>
-          </a:ln>
-        </p:spPr>
-      </p:sp>
-      <p:pic>
-        <p:nvPicPr>
-          <p:cNvPr id="42" name="svg" descr="svg">    </p:cNvPr>
-          <p:cNvPicPr>
-            <a:picLocks noChangeAspect="1"/>
-          </p:cNvPicPr>
-          <p:nvPr/>
-        </p:nvPicPr>
-        <p:blipFill>
-          <a:blip r:embed="rId19"/>
-          <a:stretch>
-            <a:fillRect/>
-          </a:stretch>
-        </p:blipFill>
-        <p:spPr>
-          <a:xfrm>
-            <a:off x="512064" y="5772468"/>
-            <a:ext cx="609600" cy="609600"/>
-          </a:xfrm>
-          <a:prstGeom prst="rect">
-            <a:avLst/>
-          </a:prstGeom>
-        </p:spPr>
-      </p:pic>
-      <p:sp>
-        <p:nvSpPr>
-          <p:cNvPr id="43" name="s"/>
-          <p:cNvSpPr/>
-          <p:nvPr/>
-        </p:nvSpPr>
-        <p:spPr>
-          <a:xfrm>
-            <a:off x="1532858" y="5910644"/>
-            <a:ext cx="121920" cy="12192"/>
-          </a:xfrm>
-          <a:prstGeom prst="rect">
-            <a:avLst/>
-          </a:prstGeom>
-          <a:solidFill>
-            <a:srgbClr val="C3CEDD"/>
-          </a:solidFill>
-          <a:ln/>
-        </p:spPr>
-      </p:sp>
-      <p:pic>
-        <p:nvPicPr>
-          <p:cNvPr id="44" name="p1p-fact" descr="p1p-fact">    </p:cNvPr>
-          <p:cNvPicPr>
-            <a:picLocks noChangeAspect="1"/>
-          </p:cNvPicPr>
-          <p:nvPr/>
-        </p:nvPicPr>
-        <p:blipFill>
-          <a:blip r:embed="rId20"/>
-          <a:stretch>
-            <a:fillRect/>
-          </a:stretch>
-        </p:blipFill>
-        <p:spPr>
-          <a:xfrm>
-            <a:off x="1304544" y="6072473"/>
-            <a:ext cx="1932432" cy="268224"/>
-          </a:xfrm>
-          <a:prstGeom prst="rect">
-            <a:avLst/>
-          </a:prstGeom>
-        </p:spPr>
-      </p:pic>
-      <p:pic>
-        <p:nvPicPr>
-          <p:cNvPr id="45" name="p1p-to" descr="p1p-to">    </p:cNvPr>
-          <p:cNvPicPr>
-            <a:picLocks noChangeAspect="1"/>
-          </p:cNvPicPr>
-          <p:nvPr/>
-        </p:nvPicPr>
-        <p:blipFill>
-          <a:blip r:embed="rId21"/>
-          <a:stretch>
-            <a:fillRect/>
-          </a:stretch>
-        </p:blipFill>
-        <p:spPr>
-          <a:xfrm>
-            <a:off x="3296285" y="6174073"/>
-            <a:ext cx="83312" cy="65024"/>
-          </a:xfrm>
-          <a:prstGeom prst="rect">
-            <a:avLst/>
-          </a:prstGeom>
-        </p:spPr>
-      </p:pic>
-      <p:pic>
-        <p:nvPicPr>
-          <p:cNvPr id="46" name="p1p-fact" descr="p1p-fact">    </p:cNvPr>
-          <p:cNvPicPr>
-            <a:picLocks noChangeAspect="1"/>
-          </p:cNvPicPr>
-          <p:nvPr/>
-        </p:nvPicPr>
-        <p:blipFill>
-          <a:blip r:embed="rId22"/>
-          <a:stretch>
-            <a:fillRect/>
-          </a:stretch>
-        </p:blipFill>
-        <p:spPr>
-          <a:xfrm>
-            <a:off x="3444621" y="6072473"/>
-            <a:ext cx="1097280" cy="268224"/>
-          </a:xfrm>
-          <a:prstGeom prst="rect">
-            <a:avLst/>
-          </a:prstGeom>
-        </p:spPr>
-      </p:pic>
-      <p:pic>
-        <p:nvPicPr>
-          <p:cNvPr id="47" name="p1p-to" descr="p1p-to">    </p:cNvPr>
-          <p:cNvPicPr>
-            <a:picLocks noChangeAspect="1"/>
-          </p:cNvPicPr>
-          <p:nvPr/>
-        </p:nvPicPr>
-        <p:blipFill>
-          <a:blip r:embed="rId23"/>
-          <a:stretch>
-            <a:fillRect/>
-          </a:stretch>
-        </p:blipFill>
-        <p:spPr>
-          <a:xfrm>
-            <a:off x="4601432" y="6174073"/>
-            <a:ext cx="83312" cy="65024"/>
-          </a:xfrm>
-          <a:prstGeom prst="rect">
-            <a:avLst/>
-          </a:prstGeom>
-        </p:spPr>
-      </p:pic>
-      <p:pic>
-        <p:nvPicPr>
-          <p:cNvPr id="48" name="p1p-fact key2" descr="p1p-fact key2">    </p:cNvPr>
-          <p:cNvPicPr>
-            <a:picLocks noChangeAspect="1"/>
-          </p:cNvPicPr>
-          <p:nvPr/>
-        </p:nvPicPr>
-        <p:blipFill>
-          <a:blip r:embed="rId24"/>
-          <a:stretch>
-            <a:fillRect/>
-          </a:stretch>
-        </p:blipFill>
-        <p:spPr>
-          <a:xfrm>
-            <a:off x="4749768" y="6072473"/>
-            <a:ext cx="847344" cy="268224"/>
-          </a:xfrm>
-          <a:prstGeom prst="rect">
-            <a:avLst/>
-          </a:prstGeom>
-        </p:spPr>
-      </p:pic>
-      <p:sp>
-        <p:nvSpPr>
-          <p:cNvPr id="49" name="i"/>
-          <p:cNvSpPr/>
-          <p:nvPr/>
-        </p:nvSpPr>
-        <p:spPr>
-          <a:xfrm>
-            <a:off x="777240" y="6421660"/>
-            <a:ext cx="79248" cy="79248"/>
-          </a:xfrm>
-          <a:prstGeom prst="ellipse">
-            <a:avLst/>
-          </a:prstGeom>
-          <a:solidFill>
-            <a:srgbClr val="3695E4"/>
-          </a:solidFill>
-          <a:ln w="18288">
-            <a:solidFill>
-              <a:srgbClr val="FFFFFF"/>
-            </a:solidFill>
-            <a:prstDash val="solid"/>
-          </a:ln>
-        </p:spPr>
-      </p:sp>
-      <p:sp>
-        <p:nvSpPr>
-          <p:cNvPr id="50" name="s"/>
-          <p:cNvSpPr/>
-          <p:nvPr/>
-        </p:nvSpPr>
-        <p:spPr>
-          <a:xfrm>
-            <a:off x="1532858" y="6643402"/>
-            <a:ext cx="121920" cy="12192"/>
-          </a:xfrm>
-          <a:prstGeom prst="rect">
-            <a:avLst/>
-          </a:prstGeom>
-          <a:solidFill>
-            <a:srgbClr val="C3CEDD"/>
-          </a:solidFill>
-          <a:ln/>
-        </p:spPr>
-      </p:sp>
-      <p:pic>
-        <p:nvPicPr>
-          <p:cNvPr id="51" name="svg" descr="svg">    </p:cNvPr>
-          <p:cNvPicPr>
-            <a:picLocks noChangeAspect="1"/>
-          </p:cNvPicPr>
-          <p:nvPr/>
-        </p:nvPicPr>
-        <p:blipFill>
-          <a:blip r:embed="rId25"/>
-          <a:stretch>
-            <a:fillRect/>
-          </a:stretch>
-        </p:blipFill>
-        <p:spPr>
-          <a:xfrm>
-            <a:off x="512064" y="7449217"/>
-            <a:ext cx="609600" cy="609600"/>
-          </a:xfrm>
-          <a:prstGeom prst="rect">
-            <a:avLst/>
-          </a:prstGeom>
-        </p:spPr>
-      </p:pic>
-      <p:sp>
-        <p:nvSpPr>
-          <p:cNvPr id="52" name="p1p-role me"/>
-          <p:cNvSpPr/>
-          <p:nvPr/>
-        </p:nvSpPr>
-        <p:spPr>
-          <a:xfrm>
-            <a:off x="1310640" y="6823520"/>
-            <a:ext cx="2676144" cy="790289"/>
-          </a:xfrm>
-          <a:prstGeom prst="roundRect">
-            <a:avLst>
-              <a:gd name="adj" fmla="val 13113"/>
-            </a:avLst>
-          </a:prstGeom>
-          <a:solidFill>
-            <a:srgbClr val="FFFFFF"/>
-          </a:solidFill>
-          <a:ln w="12192">
-            <a:solidFill>
-              <a:srgbClr val="004B8D"/>
-            </a:solidFill>
-            <a:prstDash val="solid"/>
-          </a:ln>
-        </p:spPr>
-      </p:sp>
-      <p:pic>
-        <p:nvPicPr>
-          <p:cNvPr id="53" name="svg" descr="svg">    </p:cNvPr>
-          <p:cNvPicPr>
-            <a:picLocks noChangeAspect="1"/>
-          </p:cNvPicPr>
-          <p:nvPr/>
-        </p:nvPicPr>
-        <p:blipFill>
-          <a:blip r:embed="rId26"/>
-          <a:stretch>
-            <a:fillRect/>
-          </a:stretch>
-        </p:blipFill>
-        <p:spPr>
-          <a:xfrm>
-            <a:off x="1438656" y="6919786"/>
-            <a:ext cx="170688" cy="170688"/>
-          </a:xfrm>
-          <a:prstGeom prst="rect">
-            <a:avLst/>
-          </a:prstGeom>
-        </p:spPr>
-      </p:pic>
-      <p:sp>
-        <p:nvSpPr>
-          <p:cNvPr id="54" name="p1p-me"/>
-          <p:cNvSpPr/>
-          <p:nvPr/>
-        </p:nvSpPr>
-        <p:spPr>
-          <a:xfrm>
-            <a:off x="1990344" y="6921818"/>
-            <a:ext cx="229648" cy="170688"/>
-          </a:xfrm>
-          <a:prstGeom prst="roundRect">
-            <a:avLst>
-              <a:gd name="adj" fmla="val 50000"/>
-            </a:avLst>
-          </a:prstGeom>
-          <a:solidFill>
-            <a:srgbClr val="004B8D"/>
-          </a:solidFill>
-          <a:ln/>
-        </p:spPr>
-      </p:sp>
-      <p:sp>
-        <p:nvSpPr>
-          <p:cNvPr id="55" name="p1p-tech"/>
-          <p:cNvSpPr/>
-          <p:nvPr/>
-        </p:nvSpPr>
-        <p:spPr>
-          <a:xfrm>
-            <a:off x="1438656" y="7351681"/>
-            <a:ext cx="635222" cy="182880"/>
-          </a:xfrm>
-          <a:prstGeom prst="roundRect">
-            <a:avLst>
-              <a:gd name="adj" fmla="val 50000"/>
-            </a:avLst>
-          </a:prstGeom>
-          <a:solidFill>
-            <a:srgbClr val="EEF4FC"/>
-          </a:solidFill>
-          <a:ln/>
-        </p:spPr>
-      </p:sp>
-      <p:sp>
-        <p:nvSpPr>
-          <p:cNvPr id="56" name="p1p-role"/>
-          <p:cNvSpPr/>
-          <p:nvPr/>
-        </p:nvSpPr>
-        <p:spPr>
-          <a:xfrm>
-            <a:off x="4096512" y="6823520"/>
-            <a:ext cx="2676144" cy="790289"/>
-          </a:xfrm>
-          <a:prstGeom prst="roundRect">
-            <a:avLst>
-              <a:gd name="adj" fmla="val 13113"/>
-            </a:avLst>
-          </a:prstGeom>
-          <a:solidFill>
-            <a:srgbClr val="FFFFFF"/>
-          </a:solidFill>
-          <a:ln w="12192">
-            <a:solidFill>
-              <a:srgbClr val="D8E0EB"/>
-            </a:solidFill>
-            <a:prstDash val="solid"/>
-          </a:ln>
-        </p:spPr>
-      </p:sp>
-      <p:pic>
-        <p:nvPicPr>
-          <p:cNvPr id="57" name="svg" descr="svg">    </p:cNvPr>
-          <p:cNvPicPr>
-            <a:picLocks noChangeAspect="1"/>
-          </p:cNvPicPr>
-          <p:nvPr/>
-        </p:nvPicPr>
-        <p:blipFill>
-          <a:blip r:embed="rId27"/>
-          <a:stretch>
-            <a:fillRect/>
-          </a:stretch>
-        </p:blipFill>
-        <p:spPr>
-          <a:xfrm>
-            <a:off x="4224528" y="6919786"/>
-            <a:ext cx="170688" cy="170688"/>
-          </a:xfrm>
-          <a:prstGeom prst="rect">
-            <a:avLst/>
-          </a:prstGeom>
-        </p:spPr>
-      </p:pic>
-      <p:pic>
-        <p:nvPicPr>
-          <p:cNvPr id="58" name="p1p-hub-ln" descr="p1p-hub-ln">    </p:cNvPr>
-          <p:cNvPicPr>
-            <a:picLocks noChangeAspect="1"/>
-          </p:cNvPicPr>
-          <p:nvPr/>
-        </p:nvPicPr>
-        <p:blipFill>
-          <a:blip r:embed="rId28"/>
-          <a:stretch>
-            <a:fillRect/>
-          </a:stretch>
-        </p:blipFill>
-        <p:spPr>
-          <a:xfrm>
-            <a:off x="1119632" y="7742841"/>
-            <a:ext cx="4320032" cy="18288"/>
-          </a:xfrm>
-          <a:prstGeom prst="rect">
-            <a:avLst/>
-          </a:prstGeom>
-        </p:spPr>
-      </p:pic>
-      <p:pic>
-        <p:nvPicPr>
-          <p:cNvPr id="59" name="p1p-hub-st r" descr="p1p-hub-st r">    </p:cNvPr>
-          <p:cNvPicPr>
-            <a:picLocks noChangeAspect="1"/>
-          </p:cNvPicPr>
-          <p:nvPr/>
-        </p:nvPicPr>
-        <p:blipFill>
-          <a:blip r:embed="rId29"/>
-          <a:stretch>
-            <a:fillRect/>
-          </a:stretch>
-        </p:blipFill>
-        <p:spPr>
-          <a:xfrm>
-            <a:off x="5425440" y="7619905"/>
-            <a:ext cx="18288" cy="268224"/>
-          </a:xfrm>
-          <a:prstGeom prst="rect">
-            <a:avLst/>
-          </a:prstGeom>
-        </p:spPr>
-      </p:pic>
-      <p:sp>
-        <p:nvSpPr>
-          <p:cNvPr id="60" name="p1p-hub-dt r"/>
-          <p:cNvSpPr/>
-          <p:nvPr/>
-        </p:nvSpPr>
-        <p:spPr>
-          <a:xfrm>
-            <a:off x="5394960" y="7714393"/>
-            <a:ext cx="79248" cy="79248"/>
-          </a:xfrm>
-          <a:prstGeom prst="ellipse">
-            <a:avLst/>
-          </a:prstGeom>
-          <a:solidFill>
-            <a:srgbClr val="00A94F"/>
-          </a:solidFill>
-          <a:ln w="18288">
-            <a:solidFill>
-              <a:srgbClr val="FFFFFF"/>
-            </a:solidFill>
-            <a:prstDash val="solid"/>
-          </a:ln>
-        </p:spPr>
-      </p:sp>
-      <p:sp>
-        <p:nvSpPr>
-          <p:cNvPr id="61" name="p1p-share"/>
-          <p:cNvSpPr/>
-          <p:nvPr/>
-        </p:nvSpPr>
-        <p:spPr>
-          <a:xfrm>
-            <a:off x="3048191" y="7638193"/>
-            <a:ext cx="1986915" cy="231648"/>
-          </a:xfrm>
-          <a:prstGeom prst="roundRect">
-            <a:avLst>
-              <a:gd name="adj" fmla="val 50000"/>
-            </a:avLst>
-          </a:prstGeom>
-          <a:solidFill>
-            <a:srgbClr val="E5F6EC"/>
-          </a:solidFill>
-          <a:ln w="12192">
-            <a:solidFill>
-              <a:srgbClr val="FFFFFF"/>
-            </a:solidFill>
-            <a:prstDash val="solid"/>
-          </a:ln>
-        </p:spPr>
-      </p:sp>
-      <p:pic>
-        <p:nvPicPr>
-          <p:cNvPr id="62" name="svg" descr="svg">    </p:cNvPr>
-          <p:cNvPicPr>
-            <a:picLocks noChangeAspect="1"/>
-          </p:cNvPicPr>
-          <p:nvPr/>
-        </p:nvPicPr>
-        <p:blipFill>
-          <a:blip r:embed="rId30"/>
-          <a:stretch>
-            <a:fillRect/>
-          </a:stretch>
-        </p:blipFill>
-        <p:spPr>
-          <a:xfrm>
-            <a:off x="3153855" y="7699153"/>
-            <a:ext cx="105664" cy="109728"/>
-          </a:xfrm>
-          <a:prstGeom prst="rect">
-            <a:avLst/>
-          </a:prstGeom>
-        </p:spPr>
-      </p:pic>
-      <p:sp>
-        <p:nvSpPr>
-          <p:cNvPr id="63" name="p1p-role"/>
-          <p:cNvSpPr/>
-          <p:nvPr/>
-        </p:nvSpPr>
-        <p:spPr>
-          <a:xfrm>
-            <a:off x="1310640" y="7894225"/>
-            <a:ext cx="2676144" cy="790289"/>
-          </a:xfrm>
-          <a:prstGeom prst="roundRect">
-            <a:avLst>
-              <a:gd name="adj" fmla="val 13113"/>
-            </a:avLst>
-          </a:prstGeom>
-          <a:solidFill>
-            <a:srgbClr val="FFFFFF"/>
-          </a:solidFill>
-          <a:ln w="12192">
-            <a:solidFill>
-              <a:srgbClr val="D8E0EB"/>
-            </a:solidFill>
-            <a:prstDash val="solid"/>
-          </a:ln>
-        </p:spPr>
-      </p:sp>
-      <p:pic>
-        <p:nvPicPr>
-          <p:cNvPr id="64" name="p1p-hub-st l" descr="p1p-hub-st l">    </p:cNvPr>
-          <p:cNvPicPr>
-            <a:picLocks noChangeAspect="1"/>
-          </p:cNvPicPr>
-          <p:nvPr/>
-        </p:nvPicPr>
-        <p:blipFill>
-          <a:blip r:embed="rId31"/>
-          <a:stretch>
-            <a:fillRect/>
-          </a:stretch>
-        </p:blipFill>
-        <p:spPr>
-          <a:xfrm>
-            <a:off x="2639568" y="7619905"/>
-            <a:ext cx="18288" cy="268224"/>
-          </a:xfrm>
-          <a:prstGeom prst="rect">
-            <a:avLst/>
-          </a:prstGeom>
-        </p:spPr>
-      </p:pic>
-      <p:sp>
-        <p:nvSpPr>
-          <p:cNvPr id="65" name="p1p-hub-dt l"/>
-          <p:cNvSpPr/>
-          <p:nvPr/>
-        </p:nvSpPr>
-        <p:spPr>
-          <a:xfrm>
-            <a:off x="2609088" y="7714393"/>
-            <a:ext cx="79248" cy="79248"/>
-          </a:xfrm>
-          <a:prstGeom prst="ellipse">
-            <a:avLst/>
-          </a:prstGeom>
-          <a:solidFill>
-            <a:srgbClr val="00A94F"/>
-          </a:solidFill>
-          <a:ln w="18288">
-            <a:solidFill>
-              <a:srgbClr val="FFFFFF"/>
-            </a:solidFill>
-            <a:prstDash val="solid"/>
-          </a:ln>
-        </p:spPr>
-      </p:sp>
-      <p:pic>
-        <p:nvPicPr>
-          <p:cNvPr id="66" name="svg" descr="svg">    </p:cNvPr>
-          <p:cNvPicPr>
-            <a:picLocks noChangeAspect="1"/>
-          </p:cNvPicPr>
-          <p:nvPr/>
-        </p:nvPicPr>
-        <p:blipFill>
-          <a:blip r:embed="rId32"/>
-          <a:stretch>
-            <a:fillRect/>
-          </a:stretch>
-        </p:blipFill>
-        <p:spPr>
-          <a:xfrm>
-            <a:off x="1438656" y="7992523"/>
-            <a:ext cx="170688" cy="170688"/>
-          </a:xfrm>
-          <a:prstGeom prst="rect">
-            <a:avLst/>
-          </a:prstGeom>
-        </p:spPr>
-      </p:pic>
-      <p:sp>
-        <p:nvSpPr>
-          <p:cNvPr id="67" name="p1p-tech"/>
-          <p:cNvSpPr/>
-          <p:nvPr/>
-        </p:nvSpPr>
-        <p:spPr>
-          <a:xfrm>
-            <a:off x="1438656" y="8232934"/>
-            <a:ext cx="438245" cy="182880"/>
-          </a:xfrm>
-          <a:prstGeom prst="roundRect">
-            <a:avLst>
-              <a:gd name="adj" fmla="val 50000"/>
-            </a:avLst>
-          </a:prstGeom>
-          <a:solidFill>
-            <a:srgbClr val="EEF4FC"/>
-          </a:solidFill>
-          <a:ln/>
-        </p:spPr>
-      </p:sp>
-      <p:sp>
-        <p:nvSpPr>
-          <p:cNvPr id="68" name="p1p-role"/>
-          <p:cNvSpPr/>
-          <p:nvPr/>
-        </p:nvSpPr>
-        <p:spPr>
-          <a:xfrm>
-            <a:off x="4096512" y="7894225"/>
-            <a:ext cx="2676144" cy="790289"/>
-          </a:xfrm>
-          <a:prstGeom prst="roundRect">
-            <a:avLst>
-              <a:gd name="adj" fmla="val 13113"/>
-            </a:avLst>
-          </a:prstGeom>
-          <a:solidFill>
-            <a:srgbClr val="FFFFFF"/>
-          </a:solidFill>
-          <a:ln w="12192">
-            <a:solidFill>
-              <a:srgbClr val="D8E0EB"/>
-            </a:solidFill>
-            <a:prstDash val="solid"/>
-          </a:ln>
-        </p:spPr>
-      </p:sp>
-      <p:pic>
-        <p:nvPicPr>
-          <p:cNvPr id="69" name="svg" descr="svg">    </p:cNvPr>
-          <p:cNvPicPr>
-            <a:picLocks noChangeAspect="1"/>
-          </p:cNvPicPr>
-          <p:nvPr/>
-        </p:nvPicPr>
-        <p:blipFill>
-          <a:blip r:embed="rId33"/>
-          <a:stretch>
-            <a:fillRect/>
-          </a:stretch>
-        </p:blipFill>
-        <p:spPr>
-          <a:xfrm>
-            <a:off x="4224528" y="7992523"/>
-            <a:ext cx="170688" cy="170688"/>
-          </a:xfrm>
-          <a:prstGeom prst="rect">
-            <a:avLst/>
-          </a:prstGeom>
-        </p:spPr>
-      </p:pic>
-      <p:sp>
-        <p:nvSpPr>
-          <p:cNvPr id="70" name="i"/>
-          <p:cNvSpPr/>
-          <p:nvPr/>
-        </p:nvSpPr>
-        <p:spPr>
-          <a:xfrm>
-            <a:off x="777240" y="8732234"/>
-            <a:ext cx="79248" cy="79248"/>
-          </a:xfrm>
-          <a:prstGeom prst="ellipse">
-            <a:avLst/>
-          </a:prstGeom>
-          <a:solidFill>
-            <a:srgbClr val="2F85E0"/>
-          </a:solidFill>
-          <a:ln w="18288">
-            <a:solidFill>
-              <a:srgbClr val="FFFFFF"/>
-            </a:solidFill>
-            <a:prstDash val="solid"/>
-          </a:ln>
-        </p:spPr>
-      </p:sp>
-      <p:pic>
-        <p:nvPicPr>
-          <p:cNvPr id="71" name="svg" descr="svg">    </p:cNvPr>
-          <p:cNvPicPr>
-            <a:picLocks noChangeAspect="1"/>
-          </p:cNvPicPr>
-          <p:nvPr/>
-        </p:nvPicPr>
-        <p:blipFill>
-          <a:blip r:embed="rId34"/>
-          <a:stretch>
-            <a:fillRect/>
-          </a:stretch>
-        </p:blipFill>
-        <p:spPr>
-          <a:xfrm>
-            <a:off x="512064" y="8851075"/>
-            <a:ext cx="609600" cy="609600"/>
-          </a:xfrm>
-          <a:prstGeom prst="rect">
-            <a:avLst/>
-          </a:prstGeom>
-        </p:spPr>
-      </p:pic>
-      <p:sp>
-        <p:nvSpPr>
-          <p:cNvPr id="72" name="s"/>
-          <p:cNvSpPr/>
-          <p:nvPr/>
-        </p:nvSpPr>
-        <p:spPr>
-          <a:xfrm>
-            <a:off x="1532858" y="9151811"/>
-            <a:ext cx="121920" cy="12192"/>
-          </a:xfrm>
-          <a:prstGeom prst="rect">
-            <a:avLst/>
-          </a:prstGeom>
-          <a:solidFill>
-            <a:srgbClr val="C3CEDD"/>
-          </a:solidFill>
-          <a:ln/>
-        </p:spPr>
-      </p:sp>
-      <p:sp>
-        <p:nvSpPr>
-          <p:cNvPr id="73" name="i"/>
-          <p:cNvSpPr/>
-          <p:nvPr/>
-        </p:nvSpPr>
-        <p:spPr>
-          <a:xfrm>
-            <a:off x="4149185" y="9115235"/>
-            <a:ext cx="85344" cy="85344"/>
-          </a:xfrm>
-          <a:prstGeom prst="ellipse">
-            <a:avLst/>
-          </a:prstGeom>
-          <a:solidFill>
-            <a:srgbClr val="FDBB30"/>
-          </a:solidFill>
-          <a:ln/>
-        </p:spPr>
-      </p:sp>
-      <p:pic>
-        <p:nvPicPr>
-          <p:cNvPr id="74" name="s" descr="s">    </p:cNvPr>
-          <p:cNvPicPr>
-            <a:picLocks noChangeAspect="1"/>
-          </p:cNvPicPr>
-          <p:nvPr/>
-        </p:nvPicPr>
-        <p:blipFill>
-          <a:blip r:embed="rId35"/>
-          <a:stretch>
-            <a:fillRect/>
-          </a:stretch>
-        </p:blipFill>
-        <p:spPr>
-          <a:xfrm>
-            <a:off x="4236561" y="9150795"/>
-            <a:ext cx="2688336" cy="18288"/>
-          </a:xfrm>
-          <a:prstGeom prst="rect">
-            <a:avLst/>
-          </a:prstGeom>
-        </p:spPr>
-      </p:pic>
-      <p:sp>
-        <p:nvSpPr>
-          <p:cNvPr id="75" name="key"/>
+          <p:cNvPr id="37" name="key"/>
           <p:cNvSpPr/>
           <p:nvPr/>
         </p:nvSpPr>
@@ -2792,7 +1877,7 @@
       </p:sp>
       <p:sp>
         <p:nvSpPr>
-          <p:cNvPr id="76" name="i"/>
+          <p:cNvPr id="38" name="i"/>
           <p:cNvSpPr/>
           <p:nvPr/>
         </p:nvSpPr>
@@ -2812,7 +1897,7 @@
       </p:sp>
       <p:sp>
         <p:nvSpPr>
-          <p:cNvPr id="77" name="b"/>
+          <p:cNvPr id="39" name="b"/>
           <p:cNvSpPr/>
           <p:nvPr/>
         </p:nvSpPr>
@@ -2832,7 +1917,7 @@
       </p:sp>
       <p:sp>
         <p:nvSpPr>
-          <p:cNvPr id="78" name="i"/>
+          <p:cNvPr id="40" name="i"/>
           <p:cNvSpPr/>
           <p:nvPr/>
         </p:nvSpPr>
@@ -2852,7 +1937,7 @@
       </p:sp>
       <p:sp>
         <p:nvSpPr>
-          <p:cNvPr id="79" name="b"/>
+          <p:cNvPr id="41" name="b"/>
           <p:cNvSpPr/>
           <p:nvPr/>
         </p:nvSpPr>
@@ -2872,7 +1957,7 @@
       </p:sp>
       <p:sp>
         <p:nvSpPr>
-          <p:cNvPr id="80" name="i"/>
+          <p:cNvPr id="42" name="i"/>
           <p:cNvSpPr/>
           <p:nvPr/>
         </p:nvSpPr>
@@ -2892,7 +1977,7 @@
       </p:sp>
       <p:sp>
         <p:nvSpPr>
-          <p:cNvPr id="81" name="01"/>
+          <p:cNvPr id="43" name="01"/>
           <p:cNvSpPr txBox="1"/>
           <p:nvPr/>
         </p:nvSpPr>
@@ -2931,7 +2016,7 @@
       </p:sp>
       <p:sp>
         <p:nvSpPr>
-          <p:cNvPr id="82" name="PT 주제 1 · 가장 중요하게 생각하는 가치와 실천 경험"/>
+          <p:cNvPr id="44" name="PT 주제 1 · 가장 중요하게 생각하는 가치와 실천 경험"/>
           <p:cNvSpPr txBox="1"/>
           <p:nvPr/>
         </p:nvSpPr>
@@ -2970,7 +2055,7 @@
       </p:sp>
       <p:sp>
         <p:nvSpPr>
-          <p:cNvPr id="83" name="제가 가장 중요하게 생각하는 가치는"/>
+          <p:cNvPr id="45" name="제가 가장 중요하게 생각하는 가치는"/>
           <p:cNvSpPr txBox="1"/>
           <p:nvPr/>
         </p:nvSpPr>
@@ -3009,7 +2094,7 @@
       </p:sp>
       <p:sp>
         <p:nvSpPr>
-          <p:cNvPr id="84" name="공동의 목표를 공유하며"/>
+          <p:cNvPr id="46" name="공동의 목표를 공유하며"/>
           <p:cNvSpPr txBox="1"/>
           <p:nvPr/>
         </p:nvSpPr>
@@ -3062,7 +2147,7 @@
       </p:sp>
       <p:sp>
         <p:nvSpPr>
-          <p:cNvPr id="85" name="함께 성과를 만드는 협업입니다"/>
+          <p:cNvPr id="47" name="함께 성과를 만드는 협업입니다"/>
           <p:cNvSpPr txBox="1"/>
           <p:nvPr/>
         </p:nvSpPr>
@@ -3129,108 +2214,941 @@
       </p:sp>
       <p:sp>
         <p:nvSpPr>
-          <p:cNvPr id="86" name="PROJECT"/>
-          <p:cNvSpPr txBox="1"/>
-          <p:nvPr/>
-        </p:nvSpPr>
-        <p:spPr>
-          <a:xfrm>
-            <a:off x="731520" y="2254853"/>
-            <a:ext cx="707327" cy="134112"/>
-          </a:xfrm>
-          <a:prstGeom prst="rect">
-            <a:avLst/>
-          </a:prstGeom>
-          <a:noFill/>
-          <a:ln/>
-        </p:spPr>
-        <p:txBody>
-          <a:bodyPr wrap="none" lIns="0" tIns="0" rIns="0" bIns="0" rtlCol="0" anchor="ctr"/>
-          <a:lstStyle/>
-          <a:p>
-            <a:pPr algn="l" indent="0" marL="0">
-              <a:buNone/>
-            </a:pPr>
-            <a:r>
-              <a:rPr lang="ko-KR" altLang="en-US" sz="864" spc="138" kern="0" dirty="0">
-                <a:solidFill>
-                  <a:srgbClr val="2A78DD"/>
+          <p:cNvPr id="48" name="01"/>
+          <p:cNvSpPr txBox="1"/>
+          <p:nvPr/>
+        </p:nvSpPr>
+        <p:spPr>
+          <a:xfrm>
+            <a:off x="566642" y="2158937"/>
+            <a:ext cx="207836" cy="140208"/>
+          </a:xfrm>
+          <a:prstGeom prst="rect">
+            <a:avLst/>
+          </a:prstGeom>
+          <a:noFill/>
+          <a:ln/>
+        </p:spPr>
+        <p:txBody>
+          <a:bodyPr wrap="none" lIns="0" tIns="0" rIns="0" bIns="0" rtlCol="0" anchor="ctr"/>
+          <a:lstStyle/>
+          <a:p>
+            <a:pPr algn="l" indent="0" marL="0">
+              <a:buNone/>
+            </a:pPr>
+            <a:r>
+              <a:rPr lang="ko-KR" altLang="en-US" sz="912" spc="18" kern="0" dirty="0">
+                <a:solidFill>
+                  <a:srgbClr val="FFFFFF"/>
+                </a:solidFill>
+                <a:latin typeface="Paperlogy 8 ExtraBold" pitchFamily="34" charset="0"/>
+                <a:ea typeface="Paperlogy 8 ExtraBold" pitchFamily="34" charset="-127"/>
+                <a:cs typeface="Paperlogy 8 ExtraBold" pitchFamily="34" charset="-120"/>
+              </a:rPr>
+              <a:t>01</a:t>
+            </a:r>
+            <a:endParaRPr lang="en-US" sz="912" dirty="0"/>
+          </a:p>
+        </p:txBody>
+      </p:sp>
+      <p:sp>
+        <p:nvSpPr>
+          <p:cNvPr id="49" name="의견을 모아 주제를 정하다"/>
+          <p:cNvSpPr txBox="1"/>
+          <p:nvPr/>
+        </p:nvSpPr>
+        <p:spPr>
+          <a:xfrm>
+            <a:off x="902208" y="2121027"/>
+            <a:ext cx="1909450" cy="213360"/>
+          </a:xfrm>
+          <a:prstGeom prst="rect">
+            <a:avLst/>
+          </a:prstGeom>
+          <a:noFill/>
+          <a:ln/>
+        </p:spPr>
+        <p:txBody>
+          <a:bodyPr wrap="none" lIns="0" tIns="0" rIns="0" bIns="0" rtlCol="0" anchor="ctr"/>
+          <a:lstStyle/>
+          <a:p>
+            <a:pPr algn="l" indent="0" marL="0">
+              <a:buNone/>
+            </a:pPr>
+            <a:r>
+              <a:rPr lang="ko-KR" altLang="en-US" sz="1440" spc="-50" kern="0" dirty="0">
+                <a:solidFill>
+                  <a:srgbClr val="0B2147"/>
+                </a:solidFill>
+                <a:latin typeface="Paperlogy 8 ExtraBold" pitchFamily="34" charset="0"/>
+                <a:ea typeface="Paperlogy 8 ExtraBold" pitchFamily="34" charset="-127"/>
+                <a:cs typeface="Paperlogy 8 ExtraBold" pitchFamily="34" charset="-120"/>
+              </a:rPr>
+              <a:t>의견을 모아 주제를 정하다</a:t>
+            </a:r>
+            <a:endParaRPr lang="en-US" sz="1440" dirty="0"/>
+          </a:p>
+        </p:txBody>
+      </p:sp>
+      <p:sp>
+        <p:nvSpPr>
+          <p:cNvPr id="50" name="학생 BIM 경진대회 · 4인 팀 팀장"/>
+          <p:cNvSpPr txBox="1"/>
+          <p:nvPr/>
+        </p:nvSpPr>
+        <p:spPr>
+          <a:xfrm>
+            <a:off x="5471827" y="2154555"/>
+            <a:ext cx="1669658" cy="146304"/>
+          </a:xfrm>
+          <a:prstGeom prst="rect">
+            <a:avLst/>
+          </a:prstGeom>
+          <a:noFill/>
+          <a:ln/>
+        </p:spPr>
+        <p:txBody>
+          <a:bodyPr wrap="none" lIns="0" tIns="0" rIns="0" bIns="0" rtlCol="0" anchor="ctr"/>
+          <a:lstStyle/>
+          <a:p>
+            <a:pPr algn="l" indent="0" marL="0">
+              <a:buNone/>
+            </a:pPr>
+            <a:r>
+              <a:rPr lang="ko-KR" altLang="en-US" sz="960" spc="-10" kern="0" dirty="0">
+                <a:solidFill>
+                  <a:srgbClr val="4B5568"/>
+                </a:solidFill>
+                <a:latin typeface="Paperlogy 6 SemiBold" pitchFamily="34" charset="0"/>
+                <a:ea typeface="Paperlogy 6 SemiBold" pitchFamily="34" charset="-127"/>
+                <a:cs typeface="Paperlogy 6 SemiBold" pitchFamily="34" charset="-120"/>
+              </a:rPr>
+              <a:t>학생 BIM 경진대회 · 4인 팀 팀장</a:t>
+            </a:r>
+            <a:endParaRPr lang="en-US" sz="960" dirty="0"/>
+          </a:p>
+        </p:txBody>
+      </p:sp>
+      <p:sp>
+        <p:nvSpPr>
+          <p:cNvPr id="51" name="참신성"/>
+          <p:cNvSpPr txBox="1"/>
+          <p:nvPr/>
+        </p:nvSpPr>
+        <p:spPr>
+          <a:xfrm>
+            <a:off x="1889379" y="2535841"/>
+            <a:ext cx="390811" cy="158496"/>
+          </a:xfrm>
+          <a:prstGeom prst="rect">
+            <a:avLst/>
+          </a:prstGeom>
+          <a:noFill/>
+          <a:ln/>
+        </p:spPr>
+        <p:txBody>
+          <a:bodyPr wrap="none" lIns="0" tIns="0" rIns="0" bIns="0" rtlCol="0" anchor="ctr"/>
+          <a:lstStyle/>
+          <a:p>
+            <a:pPr algn="l" indent="0" marL="0">
+              <a:buNone/>
+            </a:pPr>
+            <a:r>
+              <a:rPr lang="ko-KR" altLang="en-US" sz="1056" spc="-32" kern="0" dirty="0">
+                <a:solidFill>
+                  <a:srgbClr val="0B2147"/>
                 </a:solidFill>
                 <a:latin typeface="Paperlogy 7 Bold" pitchFamily="34" charset="0"/>
                 <a:ea typeface="Paperlogy 7 Bold" pitchFamily="34" charset="-127"/>
                 <a:cs typeface="Paperlogy 7 Bold" pitchFamily="34" charset="-120"/>
               </a:rPr>
-              <a:t>PROJECT</a:t>
-            </a:r>
-            <a:endParaRPr lang="en-US" sz="864" dirty="0"/>
-          </a:p>
-        </p:txBody>
-      </p:sp>
-      <p:sp>
-        <p:nvSpPr>
-          <p:cNvPr id="87" name="학생 BIM 경진대회"/>
-          <p:cNvSpPr txBox="1"/>
-          <p:nvPr/>
-        </p:nvSpPr>
-        <p:spPr>
-          <a:xfrm>
-            <a:off x="1591247" y="2254853"/>
-            <a:ext cx="890713" cy="134112"/>
-          </a:xfrm>
-          <a:prstGeom prst="rect">
-            <a:avLst/>
-          </a:prstGeom>
-          <a:noFill/>
-          <a:ln/>
-        </p:spPr>
-        <p:txBody>
-          <a:bodyPr wrap="none" lIns="0" tIns="0" rIns="0" bIns="0" rtlCol="0" anchor="ctr"/>
-          <a:lstStyle/>
-          <a:p>
-            <a:pPr algn="l" indent="0" marL="0">
-              <a:buNone/>
-            </a:pPr>
-            <a:r>
-              <a:rPr lang="ko-KR" altLang="en-US" sz="864" spc="-9" kern="0" dirty="0">
-                <a:solidFill>
-                  <a:srgbClr val="004B8D"/>
+              <a:t>참신성</a:t>
+            </a:r>
+            <a:endParaRPr lang="en-US" sz="1056" dirty="0"/>
+          </a:p>
+        </p:txBody>
+      </p:sp>
+      <p:sp>
+        <p:nvSpPr>
+          <p:cNvPr id="52" name="마감 3주 전까지 주제 미확정"/>
+          <p:cNvSpPr txBox="1"/>
+          <p:nvPr/>
+        </p:nvSpPr>
+        <p:spPr>
+          <a:xfrm>
+            <a:off x="3342894" y="2494217"/>
+            <a:ext cx="1339099" cy="140208"/>
+          </a:xfrm>
+          <a:prstGeom prst="rect">
+            <a:avLst/>
+          </a:prstGeom>
+          <a:noFill/>
+          <a:ln/>
+        </p:spPr>
+        <p:txBody>
+          <a:bodyPr wrap="none" lIns="0" tIns="0" rIns="0" bIns="0" rtlCol="0" anchor="ctr"/>
+          <a:lstStyle/>
+          <a:p>
+            <a:pPr algn="l" indent="0" marL="0">
+              <a:buNone/>
+            </a:pPr>
+            <a:r>
+              <a:rPr lang="ko-KR" altLang="en-US" sz="912" spc="-18" kern="0" dirty="0">
+                <a:solidFill>
+                  <a:srgbClr val="8691A5"/>
+                </a:solidFill>
+                <a:latin typeface="Paperlogy 6 SemiBold" pitchFamily="34" charset="0"/>
+                <a:ea typeface="Paperlogy 6 SemiBold" pitchFamily="34" charset="-127"/>
+                <a:cs typeface="Paperlogy 6 SemiBold" pitchFamily="34" charset="-120"/>
+              </a:rPr>
+              <a:t>마감 3주 전까지 주제 미확정</a:t>
+            </a:r>
+            <a:endParaRPr lang="en-US" sz="912" dirty="0"/>
+          </a:p>
+        </p:txBody>
+      </p:sp>
+      <p:sp>
+        <p:nvSpPr>
+          <p:cNvPr id="53" name="구현 가능성"/>
+          <p:cNvSpPr txBox="1"/>
+          <p:nvPr/>
+        </p:nvSpPr>
+        <p:spPr>
+          <a:xfrm>
+            <a:off x="5712905" y="2535841"/>
+            <a:ext cx="644271" cy="158496"/>
+          </a:xfrm>
+          <a:prstGeom prst="rect">
+            <a:avLst/>
+          </a:prstGeom>
+          <a:noFill/>
+          <a:ln/>
+        </p:spPr>
+        <p:txBody>
+          <a:bodyPr wrap="none" lIns="0" tIns="0" rIns="0" bIns="0" rtlCol="0" anchor="ctr"/>
+          <a:lstStyle/>
+          <a:p>
+            <a:pPr algn="l" indent="0" marL="0">
+              <a:buNone/>
+            </a:pPr>
+            <a:r>
+              <a:rPr lang="ko-KR" altLang="en-US" sz="1056" spc="-32" kern="0" dirty="0">
+                <a:solidFill>
+                  <a:srgbClr val="0B2147"/>
                 </a:solidFill>
                 <a:latin typeface="Paperlogy 7 Bold" pitchFamily="34" charset="0"/>
                 <a:ea typeface="Paperlogy 7 Bold" pitchFamily="34" charset="-127"/>
                 <a:cs typeface="Paperlogy 7 Bold" pitchFamily="34" charset="-120"/>
               </a:rPr>
-              <a:t>학생 BIM 경진대회</a:t>
-            </a:r>
-            <a:endParaRPr lang="en-US" sz="864" dirty="0"/>
-          </a:p>
-        </p:txBody>
-      </p:sp>
-      <p:sp>
-        <p:nvSpPr>
-          <p:cNvPr id="88" name="4인 팀"/>
-          <p:cNvSpPr txBox="1"/>
-          <p:nvPr/>
-        </p:nvSpPr>
-        <p:spPr>
-          <a:xfrm>
-            <a:off x="2675382" y="2254853"/>
-            <a:ext cx="334804" cy="134112"/>
-          </a:xfrm>
-          <a:prstGeom prst="rect">
-            <a:avLst/>
-          </a:prstGeom>
-          <a:noFill/>
-          <a:ln/>
-        </p:spPr>
-        <p:txBody>
-          <a:bodyPr wrap="none" lIns="0" tIns="0" rIns="0" bIns="0" rtlCol="0" anchor="ctr"/>
-          <a:lstStyle/>
-          <a:p>
-            <a:pPr algn="l" indent="0" marL="0">
-              <a:buNone/>
-            </a:pPr>
-            <a:r>
-              <a:rPr lang="ko-KR" altLang="en-US" sz="864" spc="-9" kern="0" dirty="0">
+              <a:t>구현 가능성</a:t>
+            </a:r>
+            <a:endParaRPr lang="en-US" sz="1056" dirty="0"/>
+          </a:p>
+        </p:txBody>
+      </p:sp>
+      <p:sp>
+        <p:nvSpPr>
+          <p:cNvPr id="54" name="경청 · 수상작 분석 · 교수님 조언"/>
+          <p:cNvSpPr txBox="1"/>
+          <p:nvPr/>
+        </p:nvSpPr>
+        <p:spPr>
+          <a:xfrm>
+            <a:off x="3176730" y="2865072"/>
+            <a:ext cx="1691467" cy="158496"/>
+          </a:xfrm>
+          <a:prstGeom prst="rect">
+            <a:avLst/>
+          </a:prstGeom>
+          <a:noFill/>
+          <a:ln/>
+        </p:spPr>
+        <p:txBody>
+          <a:bodyPr wrap="none" lIns="0" tIns="0" rIns="0" bIns="0" rtlCol="0" anchor="ctr"/>
+          <a:lstStyle/>
+          <a:p>
+            <a:pPr algn="l" indent="0" marL="0">
+              <a:buNone/>
+            </a:pPr>
+            <a:r>
+              <a:rPr lang="ko-KR" altLang="en-US" sz="1056" spc="-32" kern="0" dirty="0">
+                <a:solidFill>
+                  <a:srgbClr val="1C2536"/>
+                </a:solidFill>
+                <a:latin typeface="Paperlogy 6 SemiBold" pitchFamily="34" charset="0"/>
+                <a:ea typeface="Paperlogy 6 SemiBold" pitchFamily="34" charset="-127"/>
+                <a:cs typeface="Paperlogy 6 SemiBold" pitchFamily="34" charset="-120"/>
+              </a:rPr>
+              <a:t>경청 · 수상작 분석 · 교수님 조언</a:t>
+            </a:r>
+            <a:endParaRPr lang="en-US" sz="1056" dirty="0"/>
+          </a:p>
+        </p:txBody>
+      </p:sp>
+      <p:sp>
+        <p:nvSpPr>
+          <p:cNvPr id="55" name="판단 기준 마련"/>
+          <p:cNvSpPr txBox="1"/>
+          <p:nvPr/>
+        </p:nvSpPr>
+        <p:spPr>
+          <a:xfrm>
+            <a:off x="3607118" y="3346609"/>
+            <a:ext cx="783717" cy="158496"/>
+          </a:xfrm>
+          <a:prstGeom prst="rect">
+            <a:avLst/>
+          </a:prstGeom>
+          <a:noFill/>
+          <a:ln/>
+        </p:spPr>
+        <p:txBody>
+          <a:bodyPr wrap="none" lIns="0" tIns="0" rIns="0" bIns="0" rtlCol="0" anchor="ctr"/>
+          <a:lstStyle/>
+          <a:p>
+            <a:pPr algn="l" indent="0" marL="0">
+              <a:buNone/>
+            </a:pPr>
+            <a:r>
+              <a:rPr lang="ko-KR" altLang="en-US" sz="1056" spc="-32" kern="0" dirty="0">
+                <a:solidFill>
+                  <a:srgbClr val="004B8D"/>
+                </a:solidFill>
+                <a:latin typeface="Paperlogy 8 ExtraBold" pitchFamily="34" charset="0"/>
+                <a:ea typeface="Paperlogy 8 ExtraBold" pitchFamily="34" charset="-127"/>
+                <a:cs typeface="Paperlogy 8 ExtraBold" pitchFamily="34" charset="-120"/>
+              </a:rPr>
+              <a:t>판단 기준 마련</a:t>
+            </a:r>
+            <a:endParaRPr lang="en-US" sz="1056" dirty="0"/>
+          </a:p>
+        </p:txBody>
+      </p:sp>
+      <p:sp>
+        <p:nvSpPr>
+          <p:cNvPr id="56" name="‘유닛 모듈러 기반 사용자 맞춤형 리모델링 방법’선정"/>
+          <p:cNvSpPr txBox="1"/>
+          <p:nvPr/>
+        </p:nvSpPr>
+        <p:spPr>
+          <a:xfrm>
+            <a:off x="1843625" y="3846195"/>
+            <a:ext cx="4261935" cy="243840"/>
+          </a:xfrm>
+          <a:prstGeom prst="rect">
+            <a:avLst/>
+          </a:prstGeom>
+          <a:noFill/>
+          <a:ln/>
+        </p:spPr>
+        <p:txBody>
+          <a:bodyPr wrap="none" lIns="0" tIns="0" rIns="0" bIns="0" rtlCol="0" anchor="ctr"/>
+          <a:lstStyle/>
+          <a:p>
+            <a:pPr algn="ctr" indent="0" marL="0">
+              <a:buNone/>
+            </a:pPr>
+            <a:r>
+              <a:rPr lang="ko-KR" altLang="en-US" sz="1632" spc="-65" kern="0" dirty="0">
+                <a:solidFill>
+                  <a:srgbClr val="FFFFFF"/>
+                </a:solidFill>
+                <a:latin typeface="Paperlogy 8 ExtraBold" pitchFamily="34" charset="0"/>
+                <a:ea typeface="Paperlogy 8 ExtraBold" pitchFamily="34" charset="-127"/>
+                <a:cs typeface="Paperlogy 8 ExtraBold" pitchFamily="34" charset="-120"/>
+              </a:rPr>
+              <a:t>‘유닛 모듈러 기반 사용자 맞춤형 리모델링 방법’</a:t>
+            </a:r>
+            <a:pPr algn="ctr" indent="0" marL="0">
+              <a:buNone/>
+            </a:pPr>
+            <a:r>
+              <a:rPr lang="ko-KR" altLang="en-US" sz="1632" spc="-65" kern="0" dirty="0">
+                <a:solidFill>
+                  <a:srgbClr val="45B9EC"/>
+                </a:solidFill>
+                <a:latin typeface="Paperlogy 8 ExtraBold" pitchFamily="34" charset="0"/>
+                <a:ea typeface="Paperlogy 8 ExtraBold" pitchFamily="34" charset="-127"/>
+                <a:cs typeface="Paperlogy 8 ExtraBold" pitchFamily="34" charset="-120"/>
+              </a:rPr>
+              <a:t>선정</a:t>
+            </a:r>
+            <a:endParaRPr lang="en-US" sz="1632" dirty="0"/>
+          </a:p>
+        </p:txBody>
+      </p:sp>
+      <p:sp>
+        <p:nvSpPr>
+          <p:cNvPr id="57" name="리모델링 규모에 따라 유닛 모듈러를 배치하고, 모듈 수 · 자재 물량을 "/>
+          <p:cNvSpPr txBox="1"/>
+          <p:nvPr/>
+        </p:nvSpPr>
+        <p:spPr>
+          <a:xfrm>
+            <a:off x="1888961" y="4147947"/>
+            <a:ext cx="4171167" cy="158496"/>
+          </a:xfrm>
+          <a:prstGeom prst="rect">
+            <a:avLst/>
+          </a:prstGeom>
+          <a:noFill/>
+          <a:ln/>
+        </p:spPr>
+        <p:txBody>
+          <a:bodyPr wrap="none" lIns="0" tIns="0" rIns="0" bIns="0" rtlCol="0" anchor="ctr"/>
+          <a:lstStyle/>
+          <a:p>
+            <a:pPr algn="ctr" indent="0" marL="0">
+              <a:buNone/>
+            </a:pPr>
+            <a:r>
+              <a:rPr lang="ko-KR" altLang="en-US" sz="1056" spc="-26" kern="0" dirty="0">
+                <a:solidFill>
+                  <a:srgbClr val="CED3DA"/>
+                </a:solidFill>
+                <a:latin typeface="Paperlogy 5 Medium" pitchFamily="34" charset="0"/>
+                <a:ea typeface="Paperlogy 5 Medium" pitchFamily="34" charset="-127"/>
+                <a:cs typeface="Paperlogy 5 Medium" pitchFamily="34" charset="-120"/>
+              </a:rPr>
+              <a:t>리모델링 규모에 따라 유닛 모듈러를 배치하고, 모듈 수 · 자재 물량을 자동 산출</a:t>
+            </a:r>
+            <a:endParaRPr lang="en-US" sz="1056" dirty="0"/>
+          </a:p>
+        </p:txBody>
+      </p:sp>
+      <p:sp>
+        <p:nvSpPr>
+          <p:cNvPr id="58" name="02"/>
+          <p:cNvSpPr txBox="1"/>
+          <p:nvPr/>
+        </p:nvSpPr>
+        <p:spPr>
+          <a:xfrm>
+            <a:off x="566642" y="4940618"/>
+            <a:ext cx="207836" cy="140208"/>
+          </a:xfrm>
+          <a:prstGeom prst="rect">
+            <a:avLst/>
+          </a:prstGeom>
+          <a:noFill/>
+          <a:ln/>
+        </p:spPr>
+        <p:txBody>
+          <a:bodyPr wrap="none" lIns="0" tIns="0" rIns="0" bIns="0" rtlCol="0" anchor="ctr"/>
+          <a:lstStyle/>
+          <a:p>
+            <a:pPr algn="l" indent="0" marL="0">
+              <a:buNone/>
+            </a:pPr>
+            <a:r>
+              <a:rPr lang="ko-KR" altLang="en-US" sz="912" spc="18" kern="0" dirty="0">
+                <a:solidFill>
+                  <a:srgbClr val="FFFFFF"/>
+                </a:solidFill>
+                <a:latin typeface="Paperlogy 8 ExtraBold" pitchFamily="34" charset="0"/>
+                <a:ea typeface="Paperlogy 8 ExtraBold" pitchFamily="34" charset="-127"/>
+                <a:cs typeface="Paperlogy 8 ExtraBold" pitchFamily="34" charset="-120"/>
+              </a:rPr>
+              <a:t>02</a:t>
+            </a:r>
+            <a:endParaRPr lang="en-US" sz="912" dirty="0"/>
+          </a:p>
+        </p:txBody>
+      </p:sp>
+      <p:sp>
+        <p:nvSpPr>
+          <p:cNvPr id="59" name="강점에 맞게 역할을 나누다"/>
+          <p:cNvSpPr txBox="1"/>
+          <p:nvPr/>
+        </p:nvSpPr>
+        <p:spPr>
+          <a:xfrm>
+            <a:off x="902208" y="4902708"/>
+            <a:ext cx="1909450" cy="213360"/>
+          </a:xfrm>
+          <a:prstGeom prst="rect">
+            <a:avLst/>
+          </a:prstGeom>
+          <a:noFill/>
+          <a:ln/>
+        </p:spPr>
+        <p:txBody>
+          <a:bodyPr wrap="none" lIns="0" tIns="0" rIns="0" bIns="0" rtlCol="0" anchor="ctr"/>
+          <a:lstStyle/>
+          <a:p>
+            <a:pPr algn="l" indent="0" marL="0">
+              <a:buNone/>
+            </a:pPr>
+            <a:r>
+              <a:rPr lang="ko-KR" altLang="en-US" sz="1440" spc="-50" kern="0" dirty="0">
+                <a:solidFill>
+                  <a:srgbClr val="0B2147"/>
+                </a:solidFill>
+                <a:latin typeface="Paperlogy 8 ExtraBold" pitchFamily="34" charset="0"/>
+                <a:ea typeface="Paperlogy 8 ExtraBold" pitchFamily="34" charset="-127"/>
+                <a:cs typeface="Paperlogy 8 ExtraBold" pitchFamily="34" charset="-120"/>
+              </a:rPr>
+              <a:t>강점에 맞게 역할을 나누다</a:t>
+            </a:r>
+            <a:endParaRPr lang="en-US" sz="1440" dirty="0"/>
+          </a:p>
+        </p:txBody>
+      </p:sp>
+      <p:sp>
+        <p:nvSpPr>
+          <p:cNvPr id="60" name="팀장 · 나"/>
+          <p:cNvSpPr txBox="1"/>
+          <p:nvPr/>
+        </p:nvSpPr>
+        <p:spPr>
+          <a:xfrm>
+            <a:off x="3796189" y="5335524"/>
+            <a:ext cx="490823" cy="158496"/>
+          </a:xfrm>
+          <a:prstGeom prst="rect">
+            <a:avLst/>
+          </a:prstGeom>
+          <a:noFill/>
+          <a:ln/>
+        </p:spPr>
+        <p:txBody>
+          <a:bodyPr wrap="none" lIns="0" tIns="0" rIns="0" bIns="0" rtlCol="0" anchor="ctr"/>
+          <a:lstStyle/>
+          <a:p>
+            <a:pPr algn="ctr" indent="0" marL="0">
+              <a:buNone/>
+            </a:pPr>
+            <a:r>
+              <a:rPr lang="ko-KR" altLang="en-US" sz="1056" spc="-21" kern="0" dirty="0">
+                <a:solidFill>
+                  <a:srgbClr val="FFFFFF"/>
+                </a:solidFill>
+                <a:latin typeface="Paperlogy 8 ExtraBold" pitchFamily="34" charset="0"/>
+                <a:ea typeface="Paperlogy 8 ExtraBold" pitchFamily="34" charset="-127"/>
+                <a:cs typeface="Paperlogy 8 ExtraBold" pitchFamily="34" charset="-120"/>
+              </a:rPr>
+              <a:t>팀장 · 나</a:t>
+            </a:r>
+            <a:endParaRPr lang="en-US" sz="1056" dirty="0"/>
+          </a:p>
+        </p:txBody>
+      </p:sp>
+      <p:sp>
+        <p:nvSpPr>
+          <p:cNvPr id="61" name="프로젝트 총괄 · Dynamo 기반 자동화 알고리즘 개발"/>
+          <p:cNvSpPr txBox="1"/>
+          <p:nvPr/>
+        </p:nvSpPr>
+        <p:spPr>
+          <a:xfrm>
+            <a:off x="2524636" y="5554313"/>
+            <a:ext cx="2899816" cy="158496"/>
+          </a:xfrm>
+          <a:prstGeom prst="rect">
+            <a:avLst/>
+          </a:prstGeom>
+          <a:noFill/>
+          <a:ln/>
+        </p:spPr>
+        <p:txBody>
+          <a:bodyPr wrap="none" lIns="0" tIns="0" rIns="0" bIns="0" rtlCol="0" anchor="ctr"/>
+          <a:lstStyle/>
+          <a:p>
+            <a:pPr algn="ctr" indent="0" marL="0">
+              <a:buNone/>
+            </a:pPr>
+            <a:r>
+              <a:rPr lang="ko-KR" altLang="en-US" sz="1056" spc="-26" kern="0" dirty="0">
+                <a:solidFill>
+                  <a:srgbClr val="DADEE3"/>
+                </a:solidFill>
+                <a:latin typeface="Paperlogy 5 Medium" pitchFamily="34" charset="0"/>
+                <a:ea typeface="Paperlogy 5 Medium" pitchFamily="34" charset="-127"/>
+                <a:cs typeface="Paperlogy 5 Medium" pitchFamily="34" charset="-120"/>
+              </a:rPr>
+              <a:t>프로젝트 총괄 · Dynamo 기반 자동화 알고리즘 개발</a:t>
+            </a:r>
+            <a:endParaRPr lang="en-US" sz="1056" dirty="0"/>
+          </a:p>
+        </p:txBody>
+      </p:sp>
+      <p:sp>
+        <p:nvSpPr>
+          <p:cNvPr id="62" name="팀원 A"/>
+          <p:cNvSpPr txBox="1"/>
+          <p:nvPr/>
+        </p:nvSpPr>
+        <p:spPr>
+          <a:xfrm>
+            <a:off x="1752981" y="6151055"/>
+            <a:ext cx="407670" cy="158496"/>
+          </a:xfrm>
+          <a:prstGeom prst="rect">
+            <a:avLst/>
+          </a:prstGeom>
+          <a:noFill/>
+          <a:ln/>
+        </p:spPr>
+        <p:txBody>
+          <a:bodyPr wrap="none" lIns="0" tIns="0" rIns="0" bIns="0" rtlCol="0" anchor="ctr"/>
+          <a:lstStyle/>
+          <a:p>
+            <a:pPr algn="ctr" indent="0" marL="0">
+              <a:buNone/>
+            </a:pPr>
+            <a:r>
+              <a:rPr lang="ko-KR" altLang="en-US" sz="1056" spc="-21" kern="0" dirty="0">
+                <a:solidFill>
+                  <a:srgbClr val="0B2147"/>
+                </a:solidFill>
+                <a:latin typeface="Paperlogy 8 ExtraBold" pitchFamily="34" charset="0"/>
+                <a:ea typeface="Paperlogy 8 ExtraBold" pitchFamily="34" charset="-127"/>
+                <a:cs typeface="Paperlogy 8 ExtraBold" pitchFamily="34" charset="-120"/>
+              </a:rPr>
+              <a:t>팀원 A</a:t>
+            </a:r>
+            <a:endParaRPr lang="en-US" sz="1056" dirty="0"/>
+          </a:p>
+        </p:txBody>
+      </p:sp>
+      <p:sp>
+        <p:nvSpPr>
+          <p:cNvPr id="63" name="유닛 모듈러 설계"/>
+          <p:cNvSpPr txBox="1"/>
+          <p:nvPr/>
+        </p:nvSpPr>
+        <p:spPr>
+          <a:xfrm>
+            <a:off x="1439762" y="6369844"/>
+            <a:ext cx="899901" cy="158496"/>
+          </a:xfrm>
+          <a:prstGeom prst="rect">
+            <a:avLst/>
+          </a:prstGeom>
+          <a:noFill/>
+          <a:ln/>
+        </p:spPr>
+        <p:txBody>
+          <a:bodyPr wrap="none" lIns="0" tIns="0" rIns="0" bIns="0" rtlCol="0" anchor="ctr"/>
+          <a:lstStyle/>
+          <a:p>
+            <a:pPr algn="ctr" indent="0" marL="0">
+              <a:buNone/>
+            </a:pPr>
+            <a:r>
+              <a:rPr lang="ko-KR" altLang="en-US" sz="1056" spc="-32" kern="0" dirty="0">
+                <a:solidFill>
+                  <a:srgbClr val="4B5568"/>
+                </a:solidFill>
+                <a:latin typeface="Paperlogy 5 Medium" pitchFamily="34" charset="0"/>
+                <a:ea typeface="Paperlogy 5 Medium" pitchFamily="34" charset="-127"/>
+                <a:cs typeface="Paperlogy 5 Medium" pitchFamily="34" charset="-120"/>
+              </a:rPr>
+              <a:t>유닛 모듈러 설계</a:t>
+            </a:r>
+            <a:endParaRPr lang="en-US" sz="1056" dirty="0"/>
+          </a:p>
+        </p:txBody>
+      </p:sp>
+      <p:sp>
+        <p:nvSpPr>
+          <p:cNvPr id="64" name="배치계획"/>
+          <p:cNvSpPr txBox="1"/>
+          <p:nvPr/>
+        </p:nvSpPr>
+        <p:spPr>
+          <a:xfrm>
+            <a:off x="1637348" y="6560249"/>
+            <a:ext cx="504825" cy="158496"/>
+          </a:xfrm>
+          <a:prstGeom prst="rect">
+            <a:avLst/>
+          </a:prstGeom>
+          <a:noFill/>
+          <a:ln/>
+        </p:spPr>
+        <p:txBody>
+          <a:bodyPr wrap="none" lIns="0" tIns="0" rIns="0" bIns="0" rtlCol="0" anchor="ctr"/>
+          <a:lstStyle/>
+          <a:p>
+            <a:pPr algn="ctr" indent="0" marL="0">
+              <a:buNone/>
+            </a:pPr>
+            <a:r>
+              <a:rPr lang="ko-KR" altLang="en-US" sz="1056" spc="-32" kern="0" dirty="0">
+                <a:solidFill>
+                  <a:srgbClr val="4B5568"/>
+                </a:solidFill>
+                <a:latin typeface="Paperlogy 5 Medium" pitchFamily="34" charset="0"/>
+                <a:ea typeface="Paperlogy 5 Medium" pitchFamily="34" charset="-127"/>
+                <a:cs typeface="Paperlogy 5 Medium" pitchFamily="34" charset="-120"/>
+              </a:rPr>
+              <a:t>배치계획</a:t>
+            </a:r>
+            <a:endParaRPr lang="en-US" sz="1056" dirty="0"/>
+          </a:p>
+        </p:txBody>
+      </p:sp>
+      <p:sp>
+        <p:nvSpPr>
+          <p:cNvPr id="65" name="팀원 B"/>
+          <p:cNvSpPr txBox="1"/>
+          <p:nvPr/>
+        </p:nvSpPr>
+        <p:spPr>
+          <a:xfrm>
+            <a:off x="3837908" y="6151055"/>
+            <a:ext cx="407480" cy="158496"/>
+          </a:xfrm>
+          <a:prstGeom prst="rect">
+            <a:avLst/>
+          </a:prstGeom>
+          <a:noFill/>
+          <a:ln/>
+        </p:spPr>
+        <p:txBody>
+          <a:bodyPr wrap="none" lIns="0" tIns="0" rIns="0" bIns="0" rtlCol="0" anchor="ctr"/>
+          <a:lstStyle/>
+          <a:p>
+            <a:pPr algn="ctr" indent="0" marL="0">
+              <a:buNone/>
+            </a:pPr>
+            <a:r>
+              <a:rPr lang="ko-KR" altLang="en-US" sz="1056" spc="-21" kern="0" dirty="0">
+                <a:solidFill>
+                  <a:srgbClr val="0B2147"/>
+                </a:solidFill>
+                <a:latin typeface="Paperlogy 8 ExtraBold" pitchFamily="34" charset="0"/>
+                <a:ea typeface="Paperlogy 8 ExtraBold" pitchFamily="34" charset="-127"/>
+                <a:cs typeface="Paperlogy 8 ExtraBold" pitchFamily="34" charset="-120"/>
+              </a:rPr>
+              <a:t>팀원 B</a:t>
+            </a:r>
+            <a:endParaRPr lang="en-US" sz="1056" dirty="0"/>
+          </a:p>
+        </p:txBody>
+      </p:sp>
+      <p:sp>
+        <p:nvSpPr>
+          <p:cNvPr id="66" name="Revit 기반 BIM 모델링"/>
+          <p:cNvSpPr txBox="1"/>
+          <p:nvPr/>
+        </p:nvSpPr>
+        <p:spPr>
+          <a:xfrm>
+            <a:off x="3322563" y="6369844"/>
+            <a:ext cx="1303963" cy="158496"/>
+          </a:xfrm>
+          <a:prstGeom prst="rect">
+            <a:avLst/>
+          </a:prstGeom>
+          <a:noFill/>
+          <a:ln/>
+        </p:spPr>
+        <p:txBody>
+          <a:bodyPr wrap="none" lIns="0" tIns="0" rIns="0" bIns="0" rtlCol="0" anchor="ctr"/>
+          <a:lstStyle/>
+          <a:p>
+            <a:pPr algn="ctr" indent="0" marL="0">
+              <a:buNone/>
+            </a:pPr>
+            <a:r>
+              <a:rPr lang="ko-KR" altLang="en-US" sz="1056" spc="-32" kern="0" dirty="0">
+                <a:solidFill>
+                  <a:srgbClr val="4B5568"/>
+                </a:solidFill>
+                <a:latin typeface="Paperlogy 5 Medium" pitchFamily="34" charset="0"/>
+                <a:ea typeface="Paperlogy 5 Medium" pitchFamily="34" charset="-127"/>
+                <a:cs typeface="Paperlogy 5 Medium" pitchFamily="34" charset="-120"/>
+              </a:rPr>
+              <a:t>Revit 기반 BIM 모델링</a:t>
+            </a:r>
+            <a:endParaRPr lang="en-US" sz="1056" dirty="0"/>
+          </a:p>
+        </p:txBody>
+      </p:sp>
+      <p:sp>
+        <p:nvSpPr>
+          <p:cNvPr id="67" name="데이터 구축"/>
+          <p:cNvSpPr txBox="1"/>
+          <p:nvPr/>
+        </p:nvSpPr>
+        <p:spPr>
+          <a:xfrm>
+            <a:off x="3652457" y="6560249"/>
+            <a:ext cx="644271" cy="158496"/>
+          </a:xfrm>
+          <a:prstGeom prst="rect">
+            <a:avLst/>
+          </a:prstGeom>
+          <a:noFill/>
+          <a:ln/>
+        </p:spPr>
+        <p:txBody>
+          <a:bodyPr wrap="none" lIns="0" tIns="0" rIns="0" bIns="0" rtlCol="0" anchor="ctr"/>
+          <a:lstStyle/>
+          <a:p>
+            <a:pPr algn="ctr" indent="0" marL="0">
+              <a:buNone/>
+            </a:pPr>
+            <a:r>
+              <a:rPr lang="ko-KR" altLang="en-US" sz="1056" spc="-32" kern="0" dirty="0">
+                <a:solidFill>
+                  <a:srgbClr val="4B5568"/>
+                </a:solidFill>
+                <a:latin typeface="Paperlogy 5 Medium" pitchFamily="34" charset="0"/>
+                <a:ea typeface="Paperlogy 5 Medium" pitchFamily="34" charset="-127"/>
+                <a:cs typeface="Paperlogy 5 Medium" pitchFamily="34" charset="-120"/>
+              </a:rPr>
+              <a:t>데이터 구축</a:t>
+            </a:r>
+            <a:endParaRPr lang="en-US" sz="1056" dirty="0"/>
+          </a:p>
+        </p:txBody>
+      </p:sp>
+      <p:sp>
+        <p:nvSpPr>
+          <p:cNvPr id="68" name="팀원 C"/>
+          <p:cNvSpPr txBox="1"/>
+          <p:nvPr/>
+        </p:nvSpPr>
+        <p:spPr>
+          <a:xfrm>
+            <a:off x="5925026" y="6151055"/>
+            <a:ext cx="402908" cy="158496"/>
+          </a:xfrm>
+          <a:prstGeom prst="rect">
+            <a:avLst/>
+          </a:prstGeom>
+          <a:noFill/>
+          <a:ln/>
+        </p:spPr>
+        <p:txBody>
+          <a:bodyPr wrap="none" lIns="0" tIns="0" rIns="0" bIns="0" rtlCol="0" anchor="ctr"/>
+          <a:lstStyle/>
+          <a:p>
+            <a:pPr algn="ctr" indent="0" marL="0">
+              <a:buNone/>
+            </a:pPr>
+            <a:r>
+              <a:rPr lang="ko-KR" altLang="en-US" sz="1056" spc="-21" kern="0" dirty="0">
+                <a:solidFill>
+                  <a:srgbClr val="0B2147"/>
+                </a:solidFill>
+                <a:latin typeface="Paperlogy 8 ExtraBold" pitchFamily="34" charset="0"/>
+                <a:ea typeface="Paperlogy 8 ExtraBold" pitchFamily="34" charset="-127"/>
+                <a:cs typeface="Paperlogy 8 ExtraBold" pitchFamily="34" charset="-120"/>
+              </a:rPr>
+              <a:t>팀원 C</a:t>
+            </a:r>
+            <a:endParaRPr lang="en-US" sz="1056" dirty="0"/>
+          </a:p>
+        </p:txBody>
+      </p:sp>
+      <p:sp>
+        <p:nvSpPr>
+          <p:cNvPr id="69" name="리모델링 적용 시나리오 구성"/>
+          <p:cNvSpPr txBox="1"/>
+          <p:nvPr/>
+        </p:nvSpPr>
+        <p:spPr>
+          <a:xfrm>
+            <a:off x="5293809" y="6369844"/>
+            <a:ext cx="1531134" cy="158496"/>
+          </a:xfrm>
+          <a:prstGeom prst="rect">
+            <a:avLst/>
+          </a:prstGeom>
+          <a:noFill/>
+          <a:ln/>
+        </p:spPr>
+        <p:txBody>
+          <a:bodyPr wrap="none" lIns="0" tIns="0" rIns="0" bIns="0" rtlCol="0" anchor="ctr"/>
+          <a:lstStyle/>
+          <a:p>
+            <a:pPr algn="ctr" indent="0" marL="0">
+              <a:buNone/>
+            </a:pPr>
+            <a:r>
+              <a:rPr lang="ko-KR" altLang="en-US" sz="1056" spc="-32" kern="0" dirty="0">
+                <a:solidFill>
+                  <a:srgbClr val="4B5568"/>
+                </a:solidFill>
+                <a:latin typeface="Paperlogy 5 Medium" pitchFamily="34" charset="0"/>
+                <a:ea typeface="Paperlogy 5 Medium" pitchFamily="34" charset="-127"/>
+                <a:cs typeface="Paperlogy 5 Medium" pitchFamily="34" charset="-120"/>
+              </a:rPr>
+              <a:t>리모델링 적용 시나리오 구성</a:t>
+            </a:r>
+            <a:endParaRPr lang="en-US" sz="1056" dirty="0"/>
+          </a:p>
+        </p:txBody>
+      </p:sp>
+      <p:sp>
+        <p:nvSpPr>
+          <p:cNvPr id="70" name="시연 영상 제작"/>
+          <p:cNvSpPr txBox="1"/>
+          <p:nvPr/>
+        </p:nvSpPr>
+        <p:spPr>
+          <a:xfrm>
+            <a:off x="5667566" y="6560249"/>
+            <a:ext cx="783717" cy="158496"/>
+          </a:xfrm>
+          <a:prstGeom prst="rect">
+            <a:avLst/>
+          </a:prstGeom>
+          <a:noFill/>
+          <a:ln/>
+        </p:spPr>
+        <p:txBody>
+          <a:bodyPr wrap="none" lIns="0" tIns="0" rIns="0" bIns="0" rtlCol="0" anchor="ctr"/>
+          <a:lstStyle/>
+          <a:p>
+            <a:pPr algn="ctr" indent="0" marL="0">
+              <a:buNone/>
+            </a:pPr>
+            <a:r>
+              <a:rPr lang="ko-KR" altLang="en-US" sz="1056" spc="-32" kern="0" dirty="0">
+                <a:solidFill>
+                  <a:srgbClr val="4B5568"/>
+                </a:solidFill>
+                <a:latin typeface="Paperlogy 5 Medium" pitchFamily="34" charset="0"/>
+                <a:ea typeface="Paperlogy 5 Medium" pitchFamily="34" charset="-127"/>
+                <a:cs typeface="Paperlogy 5 Medium" pitchFamily="34" charset="-120"/>
+              </a:rPr>
+              <a:t>시연 영상 제작</a:t>
+            </a:r>
+            <a:endParaRPr lang="en-US" sz="1056" dirty="0"/>
+          </a:p>
+        </p:txBody>
+      </p:sp>
+      <p:sp>
+        <p:nvSpPr>
+          <p:cNvPr id="71" name="이틀마다 진행상황 공유 · 피드백"/>
+          <p:cNvSpPr txBox="1"/>
+          <p:nvPr/>
+        </p:nvSpPr>
+        <p:spPr>
+          <a:xfrm>
+            <a:off x="3242405" y="6958203"/>
+            <a:ext cx="1746089" cy="158496"/>
+          </a:xfrm>
+          <a:prstGeom prst="rect">
+            <a:avLst/>
+          </a:prstGeom>
+          <a:noFill/>
+          <a:ln/>
+        </p:spPr>
+        <p:txBody>
+          <a:bodyPr wrap="none" lIns="0" tIns="0" rIns="0" bIns="0" rtlCol="0" anchor="ctr"/>
+          <a:lstStyle/>
+          <a:p>
+            <a:pPr algn="l" indent="0" marL="0">
+              <a:buNone/>
+            </a:pPr>
+            <a:r>
+              <a:rPr lang="ko-KR" altLang="en-US" sz="1056" spc="-21" kern="0" dirty="0">
                 <a:solidFill>
                   <a:srgbClr val="0B6B33"/>
                 </a:solidFill>
@@ -3238,46 +3156,280 @@
                 <a:ea typeface="Paperlogy 7 Bold" pitchFamily="34" charset="-127"/>
                 <a:cs typeface="Paperlogy 7 Bold" pitchFamily="34" charset="-120"/>
               </a:rPr>
-              <a:t>4인 팀</a:t>
-            </a:r>
-            <a:endParaRPr lang="en-US" sz="864" dirty="0"/>
-          </a:p>
-        </p:txBody>
-      </p:sp>
-      <p:sp>
-        <p:nvSpPr>
-          <p:cNvPr id="89" name="팀장"/>
-          <p:cNvSpPr txBox="1"/>
-          <p:nvPr/>
-        </p:nvSpPr>
-        <p:spPr>
-          <a:xfrm>
-            <a:off x="3205258" y="2254853"/>
-            <a:ext cx="239744" cy="134112"/>
-          </a:xfrm>
-          <a:prstGeom prst="rect">
-            <a:avLst/>
-          </a:prstGeom>
-          <a:noFill/>
-          <a:ln/>
-        </p:spPr>
-        <p:txBody>
-          <a:bodyPr wrap="none" lIns="0" tIns="0" rIns="0" bIns="0" rtlCol="0" anchor="ctr"/>
-          <a:lstStyle/>
-          <a:p>
-            <a:pPr algn="l" indent="0" marL="0">
-              <a:buNone/>
-            </a:pPr>
-            <a:r>
-              <a:rPr lang="ko-KR" altLang="en-US" sz="864" spc="-9" kern="0" dirty="0">
-                <a:solidFill>
-                  <a:srgbClr val="0B6B33"/>
+              <a:t>이틀마다 진행상황 공유 · 피드백</a:t>
+            </a:r>
+            <a:endParaRPr lang="en-US" sz="1056" dirty="0"/>
+          </a:p>
+        </p:txBody>
+      </p:sp>
+      <p:sp>
+        <p:nvSpPr>
+          <p:cNvPr id="72" name="03"/>
+          <p:cNvSpPr txBox="1"/>
+          <p:nvPr/>
+        </p:nvSpPr>
+        <p:spPr>
+          <a:xfrm>
+            <a:off x="566642" y="7659815"/>
+            <a:ext cx="207836" cy="140208"/>
+          </a:xfrm>
+          <a:prstGeom prst="rect">
+            <a:avLst/>
+          </a:prstGeom>
+          <a:noFill/>
+          <a:ln/>
+        </p:spPr>
+        <p:txBody>
+          <a:bodyPr wrap="none" lIns="0" tIns="0" rIns="0" bIns="0" rtlCol="0" anchor="ctr"/>
+          <a:lstStyle/>
+          <a:p>
+            <a:pPr algn="l" indent="0" marL="0">
+              <a:buNone/>
+            </a:pPr>
+            <a:r>
+              <a:rPr lang="ko-KR" altLang="en-US" sz="912" spc="18" kern="0" dirty="0">
+                <a:solidFill>
+                  <a:srgbClr val="FFFFFF"/>
+                </a:solidFill>
+                <a:latin typeface="Paperlogy 8 ExtraBold" pitchFamily="34" charset="0"/>
+                <a:ea typeface="Paperlogy 8 ExtraBold" pitchFamily="34" charset="-127"/>
+                <a:cs typeface="Paperlogy 8 ExtraBold" pitchFamily="34" charset="-120"/>
+              </a:rPr>
+              <a:t>03</a:t>
+            </a:r>
+            <a:endParaRPr lang="en-US" sz="912" dirty="0"/>
+          </a:p>
+        </p:txBody>
+      </p:sp>
+      <p:sp>
+        <p:nvSpPr>
+          <p:cNvPr id="73" name="3주 만에 완성, 장려상"/>
+          <p:cNvSpPr txBox="1"/>
+          <p:nvPr/>
+        </p:nvSpPr>
+        <p:spPr>
+          <a:xfrm>
+            <a:off x="902208" y="7621905"/>
+            <a:ext cx="1590199" cy="213360"/>
+          </a:xfrm>
+          <a:prstGeom prst="rect">
+            <a:avLst/>
+          </a:prstGeom>
+          <a:noFill/>
+          <a:ln/>
+        </p:spPr>
+        <p:txBody>
+          <a:bodyPr wrap="none" lIns="0" tIns="0" rIns="0" bIns="0" rtlCol="0" anchor="ctr"/>
+          <a:lstStyle/>
+          <a:p>
+            <a:pPr algn="l" indent="0" marL="0">
+              <a:buNone/>
+            </a:pPr>
+            <a:r>
+              <a:rPr lang="ko-KR" altLang="en-US" sz="1440" spc="-50" kern="0" dirty="0">
+                <a:solidFill>
+                  <a:srgbClr val="0B2147"/>
+                </a:solidFill>
+                <a:latin typeface="Paperlogy 8 ExtraBold" pitchFamily="34" charset="0"/>
+                <a:ea typeface="Paperlogy 8 ExtraBold" pitchFamily="34" charset="-127"/>
+                <a:cs typeface="Paperlogy 8 ExtraBold" pitchFamily="34" charset="-120"/>
+              </a:rPr>
+              <a:t>3주 만에 완성, 장려상</a:t>
+            </a:r>
+            <a:endParaRPr lang="en-US" sz="1440" dirty="0"/>
+          </a:p>
+        </p:txBody>
+      </p:sp>
+      <p:sp>
+        <p:nvSpPr>
+          <p:cNvPr id="74" name="리모델링 앱 개발 아이디어 시연 영상"/>
+          <p:cNvSpPr txBox="1"/>
+          <p:nvPr/>
+        </p:nvSpPr>
+        <p:spPr>
+          <a:xfrm>
+            <a:off x="1046707" y="9212961"/>
+            <a:ext cx="1783547" cy="146304"/>
+          </a:xfrm>
+          <a:prstGeom prst="rect">
+            <a:avLst/>
+          </a:prstGeom>
+          <a:noFill/>
+          <a:ln/>
+        </p:spPr>
+        <p:txBody>
+          <a:bodyPr wrap="none" lIns="0" tIns="0" rIns="0" bIns="0" rtlCol="0" anchor="ctr"/>
+          <a:lstStyle/>
+          <a:p>
+            <a:pPr algn="ctr" indent="0" marL="0">
+              <a:buNone/>
+            </a:pPr>
+            <a:r>
+              <a:rPr lang="ko-KR" altLang="en-US" sz="960" spc="-24" kern="0" dirty="0">
+                <a:solidFill>
+                  <a:srgbClr val="4B5568"/>
+                </a:solidFill>
+                <a:latin typeface="Paperlogy 6 SemiBold" pitchFamily="34" charset="0"/>
+                <a:ea typeface="Paperlogy 6 SemiBold" pitchFamily="34" charset="-127"/>
+                <a:cs typeface="Paperlogy 6 SemiBold" pitchFamily="34" charset="-120"/>
+              </a:rPr>
+              <a:t>리모델링 앱 개발 아이디어 시연 영상</a:t>
+            </a:r>
+            <a:endParaRPr lang="en-US" sz="960" dirty="0"/>
+          </a:p>
+        </p:txBody>
+      </p:sp>
+      <p:sp>
+        <p:nvSpPr>
+          <p:cNvPr id="75" name="장려상"/>
+          <p:cNvSpPr txBox="1"/>
+          <p:nvPr/>
+        </p:nvSpPr>
+        <p:spPr>
+          <a:xfrm>
+            <a:off x="4506420" y="8354092"/>
+            <a:ext cx="847630" cy="371856"/>
+          </a:xfrm>
+          <a:prstGeom prst="rect">
+            <a:avLst/>
+          </a:prstGeom>
+          <a:noFill/>
+          <a:ln/>
+        </p:spPr>
+        <p:txBody>
+          <a:bodyPr wrap="none" lIns="0" tIns="0" rIns="0" bIns="0" rtlCol="0" anchor="ctr"/>
+          <a:lstStyle/>
+          <a:p>
+            <a:pPr algn="l" indent="0" marL="0">
+              <a:buNone/>
+            </a:pPr>
+            <a:r>
+              <a:rPr lang="ko-KR" altLang="en-US" sz="2496" spc="-100" kern="0" dirty="0">
+                <a:solidFill>
+                  <a:srgbClr val="0B2147"/>
+                </a:solidFill>
+                <a:latin typeface="Paperlogy 8 ExtraBold" pitchFamily="34" charset="0"/>
+                <a:ea typeface="Paperlogy 8 ExtraBold" pitchFamily="34" charset="-127"/>
+                <a:cs typeface="Paperlogy 8 ExtraBold" pitchFamily="34" charset="-120"/>
+              </a:rPr>
+              <a:t>장려상</a:t>
+            </a:r>
+            <a:endParaRPr lang="en-US" sz="2496" dirty="0"/>
+          </a:p>
+        </p:txBody>
+      </p:sp>
+      <p:sp>
+        <p:nvSpPr>
+          <p:cNvPr id="76" name="학생 BIM 경진대회 장려상"/>
+          <p:cNvSpPr txBox="1"/>
+          <p:nvPr/>
+        </p:nvSpPr>
+        <p:spPr>
+          <a:xfrm>
+            <a:off x="5680043" y="8387525"/>
+            <a:ext cx="1448949" cy="158496"/>
+          </a:xfrm>
+          <a:prstGeom prst="rect">
+            <a:avLst/>
+          </a:prstGeom>
+          <a:noFill/>
+          <a:ln/>
+        </p:spPr>
+        <p:txBody>
+          <a:bodyPr wrap="none" lIns="0" tIns="0" rIns="0" bIns="0" rtlCol="0" anchor="ctr"/>
+          <a:lstStyle/>
+          <a:p>
+            <a:pPr algn="l" indent="0" marL="0">
+              <a:buNone/>
+            </a:pPr>
+            <a:r>
+              <a:rPr lang="ko-KR" altLang="en-US" sz="1056" spc="-32" kern="0" dirty="0">
+                <a:solidFill>
+                  <a:srgbClr val="0B2147"/>
+                </a:solidFill>
+                <a:latin typeface="Paperlogy 8 ExtraBold" pitchFamily="34" charset="0"/>
+                <a:ea typeface="Paperlogy 8 ExtraBold" pitchFamily="34" charset="-127"/>
+                <a:cs typeface="Paperlogy 8 ExtraBold" pitchFamily="34" charset="-120"/>
+              </a:rPr>
+              <a:t>학생 BIM 경진대회 장려상</a:t>
+            </a:r>
+            <a:endParaRPr lang="en-US" sz="1056" dirty="0"/>
+          </a:p>
+        </p:txBody>
+      </p:sp>
+      <p:sp>
+        <p:nvSpPr>
+          <p:cNvPr id="77" name="남은 3주 내 완성"/>
+          <p:cNvSpPr txBox="1"/>
+          <p:nvPr/>
+        </p:nvSpPr>
+        <p:spPr>
+          <a:xfrm>
+            <a:off x="5680043" y="8575262"/>
+            <a:ext cx="817721" cy="146304"/>
+          </a:xfrm>
+          <a:prstGeom prst="rect">
+            <a:avLst/>
+          </a:prstGeom>
+          <a:noFill/>
+          <a:ln/>
+        </p:spPr>
+        <p:txBody>
+          <a:bodyPr wrap="none" lIns="0" tIns="0" rIns="0" bIns="0" rtlCol="0" anchor="ctr"/>
+          <a:lstStyle/>
+          <a:p>
+            <a:pPr algn="l" indent="0" marL="0">
+              <a:buNone/>
+            </a:pPr>
+            <a:r>
+              <a:rPr lang="ko-KR" altLang="en-US" sz="960" spc="-29" kern="0" dirty="0">
+                <a:solidFill>
+                  <a:srgbClr val="4B5568"/>
+                </a:solidFill>
+                <a:latin typeface="Paperlogy 6 SemiBold" pitchFamily="34" charset="0"/>
+                <a:ea typeface="Paperlogy 6 SemiBold" pitchFamily="34" charset="-127"/>
+                <a:cs typeface="Paperlogy 6 SemiBold" pitchFamily="34" charset="-120"/>
+              </a:rPr>
+              <a:t>남은 3주 내 완성</a:t>
+            </a:r>
+            <a:endParaRPr lang="en-US" sz="960" dirty="0"/>
+          </a:p>
+        </p:txBody>
+      </p:sp>
+      <p:sp>
+        <p:nvSpPr>
+          <p:cNvPr id="78" name="KEY MESSAGE"/>
+          <p:cNvSpPr txBox="1"/>
+          <p:nvPr/>
+        </p:nvSpPr>
+        <p:spPr>
+          <a:xfrm>
+            <a:off x="1182624" y="9839325"/>
+            <a:ext cx="1065686" cy="134112"/>
+          </a:xfrm>
+          <a:prstGeom prst="rect">
+            <a:avLst/>
+          </a:prstGeom>
+          <a:noFill/>
+          <a:ln/>
+        </p:spPr>
+        <p:txBody>
+          <a:bodyPr wrap="none" lIns="0" tIns="0" rIns="0" bIns="0" rtlCol="0" anchor="ctr"/>
+          <a:lstStyle/>
+          <a:p>
+            <a:pPr algn="l" indent="0" marL="0">
+              <a:buNone/>
+            </a:pPr>
+            <a:r>
+              <a:rPr lang="ko-KR" altLang="en-US" sz="864" spc="138" kern="0" dirty="0">
+                <a:solidFill>
+                  <a:srgbClr val="8FD3F5"/>
                 </a:solidFill>
                 <a:latin typeface="Paperlogy 7 Bold" pitchFamily="34" charset="0"/>
                 <a:ea typeface="Paperlogy 7 Bold" pitchFamily="34" charset="-127"/>
                 <a:cs typeface="Paperlogy 7 Bold" pitchFamily="34" charset="-120"/>
               </a:rPr>
-              <a:t>팀장</a:t>
+              <a:t>KEY MESSAGE</a:t>
             </a:r>
             <a:endParaRPr lang="en-US" sz="864" dirty="0"/>
           </a:p>
@@ -3285,233 +3437,105 @@
       </p:sp>
       <p:sp>
         <p:nvSpPr>
-          <p:cNvPr id="90" name="‘유닛 모듈러 기반 사용자"/>
-          <p:cNvSpPr txBox="1"/>
-          <p:nvPr/>
-        </p:nvSpPr>
-        <p:spPr>
-          <a:xfrm>
-            <a:off x="731520" y="2492883"/>
-            <a:ext cx="2138136" cy="256032"/>
-          </a:xfrm>
-          <a:prstGeom prst="rect">
-            <a:avLst/>
-          </a:prstGeom>
-          <a:noFill/>
-          <a:ln/>
-        </p:spPr>
-        <p:txBody>
-          <a:bodyPr wrap="none" lIns="0" tIns="0" rIns="0" bIns="0" rtlCol="0" anchor="ctr"/>
-          <a:lstStyle/>
-          <a:p>
-            <a:pPr algn="l" indent="0" marL="0">
-              <a:buNone/>
-            </a:pPr>
-            <a:r>
-              <a:rPr lang="ko-KR" altLang="en-US" sz="1728" spc="-69" kern="0" dirty="0">
-                <a:solidFill>
-                  <a:srgbClr val="0B2147"/>
-                </a:solidFill>
-                <a:latin typeface="Paperlogy 8 ExtraBold" pitchFamily="34" charset="0"/>
-                <a:ea typeface="Paperlogy 8 ExtraBold" pitchFamily="34" charset="-127"/>
-                <a:cs typeface="Paperlogy 8 ExtraBold" pitchFamily="34" charset="-120"/>
-              </a:rPr>
-              <a:t>‘유닛 모듈러 기반 사용자</a:t>
-            </a:r>
-            <a:endParaRPr lang="en-US" sz="1728" dirty="0"/>
-          </a:p>
-        </p:txBody>
-      </p:sp>
-      <p:sp>
-        <p:nvSpPr>
-          <p:cNvPr id="91" name="맞춤형 리모델링 방법’"/>
-          <p:cNvSpPr txBox="1"/>
-          <p:nvPr/>
-        </p:nvSpPr>
-        <p:spPr>
-          <a:xfrm>
-            <a:off x="731520" y="2767203"/>
-            <a:ext cx="1900868" cy="256032"/>
-          </a:xfrm>
-          <a:prstGeom prst="rect">
-            <a:avLst/>
-          </a:prstGeom>
-          <a:noFill/>
-          <a:ln/>
-        </p:spPr>
-        <p:txBody>
-          <a:bodyPr wrap="none" lIns="0" tIns="0" rIns="0" bIns="0" rtlCol="0" anchor="ctr"/>
-          <a:lstStyle/>
-          <a:p>
-            <a:pPr algn="l" indent="0" marL="0">
-              <a:buNone/>
-            </a:pPr>
-            <a:r>
-              <a:rPr lang="ko-KR" altLang="en-US" sz="1728" spc="-69" kern="0" dirty="0">
-                <a:solidFill>
-                  <a:srgbClr val="0B2147"/>
-                </a:solidFill>
-                <a:latin typeface="Paperlogy 8 ExtraBold" pitchFamily="34" charset="0"/>
-                <a:ea typeface="Paperlogy 8 ExtraBold" pitchFamily="34" charset="-127"/>
-                <a:cs typeface="Paperlogy 8 ExtraBold" pitchFamily="34" charset="-120"/>
-              </a:rPr>
-              <a:t>맞춤형 리모델링 방법’</a:t>
-            </a:r>
-            <a:endParaRPr lang="en-US" sz="1728" dirty="0"/>
-          </a:p>
-        </p:txBody>
-      </p:sp>
-      <p:sp>
-        <p:nvSpPr>
-          <p:cNvPr id="92" name="사용자가 원하는 리모델링 규모에 따라 유닛 모듈러를"/>
-          <p:cNvSpPr txBox="1"/>
-          <p:nvPr/>
-        </p:nvSpPr>
-        <p:spPr>
-          <a:xfrm>
-            <a:off x="3902202" y="2466594"/>
-            <a:ext cx="2730296" cy="152400"/>
-          </a:xfrm>
-          <a:prstGeom prst="rect">
-            <a:avLst/>
-          </a:prstGeom>
-          <a:noFill/>
-          <a:ln/>
-        </p:spPr>
-        <p:txBody>
-          <a:bodyPr wrap="none" lIns="0" tIns="0" rIns="0" bIns="0" rtlCol="0" anchor="ctr"/>
-          <a:lstStyle/>
-          <a:p>
-            <a:pPr algn="l" indent="0" marL="0">
-              <a:buNone/>
-            </a:pPr>
-            <a:r>
-              <a:rPr lang="ko-KR" altLang="en-US" sz="1008" spc="-20" kern="0" dirty="0">
-                <a:solidFill>
-                  <a:srgbClr val="4B5568"/>
+          <p:cNvPr id="79" name="서로 다른 사람을 하나의 공동 목표로 연결합니다"/>
+          <p:cNvSpPr txBox="1"/>
+          <p:nvPr/>
+        </p:nvSpPr>
+        <p:spPr>
+          <a:xfrm>
+            <a:off x="2358676" y="9792081"/>
+            <a:ext cx="3750951" cy="225552"/>
+          </a:xfrm>
+          <a:prstGeom prst="rect">
+            <a:avLst/>
+          </a:prstGeom>
+          <a:noFill/>
+          <a:ln/>
+        </p:spPr>
+        <p:txBody>
+          <a:bodyPr wrap="none" lIns="0" tIns="0" rIns="0" bIns="0" rtlCol="0" anchor="ctr"/>
+          <a:lstStyle/>
+          <a:p>
+            <a:pPr algn="l" indent="0" marL="0">
+              <a:buNone/>
+            </a:pPr>
+            <a:r>
+              <a:rPr lang="ko-KR" altLang="en-US" sz="1536" spc="-46" kern="0" dirty="0">
+                <a:solidFill>
+                  <a:srgbClr val="FFFFFF"/>
+                </a:solidFill>
+                <a:latin typeface="Paperlogy 7 Bold" pitchFamily="34" charset="0"/>
+                <a:ea typeface="Paperlogy 7 Bold" pitchFamily="34" charset="-127"/>
+                <a:cs typeface="Paperlogy 7 Bold" pitchFamily="34" charset="-120"/>
+              </a:rPr>
+              <a:t>서로 다른 사람을 </a:t>
+            </a:r>
+            <a:pPr algn="l" indent="0" marL="0">
+              <a:buNone/>
+            </a:pPr>
+            <a:r>
+              <a:rPr lang="ko-KR" altLang="en-US" sz="1536" spc="-46" kern="0" dirty="0">
+                <a:solidFill>
+                  <a:srgbClr val="FDBB30"/>
+                </a:solidFill>
+                <a:latin typeface="Paperlogy 7 Bold" pitchFamily="34" charset="0"/>
+                <a:ea typeface="Paperlogy 7 Bold" pitchFamily="34" charset="-127"/>
+                <a:cs typeface="Paperlogy 7 Bold" pitchFamily="34" charset="-120"/>
+              </a:rPr>
+              <a:t>하나의 공동 목표</a:t>
+            </a:r>
+            <a:pPr algn="l" indent="0" marL="0">
+              <a:buNone/>
+            </a:pPr>
+            <a:r>
+              <a:rPr lang="ko-KR" altLang="en-US" sz="1536" spc="-46" kern="0" dirty="0">
+                <a:solidFill>
+                  <a:srgbClr val="FFFFFF"/>
+                </a:solidFill>
+                <a:latin typeface="Paperlogy 7 Bold" pitchFamily="34" charset="0"/>
+                <a:ea typeface="Paperlogy 7 Bold" pitchFamily="34" charset="-127"/>
+                <a:cs typeface="Paperlogy 7 Bold" pitchFamily="34" charset="-120"/>
+              </a:rPr>
+              <a:t>로 연결합니다</a:t>
+            </a:r>
+            <a:endParaRPr lang="en-US" sz="1536" dirty="0"/>
+          </a:p>
+        </p:txBody>
+      </p:sp>
+      <p:sp>
+        <p:nvSpPr>
+          <p:cNvPr id="80" name="2026년 하반기 신입사원 공개채용"/>
+          <p:cNvSpPr txBox="1"/>
+          <p:nvPr/>
+        </p:nvSpPr>
+        <p:spPr>
+          <a:xfrm>
+            <a:off x="512064" y="10252901"/>
+            <a:ext cx="1593127" cy="134112"/>
+          </a:xfrm>
+          <a:prstGeom prst="rect">
+            <a:avLst/>
+          </a:prstGeom>
+          <a:noFill/>
+          <a:ln/>
+        </p:spPr>
+        <p:txBody>
+          <a:bodyPr wrap="none" lIns="0" tIns="0" rIns="0" bIns="0" rtlCol="0" anchor="ctr"/>
+          <a:lstStyle/>
+          <a:p>
+            <a:pPr algn="l" indent="0" marL="0">
+              <a:buNone/>
+            </a:pPr>
+            <a:r>
+              <a:rPr lang="ko-KR" altLang="en-US" sz="864" spc="-9" kern="0" dirty="0">
+                <a:solidFill>
+                  <a:srgbClr val="8691A5"/>
                 </a:solidFill>
                 <a:latin typeface="Paperlogy 5 Medium" pitchFamily="34" charset="0"/>
                 <a:ea typeface="Paperlogy 5 Medium" pitchFamily="34" charset="-127"/>
                 <a:cs typeface="Paperlogy 5 Medium" pitchFamily="34" charset="-120"/>
               </a:rPr>
-              <a:t>사용자가 원하는 리모델링 규모에 따라 유닛 모듈러를</a:t>
-            </a:r>
-            <a:endParaRPr lang="en-US" sz="1008" dirty="0"/>
-          </a:p>
-        </p:txBody>
-      </p:sp>
-      <p:sp>
-        <p:nvSpPr>
-          <p:cNvPr id="93" name="배치하고, 필요한 모듈 수와 자재 물량을 자동으로 산출하는"/>
-          <p:cNvSpPr txBox="1"/>
-          <p:nvPr/>
-        </p:nvSpPr>
-        <p:spPr>
-          <a:xfrm>
-            <a:off x="3902202" y="2652141"/>
-            <a:ext cx="3022185" cy="152400"/>
-          </a:xfrm>
-          <a:prstGeom prst="rect">
-            <a:avLst/>
-          </a:prstGeom>
-          <a:noFill/>
-          <a:ln/>
-        </p:spPr>
-        <p:txBody>
-          <a:bodyPr wrap="none" lIns="0" tIns="0" rIns="0" bIns="0" rtlCol="0" anchor="ctr"/>
-          <a:lstStyle/>
-          <a:p>
-            <a:pPr algn="l" indent="0" marL="0">
-              <a:buNone/>
-            </a:pPr>
-            <a:r>
-              <a:rPr lang="ko-KR" altLang="en-US" sz="1008" spc="-20" kern="0" dirty="0">
-                <a:solidFill>
-                  <a:srgbClr val="4B5568"/>
-                </a:solidFill>
-                <a:latin typeface="Paperlogy 5 Medium" pitchFamily="34" charset="0"/>
-                <a:ea typeface="Paperlogy 5 Medium" pitchFamily="34" charset="-127"/>
-                <a:cs typeface="Paperlogy 5 Medium" pitchFamily="34" charset="-120"/>
-              </a:rPr>
-              <a:t>배치하고, 필요한 모듈 수와 자재 물량을 자동으로 산출하는</a:t>
-            </a:r>
-            <a:endParaRPr lang="en-US" sz="1008" dirty="0"/>
-          </a:p>
-        </p:txBody>
-      </p:sp>
-      <p:sp>
-        <p:nvSpPr>
-          <p:cNvPr id="94" name="BIM 기반 리모델링 방법 제안"/>
-          <p:cNvSpPr txBox="1"/>
-          <p:nvPr/>
-        </p:nvSpPr>
-        <p:spPr>
-          <a:xfrm>
-            <a:off x="3902202" y="2837688"/>
-            <a:ext cx="1541736" cy="152400"/>
-          </a:xfrm>
-          <a:prstGeom prst="rect">
-            <a:avLst/>
-          </a:prstGeom>
-          <a:noFill/>
-          <a:ln/>
-        </p:spPr>
-        <p:txBody>
-          <a:bodyPr wrap="none" lIns="0" tIns="0" rIns="0" bIns="0" rtlCol="0" anchor="ctr"/>
-          <a:lstStyle/>
-          <a:p>
-            <a:pPr algn="l" indent="0" marL="0">
-              <a:buNone/>
-            </a:pPr>
-            <a:r>
-              <a:rPr lang="ko-KR" altLang="en-US" sz="1008" spc="-20" kern="0" dirty="0">
-                <a:solidFill>
-                  <a:srgbClr val="4B5568"/>
-                </a:solidFill>
-                <a:latin typeface="Paperlogy 5 Medium" pitchFamily="34" charset="0"/>
-                <a:ea typeface="Paperlogy 5 Medium" pitchFamily="34" charset="-127"/>
-                <a:cs typeface="Paperlogy 5 Medium" pitchFamily="34" charset="-120"/>
-              </a:rPr>
-              <a:t>BIM 기반 리모델링 방법 제안</a:t>
-            </a:r>
-            <a:endParaRPr lang="en-US" sz="1008" dirty="0"/>
-          </a:p>
-        </p:txBody>
-      </p:sp>
-      <p:sp>
-        <p:nvSpPr>
-          <p:cNvPr id="95" name="리모델링"/>
-          <p:cNvSpPr txBox="1"/>
-          <p:nvPr/>
-        </p:nvSpPr>
-        <p:spPr>
-          <a:xfrm>
-            <a:off x="983837" y="4151567"/>
-            <a:ext cx="421862" cy="134112"/>
-          </a:xfrm>
-          <a:prstGeom prst="rect">
-            <a:avLst/>
-          </a:prstGeom>
-          <a:noFill/>
-          <a:ln/>
-        </p:spPr>
-        <p:txBody>
-          <a:bodyPr wrap="none" lIns="0" tIns="0" rIns="0" bIns="0" rtlCol="0" anchor="ctr"/>
-          <a:lstStyle/>
-          <a:p>
-            <a:pPr algn="ctr" indent="0" marL="0">
-              <a:buNone/>
-            </a:pPr>
-            <a:r>
-              <a:rPr lang="ko-KR" altLang="en-US" sz="864" spc="-26" kern="0" dirty="0">
-                <a:solidFill>
-                  <a:srgbClr val="0B2147"/>
-                </a:solidFill>
-                <a:latin typeface="Paperlogy 7 Bold" pitchFamily="34" charset="0"/>
-                <a:ea typeface="Paperlogy 7 Bold" pitchFamily="34" charset="-127"/>
-                <a:cs typeface="Paperlogy 7 Bold" pitchFamily="34" charset="-120"/>
-              </a:rPr>
-              <a:t>리모델링</a:t>
+              <a:t>2026년 하반기 신입사원 공개채용</a:t>
             </a:r>
             <a:endParaRPr lang="en-US" sz="864" dirty="0"/>
           </a:p>
@@ -3519,1985 +3543,7 @@
       </p:sp>
       <p:sp>
         <p:nvSpPr>
-          <p:cNvPr id="96" name="규모 입력"/>
-          <p:cNvSpPr txBox="1"/>
-          <p:nvPr/>
-        </p:nvSpPr>
-        <p:spPr>
-          <a:xfrm>
-            <a:off x="973455" y="4285393"/>
-            <a:ext cx="442722" cy="134112"/>
-          </a:xfrm>
-          <a:prstGeom prst="rect">
-            <a:avLst/>
-          </a:prstGeom>
-          <a:noFill/>
-          <a:ln/>
-        </p:spPr>
-        <p:txBody>
-          <a:bodyPr wrap="none" lIns="0" tIns="0" rIns="0" bIns="0" rtlCol="0" anchor="ctr"/>
-          <a:lstStyle/>
-          <a:p>
-            <a:pPr algn="ctr" indent="0" marL="0">
-              <a:buNone/>
-            </a:pPr>
-            <a:r>
-              <a:rPr lang="ko-KR" altLang="en-US" sz="864" spc="-26" kern="0" dirty="0">
-                <a:solidFill>
-                  <a:srgbClr val="0B2147"/>
-                </a:solidFill>
-                <a:latin typeface="Paperlogy 7 Bold" pitchFamily="34" charset="0"/>
-                <a:ea typeface="Paperlogy 7 Bold" pitchFamily="34" charset="-127"/>
-                <a:cs typeface="Paperlogy 7 Bold" pitchFamily="34" charset="-120"/>
-              </a:rPr>
-              <a:t>규모 입력</a:t>
-            </a:r>
-            <a:endParaRPr lang="en-US" sz="864" dirty="0"/>
-          </a:p>
-        </p:txBody>
-      </p:sp>
-      <p:sp>
-        <p:nvSpPr>
-          <p:cNvPr id="97" name="유닛 모듈러"/>
-          <p:cNvSpPr txBox="1"/>
-          <p:nvPr/>
-        </p:nvSpPr>
-        <p:spPr>
-          <a:xfrm>
-            <a:off x="1743647" y="4151567"/>
-            <a:ext cx="535972" cy="134112"/>
-          </a:xfrm>
-          <a:prstGeom prst="rect">
-            <a:avLst/>
-          </a:prstGeom>
-          <a:noFill/>
-          <a:ln/>
-        </p:spPr>
-        <p:txBody>
-          <a:bodyPr wrap="none" lIns="0" tIns="0" rIns="0" bIns="0" rtlCol="0" anchor="ctr"/>
-          <a:lstStyle/>
-          <a:p>
-            <a:pPr algn="ctr" indent="0" marL="0">
-              <a:buNone/>
-            </a:pPr>
-            <a:r>
-              <a:rPr lang="ko-KR" altLang="en-US" sz="864" spc="-26" kern="0" dirty="0">
-                <a:solidFill>
-                  <a:srgbClr val="0B2147"/>
-                </a:solidFill>
-                <a:latin typeface="Paperlogy 7 Bold" pitchFamily="34" charset="0"/>
-                <a:ea typeface="Paperlogy 7 Bold" pitchFamily="34" charset="-127"/>
-                <a:cs typeface="Paperlogy 7 Bold" pitchFamily="34" charset="-120"/>
-              </a:rPr>
-              <a:t>유닛 모듈러</a:t>
-            </a:r>
-            <a:endParaRPr lang="en-US" sz="864" dirty="0"/>
-          </a:p>
-        </p:txBody>
-      </p:sp>
-      <p:sp>
-        <p:nvSpPr>
-          <p:cNvPr id="98" name="배치"/>
-          <p:cNvSpPr txBox="1"/>
-          <p:nvPr/>
-        </p:nvSpPr>
-        <p:spPr>
-          <a:xfrm>
-            <a:off x="1893951" y="4285393"/>
-            <a:ext cx="235363" cy="134112"/>
-          </a:xfrm>
-          <a:prstGeom prst="rect">
-            <a:avLst/>
-          </a:prstGeom>
-          <a:noFill/>
-          <a:ln/>
-        </p:spPr>
-        <p:txBody>
-          <a:bodyPr wrap="none" lIns="0" tIns="0" rIns="0" bIns="0" rtlCol="0" anchor="ctr"/>
-          <a:lstStyle/>
-          <a:p>
-            <a:pPr algn="ctr" indent="0" marL="0">
-              <a:buNone/>
-            </a:pPr>
-            <a:r>
-              <a:rPr lang="ko-KR" altLang="en-US" sz="864" spc="-26" kern="0" dirty="0">
-                <a:solidFill>
-                  <a:srgbClr val="0B2147"/>
-                </a:solidFill>
-                <a:latin typeface="Paperlogy 7 Bold" pitchFamily="34" charset="0"/>
-                <a:ea typeface="Paperlogy 7 Bold" pitchFamily="34" charset="-127"/>
-                <a:cs typeface="Paperlogy 7 Bold" pitchFamily="34" charset="-120"/>
-              </a:rPr>
-              <a:t>배치</a:t>
-            </a:r>
-            <a:endParaRPr lang="en-US" sz="864" dirty="0"/>
-          </a:p>
-        </p:txBody>
-      </p:sp>
-      <p:sp>
-        <p:nvSpPr>
-          <p:cNvPr id="99" name="모듈 수 ·"/>
-          <p:cNvSpPr txBox="1"/>
-          <p:nvPr/>
-        </p:nvSpPr>
-        <p:spPr>
-          <a:xfrm>
-            <a:off x="2627376" y="4017740"/>
-            <a:ext cx="402336" cy="134112"/>
-          </a:xfrm>
-          <a:prstGeom prst="rect">
-            <a:avLst/>
-          </a:prstGeom>
-          <a:noFill/>
-          <a:ln/>
-        </p:spPr>
-        <p:txBody>
-          <a:bodyPr wrap="none" lIns="0" tIns="0" rIns="0" bIns="0" rtlCol="0" anchor="ctr"/>
-          <a:lstStyle/>
-          <a:p>
-            <a:pPr algn="ctr" indent="0" marL="0">
-              <a:buNone/>
-            </a:pPr>
-            <a:r>
-              <a:rPr lang="ko-KR" altLang="en-US" sz="864" spc="-26" kern="0" dirty="0">
-                <a:solidFill>
-                  <a:srgbClr val="0B2147"/>
-                </a:solidFill>
-                <a:latin typeface="Paperlogy 7 Bold" pitchFamily="34" charset="0"/>
-                <a:ea typeface="Paperlogy 7 Bold" pitchFamily="34" charset="-127"/>
-                <a:cs typeface="Paperlogy 7 Bold" pitchFamily="34" charset="-120"/>
-              </a:rPr>
-              <a:t>모듈 수 ·</a:t>
-            </a:r>
-            <a:endParaRPr lang="en-US" sz="864" dirty="0"/>
-          </a:p>
-        </p:txBody>
-      </p:sp>
-      <p:sp>
-        <p:nvSpPr>
-          <p:cNvPr id="100" name="자재 물량"/>
-          <p:cNvSpPr txBox="1"/>
-          <p:nvPr/>
-        </p:nvSpPr>
-        <p:spPr>
-          <a:xfrm>
-            <a:off x="2607183" y="4151567"/>
-            <a:ext cx="442722" cy="134112"/>
-          </a:xfrm>
-          <a:prstGeom prst="rect">
-            <a:avLst/>
-          </a:prstGeom>
-          <a:noFill/>
-          <a:ln/>
-        </p:spPr>
-        <p:txBody>
-          <a:bodyPr wrap="none" lIns="0" tIns="0" rIns="0" bIns="0" rtlCol="0" anchor="ctr"/>
-          <a:lstStyle/>
-          <a:p>
-            <a:pPr algn="ctr" indent="0" marL="0">
-              <a:buNone/>
-            </a:pPr>
-            <a:r>
-              <a:rPr lang="ko-KR" altLang="en-US" sz="864" spc="-26" kern="0" dirty="0">
-                <a:solidFill>
-                  <a:srgbClr val="0B2147"/>
-                </a:solidFill>
-                <a:latin typeface="Paperlogy 7 Bold" pitchFamily="34" charset="0"/>
-                <a:ea typeface="Paperlogy 7 Bold" pitchFamily="34" charset="-127"/>
-                <a:cs typeface="Paperlogy 7 Bold" pitchFamily="34" charset="-120"/>
-              </a:rPr>
-              <a:t>자재 물량</a:t>
-            </a:r>
-            <a:endParaRPr lang="en-US" sz="864" dirty="0"/>
-          </a:p>
-        </p:txBody>
-      </p:sp>
-      <p:sp>
-        <p:nvSpPr>
-          <p:cNvPr id="101" name="자동 산출"/>
-          <p:cNvSpPr txBox="1"/>
-          <p:nvPr/>
-        </p:nvSpPr>
-        <p:spPr>
-          <a:xfrm>
-            <a:off x="2607183" y="4285393"/>
-            <a:ext cx="442722" cy="134112"/>
-          </a:xfrm>
-          <a:prstGeom prst="rect">
-            <a:avLst/>
-          </a:prstGeom>
-          <a:noFill/>
-          <a:ln/>
-        </p:spPr>
-        <p:txBody>
-          <a:bodyPr wrap="none" lIns="0" tIns="0" rIns="0" bIns="0" rtlCol="0" anchor="ctr"/>
-          <a:lstStyle/>
-          <a:p>
-            <a:pPr algn="ctr" indent="0" marL="0">
-              <a:buNone/>
-            </a:pPr>
-            <a:r>
-              <a:rPr lang="ko-KR" altLang="en-US" sz="864" spc="-26" kern="0" dirty="0">
-                <a:solidFill>
-                  <a:srgbClr val="0B2147"/>
-                </a:solidFill>
-                <a:latin typeface="Paperlogy 7 Bold" pitchFamily="34" charset="0"/>
-                <a:ea typeface="Paperlogy 7 Bold" pitchFamily="34" charset="-127"/>
-                <a:cs typeface="Paperlogy 7 Bold" pitchFamily="34" charset="-120"/>
-              </a:rPr>
-              <a:t>자동 산출</a:t>
-            </a:r>
-            <a:endParaRPr lang="en-US" sz="864" dirty="0"/>
-          </a:p>
-        </p:txBody>
-      </p:sp>
-      <p:sp>
-        <p:nvSpPr>
-          <p:cNvPr id="102" name="결과물"/>
-          <p:cNvSpPr txBox="1"/>
-          <p:nvPr/>
-        </p:nvSpPr>
-        <p:spPr>
-          <a:xfrm>
-            <a:off x="3401568" y="3529203"/>
-            <a:ext cx="382905" cy="152400"/>
-          </a:xfrm>
-          <a:prstGeom prst="rect">
-            <a:avLst/>
-          </a:prstGeom>
-          <a:noFill/>
-          <a:ln/>
-        </p:spPr>
-        <p:txBody>
-          <a:bodyPr wrap="none" lIns="0" tIns="0" rIns="0" bIns="0" rtlCol="0" anchor="ctr"/>
-          <a:lstStyle/>
-          <a:p>
-            <a:pPr algn="l" indent="0" marL="0">
-              <a:buNone/>
-            </a:pPr>
-            <a:r>
-              <a:rPr lang="ko-KR" altLang="en-US" sz="1008" spc="-10" kern="0" dirty="0">
-                <a:solidFill>
-                  <a:srgbClr val="004B8D"/>
-                </a:solidFill>
-                <a:latin typeface="Paperlogy 8 ExtraBold" pitchFamily="34" charset="0"/>
-                <a:ea typeface="Paperlogy 8 ExtraBold" pitchFamily="34" charset="-127"/>
-                <a:cs typeface="Paperlogy 8 ExtraBold" pitchFamily="34" charset="-120"/>
-              </a:rPr>
-              <a:t>결과물</a:t>
-            </a:r>
-            <a:endParaRPr lang="en-US" sz="1008" dirty="0"/>
-          </a:p>
-        </p:txBody>
-      </p:sp>
-      <p:sp>
-        <p:nvSpPr>
-          <p:cNvPr id="103" name="유닛 모듈러 기반"/>
-          <p:cNvSpPr txBox="1"/>
-          <p:nvPr/>
-        </p:nvSpPr>
-        <p:spPr>
-          <a:xfrm>
-            <a:off x="3401568" y="3751326"/>
-            <a:ext cx="859155" cy="152400"/>
-          </a:xfrm>
-          <a:prstGeom prst="rect">
-            <a:avLst/>
-          </a:prstGeom>
-          <a:noFill/>
-          <a:ln/>
-        </p:spPr>
-        <p:txBody>
-          <a:bodyPr wrap="none" lIns="0" tIns="0" rIns="0" bIns="0" rtlCol="0" anchor="ctr"/>
-          <a:lstStyle/>
-          <a:p>
-            <a:pPr algn="l" indent="0" marL="0">
-              <a:buNone/>
-            </a:pPr>
-            <a:r>
-              <a:rPr lang="ko-KR" altLang="en-US" sz="1008" spc="-30" kern="0" dirty="0">
-                <a:solidFill>
-                  <a:srgbClr val="1C2536"/>
-                </a:solidFill>
-                <a:latin typeface="Paperlogy 6 SemiBold" pitchFamily="34" charset="0"/>
-                <a:ea typeface="Paperlogy 6 SemiBold" pitchFamily="34" charset="-127"/>
-                <a:cs typeface="Paperlogy 6 SemiBold" pitchFamily="34" charset="-120"/>
-              </a:rPr>
-              <a:t>유닛 모듈러 기반</a:t>
-            </a:r>
-            <a:endParaRPr lang="en-US" sz="1008" dirty="0"/>
-          </a:p>
-        </p:txBody>
-      </p:sp>
-      <p:sp>
-        <p:nvSpPr>
-          <p:cNvPr id="104" name="사용자 맞춤형"/>
-          <p:cNvSpPr txBox="1"/>
-          <p:nvPr/>
-        </p:nvSpPr>
-        <p:spPr>
-          <a:xfrm>
-            <a:off x="3401568" y="3930491"/>
-            <a:ext cx="725996" cy="152400"/>
-          </a:xfrm>
-          <a:prstGeom prst="rect">
-            <a:avLst/>
-          </a:prstGeom>
-          <a:noFill/>
-          <a:ln/>
-        </p:spPr>
-        <p:txBody>
-          <a:bodyPr wrap="none" lIns="0" tIns="0" rIns="0" bIns="0" rtlCol="0" anchor="ctr"/>
-          <a:lstStyle/>
-          <a:p>
-            <a:pPr algn="l" indent="0" marL="0">
-              <a:buNone/>
-            </a:pPr>
-            <a:r>
-              <a:rPr lang="ko-KR" altLang="en-US" sz="1008" spc="-30" kern="0" dirty="0">
-                <a:solidFill>
-                  <a:srgbClr val="1C2536"/>
-                </a:solidFill>
-                <a:latin typeface="Paperlogy 6 SemiBold" pitchFamily="34" charset="0"/>
-                <a:ea typeface="Paperlogy 6 SemiBold" pitchFamily="34" charset="-127"/>
-                <a:cs typeface="Paperlogy 6 SemiBold" pitchFamily="34" charset="-120"/>
-              </a:rPr>
-              <a:t>사용자 맞춤형</a:t>
-            </a:r>
-            <a:endParaRPr lang="en-US" sz="1008" dirty="0"/>
-          </a:p>
-        </p:txBody>
-      </p:sp>
-      <p:sp>
-        <p:nvSpPr>
-          <p:cNvPr id="105" name="리모델링 앱 개발"/>
-          <p:cNvSpPr txBox="1"/>
-          <p:nvPr/>
-        </p:nvSpPr>
-        <p:spPr>
-          <a:xfrm>
-            <a:off x="3401568" y="4109657"/>
-            <a:ext cx="859155" cy="152400"/>
-          </a:xfrm>
-          <a:prstGeom prst="rect">
-            <a:avLst/>
-          </a:prstGeom>
-          <a:noFill/>
-          <a:ln/>
-        </p:spPr>
-        <p:txBody>
-          <a:bodyPr wrap="none" lIns="0" tIns="0" rIns="0" bIns="0" rtlCol="0" anchor="ctr"/>
-          <a:lstStyle/>
-          <a:p>
-            <a:pPr algn="l" indent="0" marL="0">
-              <a:buNone/>
-            </a:pPr>
-            <a:r>
-              <a:rPr lang="ko-KR" altLang="en-US" sz="1008" spc="-30" kern="0" dirty="0">
-                <a:solidFill>
-                  <a:srgbClr val="1C2536"/>
-                </a:solidFill>
-                <a:latin typeface="Paperlogy 6 SemiBold" pitchFamily="34" charset="0"/>
-                <a:ea typeface="Paperlogy 6 SemiBold" pitchFamily="34" charset="-127"/>
-                <a:cs typeface="Paperlogy 6 SemiBold" pitchFamily="34" charset="-120"/>
-              </a:rPr>
-              <a:t>리모델링 앱 개발</a:t>
-            </a:r>
-            <a:endParaRPr lang="en-US" sz="1008" dirty="0"/>
-          </a:p>
-        </p:txBody>
-      </p:sp>
-      <p:sp>
-        <p:nvSpPr>
-          <p:cNvPr id="106" name="아이디어 시연 영상"/>
-          <p:cNvSpPr txBox="1"/>
-          <p:nvPr/>
-        </p:nvSpPr>
-        <p:spPr>
-          <a:xfrm>
-            <a:off x="3401568" y="4288822"/>
-            <a:ext cx="974312" cy="152400"/>
-          </a:xfrm>
-          <a:prstGeom prst="rect">
-            <a:avLst/>
-          </a:prstGeom>
-          <a:noFill/>
-          <a:ln/>
-        </p:spPr>
-        <p:txBody>
-          <a:bodyPr wrap="none" lIns="0" tIns="0" rIns="0" bIns="0" rtlCol="0" anchor="ctr"/>
-          <a:lstStyle/>
-          <a:p>
-            <a:pPr algn="l" indent="0" marL="0">
-              <a:buNone/>
-            </a:pPr>
-            <a:r>
-              <a:rPr lang="ko-KR" altLang="en-US" sz="1008" spc="-30" kern="0" dirty="0">
-                <a:solidFill>
-                  <a:srgbClr val="1C2536"/>
-                </a:solidFill>
-                <a:latin typeface="Paperlogy 6 SemiBold" pitchFamily="34" charset="0"/>
-                <a:ea typeface="Paperlogy 6 SemiBold" pitchFamily="34" charset="-127"/>
-                <a:cs typeface="Paperlogy 6 SemiBold" pitchFamily="34" charset="-120"/>
-              </a:rPr>
-              <a:t>아이디어 시연 영상</a:t>
-            </a:r>
-            <a:endParaRPr lang="en-US" sz="1008" dirty="0"/>
-          </a:p>
-        </p:txBody>
-      </p:sp>
-      <p:sp>
-        <p:nvSpPr>
-          <p:cNvPr id="107" name="장려상"/>
-          <p:cNvSpPr txBox="1"/>
-          <p:nvPr/>
-        </p:nvSpPr>
-        <p:spPr>
-          <a:xfrm>
-            <a:off x="5818965" y="3620357"/>
-            <a:ext cx="724757" cy="316992"/>
-          </a:xfrm>
-          <a:prstGeom prst="rect">
-            <a:avLst/>
-          </a:prstGeom>
-          <a:noFill/>
-          <a:ln/>
-        </p:spPr>
-        <p:txBody>
-          <a:bodyPr wrap="none" lIns="0" tIns="0" rIns="0" bIns="0" rtlCol="0" anchor="ctr"/>
-          <a:lstStyle/>
-          <a:p>
-            <a:pPr algn="l" indent="0" marL="0">
-              <a:buNone/>
-            </a:pPr>
-            <a:r>
-              <a:rPr lang="ko-KR" altLang="en-US" sz="2112" spc="-84" kern="0" dirty="0">
-                <a:solidFill>
-                  <a:srgbClr val="0B2147"/>
-                </a:solidFill>
-                <a:latin typeface="Paperlogy 8 ExtraBold" pitchFamily="34" charset="0"/>
-                <a:ea typeface="Paperlogy 8 ExtraBold" pitchFamily="34" charset="-127"/>
-                <a:cs typeface="Paperlogy 8 ExtraBold" pitchFamily="34" charset="-120"/>
-              </a:rPr>
-              <a:t>장려상</a:t>
-            </a:r>
-            <a:endParaRPr lang="en-US" sz="2112" dirty="0"/>
-          </a:p>
-        </p:txBody>
-      </p:sp>
-      <p:sp>
-        <p:nvSpPr>
-          <p:cNvPr id="108" name="학생 BIM 경진대회"/>
-          <p:cNvSpPr txBox="1"/>
-          <p:nvPr/>
-        </p:nvSpPr>
-        <p:spPr>
-          <a:xfrm>
-            <a:off x="5672900" y="4539806"/>
-            <a:ext cx="1026208" cy="152400"/>
-          </a:xfrm>
-          <a:prstGeom prst="rect">
-            <a:avLst/>
-          </a:prstGeom>
-          <a:noFill/>
-          <a:ln/>
-        </p:spPr>
-        <p:txBody>
-          <a:bodyPr wrap="none" lIns="0" tIns="0" rIns="0" bIns="0" rtlCol="0" anchor="ctr"/>
-          <a:lstStyle/>
-          <a:p>
-            <a:pPr algn="l" indent="0" marL="0">
-              <a:buNone/>
-            </a:pPr>
-            <a:r>
-              <a:rPr lang="ko-KR" altLang="en-US" sz="1008" spc="-20" kern="0" dirty="0">
-                <a:solidFill>
-                  <a:srgbClr val="8A5A00"/>
-                </a:solidFill>
-                <a:latin typeface="Paperlogy 8 ExtraBold" pitchFamily="34" charset="0"/>
-                <a:ea typeface="Paperlogy 8 ExtraBold" pitchFamily="34" charset="-127"/>
-                <a:cs typeface="Paperlogy 8 ExtraBold" pitchFamily="34" charset="-120"/>
-              </a:rPr>
-              <a:t>학생 BIM 경진대회</a:t>
-            </a:r>
-            <a:endParaRPr lang="en-US" sz="1008" dirty="0"/>
-          </a:p>
-        </p:txBody>
-      </p:sp>
-      <p:sp>
-        <p:nvSpPr>
-          <p:cNvPr id="109" name="01"/>
-          <p:cNvSpPr txBox="1"/>
-          <p:nvPr/>
-        </p:nvSpPr>
-        <p:spPr>
-          <a:xfrm>
-            <a:off x="1304544" y="5077301"/>
-            <a:ext cx="203930" cy="134112"/>
-          </a:xfrm>
-          <a:prstGeom prst="rect">
-            <a:avLst/>
-          </a:prstGeom>
-          <a:noFill/>
-          <a:ln/>
-        </p:spPr>
-        <p:txBody>
-          <a:bodyPr wrap="none" lIns="0" tIns="0" rIns="0" bIns="0" rtlCol="0" anchor="ctr"/>
-          <a:lstStyle/>
-          <a:p>
-            <a:pPr algn="l" indent="0" marL="0">
-              <a:buNone/>
-            </a:pPr>
-            <a:r>
-              <a:rPr lang="ko-KR" altLang="en-US" sz="864" spc="35" kern="0" dirty="0">
-                <a:solidFill>
-                  <a:srgbClr val="004B8D"/>
-                </a:solidFill>
-                <a:latin typeface="Paperlogy 8 ExtraBold" pitchFamily="34" charset="0"/>
-                <a:ea typeface="Paperlogy 8 ExtraBold" pitchFamily="34" charset="-127"/>
-                <a:cs typeface="Paperlogy 8 ExtraBold" pitchFamily="34" charset="-120"/>
-              </a:rPr>
-              <a:t>01</a:t>
-            </a:r>
-            <a:endParaRPr lang="en-US" sz="864" dirty="0"/>
-          </a:p>
-        </p:txBody>
-      </p:sp>
-      <p:sp>
-        <p:nvSpPr>
-          <p:cNvPr id="110" name="CONFLICT"/>
-          <p:cNvSpPr txBox="1"/>
-          <p:nvPr/>
-        </p:nvSpPr>
-        <p:spPr>
-          <a:xfrm>
-            <a:off x="1727930" y="5077301"/>
-            <a:ext cx="771906" cy="134112"/>
-          </a:xfrm>
-          <a:prstGeom prst="rect">
-            <a:avLst/>
-          </a:prstGeom>
-          <a:noFill/>
-          <a:ln/>
-        </p:spPr>
-        <p:txBody>
-          <a:bodyPr wrap="none" lIns="0" tIns="0" rIns="0" bIns="0" rtlCol="0" anchor="ctr"/>
-          <a:lstStyle/>
-          <a:p>
-            <a:pPr algn="l" indent="0" marL="0">
-              <a:buNone/>
-            </a:pPr>
-            <a:r>
-              <a:rPr lang="ko-KR" altLang="en-US" sz="864" spc="138" kern="0" dirty="0">
-                <a:solidFill>
-                  <a:srgbClr val="2A78DD"/>
-                </a:solidFill>
-                <a:latin typeface="Paperlogy 7 Bold" pitchFamily="34" charset="0"/>
-                <a:ea typeface="Paperlogy 7 Bold" pitchFamily="34" charset="-127"/>
-                <a:cs typeface="Paperlogy 7 Bold" pitchFamily="34" charset="-120"/>
-              </a:rPr>
-              <a:t>CONFLICT</a:t>
-            </a:r>
-            <a:endParaRPr lang="en-US" sz="864" dirty="0"/>
-          </a:p>
-        </p:txBody>
-      </p:sp>
-      <p:sp>
-        <p:nvSpPr>
-          <p:cNvPr id="111" name="주제 선정 의견 충돌"/>
-          <p:cNvSpPr txBox="1"/>
-          <p:nvPr/>
-        </p:nvSpPr>
-        <p:spPr>
-          <a:xfrm>
-            <a:off x="2560796" y="5049869"/>
-            <a:ext cx="1285890" cy="188976"/>
-          </a:xfrm>
-          <a:prstGeom prst="rect">
-            <a:avLst/>
-          </a:prstGeom>
-          <a:noFill/>
-          <a:ln/>
-        </p:spPr>
-        <p:txBody>
-          <a:bodyPr wrap="none" lIns="0" tIns="0" rIns="0" bIns="0" rtlCol="0" anchor="ctr"/>
-          <a:lstStyle/>
-          <a:p>
-            <a:pPr algn="l" indent="0" marL="0">
-              <a:buNone/>
-            </a:pPr>
-            <a:r>
-              <a:rPr lang="ko-KR" altLang="en-US" sz="1296" spc="-39" kern="0" dirty="0">
-                <a:solidFill>
-                  <a:srgbClr val="0B2147"/>
-                </a:solidFill>
-                <a:latin typeface="Paperlogy 7 Bold" pitchFamily="34" charset="0"/>
-                <a:ea typeface="Paperlogy 7 Bold" pitchFamily="34" charset="-127"/>
-                <a:cs typeface="Paperlogy 7 Bold" pitchFamily="34" charset="-120"/>
-              </a:rPr>
-              <a:t>주제 선정 의견 충돌</a:t>
-            </a:r>
-            <a:endParaRPr lang="en-US" sz="1296" dirty="0"/>
-          </a:p>
-        </p:txBody>
-      </p:sp>
-      <p:sp>
-        <p:nvSpPr>
-          <p:cNvPr id="112" name="참신성 ↔ 구현 가능성"/>
-          <p:cNvSpPr txBox="1"/>
-          <p:nvPr/>
-        </p:nvSpPr>
-        <p:spPr>
-          <a:xfrm>
-            <a:off x="1554480" y="5353907"/>
-            <a:ext cx="1127072" cy="152400"/>
-          </a:xfrm>
-          <a:prstGeom prst="rect">
-            <a:avLst/>
-          </a:prstGeom>
-          <a:noFill/>
-          <a:ln/>
-        </p:spPr>
-        <p:txBody>
-          <a:bodyPr wrap="none" lIns="0" tIns="0" rIns="0" bIns="0" rtlCol="0" anchor="ctr"/>
-          <a:lstStyle/>
-          <a:p>
-            <a:pPr algn="l" indent="0" marL="0">
-              <a:buNone/>
-            </a:pPr>
-            <a:r>
-              <a:rPr lang="ko-KR" altLang="en-US" sz="1008" spc="-20" kern="0" dirty="0">
-                <a:solidFill>
-                  <a:srgbClr val="4B5568"/>
-                </a:solidFill>
-                <a:latin typeface="Paperlogy 6 SemiBold" pitchFamily="34" charset="0"/>
-                <a:ea typeface="Paperlogy 6 SemiBold" pitchFamily="34" charset="-127"/>
-                <a:cs typeface="Paperlogy 6 SemiBold" pitchFamily="34" charset="-120"/>
-              </a:rPr>
-              <a:t>참신성 ↔ 구현 가능성</a:t>
-            </a:r>
-            <a:endParaRPr lang="en-US" sz="1008" dirty="0"/>
-          </a:p>
-        </p:txBody>
-      </p:sp>
-      <p:sp>
-        <p:nvSpPr>
-          <p:cNvPr id="113" name="마감 3주 전까지 주제 미확정"/>
-          <p:cNvSpPr txBox="1"/>
-          <p:nvPr/>
-        </p:nvSpPr>
-        <p:spPr>
-          <a:xfrm>
-            <a:off x="3117628" y="5353907"/>
-            <a:ext cx="1480046" cy="152400"/>
-          </a:xfrm>
-          <a:prstGeom prst="rect">
-            <a:avLst/>
-          </a:prstGeom>
-          <a:noFill/>
-          <a:ln/>
-        </p:spPr>
-        <p:txBody>
-          <a:bodyPr wrap="none" lIns="0" tIns="0" rIns="0" bIns="0" rtlCol="0" anchor="ctr"/>
-          <a:lstStyle/>
-          <a:p>
-            <a:pPr algn="l" indent="0" marL="0">
-              <a:buNone/>
-            </a:pPr>
-            <a:r>
-              <a:rPr lang="ko-KR" altLang="en-US" sz="1008" spc="-20" kern="0" dirty="0">
-                <a:solidFill>
-                  <a:srgbClr val="4B5568"/>
-                </a:solidFill>
-                <a:latin typeface="Paperlogy 6 SemiBold" pitchFamily="34" charset="0"/>
-                <a:ea typeface="Paperlogy 6 SemiBold" pitchFamily="34" charset="-127"/>
-                <a:cs typeface="Paperlogy 6 SemiBold" pitchFamily="34" charset="-120"/>
-              </a:rPr>
-              <a:t>마감 3주 전까지 주제 미확정</a:t>
-            </a:r>
-            <a:endParaRPr lang="en-US" sz="1008" dirty="0"/>
-          </a:p>
-        </p:txBody>
-      </p:sp>
-      <p:sp>
-        <p:nvSpPr>
-          <p:cNvPr id="114" name="기준"/>
-          <p:cNvSpPr txBox="1"/>
-          <p:nvPr/>
-        </p:nvSpPr>
-        <p:spPr>
-          <a:xfrm>
-            <a:off x="699183" y="6002703"/>
-            <a:ext cx="235363" cy="134112"/>
-          </a:xfrm>
-          <a:prstGeom prst="rect">
-            <a:avLst/>
-          </a:prstGeom>
-          <a:noFill/>
-          <a:ln/>
-        </p:spPr>
-        <p:txBody>
-          <a:bodyPr wrap="none" lIns="0" tIns="0" rIns="0" bIns="0" rtlCol="0" anchor="ctr"/>
-          <a:lstStyle/>
-          <a:p>
-            <a:pPr algn="ctr" indent="0" marL="0">
-              <a:buNone/>
-            </a:pPr>
-            <a:r>
-              <a:rPr lang="ko-KR" altLang="en-US" sz="864" spc="-26" kern="0" dirty="0">
-                <a:solidFill>
-                  <a:srgbClr val="FFFFFF"/>
-                </a:solidFill>
-                <a:latin typeface="Paperlogy 7 Bold" pitchFamily="34" charset="0"/>
-                <a:ea typeface="Paperlogy 7 Bold" pitchFamily="34" charset="-127"/>
-                <a:cs typeface="Paperlogy 7 Bold" pitchFamily="34" charset="-120"/>
-              </a:rPr>
-              <a:t>기준</a:t>
-            </a:r>
-            <a:endParaRPr lang="en-US" sz="864" dirty="0"/>
-          </a:p>
-        </p:txBody>
-      </p:sp>
-      <p:sp>
-        <p:nvSpPr>
-          <p:cNvPr id="115" name="02"/>
-          <p:cNvSpPr txBox="1"/>
-          <p:nvPr/>
-        </p:nvSpPr>
-        <p:spPr>
-          <a:xfrm>
-            <a:off x="1304544" y="5849398"/>
-            <a:ext cx="203930" cy="134112"/>
-          </a:xfrm>
-          <a:prstGeom prst="rect">
-            <a:avLst/>
-          </a:prstGeom>
-          <a:noFill/>
-          <a:ln/>
-        </p:spPr>
-        <p:txBody>
-          <a:bodyPr wrap="none" lIns="0" tIns="0" rIns="0" bIns="0" rtlCol="0" anchor="ctr"/>
-          <a:lstStyle/>
-          <a:p>
-            <a:pPr algn="l" indent="0" marL="0">
-              <a:buNone/>
-            </a:pPr>
-            <a:r>
-              <a:rPr lang="ko-KR" altLang="en-US" sz="864" spc="35" kern="0" dirty="0">
-                <a:solidFill>
-                  <a:srgbClr val="004B8D"/>
-                </a:solidFill>
-                <a:latin typeface="Paperlogy 8 ExtraBold" pitchFamily="34" charset="0"/>
-                <a:ea typeface="Paperlogy 8 ExtraBold" pitchFamily="34" charset="-127"/>
-                <a:cs typeface="Paperlogy 8 ExtraBold" pitchFamily="34" charset="-120"/>
-              </a:rPr>
-              <a:t>02</a:t>
-            </a:r>
-            <a:endParaRPr lang="en-US" sz="864" dirty="0"/>
-          </a:p>
-        </p:txBody>
-      </p:sp>
-      <p:sp>
-        <p:nvSpPr>
-          <p:cNvPr id="116" name="ALIGN"/>
-          <p:cNvSpPr txBox="1"/>
-          <p:nvPr/>
-        </p:nvSpPr>
-        <p:spPr>
-          <a:xfrm>
-            <a:off x="1727930" y="5849398"/>
-            <a:ext cx="495776" cy="134112"/>
-          </a:xfrm>
-          <a:prstGeom prst="rect">
-            <a:avLst/>
-          </a:prstGeom>
-          <a:noFill/>
-          <a:ln/>
-        </p:spPr>
-        <p:txBody>
-          <a:bodyPr wrap="none" lIns="0" tIns="0" rIns="0" bIns="0" rtlCol="0" anchor="ctr"/>
-          <a:lstStyle/>
-          <a:p>
-            <a:pPr algn="l" indent="0" marL="0">
-              <a:buNone/>
-            </a:pPr>
-            <a:r>
-              <a:rPr lang="ko-KR" altLang="en-US" sz="864" spc="138" kern="0" dirty="0">
-                <a:solidFill>
-                  <a:srgbClr val="2A78DD"/>
-                </a:solidFill>
-                <a:latin typeface="Paperlogy 7 Bold" pitchFamily="34" charset="0"/>
-                <a:ea typeface="Paperlogy 7 Bold" pitchFamily="34" charset="-127"/>
-                <a:cs typeface="Paperlogy 7 Bold" pitchFamily="34" charset="-120"/>
-              </a:rPr>
-              <a:t>ALIGN</a:t>
-            </a:r>
-            <a:endParaRPr lang="en-US" sz="864" dirty="0"/>
-          </a:p>
-        </p:txBody>
-      </p:sp>
-      <p:sp>
-        <p:nvSpPr>
-          <p:cNvPr id="117" name="의견 조율 · 주제 확정"/>
-          <p:cNvSpPr txBox="1"/>
-          <p:nvPr/>
-        </p:nvSpPr>
-        <p:spPr>
-          <a:xfrm>
-            <a:off x="2284667" y="5821966"/>
-            <a:ext cx="1369994" cy="188976"/>
-          </a:xfrm>
-          <a:prstGeom prst="rect">
-            <a:avLst/>
-          </a:prstGeom>
-          <a:noFill/>
-          <a:ln/>
-        </p:spPr>
-        <p:txBody>
-          <a:bodyPr wrap="none" lIns="0" tIns="0" rIns="0" bIns="0" rtlCol="0" anchor="ctr"/>
-          <a:lstStyle/>
-          <a:p>
-            <a:pPr algn="l" indent="0" marL="0">
-              <a:buNone/>
-            </a:pPr>
-            <a:r>
-              <a:rPr lang="ko-KR" altLang="en-US" sz="1296" spc="-39" kern="0" dirty="0">
-                <a:solidFill>
-                  <a:srgbClr val="0B2147"/>
-                </a:solidFill>
-                <a:latin typeface="Paperlogy 7 Bold" pitchFamily="34" charset="0"/>
-                <a:ea typeface="Paperlogy 7 Bold" pitchFamily="34" charset="-127"/>
-                <a:cs typeface="Paperlogy 7 Bold" pitchFamily="34" charset="-120"/>
-              </a:rPr>
-              <a:t>의견 조율 · 주제 확정</a:t>
-            </a:r>
-            <a:endParaRPr lang="en-US" sz="1296" dirty="0"/>
-          </a:p>
-        </p:txBody>
-      </p:sp>
-      <p:sp>
-        <p:nvSpPr>
-          <p:cNvPr id="118" name="경청 · 수상작 분석 · 교수님 조언"/>
-          <p:cNvSpPr txBox="1"/>
-          <p:nvPr/>
-        </p:nvSpPr>
-        <p:spPr>
-          <a:xfrm>
-            <a:off x="1554480" y="6126004"/>
-            <a:ext cx="1641691" cy="152400"/>
-          </a:xfrm>
-          <a:prstGeom prst="rect">
-            <a:avLst/>
-          </a:prstGeom>
-          <a:noFill/>
-          <a:ln/>
-        </p:spPr>
-        <p:txBody>
-          <a:bodyPr wrap="none" lIns="0" tIns="0" rIns="0" bIns="0" rtlCol="0" anchor="ctr"/>
-          <a:lstStyle/>
-          <a:p>
-            <a:pPr algn="l" indent="0" marL="0">
-              <a:buNone/>
-            </a:pPr>
-            <a:r>
-              <a:rPr lang="ko-KR" altLang="en-US" sz="1008" spc="-20" kern="0" dirty="0">
-                <a:solidFill>
-                  <a:srgbClr val="4B5568"/>
-                </a:solidFill>
-                <a:latin typeface="Paperlogy 6 SemiBold" pitchFamily="34" charset="0"/>
-                <a:ea typeface="Paperlogy 6 SemiBold" pitchFamily="34" charset="-127"/>
-                <a:cs typeface="Paperlogy 6 SemiBold" pitchFamily="34" charset="-120"/>
-              </a:rPr>
-              <a:t>경청 · 수상작 분석 · 교수님 조언</a:t>
-            </a:r>
-            <a:endParaRPr lang="en-US" sz="1008" dirty="0"/>
-          </a:p>
-        </p:txBody>
-      </p:sp>
-      <p:sp>
-        <p:nvSpPr>
-          <p:cNvPr id="119" name="판단 기준 마련"/>
-          <p:cNvSpPr txBox="1"/>
-          <p:nvPr/>
-        </p:nvSpPr>
-        <p:spPr>
-          <a:xfrm>
-            <a:off x="3694557" y="6126004"/>
-            <a:ext cx="760571" cy="152400"/>
-          </a:xfrm>
-          <a:prstGeom prst="rect">
-            <a:avLst/>
-          </a:prstGeom>
-          <a:noFill/>
-          <a:ln/>
-        </p:spPr>
-        <p:txBody>
-          <a:bodyPr wrap="none" lIns="0" tIns="0" rIns="0" bIns="0" rtlCol="0" anchor="ctr"/>
-          <a:lstStyle/>
-          <a:p>
-            <a:pPr algn="l" indent="0" marL="0">
-              <a:buNone/>
-            </a:pPr>
-            <a:r>
-              <a:rPr lang="ko-KR" altLang="en-US" sz="1008" spc="-20" kern="0" dirty="0">
-                <a:solidFill>
-                  <a:srgbClr val="4B5568"/>
-                </a:solidFill>
-                <a:latin typeface="Paperlogy 6 SemiBold" pitchFamily="34" charset="0"/>
-                <a:ea typeface="Paperlogy 6 SemiBold" pitchFamily="34" charset="-127"/>
-                <a:cs typeface="Paperlogy 6 SemiBold" pitchFamily="34" charset="-120"/>
-              </a:rPr>
-              <a:t>판단 기준 마련</a:t>
-            </a:r>
-            <a:endParaRPr lang="en-US" sz="1008" dirty="0"/>
-          </a:p>
-        </p:txBody>
-      </p:sp>
-      <p:sp>
-        <p:nvSpPr>
-          <p:cNvPr id="120" name="주제 합의"/>
-          <p:cNvSpPr txBox="1"/>
-          <p:nvPr/>
-        </p:nvSpPr>
-        <p:spPr>
-          <a:xfrm>
-            <a:off x="4997672" y="6126004"/>
-            <a:ext cx="514826" cy="152400"/>
-          </a:xfrm>
-          <a:prstGeom prst="rect">
-            <a:avLst/>
-          </a:prstGeom>
-          <a:noFill/>
-          <a:ln/>
-        </p:spPr>
-        <p:txBody>
-          <a:bodyPr wrap="none" lIns="0" tIns="0" rIns="0" bIns="0" rtlCol="0" anchor="ctr"/>
-          <a:lstStyle/>
-          <a:p>
-            <a:pPr algn="l" indent="0" marL="0">
-              <a:buNone/>
-            </a:pPr>
-            <a:r>
-              <a:rPr lang="ko-KR" altLang="en-US" sz="1008" spc="-20" kern="0" dirty="0">
-                <a:solidFill>
-                  <a:srgbClr val="004B8D"/>
-                </a:solidFill>
-                <a:latin typeface="Paperlogy 7 Bold" pitchFamily="34" charset="0"/>
-                <a:ea typeface="Paperlogy 7 Bold" pitchFamily="34" charset="-127"/>
-                <a:cs typeface="Paperlogy 7 Bold" pitchFamily="34" charset="-120"/>
-              </a:rPr>
-              <a:t>주제 합의</a:t>
-            </a:r>
-            <a:endParaRPr lang="en-US" sz="1008" dirty="0"/>
-          </a:p>
-        </p:txBody>
-      </p:sp>
-      <p:sp>
-        <p:nvSpPr>
-          <p:cNvPr id="121" name="03"/>
-          <p:cNvSpPr txBox="1"/>
-          <p:nvPr/>
-        </p:nvSpPr>
-        <p:spPr>
-          <a:xfrm>
-            <a:off x="1304544" y="6582156"/>
-            <a:ext cx="203930" cy="134112"/>
-          </a:xfrm>
-          <a:prstGeom prst="rect">
-            <a:avLst/>
-          </a:prstGeom>
-          <a:noFill/>
-          <a:ln/>
-        </p:spPr>
-        <p:txBody>
-          <a:bodyPr wrap="none" lIns="0" tIns="0" rIns="0" bIns="0" rtlCol="0" anchor="ctr"/>
-          <a:lstStyle/>
-          <a:p>
-            <a:pPr algn="l" indent="0" marL="0">
-              <a:buNone/>
-            </a:pPr>
-            <a:r>
-              <a:rPr lang="ko-KR" altLang="en-US" sz="864" spc="35" kern="0" dirty="0">
-                <a:solidFill>
-                  <a:srgbClr val="004B8D"/>
-                </a:solidFill>
-                <a:latin typeface="Paperlogy 8 ExtraBold" pitchFamily="34" charset="0"/>
-                <a:ea typeface="Paperlogy 8 ExtraBold" pitchFamily="34" charset="-127"/>
-                <a:cs typeface="Paperlogy 8 ExtraBold" pitchFamily="34" charset="-120"/>
-              </a:rPr>
-              <a:t>03</a:t>
-            </a:r>
-            <a:endParaRPr lang="en-US" sz="864" dirty="0"/>
-          </a:p>
-        </p:txBody>
-      </p:sp>
-      <p:sp>
-        <p:nvSpPr>
-          <p:cNvPr id="122" name="ONE TEAM"/>
-          <p:cNvSpPr txBox="1"/>
-          <p:nvPr/>
-        </p:nvSpPr>
-        <p:spPr>
-          <a:xfrm>
-            <a:off x="1727930" y="6582156"/>
-            <a:ext cx="801624" cy="134112"/>
-          </a:xfrm>
-          <a:prstGeom prst="rect">
-            <a:avLst/>
-          </a:prstGeom>
-          <a:noFill/>
-          <a:ln/>
-        </p:spPr>
-        <p:txBody>
-          <a:bodyPr wrap="none" lIns="0" tIns="0" rIns="0" bIns="0" rtlCol="0" anchor="ctr"/>
-          <a:lstStyle/>
-          <a:p>
-            <a:pPr algn="l" indent="0" marL="0">
-              <a:buNone/>
-            </a:pPr>
-            <a:r>
-              <a:rPr lang="ko-KR" altLang="en-US" sz="864" spc="138" kern="0" dirty="0">
-                <a:solidFill>
-                  <a:srgbClr val="2A78DD"/>
-                </a:solidFill>
-                <a:latin typeface="Paperlogy 7 Bold" pitchFamily="34" charset="0"/>
-                <a:ea typeface="Paperlogy 7 Bold" pitchFamily="34" charset="-127"/>
-                <a:cs typeface="Paperlogy 7 Bold" pitchFamily="34" charset="-120"/>
-              </a:rPr>
-              <a:t>ONE TEAM</a:t>
-            </a:r>
-            <a:endParaRPr lang="en-US" sz="864" dirty="0"/>
-          </a:p>
-        </p:txBody>
-      </p:sp>
-      <p:sp>
-        <p:nvSpPr>
-          <p:cNvPr id="123" name="강점 기반 역할 분담 · 지속적인 공유"/>
-          <p:cNvSpPr txBox="1"/>
-          <p:nvPr/>
-        </p:nvSpPr>
-        <p:spPr>
-          <a:xfrm>
-            <a:off x="2590514" y="6554724"/>
-            <a:ext cx="2326133" cy="188976"/>
-          </a:xfrm>
-          <a:prstGeom prst="rect">
-            <a:avLst/>
-          </a:prstGeom>
-          <a:noFill/>
-          <a:ln/>
-        </p:spPr>
-        <p:txBody>
-          <a:bodyPr wrap="none" lIns="0" tIns="0" rIns="0" bIns="0" rtlCol="0" anchor="ctr"/>
-          <a:lstStyle/>
-          <a:p>
-            <a:pPr algn="l" indent="0" marL="0">
-              <a:buNone/>
-            </a:pPr>
-            <a:r>
-              <a:rPr lang="ko-KR" altLang="en-US" sz="1296" spc="-39" kern="0" dirty="0">
-                <a:solidFill>
-                  <a:srgbClr val="0B2147"/>
-                </a:solidFill>
-                <a:latin typeface="Paperlogy 7 Bold" pitchFamily="34" charset="0"/>
-                <a:ea typeface="Paperlogy 7 Bold" pitchFamily="34" charset="-127"/>
-                <a:cs typeface="Paperlogy 7 Bold" pitchFamily="34" charset="-120"/>
-              </a:rPr>
-              <a:t>강점 기반 역할 분담 · 지속적인 공유</a:t>
-            </a:r>
-            <a:endParaRPr lang="en-US" sz="1296" dirty="0"/>
-          </a:p>
-        </p:txBody>
-      </p:sp>
-      <p:sp>
-        <p:nvSpPr>
-          <p:cNvPr id="124" name="팀장"/>
-          <p:cNvSpPr txBox="1"/>
-          <p:nvPr/>
-        </p:nvSpPr>
-        <p:spPr>
-          <a:xfrm>
-            <a:off x="1670304" y="6914960"/>
-            <a:ext cx="307848" cy="176784"/>
-          </a:xfrm>
-          <a:prstGeom prst="rect">
-            <a:avLst/>
-          </a:prstGeom>
-          <a:noFill/>
-          <a:ln/>
-        </p:spPr>
-        <p:txBody>
-          <a:bodyPr wrap="none" lIns="0" tIns="0" rIns="0" bIns="0" rtlCol="0" anchor="ctr"/>
-          <a:lstStyle/>
-          <a:p>
-            <a:pPr algn="l" indent="0" marL="0">
-              <a:buNone/>
-            </a:pPr>
-            <a:r>
-              <a:rPr lang="ko-KR" altLang="en-US" sz="1200" spc="-36" kern="0" dirty="0">
-                <a:solidFill>
-                  <a:srgbClr val="0B2147"/>
-                </a:solidFill>
-                <a:latin typeface="Paperlogy 8 ExtraBold" pitchFamily="34" charset="0"/>
-                <a:ea typeface="Paperlogy 8 ExtraBold" pitchFamily="34" charset="-127"/>
-                <a:cs typeface="Paperlogy 8 ExtraBold" pitchFamily="34" charset="-120"/>
-              </a:rPr>
-              <a:t>팀장</a:t>
-            </a:r>
-            <a:endParaRPr lang="en-US" sz="1200" dirty="0"/>
-          </a:p>
-        </p:txBody>
-      </p:sp>
-      <p:sp>
-        <p:nvSpPr>
-          <p:cNvPr id="125" name="나"/>
-          <p:cNvSpPr txBox="1"/>
-          <p:nvPr/>
-        </p:nvSpPr>
-        <p:spPr>
-          <a:xfrm>
-            <a:off x="2057400" y="6939820"/>
-            <a:ext cx="144304" cy="134112"/>
-          </a:xfrm>
-          <a:prstGeom prst="rect">
-            <a:avLst/>
-          </a:prstGeom>
-          <a:noFill/>
-          <a:ln/>
-        </p:spPr>
-        <p:txBody>
-          <a:bodyPr wrap="none" lIns="0" tIns="0" rIns="0" bIns="0" rtlCol="0" anchor="ctr"/>
-          <a:lstStyle/>
-          <a:p>
-            <a:pPr algn="l" indent="0" marL="0">
-              <a:buNone/>
-            </a:pPr>
-            <a:r>
-              <a:rPr lang="ko-KR" altLang="en-US" sz="864" spc="-9" kern="0" dirty="0">
-                <a:solidFill>
-                  <a:srgbClr val="FFFFFF"/>
-                </a:solidFill>
-                <a:latin typeface="Paperlogy 7 Bold" pitchFamily="34" charset="0"/>
-                <a:ea typeface="Paperlogy 7 Bold" pitchFamily="34" charset="-127"/>
-                <a:cs typeface="Paperlogy 7 Bold" pitchFamily="34" charset="-120"/>
-              </a:rPr>
-              <a:t>나</a:t>
-            </a:r>
-            <a:endParaRPr lang="en-US" sz="864" dirty="0"/>
-          </a:p>
-        </p:txBody>
-      </p:sp>
-      <p:sp>
-        <p:nvSpPr>
-          <p:cNvPr id="126" name="프로젝트 총괄"/>
-          <p:cNvSpPr txBox="1"/>
-          <p:nvPr/>
-        </p:nvSpPr>
-        <p:spPr>
-          <a:xfrm>
-            <a:off x="1438656" y="7172516"/>
-            <a:ext cx="730472" cy="152400"/>
-          </a:xfrm>
-          <a:prstGeom prst="rect">
-            <a:avLst/>
-          </a:prstGeom>
-          <a:noFill/>
-          <a:ln/>
-        </p:spPr>
-        <p:txBody>
-          <a:bodyPr wrap="none" lIns="0" tIns="0" rIns="0" bIns="0" rtlCol="0" anchor="ctr"/>
-          <a:lstStyle/>
-          <a:p>
-            <a:pPr algn="l" indent="0" marL="0">
-              <a:buNone/>
-            </a:pPr>
-            <a:r>
-              <a:rPr lang="ko-KR" altLang="en-US" sz="1008" spc="-25" kern="0" dirty="0">
-                <a:solidFill>
-                  <a:srgbClr val="1C2536"/>
-                </a:solidFill>
-                <a:latin typeface="Paperlogy 6 SemiBold" pitchFamily="34" charset="0"/>
-                <a:ea typeface="Paperlogy 6 SemiBold" pitchFamily="34" charset="-127"/>
-                <a:cs typeface="Paperlogy 6 SemiBold" pitchFamily="34" charset="-120"/>
-              </a:rPr>
-              <a:t>프로젝트 총괄</a:t>
-            </a:r>
-            <a:endParaRPr lang="en-US" sz="1008" dirty="0"/>
-          </a:p>
-        </p:txBody>
-      </p:sp>
-      <p:sp>
-        <p:nvSpPr>
-          <p:cNvPr id="127" name="기반 자동화 알고리즘 개발"/>
-          <p:cNvSpPr txBox="1"/>
-          <p:nvPr/>
-        </p:nvSpPr>
-        <p:spPr>
-          <a:xfrm>
-            <a:off x="2123218" y="7361968"/>
-            <a:ext cx="1355657" cy="152400"/>
-          </a:xfrm>
-          <a:prstGeom prst="rect">
-            <a:avLst/>
-          </a:prstGeom>
-          <a:noFill/>
-          <a:ln/>
-        </p:spPr>
-        <p:txBody>
-          <a:bodyPr wrap="none" lIns="0" tIns="0" rIns="0" bIns="0" rtlCol="0" anchor="ctr"/>
-          <a:lstStyle/>
-          <a:p>
-            <a:pPr algn="l" indent="0" marL="0">
-              <a:buNone/>
-            </a:pPr>
-            <a:r>
-              <a:rPr lang="ko-KR" altLang="en-US" sz="1008" spc="-25" kern="0" dirty="0">
-                <a:solidFill>
-                  <a:srgbClr val="1C2536"/>
-                </a:solidFill>
-                <a:latin typeface="Paperlogy 6 SemiBold" pitchFamily="34" charset="0"/>
-                <a:ea typeface="Paperlogy 6 SemiBold" pitchFamily="34" charset="-127"/>
-                <a:cs typeface="Paperlogy 6 SemiBold" pitchFamily="34" charset="-120"/>
-              </a:rPr>
-              <a:t>기반 자동화 알고리즘 개발</a:t>
-            </a:r>
-            <a:endParaRPr lang="en-US" sz="1008" dirty="0"/>
-          </a:p>
-        </p:txBody>
-      </p:sp>
-      <p:sp>
-        <p:nvSpPr>
-          <p:cNvPr id="128" name="Dynamo"/>
-          <p:cNvSpPr txBox="1"/>
-          <p:nvPr/>
-        </p:nvSpPr>
-        <p:spPr>
-          <a:xfrm>
-            <a:off x="1511808" y="7374160"/>
-            <a:ext cx="537686" cy="134112"/>
-          </a:xfrm>
-          <a:prstGeom prst="rect">
-            <a:avLst/>
-          </a:prstGeom>
-          <a:noFill/>
-          <a:ln/>
-        </p:spPr>
-        <p:txBody>
-          <a:bodyPr wrap="none" lIns="0" tIns="0" rIns="0" bIns="0" rtlCol="0" anchor="ctr"/>
-          <a:lstStyle/>
-          <a:p>
-            <a:pPr algn="l" indent="0" marL="0">
-              <a:buNone/>
-            </a:pPr>
-            <a:r>
-              <a:rPr lang="ko-KR" altLang="en-US" sz="864" dirty="0">
-                <a:solidFill>
-                  <a:srgbClr val="004B8D"/>
-                </a:solidFill>
-                <a:latin typeface="Paperlogy 7 Bold" pitchFamily="34" charset="0"/>
-                <a:ea typeface="Paperlogy 7 Bold" pitchFamily="34" charset="-127"/>
-                <a:cs typeface="Paperlogy 7 Bold" pitchFamily="34" charset="-120"/>
-              </a:rPr>
-              <a:t>Dynamo</a:t>
-            </a:r>
-            <a:endParaRPr lang="en-US" sz="864" dirty="0"/>
-          </a:p>
-        </p:txBody>
-      </p:sp>
-      <p:sp>
-        <p:nvSpPr>
-          <p:cNvPr id="129" name="팀원 A"/>
-          <p:cNvSpPr txBox="1"/>
-          <p:nvPr/>
-        </p:nvSpPr>
-        <p:spPr>
-          <a:xfrm>
-            <a:off x="4456176" y="6914960"/>
-            <a:ext cx="450437" cy="176784"/>
-          </a:xfrm>
-          <a:prstGeom prst="rect">
-            <a:avLst/>
-          </a:prstGeom>
-          <a:noFill/>
-          <a:ln/>
-        </p:spPr>
-        <p:txBody>
-          <a:bodyPr wrap="none" lIns="0" tIns="0" rIns="0" bIns="0" rtlCol="0" anchor="ctr"/>
-          <a:lstStyle/>
-          <a:p>
-            <a:pPr algn="l" indent="0" marL="0">
-              <a:buNone/>
-            </a:pPr>
-            <a:r>
-              <a:rPr lang="ko-KR" altLang="en-US" sz="1200" spc="-36" kern="0" dirty="0">
-                <a:solidFill>
-                  <a:srgbClr val="0B2147"/>
-                </a:solidFill>
-                <a:latin typeface="Paperlogy 8 ExtraBold" pitchFamily="34" charset="0"/>
-                <a:ea typeface="Paperlogy 8 ExtraBold" pitchFamily="34" charset="-127"/>
-                <a:cs typeface="Paperlogy 8 ExtraBold" pitchFamily="34" charset="-120"/>
-              </a:rPr>
-              <a:t>팀원 A</a:t>
-            </a:r>
-            <a:endParaRPr lang="en-US" sz="1200" dirty="0"/>
-          </a:p>
-        </p:txBody>
-      </p:sp>
-      <p:sp>
-        <p:nvSpPr>
-          <p:cNvPr id="130" name="유닛 모듈러 설계"/>
-          <p:cNvSpPr txBox="1"/>
-          <p:nvPr/>
-        </p:nvSpPr>
-        <p:spPr>
-          <a:xfrm>
-            <a:off x="4224528" y="7172516"/>
-            <a:ext cx="865068" cy="152400"/>
-          </a:xfrm>
-          <a:prstGeom prst="rect">
-            <a:avLst/>
-          </a:prstGeom>
-          <a:noFill/>
-          <a:ln/>
-        </p:spPr>
-        <p:txBody>
-          <a:bodyPr wrap="none" lIns="0" tIns="0" rIns="0" bIns="0" rtlCol="0" anchor="ctr"/>
-          <a:lstStyle/>
-          <a:p>
-            <a:pPr algn="l" indent="0" marL="0">
-              <a:buNone/>
-            </a:pPr>
-            <a:r>
-              <a:rPr lang="ko-KR" altLang="en-US" sz="1008" spc="-25" kern="0" dirty="0">
-                <a:solidFill>
-                  <a:srgbClr val="4B5568"/>
-                </a:solidFill>
-                <a:latin typeface="Paperlogy 6 SemiBold" pitchFamily="34" charset="0"/>
-                <a:ea typeface="Paperlogy 6 SemiBold" pitchFamily="34" charset="-127"/>
-                <a:cs typeface="Paperlogy 6 SemiBold" pitchFamily="34" charset="-120"/>
-              </a:rPr>
-              <a:t>유닛 모듈러 설계</a:t>
-            </a:r>
-            <a:endParaRPr lang="en-US" sz="1008" dirty="0"/>
-          </a:p>
-        </p:txBody>
-      </p:sp>
-      <p:sp>
-        <p:nvSpPr>
-          <p:cNvPr id="131" name="배치계획"/>
-          <p:cNvSpPr txBox="1"/>
-          <p:nvPr/>
-        </p:nvSpPr>
-        <p:spPr>
-          <a:xfrm>
-            <a:off x="4224528" y="7361968"/>
-            <a:ext cx="486632" cy="152400"/>
-          </a:xfrm>
-          <a:prstGeom prst="rect">
-            <a:avLst/>
-          </a:prstGeom>
-          <a:noFill/>
-          <a:ln/>
-        </p:spPr>
-        <p:txBody>
-          <a:bodyPr wrap="none" lIns="0" tIns="0" rIns="0" bIns="0" rtlCol="0" anchor="ctr"/>
-          <a:lstStyle/>
-          <a:p>
-            <a:pPr algn="l" indent="0" marL="0">
-              <a:buNone/>
-            </a:pPr>
-            <a:r>
-              <a:rPr lang="ko-KR" altLang="en-US" sz="1008" spc="-25" kern="0" dirty="0">
-                <a:solidFill>
-                  <a:srgbClr val="4B5568"/>
-                </a:solidFill>
-                <a:latin typeface="Paperlogy 6 SemiBold" pitchFamily="34" charset="0"/>
-                <a:ea typeface="Paperlogy 6 SemiBold" pitchFamily="34" charset="-127"/>
-                <a:cs typeface="Paperlogy 6 SemiBold" pitchFamily="34" charset="-120"/>
-              </a:rPr>
-              <a:t>배치계획</a:t>
-            </a:r>
-            <a:endParaRPr lang="en-US" sz="1008" dirty="0"/>
-          </a:p>
-        </p:txBody>
-      </p:sp>
-      <p:sp>
-        <p:nvSpPr>
-          <p:cNvPr id="132" name="이틀마다 진행상황 공유 · 피드백"/>
-          <p:cNvSpPr txBox="1"/>
-          <p:nvPr/>
-        </p:nvSpPr>
-        <p:spPr>
-          <a:xfrm>
-            <a:off x="3334703" y="7673435"/>
-            <a:ext cx="1666730" cy="152400"/>
-          </a:xfrm>
-          <a:prstGeom prst="rect">
-            <a:avLst/>
-          </a:prstGeom>
-          <a:noFill/>
-          <a:ln/>
-        </p:spPr>
-        <p:txBody>
-          <a:bodyPr wrap="none" lIns="0" tIns="0" rIns="0" bIns="0" rtlCol="0" anchor="ctr"/>
-          <a:lstStyle/>
-          <a:p>
-            <a:pPr algn="l" indent="0" marL="0">
-              <a:buNone/>
-            </a:pPr>
-            <a:r>
-              <a:rPr lang="ko-KR" altLang="en-US" sz="1008" spc="-20" kern="0" dirty="0">
-                <a:solidFill>
-                  <a:srgbClr val="0B6B33"/>
-                </a:solidFill>
-                <a:latin typeface="Paperlogy 7 Bold" pitchFamily="34" charset="0"/>
-                <a:ea typeface="Paperlogy 7 Bold" pitchFamily="34" charset="-127"/>
-                <a:cs typeface="Paperlogy 7 Bold" pitchFamily="34" charset="-120"/>
-              </a:rPr>
-              <a:t>이틀마다 진행상황 공유 · 피드백</a:t>
-            </a:r>
-            <a:endParaRPr lang="en-US" sz="1008" dirty="0"/>
-          </a:p>
-        </p:txBody>
-      </p:sp>
-      <p:sp>
-        <p:nvSpPr>
-          <p:cNvPr id="133" name="팀원 B"/>
-          <p:cNvSpPr txBox="1"/>
-          <p:nvPr/>
-        </p:nvSpPr>
-        <p:spPr>
-          <a:xfrm>
-            <a:off x="1670304" y="7985665"/>
-            <a:ext cx="450342" cy="176784"/>
-          </a:xfrm>
-          <a:prstGeom prst="rect">
-            <a:avLst/>
-          </a:prstGeom>
-          <a:noFill/>
-          <a:ln/>
-        </p:spPr>
-        <p:txBody>
-          <a:bodyPr wrap="none" lIns="0" tIns="0" rIns="0" bIns="0" rtlCol="0" anchor="ctr"/>
-          <a:lstStyle/>
-          <a:p>
-            <a:pPr algn="l" indent="0" marL="0">
-              <a:buNone/>
-            </a:pPr>
-            <a:r>
-              <a:rPr lang="ko-KR" altLang="en-US" sz="1200" spc="-36" kern="0" dirty="0">
-                <a:solidFill>
-                  <a:srgbClr val="0B2147"/>
-                </a:solidFill>
-                <a:latin typeface="Paperlogy 8 ExtraBold" pitchFamily="34" charset="0"/>
-                <a:ea typeface="Paperlogy 8 ExtraBold" pitchFamily="34" charset="-127"/>
-                <a:cs typeface="Paperlogy 8 ExtraBold" pitchFamily="34" charset="-120"/>
-              </a:rPr>
-              <a:t>팀원 B</a:t>
-            </a:r>
-            <a:endParaRPr lang="en-US" sz="1200" dirty="0"/>
-          </a:p>
-        </p:txBody>
-      </p:sp>
-      <p:sp>
-        <p:nvSpPr>
-          <p:cNvPr id="134" name="Revit"/>
-          <p:cNvSpPr txBox="1"/>
-          <p:nvPr/>
-        </p:nvSpPr>
-        <p:spPr>
-          <a:xfrm>
-            <a:off x="1511808" y="8255413"/>
-            <a:ext cx="340709" cy="134112"/>
-          </a:xfrm>
-          <a:prstGeom prst="rect">
-            <a:avLst/>
-          </a:prstGeom>
-          <a:noFill/>
-          <a:ln/>
-        </p:spPr>
-        <p:txBody>
-          <a:bodyPr wrap="none" lIns="0" tIns="0" rIns="0" bIns="0" rtlCol="0" anchor="ctr"/>
-          <a:lstStyle/>
-          <a:p>
-            <a:pPr algn="l" indent="0" marL="0">
-              <a:buNone/>
-            </a:pPr>
-            <a:r>
-              <a:rPr lang="ko-KR" altLang="en-US" sz="864" dirty="0">
-                <a:solidFill>
-                  <a:srgbClr val="004B8D"/>
-                </a:solidFill>
-                <a:latin typeface="Paperlogy 7 Bold" pitchFamily="34" charset="0"/>
-                <a:ea typeface="Paperlogy 7 Bold" pitchFamily="34" charset="-127"/>
-                <a:cs typeface="Paperlogy 7 Bold" pitchFamily="34" charset="-120"/>
-              </a:rPr>
-              <a:t>Revit</a:t>
-            </a:r>
-            <a:endParaRPr lang="en-US" sz="864" dirty="0"/>
-          </a:p>
-        </p:txBody>
-      </p:sp>
-      <p:sp>
-        <p:nvSpPr>
-          <p:cNvPr id="135" name="기반 BIM 모델링"/>
-          <p:cNvSpPr txBox="1"/>
-          <p:nvPr/>
-        </p:nvSpPr>
-        <p:spPr>
-          <a:xfrm>
-            <a:off x="1926241" y="8243221"/>
-            <a:ext cx="898790" cy="152400"/>
-          </a:xfrm>
-          <a:prstGeom prst="rect">
-            <a:avLst/>
-          </a:prstGeom>
-          <a:noFill/>
-          <a:ln/>
-        </p:spPr>
-        <p:txBody>
-          <a:bodyPr wrap="none" lIns="0" tIns="0" rIns="0" bIns="0" rtlCol="0" anchor="ctr"/>
-          <a:lstStyle/>
-          <a:p>
-            <a:pPr algn="l" indent="0" marL="0">
-              <a:buNone/>
-            </a:pPr>
-            <a:r>
-              <a:rPr lang="ko-KR" altLang="en-US" sz="1008" spc="-25" kern="0" dirty="0">
-                <a:solidFill>
-                  <a:srgbClr val="4B5568"/>
-                </a:solidFill>
-                <a:latin typeface="Paperlogy 6 SemiBold" pitchFamily="34" charset="0"/>
-                <a:ea typeface="Paperlogy 6 SemiBold" pitchFamily="34" charset="-127"/>
-                <a:cs typeface="Paperlogy 6 SemiBold" pitchFamily="34" charset="-120"/>
-              </a:rPr>
-              <a:t>기반 BIM 모델링</a:t>
-            </a:r>
-            <a:endParaRPr lang="en-US" sz="1008" dirty="0"/>
-          </a:p>
-        </p:txBody>
-      </p:sp>
-      <p:sp>
-        <p:nvSpPr>
-          <p:cNvPr id="136" name="데이터 구축"/>
-          <p:cNvSpPr txBox="1"/>
-          <p:nvPr/>
-        </p:nvSpPr>
-        <p:spPr>
-          <a:xfrm>
-            <a:off x="1438656" y="8434102"/>
-            <a:ext cx="621030" cy="152400"/>
-          </a:xfrm>
-          <a:prstGeom prst="rect">
-            <a:avLst/>
-          </a:prstGeom>
-          <a:noFill/>
-          <a:ln/>
-        </p:spPr>
-        <p:txBody>
-          <a:bodyPr wrap="none" lIns="0" tIns="0" rIns="0" bIns="0" rtlCol="0" anchor="ctr"/>
-          <a:lstStyle/>
-          <a:p>
-            <a:pPr algn="l" indent="0" marL="0">
-              <a:buNone/>
-            </a:pPr>
-            <a:r>
-              <a:rPr lang="ko-KR" altLang="en-US" sz="1008" spc="-25" kern="0" dirty="0">
-                <a:solidFill>
-                  <a:srgbClr val="4B5568"/>
-                </a:solidFill>
-                <a:latin typeface="Paperlogy 6 SemiBold" pitchFamily="34" charset="0"/>
-                <a:ea typeface="Paperlogy 6 SemiBold" pitchFamily="34" charset="-127"/>
-                <a:cs typeface="Paperlogy 6 SemiBold" pitchFamily="34" charset="-120"/>
-              </a:rPr>
-              <a:t>데이터 구축</a:t>
-            </a:r>
-            <a:endParaRPr lang="en-US" sz="1008" dirty="0"/>
-          </a:p>
-        </p:txBody>
-      </p:sp>
-      <p:sp>
-        <p:nvSpPr>
-          <p:cNvPr id="137" name="팀원 C"/>
-          <p:cNvSpPr txBox="1"/>
-          <p:nvPr/>
-        </p:nvSpPr>
-        <p:spPr>
-          <a:xfrm>
-            <a:off x="4456176" y="7985665"/>
-            <a:ext cx="445008" cy="176784"/>
-          </a:xfrm>
-          <a:prstGeom prst="rect">
-            <a:avLst/>
-          </a:prstGeom>
-          <a:noFill/>
-          <a:ln/>
-        </p:spPr>
-        <p:txBody>
-          <a:bodyPr wrap="none" lIns="0" tIns="0" rIns="0" bIns="0" rtlCol="0" anchor="ctr"/>
-          <a:lstStyle/>
-          <a:p>
-            <a:pPr algn="l" indent="0" marL="0">
-              <a:buNone/>
-            </a:pPr>
-            <a:r>
-              <a:rPr lang="ko-KR" altLang="en-US" sz="1200" spc="-36" kern="0" dirty="0">
-                <a:solidFill>
-                  <a:srgbClr val="0B2147"/>
-                </a:solidFill>
-                <a:latin typeface="Paperlogy 8 ExtraBold" pitchFamily="34" charset="0"/>
-                <a:ea typeface="Paperlogy 8 ExtraBold" pitchFamily="34" charset="-127"/>
-                <a:cs typeface="Paperlogy 8 ExtraBold" pitchFamily="34" charset="-120"/>
-              </a:rPr>
-              <a:t>팀원 C</a:t>
-            </a:r>
-            <a:endParaRPr lang="en-US" sz="1200" dirty="0"/>
-          </a:p>
-        </p:txBody>
-      </p:sp>
-      <p:sp>
-        <p:nvSpPr>
-          <p:cNvPr id="138" name="리모델링 적용 시나리오 구성"/>
-          <p:cNvSpPr txBox="1"/>
-          <p:nvPr/>
-        </p:nvSpPr>
-        <p:spPr>
-          <a:xfrm>
-            <a:off x="4224528" y="8243221"/>
-            <a:ext cx="1471666" cy="152400"/>
-          </a:xfrm>
-          <a:prstGeom prst="rect">
-            <a:avLst/>
-          </a:prstGeom>
-          <a:noFill/>
-          <a:ln/>
-        </p:spPr>
-        <p:txBody>
-          <a:bodyPr wrap="none" lIns="0" tIns="0" rIns="0" bIns="0" rtlCol="0" anchor="ctr"/>
-          <a:lstStyle/>
-          <a:p>
-            <a:pPr algn="l" indent="0" marL="0">
-              <a:buNone/>
-            </a:pPr>
-            <a:r>
-              <a:rPr lang="ko-KR" altLang="en-US" sz="1008" spc="-25" kern="0" dirty="0">
-                <a:solidFill>
-                  <a:srgbClr val="4B5568"/>
-                </a:solidFill>
-                <a:latin typeface="Paperlogy 6 SemiBold" pitchFamily="34" charset="0"/>
-                <a:ea typeface="Paperlogy 6 SemiBold" pitchFamily="34" charset="-127"/>
-                <a:cs typeface="Paperlogy 6 SemiBold" pitchFamily="34" charset="-120"/>
-              </a:rPr>
-              <a:t>리모델링 적용 시나리오 구성</a:t>
-            </a:r>
-            <a:endParaRPr lang="en-US" sz="1008" dirty="0"/>
-          </a:p>
-        </p:txBody>
-      </p:sp>
-      <p:sp>
-        <p:nvSpPr>
-          <p:cNvPr id="139" name="시연 영상 제작"/>
-          <p:cNvSpPr txBox="1"/>
-          <p:nvPr/>
-        </p:nvSpPr>
-        <p:spPr>
-          <a:xfrm>
-            <a:off x="4224528" y="8432673"/>
-            <a:ext cx="755428" cy="152400"/>
-          </a:xfrm>
-          <a:prstGeom prst="rect">
-            <a:avLst/>
-          </a:prstGeom>
-          <a:noFill/>
-          <a:ln/>
-        </p:spPr>
-        <p:txBody>
-          <a:bodyPr wrap="none" lIns="0" tIns="0" rIns="0" bIns="0" rtlCol="0" anchor="ctr"/>
-          <a:lstStyle/>
-          <a:p>
-            <a:pPr algn="l" indent="0" marL="0">
-              <a:buNone/>
-            </a:pPr>
-            <a:r>
-              <a:rPr lang="ko-KR" altLang="en-US" sz="1008" spc="-25" kern="0" dirty="0">
-                <a:solidFill>
-                  <a:srgbClr val="4B5568"/>
-                </a:solidFill>
-                <a:latin typeface="Paperlogy 6 SemiBold" pitchFamily="34" charset="0"/>
-                <a:ea typeface="Paperlogy 6 SemiBold" pitchFamily="34" charset="-127"/>
-                <a:cs typeface="Paperlogy 6 SemiBold" pitchFamily="34" charset="-120"/>
-              </a:rPr>
-              <a:t>시연 영상 제작</a:t>
-            </a:r>
-            <a:endParaRPr lang="en-US" sz="1008" dirty="0"/>
-          </a:p>
-        </p:txBody>
-      </p:sp>
-      <p:sp>
-        <p:nvSpPr>
-          <p:cNvPr id="140" name="04"/>
-          <p:cNvSpPr txBox="1"/>
-          <p:nvPr/>
-        </p:nvSpPr>
-        <p:spPr>
-          <a:xfrm>
-            <a:off x="1304544" y="9090565"/>
-            <a:ext cx="203930" cy="134112"/>
-          </a:xfrm>
-          <a:prstGeom prst="rect">
-            <a:avLst/>
-          </a:prstGeom>
-          <a:noFill/>
-          <a:ln/>
-        </p:spPr>
-        <p:txBody>
-          <a:bodyPr wrap="none" lIns="0" tIns="0" rIns="0" bIns="0" rtlCol="0" anchor="ctr"/>
-          <a:lstStyle/>
-          <a:p>
-            <a:pPr algn="l" indent="0" marL="0">
-              <a:buNone/>
-            </a:pPr>
-            <a:r>
-              <a:rPr lang="ko-KR" altLang="en-US" sz="864" spc="35" kern="0" dirty="0">
-                <a:solidFill>
-                  <a:srgbClr val="004B8D"/>
-                </a:solidFill>
-                <a:latin typeface="Paperlogy 8 ExtraBold" pitchFamily="34" charset="0"/>
-                <a:ea typeface="Paperlogy 8 ExtraBold" pitchFamily="34" charset="-127"/>
-                <a:cs typeface="Paperlogy 8 ExtraBold" pitchFamily="34" charset="-120"/>
-              </a:rPr>
-              <a:t>04</a:t>
-            </a:r>
-            <a:endParaRPr lang="en-US" sz="864" dirty="0"/>
-          </a:p>
-        </p:txBody>
-      </p:sp>
-      <p:sp>
-        <p:nvSpPr>
-          <p:cNvPr id="141" name="RESULT"/>
-          <p:cNvSpPr txBox="1"/>
-          <p:nvPr/>
-        </p:nvSpPr>
-        <p:spPr>
-          <a:xfrm>
-            <a:off x="1727930" y="9090565"/>
-            <a:ext cx="590360" cy="134112"/>
-          </a:xfrm>
-          <a:prstGeom prst="rect">
-            <a:avLst/>
-          </a:prstGeom>
-          <a:noFill/>
-          <a:ln/>
-        </p:spPr>
-        <p:txBody>
-          <a:bodyPr wrap="none" lIns="0" tIns="0" rIns="0" bIns="0" rtlCol="0" anchor="ctr"/>
-          <a:lstStyle/>
-          <a:p>
-            <a:pPr algn="l" indent="0" marL="0">
-              <a:buNone/>
-            </a:pPr>
-            <a:r>
-              <a:rPr lang="ko-KR" altLang="en-US" sz="864" spc="138" kern="0" dirty="0">
-                <a:solidFill>
-                  <a:srgbClr val="2A78DD"/>
-                </a:solidFill>
-                <a:latin typeface="Paperlogy 7 Bold" pitchFamily="34" charset="0"/>
-                <a:ea typeface="Paperlogy 7 Bold" pitchFamily="34" charset="-127"/>
-                <a:cs typeface="Paperlogy 7 Bold" pitchFamily="34" charset="-120"/>
-              </a:rPr>
-              <a:t>RESULT</a:t>
-            </a:r>
-            <a:endParaRPr lang="en-US" sz="864" dirty="0"/>
-          </a:p>
-        </p:txBody>
-      </p:sp>
-      <p:sp>
-        <p:nvSpPr>
-          <p:cNvPr id="142" name="남은 3주 내 시연 영상 완성"/>
-          <p:cNvSpPr txBox="1"/>
-          <p:nvPr/>
-        </p:nvSpPr>
-        <p:spPr>
-          <a:xfrm>
-            <a:off x="2379250" y="9063133"/>
-            <a:ext cx="1759820" cy="188976"/>
-          </a:xfrm>
-          <a:prstGeom prst="rect">
-            <a:avLst/>
-          </a:prstGeom>
-          <a:noFill/>
-          <a:ln/>
-        </p:spPr>
-        <p:txBody>
-          <a:bodyPr wrap="none" lIns="0" tIns="0" rIns="0" bIns="0" rtlCol="0" anchor="ctr"/>
-          <a:lstStyle/>
-          <a:p>
-            <a:pPr algn="l" indent="0" marL="0">
-              <a:buNone/>
-            </a:pPr>
-            <a:r>
-              <a:rPr lang="ko-KR" altLang="en-US" sz="1296" spc="-39" kern="0" dirty="0">
-                <a:solidFill>
-                  <a:srgbClr val="0B2147"/>
-                </a:solidFill>
-                <a:latin typeface="Paperlogy 7 Bold" pitchFamily="34" charset="0"/>
-                <a:ea typeface="Paperlogy 7 Bold" pitchFamily="34" charset="-127"/>
-                <a:cs typeface="Paperlogy 7 Bold" pitchFamily="34" charset="-120"/>
-              </a:rPr>
-              <a:t>남은 3주 내 시연 영상 완성</a:t>
-            </a:r>
-            <a:endParaRPr lang="en-US" sz="1296" dirty="0"/>
-          </a:p>
-        </p:txBody>
-      </p:sp>
-      <p:sp>
-        <p:nvSpPr>
-          <p:cNvPr id="143" name="KEY MESSAGE"/>
-          <p:cNvSpPr txBox="1"/>
-          <p:nvPr/>
-        </p:nvSpPr>
-        <p:spPr>
-          <a:xfrm>
-            <a:off x="1182624" y="9839325"/>
-            <a:ext cx="1065686" cy="134112"/>
-          </a:xfrm>
-          <a:prstGeom prst="rect">
-            <a:avLst/>
-          </a:prstGeom>
-          <a:noFill/>
-          <a:ln/>
-        </p:spPr>
-        <p:txBody>
-          <a:bodyPr wrap="none" lIns="0" tIns="0" rIns="0" bIns="0" rtlCol="0" anchor="ctr"/>
-          <a:lstStyle/>
-          <a:p>
-            <a:pPr algn="l" indent="0" marL="0">
-              <a:buNone/>
-            </a:pPr>
-            <a:r>
-              <a:rPr lang="ko-KR" altLang="en-US" sz="864" spc="138" kern="0" dirty="0">
-                <a:solidFill>
-                  <a:srgbClr val="8FD3F5"/>
-                </a:solidFill>
-                <a:latin typeface="Paperlogy 7 Bold" pitchFamily="34" charset="0"/>
-                <a:ea typeface="Paperlogy 7 Bold" pitchFamily="34" charset="-127"/>
-                <a:cs typeface="Paperlogy 7 Bold" pitchFamily="34" charset="-120"/>
-              </a:rPr>
-              <a:t>KEY MESSAGE</a:t>
-            </a:r>
-            <a:endParaRPr lang="en-US" sz="864" dirty="0"/>
-          </a:p>
-        </p:txBody>
-      </p:sp>
-      <p:sp>
-        <p:nvSpPr>
-          <p:cNvPr id="144" name="서로 다른 사람을 하나의 공동 목표로 연결합니다"/>
-          <p:cNvSpPr txBox="1"/>
-          <p:nvPr/>
-        </p:nvSpPr>
-        <p:spPr>
-          <a:xfrm>
-            <a:off x="2358676" y="9792081"/>
-            <a:ext cx="3750951" cy="225552"/>
-          </a:xfrm>
-          <a:prstGeom prst="rect">
-            <a:avLst/>
-          </a:prstGeom>
-          <a:noFill/>
-          <a:ln/>
-        </p:spPr>
-        <p:txBody>
-          <a:bodyPr wrap="none" lIns="0" tIns="0" rIns="0" bIns="0" rtlCol="0" anchor="ctr"/>
-          <a:lstStyle/>
-          <a:p>
-            <a:pPr algn="l" indent="0" marL="0">
-              <a:buNone/>
-            </a:pPr>
-            <a:r>
-              <a:rPr lang="ko-KR" altLang="en-US" sz="1536" spc="-46" kern="0" dirty="0">
-                <a:solidFill>
-                  <a:srgbClr val="FFFFFF"/>
-                </a:solidFill>
-                <a:latin typeface="Paperlogy 7 Bold" pitchFamily="34" charset="0"/>
-                <a:ea typeface="Paperlogy 7 Bold" pitchFamily="34" charset="-127"/>
-                <a:cs typeface="Paperlogy 7 Bold" pitchFamily="34" charset="-120"/>
-              </a:rPr>
-              <a:t>서로 다른 사람을 </a:t>
-            </a:r>
-            <a:pPr algn="l" indent="0" marL="0">
-              <a:buNone/>
-            </a:pPr>
-            <a:r>
-              <a:rPr lang="ko-KR" altLang="en-US" sz="1536" spc="-46" kern="0" dirty="0">
-                <a:solidFill>
-                  <a:srgbClr val="FDBB30"/>
-                </a:solidFill>
-                <a:latin typeface="Paperlogy 7 Bold" pitchFamily="34" charset="0"/>
-                <a:ea typeface="Paperlogy 7 Bold" pitchFamily="34" charset="-127"/>
-                <a:cs typeface="Paperlogy 7 Bold" pitchFamily="34" charset="-120"/>
-              </a:rPr>
-              <a:t>하나의 공동 목표</a:t>
-            </a:r>
-            <a:pPr algn="l" indent="0" marL="0">
-              <a:buNone/>
-            </a:pPr>
-            <a:r>
-              <a:rPr lang="ko-KR" altLang="en-US" sz="1536" spc="-46" kern="0" dirty="0">
-                <a:solidFill>
-                  <a:srgbClr val="FFFFFF"/>
-                </a:solidFill>
-                <a:latin typeface="Paperlogy 7 Bold" pitchFamily="34" charset="0"/>
-                <a:ea typeface="Paperlogy 7 Bold" pitchFamily="34" charset="-127"/>
-                <a:cs typeface="Paperlogy 7 Bold" pitchFamily="34" charset="-120"/>
-              </a:rPr>
-              <a:t>로 연결합니다</a:t>
-            </a:r>
-            <a:endParaRPr lang="en-US" sz="1536" dirty="0"/>
-          </a:p>
-        </p:txBody>
-      </p:sp>
-      <p:sp>
-        <p:nvSpPr>
-          <p:cNvPr id="145" name="2026년 하반기 신입사원 공개채용"/>
-          <p:cNvSpPr txBox="1"/>
-          <p:nvPr/>
-        </p:nvSpPr>
-        <p:spPr>
-          <a:xfrm>
-            <a:off x="512064" y="10252901"/>
-            <a:ext cx="1593127" cy="134112"/>
-          </a:xfrm>
-          <a:prstGeom prst="rect">
-            <a:avLst/>
-          </a:prstGeom>
-          <a:noFill/>
-          <a:ln/>
-        </p:spPr>
-        <p:txBody>
-          <a:bodyPr wrap="none" lIns="0" tIns="0" rIns="0" bIns="0" rtlCol="0" anchor="ctr"/>
-          <a:lstStyle/>
-          <a:p>
-            <a:pPr algn="l" indent="0" marL="0">
-              <a:buNone/>
-            </a:pPr>
-            <a:r>
-              <a:rPr lang="ko-KR" altLang="en-US" sz="864" spc="-9" kern="0" dirty="0">
-                <a:solidFill>
-                  <a:srgbClr val="8691A5"/>
-                </a:solidFill>
-                <a:latin typeface="Paperlogy 5 Medium" pitchFamily="34" charset="0"/>
-                <a:ea typeface="Paperlogy 5 Medium" pitchFamily="34" charset="-127"/>
-                <a:cs typeface="Paperlogy 5 Medium" pitchFamily="34" charset="-120"/>
-              </a:rPr>
-              <a:t>2026년 하반기 신입사원 공개채용</a:t>
-            </a:r>
-            <a:endParaRPr lang="en-US" sz="864" dirty="0"/>
-          </a:p>
-        </p:txBody>
-      </p:sp>
-      <p:sp>
-        <p:nvSpPr>
-          <p:cNvPr id="146" name="01 / 03"/>
+          <p:cNvPr id="81" name="01 / 03"/>
           <p:cNvSpPr txBox="1"/>
           <p:nvPr/>
         </p:nvSpPr>

--- a/hec-pt/pptx/portrait.pptx
+++ b/hec-pt/pptx/portrait.pptx
@@ -1245,9 +1245,36 @@
           <a:ln/>
         </p:spPr>
       </p:sp>
+      <p:sp>
+        <p:nvSpPr>
+          <p:cNvPr id="11" name="span"/>
+          <p:cNvSpPr/>
+          <p:nvPr/>
+        </p:nvSpPr>
+        <p:spPr>
+          <a:xfrm>
+            <a:off x="3114580" y="2468499"/>
+            <a:ext cx="1719929" cy="219456"/>
+          </a:xfrm>
+          <a:prstGeom prst="roundRect">
+            <a:avLst>
+              <a:gd name="adj" fmla="val 50000"/>
+            </a:avLst>
+          </a:prstGeom>
+          <a:solidFill>
+            <a:srgbClr val="FFFFFF"/>
+          </a:solidFill>
+          <a:ln w="12192">
+            <a:solidFill>
+              <a:srgbClr val="C3CEDD"/>
+            </a:solidFill>
+            <a:prstDash val="solid"/>
+          </a:ln>
+        </p:spPr>
+      </p:sp>
       <p:pic>
         <p:nvPicPr>
-          <p:cNvPr id="11" name="p1p-op l" descr="p1p-op l">    </p:cNvPr>
+          <p:cNvPr id="12" name="svg" descr="svg">    </p:cNvPr>
           <p:cNvPicPr>
             <a:picLocks noChangeAspect="1"/>
           </p:cNvPicPr>
@@ -1261,8 +1288,8 @@
         </p:blipFill>
         <p:spPr>
           <a:xfrm>
-            <a:off x="1267968" y="2462403"/>
-            <a:ext cx="1463040" cy="316992"/>
+            <a:off x="3210084" y="2521331"/>
+            <a:ext cx="113792" cy="113792"/>
           </a:xfrm>
           <a:prstGeom prst="rect">
             <a:avLst/>
@@ -1271,7 +1298,7 @@
       </p:pic>
       <p:pic>
         <p:nvPicPr>
-          <p:cNvPr id="12" name="svg" descr="svg">    </p:cNvPr>
+          <p:cNvPr id="13" name="p1p-pull l" descr="p1p-pull l">    </p:cNvPr>
           <p:cNvPicPr>
             <a:picLocks noChangeAspect="1"/>
           </p:cNvPicPr>
@@ -1285,17 +1312,44 @@
         </p:blipFill>
         <p:spPr>
           <a:xfrm>
-            <a:off x="2771648" y="2674334"/>
-            <a:ext cx="2405888" cy="89408"/>
+            <a:off x="1507744" y="2885059"/>
+            <a:ext cx="319024" cy="130048"/>
           </a:xfrm>
           <a:prstGeom prst="rect">
             <a:avLst/>
           </a:prstGeom>
         </p:spPr>
       </p:pic>
+      <p:sp>
+        <p:nvSpPr>
+          <p:cNvPr id="14" name="p1p-op l"/>
+          <p:cNvSpPr/>
+          <p:nvPr/>
+        </p:nvSpPr>
+        <p:spPr>
+          <a:xfrm>
+            <a:off x="1908048" y="2773299"/>
+            <a:ext cx="1572768" cy="353568"/>
+          </a:xfrm>
+          <a:prstGeom prst="roundRect">
+            <a:avLst>
+              <a:gd name="adj" fmla="val 50000"/>
+            </a:avLst>
+          </a:prstGeom>
+          <a:solidFill>
+            <a:srgbClr val="FFFFFF"/>
+          </a:solidFill>
+          <a:ln w="12192">
+            <a:solidFill>
+              <a:srgbClr val="0B2147"/>
+            </a:solidFill>
+            <a:prstDash val="solid"/>
+          </a:ln>
+        </p:spPr>
+      </p:sp>
       <p:pic>
         <p:nvPicPr>
-          <p:cNvPr id="13" name="p1p-op r" descr="p1p-op r">    </p:cNvPr>
+          <p:cNvPr id="15" name="svg" descr="svg">    </p:cNvPr>
           <p:cNvPicPr>
             <a:picLocks noChangeAspect="1"/>
           </p:cNvPicPr>
@@ -1309,17 +1363,64 @@
         </p:blipFill>
         <p:spPr>
           <a:xfrm>
-            <a:off x="5218176" y="2462403"/>
-            <a:ext cx="1463040" cy="316992"/>
+            <a:off x="2365439" y="2858643"/>
+            <a:ext cx="182880" cy="182880"/>
           </a:xfrm>
           <a:prstGeom prst="rect">
             <a:avLst/>
           </a:prstGeom>
         </p:spPr>
       </p:pic>
+      <p:sp>
+        <p:nvSpPr>
+          <p:cNvPr id="16" name="p1p-vsb"/>
+          <p:cNvSpPr/>
+          <p:nvPr/>
+        </p:nvSpPr>
+        <p:spPr>
+          <a:xfrm>
+            <a:off x="3779520" y="2755011"/>
+            <a:ext cx="390144" cy="390144"/>
+          </a:xfrm>
+          <a:prstGeom prst="ellipse">
+            <a:avLst/>
+          </a:prstGeom>
+          <a:solidFill>
+            <a:srgbClr val="0B2147"/>
+          </a:solidFill>
+          <a:ln/>
+        </p:spPr>
+      </p:sp>
+      <p:sp>
+        <p:nvSpPr>
+          <p:cNvPr id="17" name="p1p-op r"/>
+          <p:cNvSpPr/>
+          <p:nvPr/>
+        </p:nvSpPr>
+        <p:spPr>
+          <a:xfrm>
+            <a:off x="4468368" y="2773299"/>
+            <a:ext cx="1572768" cy="353568"/>
+          </a:xfrm>
+          <a:prstGeom prst="roundRect">
+            <a:avLst>
+              <a:gd name="adj" fmla="val 50000"/>
+            </a:avLst>
+          </a:prstGeom>
+          <a:solidFill>
+            <a:srgbClr val="FFFFFF"/>
+          </a:solidFill>
+          <a:ln w="12192">
+            <a:solidFill>
+              <a:srgbClr val="0B2147"/>
+            </a:solidFill>
+            <a:prstDash val="solid"/>
+          </a:ln>
+        </p:spPr>
+      </p:sp>
       <p:pic>
         <p:nvPicPr>
-          <p:cNvPr id="14" name="svg" descr="svg">    </p:cNvPr>
+          <p:cNvPr id="18" name="svg" descr="svg">    </p:cNvPr>
           <p:cNvPicPr>
             <a:picLocks noChangeAspect="1"/>
           </p:cNvPicPr>
@@ -1333,8 +1434,8 @@
         </p:blipFill>
         <p:spPr>
           <a:xfrm>
-            <a:off x="1989328" y="2769235"/>
-            <a:ext cx="3970528" cy="516128"/>
+            <a:off x="4779201" y="2858643"/>
+            <a:ext cx="182880" cy="182880"/>
           </a:xfrm>
           <a:prstGeom prst="rect">
             <a:avLst/>
@@ -1343,7 +1444,7 @@
       </p:pic>
       <p:pic>
         <p:nvPicPr>
-          <p:cNvPr id="15" name="p1p-down" descr="p1p-down">    </p:cNvPr>
+          <p:cNvPr id="19" name="p1p-pull r" descr="p1p-pull r">    </p:cNvPr>
           <p:cNvPicPr>
             <a:picLocks noChangeAspect="1"/>
           </p:cNvPicPr>
@@ -1357,8 +1458,8 @@
         </p:blipFill>
         <p:spPr>
           <a:xfrm>
-            <a:off x="3927856" y="3573907"/>
-            <a:ext cx="93472" cy="150368"/>
+            <a:off x="6122416" y="2885059"/>
+            <a:ext cx="319024" cy="130048"/>
           </a:xfrm>
           <a:prstGeom prst="rect">
             <a:avLst/>
@@ -1367,13 +1468,13 @@
       </p:pic>
       <p:sp>
         <p:nvSpPr>
-          <p:cNvPr id="16" name="span"/>
+          <p:cNvPr id="20" name="span"/>
           <p:cNvSpPr/>
           <p:nvPr/>
         </p:nvSpPr>
         <p:spPr>
           <a:xfrm>
-            <a:off x="3418142" y="3297555"/>
+            <a:off x="3418142" y="3626739"/>
             <a:ext cx="1112901" cy="268224"/>
           </a:xfrm>
           <a:prstGeom prst="roundRect">
@@ -1392,31 +1493,9 @@
           </a:ln>
         </p:spPr>
       </p:sp>
-      <p:sp>
-        <p:nvSpPr>
-          <p:cNvPr id="17" name="p1p-topic"/>
-          <p:cNvSpPr/>
-          <p:nvPr/>
-        </p:nvSpPr>
-        <p:spPr>
-          <a:xfrm>
-            <a:off x="902208" y="3730371"/>
-            <a:ext cx="6144768" cy="721709"/>
-          </a:xfrm>
-          <a:prstGeom prst="roundRect">
-            <a:avLst>
-              <a:gd name="adj" fmla="val 18583"/>
-            </a:avLst>
-          </a:prstGeom>
-          <a:solidFill>
-            <a:srgbClr val="0B2147"/>
-          </a:solidFill>
-          <a:ln/>
-        </p:spPr>
-      </p:sp>
       <p:pic>
         <p:nvPicPr>
-          <p:cNvPr id="18" name="ring solid p1p-no" descr="ring solid p1p-no">    </p:cNvPr>
+          <p:cNvPr id="21" name="svg" descr="svg">    </p:cNvPr>
           <p:cNvPicPr>
             <a:picLocks noChangeAspect="1"/>
           </p:cNvPicPr>
@@ -1430,59 +1509,17 @@
         </p:blipFill>
         <p:spPr>
           <a:xfrm>
-            <a:off x="481584" y="4845812"/>
-            <a:ext cx="329184" cy="329184"/>
+            <a:off x="2684272" y="3122803"/>
+            <a:ext cx="2580640" cy="491744"/>
           </a:xfrm>
           <a:prstGeom prst="rect">
             <a:avLst/>
           </a:prstGeom>
         </p:spPr>
       </p:pic>
-      <p:sp>
-        <p:nvSpPr>
-          <p:cNvPr id="19" name="p1p-lead"/>
-          <p:cNvSpPr/>
-          <p:nvPr/>
-        </p:nvSpPr>
-        <p:spPr>
-          <a:xfrm>
-            <a:off x="2023872" y="5244084"/>
-            <a:ext cx="3901440" cy="583883"/>
-          </a:xfrm>
-          <a:prstGeom prst="roundRect">
-            <a:avLst>
-              <a:gd name="adj" fmla="val 22969"/>
-            </a:avLst>
-          </a:prstGeom>
-          <a:solidFill>
-            <a:srgbClr val="0B2147"/>
-          </a:solidFill>
-          <a:ln/>
-        </p:spPr>
-      </p:sp>
-      <p:sp>
-        <p:nvSpPr>
-          <p:cNvPr id="20" name="i"/>
-          <p:cNvSpPr/>
-          <p:nvPr/>
-        </p:nvSpPr>
-        <p:spPr>
-          <a:xfrm>
-            <a:off x="3686461" y="5383911"/>
-            <a:ext cx="73152" cy="73152"/>
-          </a:xfrm>
-          <a:prstGeom prst="ellipse">
-            <a:avLst/>
-          </a:prstGeom>
-          <a:solidFill>
-            <a:srgbClr val="00A94F"/>
-          </a:solidFill>
-          <a:ln/>
-        </p:spPr>
-      </p:sp>
       <p:pic>
         <p:nvPicPr>
-          <p:cNvPr id="21" name="p1p-tree" descr="p1p-tree">    </p:cNvPr>
+          <p:cNvPr id="22" name="p1p-down" descr="p1p-down">    </p:cNvPr>
           <p:cNvPicPr>
             <a:picLocks noChangeAspect="1"/>
           </p:cNvPicPr>
@@ -1496,8 +1533,8 @@
         </p:blipFill>
         <p:spPr>
           <a:xfrm>
-            <a:off x="1891792" y="5827967"/>
-            <a:ext cx="4165600" cy="231648"/>
+            <a:off x="3927856" y="3903091"/>
+            <a:ext cx="93472" cy="150368"/>
           </a:xfrm>
           <a:prstGeom prst="rect">
             <a:avLst/>
@@ -1506,170 +1543,29 @@
       </p:pic>
       <p:sp>
         <p:nvSpPr>
-          <p:cNvPr id="22" name="p1p-mem"/>
+          <p:cNvPr id="23" name="p1p-topic"/>
           <p:cNvSpPr/>
           <p:nvPr/>
         </p:nvSpPr>
         <p:spPr>
           <a:xfrm>
-            <a:off x="908304" y="6065711"/>
-            <a:ext cx="1962912" cy="758095"/>
+            <a:off x="902208" y="4059555"/>
+            <a:ext cx="6144768" cy="721709"/>
           </a:xfrm>
           <a:prstGeom prst="roundRect">
             <a:avLst>
-              <a:gd name="adj" fmla="val 16887"/>
+              <a:gd name="adj" fmla="val 18583"/>
             </a:avLst>
           </a:prstGeom>
           <a:solidFill>
-            <a:srgbClr val="FFFFFF"/>
-          </a:solidFill>
-          <a:ln w="12192">
-            <a:solidFill>
-              <a:srgbClr val="D8E0EB"/>
-            </a:solidFill>
-            <a:prstDash val="solid"/>
-          </a:ln>
-        </p:spPr>
-      </p:sp>
-      <p:sp>
-        <p:nvSpPr>
-          <p:cNvPr id="23" name="i"/>
-          <p:cNvSpPr/>
-          <p:nvPr/>
-        </p:nvSpPr>
-        <p:spPr>
-          <a:xfrm>
-            <a:off x="1643253" y="6199442"/>
-            <a:ext cx="73152" cy="73152"/>
-          </a:xfrm>
-          <a:prstGeom prst="ellipse">
-            <a:avLst/>
-          </a:prstGeom>
-          <a:solidFill>
-            <a:srgbClr val="00A94F"/>
-          </a:solidFill>
-          <a:ln/>
-        </p:spPr>
-      </p:sp>
-      <p:sp>
-        <p:nvSpPr>
-          <p:cNvPr id="24" name="p1p-mem"/>
-          <p:cNvSpPr/>
-          <p:nvPr/>
-        </p:nvSpPr>
-        <p:spPr>
-          <a:xfrm>
-            <a:off x="2993136" y="6065711"/>
-            <a:ext cx="1962912" cy="758095"/>
-          </a:xfrm>
-          <a:prstGeom prst="roundRect">
-            <a:avLst>
-              <a:gd name="adj" fmla="val 16887"/>
-            </a:avLst>
-          </a:prstGeom>
-          <a:solidFill>
-            <a:srgbClr val="FFFFFF"/>
-          </a:solidFill>
-          <a:ln w="12192">
-            <a:solidFill>
-              <a:srgbClr val="D8E0EB"/>
-            </a:solidFill>
-            <a:prstDash val="solid"/>
-          </a:ln>
-        </p:spPr>
-      </p:sp>
-      <p:sp>
-        <p:nvSpPr>
-          <p:cNvPr id="25" name="i"/>
-          <p:cNvSpPr/>
-          <p:nvPr/>
-        </p:nvSpPr>
-        <p:spPr>
-          <a:xfrm>
-            <a:off x="3728180" y="6199442"/>
-            <a:ext cx="73152" cy="73152"/>
-          </a:xfrm>
-          <a:prstGeom prst="ellipse">
-            <a:avLst/>
-          </a:prstGeom>
-          <a:solidFill>
-            <a:srgbClr val="00A94F"/>
-          </a:solidFill>
-          <a:ln/>
-        </p:spPr>
-      </p:sp>
-      <p:sp>
-        <p:nvSpPr>
-          <p:cNvPr id="26" name="p1p-mem"/>
-          <p:cNvSpPr/>
-          <p:nvPr/>
-        </p:nvSpPr>
-        <p:spPr>
-          <a:xfrm>
-            <a:off x="5077968" y="6065711"/>
-            <a:ext cx="1962912" cy="758095"/>
-          </a:xfrm>
-          <a:prstGeom prst="roundRect">
-            <a:avLst>
-              <a:gd name="adj" fmla="val 16887"/>
-            </a:avLst>
-          </a:prstGeom>
-          <a:solidFill>
-            <a:srgbClr val="FFFFFF"/>
-          </a:solidFill>
-          <a:ln w="12192">
-            <a:solidFill>
-              <a:srgbClr val="D8E0EB"/>
-            </a:solidFill>
-            <a:prstDash val="solid"/>
-          </a:ln>
-        </p:spPr>
-      </p:sp>
-      <p:sp>
-        <p:nvSpPr>
-          <p:cNvPr id="27" name="i"/>
-          <p:cNvSpPr/>
-          <p:nvPr/>
-        </p:nvSpPr>
-        <p:spPr>
-          <a:xfrm>
-            <a:off x="5815298" y="6199442"/>
-            <a:ext cx="73152" cy="73152"/>
-          </a:xfrm>
-          <a:prstGeom prst="ellipse">
-            <a:avLst/>
-          </a:prstGeom>
-          <a:solidFill>
-            <a:srgbClr val="00A94F"/>
-          </a:solidFill>
-          <a:ln/>
-        </p:spPr>
-      </p:sp>
-      <p:sp>
-        <p:nvSpPr>
-          <p:cNvPr id="28" name="span"/>
-          <p:cNvSpPr/>
-          <p:nvPr/>
-        </p:nvSpPr>
-        <p:spPr>
-          <a:xfrm>
-            <a:off x="2913221" y="6915245"/>
-            <a:ext cx="2122742" cy="256032"/>
-          </a:xfrm>
-          <a:prstGeom prst="roundRect">
-            <a:avLst>
-              <a:gd name="adj" fmla="val 50000"/>
-            </a:avLst>
-          </a:prstGeom>
-          <a:solidFill>
-            <a:srgbClr val="E5F6EC"/>
+            <a:srgbClr val="0B2147"/>
           </a:solidFill>
           <a:ln/>
         </p:spPr>
       </p:sp>
       <p:pic>
         <p:nvPicPr>
-          <p:cNvPr id="29" name="svg" descr="svg">    </p:cNvPr>
+          <p:cNvPr id="24" name="ring solid p1p-no" descr="ring solid p1p-no">    </p:cNvPr>
           <p:cNvPicPr>
             <a:picLocks noChangeAspect="1"/>
           </p:cNvPicPr>
@@ -1683,17 +1579,59 @@
         </p:blipFill>
         <p:spPr>
           <a:xfrm>
-            <a:off x="3039205" y="6982301"/>
-            <a:ext cx="113792" cy="117856"/>
+            <a:off x="481584" y="5010404"/>
+            <a:ext cx="329184" cy="329184"/>
           </a:xfrm>
           <a:prstGeom prst="rect">
             <a:avLst/>
           </a:prstGeom>
         </p:spPr>
       </p:pic>
+      <p:sp>
+        <p:nvSpPr>
+          <p:cNvPr id="25" name="p1p-lead"/>
+          <p:cNvSpPr/>
+          <p:nvPr/>
+        </p:nvSpPr>
+        <p:spPr>
+          <a:xfrm>
+            <a:off x="2023872" y="5408676"/>
+            <a:ext cx="3901440" cy="583883"/>
+          </a:xfrm>
+          <a:prstGeom prst="roundRect">
+            <a:avLst>
+              <a:gd name="adj" fmla="val 22969"/>
+            </a:avLst>
+          </a:prstGeom>
+          <a:solidFill>
+            <a:srgbClr val="0B2147"/>
+          </a:solidFill>
+          <a:ln/>
+        </p:spPr>
+      </p:sp>
+      <p:sp>
+        <p:nvSpPr>
+          <p:cNvPr id="26" name="i"/>
+          <p:cNvSpPr/>
+          <p:nvPr/>
+        </p:nvSpPr>
+        <p:spPr>
+          <a:xfrm>
+            <a:off x="3686461" y="5548503"/>
+            <a:ext cx="73152" cy="73152"/>
+          </a:xfrm>
+          <a:prstGeom prst="ellipse">
+            <a:avLst/>
+          </a:prstGeom>
+          <a:solidFill>
+            <a:srgbClr val="00A94F"/>
+          </a:solidFill>
+          <a:ln/>
+        </p:spPr>
+      </p:sp>
       <p:pic>
         <p:nvPicPr>
-          <p:cNvPr id="30" name="ring solid p1p-no" descr="ring solid p1p-no">    </p:cNvPr>
+          <p:cNvPr id="27" name="p1p-tree" descr="p1p-tree">    </p:cNvPr>
           <p:cNvPicPr>
             <a:picLocks noChangeAspect="1"/>
           </p:cNvPicPr>
@@ -1707,8 +1645,8 @@
         </p:blipFill>
         <p:spPr>
           <a:xfrm>
-            <a:off x="481584" y="7565009"/>
-            <a:ext cx="329184" cy="329184"/>
+            <a:off x="1891792" y="5992559"/>
+            <a:ext cx="4165600" cy="231648"/>
           </a:xfrm>
           <a:prstGeom prst="rect">
             <a:avLst/>
@@ -1717,49 +1655,170 @@
       </p:pic>
       <p:sp>
         <p:nvSpPr>
-          <p:cNvPr id="31" name="p1p-vid"/>
+          <p:cNvPr id="28" name="p1p-mem"/>
           <p:cNvSpPr/>
           <p:nvPr/>
         </p:nvSpPr>
         <p:spPr>
           <a:xfrm>
-            <a:off x="902208" y="7963281"/>
-            <a:ext cx="2072640" cy="1164336"/>
+            <a:off x="908304" y="6230303"/>
+            <a:ext cx="1962912" cy="758095"/>
           </a:xfrm>
           <a:prstGeom prst="roundRect">
             <a:avLst>
-              <a:gd name="adj" fmla="val 9424"/>
+              <a:gd name="adj" fmla="val 16887"/>
             </a:avLst>
           </a:prstGeom>
           <a:solidFill>
-            <a:srgbClr val="0B2147"/>
-          </a:solidFill>
-          <a:ln/>
-        </p:spPr>
-      </p:sp>
-      <p:sp>
-        <p:nvSpPr>
-          <p:cNvPr id="32" name="span"/>
+            <a:srgbClr val="FFFFFF"/>
+          </a:solidFill>
+          <a:ln w="12192">
+            <a:solidFill>
+              <a:srgbClr val="D8E0EB"/>
+            </a:solidFill>
+            <a:prstDash val="solid"/>
+          </a:ln>
+        </p:spPr>
+      </p:sp>
+      <p:sp>
+        <p:nvSpPr>
+          <p:cNvPr id="29" name="i"/>
           <p:cNvSpPr/>
           <p:nvPr/>
         </p:nvSpPr>
         <p:spPr>
           <a:xfrm>
-            <a:off x="1712976" y="8319897"/>
-            <a:ext cx="451104" cy="451104"/>
+            <a:off x="1643253" y="6364034"/>
+            <a:ext cx="73152" cy="73152"/>
           </a:xfrm>
           <a:prstGeom prst="ellipse">
             <a:avLst/>
           </a:prstGeom>
           <a:solidFill>
+            <a:srgbClr val="00A94F"/>
+          </a:solidFill>
+          <a:ln/>
+        </p:spPr>
+      </p:sp>
+      <p:sp>
+        <p:nvSpPr>
+          <p:cNvPr id="30" name="p1p-mem"/>
+          <p:cNvSpPr/>
+          <p:nvPr/>
+        </p:nvSpPr>
+        <p:spPr>
+          <a:xfrm>
+            <a:off x="2993136" y="6230303"/>
+            <a:ext cx="1962912" cy="758095"/>
+          </a:xfrm>
+          <a:prstGeom prst="roundRect">
+            <a:avLst>
+              <a:gd name="adj" fmla="val 16887"/>
+            </a:avLst>
+          </a:prstGeom>
+          <a:solidFill>
             <a:srgbClr val="FFFFFF"/>
+          </a:solidFill>
+          <a:ln w="12192">
+            <a:solidFill>
+              <a:srgbClr val="D8E0EB"/>
+            </a:solidFill>
+            <a:prstDash val="solid"/>
+          </a:ln>
+        </p:spPr>
+      </p:sp>
+      <p:sp>
+        <p:nvSpPr>
+          <p:cNvPr id="31" name="i"/>
+          <p:cNvSpPr/>
+          <p:nvPr/>
+        </p:nvSpPr>
+        <p:spPr>
+          <a:xfrm>
+            <a:off x="3728180" y="6364034"/>
+            <a:ext cx="73152" cy="73152"/>
+          </a:xfrm>
+          <a:prstGeom prst="ellipse">
+            <a:avLst/>
+          </a:prstGeom>
+          <a:solidFill>
+            <a:srgbClr val="00A94F"/>
+          </a:solidFill>
+          <a:ln/>
+        </p:spPr>
+      </p:sp>
+      <p:sp>
+        <p:nvSpPr>
+          <p:cNvPr id="32" name="p1p-mem"/>
+          <p:cNvSpPr/>
+          <p:nvPr/>
+        </p:nvSpPr>
+        <p:spPr>
+          <a:xfrm>
+            <a:off x="5077968" y="6230303"/>
+            <a:ext cx="1962912" cy="758095"/>
+          </a:xfrm>
+          <a:prstGeom prst="roundRect">
+            <a:avLst>
+              <a:gd name="adj" fmla="val 16887"/>
+            </a:avLst>
+          </a:prstGeom>
+          <a:solidFill>
+            <a:srgbClr val="FFFFFF"/>
+          </a:solidFill>
+          <a:ln w="12192">
+            <a:solidFill>
+              <a:srgbClr val="D8E0EB"/>
+            </a:solidFill>
+            <a:prstDash val="solid"/>
+          </a:ln>
+        </p:spPr>
+      </p:sp>
+      <p:sp>
+        <p:nvSpPr>
+          <p:cNvPr id="33" name="i"/>
+          <p:cNvSpPr/>
+          <p:nvPr/>
+        </p:nvSpPr>
+        <p:spPr>
+          <a:xfrm>
+            <a:off x="5815298" y="6364034"/>
+            <a:ext cx="73152" cy="73152"/>
+          </a:xfrm>
+          <a:prstGeom prst="ellipse">
+            <a:avLst/>
+          </a:prstGeom>
+          <a:solidFill>
+            <a:srgbClr val="00A94F"/>
+          </a:solidFill>
+          <a:ln/>
+        </p:spPr>
+      </p:sp>
+      <p:sp>
+        <p:nvSpPr>
+          <p:cNvPr id="34" name="span"/>
+          <p:cNvSpPr/>
+          <p:nvPr/>
+        </p:nvSpPr>
+        <p:spPr>
+          <a:xfrm>
+            <a:off x="2913221" y="7079837"/>
+            <a:ext cx="2122742" cy="256032"/>
+          </a:xfrm>
+          <a:prstGeom prst="roundRect">
+            <a:avLst>
+              <a:gd name="adj" fmla="val 50000"/>
+            </a:avLst>
+          </a:prstGeom>
+          <a:solidFill>
+            <a:srgbClr val="E5F6EC"/>
           </a:solidFill>
           <a:ln/>
         </p:spPr>
       </p:sp>
       <p:pic>
         <p:nvPicPr>
-          <p:cNvPr id="33" name="svg" descr="svg">    </p:cNvPr>
+          <p:cNvPr id="35" name="svg" descr="svg">    </p:cNvPr>
           <p:cNvPicPr>
             <a:picLocks noChangeAspect="1"/>
           </p:cNvPicPr>
@@ -1773,8 +1832,8 @@
         </p:blipFill>
         <p:spPr>
           <a:xfrm>
-            <a:off x="1900936" y="8476361"/>
-            <a:ext cx="121920" cy="142240"/>
+            <a:off x="3039205" y="7146893"/>
+            <a:ext cx="113792" cy="117856"/>
           </a:xfrm>
           <a:prstGeom prst="rect">
             <a:avLst/>
@@ -1783,7 +1842,7 @@
       </p:pic>
       <p:pic>
         <p:nvPicPr>
-          <p:cNvPr id="34" name="i" descr="i">    </p:cNvPr>
+          <p:cNvPr id="36" name="ring solid p1p-no" descr="ring solid p1p-no">    </p:cNvPr>
           <p:cNvPicPr>
             <a:picLocks noChangeAspect="1"/>
           </p:cNvPicPr>
@@ -1797,17 +1856,59 @@
         </p:blipFill>
         <p:spPr>
           <a:xfrm>
-            <a:off x="3084576" y="8523097"/>
-            <a:ext cx="932688" cy="48768"/>
+            <a:off x="481584" y="7565009"/>
+            <a:ext cx="329184" cy="329184"/>
           </a:xfrm>
           <a:prstGeom prst="rect">
             <a:avLst/>
           </a:prstGeom>
         </p:spPr>
       </p:pic>
+      <p:sp>
+        <p:nvSpPr>
+          <p:cNvPr id="37" name="p1p-vid"/>
+          <p:cNvSpPr/>
+          <p:nvPr/>
+        </p:nvSpPr>
+        <p:spPr>
+          <a:xfrm>
+            <a:off x="902208" y="7963281"/>
+            <a:ext cx="2072640" cy="1164336"/>
+          </a:xfrm>
+          <a:prstGeom prst="roundRect">
+            <a:avLst>
+              <a:gd name="adj" fmla="val 9424"/>
+            </a:avLst>
+          </a:prstGeom>
+          <a:solidFill>
+            <a:srgbClr val="0B2147"/>
+          </a:solidFill>
+          <a:ln/>
+        </p:spPr>
+      </p:sp>
+      <p:sp>
+        <p:nvSpPr>
+          <p:cNvPr id="38" name="span"/>
+          <p:cNvSpPr/>
+          <p:nvPr/>
+        </p:nvSpPr>
+        <p:spPr>
+          <a:xfrm>
+            <a:off x="1712976" y="8319897"/>
+            <a:ext cx="451104" cy="451104"/>
+          </a:xfrm>
+          <a:prstGeom prst="ellipse">
+            <a:avLst/>
+          </a:prstGeom>
+          <a:solidFill>
+            <a:srgbClr val="FFFFFF"/>
+          </a:solidFill>
+          <a:ln/>
+        </p:spPr>
+      </p:sp>
       <p:pic>
         <p:nvPicPr>
-          <p:cNvPr id="35" name="svg" descr="svg">    </p:cNvPr>
+          <p:cNvPr id="39" name="svg" descr="svg">    </p:cNvPr>
           <p:cNvPicPr>
             <a:picLocks noChangeAspect="1"/>
           </p:cNvPicPr>
@@ -1821,8 +1922,8 @@
         </p:blipFill>
         <p:spPr>
           <a:xfrm>
-            <a:off x="4011771" y="8456041"/>
-            <a:ext cx="146304" cy="182880"/>
+            <a:off x="1900936" y="8476361"/>
+            <a:ext cx="121920" cy="142240"/>
           </a:xfrm>
           <a:prstGeom prst="rect">
             <a:avLst/>
@@ -1831,7 +1932,7 @@
       </p:pic>
       <p:pic>
         <p:nvPicPr>
-          <p:cNvPr id="36" name="svg" descr="svg">    </p:cNvPr>
+          <p:cNvPr id="40" name="i" descr="i">    </p:cNvPr>
           <p:cNvPicPr>
             <a:picLocks noChangeAspect="1"/>
           </p:cNvPicPr>
@@ -1845,6 +1946,54 @@
         </p:blipFill>
         <p:spPr>
           <a:xfrm>
+            <a:off x="3084576" y="8523097"/>
+            <a:ext cx="932688" cy="48768"/>
+          </a:xfrm>
+          <a:prstGeom prst="rect">
+            <a:avLst/>
+          </a:prstGeom>
+        </p:spPr>
+      </p:pic>
+      <p:pic>
+        <p:nvPicPr>
+          <p:cNvPr id="41" name="svg" descr="svg">    </p:cNvPr>
+          <p:cNvPicPr>
+            <a:picLocks noChangeAspect="1"/>
+          </p:cNvPicPr>
+          <p:nvPr/>
+        </p:nvPicPr>
+        <p:blipFill>
+          <a:blip r:embed="rId17"/>
+          <a:stretch>
+            <a:fillRect/>
+          </a:stretch>
+        </p:blipFill>
+        <p:spPr>
+          <a:xfrm>
+            <a:off x="4011771" y="8456041"/>
+            <a:ext cx="146304" cy="182880"/>
+          </a:xfrm>
+          <a:prstGeom prst="rect">
+            <a:avLst/>
+          </a:prstGeom>
+        </p:spPr>
+      </p:pic>
+      <p:pic>
+        <p:nvPicPr>
+          <p:cNvPr id="42" name="svg" descr="svg">    </p:cNvPr>
+          <p:cNvPicPr>
+            <a:picLocks noChangeAspect="1"/>
+          </p:cNvPicPr>
+          <p:nvPr/>
+        </p:nvPicPr>
+        <p:blipFill>
+          <a:blip r:embed="rId18"/>
+          <a:stretch>
+            <a:fillRect/>
+          </a:stretch>
+        </p:blipFill>
+        <p:spPr>
+          <a:xfrm>
             <a:off x="4310475" y="7942961"/>
             <a:ext cx="1194816" cy="1475232"/>
           </a:xfrm>
@@ -1855,7 +2004,7 @@
       </p:pic>
       <p:sp>
         <p:nvSpPr>
-          <p:cNvPr id="37" name="key"/>
+          <p:cNvPr id="43" name="key"/>
           <p:cNvSpPr/>
           <p:nvPr/>
         </p:nvSpPr>
@@ -1877,7 +2026,7 @@
       </p:sp>
       <p:sp>
         <p:nvSpPr>
-          <p:cNvPr id="38" name="i"/>
+          <p:cNvPr id="44" name="i"/>
           <p:cNvSpPr/>
           <p:nvPr/>
         </p:nvSpPr>
@@ -1897,7 +2046,7 @@
       </p:sp>
       <p:sp>
         <p:nvSpPr>
-          <p:cNvPr id="39" name="b"/>
+          <p:cNvPr id="45" name="b"/>
           <p:cNvSpPr/>
           <p:nvPr/>
         </p:nvSpPr>
@@ -1917,7 +2066,7 @@
       </p:sp>
       <p:sp>
         <p:nvSpPr>
-          <p:cNvPr id="40" name="i"/>
+          <p:cNvPr id="46" name="i"/>
           <p:cNvSpPr/>
           <p:nvPr/>
         </p:nvSpPr>
@@ -1937,7 +2086,7 @@
       </p:sp>
       <p:sp>
         <p:nvSpPr>
-          <p:cNvPr id="41" name="b"/>
+          <p:cNvPr id="47" name="b"/>
           <p:cNvSpPr/>
           <p:nvPr/>
         </p:nvSpPr>
@@ -1957,7 +2106,7 @@
       </p:sp>
       <p:sp>
         <p:nvSpPr>
-          <p:cNvPr id="42" name="i"/>
+          <p:cNvPr id="48" name="i"/>
           <p:cNvSpPr/>
           <p:nvPr/>
         </p:nvSpPr>
@@ -1977,7 +2126,7 @@
       </p:sp>
       <p:sp>
         <p:nvSpPr>
-          <p:cNvPr id="43" name="01"/>
+          <p:cNvPr id="49" name="01"/>
           <p:cNvSpPr txBox="1"/>
           <p:nvPr/>
         </p:nvSpPr>
@@ -2016,7 +2165,7 @@
       </p:sp>
       <p:sp>
         <p:nvSpPr>
-          <p:cNvPr id="44" name="PT 주제 1 · 가장 중요하게 생각하는 가치와 실천 경험"/>
+          <p:cNvPr id="50" name="PT 주제 1 · 가장 중요하게 생각하는 가치와 실천 경험"/>
           <p:cNvSpPr txBox="1"/>
           <p:nvPr/>
         </p:nvSpPr>
@@ -2055,7 +2204,7 @@
       </p:sp>
       <p:sp>
         <p:nvSpPr>
-          <p:cNvPr id="45" name="제가 가장 중요하게 생각하는 가치는"/>
+          <p:cNvPr id="51" name="제가 가장 중요하게 생각하는 가치는"/>
           <p:cNvSpPr txBox="1"/>
           <p:nvPr/>
         </p:nvSpPr>
@@ -2094,7 +2243,7 @@
       </p:sp>
       <p:sp>
         <p:nvSpPr>
-          <p:cNvPr id="46" name="공동의 목표를 공유하며"/>
+          <p:cNvPr id="52" name="공동의 목표를 공유하며"/>
           <p:cNvSpPr txBox="1"/>
           <p:nvPr/>
         </p:nvSpPr>
@@ -2147,7 +2296,7 @@
       </p:sp>
       <p:sp>
         <p:nvSpPr>
-          <p:cNvPr id="47" name="함께 성과를 만드는 협업입니다"/>
+          <p:cNvPr id="53" name="함께 성과를 만드는 협업입니다"/>
           <p:cNvSpPr txBox="1"/>
           <p:nvPr/>
         </p:nvSpPr>
@@ -2214,7 +2363,7 @@
       </p:sp>
       <p:sp>
         <p:nvSpPr>
-          <p:cNvPr id="48" name="01"/>
+          <p:cNvPr id="54" name="01"/>
           <p:cNvSpPr txBox="1"/>
           <p:nvPr/>
         </p:nvSpPr>
@@ -2253,14 +2402,14 @@
       </p:sp>
       <p:sp>
         <p:nvSpPr>
-          <p:cNvPr id="49" name="의견을 모아 주제를 정하다"/>
+          <p:cNvPr id="55" name="충돌을 조율해 주제를 정하다"/>
           <p:cNvSpPr txBox="1"/>
           <p:nvPr/>
         </p:nvSpPr>
         <p:spPr>
           <a:xfrm>
             <a:off x="902208" y="2121027"/>
-            <a:ext cx="1909450" cy="213360"/>
+            <a:ext cx="2073316" cy="213360"/>
           </a:xfrm>
           <a:prstGeom prst="rect">
             <a:avLst/>
@@ -2284,7 +2433,7 @@
                 <a:ea typeface="Paperlogy 8 ExtraBold" pitchFamily="34" charset="-127"/>
                 <a:cs typeface="Paperlogy 8 ExtraBold" pitchFamily="34" charset="-120"/>
               </a:rPr>
-              <a:t>의견을 모아 주제를 정하다</a:t>
+              <a:t>충돌을 조율해 주제를 정하다</a:t>
             </a:r>
             <a:endParaRPr lang="en-US" sz="1440" dirty="0"/>
           </a:p>
@@ -2292,7 +2441,7 @@
       </p:sp>
       <p:sp>
         <p:nvSpPr>
-          <p:cNvPr id="50" name="학생 BIM 경진대회 · 4인 팀 팀장"/>
+          <p:cNvPr id="56" name="학생 BIM 경진대회 · 4인 팀 팀장"/>
           <p:cNvSpPr txBox="1"/>
           <p:nvPr/>
         </p:nvSpPr>
@@ -2331,77 +2480,364 @@
       </p:sp>
       <p:sp>
         <p:nvSpPr>
-          <p:cNvPr id="51" name="참신성"/>
-          <p:cNvSpPr txBox="1"/>
-          <p:nvPr/>
-        </p:nvSpPr>
-        <p:spPr>
-          <a:xfrm>
-            <a:off x="1889379" y="2535841"/>
-            <a:ext cx="390811" cy="158496"/>
-          </a:xfrm>
-          <a:prstGeom prst="rect">
-            <a:avLst/>
-          </a:prstGeom>
-          <a:noFill/>
-          <a:ln/>
-        </p:spPr>
-        <p:txBody>
-          <a:bodyPr wrap="none" lIns="0" tIns="0" rIns="0" bIns="0" rtlCol="0" anchor="ctr"/>
-          <a:lstStyle/>
-          <a:p>
-            <a:pPr algn="l" indent="0" marL="0">
-              <a:buNone/>
-            </a:pPr>
-            <a:r>
-              <a:rPr lang="ko-KR" altLang="en-US" sz="1056" spc="-32" kern="0" dirty="0">
-                <a:solidFill>
-                  <a:srgbClr val="0B2147"/>
+          <p:cNvPr id="57" name="마감 3주 전까지 주제 미확정"/>
+          <p:cNvSpPr txBox="1"/>
+          <p:nvPr/>
+        </p:nvSpPr>
+        <p:spPr>
+          <a:xfrm>
+            <a:off x="3388900" y="2502027"/>
+            <a:ext cx="1409572" cy="146304"/>
+          </a:xfrm>
+          <a:prstGeom prst="rect">
+            <a:avLst/>
+          </a:prstGeom>
+          <a:noFill/>
+          <a:ln/>
+        </p:spPr>
+        <p:txBody>
+          <a:bodyPr wrap="none" lIns="0" tIns="0" rIns="0" bIns="0" rtlCol="0" anchor="ctr"/>
+          <a:lstStyle/>
+          <a:p>
+            <a:pPr algn="l" indent="0" marL="0">
+              <a:buNone/>
+            </a:pPr>
+            <a:r>
+              <a:rPr lang="ko-KR" altLang="en-US" sz="960" spc="-19" kern="0" dirty="0">
+                <a:solidFill>
+                  <a:srgbClr val="1C2536"/>
                 </a:solidFill>
                 <a:latin typeface="Paperlogy 7 Bold" pitchFamily="34" charset="0"/>
                 <a:ea typeface="Paperlogy 7 Bold" pitchFamily="34" charset="-127"/>
                 <a:cs typeface="Paperlogy 7 Bold" pitchFamily="34" charset="-120"/>
               </a:rPr>
+              <a:t>마감 3주 전까지 주제 미확정</a:t>
+            </a:r>
+            <a:endParaRPr lang="en-US" sz="960" dirty="0"/>
+          </a:p>
+        </p:txBody>
+      </p:sp>
+      <p:sp>
+        <p:nvSpPr>
+          <p:cNvPr id="58" name="참신성"/>
+          <p:cNvSpPr txBox="1"/>
+          <p:nvPr/>
+        </p:nvSpPr>
+        <p:spPr>
+          <a:xfrm>
+            <a:off x="2621471" y="2853500"/>
+            <a:ext cx="450628" cy="182880"/>
+          </a:xfrm>
+          <a:prstGeom prst="rect">
+            <a:avLst/>
+          </a:prstGeom>
+          <a:noFill/>
+          <a:ln/>
+        </p:spPr>
+        <p:txBody>
+          <a:bodyPr wrap="none" lIns="0" tIns="0" rIns="0" bIns="0" rtlCol="0" anchor="ctr"/>
+          <a:lstStyle/>
+          <a:p>
+            <a:pPr algn="l" indent="0" marL="0">
+              <a:buNone/>
+            </a:pPr>
+            <a:r>
+              <a:rPr lang="ko-KR" altLang="en-US" sz="1248" spc="-44" kern="0" dirty="0">
+                <a:solidFill>
+                  <a:srgbClr val="0B2147"/>
+                </a:solidFill>
+                <a:latin typeface="Paperlogy 7 Bold" pitchFamily="34" charset="0"/>
+                <a:ea typeface="Paperlogy 7 Bold" pitchFamily="34" charset="-127"/>
+                <a:cs typeface="Paperlogy 7 Bold" pitchFamily="34" charset="-120"/>
+              </a:rPr>
               <a:t>참신성</a:t>
             </a:r>
+            <a:endParaRPr lang="en-US" sz="1248" dirty="0"/>
+          </a:p>
+        </p:txBody>
+      </p:sp>
+      <p:sp>
+        <p:nvSpPr>
+          <p:cNvPr id="59" name="VS"/>
+          <p:cNvSpPr txBox="1"/>
+          <p:nvPr/>
+        </p:nvSpPr>
+        <p:spPr>
+          <a:xfrm>
+            <a:off x="3879818" y="2865025"/>
+            <a:ext cx="238220" cy="158496"/>
+          </a:xfrm>
+          <a:prstGeom prst="rect">
+            <a:avLst/>
+          </a:prstGeom>
+          <a:noFill/>
+          <a:ln/>
+        </p:spPr>
+        <p:txBody>
+          <a:bodyPr wrap="none" lIns="0" tIns="0" rIns="0" bIns="0" rtlCol="0" anchor="ctr"/>
+          <a:lstStyle/>
+          <a:p>
+            <a:pPr algn="l" indent="0" marL="0">
+              <a:buNone/>
+            </a:pPr>
+            <a:r>
+              <a:rPr lang="ko-KR" altLang="en-US" sz="1056" spc="21" kern="0" dirty="0">
+                <a:solidFill>
+                  <a:srgbClr val="FFFFFF"/>
+                </a:solidFill>
+                <a:latin typeface="Paperlogy 8 ExtraBold" pitchFamily="34" charset="0"/>
+                <a:ea typeface="Paperlogy 8 ExtraBold" pitchFamily="34" charset="-127"/>
+                <a:cs typeface="Paperlogy 8 ExtraBold" pitchFamily="34" charset="-120"/>
+              </a:rPr>
+              <a:t>VS</a:t>
+            </a:r>
             <a:endParaRPr lang="en-US" sz="1056" dirty="0"/>
           </a:p>
         </p:txBody>
       </p:sp>
       <p:sp>
         <p:nvSpPr>
-          <p:cNvPr id="52" name="마감 3주 전까지 주제 미확정"/>
-          <p:cNvSpPr txBox="1"/>
-          <p:nvPr/>
-        </p:nvSpPr>
-        <p:spPr>
-          <a:xfrm>
-            <a:off x="3342894" y="2494217"/>
-            <a:ext cx="1339099" cy="140208"/>
-          </a:xfrm>
-          <a:prstGeom prst="rect">
-            <a:avLst/>
-          </a:prstGeom>
-          <a:noFill/>
-          <a:ln/>
-        </p:spPr>
-        <p:txBody>
-          <a:bodyPr wrap="none" lIns="0" tIns="0" rIns="0" bIns="0" rtlCol="0" anchor="ctr"/>
-          <a:lstStyle/>
-          <a:p>
-            <a:pPr algn="l" indent="0" marL="0">
-              <a:buNone/>
-            </a:pPr>
-            <a:r>
-              <a:rPr lang="ko-KR" altLang="en-US" sz="912" spc="-18" kern="0" dirty="0">
-                <a:solidFill>
-                  <a:srgbClr val="8691A5"/>
+          <p:cNvPr id="60" name="구현 가능성"/>
+          <p:cNvSpPr txBox="1"/>
+          <p:nvPr/>
+        </p:nvSpPr>
+        <p:spPr>
+          <a:xfrm>
+            <a:off x="5033201" y="2853500"/>
+            <a:ext cx="747808" cy="182880"/>
+          </a:xfrm>
+          <a:prstGeom prst="rect">
+            <a:avLst/>
+          </a:prstGeom>
+          <a:noFill/>
+          <a:ln/>
+        </p:spPr>
+        <p:txBody>
+          <a:bodyPr wrap="none" lIns="0" tIns="0" rIns="0" bIns="0" rtlCol="0" anchor="ctr"/>
+          <a:lstStyle/>
+          <a:p>
+            <a:pPr algn="l" indent="0" marL="0">
+              <a:buNone/>
+            </a:pPr>
+            <a:r>
+              <a:rPr lang="ko-KR" altLang="en-US" sz="1248" spc="-44" kern="0" dirty="0">
+                <a:solidFill>
+                  <a:srgbClr val="0B2147"/>
+                </a:solidFill>
+                <a:latin typeface="Paperlogy 7 Bold" pitchFamily="34" charset="0"/>
+                <a:ea typeface="Paperlogy 7 Bold" pitchFamily="34" charset="-127"/>
+                <a:cs typeface="Paperlogy 7 Bold" pitchFamily="34" charset="-120"/>
+              </a:rPr>
+              <a:t>구현 가능성</a:t>
+            </a:r>
+            <a:endParaRPr lang="en-US" sz="1248" dirty="0"/>
+          </a:p>
+        </p:txBody>
+      </p:sp>
+      <p:sp>
+        <p:nvSpPr>
+          <p:cNvPr id="61" name="경청 · 수상작 분석 · 교수님 조언"/>
+          <p:cNvSpPr txBox="1"/>
+          <p:nvPr/>
+        </p:nvSpPr>
+        <p:spPr>
+          <a:xfrm>
+            <a:off x="3176730" y="3218640"/>
+            <a:ext cx="1691467" cy="158496"/>
+          </a:xfrm>
+          <a:prstGeom prst="rect">
+            <a:avLst/>
+          </a:prstGeom>
+          <a:noFill/>
+          <a:ln/>
+        </p:spPr>
+        <p:txBody>
+          <a:bodyPr wrap="none" lIns="0" tIns="0" rIns="0" bIns="0" rtlCol="0" anchor="ctr"/>
+          <a:lstStyle/>
+          <a:p>
+            <a:pPr algn="l" indent="0" marL="0">
+              <a:buNone/>
+            </a:pPr>
+            <a:r>
+              <a:rPr lang="ko-KR" altLang="en-US" sz="1056" spc="-32" kern="0" dirty="0">
+                <a:solidFill>
+                  <a:srgbClr val="1C2536"/>
                 </a:solidFill>
                 <a:latin typeface="Paperlogy 6 SemiBold" pitchFamily="34" charset="0"/>
                 <a:ea typeface="Paperlogy 6 SemiBold" pitchFamily="34" charset="-127"/>
                 <a:cs typeface="Paperlogy 6 SemiBold" pitchFamily="34" charset="-120"/>
               </a:rPr>
-              <a:t>마감 3주 전까지 주제 미확정</a:t>
+              <a:t>경청 · 수상작 분석 · 교수님 조언</a:t>
+            </a:r>
+            <a:endParaRPr lang="en-US" sz="1056" dirty="0"/>
+          </a:p>
+        </p:txBody>
+      </p:sp>
+      <p:sp>
+        <p:nvSpPr>
+          <p:cNvPr id="62" name="판단 기준 마련"/>
+          <p:cNvSpPr txBox="1"/>
+          <p:nvPr/>
+        </p:nvSpPr>
+        <p:spPr>
+          <a:xfrm>
+            <a:off x="3607118" y="3675793"/>
+            <a:ext cx="783717" cy="158496"/>
+          </a:xfrm>
+          <a:prstGeom prst="rect">
+            <a:avLst/>
+          </a:prstGeom>
+          <a:noFill/>
+          <a:ln/>
+        </p:spPr>
+        <p:txBody>
+          <a:bodyPr wrap="none" lIns="0" tIns="0" rIns="0" bIns="0" rtlCol="0" anchor="ctr"/>
+          <a:lstStyle/>
+          <a:p>
+            <a:pPr algn="l" indent="0" marL="0">
+              <a:buNone/>
+            </a:pPr>
+            <a:r>
+              <a:rPr lang="ko-KR" altLang="en-US" sz="1056" spc="-32" kern="0" dirty="0">
+                <a:solidFill>
+                  <a:srgbClr val="004B8D"/>
+                </a:solidFill>
+                <a:latin typeface="Paperlogy 8 ExtraBold" pitchFamily="34" charset="0"/>
+                <a:ea typeface="Paperlogy 8 ExtraBold" pitchFamily="34" charset="-127"/>
+                <a:cs typeface="Paperlogy 8 ExtraBold" pitchFamily="34" charset="-120"/>
+              </a:rPr>
+              <a:t>판단 기준 마련</a:t>
+            </a:r>
+            <a:endParaRPr lang="en-US" sz="1056" dirty="0"/>
+          </a:p>
+        </p:txBody>
+      </p:sp>
+      <p:sp>
+        <p:nvSpPr>
+          <p:cNvPr id="63" name="‘유닛 모듈러 기반 사용자 맞춤형 리모델링 방법’선정"/>
+          <p:cNvSpPr txBox="1"/>
+          <p:nvPr/>
+        </p:nvSpPr>
+        <p:spPr>
+          <a:xfrm>
+            <a:off x="1843625" y="4175379"/>
+            <a:ext cx="4261935" cy="243840"/>
+          </a:xfrm>
+          <a:prstGeom prst="rect">
+            <a:avLst/>
+          </a:prstGeom>
+          <a:noFill/>
+          <a:ln/>
+        </p:spPr>
+        <p:txBody>
+          <a:bodyPr wrap="none" lIns="0" tIns="0" rIns="0" bIns="0" rtlCol="0" anchor="ctr"/>
+          <a:lstStyle/>
+          <a:p>
+            <a:pPr algn="ctr" indent="0" marL="0">
+              <a:buNone/>
+            </a:pPr>
+            <a:r>
+              <a:rPr lang="ko-KR" altLang="en-US" sz="1632" spc="-65" kern="0" dirty="0">
+                <a:solidFill>
+                  <a:srgbClr val="FFFFFF"/>
+                </a:solidFill>
+                <a:latin typeface="Paperlogy 8 ExtraBold" pitchFamily="34" charset="0"/>
+                <a:ea typeface="Paperlogy 8 ExtraBold" pitchFamily="34" charset="-127"/>
+                <a:cs typeface="Paperlogy 8 ExtraBold" pitchFamily="34" charset="-120"/>
+              </a:rPr>
+              <a:t>‘유닛 모듈러 기반 사용자 맞춤형 리모델링 방법’</a:t>
+            </a:r>
+            <a:pPr algn="ctr" indent="0" marL="0">
+              <a:buNone/>
+            </a:pPr>
+            <a:r>
+              <a:rPr lang="ko-KR" altLang="en-US" sz="1632" spc="-65" kern="0" dirty="0">
+                <a:solidFill>
+                  <a:srgbClr val="45B9EC"/>
+                </a:solidFill>
+                <a:latin typeface="Paperlogy 8 ExtraBold" pitchFamily="34" charset="0"/>
+                <a:ea typeface="Paperlogy 8 ExtraBold" pitchFamily="34" charset="-127"/>
+                <a:cs typeface="Paperlogy 8 ExtraBold" pitchFamily="34" charset="-120"/>
+              </a:rPr>
+              <a:t>선정</a:t>
+            </a:r>
+            <a:endParaRPr lang="en-US" sz="1632" dirty="0"/>
+          </a:p>
+        </p:txBody>
+      </p:sp>
+      <p:sp>
+        <p:nvSpPr>
+          <p:cNvPr id="64" name="리모델링 규모에 따라 유닛 모듈러를 배치하고, 모듈 수 · 자재 물량을 "/>
+          <p:cNvSpPr txBox="1"/>
+          <p:nvPr/>
+        </p:nvSpPr>
+        <p:spPr>
+          <a:xfrm>
+            <a:off x="1888961" y="4477131"/>
+            <a:ext cx="4171167" cy="158496"/>
+          </a:xfrm>
+          <a:prstGeom prst="rect">
+            <a:avLst/>
+          </a:prstGeom>
+          <a:noFill/>
+          <a:ln/>
+        </p:spPr>
+        <p:txBody>
+          <a:bodyPr wrap="none" lIns="0" tIns="0" rIns="0" bIns="0" rtlCol="0" anchor="ctr"/>
+          <a:lstStyle/>
+          <a:p>
+            <a:pPr algn="ctr" indent="0" marL="0">
+              <a:buNone/>
+            </a:pPr>
+            <a:r>
+              <a:rPr lang="ko-KR" altLang="en-US" sz="1056" spc="-26" kern="0" dirty="0">
+                <a:solidFill>
+                  <a:srgbClr val="CED3DA"/>
+                </a:solidFill>
+                <a:latin typeface="Paperlogy 5 Medium" pitchFamily="34" charset="0"/>
+                <a:ea typeface="Paperlogy 5 Medium" pitchFamily="34" charset="-127"/>
+                <a:cs typeface="Paperlogy 5 Medium" pitchFamily="34" charset="-120"/>
+              </a:rPr>
+              <a:t>리모델링 규모에 따라 유닛 모듈러를 배치하고, 모듈 수 · 자재 물량을 자동 산출</a:t>
+            </a:r>
+            <a:endParaRPr lang="en-US" sz="1056" dirty="0"/>
+          </a:p>
+        </p:txBody>
+      </p:sp>
+      <p:sp>
+        <p:nvSpPr>
+          <p:cNvPr id="65" name="02"/>
+          <p:cNvSpPr txBox="1"/>
+          <p:nvPr/>
+        </p:nvSpPr>
+        <p:spPr>
+          <a:xfrm>
+            <a:off x="566642" y="5105210"/>
+            <a:ext cx="207836" cy="140208"/>
+          </a:xfrm>
+          <a:prstGeom prst="rect">
+            <a:avLst/>
+          </a:prstGeom>
+          <a:noFill/>
+          <a:ln/>
+        </p:spPr>
+        <p:txBody>
+          <a:bodyPr wrap="none" lIns="0" tIns="0" rIns="0" bIns="0" rtlCol="0" anchor="ctr"/>
+          <a:lstStyle/>
+          <a:p>
+            <a:pPr algn="l" indent="0" marL="0">
+              <a:buNone/>
+            </a:pPr>
+            <a:r>
+              <a:rPr lang="ko-KR" altLang="en-US" sz="912" spc="18" kern="0" dirty="0">
+                <a:solidFill>
+                  <a:srgbClr val="FFFFFF"/>
+                </a:solidFill>
+                <a:latin typeface="Paperlogy 8 ExtraBold" pitchFamily="34" charset="0"/>
+                <a:ea typeface="Paperlogy 8 ExtraBold" pitchFamily="34" charset="-127"/>
+                <a:cs typeface="Paperlogy 8 ExtraBold" pitchFamily="34" charset="-120"/>
+              </a:rPr>
+              <a:t>02</a:t>
             </a:r>
             <a:endParaRPr lang="en-US" sz="912" dirty="0"/>
           </a:p>
@@ -2409,13 +2845,325 @@
       </p:sp>
       <p:sp>
         <p:nvSpPr>
-          <p:cNvPr id="53" name="구현 가능성"/>
-          <p:cNvSpPr txBox="1"/>
-          <p:nvPr/>
-        </p:nvSpPr>
-        <p:spPr>
-          <a:xfrm>
-            <a:off x="5712905" y="2535841"/>
+          <p:cNvPr id="66" name="강점에 맞게 역할을 나누다"/>
+          <p:cNvSpPr txBox="1"/>
+          <p:nvPr/>
+        </p:nvSpPr>
+        <p:spPr>
+          <a:xfrm>
+            <a:off x="902208" y="5067300"/>
+            <a:ext cx="1909450" cy="213360"/>
+          </a:xfrm>
+          <a:prstGeom prst="rect">
+            <a:avLst/>
+          </a:prstGeom>
+          <a:noFill/>
+          <a:ln/>
+        </p:spPr>
+        <p:txBody>
+          <a:bodyPr wrap="none" lIns="0" tIns="0" rIns="0" bIns="0" rtlCol="0" anchor="ctr"/>
+          <a:lstStyle/>
+          <a:p>
+            <a:pPr algn="l" indent="0" marL="0">
+              <a:buNone/>
+            </a:pPr>
+            <a:r>
+              <a:rPr lang="ko-KR" altLang="en-US" sz="1440" spc="-50" kern="0" dirty="0">
+                <a:solidFill>
+                  <a:srgbClr val="0B2147"/>
+                </a:solidFill>
+                <a:latin typeface="Paperlogy 8 ExtraBold" pitchFamily="34" charset="0"/>
+                <a:ea typeface="Paperlogy 8 ExtraBold" pitchFamily="34" charset="-127"/>
+                <a:cs typeface="Paperlogy 8 ExtraBold" pitchFamily="34" charset="-120"/>
+              </a:rPr>
+              <a:t>강점에 맞게 역할을 나누다</a:t>
+            </a:r>
+            <a:endParaRPr lang="en-US" sz="1440" dirty="0"/>
+          </a:p>
+        </p:txBody>
+      </p:sp>
+      <p:sp>
+        <p:nvSpPr>
+          <p:cNvPr id="67" name="팀장 · 나"/>
+          <p:cNvSpPr txBox="1"/>
+          <p:nvPr/>
+        </p:nvSpPr>
+        <p:spPr>
+          <a:xfrm>
+            <a:off x="3796189" y="5500116"/>
+            <a:ext cx="490823" cy="158496"/>
+          </a:xfrm>
+          <a:prstGeom prst="rect">
+            <a:avLst/>
+          </a:prstGeom>
+          <a:noFill/>
+          <a:ln/>
+        </p:spPr>
+        <p:txBody>
+          <a:bodyPr wrap="none" lIns="0" tIns="0" rIns="0" bIns="0" rtlCol="0" anchor="ctr"/>
+          <a:lstStyle/>
+          <a:p>
+            <a:pPr algn="ctr" indent="0" marL="0">
+              <a:buNone/>
+            </a:pPr>
+            <a:r>
+              <a:rPr lang="ko-KR" altLang="en-US" sz="1056" spc="-21" kern="0" dirty="0">
+                <a:solidFill>
+                  <a:srgbClr val="FFFFFF"/>
+                </a:solidFill>
+                <a:latin typeface="Paperlogy 8 ExtraBold" pitchFamily="34" charset="0"/>
+                <a:ea typeface="Paperlogy 8 ExtraBold" pitchFamily="34" charset="-127"/>
+                <a:cs typeface="Paperlogy 8 ExtraBold" pitchFamily="34" charset="-120"/>
+              </a:rPr>
+              <a:t>팀장 · 나</a:t>
+            </a:r>
+            <a:endParaRPr lang="en-US" sz="1056" dirty="0"/>
+          </a:p>
+        </p:txBody>
+      </p:sp>
+      <p:sp>
+        <p:nvSpPr>
+          <p:cNvPr id="68" name="프로젝트 총괄 · Dynamo 기반 자동화 알고리즘 개발"/>
+          <p:cNvSpPr txBox="1"/>
+          <p:nvPr/>
+        </p:nvSpPr>
+        <p:spPr>
+          <a:xfrm>
+            <a:off x="2524636" y="5718905"/>
+            <a:ext cx="2899816" cy="158496"/>
+          </a:xfrm>
+          <a:prstGeom prst="rect">
+            <a:avLst/>
+          </a:prstGeom>
+          <a:noFill/>
+          <a:ln/>
+        </p:spPr>
+        <p:txBody>
+          <a:bodyPr wrap="none" lIns="0" tIns="0" rIns="0" bIns="0" rtlCol="0" anchor="ctr"/>
+          <a:lstStyle/>
+          <a:p>
+            <a:pPr algn="ctr" indent="0" marL="0">
+              <a:buNone/>
+            </a:pPr>
+            <a:r>
+              <a:rPr lang="ko-KR" altLang="en-US" sz="1056" spc="-26" kern="0" dirty="0">
+                <a:solidFill>
+                  <a:srgbClr val="DADEE3"/>
+                </a:solidFill>
+                <a:latin typeface="Paperlogy 5 Medium" pitchFamily="34" charset="0"/>
+                <a:ea typeface="Paperlogy 5 Medium" pitchFamily="34" charset="-127"/>
+                <a:cs typeface="Paperlogy 5 Medium" pitchFamily="34" charset="-120"/>
+              </a:rPr>
+              <a:t>프로젝트 총괄 · Dynamo 기반 자동화 알고리즘 개발</a:t>
+            </a:r>
+            <a:endParaRPr lang="en-US" sz="1056" dirty="0"/>
+          </a:p>
+        </p:txBody>
+      </p:sp>
+      <p:sp>
+        <p:nvSpPr>
+          <p:cNvPr id="69" name="팀원 A"/>
+          <p:cNvSpPr txBox="1"/>
+          <p:nvPr/>
+        </p:nvSpPr>
+        <p:spPr>
+          <a:xfrm>
+            <a:off x="1752981" y="6315647"/>
+            <a:ext cx="407670" cy="158496"/>
+          </a:xfrm>
+          <a:prstGeom prst="rect">
+            <a:avLst/>
+          </a:prstGeom>
+          <a:noFill/>
+          <a:ln/>
+        </p:spPr>
+        <p:txBody>
+          <a:bodyPr wrap="none" lIns="0" tIns="0" rIns="0" bIns="0" rtlCol="0" anchor="ctr"/>
+          <a:lstStyle/>
+          <a:p>
+            <a:pPr algn="ctr" indent="0" marL="0">
+              <a:buNone/>
+            </a:pPr>
+            <a:r>
+              <a:rPr lang="ko-KR" altLang="en-US" sz="1056" spc="-21" kern="0" dirty="0">
+                <a:solidFill>
+                  <a:srgbClr val="0B2147"/>
+                </a:solidFill>
+                <a:latin typeface="Paperlogy 8 ExtraBold" pitchFamily="34" charset="0"/>
+                <a:ea typeface="Paperlogy 8 ExtraBold" pitchFamily="34" charset="-127"/>
+                <a:cs typeface="Paperlogy 8 ExtraBold" pitchFamily="34" charset="-120"/>
+              </a:rPr>
+              <a:t>팀원 A</a:t>
+            </a:r>
+            <a:endParaRPr lang="en-US" sz="1056" dirty="0"/>
+          </a:p>
+        </p:txBody>
+      </p:sp>
+      <p:sp>
+        <p:nvSpPr>
+          <p:cNvPr id="70" name="유닛 모듈러 설계"/>
+          <p:cNvSpPr txBox="1"/>
+          <p:nvPr/>
+        </p:nvSpPr>
+        <p:spPr>
+          <a:xfrm>
+            <a:off x="1439762" y="6534436"/>
+            <a:ext cx="899901" cy="158496"/>
+          </a:xfrm>
+          <a:prstGeom prst="rect">
+            <a:avLst/>
+          </a:prstGeom>
+          <a:noFill/>
+          <a:ln/>
+        </p:spPr>
+        <p:txBody>
+          <a:bodyPr wrap="none" lIns="0" tIns="0" rIns="0" bIns="0" rtlCol="0" anchor="ctr"/>
+          <a:lstStyle/>
+          <a:p>
+            <a:pPr algn="ctr" indent="0" marL="0">
+              <a:buNone/>
+            </a:pPr>
+            <a:r>
+              <a:rPr lang="ko-KR" altLang="en-US" sz="1056" spc="-32" kern="0" dirty="0">
+                <a:solidFill>
+                  <a:srgbClr val="4B5568"/>
+                </a:solidFill>
+                <a:latin typeface="Paperlogy 5 Medium" pitchFamily="34" charset="0"/>
+                <a:ea typeface="Paperlogy 5 Medium" pitchFamily="34" charset="-127"/>
+                <a:cs typeface="Paperlogy 5 Medium" pitchFamily="34" charset="-120"/>
+              </a:rPr>
+              <a:t>유닛 모듈러 설계</a:t>
+            </a:r>
+            <a:endParaRPr lang="en-US" sz="1056" dirty="0"/>
+          </a:p>
+        </p:txBody>
+      </p:sp>
+      <p:sp>
+        <p:nvSpPr>
+          <p:cNvPr id="71" name="배치계획"/>
+          <p:cNvSpPr txBox="1"/>
+          <p:nvPr/>
+        </p:nvSpPr>
+        <p:spPr>
+          <a:xfrm>
+            <a:off x="1637348" y="6724841"/>
+            <a:ext cx="504825" cy="158496"/>
+          </a:xfrm>
+          <a:prstGeom prst="rect">
+            <a:avLst/>
+          </a:prstGeom>
+          <a:noFill/>
+          <a:ln/>
+        </p:spPr>
+        <p:txBody>
+          <a:bodyPr wrap="none" lIns="0" tIns="0" rIns="0" bIns="0" rtlCol="0" anchor="ctr"/>
+          <a:lstStyle/>
+          <a:p>
+            <a:pPr algn="ctr" indent="0" marL="0">
+              <a:buNone/>
+            </a:pPr>
+            <a:r>
+              <a:rPr lang="ko-KR" altLang="en-US" sz="1056" spc="-32" kern="0" dirty="0">
+                <a:solidFill>
+                  <a:srgbClr val="4B5568"/>
+                </a:solidFill>
+                <a:latin typeface="Paperlogy 5 Medium" pitchFamily="34" charset="0"/>
+                <a:ea typeface="Paperlogy 5 Medium" pitchFamily="34" charset="-127"/>
+                <a:cs typeface="Paperlogy 5 Medium" pitchFamily="34" charset="-120"/>
+              </a:rPr>
+              <a:t>배치계획</a:t>
+            </a:r>
+            <a:endParaRPr lang="en-US" sz="1056" dirty="0"/>
+          </a:p>
+        </p:txBody>
+      </p:sp>
+      <p:sp>
+        <p:nvSpPr>
+          <p:cNvPr id="72" name="팀원 B"/>
+          <p:cNvSpPr txBox="1"/>
+          <p:nvPr/>
+        </p:nvSpPr>
+        <p:spPr>
+          <a:xfrm>
+            <a:off x="3837908" y="6315647"/>
+            <a:ext cx="407480" cy="158496"/>
+          </a:xfrm>
+          <a:prstGeom prst="rect">
+            <a:avLst/>
+          </a:prstGeom>
+          <a:noFill/>
+          <a:ln/>
+        </p:spPr>
+        <p:txBody>
+          <a:bodyPr wrap="none" lIns="0" tIns="0" rIns="0" bIns="0" rtlCol="0" anchor="ctr"/>
+          <a:lstStyle/>
+          <a:p>
+            <a:pPr algn="ctr" indent="0" marL="0">
+              <a:buNone/>
+            </a:pPr>
+            <a:r>
+              <a:rPr lang="ko-KR" altLang="en-US" sz="1056" spc="-21" kern="0" dirty="0">
+                <a:solidFill>
+                  <a:srgbClr val="0B2147"/>
+                </a:solidFill>
+                <a:latin typeface="Paperlogy 8 ExtraBold" pitchFamily="34" charset="0"/>
+                <a:ea typeface="Paperlogy 8 ExtraBold" pitchFamily="34" charset="-127"/>
+                <a:cs typeface="Paperlogy 8 ExtraBold" pitchFamily="34" charset="-120"/>
+              </a:rPr>
+              <a:t>팀원 B</a:t>
+            </a:r>
+            <a:endParaRPr lang="en-US" sz="1056" dirty="0"/>
+          </a:p>
+        </p:txBody>
+      </p:sp>
+      <p:sp>
+        <p:nvSpPr>
+          <p:cNvPr id="73" name="Revit 기반 BIM 모델링"/>
+          <p:cNvSpPr txBox="1"/>
+          <p:nvPr/>
+        </p:nvSpPr>
+        <p:spPr>
+          <a:xfrm>
+            <a:off x="3322563" y="6534436"/>
+            <a:ext cx="1303963" cy="158496"/>
+          </a:xfrm>
+          <a:prstGeom prst="rect">
+            <a:avLst/>
+          </a:prstGeom>
+          <a:noFill/>
+          <a:ln/>
+        </p:spPr>
+        <p:txBody>
+          <a:bodyPr wrap="none" lIns="0" tIns="0" rIns="0" bIns="0" rtlCol="0" anchor="ctr"/>
+          <a:lstStyle/>
+          <a:p>
+            <a:pPr algn="ctr" indent="0" marL="0">
+              <a:buNone/>
+            </a:pPr>
+            <a:r>
+              <a:rPr lang="ko-KR" altLang="en-US" sz="1056" spc="-32" kern="0" dirty="0">
+                <a:solidFill>
+                  <a:srgbClr val="4B5568"/>
+                </a:solidFill>
+                <a:latin typeface="Paperlogy 5 Medium" pitchFamily="34" charset="0"/>
+                <a:ea typeface="Paperlogy 5 Medium" pitchFamily="34" charset="-127"/>
+                <a:cs typeface="Paperlogy 5 Medium" pitchFamily="34" charset="-120"/>
+              </a:rPr>
+              <a:t>Revit 기반 BIM 모델링</a:t>
+            </a:r>
+            <a:endParaRPr lang="en-US" sz="1056" dirty="0"/>
+          </a:p>
+        </p:txBody>
+      </p:sp>
+      <p:sp>
+        <p:nvSpPr>
+          <p:cNvPr id="74" name="데이터 구축"/>
+          <p:cNvSpPr txBox="1"/>
+          <p:nvPr/>
+        </p:nvSpPr>
+        <p:spPr>
+          <a:xfrm>
+            <a:off x="3652457" y="6724841"/>
             <a:ext cx="644271" cy="158496"/>
           </a:xfrm>
           <a:prstGeom prst="rect">
@@ -2428,19 +3176,175 @@
           <a:bodyPr wrap="none" lIns="0" tIns="0" rIns="0" bIns="0" rtlCol="0" anchor="ctr"/>
           <a:lstStyle/>
           <a:p>
-            <a:pPr algn="l" indent="0" marL="0">
+            <a:pPr algn="ctr" indent="0" marL="0">
               <a:buNone/>
             </a:pPr>
             <a:r>
               <a:rPr lang="ko-KR" altLang="en-US" sz="1056" spc="-32" kern="0" dirty="0">
                 <a:solidFill>
+                  <a:srgbClr val="4B5568"/>
+                </a:solidFill>
+                <a:latin typeface="Paperlogy 5 Medium" pitchFamily="34" charset="0"/>
+                <a:ea typeface="Paperlogy 5 Medium" pitchFamily="34" charset="-127"/>
+                <a:cs typeface="Paperlogy 5 Medium" pitchFamily="34" charset="-120"/>
+              </a:rPr>
+              <a:t>데이터 구축</a:t>
+            </a:r>
+            <a:endParaRPr lang="en-US" sz="1056" dirty="0"/>
+          </a:p>
+        </p:txBody>
+      </p:sp>
+      <p:sp>
+        <p:nvSpPr>
+          <p:cNvPr id="75" name="팀원 C"/>
+          <p:cNvSpPr txBox="1"/>
+          <p:nvPr/>
+        </p:nvSpPr>
+        <p:spPr>
+          <a:xfrm>
+            <a:off x="5925026" y="6315647"/>
+            <a:ext cx="402908" cy="158496"/>
+          </a:xfrm>
+          <a:prstGeom prst="rect">
+            <a:avLst/>
+          </a:prstGeom>
+          <a:noFill/>
+          <a:ln/>
+        </p:spPr>
+        <p:txBody>
+          <a:bodyPr wrap="none" lIns="0" tIns="0" rIns="0" bIns="0" rtlCol="0" anchor="ctr"/>
+          <a:lstStyle/>
+          <a:p>
+            <a:pPr algn="ctr" indent="0" marL="0">
+              <a:buNone/>
+            </a:pPr>
+            <a:r>
+              <a:rPr lang="ko-KR" altLang="en-US" sz="1056" spc="-21" kern="0" dirty="0">
+                <a:solidFill>
                   <a:srgbClr val="0B2147"/>
+                </a:solidFill>
+                <a:latin typeface="Paperlogy 8 ExtraBold" pitchFamily="34" charset="0"/>
+                <a:ea typeface="Paperlogy 8 ExtraBold" pitchFamily="34" charset="-127"/>
+                <a:cs typeface="Paperlogy 8 ExtraBold" pitchFamily="34" charset="-120"/>
+              </a:rPr>
+              <a:t>팀원 C</a:t>
+            </a:r>
+            <a:endParaRPr lang="en-US" sz="1056" dirty="0"/>
+          </a:p>
+        </p:txBody>
+      </p:sp>
+      <p:sp>
+        <p:nvSpPr>
+          <p:cNvPr id="76" name="리모델링 적용 시나리오 구성"/>
+          <p:cNvSpPr txBox="1"/>
+          <p:nvPr/>
+        </p:nvSpPr>
+        <p:spPr>
+          <a:xfrm>
+            <a:off x="5293809" y="6534436"/>
+            <a:ext cx="1531134" cy="158496"/>
+          </a:xfrm>
+          <a:prstGeom prst="rect">
+            <a:avLst/>
+          </a:prstGeom>
+          <a:noFill/>
+          <a:ln/>
+        </p:spPr>
+        <p:txBody>
+          <a:bodyPr wrap="none" lIns="0" tIns="0" rIns="0" bIns="0" rtlCol="0" anchor="ctr"/>
+          <a:lstStyle/>
+          <a:p>
+            <a:pPr algn="ctr" indent="0" marL="0">
+              <a:buNone/>
+            </a:pPr>
+            <a:r>
+              <a:rPr lang="ko-KR" altLang="en-US" sz="1056" spc="-32" kern="0" dirty="0">
+                <a:solidFill>
+                  <a:srgbClr val="4B5568"/>
+                </a:solidFill>
+                <a:latin typeface="Paperlogy 5 Medium" pitchFamily="34" charset="0"/>
+                <a:ea typeface="Paperlogy 5 Medium" pitchFamily="34" charset="-127"/>
+                <a:cs typeface="Paperlogy 5 Medium" pitchFamily="34" charset="-120"/>
+              </a:rPr>
+              <a:t>리모델링 적용 시나리오 구성</a:t>
+            </a:r>
+            <a:endParaRPr lang="en-US" sz="1056" dirty="0"/>
+          </a:p>
+        </p:txBody>
+      </p:sp>
+      <p:sp>
+        <p:nvSpPr>
+          <p:cNvPr id="77" name="시연 영상 제작"/>
+          <p:cNvSpPr txBox="1"/>
+          <p:nvPr/>
+        </p:nvSpPr>
+        <p:spPr>
+          <a:xfrm>
+            <a:off x="5667566" y="6724841"/>
+            <a:ext cx="783717" cy="158496"/>
+          </a:xfrm>
+          <a:prstGeom prst="rect">
+            <a:avLst/>
+          </a:prstGeom>
+          <a:noFill/>
+          <a:ln/>
+        </p:spPr>
+        <p:txBody>
+          <a:bodyPr wrap="none" lIns="0" tIns="0" rIns="0" bIns="0" rtlCol="0" anchor="ctr"/>
+          <a:lstStyle/>
+          <a:p>
+            <a:pPr algn="ctr" indent="0" marL="0">
+              <a:buNone/>
+            </a:pPr>
+            <a:r>
+              <a:rPr lang="ko-KR" altLang="en-US" sz="1056" spc="-32" kern="0" dirty="0">
+                <a:solidFill>
+                  <a:srgbClr val="4B5568"/>
+                </a:solidFill>
+                <a:latin typeface="Paperlogy 5 Medium" pitchFamily="34" charset="0"/>
+                <a:ea typeface="Paperlogy 5 Medium" pitchFamily="34" charset="-127"/>
+                <a:cs typeface="Paperlogy 5 Medium" pitchFamily="34" charset="-120"/>
+              </a:rPr>
+              <a:t>시연 영상 제작</a:t>
+            </a:r>
+            <a:endParaRPr lang="en-US" sz="1056" dirty="0"/>
+          </a:p>
+        </p:txBody>
+      </p:sp>
+      <p:sp>
+        <p:nvSpPr>
+          <p:cNvPr id="78" name="이틀마다 진행상황 공유 · 피드백"/>
+          <p:cNvSpPr txBox="1"/>
+          <p:nvPr/>
+        </p:nvSpPr>
+        <p:spPr>
+          <a:xfrm>
+            <a:off x="3242405" y="7122795"/>
+            <a:ext cx="1746089" cy="158496"/>
+          </a:xfrm>
+          <a:prstGeom prst="rect">
+            <a:avLst/>
+          </a:prstGeom>
+          <a:noFill/>
+          <a:ln/>
+        </p:spPr>
+        <p:txBody>
+          <a:bodyPr wrap="none" lIns="0" tIns="0" rIns="0" bIns="0" rtlCol="0" anchor="ctr"/>
+          <a:lstStyle/>
+          <a:p>
+            <a:pPr algn="l" indent="0" marL="0">
+              <a:buNone/>
+            </a:pPr>
+            <a:r>
+              <a:rPr lang="ko-KR" altLang="en-US" sz="1056" spc="-21" kern="0" dirty="0">
+                <a:solidFill>
+                  <a:srgbClr val="0B6B33"/>
                 </a:solidFill>
                 <a:latin typeface="Paperlogy 7 Bold" pitchFamily="34" charset="0"/>
                 <a:ea typeface="Paperlogy 7 Bold" pitchFamily="34" charset="-127"/>
                 <a:cs typeface="Paperlogy 7 Bold" pitchFamily="34" charset="-120"/>
               </a:rPr>
-              <a:t>구현 가능성</a:t>
+              <a:t>이틀마다 진행상황 공유 · 피드백</a:t>
             </a:r>
             <a:endParaRPr lang="en-US" sz="1056" dirty="0"/>
           </a:p>
@@ -2448,988 +3352,378 @@
       </p:sp>
       <p:sp>
         <p:nvSpPr>
-          <p:cNvPr id="54" name="경청 · 수상작 분석 · 교수님 조언"/>
-          <p:cNvSpPr txBox="1"/>
-          <p:nvPr/>
-        </p:nvSpPr>
-        <p:spPr>
-          <a:xfrm>
-            <a:off x="3176730" y="2865072"/>
-            <a:ext cx="1691467" cy="158496"/>
-          </a:xfrm>
-          <a:prstGeom prst="rect">
-            <a:avLst/>
-          </a:prstGeom>
-          <a:noFill/>
-          <a:ln/>
-        </p:spPr>
-        <p:txBody>
-          <a:bodyPr wrap="none" lIns="0" tIns="0" rIns="0" bIns="0" rtlCol="0" anchor="ctr"/>
-          <a:lstStyle/>
-          <a:p>
-            <a:pPr algn="l" indent="0" marL="0">
-              <a:buNone/>
-            </a:pPr>
-            <a:r>
-              <a:rPr lang="ko-KR" altLang="en-US" sz="1056" spc="-32" kern="0" dirty="0">
-                <a:solidFill>
-                  <a:srgbClr val="1C2536"/>
+          <p:cNvPr id="79" name="03"/>
+          <p:cNvSpPr txBox="1"/>
+          <p:nvPr/>
+        </p:nvSpPr>
+        <p:spPr>
+          <a:xfrm>
+            <a:off x="566642" y="7659815"/>
+            <a:ext cx="207836" cy="140208"/>
+          </a:xfrm>
+          <a:prstGeom prst="rect">
+            <a:avLst/>
+          </a:prstGeom>
+          <a:noFill/>
+          <a:ln/>
+        </p:spPr>
+        <p:txBody>
+          <a:bodyPr wrap="none" lIns="0" tIns="0" rIns="0" bIns="0" rtlCol="0" anchor="ctr"/>
+          <a:lstStyle/>
+          <a:p>
+            <a:pPr algn="l" indent="0" marL="0">
+              <a:buNone/>
+            </a:pPr>
+            <a:r>
+              <a:rPr lang="ko-KR" altLang="en-US" sz="912" spc="18" kern="0" dirty="0">
+                <a:solidFill>
+                  <a:srgbClr val="FFFFFF"/>
+                </a:solidFill>
+                <a:latin typeface="Paperlogy 8 ExtraBold" pitchFamily="34" charset="0"/>
+                <a:ea typeface="Paperlogy 8 ExtraBold" pitchFamily="34" charset="-127"/>
+                <a:cs typeface="Paperlogy 8 ExtraBold" pitchFamily="34" charset="-120"/>
+              </a:rPr>
+              <a:t>03</a:t>
+            </a:r>
+            <a:endParaRPr lang="en-US" sz="912" dirty="0"/>
+          </a:p>
+        </p:txBody>
+      </p:sp>
+      <p:sp>
+        <p:nvSpPr>
+          <p:cNvPr id="80" name="3주 만에 완성, 장려상"/>
+          <p:cNvSpPr txBox="1"/>
+          <p:nvPr/>
+        </p:nvSpPr>
+        <p:spPr>
+          <a:xfrm>
+            <a:off x="902208" y="7621905"/>
+            <a:ext cx="1590199" cy="213360"/>
+          </a:xfrm>
+          <a:prstGeom prst="rect">
+            <a:avLst/>
+          </a:prstGeom>
+          <a:noFill/>
+          <a:ln/>
+        </p:spPr>
+        <p:txBody>
+          <a:bodyPr wrap="none" lIns="0" tIns="0" rIns="0" bIns="0" rtlCol="0" anchor="ctr"/>
+          <a:lstStyle/>
+          <a:p>
+            <a:pPr algn="l" indent="0" marL="0">
+              <a:buNone/>
+            </a:pPr>
+            <a:r>
+              <a:rPr lang="ko-KR" altLang="en-US" sz="1440" spc="-50" kern="0" dirty="0">
+                <a:solidFill>
+                  <a:srgbClr val="0B2147"/>
+                </a:solidFill>
+                <a:latin typeface="Paperlogy 8 ExtraBold" pitchFamily="34" charset="0"/>
+                <a:ea typeface="Paperlogy 8 ExtraBold" pitchFamily="34" charset="-127"/>
+                <a:cs typeface="Paperlogy 8 ExtraBold" pitchFamily="34" charset="-120"/>
+              </a:rPr>
+              <a:t>3주 만에 완성, 장려상</a:t>
+            </a:r>
+            <a:endParaRPr lang="en-US" sz="1440" dirty="0"/>
+          </a:p>
+        </p:txBody>
+      </p:sp>
+      <p:sp>
+        <p:nvSpPr>
+          <p:cNvPr id="81" name="리모델링 앱 개발 아이디어 시연 영상"/>
+          <p:cNvSpPr txBox="1"/>
+          <p:nvPr/>
+        </p:nvSpPr>
+        <p:spPr>
+          <a:xfrm>
+            <a:off x="1046707" y="9212961"/>
+            <a:ext cx="1783547" cy="146304"/>
+          </a:xfrm>
+          <a:prstGeom prst="rect">
+            <a:avLst/>
+          </a:prstGeom>
+          <a:noFill/>
+          <a:ln/>
+        </p:spPr>
+        <p:txBody>
+          <a:bodyPr wrap="none" lIns="0" tIns="0" rIns="0" bIns="0" rtlCol="0" anchor="ctr"/>
+          <a:lstStyle/>
+          <a:p>
+            <a:pPr algn="ctr" indent="0" marL="0">
+              <a:buNone/>
+            </a:pPr>
+            <a:r>
+              <a:rPr lang="ko-KR" altLang="en-US" sz="960" spc="-24" kern="0" dirty="0">
+                <a:solidFill>
+                  <a:srgbClr val="4B5568"/>
                 </a:solidFill>
                 <a:latin typeface="Paperlogy 6 SemiBold" pitchFamily="34" charset="0"/>
                 <a:ea typeface="Paperlogy 6 SemiBold" pitchFamily="34" charset="-127"/>
                 <a:cs typeface="Paperlogy 6 SemiBold" pitchFamily="34" charset="-120"/>
               </a:rPr>
-              <a:t>경청 · 수상작 분석 · 교수님 조언</a:t>
-            </a:r>
-            <a:endParaRPr lang="en-US" sz="1056" dirty="0"/>
-          </a:p>
-        </p:txBody>
-      </p:sp>
-      <p:sp>
-        <p:nvSpPr>
-          <p:cNvPr id="55" name="판단 기준 마련"/>
-          <p:cNvSpPr txBox="1"/>
-          <p:nvPr/>
-        </p:nvSpPr>
-        <p:spPr>
-          <a:xfrm>
-            <a:off x="3607118" y="3346609"/>
-            <a:ext cx="783717" cy="158496"/>
-          </a:xfrm>
-          <a:prstGeom prst="rect">
-            <a:avLst/>
-          </a:prstGeom>
-          <a:noFill/>
-          <a:ln/>
-        </p:spPr>
-        <p:txBody>
-          <a:bodyPr wrap="none" lIns="0" tIns="0" rIns="0" bIns="0" rtlCol="0" anchor="ctr"/>
-          <a:lstStyle/>
-          <a:p>
-            <a:pPr algn="l" indent="0" marL="0">
-              <a:buNone/>
-            </a:pPr>
-            <a:r>
-              <a:rPr lang="ko-KR" altLang="en-US" sz="1056" spc="-32" kern="0" dirty="0">
-                <a:solidFill>
-                  <a:srgbClr val="004B8D"/>
+              <a:t>리모델링 앱 개발 아이디어 시연 영상</a:t>
+            </a:r>
+            <a:endParaRPr lang="en-US" sz="960" dirty="0"/>
+          </a:p>
+        </p:txBody>
+      </p:sp>
+      <p:sp>
+        <p:nvSpPr>
+          <p:cNvPr id="82" name="장려상"/>
+          <p:cNvSpPr txBox="1"/>
+          <p:nvPr/>
+        </p:nvSpPr>
+        <p:spPr>
+          <a:xfrm>
+            <a:off x="4506420" y="8354092"/>
+            <a:ext cx="847630" cy="371856"/>
+          </a:xfrm>
+          <a:prstGeom prst="rect">
+            <a:avLst/>
+          </a:prstGeom>
+          <a:noFill/>
+          <a:ln/>
+        </p:spPr>
+        <p:txBody>
+          <a:bodyPr wrap="none" lIns="0" tIns="0" rIns="0" bIns="0" rtlCol="0" anchor="ctr"/>
+          <a:lstStyle/>
+          <a:p>
+            <a:pPr algn="l" indent="0" marL="0">
+              <a:buNone/>
+            </a:pPr>
+            <a:r>
+              <a:rPr lang="ko-KR" altLang="en-US" sz="2496" spc="-100" kern="0" dirty="0">
+                <a:solidFill>
+                  <a:srgbClr val="0B2147"/>
                 </a:solidFill>
                 <a:latin typeface="Paperlogy 8 ExtraBold" pitchFamily="34" charset="0"/>
                 <a:ea typeface="Paperlogy 8 ExtraBold" pitchFamily="34" charset="-127"/>
                 <a:cs typeface="Paperlogy 8 ExtraBold" pitchFamily="34" charset="-120"/>
               </a:rPr>
-              <a:t>판단 기준 마련</a:t>
-            </a:r>
-            <a:endParaRPr lang="en-US" sz="1056" dirty="0"/>
-          </a:p>
-        </p:txBody>
-      </p:sp>
-      <p:sp>
-        <p:nvSpPr>
-          <p:cNvPr id="56" name="‘유닛 모듈러 기반 사용자 맞춤형 리모델링 방법’선정"/>
-          <p:cNvSpPr txBox="1"/>
-          <p:nvPr/>
-        </p:nvSpPr>
-        <p:spPr>
-          <a:xfrm>
-            <a:off x="1843625" y="3846195"/>
-            <a:ext cx="4261935" cy="243840"/>
-          </a:xfrm>
-          <a:prstGeom prst="rect">
-            <a:avLst/>
-          </a:prstGeom>
-          <a:noFill/>
-          <a:ln/>
-        </p:spPr>
-        <p:txBody>
-          <a:bodyPr wrap="none" lIns="0" tIns="0" rIns="0" bIns="0" rtlCol="0" anchor="ctr"/>
-          <a:lstStyle/>
-          <a:p>
-            <a:pPr algn="ctr" indent="0" marL="0">
-              <a:buNone/>
-            </a:pPr>
-            <a:r>
-              <a:rPr lang="ko-KR" altLang="en-US" sz="1632" spc="-65" kern="0" dirty="0">
-                <a:solidFill>
-                  <a:srgbClr val="FFFFFF"/>
+              <a:t>장려상</a:t>
+            </a:r>
+            <a:endParaRPr lang="en-US" sz="2496" dirty="0"/>
+          </a:p>
+        </p:txBody>
+      </p:sp>
+      <p:sp>
+        <p:nvSpPr>
+          <p:cNvPr id="83" name="학생 BIM 경진대회 장려상"/>
+          <p:cNvSpPr txBox="1"/>
+          <p:nvPr/>
+        </p:nvSpPr>
+        <p:spPr>
+          <a:xfrm>
+            <a:off x="5680043" y="8387525"/>
+            <a:ext cx="1448949" cy="158496"/>
+          </a:xfrm>
+          <a:prstGeom prst="rect">
+            <a:avLst/>
+          </a:prstGeom>
+          <a:noFill/>
+          <a:ln/>
+        </p:spPr>
+        <p:txBody>
+          <a:bodyPr wrap="none" lIns="0" tIns="0" rIns="0" bIns="0" rtlCol="0" anchor="ctr"/>
+          <a:lstStyle/>
+          <a:p>
+            <a:pPr algn="l" indent="0" marL="0">
+              <a:buNone/>
+            </a:pPr>
+            <a:r>
+              <a:rPr lang="ko-KR" altLang="en-US" sz="1056" spc="-32" kern="0" dirty="0">
+                <a:solidFill>
+                  <a:srgbClr val="0B2147"/>
                 </a:solidFill>
                 <a:latin typeface="Paperlogy 8 ExtraBold" pitchFamily="34" charset="0"/>
                 <a:ea typeface="Paperlogy 8 ExtraBold" pitchFamily="34" charset="-127"/>
                 <a:cs typeface="Paperlogy 8 ExtraBold" pitchFamily="34" charset="-120"/>
               </a:rPr>
-              <a:t>‘유닛 모듈러 기반 사용자 맞춤형 리모델링 방법’</a:t>
-            </a:r>
-            <a:pPr algn="ctr" indent="0" marL="0">
-              <a:buNone/>
-            </a:pPr>
-            <a:r>
-              <a:rPr lang="ko-KR" altLang="en-US" sz="1632" spc="-65" kern="0" dirty="0">
-                <a:solidFill>
-                  <a:srgbClr val="45B9EC"/>
-                </a:solidFill>
-                <a:latin typeface="Paperlogy 8 ExtraBold" pitchFamily="34" charset="0"/>
-                <a:ea typeface="Paperlogy 8 ExtraBold" pitchFamily="34" charset="-127"/>
-                <a:cs typeface="Paperlogy 8 ExtraBold" pitchFamily="34" charset="-120"/>
-              </a:rPr>
-              <a:t>선정</a:t>
-            </a:r>
-            <a:endParaRPr lang="en-US" sz="1632" dirty="0"/>
-          </a:p>
-        </p:txBody>
-      </p:sp>
-      <p:sp>
-        <p:nvSpPr>
-          <p:cNvPr id="57" name="리모델링 규모에 따라 유닛 모듈러를 배치하고, 모듈 수 · 자재 물량을 "/>
-          <p:cNvSpPr txBox="1"/>
-          <p:nvPr/>
-        </p:nvSpPr>
-        <p:spPr>
-          <a:xfrm>
-            <a:off x="1888961" y="4147947"/>
-            <a:ext cx="4171167" cy="158496"/>
-          </a:xfrm>
-          <a:prstGeom prst="rect">
-            <a:avLst/>
-          </a:prstGeom>
-          <a:noFill/>
-          <a:ln/>
-        </p:spPr>
-        <p:txBody>
-          <a:bodyPr wrap="none" lIns="0" tIns="0" rIns="0" bIns="0" rtlCol="0" anchor="ctr"/>
-          <a:lstStyle/>
-          <a:p>
-            <a:pPr algn="ctr" indent="0" marL="0">
-              <a:buNone/>
-            </a:pPr>
-            <a:r>
-              <a:rPr lang="ko-KR" altLang="en-US" sz="1056" spc="-26" kern="0" dirty="0">
-                <a:solidFill>
-                  <a:srgbClr val="CED3DA"/>
+              <a:t>학생 BIM 경진대회 장려상</a:t>
+            </a:r>
+            <a:endParaRPr lang="en-US" sz="1056" dirty="0"/>
+          </a:p>
+        </p:txBody>
+      </p:sp>
+      <p:sp>
+        <p:nvSpPr>
+          <p:cNvPr id="84" name="남은 3주 내 완성"/>
+          <p:cNvSpPr txBox="1"/>
+          <p:nvPr/>
+        </p:nvSpPr>
+        <p:spPr>
+          <a:xfrm>
+            <a:off x="5680043" y="8575262"/>
+            <a:ext cx="817721" cy="146304"/>
+          </a:xfrm>
+          <a:prstGeom prst="rect">
+            <a:avLst/>
+          </a:prstGeom>
+          <a:noFill/>
+          <a:ln/>
+        </p:spPr>
+        <p:txBody>
+          <a:bodyPr wrap="none" lIns="0" tIns="0" rIns="0" bIns="0" rtlCol="0" anchor="ctr"/>
+          <a:lstStyle/>
+          <a:p>
+            <a:pPr algn="l" indent="0" marL="0">
+              <a:buNone/>
+            </a:pPr>
+            <a:r>
+              <a:rPr lang="ko-KR" altLang="en-US" sz="960" spc="-29" kern="0" dirty="0">
+                <a:solidFill>
+                  <a:srgbClr val="4B5568"/>
+                </a:solidFill>
+                <a:latin typeface="Paperlogy 6 SemiBold" pitchFamily="34" charset="0"/>
+                <a:ea typeface="Paperlogy 6 SemiBold" pitchFamily="34" charset="-127"/>
+                <a:cs typeface="Paperlogy 6 SemiBold" pitchFamily="34" charset="-120"/>
+              </a:rPr>
+              <a:t>남은 3주 내 완성</a:t>
+            </a:r>
+            <a:endParaRPr lang="en-US" sz="960" dirty="0"/>
+          </a:p>
+        </p:txBody>
+      </p:sp>
+      <p:sp>
+        <p:nvSpPr>
+          <p:cNvPr id="85" name="KEY MESSAGE"/>
+          <p:cNvSpPr txBox="1"/>
+          <p:nvPr/>
+        </p:nvSpPr>
+        <p:spPr>
+          <a:xfrm>
+            <a:off x="1182624" y="9839325"/>
+            <a:ext cx="1065686" cy="134112"/>
+          </a:xfrm>
+          <a:prstGeom prst="rect">
+            <a:avLst/>
+          </a:prstGeom>
+          <a:noFill/>
+          <a:ln/>
+        </p:spPr>
+        <p:txBody>
+          <a:bodyPr wrap="none" lIns="0" tIns="0" rIns="0" bIns="0" rtlCol="0" anchor="ctr"/>
+          <a:lstStyle/>
+          <a:p>
+            <a:pPr algn="l" indent="0" marL="0">
+              <a:buNone/>
+            </a:pPr>
+            <a:r>
+              <a:rPr lang="ko-KR" altLang="en-US" sz="864" spc="138" kern="0" dirty="0">
+                <a:solidFill>
+                  <a:srgbClr val="8FD3F5"/>
+                </a:solidFill>
+                <a:latin typeface="Paperlogy 7 Bold" pitchFamily="34" charset="0"/>
+                <a:ea typeface="Paperlogy 7 Bold" pitchFamily="34" charset="-127"/>
+                <a:cs typeface="Paperlogy 7 Bold" pitchFamily="34" charset="-120"/>
+              </a:rPr>
+              <a:t>KEY MESSAGE</a:t>
+            </a:r>
+            <a:endParaRPr lang="en-US" sz="864" dirty="0"/>
+          </a:p>
+        </p:txBody>
+      </p:sp>
+      <p:sp>
+        <p:nvSpPr>
+          <p:cNvPr id="86" name="서로 다른 사람을 하나의 공동 목표로 연결합니다"/>
+          <p:cNvSpPr txBox="1"/>
+          <p:nvPr/>
+        </p:nvSpPr>
+        <p:spPr>
+          <a:xfrm>
+            <a:off x="2358676" y="9792081"/>
+            <a:ext cx="3750951" cy="225552"/>
+          </a:xfrm>
+          <a:prstGeom prst="rect">
+            <a:avLst/>
+          </a:prstGeom>
+          <a:noFill/>
+          <a:ln/>
+        </p:spPr>
+        <p:txBody>
+          <a:bodyPr wrap="none" lIns="0" tIns="0" rIns="0" bIns="0" rtlCol="0" anchor="ctr"/>
+          <a:lstStyle/>
+          <a:p>
+            <a:pPr algn="l" indent="0" marL="0">
+              <a:buNone/>
+            </a:pPr>
+            <a:r>
+              <a:rPr lang="ko-KR" altLang="en-US" sz="1536" spc="-46" kern="0" dirty="0">
+                <a:solidFill>
+                  <a:srgbClr val="FFFFFF"/>
+                </a:solidFill>
+                <a:latin typeface="Paperlogy 7 Bold" pitchFamily="34" charset="0"/>
+                <a:ea typeface="Paperlogy 7 Bold" pitchFamily="34" charset="-127"/>
+                <a:cs typeface="Paperlogy 7 Bold" pitchFamily="34" charset="-120"/>
+              </a:rPr>
+              <a:t>서로 다른 사람을 </a:t>
+            </a:r>
+            <a:pPr algn="l" indent="0" marL="0">
+              <a:buNone/>
+            </a:pPr>
+            <a:r>
+              <a:rPr lang="ko-KR" altLang="en-US" sz="1536" spc="-46" kern="0" dirty="0">
+                <a:solidFill>
+                  <a:srgbClr val="FDBB30"/>
+                </a:solidFill>
+                <a:latin typeface="Paperlogy 7 Bold" pitchFamily="34" charset="0"/>
+                <a:ea typeface="Paperlogy 7 Bold" pitchFamily="34" charset="-127"/>
+                <a:cs typeface="Paperlogy 7 Bold" pitchFamily="34" charset="-120"/>
+              </a:rPr>
+              <a:t>하나의 공동 목표</a:t>
+            </a:r>
+            <a:pPr algn="l" indent="0" marL="0">
+              <a:buNone/>
+            </a:pPr>
+            <a:r>
+              <a:rPr lang="ko-KR" altLang="en-US" sz="1536" spc="-46" kern="0" dirty="0">
+                <a:solidFill>
+                  <a:srgbClr val="FFFFFF"/>
+                </a:solidFill>
+                <a:latin typeface="Paperlogy 7 Bold" pitchFamily="34" charset="0"/>
+                <a:ea typeface="Paperlogy 7 Bold" pitchFamily="34" charset="-127"/>
+                <a:cs typeface="Paperlogy 7 Bold" pitchFamily="34" charset="-120"/>
+              </a:rPr>
+              <a:t>로 연결합니다</a:t>
+            </a:r>
+            <a:endParaRPr lang="en-US" sz="1536" dirty="0"/>
+          </a:p>
+        </p:txBody>
+      </p:sp>
+      <p:sp>
+        <p:nvSpPr>
+          <p:cNvPr id="87" name="2026년 하반기 신입사원 공개채용"/>
+          <p:cNvSpPr txBox="1"/>
+          <p:nvPr/>
+        </p:nvSpPr>
+        <p:spPr>
+          <a:xfrm>
+            <a:off x="512064" y="10252901"/>
+            <a:ext cx="1593127" cy="134112"/>
+          </a:xfrm>
+          <a:prstGeom prst="rect">
+            <a:avLst/>
+          </a:prstGeom>
+          <a:noFill/>
+          <a:ln/>
+        </p:spPr>
+        <p:txBody>
+          <a:bodyPr wrap="none" lIns="0" tIns="0" rIns="0" bIns="0" rtlCol="0" anchor="ctr"/>
+          <a:lstStyle/>
+          <a:p>
+            <a:pPr algn="l" indent="0" marL="0">
+              <a:buNone/>
+            </a:pPr>
+            <a:r>
+              <a:rPr lang="ko-KR" altLang="en-US" sz="864" spc="-9" kern="0" dirty="0">
+                <a:solidFill>
+                  <a:srgbClr val="8691A5"/>
                 </a:solidFill>
                 <a:latin typeface="Paperlogy 5 Medium" pitchFamily="34" charset="0"/>
                 <a:ea typeface="Paperlogy 5 Medium" pitchFamily="34" charset="-127"/>
                 <a:cs typeface="Paperlogy 5 Medium" pitchFamily="34" charset="-120"/>
               </a:rPr>
-              <a:t>리모델링 규모에 따라 유닛 모듈러를 배치하고, 모듈 수 · 자재 물량을 자동 산출</a:t>
-            </a:r>
-            <a:endParaRPr lang="en-US" sz="1056" dirty="0"/>
-          </a:p>
-        </p:txBody>
-      </p:sp>
-      <p:sp>
-        <p:nvSpPr>
-          <p:cNvPr id="58" name="02"/>
-          <p:cNvSpPr txBox="1"/>
-          <p:nvPr/>
-        </p:nvSpPr>
-        <p:spPr>
-          <a:xfrm>
-            <a:off x="566642" y="4940618"/>
-            <a:ext cx="207836" cy="140208"/>
-          </a:xfrm>
-          <a:prstGeom prst="rect">
-            <a:avLst/>
-          </a:prstGeom>
-          <a:noFill/>
-          <a:ln/>
-        </p:spPr>
-        <p:txBody>
-          <a:bodyPr wrap="none" lIns="0" tIns="0" rIns="0" bIns="0" rtlCol="0" anchor="ctr"/>
-          <a:lstStyle/>
-          <a:p>
-            <a:pPr algn="l" indent="0" marL="0">
-              <a:buNone/>
-            </a:pPr>
-            <a:r>
-              <a:rPr lang="ko-KR" altLang="en-US" sz="912" spc="18" kern="0" dirty="0">
-                <a:solidFill>
-                  <a:srgbClr val="FFFFFF"/>
-                </a:solidFill>
-                <a:latin typeface="Paperlogy 8 ExtraBold" pitchFamily="34" charset="0"/>
-                <a:ea typeface="Paperlogy 8 ExtraBold" pitchFamily="34" charset="-127"/>
-                <a:cs typeface="Paperlogy 8 ExtraBold" pitchFamily="34" charset="-120"/>
-              </a:rPr>
-              <a:t>02</a:t>
-            </a:r>
-            <a:endParaRPr lang="en-US" sz="912" dirty="0"/>
-          </a:p>
-        </p:txBody>
-      </p:sp>
-      <p:sp>
-        <p:nvSpPr>
-          <p:cNvPr id="59" name="강점에 맞게 역할을 나누다"/>
-          <p:cNvSpPr txBox="1"/>
-          <p:nvPr/>
-        </p:nvSpPr>
-        <p:spPr>
-          <a:xfrm>
-            <a:off x="902208" y="4902708"/>
-            <a:ext cx="1909450" cy="213360"/>
-          </a:xfrm>
-          <a:prstGeom prst="rect">
-            <a:avLst/>
-          </a:prstGeom>
-          <a:noFill/>
-          <a:ln/>
-        </p:spPr>
-        <p:txBody>
-          <a:bodyPr wrap="none" lIns="0" tIns="0" rIns="0" bIns="0" rtlCol="0" anchor="ctr"/>
-          <a:lstStyle/>
-          <a:p>
-            <a:pPr algn="l" indent="0" marL="0">
-              <a:buNone/>
-            </a:pPr>
-            <a:r>
-              <a:rPr lang="ko-KR" altLang="en-US" sz="1440" spc="-50" kern="0" dirty="0">
-                <a:solidFill>
-                  <a:srgbClr val="0B2147"/>
-                </a:solidFill>
-                <a:latin typeface="Paperlogy 8 ExtraBold" pitchFamily="34" charset="0"/>
-                <a:ea typeface="Paperlogy 8 ExtraBold" pitchFamily="34" charset="-127"/>
-                <a:cs typeface="Paperlogy 8 ExtraBold" pitchFamily="34" charset="-120"/>
-              </a:rPr>
-              <a:t>강점에 맞게 역할을 나누다</a:t>
-            </a:r>
-            <a:endParaRPr lang="en-US" sz="1440" dirty="0"/>
-          </a:p>
-        </p:txBody>
-      </p:sp>
-      <p:sp>
-        <p:nvSpPr>
-          <p:cNvPr id="60" name="팀장 · 나"/>
-          <p:cNvSpPr txBox="1"/>
-          <p:nvPr/>
-        </p:nvSpPr>
-        <p:spPr>
-          <a:xfrm>
-            <a:off x="3796189" y="5335524"/>
-            <a:ext cx="490823" cy="158496"/>
-          </a:xfrm>
-          <a:prstGeom prst="rect">
-            <a:avLst/>
-          </a:prstGeom>
-          <a:noFill/>
-          <a:ln/>
-        </p:spPr>
-        <p:txBody>
-          <a:bodyPr wrap="none" lIns="0" tIns="0" rIns="0" bIns="0" rtlCol="0" anchor="ctr"/>
-          <a:lstStyle/>
-          <a:p>
-            <a:pPr algn="ctr" indent="0" marL="0">
-              <a:buNone/>
-            </a:pPr>
-            <a:r>
-              <a:rPr lang="ko-KR" altLang="en-US" sz="1056" spc="-21" kern="0" dirty="0">
-                <a:solidFill>
-                  <a:srgbClr val="FFFFFF"/>
-                </a:solidFill>
-                <a:latin typeface="Paperlogy 8 ExtraBold" pitchFamily="34" charset="0"/>
-                <a:ea typeface="Paperlogy 8 ExtraBold" pitchFamily="34" charset="-127"/>
-                <a:cs typeface="Paperlogy 8 ExtraBold" pitchFamily="34" charset="-120"/>
-              </a:rPr>
-              <a:t>팀장 · 나</a:t>
-            </a:r>
-            <a:endParaRPr lang="en-US" sz="1056" dirty="0"/>
-          </a:p>
-        </p:txBody>
-      </p:sp>
-      <p:sp>
-        <p:nvSpPr>
-          <p:cNvPr id="61" name="프로젝트 총괄 · Dynamo 기반 자동화 알고리즘 개발"/>
-          <p:cNvSpPr txBox="1"/>
-          <p:nvPr/>
-        </p:nvSpPr>
-        <p:spPr>
-          <a:xfrm>
-            <a:off x="2524636" y="5554313"/>
-            <a:ext cx="2899816" cy="158496"/>
-          </a:xfrm>
-          <a:prstGeom prst="rect">
-            <a:avLst/>
-          </a:prstGeom>
-          <a:noFill/>
-          <a:ln/>
-        </p:spPr>
-        <p:txBody>
-          <a:bodyPr wrap="none" lIns="0" tIns="0" rIns="0" bIns="0" rtlCol="0" anchor="ctr"/>
-          <a:lstStyle/>
-          <a:p>
-            <a:pPr algn="ctr" indent="0" marL="0">
-              <a:buNone/>
-            </a:pPr>
-            <a:r>
-              <a:rPr lang="ko-KR" altLang="en-US" sz="1056" spc="-26" kern="0" dirty="0">
-                <a:solidFill>
-                  <a:srgbClr val="DADEE3"/>
-                </a:solidFill>
-                <a:latin typeface="Paperlogy 5 Medium" pitchFamily="34" charset="0"/>
-                <a:ea typeface="Paperlogy 5 Medium" pitchFamily="34" charset="-127"/>
-                <a:cs typeface="Paperlogy 5 Medium" pitchFamily="34" charset="-120"/>
-              </a:rPr>
-              <a:t>프로젝트 총괄 · Dynamo 기반 자동화 알고리즘 개발</a:t>
-            </a:r>
-            <a:endParaRPr lang="en-US" sz="1056" dirty="0"/>
-          </a:p>
-        </p:txBody>
-      </p:sp>
-      <p:sp>
-        <p:nvSpPr>
-          <p:cNvPr id="62" name="팀원 A"/>
-          <p:cNvSpPr txBox="1"/>
-          <p:nvPr/>
-        </p:nvSpPr>
-        <p:spPr>
-          <a:xfrm>
-            <a:off x="1752981" y="6151055"/>
-            <a:ext cx="407670" cy="158496"/>
-          </a:xfrm>
-          <a:prstGeom prst="rect">
-            <a:avLst/>
-          </a:prstGeom>
-          <a:noFill/>
-          <a:ln/>
-        </p:spPr>
-        <p:txBody>
-          <a:bodyPr wrap="none" lIns="0" tIns="0" rIns="0" bIns="0" rtlCol="0" anchor="ctr"/>
-          <a:lstStyle/>
-          <a:p>
-            <a:pPr algn="ctr" indent="0" marL="0">
-              <a:buNone/>
-            </a:pPr>
-            <a:r>
-              <a:rPr lang="ko-KR" altLang="en-US" sz="1056" spc="-21" kern="0" dirty="0">
-                <a:solidFill>
-                  <a:srgbClr val="0B2147"/>
-                </a:solidFill>
-                <a:latin typeface="Paperlogy 8 ExtraBold" pitchFamily="34" charset="0"/>
-                <a:ea typeface="Paperlogy 8 ExtraBold" pitchFamily="34" charset="-127"/>
-                <a:cs typeface="Paperlogy 8 ExtraBold" pitchFamily="34" charset="-120"/>
-              </a:rPr>
-              <a:t>팀원 A</a:t>
-            </a:r>
-            <a:endParaRPr lang="en-US" sz="1056" dirty="0"/>
-          </a:p>
-        </p:txBody>
-      </p:sp>
-      <p:sp>
-        <p:nvSpPr>
-          <p:cNvPr id="63" name="유닛 모듈러 설계"/>
-          <p:cNvSpPr txBox="1"/>
-          <p:nvPr/>
-        </p:nvSpPr>
-        <p:spPr>
-          <a:xfrm>
-            <a:off x="1439762" y="6369844"/>
-            <a:ext cx="899901" cy="158496"/>
-          </a:xfrm>
-          <a:prstGeom prst="rect">
-            <a:avLst/>
-          </a:prstGeom>
-          <a:noFill/>
-          <a:ln/>
-        </p:spPr>
-        <p:txBody>
-          <a:bodyPr wrap="none" lIns="0" tIns="0" rIns="0" bIns="0" rtlCol="0" anchor="ctr"/>
-          <a:lstStyle/>
-          <a:p>
-            <a:pPr algn="ctr" indent="0" marL="0">
-              <a:buNone/>
-            </a:pPr>
-            <a:r>
-              <a:rPr lang="ko-KR" altLang="en-US" sz="1056" spc="-32" kern="0" dirty="0">
-                <a:solidFill>
-                  <a:srgbClr val="4B5568"/>
-                </a:solidFill>
-                <a:latin typeface="Paperlogy 5 Medium" pitchFamily="34" charset="0"/>
-                <a:ea typeface="Paperlogy 5 Medium" pitchFamily="34" charset="-127"/>
-                <a:cs typeface="Paperlogy 5 Medium" pitchFamily="34" charset="-120"/>
-              </a:rPr>
-              <a:t>유닛 모듈러 설계</a:t>
-            </a:r>
-            <a:endParaRPr lang="en-US" sz="1056" dirty="0"/>
-          </a:p>
-        </p:txBody>
-      </p:sp>
-      <p:sp>
-        <p:nvSpPr>
-          <p:cNvPr id="64" name="배치계획"/>
-          <p:cNvSpPr txBox="1"/>
-          <p:nvPr/>
-        </p:nvSpPr>
-        <p:spPr>
-          <a:xfrm>
-            <a:off x="1637348" y="6560249"/>
-            <a:ext cx="504825" cy="158496"/>
-          </a:xfrm>
-          <a:prstGeom prst="rect">
-            <a:avLst/>
-          </a:prstGeom>
-          <a:noFill/>
-          <a:ln/>
-        </p:spPr>
-        <p:txBody>
-          <a:bodyPr wrap="none" lIns="0" tIns="0" rIns="0" bIns="0" rtlCol="0" anchor="ctr"/>
-          <a:lstStyle/>
-          <a:p>
-            <a:pPr algn="ctr" indent="0" marL="0">
-              <a:buNone/>
-            </a:pPr>
-            <a:r>
-              <a:rPr lang="ko-KR" altLang="en-US" sz="1056" spc="-32" kern="0" dirty="0">
-                <a:solidFill>
-                  <a:srgbClr val="4B5568"/>
-                </a:solidFill>
-                <a:latin typeface="Paperlogy 5 Medium" pitchFamily="34" charset="0"/>
-                <a:ea typeface="Paperlogy 5 Medium" pitchFamily="34" charset="-127"/>
-                <a:cs typeface="Paperlogy 5 Medium" pitchFamily="34" charset="-120"/>
-              </a:rPr>
-              <a:t>배치계획</a:t>
-            </a:r>
-            <a:endParaRPr lang="en-US" sz="1056" dirty="0"/>
-          </a:p>
-        </p:txBody>
-      </p:sp>
-      <p:sp>
-        <p:nvSpPr>
-          <p:cNvPr id="65" name="팀원 B"/>
-          <p:cNvSpPr txBox="1"/>
-          <p:nvPr/>
-        </p:nvSpPr>
-        <p:spPr>
-          <a:xfrm>
-            <a:off x="3837908" y="6151055"/>
-            <a:ext cx="407480" cy="158496"/>
-          </a:xfrm>
-          <a:prstGeom prst="rect">
-            <a:avLst/>
-          </a:prstGeom>
-          <a:noFill/>
-          <a:ln/>
-        </p:spPr>
-        <p:txBody>
-          <a:bodyPr wrap="none" lIns="0" tIns="0" rIns="0" bIns="0" rtlCol="0" anchor="ctr"/>
-          <a:lstStyle/>
-          <a:p>
-            <a:pPr algn="ctr" indent="0" marL="0">
-              <a:buNone/>
-            </a:pPr>
-            <a:r>
-              <a:rPr lang="ko-KR" altLang="en-US" sz="1056" spc="-21" kern="0" dirty="0">
-                <a:solidFill>
-                  <a:srgbClr val="0B2147"/>
-                </a:solidFill>
-                <a:latin typeface="Paperlogy 8 ExtraBold" pitchFamily="34" charset="0"/>
-                <a:ea typeface="Paperlogy 8 ExtraBold" pitchFamily="34" charset="-127"/>
-                <a:cs typeface="Paperlogy 8 ExtraBold" pitchFamily="34" charset="-120"/>
-              </a:rPr>
-              <a:t>팀원 B</a:t>
-            </a:r>
-            <a:endParaRPr lang="en-US" sz="1056" dirty="0"/>
-          </a:p>
-        </p:txBody>
-      </p:sp>
-      <p:sp>
-        <p:nvSpPr>
-          <p:cNvPr id="66" name="Revit 기반 BIM 모델링"/>
-          <p:cNvSpPr txBox="1"/>
-          <p:nvPr/>
-        </p:nvSpPr>
-        <p:spPr>
-          <a:xfrm>
-            <a:off x="3322563" y="6369844"/>
-            <a:ext cx="1303963" cy="158496"/>
-          </a:xfrm>
-          <a:prstGeom prst="rect">
-            <a:avLst/>
-          </a:prstGeom>
-          <a:noFill/>
-          <a:ln/>
-        </p:spPr>
-        <p:txBody>
-          <a:bodyPr wrap="none" lIns="0" tIns="0" rIns="0" bIns="0" rtlCol="0" anchor="ctr"/>
-          <a:lstStyle/>
-          <a:p>
-            <a:pPr algn="ctr" indent="0" marL="0">
-              <a:buNone/>
-            </a:pPr>
-            <a:r>
-              <a:rPr lang="ko-KR" altLang="en-US" sz="1056" spc="-32" kern="0" dirty="0">
-                <a:solidFill>
-                  <a:srgbClr val="4B5568"/>
-                </a:solidFill>
-                <a:latin typeface="Paperlogy 5 Medium" pitchFamily="34" charset="0"/>
-                <a:ea typeface="Paperlogy 5 Medium" pitchFamily="34" charset="-127"/>
-                <a:cs typeface="Paperlogy 5 Medium" pitchFamily="34" charset="-120"/>
-              </a:rPr>
-              <a:t>Revit 기반 BIM 모델링</a:t>
-            </a:r>
-            <a:endParaRPr lang="en-US" sz="1056" dirty="0"/>
-          </a:p>
-        </p:txBody>
-      </p:sp>
-      <p:sp>
-        <p:nvSpPr>
-          <p:cNvPr id="67" name="데이터 구축"/>
-          <p:cNvSpPr txBox="1"/>
-          <p:nvPr/>
-        </p:nvSpPr>
-        <p:spPr>
-          <a:xfrm>
-            <a:off x="3652457" y="6560249"/>
-            <a:ext cx="644271" cy="158496"/>
-          </a:xfrm>
-          <a:prstGeom prst="rect">
-            <a:avLst/>
-          </a:prstGeom>
-          <a:noFill/>
-          <a:ln/>
-        </p:spPr>
-        <p:txBody>
-          <a:bodyPr wrap="none" lIns="0" tIns="0" rIns="0" bIns="0" rtlCol="0" anchor="ctr"/>
-          <a:lstStyle/>
-          <a:p>
-            <a:pPr algn="ctr" indent="0" marL="0">
-              <a:buNone/>
-            </a:pPr>
-            <a:r>
-              <a:rPr lang="ko-KR" altLang="en-US" sz="1056" spc="-32" kern="0" dirty="0">
-                <a:solidFill>
-                  <a:srgbClr val="4B5568"/>
-                </a:solidFill>
-                <a:latin typeface="Paperlogy 5 Medium" pitchFamily="34" charset="0"/>
-                <a:ea typeface="Paperlogy 5 Medium" pitchFamily="34" charset="-127"/>
-                <a:cs typeface="Paperlogy 5 Medium" pitchFamily="34" charset="-120"/>
-              </a:rPr>
-              <a:t>데이터 구축</a:t>
-            </a:r>
-            <a:endParaRPr lang="en-US" sz="1056" dirty="0"/>
-          </a:p>
-        </p:txBody>
-      </p:sp>
-      <p:sp>
-        <p:nvSpPr>
-          <p:cNvPr id="68" name="팀원 C"/>
-          <p:cNvSpPr txBox="1"/>
-          <p:nvPr/>
-        </p:nvSpPr>
-        <p:spPr>
-          <a:xfrm>
-            <a:off x="5925026" y="6151055"/>
-            <a:ext cx="402908" cy="158496"/>
-          </a:xfrm>
-          <a:prstGeom prst="rect">
-            <a:avLst/>
-          </a:prstGeom>
-          <a:noFill/>
-          <a:ln/>
-        </p:spPr>
-        <p:txBody>
-          <a:bodyPr wrap="none" lIns="0" tIns="0" rIns="0" bIns="0" rtlCol="0" anchor="ctr"/>
-          <a:lstStyle/>
-          <a:p>
-            <a:pPr algn="ctr" indent="0" marL="0">
-              <a:buNone/>
-            </a:pPr>
-            <a:r>
-              <a:rPr lang="ko-KR" altLang="en-US" sz="1056" spc="-21" kern="0" dirty="0">
-                <a:solidFill>
-                  <a:srgbClr val="0B2147"/>
-                </a:solidFill>
-                <a:latin typeface="Paperlogy 8 ExtraBold" pitchFamily="34" charset="0"/>
-                <a:ea typeface="Paperlogy 8 ExtraBold" pitchFamily="34" charset="-127"/>
-                <a:cs typeface="Paperlogy 8 ExtraBold" pitchFamily="34" charset="-120"/>
-              </a:rPr>
-              <a:t>팀원 C</a:t>
-            </a:r>
-            <a:endParaRPr lang="en-US" sz="1056" dirty="0"/>
-          </a:p>
-        </p:txBody>
-      </p:sp>
-      <p:sp>
-        <p:nvSpPr>
-          <p:cNvPr id="69" name="리모델링 적용 시나리오 구성"/>
-          <p:cNvSpPr txBox="1"/>
-          <p:nvPr/>
-        </p:nvSpPr>
-        <p:spPr>
-          <a:xfrm>
-            <a:off x="5293809" y="6369844"/>
-            <a:ext cx="1531134" cy="158496"/>
-          </a:xfrm>
-          <a:prstGeom prst="rect">
-            <a:avLst/>
-          </a:prstGeom>
-          <a:noFill/>
-          <a:ln/>
-        </p:spPr>
-        <p:txBody>
-          <a:bodyPr wrap="none" lIns="0" tIns="0" rIns="0" bIns="0" rtlCol="0" anchor="ctr"/>
-          <a:lstStyle/>
-          <a:p>
-            <a:pPr algn="ctr" indent="0" marL="0">
-              <a:buNone/>
-            </a:pPr>
-            <a:r>
-              <a:rPr lang="ko-KR" altLang="en-US" sz="1056" spc="-32" kern="0" dirty="0">
-                <a:solidFill>
-                  <a:srgbClr val="4B5568"/>
-                </a:solidFill>
-                <a:latin typeface="Paperlogy 5 Medium" pitchFamily="34" charset="0"/>
-                <a:ea typeface="Paperlogy 5 Medium" pitchFamily="34" charset="-127"/>
-                <a:cs typeface="Paperlogy 5 Medium" pitchFamily="34" charset="-120"/>
-              </a:rPr>
-              <a:t>리모델링 적용 시나리오 구성</a:t>
-            </a:r>
-            <a:endParaRPr lang="en-US" sz="1056" dirty="0"/>
-          </a:p>
-        </p:txBody>
-      </p:sp>
-      <p:sp>
-        <p:nvSpPr>
-          <p:cNvPr id="70" name="시연 영상 제작"/>
-          <p:cNvSpPr txBox="1"/>
-          <p:nvPr/>
-        </p:nvSpPr>
-        <p:spPr>
-          <a:xfrm>
-            <a:off x="5667566" y="6560249"/>
-            <a:ext cx="783717" cy="158496"/>
-          </a:xfrm>
-          <a:prstGeom prst="rect">
-            <a:avLst/>
-          </a:prstGeom>
-          <a:noFill/>
-          <a:ln/>
-        </p:spPr>
-        <p:txBody>
-          <a:bodyPr wrap="none" lIns="0" tIns="0" rIns="0" bIns="0" rtlCol="0" anchor="ctr"/>
-          <a:lstStyle/>
-          <a:p>
-            <a:pPr algn="ctr" indent="0" marL="0">
-              <a:buNone/>
-            </a:pPr>
-            <a:r>
-              <a:rPr lang="ko-KR" altLang="en-US" sz="1056" spc="-32" kern="0" dirty="0">
-                <a:solidFill>
-                  <a:srgbClr val="4B5568"/>
-                </a:solidFill>
-                <a:latin typeface="Paperlogy 5 Medium" pitchFamily="34" charset="0"/>
-                <a:ea typeface="Paperlogy 5 Medium" pitchFamily="34" charset="-127"/>
-                <a:cs typeface="Paperlogy 5 Medium" pitchFamily="34" charset="-120"/>
-              </a:rPr>
-              <a:t>시연 영상 제작</a:t>
-            </a:r>
-            <a:endParaRPr lang="en-US" sz="1056" dirty="0"/>
-          </a:p>
-        </p:txBody>
-      </p:sp>
-      <p:sp>
-        <p:nvSpPr>
-          <p:cNvPr id="71" name="이틀마다 진행상황 공유 · 피드백"/>
-          <p:cNvSpPr txBox="1"/>
-          <p:nvPr/>
-        </p:nvSpPr>
-        <p:spPr>
-          <a:xfrm>
-            <a:off x="3242405" y="6958203"/>
-            <a:ext cx="1746089" cy="158496"/>
-          </a:xfrm>
-          <a:prstGeom prst="rect">
-            <a:avLst/>
-          </a:prstGeom>
-          <a:noFill/>
-          <a:ln/>
-        </p:spPr>
-        <p:txBody>
-          <a:bodyPr wrap="none" lIns="0" tIns="0" rIns="0" bIns="0" rtlCol="0" anchor="ctr"/>
-          <a:lstStyle/>
-          <a:p>
-            <a:pPr algn="l" indent="0" marL="0">
-              <a:buNone/>
-            </a:pPr>
-            <a:r>
-              <a:rPr lang="ko-KR" altLang="en-US" sz="1056" spc="-21" kern="0" dirty="0">
-                <a:solidFill>
-                  <a:srgbClr val="0B6B33"/>
-                </a:solidFill>
-                <a:latin typeface="Paperlogy 7 Bold" pitchFamily="34" charset="0"/>
-                <a:ea typeface="Paperlogy 7 Bold" pitchFamily="34" charset="-127"/>
-                <a:cs typeface="Paperlogy 7 Bold" pitchFamily="34" charset="-120"/>
-              </a:rPr>
-              <a:t>이틀마다 진행상황 공유 · 피드백</a:t>
-            </a:r>
-            <a:endParaRPr lang="en-US" sz="1056" dirty="0"/>
-          </a:p>
-        </p:txBody>
-      </p:sp>
-      <p:sp>
-        <p:nvSpPr>
-          <p:cNvPr id="72" name="03"/>
-          <p:cNvSpPr txBox="1"/>
-          <p:nvPr/>
-        </p:nvSpPr>
-        <p:spPr>
-          <a:xfrm>
-            <a:off x="566642" y="7659815"/>
-            <a:ext cx="207836" cy="140208"/>
-          </a:xfrm>
-          <a:prstGeom prst="rect">
-            <a:avLst/>
-          </a:prstGeom>
-          <a:noFill/>
-          <a:ln/>
-        </p:spPr>
-        <p:txBody>
-          <a:bodyPr wrap="none" lIns="0" tIns="0" rIns="0" bIns="0" rtlCol="0" anchor="ctr"/>
-          <a:lstStyle/>
-          <a:p>
-            <a:pPr algn="l" indent="0" marL="0">
-              <a:buNone/>
-            </a:pPr>
-            <a:r>
-              <a:rPr lang="ko-KR" altLang="en-US" sz="912" spc="18" kern="0" dirty="0">
-                <a:solidFill>
-                  <a:srgbClr val="FFFFFF"/>
-                </a:solidFill>
-                <a:latin typeface="Paperlogy 8 ExtraBold" pitchFamily="34" charset="0"/>
-                <a:ea typeface="Paperlogy 8 ExtraBold" pitchFamily="34" charset="-127"/>
-                <a:cs typeface="Paperlogy 8 ExtraBold" pitchFamily="34" charset="-120"/>
-              </a:rPr>
-              <a:t>03</a:t>
-            </a:r>
-            <a:endParaRPr lang="en-US" sz="912" dirty="0"/>
-          </a:p>
-        </p:txBody>
-      </p:sp>
-      <p:sp>
-        <p:nvSpPr>
-          <p:cNvPr id="73" name="3주 만에 완성, 장려상"/>
-          <p:cNvSpPr txBox="1"/>
-          <p:nvPr/>
-        </p:nvSpPr>
-        <p:spPr>
-          <a:xfrm>
-            <a:off x="902208" y="7621905"/>
-            <a:ext cx="1590199" cy="213360"/>
-          </a:xfrm>
-          <a:prstGeom prst="rect">
-            <a:avLst/>
-          </a:prstGeom>
-          <a:noFill/>
-          <a:ln/>
-        </p:spPr>
-        <p:txBody>
-          <a:bodyPr wrap="none" lIns="0" tIns="0" rIns="0" bIns="0" rtlCol="0" anchor="ctr"/>
-          <a:lstStyle/>
-          <a:p>
-            <a:pPr algn="l" indent="0" marL="0">
-              <a:buNone/>
-            </a:pPr>
-            <a:r>
-              <a:rPr lang="ko-KR" altLang="en-US" sz="1440" spc="-50" kern="0" dirty="0">
-                <a:solidFill>
-                  <a:srgbClr val="0B2147"/>
-                </a:solidFill>
-                <a:latin typeface="Paperlogy 8 ExtraBold" pitchFamily="34" charset="0"/>
-                <a:ea typeface="Paperlogy 8 ExtraBold" pitchFamily="34" charset="-127"/>
-                <a:cs typeface="Paperlogy 8 ExtraBold" pitchFamily="34" charset="-120"/>
-              </a:rPr>
-              <a:t>3주 만에 완성, 장려상</a:t>
-            </a:r>
-            <a:endParaRPr lang="en-US" sz="1440" dirty="0"/>
-          </a:p>
-        </p:txBody>
-      </p:sp>
-      <p:sp>
-        <p:nvSpPr>
-          <p:cNvPr id="74" name="리모델링 앱 개발 아이디어 시연 영상"/>
-          <p:cNvSpPr txBox="1"/>
-          <p:nvPr/>
-        </p:nvSpPr>
-        <p:spPr>
-          <a:xfrm>
-            <a:off x="1046707" y="9212961"/>
-            <a:ext cx="1783547" cy="146304"/>
-          </a:xfrm>
-          <a:prstGeom prst="rect">
-            <a:avLst/>
-          </a:prstGeom>
-          <a:noFill/>
-          <a:ln/>
-        </p:spPr>
-        <p:txBody>
-          <a:bodyPr wrap="none" lIns="0" tIns="0" rIns="0" bIns="0" rtlCol="0" anchor="ctr"/>
-          <a:lstStyle/>
-          <a:p>
-            <a:pPr algn="ctr" indent="0" marL="0">
-              <a:buNone/>
-            </a:pPr>
-            <a:r>
-              <a:rPr lang="ko-KR" altLang="en-US" sz="960" spc="-24" kern="0" dirty="0">
-                <a:solidFill>
-                  <a:srgbClr val="4B5568"/>
-                </a:solidFill>
-                <a:latin typeface="Paperlogy 6 SemiBold" pitchFamily="34" charset="0"/>
-                <a:ea typeface="Paperlogy 6 SemiBold" pitchFamily="34" charset="-127"/>
-                <a:cs typeface="Paperlogy 6 SemiBold" pitchFamily="34" charset="-120"/>
-              </a:rPr>
-              <a:t>리모델링 앱 개발 아이디어 시연 영상</a:t>
-            </a:r>
-            <a:endParaRPr lang="en-US" sz="960" dirty="0"/>
-          </a:p>
-        </p:txBody>
-      </p:sp>
-      <p:sp>
-        <p:nvSpPr>
-          <p:cNvPr id="75" name="장려상"/>
-          <p:cNvSpPr txBox="1"/>
-          <p:nvPr/>
-        </p:nvSpPr>
-        <p:spPr>
-          <a:xfrm>
-            <a:off x="4506420" y="8354092"/>
-            <a:ext cx="847630" cy="371856"/>
-          </a:xfrm>
-          <a:prstGeom prst="rect">
-            <a:avLst/>
-          </a:prstGeom>
-          <a:noFill/>
-          <a:ln/>
-        </p:spPr>
-        <p:txBody>
-          <a:bodyPr wrap="none" lIns="0" tIns="0" rIns="0" bIns="0" rtlCol="0" anchor="ctr"/>
-          <a:lstStyle/>
-          <a:p>
-            <a:pPr algn="l" indent="0" marL="0">
-              <a:buNone/>
-            </a:pPr>
-            <a:r>
-              <a:rPr lang="ko-KR" altLang="en-US" sz="2496" spc="-100" kern="0" dirty="0">
-                <a:solidFill>
-                  <a:srgbClr val="0B2147"/>
-                </a:solidFill>
-                <a:latin typeface="Paperlogy 8 ExtraBold" pitchFamily="34" charset="0"/>
-                <a:ea typeface="Paperlogy 8 ExtraBold" pitchFamily="34" charset="-127"/>
-                <a:cs typeface="Paperlogy 8 ExtraBold" pitchFamily="34" charset="-120"/>
-              </a:rPr>
-              <a:t>장려상</a:t>
-            </a:r>
-            <a:endParaRPr lang="en-US" sz="2496" dirty="0"/>
-          </a:p>
-        </p:txBody>
-      </p:sp>
-      <p:sp>
-        <p:nvSpPr>
-          <p:cNvPr id="76" name="학생 BIM 경진대회 장려상"/>
-          <p:cNvSpPr txBox="1"/>
-          <p:nvPr/>
-        </p:nvSpPr>
-        <p:spPr>
-          <a:xfrm>
-            <a:off x="5680043" y="8387525"/>
-            <a:ext cx="1448949" cy="158496"/>
-          </a:xfrm>
-          <a:prstGeom prst="rect">
-            <a:avLst/>
-          </a:prstGeom>
-          <a:noFill/>
-          <a:ln/>
-        </p:spPr>
-        <p:txBody>
-          <a:bodyPr wrap="none" lIns="0" tIns="0" rIns="0" bIns="0" rtlCol="0" anchor="ctr"/>
-          <a:lstStyle/>
-          <a:p>
-            <a:pPr algn="l" indent="0" marL="0">
-              <a:buNone/>
-            </a:pPr>
-            <a:r>
-              <a:rPr lang="ko-KR" altLang="en-US" sz="1056" spc="-32" kern="0" dirty="0">
-                <a:solidFill>
-                  <a:srgbClr val="0B2147"/>
-                </a:solidFill>
-                <a:latin typeface="Paperlogy 8 ExtraBold" pitchFamily="34" charset="0"/>
-                <a:ea typeface="Paperlogy 8 ExtraBold" pitchFamily="34" charset="-127"/>
-                <a:cs typeface="Paperlogy 8 ExtraBold" pitchFamily="34" charset="-120"/>
-              </a:rPr>
-              <a:t>학생 BIM 경진대회 장려상</a:t>
-            </a:r>
-            <a:endParaRPr lang="en-US" sz="1056" dirty="0"/>
-          </a:p>
-        </p:txBody>
-      </p:sp>
-      <p:sp>
-        <p:nvSpPr>
-          <p:cNvPr id="77" name="남은 3주 내 완성"/>
-          <p:cNvSpPr txBox="1"/>
-          <p:nvPr/>
-        </p:nvSpPr>
-        <p:spPr>
-          <a:xfrm>
-            <a:off x="5680043" y="8575262"/>
-            <a:ext cx="817721" cy="146304"/>
-          </a:xfrm>
-          <a:prstGeom prst="rect">
-            <a:avLst/>
-          </a:prstGeom>
-          <a:noFill/>
-          <a:ln/>
-        </p:spPr>
-        <p:txBody>
-          <a:bodyPr wrap="none" lIns="0" tIns="0" rIns="0" bIns="0" rtlCol="0" anchor="ctr"/>
-          <a:lstStyle/>
-          <a:p>
-            <a:pPr algn="l" indent="0" marL="0">
-              <a:buNone/>
-            </a:pPr>
-            <a:r>
-              <a:rPr lang="ko-KR" altLang="en-US" sz="960" spc="-29" kern="0" dirty="0">
-                <a:solidFill>
-                  <a:srgbClr val="4B5568"/>
-                </a:solidFill>
-                <a:latin typeface="Paperlogy 6 SemiBold" pitchFamily="34" charset="0"/>
-                <a:ea typeface="Paperlogy 6 SemiBold" pitchFamily="34" charset="-127"/>
-                <a:cs typeface="Paperlogy 6 SemiBold" pitchFamily="34" charset="-120"/>
-              </a:rPr>
-              <a:t>남은 3주 내 완성</a:t>
-            </a:r>
-            <a:endParaRPr lang="en-US" sz="960" dirty="0"/>
-          </a:p>
-        </p:txBody>
-      </p:sp>
-      <p:sp>
-        <p:nvSpPr>
-          <p:cNvPr id="78" name="KEY MESSAGE"/>
-          <p:cNvSpPr txBox="1"/>
-          <p:nvPr/>
-        </p:nvSpPr>
-        <p:spPr>
-          <a:xfrm>
-            <a:off x="1182624" y="9839325"/>
-            <a:ext cx="1065686" cy="134112"/>
-          </a:xfrm>
-          <a:prstGeom prst="rect">
-            <a:avLst/>
-          </a:prstGeom>
-          <a:noFill/>
-          <a:ln/>
-        </p:spPr>
-        <p:txBody>
-          <a:bodyPr wrap="none" lIns="0" tIns="0" rIns="0" bIns="0" rtlCol="0" anchor="ctr"/>
-          <a:lstStyle/>
-          <a:p>
-            <a:pPr algn="l" indent="0" marL="0">
-              <a:buNone/>
-            </a:pPr>
-            <a:r>
-              <a:rPr lang="ko-KR" altLang="en-US" sz="864" spc="138" kern="0" dirty="0">
-                <a:solidFill>
-                  <a:srgbClr val="8FD3F5"/>
-                </a:solidFill>
-                <a:latin typeface="Paperlogy 7 Bold" pitchFamily="34" charset="0"/>
-                <a:ea typeface="Paperlogy 7 Bold" pitchFamily="34" charset="-127"/>
-                <a:cs typeface="Paperlogy 7 Bold" pitchFamily="34" charset="-120"/>
-              </a:rPr>
-              <a:t>KEY MESSAGE</a:t>
+              <a:t>2026년 하반기 신입사원 공개채용</a:t>
             </a:r>
             <a:endParaRPr lang="en-US" sz="864" dirty="0"/>
           </a:p>
@@ -3437,113 +3731,7 @@
       </p:sp>
       <p:sp>
         <p:nvSpPr>
-          <p:cNvPr id="79" name="서로 다른 사람을 하나의 공동 목표로 연결합니다"/>
-          <p:cNvSpPr txBox="1"/>
-          <p:nvPr/>
-        </p:nvSpPr>
-        <p:spPr>
-          <a:xfrm>
-            <a:off x="2358676" y="9792081"/>
-            <a:ext cx="3750951" cy="225552"/>
-          </a:xfrm>
-          <a:prstGeom prst="rect">
-            <a:avLst/>
-          </a:prstGeom>
-          <a:noFill/>
-          <a:ln/>
-        </p:spPr>
-        <p:txBody>
-          <a:bodyPr wrap="none" lIns="0" tIns="0" rIns="0" bIns="0" rtlCol="0" anchor="ctr"/>
-          <a:lstStyle/>
-          <a:p>
-            <a:pPr algn="l" indent="0" marL="0">
-              <a:buNone/>
-            </a:pPr>
-            <a:r>
-              <a:rPr lang="ko-KR" altLang="en-US" sz="1536" spc="-46" kern="0" dirty="0">
-                <a:solidFill>
-                  <a:srgbClr val="FFFFFF"/>
-                </a:solidFill>
-                <a:latin typeface="Paperlogy 7 Bold" pitchFamily="34" charset="0"/>
-                <a:ea typeface="Paperlogy 7 Bold" pitchFamily="34" charset="-127"/>
-                <a:cs typeface="Paperlogy 7 Bold" pitchFamily="34" charset="-120"/>
-              </a:rPr>
-              <a:t>서로 다른 사람을 </a:t>
-            </a:r>
-            <a:pPr algn="l" indent="0" marL="0">
-              <a:buNone/>
-            </a:pPr>
-            <a:r>
-              <a:rPr lang="ko-KR" altLang="en-US" sz="1536" spc="-46" kern="0" dirty="0">
-                <a:solidFill>
-                  <a:srgbClr val="FDBB30"/>
-                </a:solidFill>
-                <a:latin typeface="Paperlogy 7 Bold" pitchFamily="34" charset="0"/>
-                <a:ea typeface="Paperlogy 7 Bold" pitchFamily="34" charset="-127"/>
-                <a:cs typeface="Paperlogy 7 Bold" pitchFamily="34" charset="-120"/>
-              </a:rPr>
-              <a:t>하나의 공동 목표</a:t>
-            </a:r>
-            <a:pPr algn="l" indent="0" marL="0">
-              <a:buNone/>
-            </a:pPr>
-            <a:r>
-              <a:rPr lang="ko-KR" altLang="en-US" sz="1536" spc="-46" kern="0" dirty="0">
-                <a:solidFill>
-                  <a:srgbClr val="FFFFFF"/>
-                </a:solidFill>
-                <a:latin typeface="Paperlogy 7 Bold" pitchFamily="34" charset="0"/>
-                <a:ea typeface="Paperlogy 7 Bold" pitchFamily="34" charset="-127"/>
-                <a:cs typeface="Paperlogy 7 Bold" pitchFamily="34" charset="-120"/>
-              </a:rPr>
-              <a:t>로 연결합니다</a:t>
-            </a:r>
-            <a:endParaRPr lang="en-US" sz="1536" dirty="0"/>
-          </a:p>
-        </p:txBody>
-      </p:sp>
-      <p:sp>
-        <p:nvSpPr>
-          <p:cNvPr id="80" name="2026년 하반기 신입사원 공개채용"/>
-          <p:cNvSpPr txBox="1"/>
-          <p:nvPr/>
-        </p:nvSpPr>
-        <p:spPr>
-          <a:xfrm>
-            <a:off x="512064" y="10252901"/>
-            <a:ext cx="1593127" cy="134112"/>
-          </a:xfrm>
-          <a:prstGeom prst="rect">
-            <a:avLst/>
-          </a:prstGeom>
-          <a:noFill/>
-          <a:ln/>
-        </p:spPr>
-        <p:txBody>
-          <a:bodyPr wrap="none" lIns="0" tIns="0" rIns="0" bIns="0" rtlCol="0" anchor="ctr"/>
-          <a:lstStyle/>
-          <a:p>
-            <a:pPr algn="l" indent="0" marL="0">
-              <a:buNone/>
-            </a:pPr>
-            <a:r>
-              <a:rPr lang="ko-KR" altLang="en-US" sz="864" spc="-9" kern="0" dirty="0">
-                <a:solidFill>
-                  <a:srgbClr val="8691A5"/>
-                </a:solidFill>
-                <a:latin typeface="Paperlogy 5 Medium" pitchFamily="34" charset="0"/>
-                <a:ea typeface="Paperlogy 5 Medium" pitchFamily="34" charset="-127"/>
-                <a:cs typeface="Paperlogy 5 Medium" pitchFamily="34" charset="-120"/>
-              </a:rPr>
-              <a:t>2026년 하반기 신입사원 공개채용</a:t>
-            </a:r>
-            <a:endParaRPr lang="en-US" sz="864" dirty="0"/>
-          </a:p>
-        </p:txBody>
-      </p:sp>
-      <p:sp>
-        <p:nvSpPr>
-          <p:cNvPr id="81" name="01 / 03"/>
+          <p:cNvPr id="88" name="01 / 03"/>
           <p:cNvSpPr txBox="1"/>
           <p:nvPr/>
         </p:nvSpPr>

--- a/hec-pt/pptx/portrait.pptx
+++ b/hec-pt/pptx/portrait.pptx
@@ -1579,7 +1579,7 @@
         </p:blipFill>
         <p:spPr>
           <a:xfrm>
-            <a:off x="481584" y="5010404"/>
+            <a:off x="481584" y="4968113"/>
             <a:ext cx="329184" cy="329184"/>
           </a:xfrm>
           <a:prstGeom prst="rect">
@@ -1587,51 +1587,9 @@
           </a:prstGeom>
         </p:spPr>
       </p:pic>
-      <p:sp>
-        <p:nvSpPr>
-          <p:cNvPr id="25" name="p1p-lead"/>
-          <p:cNvSpPr/>
-          <p:nvPr/>
-        </p:nvSpPr>
-        <p:spPr>
-          <a:xfrm>
-            <a:off x="2023872" y="5408676"/>
-            <a:ext cx="3901440" cy="583883"/>
-          </a:xfrm>
-          <a:prstGeom prst="roundRect">
-            <a:avLst>
-              <a:gd name="adj" fmla="val 22969"/>
-            </a:avLst>
-          </a:prstGeom>
-          <a:solidFill>
-            <a:srgbClr val="0B2147"/>
-          </a:solidFill>
-          <a:ln/>
-        </p:spPr>
-      </p:sp>
-      <p:sp>
-        <p:nvSpPr>
-          <p:cNvPr id="26" name="i"/>
-          <p:cNvSpPr/>
-          <p:nvPr/>
-        </p:nvSpPr>
-        <p:spPr>
-          <a:xfrm>
-            <a:off x="3686461" y="5548503"/>
-            <a:ext cx="73152" cy="73152"/>
-          </a:xfrm>
-          <a:prstGeom prst="ellipse">
-            <a:avLst/>
-          </a:prstGeom>
-          <a:solidFill>
-            <a:srgbClr val="00A94F"/>
-          </a:solidFill>
-          <a:ln/>
-        </p:spPr>
-      </p:sp>
       <p:pic>
         <p:nvPicPr>
-          <p:cNvPr id="27" name="p1p-tree" descr="p1p-tree">    </p:cNvPr>
+          <p:cNvPr id="25" name="svg" descr="svg">    </p:cNvPr>
           <p:cNvPicPr>
             <a:picLocks noChangeAspect="1"/>
           </p:cNvPicPr>
@@ -1645,8 +1603,8 @@
         </p:blipFill>
         <p:spPr>
           <a:xfrm>
-            <a:off x="1891792" y="5992559"/>
-            <a:ext cx="4165600" cy="231648"/>
+            <a:off x="1879600" y="5695569"/>
+            <a:ext cx="4189984" cy="1349248"/>
           </a:xfrm>
           <a:prstGeom prst="rect">
             <a:avLst/>
@@ -1655,18 +1613,87 @@
       </p:pic>
       <p:sp>
         <p:nvSpPr>
-          <p:cNvPr id="28" name="p1p-mem"/>
+          <p:cNvPr id="26" name="p1p-seat t me"/>
           <p:cNvSpPr/>
           <p:nvPr/>
         </p:nvSpPr>
         <p:spPr>
           <a:xfrm>
-            <a:off x="908304" y="6230303"/>
-            <a:ext cx="1962912" cy="758095"/>
+            <a:off x="2993136" y="5372481"/>
+            <a:ext cx="1962912" cy="670560"/>
           </a:xfrm>
           <a:prstGeom prst="roundRect">
             <a:avLst>
-              <a:gd name="adj" fmla="val 16887"/>
+              <a:gd name="adj" fmla="val 19091"/>
+            </a:avLst>
+          </a:prstGeom>
+          <a:solidFill>
+            <a:srgbClr val="0B2147"/>
+          </a:solidFill>
+          <a:ln w="12192">
+            <a:solidFill>
+              <a:srgbClr val="0B2147"/>
+            </a:solidFill>
+            <a:prstDash val="solid"/>
+          </a:ln>
+        </p:spPr>
+      </p:sp>
+      <p:sp>
+        <p:nvSpPr>
+          <p:cNvPr id="27" name="i"/>
+          <p:cNvSpPr/>
+          <p:nvPr/>
+        </p:nvSpPr>
+        <p:spPr>
+          <a:xfrm>
+            <a:off x="3652457" y="5478971"/>
+            <a:ext cx="73152" cy="73152"/>
+          </a:xfrm>
+          <a:prstGeom prst="ellipse">
+            <a:avLst/>
+          </a:prstGeom>
+          <a:solidFill>
+            <a:srgbClr val="00A94F"/>
+          </a:solidFill>
+          <a:ln/>
+        </p:spPr>
+      </p:sp>
+      <p:sp>
+        <p:nvSpPr>
+          <p:cNvPr id="28" name="p1p-me"/>
+          <p:cNvSpPr/>
+          <p:nvPr/>
+        </p:nvSpPr>
+        <p:spPr>
+          <a:xfrm>
+            <a:off x="4078224" y="5436299"/>
+            <a:ext cx="218504" cy="158496"/>
+          </a:xfrm>
+          <a:prstGeom prst="roundRect">
+            <a:avLst>
+              <a:gd name="adj" fmla="val 50000"/>
+            </a:avLst>
+          </a:prstGeom>
+          <a:solidFill>
+            <a:srgbClr val="FFFFFF"/>
+          </a:solidFill>
+          <a:ln/>
+        </p:spPr>
+      </p:sp>
+      <p:sp>
+        <p:nvSpPr>
+          <p:cNvPr id="29" name="p1p-seat r"/>
+          <p:cNvSpPr/>
+          <p:nvPr/>
+        </p:nvSpPr>
+        <p:spPr>
+          <a:xfrm>
+            <a:off x="5077968" y="6036945"/>
+            <a:ext cx="1962912" cy="670560"/>
+          </a:xfrm>
+          <a:prstGeom prst="roundRect">
+            <a:avLst>
+              <a:gd name="adj" fmla="val 19091"/>
             </a:avLst>
           </a:prstGeom>
           <a:solidFill>
@@ -1682,13 +1709,13 @@
       </p:sp>
       <p:sp>
         <p:nvSpPr>
-          <p:cNvPr id="29" name="i"/>
+          <p:cNvPr id="30" name="i"/>
           <p:cNvSpPr/>
           <p:nvPr/>
         </p:nvSpPr>
         <p:spPr>
           <a:xfrm>
-            <a:off x="1643253" y="6364034"/>
+            <a:off x="5812917" y="6143435"/>
             <a:ext cx="73152" cy="73152"/>
           </a:xfrm>
           <a:prstGeom prst="ellipse">
@@ -1702,18 +1729,18 @@
       </p:sp>
       <p:sp>
         <p:nvSpPr>
-          <p:cNvPr id="30" name="p1p-mem"/>
+          <p:cNvPr id="31" name="p1p-seat b"/>
           <p:cNvSpPr/>
           <p:nvPr/>
         </p:nvSpPr>
         <p:spPr>
           <a:xfrm>
-            <a:off x="2993136" y="6230303"/>
-            <a:ext cx="1962912" cy="758095"/>
+            <a:off x="2993136" y="6701409"/>
+            <a:ext cx="1962912" cy="670560"/>
           </a:xfrm>
           <a:prstGeom prst="roundRect">
             <a:avLst>
-              <a:gd name="adj" fmla="val 16887"/>
+              <a:gd name="adj" fmla="val 19091"/>
             </a:avLst>
           </a:prstGeom>
           <a:solidFill>
@@ -1729,13 +1756,13 @@
       </p:sp>
       <p:sp>
         <p:nvSpPr>
-          <p:cNvPr id="31" name="i"/>
+          <p:cNvPr id="32" name="i"/>
           <p:cNvSpPr/>
           <p:nvPr/>
         </p:nvSpPr>
         <p:spPr>
           <a:xfrm>
-            <a:off x="3728180" y="6364034"/>
+            <a:off x="3728180" y="6807899"/>
             <a:ext cx="73152" cy="73152"/>
           </a:xfrm>
           <a:prstGeom prst="ellipse">
@@ -1749,18 +1776,18 @@
       </p:sp>
       <p:sp>
         <p:nvSpPr>
-          <p:cNvPr id="32" name="p1p-mem"/>
+          <p:cNvPr id="33" name="p1p-seat l"/>
           <p:cNvSpPr/>
           <p:nvPr/>
         </p:nvSpPr>
         <p:spPr>
           <a:xfrm>
-            <a:off x="5077968" y="6230303"/>
-            <a:ext cx="1962912" cy="758095"/>
+            <a:off x="908304" y="6036945"/>
+            <a:ext cx="1962912" cy="670560"/>
           </a:xfrm>
           <a:prstGeom prst="roundRect">
             <a:avLst>
-              <a:gd name="adj" fmla="val 16887"/>
+              <a:gd name="adj" fmla="val 19091"/>
             </a:avLst>
           </a:prstGeom>
           <a:solidFill>
@@ -1776,13 +1803,13 @@
       </p:sp>
       <p:sp>
         <p:nvSpPr>
-          <p:cNvPr id="33" name="i"/>
+          <p:cNvPr id="34" name="i"/>
           <p:cNvSpPr/>
           <p:nvPr/>
         </p:nvSpPr>
         <p:spPr>
           <a:xfrm>
-            <a:off x="5815298" y="6364034"/>
+            <a:off x="1645634" y="6143435"/>
             <a:ext cx="73152" cy="73152"/>
           </a:xfrm>
           <a:prstGeom prst="ellipse">
@@ -1790,35 +1817,13 @@
           </a:prstGeom>
           <a:solidFill>
             <a:srgbClr val="00A94F"/>
-          </a:solidFill>
-          <a:ln/>
-        </p:spPr>
-      </p:sp>
-      <p:sp>
-        <p:nvSpPr>
-          <p:cNvPr id="34" name="span"/>
-          <p:cNvSpPr/>
-          <p:nvPr/>
-        </p:nvSpPr>
-        <p:spPr>
-          <a:xfrm>
-            <a:off x="2913221" y="7079837"/>
-            <a:ext cx="2122742" cy="256032"/>
-          </a:xfrm>
-          <a:prstGeom prst="roundRect">
-            <a:avLst>
-              <a:gd name="adj" fmla="val 50000"/>
-            </a:avLst>
-          </a:prstGeom>
-          <a:solidFill>
-            <a:srgbClr val="E5F6EC"/>
           </a:solidFill>
           <a:ln/>
         </p:spPr>
       </p:sp>
       <p:pic>
         <p:nvPicPr>
-          <p:cNvPr id="35" name="svg" descr="svg">    </p:cNvPr>
+          <p:cNvPr id="35" name="p1p-goal" descr="p1p-goal">    </p:cNvPr>
           <p:cNvPicPr>
             <a:picLocks noChangeAspect="1"/>
           </p:cNvPicPr>
@@ -1832,17 +1837,39 @@
         </p:blipFill>
         <p:spPr>
           <a:xfrm>
-            <a:off x="3039205" y="7146893"/>
-            <a:ext cx="113792" cy="117856"/>
+            <a:off x="3304032" y="6181217"/>
+            <a:ext cx="1341120" cy="377952"/>
           </a:xfrm>
           <a:prstGeom prst="rect">
             <a:avLst/>
           </a:prstGeom>
         </p:spPr>
       </p:pic>
+      <p:sp>
+        <p:nvSpPr>
+          <p:cNvPr id="36" name="p1p-loop"/>
+          <p:cNvSpPr/>
+          <p:nvPr/>
+        </p:nvSpPr>
+        <p:spPr>
+          <a:xfrm>
+            <a:off x="5171504" y="7097649"/>
+            <a:ext cx="1875473" cy="243840"/>
+          </a:xfrm>
+          <a:prstGeom prst="roundRect">
+            <a:avLst>
+              <a:gd name="adj" fmla="val 50000"/>
+            </a:avLst>
+          </a:prstGeom>
+          <a:solidFill>
+            <a:srgbClr val="E5F6EC"/>
+          </a:solidFill>
+          <a:ln/>
+        </p:spPr>
+      </p:sp>
       <p:pic>
         <p:nvPicPr>
-          <p:cNvPr id="36" name="ring solid p1p-no" descr="ring solid p1p-no">    </p:cNvPr>
+          <p:cNvPr id="37" name="svg" descr="svg">    </p:cNvPr>
           <p:cNvPicPr>
             <a:picLocks noChangeAspect="1"/>
           </p:cNvPicPr>
@@ -1856,59 +1883,17 @@
         </p:blipFill>
         <p:spPr>
           <a:xfrm>
-            <a:off x="481584" y="7565009"/>
-            <a:ext cx="329184" cy="329184"/>
+            <a:off x="5269040" y="7162673"/>
+            <a:ext cx="105664" cy="109728"/>
           </a:xfrm>
           <a:prstGeom prst="rect">
             <a:avLst/>
           </a:prstGeom>
         </p:spPr>
       </p:pic>
-      <p:sp>
-        <p:nvSpPr>
-          <p:cNvPr id="37" name="p1p-vid"/>
-          <p:cNvSpPr/>
-          <p:nvPr/>
-        </p:nvSpPr>
-        <p:spPr>
-          <a:xfrm>
-            <a:off x="902208" y="7963281"/>
-            <a:ext cx="2072640" cy="1164336"/>
-          </a:xfrm>
-          <a:prstGeom prst="roundRect">
-            <a:avLst>
-              <a:gd name="adj" fmla="val 9424"/>
-            </a:avLst>
-          </a:prstGeom>
-          <a:solidFill>
-            <a:srgbClr val="0B2147"/>
-          </a:solidFill>
-          <a:ln/>
-        </p:spPr>
-      </p:sp>
-      <p:sp>
-        <p:nvSpPr>
-          <p:cNvPr id="38" name="span"/>
-          <p:cNvSpPr/>
-          <p:nvPr/>
-        </p:nvSpPr>
-        <p:spPr>
-          <a:xfrm>
-            <a:off x="1712976" y="8319897"/>
-            <a:ext cx="451104" cy="451104"/>
-          </a:xfrm>
-          <a:prstGeom prst="ellipse">
-            <a:avLst/>
-          </a:prstGeom>
-          <a:solidFill>
-            <a:srgbClr val="FFFFFF"/>
-          </a:solidFill>
-          <a:ln/>
-        </p:spPr>
-      </p:sp>
       <p:pic>
         <p:nvPicPr>
-          <p:cNvPr id="39" name="svg" descr="svg">    </p:cNvPr>
+          <p:cNvPr id="38" name="top" descr="top">    </p:cNvPr>
           <p:cNvPicPr>
             <a:picLocks noChangeAspect="1"/>
           </p:cNvPicPr>
@@ -1922,8 +1907,8 @@
         </p:blipFill>
         <p:spPr>
           <a:xfrm>
-            <a:off x="1900936" y="8476361"/>
-            <a:ext cx="121920" cy="142240"/>
+            <a:off x="2834640" y="6004433"/>
+            <a:ext cx="2279904" cy="731520"/>
           </a:xfrm>
           <a:prstGeom prst="rect">
             <a:avLst/>
@@ -1932,7 +1917,7 @@
       </p:pic>
       <p:pic>
         <p:nvPicPr>
-          <p:cNvPr id="40" name="i" descr="i">    </p:cNvPr>
+          <p:cNvPr id="39" name="ring solid p1p-no" descr="ring solid p1p-no">    </p:cNvPr>
           <p:cNvPicPr>
             <a:picLocks noChangeAspect="1"/>
           </p:cNvPicPr>
@@ -1946,17 +1931,59 @@
         </p:blipFill>
         <p:spPr>
           <a:xfrm>
-            <a:off x="3084576" y="8523097"/>
-            <a:ext cx="932688" cy="48768"/>
+            <a:off x="481584" y="7564914"/>
+            <a:ext cx="329184" cy="329184"/>
           </a:xfrm>
           <a:prstGeom prst="rect">
             <a:avLst/>
           </a:prstGeom>
         </p:spPr>
       </p:pic>
+      <p:sp>
+        <p:nvSpPr>
+          <p:cNvPr id="40" name="p1p-vid"/>
+          <p:cNvSpPr/>
+          <p:nvPr/>
+        </p:nvSpPr>
+        <p:spPr>
+          <a:xfrm>
+            <a:off x="902208" y="7963186"/>
+            <a:ext cx="2072640" cy="1164336"/>
+          </a:xfrm>
+          <a:prstGeom prst="roundRect">
+            <a:avLst>
+              <a:gd name="adj" fmla="val 9424"/>
+            </a:avLst>
+          </a:prstGeom>
+          <a:solidFill>
+            <a:srgbClr val="0B2147"/>
+          </a:solidFill>
+          <a:ln/>
+        </p:spPr>
+      </p:sp>
+      <p:sp>
+        <p:nvSpPr>
+          <p:cNvPr id="41" name="span"/>
+          <p:cNvSpPr/>
+          <p:nvPr/>
+        </p:nvSpPr>
+        <p:spPr>
+          <a:xfrm>
+            <a:off x="1712976" y="8319802"/>
+            <a:ext cx="451104" cy="451104"/>
+          </a:xfrm>
+          <a:prstGeom prst="ellipse">
+            <a:avLst/>
+          </a:prstGeom>
+          <a:solidFill>
+            <a:srgbClr val="FFFFFF"/>
+          </a:solidFill>
+          <a:ln/>
+        </p:spPr>
+      </p:sp>
       <p:pic>
         <p:nvPicPr>
-          <p:cNvPr id="41" name="svg" descr="svg">    </p:cNvPr>
+          <p:cNvPr id="42" name="svg" descr="svg">    </p:cNvPr>
           <p:cNvPicPr>
             <a:picLocks noChangeAspect="1"/>
           </p:cNvPicPr>
@@ -1970,8 +1997,8 @@
         </p:blipFill>
         <p:spPr>
           <a:xfrm>
-            <a:off x="4011771" y="8456041"/>
-            <a:ext cx="146304" cy="182880"/>
+            <a:off x="1900936" y="8476266"/>
+            <a:ext cx="121920" cy="142240"/>
           </a:xfrm>
           <a:prstGeom prst="rect">
             <a:avLst/>
@@ -1980,7 +2007,7 @@
       </p:pic>
       <p:pic>
         <p:nvPicPr>
-          <p:cNvPr id="42" name="svg" descr="svg">    </p:cNvPr>
+          <p:cNvPr id="43" name="i" descr="i">    </p:cNvPr>
           <p:cNvPicPr>
             <a:picLocks noChangeAspect="1"/>
           </p:cNvPicPr>
@@ -1994,7 +2021,55 @@
         </p:blipFill>
         <p:spPr>
           <a:xfrm>
-            <a:off x="4310475" y="7942961"/>
+            <a:off x="3084576" y="8523002"/>
+            <a:ext cx="932688" cy="48768"/>
+          </a:xfrm>
+          <a:prstGeom prst="rect">
+            <a:avLst/>
+          </a:prstGeom>
+        </p:spPr>
+      </p:pic>
+      <p:pic>
+        <p:nvPicPr>
+          <p:cNvPr id="44" name="svg" descr="svg">    </p:cNvPr>
+          <p:cNvPicPr>
+            <a:picLocks noChangeAspect="1"/>
+          </p:cNvPicPr>
+          <p:nvPr/>
+        </p:nvPicPr>
+        <p:blipFill>
+          <a:blip r:embed="rId19"/>
+          <a:stretch>
+            <a:fillRect/>
+          </a:stretch>
+        </p:blipFill>
+        <p:spPr>
+          <a:xfrm>
+            <a:off x="4011771" y="8455946"/>
+            <a:ext cx="146304" cy="182880"/>
+          </a:xfrm>
+          <a:prstGeom prst="rect">
+            <a:avLst/>
+          </a:prstGeom>
+        </p:spPr>
+      </p:pic>
+      <p:pic>
+        <p:nvPicPr>
+          <p:cNvPr id="45" name="svg" descr="svg">    </p:cNvPr>
+          <p:cNvPicPr>
+            <a:picLocks noChangeAspect="1"/>
+          </p:cNvPicPr>
+          <p:nvPr/>
+        </p:nvPicPr>
+        <p:blipFill>
+          <a:blip r:embed="rId20"/>
+          <a:stretch>
+            <a:fillRect/>
+          </a:stretch>
+        </p:blipFill>
+        <p:spPr>
+          <a:xfrm>
+            <a:off x="4310475" y="7942866"/>
             <a:ext cx="1194816" cy="1475232"/>
           </a:xfrm>
           <a:prstGeom prst="rect">
@@ -2004,7 +2079,7 @@
       </p:pic>
       <p:sp>
         <p:nvSpPr>
-          <p:cNvPr id="43" name="key"/>
+          <p:cNvPr id="46" name="key"/>
           <p:cNvSpPr/>
           <p:nvPr/>
         </p:nvSpPr>
@@ -2026,7 +2101,7 @@
       </p:sp>
       <p:sp>
         <p:nvSpPr>
-          <p:cNvPr id="44" name="i"/>
+          <p:cNvPr id="47" name="i"/>
           <p:cNvSpPr/>
           <p:nvPr/>
         </p:nvSpPr>
@@ -2046,7 +2121,7 @@
       </p:sp>
       <p:sp>
         <p:nvSpPr>
-          <p:cNvPr id="45" name="b"/>
+          <p:cNvPr id="48" name="b"/>
           <p:cNvSpPr/>
           <p:nvPr/>
         </p:nvSpPr>
@@ -2066,7 +2141,7 @@
       </p:sp>
       <p:sp>
         <p:nvSpPr>
-          <p:cNvPr id="46" name="i"/>
+          <p:cNvPr id="49" name="i"/>
           <p:cNvSpPr/>
           <p:nvPr/>
         </p:nvSpPr>
@@ -2086,7 +2161,7 @@
       </p:sp>
       <p:sp>
         <p:nvSpPr>
-          <p:cNvPr id="47" name="b"/>
+          <p:cNvPr id="50" name="b"/>
           <p:cNvSpPr/>
           <p:nvPr/>
         </p:nvSpPr>
@@ -2106,7 +2181,7 @@
       </p:sp>
       <p:sp>
         <p:nvSpPr>
-          <p:cNvPr id="48" name="i"/>
+          <p:cNvPr id="51" name="i"/>
           <p:cNvSpPr/>
           <p:nvPr/>
         </p:nvSpPr>
@@ -2126,7 +2201,7 @@
       </p:sp>
       <p:sp>
         <p:nvSpPr>
-          <p:cNvPr id="49" name="01"/>
+          <p:cNvPr id="52" name="01"/>
           <p:cNvSpPr txBox="1"/>
           <p:nvPr/>
         </p:nvSpPr>
@@ -2165,7 +2240,7 @@
       </p:sp>
       <p:sp>
         <p:nvSpPr>
-          <p:cNvPr id="50" name="PT 주제 1 · 가장 중요하게 생각하는 가치와 실천 경험"/>
+          <p:cNvPr id="53" name="PT 주제 1 · 가장 중요하게 생각하는 가치와 실천 경험"/>
           <p:cNvSpPr txBox="1"/>
           <p:nvPr/>
         </p:nvSpPr>
@@ -2204,7 +2279,7 @@
       </p:sp>
       <p:sp>
         <p:nvSpPr>
-          <p:cNvPr id="51" name="제가 가장 중요하게 생각하는 가치는"/>
+          <p:cNvPr id="54" name="제가 가장 중요하게 생각하는 가치는"/>
           <p:cNvSpPr txBox="1"/>
           <p:nvPr/>
         </p:nvSpPr>
@@ -2243,7 +2318,7 @@
       </p:sp>
       <p:sp>
         <p:nvSpPr>
-          <p:cNvPr id="52" name="공동의 목표를 공유하며"/>
+          <p:cNvPr id="55" name="공동의 목표를 공유하며"/>
           <p:cNvSpPr txBox="1"/>
           <p:nvPr/>
         </p:nvSpPr>
@@ -2296,7 +2371,7 @@
       </p:sp>
       <p:sp>
         <p:nvSpPr>
-          <p:cNvPr id="53" name="함께 성과를 만드는 협업입니다"/>
+          <p:cNvPr id="56" name="함께 성과를 만드는 협업입니다"/>
           <p:cNvSpPr txBox="1"/>
           <p:nvPr/>
         </p:nvSpPr>
@@ -2363,7 +2438,7 @@
       </p:sp>
       <p:sp>
         <p:nvSpPr>
-          <p:cNvPr id="54" name="01"/>
+          <p:cNvPr id="57" name="01"/>
           <p:cNvSpPr txBox="1"/>
           <p:nvPr/>
         </p:nvSpPr>
@@ -2402,7 +2477,7 @@
       </p:sp>
       <p:sp>
         <p:nvSpPr>
-          <p:cNvPr id="55" name="충돌을 조율해 주제를 정하다"/>
+          <p:cNvPr id="58" name="충돌을 조율해 주제를 정하다"/>
           <p:cNvSpPr txBox="1"/>
           <p:nvPr/>
         </p:nvSpPr>
@@ -2441,7 +2516,7 @@
       </p:sp>
       <p:sp>
         <p:nvSpPr>
-          <p:cNvPr id="56" name="학생 BIM 경진대회 · 4인 팀 팀장"/>
+          <p:cNvPr id="59" name="학생 BIM 경진대회 · 4인 팀 팀장"/>
           <p:cNvSpPr txBox="1"/>
           <p:nvPr/>
         </p:nvSpPr>
@@ -2480,7 +2555,7 @@
       </p:sp>
       <p:sp>
         <p:nvSpPr>
-          <p:cNvPr id="57" name="마감 3주 전까지 주제 미확정"/>
+          <p:cNvPr id="60" name="마감 3주 전까지 주제 미확정"/>
           <p:cNvSpPr txBox="1"/>
           <p:nvPr/>
         </p:nvSpPr>
@@ -2519,7 +2594,7 @@
       </p:sp>
       <p:sp>
         <p:nvSpPr>
-          <p:cNvPr id="58" name="참신성"/>
+          <p:cNvPr id="61" name="참신성"/>
           <p:cNvSpPr txBox="1"/>
           <p:nvPr/>
         </p:nvSpPr>
@@ -2558,7 +2633,7 @@
       </p:sp>
       <p:sp>
         <p:nvSpPr>
-          <p:cNvPr id="59" name="VS"/>
+          <p:cNvPr id="62" name="VS"/>
           <p:cNvSpPr txBox="1"/>
           <p:nvPr/>
         </p:nvSpPr>
@@ -2597,7 +2672,7 @@
       </p:sp>
       <p:sp>
         <p:nvSpPr>
-          <p:cNvPr id="60" name="구현 가능성"/>
+          <p:cNvPr id="63" name="구현 가능성"/>
           <p:cNvSpPr txBox="1"/>
           <p:nvPr/>
         </p:nvSpPr>
@@ -2636,7 +2711,7 @@
       </p:sp>
       <p:sp>
         <p:nvSpPr>
-          <p:cNvPr id="61" name="경청 · 수상작 분석 · 교수님 조언"/>
+          <p:cNvPr id="64" name="경청 · 수상작 분석 · 교수님 조언"/>
           <p:cNvSpPr txBox="1"/>
           <p:nvPr/>
         </p:nvSpPr>
@@ -2675,7 +2750,7 @@
       </p:sp>
       <p:sp>
         <p:nvSpPr>
-          <p:cNvPr id="62" name="판단 기준 마련"/>
+          <p:cNvPr id="65" name="판단 기준 마련"/>
           <p:cNvSpPr txBox="1"/>
           <p:nvPr/>
         </p:nvSpPr>
@@ -2714,7 +2789,7 @@
       </p:sp>
       <p:sp>
         <p:nvSpPr>
-          <p:cNvPr id="63" name="‘유닛 모듈러 기반 사용자 맞춤형 리모델링 방법’선정"/>
+          <p:cNvPr id="66" name="‘유닛 모듈러 기반 사용자 맞춤형 리모델링 방법’선정"/>
           <p:cNvSpPr txBox="1"/>
           <p:nvPr/>
         </p:nvSpPr>
@@ -2767,7 +2842,7 @@
       </p:sp>
       <p:sp>
         <p:nvSpPr>
-          <p:cNvPr id="64" name="리모델링 규모에 따라 유닛 모듈러를 배치하고, 모듈 수 · 자재 물량을 "/>
+          <p:cNvPr id="67" name="리모델링 규모에 따라 유닛 모듈러를 배치하고, 모듈 수 · 자재 물량을 "/>
           <p:cNvSpPr txBox="1"/>
           <p:nvPr/>
         </p:nvSpPr>
@@ -2806,13 +2881,13 @@
       </p:sp>
       <p:sp>
         <p:nvSpPr>
-          <p:cNvPr id="65" name="02"/>
-          <p:cNvSpPr txBox="1"/>
-          <p:nvPr/>
-        </p:nvSpPr>
-        <p:spPr>
-          <a:xfrm>
-            <a:off x="566642" y="5105210"/>
+          <p:cNvPr id="68" name="02"/>
+          <p:cNvSpPr txBox="1"/>
+          <p:nvPr/>
+        </p:nvSpPr>
+        <p:spPr>
+          <a:xfrm>
+            <a:off x="566642" y="5062919"/>
             <a:ext cx="207836" cy="140208"/>
           </a:xfrm>
           <a:prstGeom prst="rect">
@@ -2845,13 +2920,13 @@
       </p:sp>
       <p:sp>
         <p:nvSpPr>
-          <p:cNvPr id="66" name="강점에 맞게 역할을 나누다"/>
-          <p:cNvSpPr txBox="1"/>
-          <p:nvPr/>
-        </p:nvSpPr>
-        <p:spPr>
-          <a:xfrm>
-            <a:off x="902208" y="5067300"/>
+          <p:cNvPr id="69" name="강점에 맞게 역할을 나누다"/>
+          <p:cNvSpPr txBox="1"/>
+          <p:nvPr/>
+        </p:nvSpPr>
+        <p:spPr>
+          <a:xfrm>
+            <a:off x="902208" y="5025009"/>
             <a:ext cx="1909450" cy="213360"/>
           </a:xfrm>
           <a:prstGeom prst="rect">
@@ -2884,14 +2959,14 @@
       </p:sp>
       <p:sp>
         <p:nvSpPr>
-          <p:cNvPr id="67" name="팀장 · 나"/>
-          <p:cNvSpPr txBox="1"/>
-          <p:nvPr/>
-        </p:nvSpPr>
-        <p:spPr>
-          <a:xfrm>
-            <a:off x="3796189" y="5500116"/>
-            <a:ext cx="490823" cy="158496"/>
+          <p:cNvPr id="70" name="팀장"/>
+          <p:cNvSpPr txBox="1"/>
+          <p:nvPr/>
+        </p:nvSpPr>
+        <p:spPr>
+          <a:xfrm>
+            <a:off x="3762185" y="5431727"/>
+            <a:ext cx="279464" cy="158496"/>
           </a:xfrm>
           <a:prstGeom prst="rect">
             <a:avLst/>
@@ -2915,7 +2990,7 @@
                 <a:ea typeface="Paperlogy 8 ExtraBold" pitchFamily="34" charset="-127"/>
                 <a:cs typeface="Paperlogy 8 ExtraBold" pitchFamily="34" charset="-120"/>
               </a:rPr>
-              <a:t>팀장 · 나</a:t>
+              <a:t>팀장</a:t>
             </a:r>
             <a:endParaRPr lang="en-US" sz="1056" dirty="0"/>
           </a:p>
@@ -2923,14 +2998,14 @@
       </p:sp>
       <p:sp>
         <p:nvSpPr>
-          <p:cNvPr id="68" name="프로젝트 총괄 · Dynamo 기반 자동화 알고리즘 개발"/>
-          <p:cNvSpPr txBox="1"/>
-          <p:nvPr/>
-        </p:nvSpPr>
-        <p:spPr>
-          <a:xfrm>
-            <a:off x="2524636" y="5718905"/>
-            <a:ext cx="2899816" cy="158496"/>
+          <p:cNvPr id="71" name="나"/>
+          <p:cNvSpPr txBox="1"/>
+          <p:nvPr/>
+        </p:nvSpPr>
+        <p:spPr>
+          <a:xfrm>
+            <a:off x="4114800" y="5446967"/>
+            <a:ext cx="145352" cy="134112"/>
           </a:xfrm>
           <a:prstGeom prst="rect">
             <a:avLst/>
@@ -2946,7 +3021,46 @@
               <a:buNone/>
             </a:pPr>
             <a:r>
-              <a:rPr lang="ko-KR" altLang="en-US" sz="1056" spc="-26" kern="0" dirty="0">
+              <a:rPr lang="ko-KR" altLang="en-US" sz="864" dirty="0">
+                <a:solidFill>
+                  <a:srgbClr val="0B2147"/>
+                </a:solidFill>
+                <a:latin typeface="Paperlogy 8 ExtraBold" pitchFamily="34" charset="0"/>
+                <a:ea typeface="Paperlogy 8 ExtraBold" pitchFamily="34" charset="-127"/>
+                <a:cs typeface="Paperlogy 8 ExtraBold" pitchFamily="34" charset="-120"/>
+              </a:rPr>
+              <a:t>나</a:t>
+            </a:r>
+            <a:endParaRPr lang="en-US" sz="864" dirty="0"/>
+          </a:p>
+        </p:txBody>
+      </p:sp>
+      <p:sp>
+        <p:nvSpPr>
+          <p:cNvPr id="72" name="프로젝트 총괄 · Dynamo 기반"/>
+          <p:cNvSpPr txBox="1"/>
+          <p:nvPr/>
+        </p:nvSpPr>
+        <p:spPr>
+          <a:xfrm>
+            <a:off x="3133453" y="5623751"/>
+            <a:ext cx="1682279" cy="158496"/>
+          </a:xfrm>
+          <a:prstGeom prst="rect">
+            <a:avLst/>
+          </a:prstGeom>
+          <a:noFill/>
+          <a:ln/>
+        </p:spPr>
+        <p:txBody>
+          <a:bodyPr wrap="none" lIns="0" tIns="0" rIns="0" bIns="0" rtlCol="0" anchor="ctr"/>
+          <a:lstStyle/>
+          <a:p>
+            <a:pPr algn="ctr" indent="0" marL="0">
+              <a:buNone/>
+            </a:pPr>
+            <a:r>
+              <a:rPr lang="ko-KR" altLang="en-US" sz="1056" spc="-42" kern="0" dirty="0">
                 <a:solidFill>
                   <a:srgbClr val="DADEE3"/>
                 </a:solidFill>
@@ -2954,7 +3068,7 @@
                 <a:ea typeface="Paperlogy 5 Medium" pitchFamily="34" charset="-127"/>
                 <a:cs typeface="Paperlogy 5 Medium" pitchFamily="34" charset="-120"/>
               </a:rPr>
-              <a:t>프로젝트 총괄 · Dynamo 기반 자동화 알고리즘 개발</a:t>
+              <a:t>프로젝트 총괄 · Dynamo 기반</a:t>
             </a:r>
             <a:endParaRPr lang="en-US" sz="1056" dirty="0"/>
           </a:p>
@@ -2962,13 +3076,52 @@
       </p:sp>
       <p:sp>
         <p:nvSpPr>
-          <p:cNvPr id="69" name="팀원 A"/>
-          <p:cNvSpPr txBox="1"/>
-          <p:nvPr/>
-        </p:nvSpPr>
-        <p:spPr>
-          <a:xfrm>
-            <a:off x="1752981" y="6315647"/>
+          <p:cNvPr id="73" name="자동화 알고리즘 개발"/>
+          <p:cNvSpPr txBox="1"/>
+          <p:nvPr/>
+        </p:nvSpPr>
+        <p:spPr>
+          <a:xfrm>
+            <a:off x="3411611" y="5800725"/>
+            <a:ext cx="1125962" cy="158496"/>
+          </a:xfrm>
+          <a:prstGeom prst="rect">
+            <a:avLst/>
+          </a:prstGeom>
+          <a:noFill/>
+          <a:ln/>
+        </p:spPr>
+        <p:txBody>
+          <a:bodyPr wrap="none" lIns="0" tIns="0" rIns="0" bIns="0" rtlCol="0" anchor="ctr"/>
+          <a:lstStyle/>
+          <a:p>
+            <a:pPr algn="ctr" indent="0" marL="0">
+              <a:buNone/>
+            </a:pPr>
+            <a:r>
+              <a:rPr lang="ko-KR" altLang="en-US" sz="1056" spc="-42" kern="0" dirty="0">
+                <a:solidFill>
+                  <a:srgbClr val="DADEE3"/>
+                </a:solidFill>
+                <a:latin typeface="Paperlogy 5 Medium" pitchFamily="34" charset="0"/>
+                <a:ea typeface="Paperlogy 5 Medium" pitchFamily="34" charset="-127"/>
+                <a:cs typeface="Paperlogy 5 Medium" pitchFamily="34" charset="-120"/>
+              </a:rPr>
+              <a:t>자동화 알고리즘 개발</a:t>
+            </a:r>
+            <a:endParaRPr lang="en-US" sz="1056" dirty="0"/>
+          </a:p>
+        </p:txBody>
+      </p:sp>
+      <p:sp>
+        <p:nvSpPr>
+          <p:cNvPr id="74" name="팀원 A"/>
+          <p:cNvSpPr txBox="1"/>
+          <p:nvPr/>
+        </p:nvSpPr>
+        <p:spPr>
+          <a:xfrm>
+            <a:off x="5922645" y="6096191"/>
             <a:ext cx="407670" cy="158496"/>
           </a:xfrm>
           <a:prstGeom prst="rect">
@@ -3001,14 +3154,14 @@
       </p:sp>
       <p:sp>
         <p:nvSpPr>
-          <p:cNvPr id="70" name="유닛 모듈러 설계"/>
-          <p:cNvSpPr txBox="1"/>
-          <p:nvPr/>
-        </p:nvSpPr>
-        <p:spPr>
-          <a:xfrm>
-            <a:off x="1439762" y="6534436"/>
-            <a:ext cx="899901" cy="158496"/>
+          <p:cNvPr id="75" name="유닛 모듈러 설계"/>
+          <p:cNvSpPr txBox="1"/>
+          <p:nvPr/>
+        </p:nvSpPr>
+        <p:spPr>
+          <a:xfrm>
+            <a:off x="5615885" y="6288215"/>
+            <a:ext cx="887078" cy="158496"/>
           </a:xfrm>
           <a:prstGeom prst="rect">
             <a:avLst/>
@@ -3024,7 +3177,7 @@
               <a:buNone/>
             </a:pPr>
             <a:r>
-              <a:rPr lang="ko-KR" altLang="en-US" sz="1056" spc="-32" kern="0" dirty="0">
+              <a:rPr lang="ko-KR" altLang="en-US" sz="1056" spc="-42" kern="0" dirty="0">
                 <a:solidFill>
                   <a:srgbClr val="4B5568"/>
                 </a:solidFill>
@@ -3040,14 +3193,14 @@
       </p:sp>
       <p:sp>
         <p:nvSpPr>
-          <p:cNvPr id="71" name="배치계획"/>
-          <p:cNvSpPr txBox="1"/>
-          <p:nvPr/>
-        </p:nvSpPr>
-        <p:spPr>
-          <a:xfrm>
-            <a:off x="1637348" y="6724841"/>
-            <a:ext cx="504825" cy="158496"/>
+          <p:cNvPr id="76" name="배치계획"/>
+          <p:cNvSpPr txBox="1"/>
+          <p:nvPr/>
+        </p:nvSpPr>
+        <p:spPr>
+          <a:xfrm>
+            <a:off x="5809679" y="6465189"/>
+            <a:ext cx="499396" cy="158496"/>
           </a:xfrm>
           <a:prstGeom prst="rect">
             <a:avLst/>
@@ -3063,7 +3216,7 @@
               <a:buNone/>
             </a:pPr>
             <a:r>
-              <a:rPr lang="ko-KR" altLang="en-US" sz="1056" spc="-32" kern="0" dirty="0">
+              <a:rPr lang="ko-KR" altLang="en-US" sz="1056" spc="-42" kern="0" dirty="0">
                 <a:solidFill>
                   <a:srgbClr val="4B5568"/>
                 </a:solidFill>
@@ -3079,13 +3232,13 @@
       </p:sp>
       <p:sp>
         <p:nvSpPr>
-          <p:cNvPr id="72" name="팀원 B"/>
-          <p:cNvSpPr txBox="1"/>
-          <p:nvPr/>
-        </p:nvSpPr>
-        <p:spPr>
-          <a:xfrm>
-            <a:off x="3837908" y="6315647"/>
+          <p:cNvPr id="77" name="팀원 B"/>
+          <p:cNvSpPr txBox="1"/>
+          <p:nvPr/>
+        </p:nvSpPr>
+        <p:spPr>
+          <a:xfrm>
+            <a:off x="3837908" y="6760655"/>
             <a:ext cx="407480" cy="158496"/>
           </a:xfrm>
           <a:prstGeom prst="rect">
@@ -3118,14 +3271,14 @@
       </p:sp>
       <p:sp>
         <p:nvSpPr>
-          <p:cNvPr id="73" name="Revit 기반 BIM 모델링"/>
-          <p:cNvSpPr txBox="1"/>
-          <p:nvPr/>
-        </p:nvSpPr>
-        <p:spPr>
-          <a:xfrm>
-            <a:off x="3322563" y="6534436"/>
-            <a:ext cx="1303963" cy="158496"/>
+          <p:cNvPr id="78" name="Revit 기반 BIM 모델링"/>
+          <p:cNvSpPr txBox="1"/>
+          <p:nvPr/>
+        </p:nvSpPr>
+        <p:spPr>
+          <a:xfrm>
+            <a:off x="3333969" y="6952679"/>
+            <a:ext cx="1281246" cy="158496"/>
           </a:xfrm>
           <a:prstGeom prst="rect">
             <a:avLst/>
@@ -3141,7 +3294,7 @@
               <a:buNone/>
             </a:pPr>
             <a:r>
-              <a:rPr lang="ko-KR" altLang="en-US" sz="1056" spc="-32" kern="0" dirty="0">
+              <a:rPr lang="ko-KR" altLang="en-US" sz="1056" spc="-42" kern="0" dirty="0">
                 <a:solidFill>
                   <a:srgbClr val="4B5568"/>
                 </a:solidFill>
@@ -3157,14 +3310,14 @@
       </p:sp>
       <p:sp>
         <p:nvSpPr>
-          <p:cNvPr id="74" name="데이터 구축"/>
-          <p:cNvSpPr txBox="1"/>
-          <p:nvPr/>
-        </p:nvSpPr>
-        <p:spPr>
-          <a:xfrm>
-            <a:off x="3652457" y="6724841"/>
-            <a:ext cx="644271" cy="158496"/>
+          <p:cNvPr id="79" name="데이터 구축"/>
+          <p:cNvSpPr txBox="1"/>
+          <p:nvPr/>
+        </p:nvSpPr>
+        <p:spPr>
+          <a:xfrm>
+            <a:off x="3656457" y="7129653"/>
+            <a:ext cx="636270" cy="158496"/>
           </a:xfrm>
           <a:prstGeom prst="rect">
             <a:avLst/>
@@ -3180,7 +3333,7 @@
               <a:buNone/>
             </a:pPr>
             <a:r>
-              <a:rPr lang="ko-KR" altLang="en-US" sz="1056" spc="-32" kern="0" dirty="0">
+              <a:rPr lang="ko-KR" altLang="en-US" sz="1056" spc="-42" kern="0" dirty="0">
                 <a:solidFill>
                   <a:srgbClr val="4B5568"/>
                 </a:solidFill>
@@ -3196,13 +3349,13 @@
       </p:sp>
       <p:sp>
         <p:nvSpPr>
-          <p:cNvPr id="75" name="팀원 C"/>
-          <p:cNvSpPr txBox="1"/>
-          <p:nvPr/>
-        </p:nvSpPr>
-        <p:spPr>
-          <a:xfrm>
-            <a:off x="5925026" y="6315647"/>
+          <p:cNvPr id="80" name="팀원 C"/>
+          <p:cNvSpPr txBox="1"/>
+          <p:nvPr/>
+        </p:nvSpPr>
+        <p:spPr>
+          <a:xfrm>
+            <a:off x="1755362" y="6096191"/>
             <a:ext cx="402908" cy="158496"/>
           </a:xfrm>
           <a:prstGeom prst="rect">
@@ -3235,14 +3388,14 @@
       </p:sp>
       <p:sp>
         <p:nvSpPr>
-          <p:cNvPr id="76" name="리모델링 적용 시나리오 구성"/>
-          <p:cNvSpPr txBox="1"/>
-          <p:nvPr/>
-        </p:nvSpPr>
-        <p:spPr>
-          <a:xfrm>
-            <a:off x="5293809" y="6534436"/>
-            <a:ext cx="1531134" cy="158496"/>
+          <p:cNvPr id="81" name="리모델링 적용 시나리오 구성"/>
+          <p:cNvSpPr txBox="1"/>
+          <p:nvPr/>
+        </p:nvSpPr>
+        <p:spPr>
+          <a:xfrm>
+            <a:off x="1134848" y="6288215"/>
+            <a:ext cx="1509730" cy="158496"/>
           </a:xfrm>
           <a:prstGeom prst="rect">
             <a:avLst/>
@@ -3258,7 +3411,7 @@
               <a:buNone/>
             </a:pPr>
             <a:r>
-              <a:rPr lang="ko-KR" altLang="en-US" sz="1056" spc="-32" kern="0" dirty="0">
+              <a:rPr lang="ko-KR" altLang="en-US" sz="1056" spc="-42" kern="0" dirty="0">
                 <a:solidFill>
                   <a:srgbClr val="4B5568"/>
                 </a:solidFill>
@@ -3274,14 +3427,14 @@
       </p:sp>
       <p:sp>
         <p:nvSpPr>
-          <p:cNvPr id="77" name="시연 영상 제작"/>
-          <p:cNvSpPr txBox="1"/>
-          <p:nvPr/>
-        </p:nvSpPr>
-        <p:spPr>
-          <a:xfrm>
-            <a:off x="5667566" y="6724841"/>
-            <a:ext cx="783717" cy="158496"/>
+          <p:cNvPr id="82" name="시연 영상 제작"/>
+          <p:cNvSpPr txBox="1"/>
+          <p:nvPr/>
+        </p:nvSpPr>
+        <p:spPr>
+          <a:xfrm>
+            <a:off x="1503140" y="6465189"/>
+            <a:ext cx="773049" cy="158496"/>
           </a:xfrm>
           <a:prstGeom prst="rect">
             <a:avLst/>
@@ -3297,7 +3450,7 @@
               <a:buNone/>
             </a:pPr>
             <a:r>
-              <a:rPr lang="ko-KR" altLang="en-US" sz="1056" spc="-32" kern="0" dirty="0">
+              <a:rPr lang="ko-KR" altLang="en-US" sz="1056" spc="-42" kern="0" dirty="0">
                 <a:solidFill>
                   <a:srgbClr val="4B5568"/>
                 </a:solidFill>
@@ -3313,30 +3466,108 @@
       </p:sp>
       <p:sp>
         <p:nvSpPr>
-          <p:cNvPr id="78" name="이틀마다 진행상황 공유 · 피드백"/>
-          <p:cNvSpPr txBox="1"/>
-          <p:nvPr/>
-        </p:nvSpPr>
-        <p:spPr>
-          <a:xfrm>
-            <a:off x="3242405" y="7122795"/>
-            <a:ext cx="1746089" cy="158496"/>
-          </a:xfrm>
-          <a:prstGeom prst="rect">
-            <a:avLst/>
-          </a:prstGeom>
-          <a:noFill/>
-          <a:ln/>
-        </p:spPr>
-        <p:txBody>
-          <a:bodyPr wrap="none" lIns="0" tIns="0" rIns="0" bIns="0" rtlCol="0" anchor="ctr"/>
-          <a:lstStyle/>
-          <a:p>
-            <a:pPr algn="l" indent="0" marL="0">
+          <p:cNvPr id="83" name="공동 목표"/>
+          <p:cNvSpPr txBox="1"/>
+          <p:nvPr/>
+        </p:nvSpPr>
+        <p:spPr>
+          <a:xfrm>
+            <a:off x="3706082" y="6219539"/>
+            <a:ext cx="537020" cy="158496"/>
+          </a:xfrm>
+          <a:prstGeom prst="rect">
+            <a:avLst/>
+          </a:prstGeom>
+          <a:noFill/>
+          <a:ln/>
+        </p:spPr>
+        <p:txBody>
+          <a:bodyPr wrap="none" lIns="0" tIns="0" rIns="0" bIns="0" rtlCol="0" anchor="ctr"/>
+          <a:lstStyle/>
+          <a:p>
+            <a:pPr algn="ctr" indent="0" marL="0">
               <a:buNone/>
             </a:pPr>
             <a:r>
               <a:rPr lang="ko-KR" altLang="en-US" sz="1056" spc="-21" kern="0" dirty="0">
+                <a:solidFill>
+                  <a:srgbClr val="FFFFFF"/>
+                </a:solidFill>
+                <a:latin typeface="Paperlogy 8 ExtraBold" pitchFamily="34" charset="0"/>
+                <a:ea typeface="Paperlogy 8 ExtraBold" pitchFamily="34" charset="-127"/>
+                <a:cs typeface="Paperlogy 8 ExtraBold" pitchFamily="34" charset="-120"/>
+              </a:rPr>
+              <a:t>공동 목표</a:t>
+            </a:r>
+            <a:endParaRPr lang="en-US" sz="1056" dirty="0"/>
+          </a:p>
+        </p:txBody>
+      </p:sp>
+      <p:sp>
+        <p:nvSpPr>
+          <p:cNvPr id="84" name="3주 내 완성"/>
+          <p:cNvSpPr txBox="1"/>
+          <p:nvPr/>
+        </p:nvSpPr>
+        <p:spPr>
+          <a:xfrm>
+            <a:off x="3690366" y="6379178"/>
+            <a:ext cx="568452" cy="140208"/>
+          </a:xfrm>
+          <a:prstGeom prst="rect">
+            <a:avLst/>
+          </a:prstGeom>
+          <a:noFill/>
+          <a:ln/>
+        </p:spPr>
+        <p:txBody>
+          <a:bodyPr wrap="none" lIns="0" tIns="0" rIns="0" bIns="0" rtlCol="0" anchor="ctr"/>
+          <a:lstStyle/>
+          <a:p>
+            <a:pPr algn="ctr" indent="0" marL="0">
+              <a:buNone/>
+            </a:pPr>
+            <a:r>
+              <a:rPr lang="ko-KR" altLang="en-US" sz="912" spc="-18" kern="0" dirty="0">
+                <a:solidFill>
+                  <a:srgbClr val="E5EFFB"/>
+                </a:solidFill>
+                <a:latin typeface="Paperlogy 6 SemiBold" pitchFamily="34" charset="0"/>
+                <a:ea typeface="Paperlogy 6 SemiBold" pitchFamily="34" charset="-127"/>
+                <a:cs typeface="Paperlogy 6 SemiBold" pitchFamily="34" charset="-120"/>
+              </a:rPr>
+              <a:t>3주 내 완성</a:t>
+            </a:r>
+            <a:endParaRPr lang="en-US" sz="912" dirty="0"/>
+          </a:p>
+        </p:txBody>
+      </p:sp>
+      <p:sp>
+        <p:nvSpPr>
+          <p:cNvPr id="85" name="이틀마다 진행상황 공유 · 피드백"/>
+          <p:cNvSpPr txBox="1"/>
+          <p:nvPr/>
+        </p:nvSpPr>
+        <p:spPr>
+          <a:xfrm>
+            <a:off x="5439728" y="7143369"/>
+            <a:ext cx="1587372" cy="146304"/>
+          </a:xfrm>
+          <a:prstGeom prst="rect">
+            <a:avLst/>
+          </a:prstGeom>
+          <a:noFill/>
+          <a:ln/>
+        </p:spPr>
+        <p:txBody>
+          <a:bodyPr wrap="none" lIns="0" tIns="0" rIns="0" bIns="0" rtlCol="0" anchor="ctr"/>
+          <a:lstStyle/>
+          <a:p>
+            <a:pPr algn="l" indent="0" marL="0">
+              <a:buNone/>
+            </a:pPr>
+            <a:r>
+              <a:rPr lang="ko-KR" altLang="en-US" sz="960" spc="-19" kern="0" dirty="0">
                 <a:solidFill>
                   <a:srgbClr val="0B6B33"/>
                 </a:solidFill>
@@ -3346,19 +3577,19 @@
               </a:rPr>
               <a:t>이틀마다 진행상황 공유 · 피드백</a:t>
             </a:r>
-            <a:endParaRPr lang="en-US" sz="1056" dirty="0"/>
-          </a:p>
-        </p:txBody>
-      </p:sp>
-      <p:sp>
-        <p:nvSpPr>
-          <p:cNvPr id="79" name="03"/>
-          <p:cNvSpPr txBox="1"/>
-          <p:nvPr/>
-        </p:nvSpPr>
-        <p:spPr>
-          <a:xfrm>
-            <a:off x="566642" y="7659815"/>
+            <a:endParaRPr lang="en-US" sz="960" dirty="0"/>
+          </a:p>
+        </p:txBody>
+      </p:sp>
+      <p:sp>
+        <p:nvSpPr>
+          <p:cNvPr id="86" name="03"/>
+          <p:cNvSpPr txBox="1"/>
+          <p:nvPr/>
+        </p:nvSpPr>
+        <p:spPr>
+          <a:xfrm>
+            <a:off x="566642" y="7659719"/>
             <a:ext cx="207836" cy="140208"/>
           </a:xfrm>
           <a:prstGeom prst="rect">
@@ -3391,13 +3622,13 @@
       </p:sp>
       <p:sp>
         <p:nvSpPr>
-          <p:cNvPr id="80" name="3주 만에 완성, 장려상"/>
-          <p:cNvSpPr txBox="1"/>
-          <p:nvPr/>
-        </p:nvSpPr>
-        <p:spPr>
-          <a:xfrm>
-            <a:off x="902208" y="7621905"/>
+          <p:cNvPr id="87" name="3주 만에 완성, 장려상"/>
+          <p:cNvSpPr txBox="1"/>
+          <p:nvPr/>
+        </p:nvSpPr>
+        <p:spPr>
+          <a:xfrm>
+            <a:off x="902208" y="7621810"/>
             <a:ext cx="1590199" cy="213360"/>
           </a:xfrm>
           <a:prstGeom prst="rect">
@@ -3430,13 +3661,13 @@
       </p:sp>
       <p:sp>
         <p:nvSpPr>
-          <p:cNvPr id="81" name="리모델링 앱 개발 아이디어 시연 영상"/>
-          <p:cNvSpPr txBox="1"/>
-          <p:nvPr/>
-        </p:nvSpPr>
-        <p:spPr>
-          <a:xfrm>
-            <a:off x="1046707" y="9212961"/>
+          <p:cNvPr id="88" name="리모델링 앱 개발 아이디어 시연 영상"/>
+          <p:cNvSpPr txBox="1"/>
+          <p:nvPr/>
+        </p:nvSpPr>
+        <p:spPr>
+          <a:xfrm>
+            <a:off x="1046707" y="9212866"/>
             <a:ext cx="1783547" cy="146304"/>
           </a:xfrm>
           <a:prstGeom prst="rect">
@@ -3469,13 +3700,13 @@
       </p:sp>
       <p:sp>
         <p:nvSpPr>
-          <p:cNvPr id="82" name="장려상"/>
-          <p:cNvSpPr txBox="1"/>
-          <p:nvPr/>
-        </p:nvSpPr>
-        <p:spPr>
-          <a:xfrm>
-            <a:off x="4506420" y="8354092"/>
+          <p:cNvPr id="89" name="장려상"/>
+          <p:cNvSpPr txBox="1"/>
+          <p:nvPr/>
+        </p:nvSpPr>
+        <p:spPr>
+          <a:xfrm>
+            <a:off x="4506420" y="8353997"/>
             <a:ext cx="847630" cy="371856"/>
           </a:xfrm>
           <a:prstGeom prst="rect">
@@ -3508,13 +3739,13 @@
       </p:sp>
       <p:sp>
         <p:nvSpPr>
-          <p:cNvPr id="83" name="학생 BIM 경진대회 장려상"/>
-          <p:cNvSpPr txBox="1"/>
-          <p:nvPr/>
-        </p:nvSpPr>
-        <p:spPr>
-          <a:xfrm>
-            <a:off x="5680043" y="8387525"/>
+          <p:cNvPr id="90" name="학생 BIM 경진대회 장려상"/>
+          <p:cNvSpPr txBox="1"/>
+          <p:nvPr/>
+        </p:nvSpPr>
+        <p:spPr>
+          <a:xfrm>
+            <a:off x="5680043" y="8387429"/>
             <a:ext cx="1448949" cy="158496"/>
           </a:xfrm>
           <a:prstGeom prst="rect">
@@ -3547,13 +3778,13 @@
       </p:sp>
       <p:sp>
         <p:nvSpPr>
-          <p:cNvPr id="84" name="남은 3주 내 완성"/>
-          <p:cNvSpPr txBox="1"/>
-          <p:nvPr/>
-        </p:nvSpPr>
-        <p:spPr>
-          <a:xfrm>
-            <a:off x="5680043" y="8575262"/>
+          <p:cNvPr id="91" name="남은 3주 내 완성"/>
+          <p:cNvSpPr txBox="1"/>
+          <p:nvPr/>
+        </p:nvSpPr>
+        <p:spPr>
+          <a:xfrm>
+            <a:off x="5680043" y="8575167"/>
             <a:ext cx="817721" cy="146304"/>
           </a:xfrm>
           <a:prstGeom prst="rect">
@@ -3586,7 +3817,7 @@
       </p:sp>
       <p:sp>
         <p:nvSpPr>
-          <p:cNvPr id="85" name="KEY MESSAGE"/>
+          <p:cNvPr id="92" name="KEY MESSAGE"/>
           <p:cNvSpPr txBox="1"/>
           <p:nvPr/>
         </p:nvSpPr>
@@ -3625,7 +3856,7 @@
       </p:sp>
       <p:sp>
         <p:nvSpPr>
-          <p:cNvPr id="86" name="서로 다른 사람을 하나의 공동 목표로 연결합니다"/>
+          <p:cNvPr id="93" name="서로 다른 사람을 하나의 공동 목표로 연결합니다"/>
           <p:cNvSpPr txBox="1"/>
           <p:nvPr/>
         </p:nvSpPr>
@@ -3692,7 +3923,7 @@
       </p:sp>
       <p:sp>
         <p:nvSpPr>
-          <p:cNvPr id="87" name="2026년 하반기 신입사원 공개채용"/>
+          <p:cNvPr id="94" name="2026년 하반기 신입사원 공개채용"/>
           <p:cNvSpPr txBox="1"/>
           <p:nvPr/>
         </p:nvSpPr>
@@ -3731,7 +3962,7 @@
       </p:sp>
       <p:sp>
         <p:nvSpPr>
-          <p:cNvPr id="88" name="01 / 03"/>
+          <p:cNvPr id="95" name="01 / 03"/>
           <p:cNvSpPr txBox="1"/>
           <p:nvPr/>
         </p:nvSpPr>
